--- a/downloads/presentations/modules/epi-310.pptx
+++ b/downloads/presentations/modules/epi-310.pptx
@@ -614,7 +614,8 @@
               <a:t>Topic Deep Dive
 The first step in this topic is to define the decision or workflow clearly. Staff should identify who is affected, what data are used, what AI output is produced, who reviews the output, and what action may follow. This prevents the module from becoming abstract and anchors the work in public health practice.
 The second step is to assign responsibilities. AI-supported workflows often cross program, IT, legal, privacy, communications, procurement, and leadership boundaries. Responsibilities should be named by role rather than assumed. The artifact should specify who prepares materials, who reviews risks, who approves use, who monitors performance, and who can pause or revise the workflow.
-The third step is to define evidence. Responsible AI depends on more than policy statements. Agencies need records that show what was reviewed, what decisions were made, what safeguards were applied, what incidents occurred, and how the workflow changed over time. Evidence also supports audits, public records review, quality improvement, and leadership accountability.</a:t>
+The third step is to define evidence. Responsible AI depends on more than policy statements. Agencies need records that show what was reviewed, what decisions were made, what safeguards were applied, what incidents occurred, and how the workflow changed over time. Evidence also supports audits, public records review, quality improvement, and leadership accountability.
+Application guidance: Connect the concept to public health purpose, responsible use, required safeguards, documentation, and the next action a department should take.</a:t>
             </a:r>
             <a:endParaRPr lang="en-US" dirty="0"/>
           </a:p>
@@ -705,7 +706,8 @@
               <a:t>Risks, Failure Modes, and Guardrails
 A common failure mode is treating the topic as a one-time checklist. AI risks can change when data sources, models, vendors, policies, users, or public expectations change. A guardrail is to define review intervals and change triggers.
 Another failure mode is unclear ownership. When everyone is responsible in general, no one may be responsible in practice. A guardrail is to assign an accountability owner and name escalation pathways.
-A third failure mode is relying on vendor claims or informal staff confidence without documentation. A guardrail is to require evidence artifacts that can be reviewed by governance, leadership, privacy, legal, equity, security, or program teams.</a:t>
+A third failure mode is relying on vendor claims or informal staff confidence without documentation. A guardrail is to require evidence artifacts that can be reviewed by governance, leadership, privacy, legal, equity, security, or program teams.
+Application guidance: Identify what could go wrong, who could be affected, what safeguards are needed, and what evidence should be reviewed before use expands.</a:t>
             </a:r>
             <a:endParaRPr lang="en-US" dirty="0"/>
           </a:p>
@@ -794,7 +796,8 @@
             <a:r>
               <a:rPr lang="en-US" dirty="0"/>
               <a:t>Application to AI-Supported Workflows
-This topic applies across generative AI, predictive analytics, NLP, RAG, automation, and agentic workflows. The more sensitive the data, the more consequential the output, or the more automated the action, the stronger the documentation, review, and monitoring expectations should be.</a:t>
+This topic applies across generative AI, predictive analytics, NLP, RAG, automation, and agentic workflows. The more sensitive the data, the more consequential the output, or the more automated the action, the stronger the documentation, review, and monitoring expectations should be.
+Application guidance: Use the concept to clarify workflow changes, dependencies, staffing, procurement requirements, training needs, and implementation checkpoints.</a:t>
             </a:r>
             <a:endParaRPr lang="en-US" dirty="0"/>
           </a:p>
@@ -885,7 +888,8 @@
               <a:t>Reflection Questions
 What public health decision or workflow does this topic affect?
 Who has authority to approve or pause the work?
-What evidence would show that the workflow is responsible and effective?</a:t>
+What evidence would show that the workflow is responsible and effective?
+Application guidance: Connect the concept to public health purpose, responsible use, required safeguards, documentation, and the next action a department should take.</a:t>
             </a:r>
             <a:endParaRPr lang="en-US" dirty="0"/>
           </a:p>
@@ -975,7 +979,8 @@
               <a:rPr lang="en-US" dirty="0"/>
               <a:t>Reflection Questions
 What equity, privacy, legal, security, or public trust risks require review?
-How will the agency know when the workflow needs to be revised?</a:t>
+How will the agency know when the workflow needs to be revised?
+Application guidance: Connect the concept to public health purpose, responsible use, required safeguards, documentation, and the next action a department should take.</a:t>
             </a:r>
             <a:endParaRPr lang="en-US" dirty="0"/>
           </a:p>
@@ -1064,7 +1069,8 @@
             <a:r>
               <a:rPr lang="en-US" dirty="0"/>
               <a:t>Practical Exercise
-Create a practical ai for surveillance signal review and epidemiologic judgment artifact for one AI-supported public health use case. The artifact should define the use case, affected roles, review criteria, safeguards, documentation expectations, escalation triggers, monitoring indicators, and next review date.</a:t>
+Create a practical ai for surveillance signal review and epidemiologic judgment artifact for one AI-supported public health use case. The artifact should define the use case, affected roles, review criteria, safeguards, documentation expectations, escalation triggers, monitoring indicators, and next review date.
+Application guidance: Use the assignment to test whether you can explain the concept, apply it to a realistic public health situation, and identify what would need review before the work moves forward.</a:t>
             </a:r>
             <a:endParaRPr lang="en-US" dirty="0"/>
           </a:p>
@@ -1155,7 +1161,8 @@
               <a:t>Expected Artifact or Evidence
 AI for Surveillance Signal Review and Epidemiologic Judgment artifact
 Role and responsibility table
-Risk and safeguard summary</a:t>
+Risk and safeguard summary
+Application guidance: Connect the concept to public health purpose, responsible use, required safeguards, documentation, and the next action a department should take.</a:t>
             </a:r>
             <a:endParaRPr lang="en-US" dirty="0"/>
           </a:p>
@@ -1245,7 +1252,8 @@
               <a:rPr lang="en-US" dirty="0"/>
               <a:t>Expected Artifact or Evidence
 Escalation and monitoring plan
-Approval or review note</a:t>
+Approval or review note
+Application guidance: Connect the concept to public health purpose, responsible use, required safeguards, documentation, and the next action a department should take.</a:t>
             </a:r>
             <a:endParaRPr lang="en-US" dirty="0"/>
           </a:p>
@@ -1338,7 +1346,8 @@
 Role and responsibility table
 Risk and safeguard summary
 Escalation and monitoring plan
-Approval or review note</a:t>
+Approval or review note
+Application guidance: Use the assignment to test whether you can explain the concept, apply it to a realistic public health situation, and identify what would need review before the work moves forward.</a:t>
             </a:r>
             <a:endParaRPr lang="en-US" dirty="0"/>
           </a:p>
@@ -1431,7 +1440,8 @@
 2. What is the best reason to assign an accountability owner?
 3. When should an AI-supported workflow be escalated for review?
 4. Which practice best supports public accountability?
-5. What should happen when data sources, policy, vendor configuration, or workflow use changes?</a:t>
+5. What should happen when data sources, policy, vendor configuration, or workflow use changes?
+Application guidance: Use the assignment to test whether you can explain the concept, apply it to a realistic public health situation, and identify what would need review before the work moves forward.</a:t>
             </a:r>
             <a:endParaRPr lang="en-US" dirty="0"/>
           </a:p>
@@ -1616,7 +1626,8 @@
 NIST Artificial Intelligence Risk Management Framework and NIST Generative AI Profile: https://www.nist.gov/publications/artificial-intelligence-risk-management-framework-generative-artificial-intelligence
 WHO Ethics and Governance of Artificial Intelligence for Health guidance: https://www.who.int/publications/i/item/9789240029200
 OWASP Top 10 for Large Language Model Applications: https://owasp.org/www-project-top-10-for-large-language-model-applications/
-ONC health IT, interoperability, and information blocking resources: https://www.healthit.gov/</a:t>
+ONC health IT, interoperability, and information blocking resources: https://www.healthit.gov/
+Application guidance: Connect the concept to public health purpose, responsible use, required safeguards, documentation, and the next action a department should take.</a:t>
             </a:r>
             <a:endParaRPr lang="en-US" dirty="0"/>
           </a:p>
@@ -1705,7 +1716,8 @@
             <a:r>
               <a:rPr lang="en-US" dirty="0"/>
               <a:t>References and Resources
-Agency policies for privacy, public records, cybersecurity, procurement, civil rights, accessibility, language access, and emergency communications</a:t>
+Agency policies for privacy, public records, cybersecurity, procurement, civil rights, accessibility, language access, and emergency communications
+Application guidance: Connect the concept to public health purpose, responsible use, required safeguards, documentation, and the next action a department should take.</a:t>
             </a:r>
             <a:endParaRPr lang="en-US" dirty="0"/>
           </a:p>
@@ -1984,7 +1996,8 @@
 Identify the roles, decisions, risks, and documentation needed for the topic.
 Apply the topic to a real or realistic public health workflow or decision.
 Recognize equity, privacy, security, legal, operational, and public trust implications.
-Produce a practical artifact that supports readiness, governance, implementation, monitoring, or accountability.</a:t>
+Produce a practical artifact that supports readiness, governance, implementation, monitoring, or accountability.
+Application guidance: Use the assignment to test whether you can explain the concept, apply it to a realistic public health situation, and identify what would need review before the work moves forward.</a:t>
             </a:r>
             <a:endParaRPr lang="en-US" dirty="0"/>
           </a:p>
@@ -2074,7 +2087,8 @@
               <a:rPr lang="en-US" dirty="0"/>
               <a:t>Module Overview
 This module focuses on using AI to support signal detection while preserving epidemiologic judgment. It is designed for public health staff who must translate responsible AI principles into repeatable decisions, documents, workflows, and oversight practices.
-The module helps learners move beyond general awareness by producing a practical artifact that can be used in governance review, implementation planning, operations, communication, or accountability. It emphasizes paragraph-based reasoning, defined responsibilities, and documentation that can withstand public health, legal, privacy, equity, and leadership review.</a:t>
+The module helps learners move beyond general awareness by producing a practical artifact that can be used in governance review, implementation planning, operations, communication, or accountability. It emphasizes paragraph-based reasoning, defined responsibilities, and documentation that can withstand public health, legal, privacy, equity, and leadership review.
+Application guidance: Connect the concept to public health purpose, responsible use, required safeguards, documentation, and the next action a department should take.</a:t>
             </a:r>
             <a:endParaRPr lang="en-US" dirty="0"/>
           </a:p>
@@ -2167,7 +2181,8 @@
 Evidence artifact: A document, log, checklist, test result, approval record, or review note that demonstrates responsible AI practice.
 Escalation pathway: A defined route for raising concerns to the appropriate reviewer or decision-maker.
 Accountability owner: The person or role responsible for ensuring that an AI use case is governed, monitored, and corrected when needed.
-Operational safeguard: A procedure, control, or review step that reduces risk during day-to-day use.</a:t>
+Operational safeguard: A procedure, control, or review step that reduces risk during day-to-day use.
+Application guidance: Connect the concept to public health purpose, responsible use, required safeguards, documentation, and the next action a department should take.</a:t>
             </a:r>
             <a:endParaRPr lang="en-US" dirty="0"/>
           </a:p>
@@ -2257,7 +2272,8 @@
               <a:rPr lang="en-US" dirty="0"/>
               <a:t>Why This Topic Matters for Public Health AI
 AI for Surveillance Signal Review and Epidemiologic Judgment matters because AI adoption changes how public health agencies make, document, communicate, and review decisions. Without a structured approach, staff may rely on informal practices, vendor assurances, or one-time approvals that do not match the operational consequences of AI-supported work.
-Public health agencies operate under legal authorities, public accountability, resource constraints, and community trust obligations. A module on this topic helps agencies define repeatable expectations before urgent situations arise. It also helps staff distinguish low-risk administrative support from uses that affect surveillance, public communications, field response, resource allocation, civil rights, privacy, or official records.</a:t>
+Public health agencies operate under legal authorities, public accountability, resource constraints, and community trust obligations. A module on this topic helps agencies define repeatable expectations before urgent situations arise. It also helps staff distinguish low-risk administrative support from uses that affect surveillance, public communications, field response, resource allocation, civil rights, privacy, or official records.
+Application guidance: Connect the concept to public health purpose, responsible use, required safeguards, documentation, and the next action a department should take.</a:t>
             </a:r>
             <a:endParaRPr lang="en-US" dirty="0"/>
           </a:p>
@@ -2347,7 +2363,8 @@
               <a:rPr lang="en-US" dirty="0"/>
               <a:t>Public Health Example
 A public health agency is preparing to use AI in a workflow related to using AI to support signal detection while preserving epidemiologic judgment. The project team initially treats the tool as a helpful efficiency aid, but governance reviewers recognize that the workflow may affect public trust, equity, official records, or public health action.
-The agency responds by creating a clear artifact that defines intended use, prohibited use, responsible roles, review points, documentation expectations, escalation triggers, and monitoring measures. This converts a broad AI idea into a manageable public health practice.</a:t>
+The agency responds by creating a clear artifact that defines intended use, prohibited use, responsible roles, review points, documentation expectations, escalation triggers, and monitoring measures. This converts a broad AI idea into a manageable public health practice.
+Application guidance: Connect the concept to public health purpose, responsible use, required safeguards, documentation, and the next action a department should take.</a:t>
             </a:r>
             <a:endParaRPr lang="en-US" dirty="0"/>
           </a:p>
@@ -3118,8 +3135,8 @@
         </p:nvSpPr>
         <p:spPr>
           <a:xfrm>
-            <a:off x="9966960" y="6537960"/>
-            <a:ext cx="1645920" cy="201168"/>
+            <a:off x="9646920" y="6537960"/>
+            <a:ext cx="1965960" cy="201168"/>
           </a:xfrm>
           <a:prstGeom prst="rect">
             <a:avLst/>
@@ -3143,7 +3160,7 @@
                 <a:ea typeface="Aptos" pitchFamily="34" charset="-122"/>
                 <a:cs typeface="Aptos" pitchFamily="34" charset="-120"/>
               </a:rPr>
-              <a:t>Â© Paula Soper</a:t>
+              <a:t>Copyright Paula Soper</a:t>
             </a:r>
             <a:endParaRPr lang="en-US" sz="800" dirty="0"/>
           </a:p>
@@ -3190,77 +3207,13 @@
       </p:sp>
       <p:sp>
         <p:nvSpPr>
-          <p:cNvPr id="8" name="Shape 6"/>
+          <p:cNvPr id="8" name="Text 6"/>
           <p:cNvSpPr/>
           <p:nvPr/>
         </p:nvSpPr>
         <p:spPr>
           <a:xfrm>
             <a:off x="640080" y="658368"/>
-            <a:ext cx="420624" cy="420624"/>
-          </a:xfrm>
-          <a:prstGeom prst="ellipse">
-            <a:avLst/>
-          </a:prstGeom>
-          <a:solidFill>
-            <a:srgbClr val="0068B7"/>
-          </a:solidFill>
-          <a:ln w="12700">
-            <a:solidFill>
-              <a:srgbClr val="0068B7"/>
-            </a:solidFill>
-            <a:prstDash val="solid"/>
-          </a:ln>
-        </p:spPr>
-      </p:sp>
-      <p:sp>
-        <p:nvSpPr>
-          <p:cNvPr id="9" name="Text 7"/>
-          <p:cNvSpPr/>
-          <p:nvPr/>
-        </p:nvSpPr>
-        <p:spPr>
-          <a:xfrm>
-            <a:off x="640080" y="731520"/>
-            <a:ext cx="420624" cy="164592"/>
-          </a:xfrm>
-          <a:prstGeom prst="rect">
-            <a:avLst/>
-          </a:prstGeom>
-          <a:noFill/>
-          <a:ln/>
-        </p:spPr>
-        <p:txBody>
-          <a:bodyPr wrap="square" lIns="0" tIns="0" rIns="0" bIns="0" rtlCol="0" anchor="ctr"/>
-          <a:lstStyle/>
-          <a:p>
-            <a:pPr algn="ctr" indent="0" marL="0">
-              <a:buNone/>
-            </a:pPr>
-            <a:r>
-              <a:rPr lang="en-US" sz="1100" b="1" dirty="0">
-                <a:solidFill>
-                  <a:srgbClr val="FFFFFF"/>
-                </a:solidFill>
-                <a:latin typeface="Aptos" pitchFamily="34" charset="0"/>
-                <a:ea typeface="Aptos" pitchFamily="34" charset="-122"/>
-                <a:cs typeface="Aptos" pitchFamily="34" charset="-120"/>
-              </a:rPr>
-              <a:t>6</a:t>
-            </a:r>
-            <a:endParaRPr lang="en-US" sz="1100" dirty="0"/>
-          </a:p>
-        </p:txBody>
-      </p:sp>
-      <p:sp>
-        <p:nvSpPr>
-          <p:cNvPr id="10" name="Text 8"/>
-          <p:cNvSpPr/>
-          <p:nvPr/>
-        </p:nvSpPr>
-        <p:spPr>
-          <a:xfrm>
-            <a:off x="640080" y="621792"/>
             <a:ext cx="10881360" cy="713232"/>
           </a:xfrm>
           <a:prstGeom prst="rect">
@@ -3295,14 +3248,14 @@
       </p:sp>
       <p:sp>
         <p:nvSpPr>
-          <p:cNvPr id="11" name="Text 9"/>
+          <p:cNvPr id="9" name="Text 7"/>
           <p:cNvSpPr/>
           <p:nvPr/>
         </p:nvSpPr>
         <p:spPr>
           <a:xfrm>
             <a:off x="868680" y="1508760"/>
-            <a:ext cx="6537960" cy="4160520"/>
+            <a:ext cx="6309360" cy="4160520"/>
           </a:xfrm>
           <a:prstGeom prst="rect">
             <a:avLst/>
@@ -3361,18 +3314,18 @@
       </p:sp>
       <p:sp>
         <p:nvSpPr>
-          <p:cNvPr id="12" name="Shape 10"/>
-          <p:cNvSpPr/>
-          <p:nvPr/>
-        </p:nvSpPr>
-        <p:spPr>
-          <a:xfrm>
-            <a:off x="7909560" y="1417320"/>
-            <a:ext cx="3154680" cy="1828800"/>
+          <p:cNvPr id="10" name="Shape 8"/>
+          <p:cNvSpPr/>
+          <p:nvPr/>
+        </p:nvSpPr>
+        <p:spPr>
+          <a:xfrm>
+            <a:off x="7635240" y="1325880"/>
+            <a:ext cx="3474720" cy="1325880"/>
           </a:xfrm>
           <a:prstGeom prst="roundRect">
             <a:avLst>
-              <a:gd name="adj" fmla="val 6000"/>
+              <a:gd name="adj" fmla="val 8276"/>
             </a:avLst>
           </a:prstGeom>
           <a:solidFill>
@@ -3388,14 +3341,14 @@
       </p:sp>
       <p:sp>
         <p:nvSpPr>
-          <p:cNvPr id="13" name="Text 11"/>
-          <p:cNvSpPr/>
-          <p:nvPr/>
-        </p:nvSpPr>
-        <p:spPr>
-          <a:xfrm>
-            <a:off x="8074152" y="1563624"/>
-            <a:ext cx="2825496" cy="256032"/>
+          <p:cNvPr id="11" name="Text 9"/>
+          <p:cNvSpPr/>
+          <p:nvPr/>
+        </p:nvSpPr>
+        <p:spPr>
+          <a:xfrm>
+            <a:off x="7799832" y="1472184"/>
+            <a:ext cx="3145536" cy="256032"/>
           </a:xfrm>
           <a:prstGeom prst="rect">
             <a:avLst/>
@@ -3419,7 +3372,7 @@
                 <a:ea typeface="Aptos" pitchFamily="34" charset="-122"/>
                 <a:cs typeface="Aptos" pitchFamily="34" charset="-120"/>
               </a:rPr>
-              <a:t>Key idea</a:t>
+              <a:t>Core concept</a:t>
             </a:r>
             <a:endParaRPr lang="en-US" sz="1300" dirty="0"/>
           </a:p>
@@ -3427,14 +3380,14 @@
       </p:sp>
       <p:sp>
         <p:nvSpPr>
-          <p:cNvPr id="14" name="Text 12"/>
-          <p:cNvSpPr/>
-          <p:nvPr/>
-        </p:nvSpPr>
-        <p:spPr>
-          <a:xfrm>
-            <a:off x="8074152" y="1920240"/>
-            <a:ext cx="2825496" cy="1188720"/>
+          <p:cNvPr id="12" name="Text 10"/>
+          <p:cNvSpPr/>
+          <p:nvPr/>
+        </p:nvSpPr>
+        <p:spPr>
+          <a:xfrm>
+            <a:off x="7799832" y="1828800"/>
+            <a:ext cx="3145536" cy="685800"/>
           </a:xfrm>
           <a:prstGeom prst="rect">
             <a:avLst/>
@@ -3468,18 +3421,159 @@
       </p:sp>
       <p:sp>
         <p:nvSpPr>
-          <p:cNvPr id="15" name="Shape 13"/>
-          <p:cNvSpPr/>
-          <p:nvPr/>
-        </p:nvSpPr>
-        <p:spPr>
-          <a:xfrm>
-            <a:off x="7909560" y="3520440"/>
-            <a:ext cx="3154680" cy="1737360"/>
+          <p:cNvPr id="13" name="Shape 11"/>
+          <p:cNvSpPr/>
+          <p:nvPr/>
+        </p:nvSpPr>
+        <p:spPr>
+          <a:xfrm>
+            <a:off x="7635240" y="2788920"/>
+            <a:ext cx="3474720" cy="1536192"/>
           </a:xfrm>
           <a:prstGeom prst="roundRect">
             <a:avLst>
-              <a:gd name="adj" fmla="val 6316"/>
+              <a:gd name="adj" fmla="val 7143"/>
+            </a:avLst>
+          </a:prstGeom>
+          <a:solidFill>
+            <a:srgbClr val="FFFFFF">
+              <a:alpha val="88000"/>
+            </a:srgbClr>
+          </a:solidFill>
+          <a:ln w="12700">
+            <a:solidFill>
+              <a:srgbClr val="D6E8F2"/>
+            </a:solidFill>
+            <a:prstDash val="solid"/>
+          </a:ln>
+        </p:spPr>
+      </p:sp>
+      <p:sp>
+        <p:nvSpPr>
+          <p:cNvPr id="14" name="Shape 12"/>
+          <p:cNvSpPr/>
+          <p:nvPr/>
+        </p:nvSpPr>
+        <p:spPr>
+          <a:xfrm>
+            <a:off x="8074152" y="3291840"/>
+            <a:ext cx="2596896" cy="749808"/>
+          </a:xfrm>
+          <a:prstGeom prst="rect">
+            <a:avLst/>
+          </a:prstGeom>
+          <a:solidFill>
+            <a:srgbClr val="EAF6F8"/>
+          </a:solidFill>
+          <a:ln w="12700">
+            <a:solidFill>
+              <a:srgbClr val="8ABBD8"/>
+            </a:solidFill>
+            <a:prstDash val="solid"/>
+          </a:ln>
+        </p:spPr>
+      </p:sp>
+      <p:sp>
+        <p:nvSpPr>
+          <p:cNvPr id="15" name="Shape 13"/>
+          <p:cNvSpPr/>
+          <p:nvPr/>
+        </p:nvSpPr>
+        <p:spPr>
+          <a:xfrm>
+            <a:off x="8202168" y="3721608"/>
+            <a:ext cx="2340864" cy="0"/>
+          </a:xfrm>
+          <a:prstGeom prst="line">
+            <a:avLst/>
+          </a:prstGeom>
+          <a:noFill/>
+          <a:ln w="19050">
+            <a:solidFill>
+              <a:srgbClr val="0068B7"/>
+            </a:solidFill>
+            <a:prstDash val="solid"/>
+          </a:ln>
+        </p:spPr>
+      </p:sp>
+      <p:sp>
+        <p:nvSpPr>
+          <p:cNvPr id="16" name="Shape 14"/>
+          <p:cNvSpPr/>
+          <p:nvPr/>
+        </p:nvSpPr>
+        <p:spPr>
+          <a:xfrm>
+            <a:off x="9198864" y="4206240"/>
+            <a:ext cx="347472" cy="347472"/>
+          </a:xfrm>
+          <a:prstGeom prst="ellipse">
+            <a:avLst/>
+          </a:prstGeom>
+          <a:solidFill>
+            <a:srgbClr val="2F8A28"/>
+          </a:solidFill>
+          <a:ln w="12700">
+            <a:solidFill>
+              <a:srgbClr val="2F8A28"/>
+            </a:solidFill>
+            <a:prstDash val="solid"/>
+          </a:ln>
+        </p:spPr>
+      </p:sp>
+      <p:sp>
+        <p:nvSpPr>
+          <p:cNvPr id="17" name="Text 15"/>
+          <p:cNvSpPr/>
+          <p:nvPr/>
+        </p:nvSpPr>
+        <p:spPr>
+          <a:xfrm>
+            <a:off x="7909560" y="3977640"/>
+            <a:ext cx="2926080" cy="182880"/>
+          </a:xfrm>
+          <a:prstGeom prst="rect">
+            <a:avLst/>
+          </a:prstGeom>
+          <a:noFill/>
+          <a:ln/>
+        </p:spPr>
+        <p:txBody>
+          <a:bodyPr wrap="square" lIns="0" tIns="0" rIns="0" bIns="0" rtlCol="0" anchor="ctr"/>
+          <a:lstStyle/>
+          <a:p>
+            <a:pPr algn="ctr" indent="0" marL="0">
+              <a:buNone/>
+            </a:pPr>
+            <a:r>
+              <a:rPr lang="en-US" sz="1000" dirty="0">
+                <a:solidFill>
+                  <a:srgbClr val="003A63"/>
+                </a:solidFill>
+                <a:latin typeface="Aptos" pitchFamily="34" charset="0"/>
+                <a:ea typeface="Aptos" pitchFamily="34" charset="-122"/>
+                <a:cs typeface="Aptos" pitchFamily="34" charset="-120"/>
+              </a:rPr>
+              <a:t>Concept to action</a:t>
+            </a:r>
+            <a:endParaRPr lang="en-US" sz="1000" dirty="0"/>
+          </a:p>
+        </p:txBody>
+      </p:sp>
+      <p:sp>
+        <p:nvSpPr>
+          <p:cNvPr id="18" name="Shape 16"/>
+          <p:cNvSpPr/>
+          <p:nvPr/>
+        </p:nvSpPr>
+        <p:spPr>
+          <a:xfrm>
+            <a:off x="7635240" y="4498848"/>
+            <a:ext cx="3474720" cy="1143000"/>
+          </a:xfrm>
+          <a:prstGeom prst="roundRect">
+            <a:avLst>
+              <a:gd name="adj" fmla="val 9600"/>
             </a:avLst>
           </a:prstGeom>
           <a:solidFill>
@@ -3495,14 +3589,14 @@
       </p:sp>
       <p:sp>
         <p:nvSpPr>
-          <p:cNvPr id="16" name="Text 14"/>
-          <p:cNvSpPr/>
-          <p:nvPr/>
-        </p:nvSpPr>
-        <p:spPr>
-          <a:xfrm>
-            <a:off x="8074152" y="3666744"/>
-            <a:ext cx="2825496" cy="256032"/>
+          <p:cNvPr id="19" name="Text 17"/>
+          <p:cNvSpPr/>
+          <p:nvPr/>
+        </p:nvSpPr>
+        <p:spPr>
+          <a:xfrm>
+            <a:off x="7799832" y="4645152"/>
+            <a:ext cx="3145536" cy="256032"/>
           </a:xfrm>
           <a:prstGeom prst="rect">
             <a:avLst/>
@@ -3526,7 +3620,7 @@
                 <a:ea typeface="Aptos" pitchFamily="34" charset="-122"/>
                 <a:cs typeface="Aptos" pitchFamily="34" charset="-120"/>
               </a:rPr>
-              <a:t>Use this for</a:t>
+              <a:t>Apply it</a:t>
             </a:r>
             <a:endParaRPr lang="en-US" sz="1300" dirty="0"/>
           </a:p>
@@ -3534,14 +3628,14 @@
       </p:sp>
       <p:sp>
         <p:nvSpPr>
-          <p:cNvPr id="17" name="Text 15"/>
-          <p:cNvSpPr/>
-          <p:nvPr/>
-        </p:nvSpPr>
-        <p:spPr>
-          <a:xfrm>
-            <a:off x="8074152" y="4023360"/>
-            <a:ext cx="2825496" cy="1097280"/>
+          <p:cNvPr id="20" name="Text 18"/>
+          <p:cNvSpPr/>
+          <p:nvPr/>
+        </p:nvSpPr>
+        <p:spPr>
+          <a:xfrm>
+            <a:off x="7799832" y="5001768"/>
+            <a:ext cx="3145536" cy="502920"/>
           </a:xfrm>
           <a:prstGeom prst="rect">
             <a:avLst/>
@@ -3567,7 +3661,7 @@
                 <a:ea typeface="Aptos" pitchFamily="34" charset="-122"/>
                 <a:cs typeface="Aptos" pitchFamily="34" charset="-120"/>
               </a:rPr>
-              <a:t>Connect the concept to public health decisions, safeguards, documentation, or implementation work.</a:t>
+              <a:t>Connect the concept to public health purpose, responsible use, required safeguards, documentation, and the next action a department should take.</a:t>
             </a:r>
             <a:endParaRPr lang="en-US" sz="1550" dirty="0"/>
           </a:p>
@@ -3741,8 +3835,8 @@
         </p:nvSpPr>
         <p:spPr>
           <a:xfrm>
-            <a:off x="9966960" y="6537960"/>
-            <a:ext cx="1645920" cy="201168"/>
+            <a:off x="9646920" y="6537960"/>
+            <a:ext cx="1965960" cy="201168"/>
           </a:xfrm>
           <a:prstGeom prst="rect">
             <a:avLst/>
@@ -3766,7 +3860,7 @@
                 <a:ea typeface="Aptos" pitchFamily="34" charset="-122"/>
                 <a:cs typeface="Aptos" pitchFamily="34" charset="-120"/>
               </a:rPr>
-              <a:t>Â© Paula Soper</a:t>
+              <a:t>Copyright Paula Soper</a:t>
             </a:r>
             <a:endParaRPr lang="en-US" sz="800" dirty="0"/>
           </a:p>
@@ -3813,77 +3907,13 @@
       </p:sp>
       <p:sp>
         <p:nvSpPr>
-          <p:cNvPr id="8" name="Shape 6"/>
+          <p:cNvPr id="8" name="Text 6"/>
           <p:cNvSpPr/>
           <p:nvPr/>
         </p:nvSpPr>
         <p:spPr>
           <a:xfrm>
             <a:off x="640080" y="658368"/>
-            <a:ext cx="420624" cy="420624"/>
-          </a:xfrm>
-          <a:prstGeom prst="ellipse">
-            <a:avLst/>
-          </a:prstGeom>
-          <a:solidFill>
-            <a:srgbClr val="0068B7"/>
-          </a:solidFill>
-          <a:ln w="12700">
-            <a:solidFill>
-              <a:srgbClr val="0068B7"/>
-            </a:solidFill>
-            <a:prstDash val="solid"/>
-          </a:ln>
-        </p:spPr>
-      </p:sp>
-      <p:sp>
-        <p:nvSpPr>
-          <p:cNvPr id="9" name="Text 7"/>
-          <p:cNvSpPr/>
-          <p:nvPr/>
-        </p:nvSpPr>
-        <p:spPr>
-          <a:xfrm>
-            <a:off x="640080" y="731520"/>
-            <a:ext cx="420624" cy="164592"/>
-          </a:xfrm>
-          <a:prstGeom prst="rect">
-            <a:avLst/>
-          </a:prstGeom>
-          <a:noFill/>
-          <a:ln/>
-        </p:spPr>
-        <p:txBody>
-          <a:bodyPr wrap="square" lIns="0" tIns="0" rIns="0" bIns="0" rtlCol="0" anchor="ctr"/>
-          <a:lstStyle/>
-          <a:p>
-            <a:pPr algn="ctr" indent="0" marL="0">
-              <a:buNone/>
-            </a:pPr>
-            <a:r>
-              <a:rPr lang="en-US" sz="1100" b="1" dirty="0">
-                <a:solidFill>
-                  <a:srgbClr val="FFFFFF"/>
-                </a:solidFill>
-                <a:latin typeface="Aptos" pitchFamily="34" charset="0"/>
-                <a:ea typeface="Aptos" pitchFamily="34" charset="-122"/>
-                <a:cs typeface="Aptos" pitchFamily="34" charset="-120"/>
-              </a:rPr>
-              <a:t>7</a:t>
-            </a:r>
-            <a:endParaRPr lang="en-US" sz="1100" dirty="0"/>
-          </a:p>
-        </p:txBody>
-      </p:sp>
-      <p:sp>
-        <p:nvSpPr>
-          <p:cNvPr id="10" name="Text 8"/>
-          <p:cNvSpPr/>
-          <p:nvPr/>
-        </p:nvSpPr>
-        <p:spPr>
-          <a:xfrm>
-            <a:off x="640080" y="621792"/>
             <a:ext cx="10881360" cy="713232"/>
           </a:xfrm>
           <a:prstGeom prst="rect">
@@ -3918,14 +3948,14 @@
       </p:sp>
       <p:sp>
         <p:nvSpPr>
-          <p:cNvPr id="11" name="Text 9"/>
+          <p:cNvPr id="9" name="Text 7"/>
           <p:cNvSpPr/>
           <p:nvPr/>
         </p:nvSpPr>
         <p:spPr>
           <a:xfrm>
             <a:off x="868680" y="1508760"/>
-            <a:ext cx="6537960" cy="4160520"/>
+            <a:ext cx="6309360" cy="4160520"/>
           </a:xfrm>
           <a:prstGeom prst="rect">
             <a:avLst/>
@@ -3984,18 +4014,18 @@
       </p:sp>
       <p:sp>
         <p:nvSpPr>
-          <p:cNvPr id="12" name="Shape 10"/>
-          <p:cNvSpPr/>
-          <p:nvPr/>
-        </p:nvSpPr>
-        <p:spPr>
-          <a:xfrm>
-            <a:off x="7909560" y="1417320"/>
-            <a:ext cx="3154680" cy="1828800"/>
+          <p:cNvPr id="10" name="Shape 8"/>
+          <p:cNvSpPr/>
+          <p:nvPr/>
+        </p:nvSpPr>
+        <p:spPr>
+          <a:xfrm>
+            <a:off x="7635240" y="1325880"/>
+            <a:ext cx="3474720" cy="1325880"/>
           </a:xfrm>
           <a:prstGeom prst="roundRect">
             <a:avLst>
-              <a:gd name="adj" fmla="val 6000"/>
+              <a:gd name="adj" fmla="val 8276"/>
             </a:avLst>
           </a:prstGeom>
           <a:solidFill>
@@ -4011,14 +4041,14 @@
       </p:sp>
       <p:sp>
         <p:nvSpPr>
-          <p:cNvPr id="13" name="Text 11"/>
-          <p:cNvSpPr/>
-          <p:nvPr/>
-        </p:nvSpPr>
-        <p:spPr>
-          <a:xfrm>
-            <a:off x="8074152" y="1563624"/>
-            <a:ext cx="2825496" cy="256032"/>
+          <p:cNvPr id="11" name="Text 9"/>
+          <p:cNvSpPr/>
+          <p:nvPr/>
+        </p:nvSpPr>
+        <p:spPr>
+          <a:xfrm>
+            <a:off x="7799832" y="1472184"/>
+            <a:ext cx="3145536" cy="256032"/>
           </a:xfrm>
           <a:prstGeom prst="rect">
             <a:avLst/>
@@ -4042,7 +4072,7 @@
                 <a:ea typeface="Aptos" pitchFamily="34" charset="-122"/>
                 <a:cs typeface="Aptos" pitchFamily="34" charset="-120"/>
               </a:rPr>
-              <a:t>Key idea</a:t>
+              <a:t>Risk check</a:t>
             </a:r>
             <a:endParaRPr lang="en-US" sz="1300" dirty="0"/>
           </a:p>
@@ -4050,14 +4080,14 @@
       </p:sp>
       <p:sp>
         <p:nvSpPr>
-          <p:cNvPr id="14" name="Text 12"/>
-          <p:cNvSpPr/>
-          <p:nvPr/>
-        </p:nvSpPr>
-        <p:spPr>
-          <a:xfrm>
-            <a:off x="8074152" y="1920240"/>
-            <a:ext cx="2825496" cy="1188720"/>
+          <p:cNvPr id="12" name="Text 10"/>
+          <p:cNvSpPr/>
+          <p:nvPr/>
+        </p:nvSpPr>
+        <p:spPr>
+          <a:xfrm>
+            <a:off x="7799832" y="1828800"/>
+            <a:ext cx="3145536" cy="685800"/>
           </a:xfrm>
           <a:prstGeom prst="rect">
             <a:avLst/>
@@ -4091,18 +4121,171 @@
       </p:sp>
       <p:sp>
         <p:nvSpPr>
-          <p:cNvPr id="15" name="Shape 13"/>
-          <p:cNvSpPr/>
-          <p:nvPr/>
-        </p:nvSpPr>
-        <p:spPr>
-          <a:xfrm>
-            <a:off x="7909560" y="3520440"/>
-            <a:ext cx="3154680" cy="1737360"/>
+          <p:cNvPr id="13" name="Shape 11"/>
+          <p:cNvSpPr/>
+          <p:nvPr/>
+        </p:nvSpPr>
+        <p:spPr>
+          <a:xfrm>
+            <a:off x="7635240" y="2788920"/>
+            <a:ext cx="3474720" cy="1536192"/>
           </a:xfrm>
           <a:prstGeom prst="roundRect">
             <a:avLst>
-              <a:gd name="adj" fmla="val 6316"/>
+              <a:gd name="adj" fmla="val 7143"/>
+            </a:avLst>
+          </a:prstGeom>
+          <a:solidFill>
+            <a:srgbClr val="FFFFFF">
+              <a:alpha val="88000"/>
+            </a:srgbClr>
+          </a:solidFill>
+          <a:ln w="12700">
+            <a:solidFill>
+              <a:srgbClr val="D6E8F2"/>
+            </a:solidFill>
+            <a:prstDash val="solid"/>
+          </a:ln>
+        </p:spPr>
+      </p:sp>
+      <p:sp>
+        <p:nvSpPr>
+          <p:cNvPr id="14" name="Shape 12"/>
+          <p:cNvSpPr/>
+          <p:nvPr/>
+        </p:nvSpPr>
+        <p:spPr>
+          <a:xfrm>
+            <a:off x="8046720" y="3108960"/>
+            <a:ext cx="2651760" cy="896112"/>
+          </a:xfrm>
+          <a:prstGeom prst="arc">
+            <a:avLst/>
+          </a:prstGeom>
+          <a:noFill/>
+          <a:ln w="25400">
+            <a:solidFill>
+              <a:srgbClr val="0068B7"/>
+            </a:solidFill>
+            <a:prstDash val="solid"/>
+          </a:ln>
+        </p:spPr>
+      </p:sp>
+      <p:sp>
+        <p:nvSpPr>
+          <p:cNvPr id="15" name="Text 13"/>
+          <p:cNvSpPr/>
+          <p:nvPr/>
+        </p:nvSpPr>
+        <p:spPr>
+          <a:xfrm>
+            <a:off x="7909560" y="3099816"/>
+            <a:ext cx="2926080" cy="256032"/>
+          </a:xfrm>
+          <a:prstGeom prst="rect">
+            <a:avLst/>
+          </a:prstGeom>
+          <a:noFill/>
+          <a:ln/>
+        </p:spPr>
+        <p:txBody>
+          <a:bodyPr wrap="square" lIns="0" tIns="0" rIns="0" bIns="0" rtlCol="0" anchor="ctr"/>
+          <a:lstStyle/>
+          <a:p>
+            <a:pPr algn="ctr" indent="0" marL="0">
+              <a:buNone/>
+            </a:pPr>
+            <a:r>
+              <a:rPr lang="en-US" sz="1500" b="1" dirty="0">
+                <a:solidFill>
+                  <a:srgbClr val="003A63"/>
+                </a:solidFill>
+                <a:latin typeface="Aptos" pitchFamily="34" charset="0"/>
+                <a:ea typeface="Aptos" pitchFamily="34" charset="-122"/>
+                <a:cs typeface="Aptos" pitchFamily="34" charset="-120"/>
+              </a:rPr>
+              <a:t>Risk</a:t>
+            </a:r>
+            <a:endParaRPr lang="en-US" sz="1500" dirty="0"/>
+          </a:p>
+        </p:txBody>
+      </p:sp>
+      <p:sp>
+        <p:nvSpPr>
+          <p:cNvPr id="16" name="Shape 14"/>
+          <p:cNvSpPr/>
+          <p:nvPr/>
+        </p:nvSpPr>
+        <p:spPr>
+          <a:xfrm>
+            <a:off x="8366760" y="3639312"/>
+            <a:ext cx="2011680" cy="0"/>
+          </a:xfrm>
+          <a:prstGeom prst="line">
+            <a:avLst/>
+          </a:prstGeom>
+          <a:noFill/>
+          <a:ln w="63500">
+            <a:solidFill>
+              <a:srgbClr val="2F8A28"/>
+            </a:solidFill>
+            <a:prstDash val="solid"/>
+          </a:ln>
+        </p:spPr>
+      </p:sp>
+      <p:sp>
+        <p:nvSpPr>
+          <p:cNvPr id="17" name="Text 15"/>
+          <p:cNvSpPr/>
+          <p:nvPr/>
+        </p:nvSpPr>
+        <p:spPr>
+          <a:xfrm>
+            <a:off x="7909560" y="3849624"/>
+            <a:ext cx="2926080" cy="164592"/>
+          </a:xfrm>
+          <a:prstGeom prst="rect">
+            <a:avLst/>
+          </a:prstGeom>
+          <a:noFill/>
+          <a:ln/>
+        </p:spPr>
+        <p:txBody>
+          <a:bodyPr wrap="square" lIns="0" tIns="0" rIns="0" bIns="0" rtlCol="0" anchor="ctr"/>
+          <a:lstStyle/>
+          <a:p>
+            <a:pPr algn="ctr" indent="0" marL="0">
+              <a:buNone/>
+            </a:pPr>
+            <a:r>
+              <a:rPr lang="en-US" sz="900" dirty="0">
+                <a:solidFill>
+                  <a:srgbClr val="003A63"/>
+                </a:solidFill>
+                <a:latin typeface="Aptos" pitchFamily="34" charset="0"/>
+                <a:ea typeface="Aptos" pitchFamily="34" charset="-122"/>
+                <a:cs typeface="Aptos" pitchFamily="34" charset="-120"/>
+              </a:rPr>
+              <a:t>Human review</a:t>
+            </a:r>
+            <a:endParaRPr lang="en-US" sz="900" dirty="0"/>
+          </a:p>
+        </p:txBody>
+      </p:sp>
+      <p:sp>
+        <p:nvSpPr>
+          <p:cNvPr id="18" name="Shape 16"/>
+          <p:cNvSpPr/>
+          <p:nvPr/>
+        </p:nvSpPr>
+        <p:spPr>
+          <a:xfrm>
+            <a:off x="7635240" y="4498848"/>
+            <a:ext cx="3474720" cy="1143000"/>
+          </a:xfrm>
+          <a:prstGeom prst="roundRect">
+            <a:avLst>
+              <a:gd name="adj" fmla="val 9600"/>
             </a:avLst>
           </a:prstGeom>
           <a:solidFill>
@@ -4118,14 +4301,14 @@
       </p:sp>
       <p:sp>
         <p:nvSpPr>
-          <p:cNvPr id="16" name="Text 14"/>
-          <p:cNvSpPr/>
-          <p:nvPr/>
-        </p:nvSpPr>
-        <p:spPr>
-          <a:xfrm>
-            <a:off x="8074152" y="3666744"/>
-            <a:ext cx="2825496" cy="256032"/>
+          <p:cNvPr id="19" name="Text 17"/>
+          <p:cNvSpPr/>
+          <p:nvPr/>
+        </p:nvSpPr>
+        <p:spPr>
+          <a:xfrm>
+            <a:off x="7799832" y="4645152"/>
+            <a:ext cx="3145536" cy="256032"/>
           </a:xfrm>
           <a:prstGeom prst="rect">
             <a:avLst/>
@@ -4149,7 +4332,7 @@
                 <a:ea typeface="Aptos" pitchFamily="34" charset="-122"/>
                 <a:cs typeface="Aptos" pitchFamily="34" charset="-120"/>
               </a:rPr>
-              <a:t>Use this for</a:t>
+              <a:t>Safeguard to plan</a:t>
             </a:r>
             <a:endParaRPr lang="en-US" sz="1300" dirty="0"/>
           </a:p>
@@ -4157,14 +4340,14 @@
       </p:sp>
       <p:sp>
         <p:nvSpPr>
-          <p:cNvPr id="17" name="Text 15"/>
-          <p:cNvSpPr/>
-          <p:nvPr/>
-        </p:nvSpPr>
-        <p:spPr>
-          <a:xfrm>
-            <a:off x="8074152" y="4023360"/>
-            <a:ext cx="2825496" cy="1097280"/>
+          <p:cNvPr id="20" name="Text 18"/>
+          <p:cNvSpPr/>
+          <p:nvPr/>
+        </p:nvSpPr>
+        <p:spPr>
+          <a:xfrm>
+            <a:off x="7799832" y="5001768"/>
+            <a:ext cx="3145536" cy="502920"/>
           </a:xfrm>
           <a:prstGeom prst="rect">
             <a:avLst/>
@@ -4190,7 +4373,7 @@
                 <a:ea typeface="Aptos" pitchFamily="34" charset="-122"/>
                 <a:cs typeface="Aptos" pitchFamily="34" charset="-120"/>
               </a:rPr>
-              <a:t>Connect the concept to public health decisions, safeguards, documentation, or implementation work.</a:t>
+              <a:t>Identify what could go wrong, who could be affected, what safeguards are needed, and what evidence should be reviewed before use expands.</a:t>
             </a:r>
             <a:endParaRPr lang="en-US" sz="1550" dirty="0"/>
           </a:p>
@@ -4364,8 +4547,8 @@
         </p:nvSpPr>
         <p:spPr>
           <a:xfrm>
-            <a:off x="9966960" y="6537960"/>
-            <a:ext cx="1645920" cy="201168"/>
+            <a:off x="9646920" y="6537960"/>
+            <a:ext cx="1965960" cy="201168"/>
           </a:xfrm>
           <a:prstGeom prst="rect">
             <a:avLst/>
@@ -4389,7 +4572,7 @@
                 <a:ea typeface="Aptos" pitchFamily="34" charset="-122"/>
                 <a:cs typeface="Aptos" pitchFamily="34" charset="-120"/>
               </a:rPr>
-              <a:t>Â© Paula Soper</a:t>
+              <a:t>Copyright Paula Soper</a:t>
             </a:r>
             <a:endParaRPr lang="en-US" sz="800" dirty="0"/>
           </a:p>
@@ -4436,17 +4619,248 @@
       </p:sp>
       <p:sp>
         <p:nvSpPr>
-          <p:cNvPr id="8" name="Shape 6"/>
+          <p:cNvPr id="8" name="Text 6"/>
           <p:cNvSpPr/>
           <p:nvPr/>
         </p:nvSpPr>
         <p:spPr>
           <a:xfrm>
             <a:off x="640080" y="658368"/>
-            <a:ext cx="420624" cy="420624"/>
-          </a:xfrm>
-          <a:prstGeom prst="ellipse">
-            <a:avLst/>
+            <a:ext cx="10881360" cy="713232"/>
+          </a:xfrm>
+          <a:prstGeom prst="rect">
+            <a:avLst/>
+          </a:prstGeom>
+          <a:noFill/>
+          <a:ln/>
+        </p:spPr>
+        <p:txBody>
+          <a:bodyPr wrap="square" lIns="0" tIns="0" rIns="0" bIns="0" rtlCol="0" anchor="ctr">
+            <a:normAutofit/>
+          </a:bodyPr>
+          <a:lstStyle/>
+          <a:p>
+            <a:pPr indent="0" marL="0">
+              <a:buNone/>
+            </a:pPr>
+            <a:r>
+              <a:rPr lang="en-US" sz="3400" b="1" dirty="0">
+                <a:solidFill>
+                  <a:srgbClr val="003A63"/>
+                </a:solidFill>
+                <a:latin typeface="Aptos Display" pitchFamily="34" charset="0"/>
+                <a:ea typeface="Aptos Display" pitchFamily="34" charset="-122"/>
+                <a:cs typeface="Aptos Display" pitchFamily="34" charset="-120"/>
+              </a:rPr>
+              <a:t>Application to AI-Supported Workflows</a:t>
+            </a:r>
+            <a:endParaRPr lang="en-US" sz="3400" dirty="0"/>
+          </a:p>
+        </p:txBody>
+      </p:sp>
+      <p:sp>
+        <p:nvSpPr>
+          <p:cNvPr id="9" name="Text 7"/>
+          <p:cNvSpPr/>
+          <p:nvPr/>
+        </p:nvSpPr>
+        <p:spPr>
+          <a:xfrm>
+            <a:off x="868680" y="1508760"/>
+            <a:ext cx="6309360" cy="4160520"/>
+          </a:xfrm>
+          <a:prstGeom prst="rect">
+            <a:avLst/>
+          </a:prstGeom>
+          <a:noFill/>
+          <a:ln/>
+        </p:spPr>
+        <p:txBody>
+          <a:bodyPr wrap="square" lIns="635" tIns="635" rIns="635" bIns="635" rtlCol="0" anchor="t">
+            <a:normAutofit/>
+          </a:bodyPr>
+          <a:lstStyle/>
+          <a:p>
+            <a:r>
+              <a:rPr lang="en-US" sz="2100" dirty="0">
+                <a:solidFill>
+                  <a:srgbClr val="17364A"/>
+                </a:solidFill>
+                <a:latin typeface="Aptos" pitchFamily="34" charset="0"/>
+                <a:ea typeface="Aptos" pitchFamily="34" charset="-122"/>
+                <a:cs typeface="Aptos" pitchFamily="34" charset="-120"/>
+              </a:rPr>
+              <a:t>This topic applies across generative AI, predictive analytics, NLP, RAG, automation, and agentic.</a:t>
+            </a:r>
+            <a:endParaRPr lang="en-US" sz="2100" dirty="0"/>
+          </a:p>
+          <a:p>
+            <a:r>
+              <a:rPr lang="en-US" sz="2100" dirty="0">
+                <a:solidFill>
+                  <a:srgbClr val="17364A"/>
+                </a:solidFill>
+                <a:latin typeface="Aptos" pitchFamily="34" charset="0"/>
+                <a:ea typeface="Aptos" pitchFamily="34" charset="-122"/>
+                <a:cs typeface="Aptos" pitchFamily="34" charset="-120"/>
+              </a:rPr>
+              <a:t>The more sensitive the data, the more consequential the output, or the more automated the action, the.</a:t>
+            </a:r>
+            <a:endParaRPr lang="en-US" sz="2100" dirty="0"/>
+          </a:p>
+        </p:txBody>
+      </p:sp>
+      <p:sp>
+        <p:nvSpPr>
+          <p:cNvPr id="10" name="Shape 8"/>
+          <p:cNvSpPr/>
+          <p:nvPr/>
+        </p:nvSpPr>
+        <p:spPr>
+          <a:xfrm>
+            <a:off x="7635240" y="1325880"/>
+            <a:ext cx="3474720" cy="1325880"/>
+          </a:xfrm>
+          <a:prstGeom prst="roundRect">
+            <a:avLst>
+              <a:gd name="adj" fmla="val 8276"/>
+            </a:avLst>
+          </a:prstGeom>
+          <a:solidFill>
+            <a:srgbClr val="EEF8ED"/>
+          </a:solidFill>
+          <a:ln w="12700">
+            <a:solidFill>
+              <a:srgbClr val="B9D7E6"/>
+            </a:solidFill>
+            <a:prstDash val="solid"/>
+          </a:ln>
+        </p:spPr>
+      </p:sp>
+      <p:sp>
+        <p:nvSpPr>
+          <p:cNvPr id="11" name="Text 9"/>
+          <p:cNvSpPr/>
+          <p:nvPr/>
+        </p:nvSpPr>
+        <p:spPr>
+          <a:xfrm>
+            <a:off x="7799832" y="1472184"/>
+            <a:ext cx="3145536" cy="256032"/>
+          </a:xfrm>
+          <a:prstGeom prst="rect">
+            <a:avLst/>
+          </a:prstGeom>
+          <a:noFill/>
+          <a:ln/>
+        </p:spPr>
+        <p:txBody>
+          <a:bodyPr wrap="square" lIns="0" tIns="0" rIns="0" bIns="0" rtlCol="0" anchor="ctr"/>
+          <a:lstStyle/>
+          <a:p>
+            <a:pPr indent="0" marL="0">
+              <a:buNone/>
+            </a:pPr>
+            <a:r>
+              <a:rPr lang="en-US" sz="1300" b="1" dirty="0">
+                <a:solidFill>
+                  <a:srgbClr val="0068B7"/>
+                </a:solidFill>
+                <a:latin typeface="Aptos" pitchFamily="34" charset="0"/>
+                <a:ea typeface="Aptos" pitchFamily="34" charset="-122"/>
+                <a:cs typeface="Aptos" pitchFamily="34" charset="-120"/>
+              </a:rPr>
+              <a:t>Implementation cue</a:t>
+            </a:r>
+            <a:endParaRPr lang="en-US" sz="1300" dirty="0"/>
+          </a:p>
+        </p:txBody>
+      </p:sp>
+      <p:sp>
+        <p:nvSpPr>
+          <p:cNvPr id="12" name="Text 10"/>
+          <p:cNvSpPr/>
+          <p:nvPr/>
+        </p:nvSpPr>
+        <p:spPr>
+          <a:xfrm>
+            <a:off x="7799832" y="1828800"/>
+            <a:ext cx="3145536" cy="685800"/>
+          </a:xfrm>
+          <a:prstGeom prst="rect">
+            <a:avLst/>
+          </a:prstGeom>
+          <a:noFill/>
+          <a:ln/>
+        </p:spPr>
+        <p:txBody>
+          <a:bodyPr wrap="square" lIns="0" tIns="0" rIns="0" bIns="0" rtlCol="0" anchor="t">
+            <a:normAutofit/>
+          </a:bodyPr>
+          <a:lstStyle/>
+          <a:p>
+            <a:pPr indent="0" marL="0">
+              <a:buNone/>
+            </a:pPr>
+            <a:r>
+              <a:rPr lang="en-US" sz="1550" dirty="0">
+                <a:solidFill>
+                  <a:srgbClr val="17364A"/>
+                </a:solidFill>
+                <a:latin typeface="Aptos" pitchFamily="34" charset="0"/>
+                <a:ea typeface="Aptos" pitchFamily="34" charset="-122"/>
+                <a:cs typeface="Aptos" pitchFamily="34" charset="-120"/>
+              </a:rPr>
+              <a:t>This topic applies across generative AI, predictive analytics, NLP, RAG, automation, and agentic.</a:t>
+            </a:r>
+            <a:endParaRPr lang="en-US" sz="1550" dirty="0"/>
+          </a:p>
+        </p:txBody>
+      </p:sp>
+      <p:sp>
+        <p:nvSpPr>
+          <p:cNvPr id="13" name="Shape 11"/>
+          <p:cNvSpPr/>
+          <p:nvPr/>
+        </p:nvSpPr>
+        <p:spPr>
+          <a:xfrm>
+            <a:off x="7635240" y="2788920"/>
+            <a:ext cx="3474720" cy="1536192"/>
+          </a:xfrm>
+          <a:prstGeom prst="roundRect">
+            <a:avLst>
+              <a:gd name="adj" fmla="val 7143"/>
+            </a:avLst>
+          </a:prstGeom>
+          <a:solidFill>
+            <a:srgbClr val="FFFFFF">
+              <a:alpha val="88000"/>
+            </a:srgbClr>
+          </a:solidFill>
+          <a:ln w="12700">
+            <a:solidFill>
+              <a:srgbClr val="D6E8F2"/>
+            </a:solidFill>
+            <a:prstDash val="solid"/>
+          </a:ln>
+        </p:spPr>
+      </p:sp>
+      <p:sp>
+        <p:nvSpPr>
+          <p:cNvPr id="14" name="Shape 12"/>
+          <p:cNvSpPr/>
+          <p:nvPr/>
+        </p:nvSpPr>
+        <p:spPr>
+          <a:xfrm>
+            <a:off x="7927848" y="3319272"/>
+            <a:ext cx="792480" cy="749808"/>
+          </a:xfrm>
+          <a:prstGeom prst="roundRect">
+            <a:avLst>
+              <a:gd name="adj" fmla="val 14634"/>
+            </a:avLst>
           </a:prstGeom>
           <a:solidFill>
             <a:srgbClr val="0068B7"/>
@@ -4461,53 +4875,14 @@
       </p:sp>
       <p:sp>
         <p:nvSpPr>
-          <p:cNvPr id="9" name="Text 7"/>
-          <p:cNvSpPr/>
-          <p:nvPr/>
-        </p:nvSpPr>
-        <p:spPr>
-          <a:xfrm>
-            <a:off x="640080" y="731520"/>
-            <a:ext cx="420624" cy="164592"/>
-          </a:xfrm>
-          <a:prstGeom prst="rect">
-            <a:avLst/>
-          </a:prstGeom>
-          <a:noFill/>
-          <a:ln/>
-        </p:spPr>
-        <p:txBody>
-          <a:bodyPr wrap="square" lIns="0" tIns="0" rIns="0" bIns="0" rtlCol="0" anchor="ctr"/>
-          <a:lstStyle/>
-          <a:p>
-            <a:pPr algn="ctr" indent="0" marL="0">
-              <a:buNone/>
-            </a:pPr>
-            <a:r>
-              <a:rPr lang="en-US" sz="1100" b="1" dirty="0">
-                <a:solidFill>
-                  <a:srgbClr val="FFFFFF"/>
-                </a:solidFill>
-                <a:latin typeface="Aptos" pitchFamily="34" charset="0"/>
-                <a:ea typeface="Aptos" pitchFamily="34" charset="-122"/>
-                <a:cs typeface="Aptos" pitchFamily="34" charset="-120"/>
-              </a:rPr>
-              <a:t>8</a:t>
-            </a:r>
-            <a:endParaRPr lang="en-US" sz="1100" dirty="0"/>
-          </a:p>
-        </p:txBody>
-      </p:sp>
-      <p:sp>
-        <p:nvSpPr>
-          <p:cNvPr id="10" name="Text 8"/>
-          <p:cNvSpPr/>
-          <p:nvPr/>
-        </p:nvSpPr>
-        <p:spPr>
-          <a:xfrm>
-            <a:off x="640080" y="621792"/>
-            <a:ext cx="10881360" cy="713232"/>
+          <p:cNvPr id="15" name="Text 13"/>
+          <p:cNvSpPr/>
+          <p:nvPr/>
+        </p:nvSpPr>
+        <p:spPr>
+          <a:xfrm>
+            <a:off x="8001000" y="3511296"/>
+            <a:ext cx="646176" cy="310896"/>
           </a:xfrm>
           <a:prstGeom prst="rect">
             <a:avLst/>
@@ -4521,98 +4896,46 @@
           </a:bodyPr>
           <a:lstStyle/>
           <a:p>
-            <a:pPr indent="0" marL="0">
-              <a:buNone/>
-            </a:pPr>
-            <a:r>
-              <a:rPr lang="en-US" sz="3400" b="1" dirty="0">
-                <a:solidFill>
-                  <a:srgbClr val="003A63"/>
-                </a:solidFill>
-                <a:latin typeface="Aptos Display" pitchFamily="34" charset="0"/>
-                <a:ea typeface="Aptos Display" pitchFamily="34" charset="-122"/>
-                <a:cs typeface="Aptos Display" pitchFamily="34" charset="-120"/>
-              </a:rPr>
-              <a:t>Application to AI-Supported Workflows</a:t>
-            </a:r>
-            <a:endParaRPr lang="en-US" sz="3400" dirty="0"/>
-          </a:p>
-        </p:txBody>
-      </p:sp>
-      <p:sp>
-        <p:nvSpPr>
-          <p:cNvPr id="11" name="Text 9"/>
-          <p:cNvSpPr/>
-          <p:nvPr/>
-        </p:nvSpPr>
-        <p:spPr>
-          <a:xfrm>
-            <a:off x="868680" y="1508760"/>
-            <a:ext cx="6537960" cy="4160520"/>
-          </a:xfrm>
-          <a:prstGeom prst="rect">
-            <a:avLst/>
-          </a:prstGeom>
-          <a:noFill/>
-          <a:ln/>
-        </p:spPr>
-        <p:txBody>
-          <a:bodyPr wrap="square" lIns="635" tIns="635" rIns="635" bIns="635" rtlCol="0" anchor="t">
-            <a:normAutofit/>
-          </a:bodyPr>
-          <a:lstStyle/>
-          <a:p>
-            <a:r>
-              <a:rPr lang="en-US" sz="2100" dirty="0">
-                <a:solidFill>
-                  <a:srgbClr val="17364A"/>
-                </a:solidFill>
-                <a:latin typeface="Aptos" pitchFamily="34" charset="0"/>
-                <a:ea typeface="Aptos" pitchFamily="34" charset="-122"/>
-                <a:cs typeface="Aptos" pitchFamily="34" charset="-120"/>
-              </a:rPr>
-              <a:t>This topic applies across generative AI, predictive analytics, NLP, RAG, automation, and agentic.</a:t>
-            </a:r>
-            <a:endParaRPr lang="en-US" sz="2100" dirty="0"/>
-          </a:p>
-          <a:p>
-            <a:r>
-              <a:rPr lang="en-US" sz="2100" dirty="0">
-                <a:solidFill>
-                  <a:srgbClr val="17364A"/>
-                </a:solidFill>
-                <a:latin typeface="Aptos" pitchFamily="34" charset="0"/>
-                <a:ea typeface="Aptos" pitchFamily="34" charset="-122"/>
-                <a:cs typeface="Aptos" pitchFamily="34" charset="-120"/>
-              </a:rPr>
-              <a:t>The more sensitive the data, the more consequential the output, or the more automated the action, the.</a:t>
-            </a:r>
-            <a:endParaRPr lang="en-US" sz="2100" dirty="0"/>
-          </a:p>
-        </p:txBody>
-      </p:sp>
-      <p:sp>
-        <p:nvSpPr>
-          <p:cNvPr id="12" name="Shape 10"/>
-          <p:cNvSpPr/>
-          <p:nvPr/>
-        </p:nvSpPr>
-        <p:spPr>
-          <a:xfrm>
-            <a:off x="7909560" y="1417320"/>
-            <a:ext cx="3154680" cy="1828800"/>
+            <a:pPr algn="ctr" indent="0" marL="0">
+              <a:buNone/>
+            </a:pPr>
+            <a:r>
+              <a:rPr lang="en-US" sz="1500" b="1" dirty="0">
+                <a:solidFill>
+                  <a:srgbClr val="FFFFFF"/>
+                </a:solidFill>
+                <a:latin typeface="Aptos" pitchFamily="34" charset="0"/>
+                <a:ea typeface="Aptos" pitchFamily="34" charset="-122"/>
+                <a:cs typeface="Aptos" pitchFamily="34" charset="-120"/>
+              </a:rPr>
+              <a:t>Plan</a:t>
+            </a:r>
+            <a:endParaRPr lang="en-US" sz="1500" dirty="0"/>
+          </a:p>
+        </p:txBody>
+      </p:sp>
+      <p:sp>
+        <p:nvSpPr>
+          <p:cNvPr id="16" name="Shape 14"/>
+          <p:cNvSpPr/>
+          <p:nvPr/>
+        </p:nvSpPr>
+        <p:spPr>
+          <a:xfrm>
+            <a:off x="8976360" y="3319272"/>
+            <a:ext cx="792480" cy="749808"/>
           </a:xfrm>
           <a:prstGeom prst="roundRect">
             <a:avLst>
-              <a:gd name="adj" fmla="val 6000"/>
+              <a:gd name="adj" fmla="val 14634"/>
             </a:avLst>
           </a:prstGeom>
           <a:solidFill>
-            <a:srgbClr val="EEF8ED"/>
+            <a:srgbClr val="2F8A28"/>
           </a:solidFill>
           <a:ln w="12700">
             <a:solidFill>
-              <a:srgbClr val="B9D7E6"/>
+              <a:srgbClr val="2F8A28"/>
             </a:solidFill>
             <a:prstDash val="solid"/>
           </a:ln>
@@ -4620,98 +4943,189 @@
       </p:sp>
       <p:sp>
         <p:nvSpPr>
-          <p:cNvPr id="13" name="Text 11"/>
-          <p:cNvSpPr/>
-          <p:nvPr/>
-        </p:nvSpPr>
-        <p:spPr>
-          <a:xfrm>
-            <a:off x="8074152" y="1563624"/>
-            <a:ext cx="2825496" cy="256032"/>
-          </a:xfrm>
-          <a:prstGeom prst="rect">
-            <a:avLst/>
-          </a:prstGeom>
-          <a:noFill/>
-          <a:ln/>
-        </p:spPr>
-        <p:txBody>
-          <a:bodyPr wrap="square" lIns="0" tIns="0" rIns="0" bIns="0" rtlCol="0" anchor="ctr"/>
-          <a:lstStyle/>
-          <a:p>
-            <a:pPr indent="0" marL="0">
-              <a:buNone/>
-            </a:pPr>
-            <a:r>
-              <a:rPr lang="en-US" sz="1300" b="1" dirty="0">
-                <a:solidFill>
-                  <a:srgbClr val="0068B7"/>
-                </a:solidFill>
-                <a:latin typeface="Aptos" pitchFamily="34" charset="0"/>
-                <a:ea typeface="Aptos" pitchFamily="34" charset="-122"/>
-                <a:cs typeface="Aptos" pitchFamily="34" charset="-120"/>
-              </a:rPr>
-              <a:t>Key idea</a:t>
-            </a:r>
-            <a:endParaRPr lang="en-US" sz="1300" dirty="0"/>
-          </a:p>
-        </p:txBody>
-      </p:sp>
-      <p:sp>
-        <p:nvSpPr>
-          <p:cNvPr id="14" name="Text 12"/>
-          <p:cNvSpPr/>
-          <p:nvPr/>
-        </p:nvSpPr>
-        <p:spPr>
-          <a:xfrm>
-            <a:off x="8074152" y="1920240"/>
-            <a:ext cx="2825496" cy="1188720"/>
-          </a:xfrm>
-          <a:prstGeom prst="rect">
-            <a:avLst/>
-          </a:prstGeom>
-          <a:noFill/>
-          <a:ln/>
-        </p:spPr>
-        <p:txBody>
-          <a:bodyPr wrap="square" lIns="0" tIns="0" rIns="0" bIns="0" rtlCol="0" anchor="t">
+          <p:cNvPr id="17" name="Text 15"/>
+          <p:cNvSpPr/>
+          <p:nvPr/>
+        </p:nvSpPr>
+        <p:spPr>
+          <a:xfrm>
+            <a:off x="9049512" y="3511296"/>
+            <a:ext cx="646176" cy="310896"/>
+          </a:xfrm>
+          <a:prstGeom prst="rect">
+            <a:avLst/>
+          </a:prstGeom>
+          <a:noFill/>
+          <a:ln/>
+        </p:spPr>
+        <p:txBody>
+          <a:bodyPr wrap="square" lIns="0" tIns="0" rIns="0" bIns="0" rtlCol="0" anchor="ctr">
             <a:normAutofit/>
           </a:bodyPr>
           <a:lstStyle/>
           <a:p>
-            <a:pPr indent="0" marL="0">
-              <a:buNone/>
-            </a:pPr>
-            <a:r>
-              <a:rPr lang="en-US" sz="1550" dirty="0">
-                <a:solidFill>
-                  <a:srgbClr val="17364A"/>
-                </a:solidFill>
-                <a:latin typeface="Aptos" pitchFamily="34" charset="0"/>
-                <a:ea typeface="Aptos" pitchFamily="34" charset="-122"/>
-                <a:cs typeface="Aptos" pitchFamily="34" charset="-120"/>
-              </a:rPr>
-              <a:t>This topic applies across generative AI, predictive analytics, NLP, RAG, automation, and agentic.</a:t>
-            </a:r>
-            <a:endParaRPr lang="en-US" sz="1550" dirty="0"/>
-          </a:p>
-        </p:txBody>
-      </p:sp>
-      <p:sp>
-        <p:nvSpPr>
-          <p:cNvPr id="15" name="Shape 13"/>
-          <p:cNvSpPr/>
-          <p:nvPr/>
-        </p:nvSpPr>
-        <p:spPr>
-          <a:xfrm>
-            <a:off x="7909560" y="3520440"/>
-            <a:ext cx="3154680" cy="1737360"/>
+            <a:pPr algn="ctr" indent="0" marL="0">
+              <a:buNone/>
+            </a:pPr>
+            <a:r>
+              <a:rPr lang="en-US" sz="1500" b="1" dirty="0">
+                <a:solidFill>
+                  <a:srgbClr val="FFFFFF"/>
+                </a:solidFill>
+                <a:latin typeface="Aptos" pitchFamily="34" charset="0"/>
+                <a:ea typeface="Aptos" pitchFamily="34" charset="-122"/>
+                <a:cs typeface="Aptos" pitchFamily="34" charset="-120"/>
+              </a:rPr>
+              <a:t>Do</a:t>
+            </a:r>
+            <a:endParaRPr lang="en-US" sz="1500" dirty="0"/>
+          </a:p>
+        </p:txBody>
+      </p:sp>
+      <p:sp>
+        <p:nvSpPr>
+          <p:cNvPr id="18" name="Shape 16"/>
+          <p:cNvSpPr/>
+          <p:nvPr/>
+        </p:nvSpPr>
+        <p:spPr>
+          <a:xfrm>
+            <a:off x="10024872" y="3319272"/>
+            <a:ext cx="792480" cy="749808"/>
           </a:xfrm>
           <a:prstGeom prst="roundRect">
             <a:avLst>
-              <a:gd name="adj" fmla="val 6316"/>
+              <a:gd name="adj" fmla="val 14634"/>
+            </a:avLst>
+          </a:prstGeom>
+          <a:solidFill>
+            <a:srgbClr val="D69A2D"/>
+          </a:solidFill>
+          <a:ln w="12700">
+            <a:solidFill>
+              <a:srgbClr val="D69A2D"/>
+            </a:solidFill>
+            <a:prstDash val="solid"/>
+          </a:ln>
+        </p:spPr>
+      </p:sp>
+      <p:sp>
+        <p:nvSpPr>
+          <p:cNvPr id="19" name="Text 17"/>
+          <p:cNvSpPr/>
+          <p:nvPr/>
+        </p:nvSpPr>
+        <p:spPr>
+          <a:xfrm>
+            <a:off x="10098024" y="3511296"/>
+            <a:ext cx="646176" cy="310896"/>
+          </a:xfrm>
+          <a:prstGeom prst="rect">
+            <a:avLst/>
+          </a:prstGeom>
+          <a:noFill/>
+          <a:ln/>
+        </p:spPr>
+        <p:txBody>
+          <a:bodyPr wrap="square" lIns="0" tIns="0" rIns="0" bIns="0" rtlCol="0" anchor="ctr">
+            <a:normAutofit/>
+          </a:bodyPr>
+          <a:lstStyle/>
+          <a:p>
+            <a:pPr algn="ctr" indent="0" marL="0">
+              <a:buNone/>
+            </a:pPr>
+            <a:r>
+              <a:rPr lang="en-US" sz="1500" b="1" dirty="0">
+                <a:solidFill>
+                  <a:srgbClr val="FFFFFF"/>
+                </a:solidFill>
+                <a:latin typeface="Aptos" pitchFamily="34" charset="0"/>
+                <a:ea typeface="Aptos" pitchFamily="34" charset="-122"/>
+                <a:cs typeface="Aptos" pitchFamily="34" charset="-120"/>
+              </a:rPr>
+              <a:t>Review</a:t>
+            </a:r>
+            <a:endParaRPr lang="en-US" sz="1500" dirty="0"/>
+          </a:p>
+        </p:txBody>
+      </p:sp>
+      <p:sp>
+        <p:nvSpPr>
+          <p:cNvPr id="20" name="Shape 18"/>
+          <p:cNvSpPr/>
+          <p:nvPr/>
+        </p:nvSpPr>
+        <p:spPr>
+          <a:xfrm>
+            <a:off x="8293608" y="4389120"/>
+            <a:ext cx="2157984" cy="0"/>
+          </a:xfrm>
+          <a:prstGeom prst="line">
+            <a:avLst/>
+          </a:prstGeom>
+          <a:noFill/>
+          <a:ln w="25400">
+            <a:solidFill>
+              <a:srgbClr val="8ABBD8"/>
+            </a:solidFill>
+            <a:prstDash val="solid"/>
+          </a:ln>
+        </p:spPr>
+      </p:sp>
+      <p:sp>
+        <p:nvSpPr>
+          <p:cNvPr id="21" name="Text 19"/>
+          <p:cNvSpPr/>
+          <p:nvPr/>
+        </p:nvSpPr>
+        <p:spPr>
+          <a:xfrm>
+            <a:off x="7909560" y="3977640"/>
+            <a:ext cx="2926080" cy="182880"/>
+          </a:xfrm>
+          <a:prstGeom prst="rect">
+            <a:avLst/>
+          </a:prstGeom>
+          <a:noFill/>
+          <a:ln/>
+        </p:spPr>
+        <p:txBody>
+          <a:bodyPr wrap="square" lIns="0" tIns="0" rIns="0" bIns="0" rtlCol="0" anchor="ctr"/>
+          <a:lstStyle/>
+          <a:p>
+            <a:pPr algn="ctr" indent="0" marL="0">
+              <a:buNone/>
+            </a:pPr>
+            <a:r>
+              <a:rPr lang="en-US" sz="1000" dirty="0">
+                <a:solidFill>
+                  <a:srgbClr val="003A63"/>
+                </a:solidFill>
+                <a:latin typeface="Aptos" pitchFamily="34" charset="0"/>
+                <a:ea typeface="Aptos" pitchFamily="34" charset="-122"/>
+                <a:cs typeface="Aptos" pitchFamily="34" charset="-120"/>
+              </a:rPr>
+              <a:t>Dependencies visible</a:t>
+            </a:r>
+            <a:endParaRPr lang="en-US" sz="1000" dirty="0"/>
+          </a:p>
+        </p:txBody>
+      </p:sp>
+      <p:sp>
+        <p:nvSpPr>
+          <p:cNvPr id="22" name="Shape 20"/>
+          <p:cNvSpPr/>
+          <p:nvPr/>
+        </p:nvSpPr>
+        <p:spPr>
+          <a:xfrm>
+            <a:off x="7635240" y="4498848"/>
+            <a:ext cx="3474720" cy="1143000"/>
+          </a:xfrm>
+          <a:prstGeom prst="roundRect">
+            <a:avLst>
+              <a:gd name="adj" fmla="val 9600"/>
             </a:avLst>
           </a:prstGeom>
           <a:solidFill>
@@ -4727,14 +5141,14 @@
       </p:sp>
       <p:sp>
         <p:nvSpPr>
-          <p:cNvPr id="16" name="Text 14"/>
-          <p:cNvSpPr/>
-          <p:nvPr/>
-        </p:nvSpPr>
-        <p:spPr>
-          <a:xfrm>
-            <a:off x="8074152" y="3666744"/>
-            <a:ext cx="2825496" cy="256032"/>
+          <p:cNvPr id="23" name="Text 21"/>
+          <p:cNvSpPr/>
+          <p:nvPr/>
+        </p:nvSpPr>
+        <p:spPr>
+          <a:xfrm>
+            <a:off x="7799832" y="4645152"/>
+            <a:ext cx="3145536" cy="256032"/>
           </a:xfrm>
           <a:prstGeom prst="rect">
             <a:avLst/>
@@ -4758,7 +5172,7 @@
                 <a:ea typeface="Aptos" pitchFamily="34" charset="-122"/>
                 <a:cs typeface="Aptos" pitchFamily="34" charset="-120"/>
               </a:rPr>
-              <a:t>Use this for</a:t>
+              <a:t>Next action</a:t>
             </a:r>
             <a:endParaRPr lang="en-US" sz="1300" dirty="0"/>
           </a:p>
@@ -4766,14 +5180,14 @@
       </p:sp>
       <p:sp>
         <p:nvSpPr>
-          <p:cNvPr id="17" name="Text 15"/>
-          <p:cNvSpPr/>
-          <p:nvPr/>
-        </p:nvSpPr>
-        <p:spPr>
-          <a:xfrm>
-            <a:off x="8074152" y="4023360"/>
-            <a:ext cx="2825496" cy="1097280"/>
+          <p:cNvPr id="24" name="Text 22"/>
+          <p:cNvSpPr/>
+          <p:nvPr/>
+        </p:nvSpPr>
+        <p:spPr>
+          <a:xfrm>
+            <a:off x="7799832" y="5001768"/>
+            <a:ext cx="3145536" cy="502920"/>
           </a:xfrm>
           <a:prstGeom prst="rect">
             <a:avLst/>
@@ -4799,7 +5213,7 @@
                 <a:ea typeface="Aptos" pitchFamily="34" charset="-122"/>
                 <a:cs typeface="Aptos" pitchFamily="34" charset="-120"/>
               </a:rPr>
-              <a:t>Connect the concept to public health decisions, safeguards, documentation, or implementation work.</a:t>
+              <a:t>Use the concept to clarify workflow changes, dependencies, staffing, procurement requirements, training needs, and implementation checkpoints.</a:t>
             </a:r>
             <a:endParaRPr lang="en-US" sz="1550" dirty="0"/>
           </a:p>
@@ -4973,8 +5387,8 @@
         </p:nvSpPr>
         <p:spPr>
           <a:xfrm>
-            <a:off x="9966960" y="6537960"/>
-            <a:ext cx="1645920" cy="201168"/>
+            <a:off x="9646920" y="6537960"/>
+            <a:ext cx="1965960" cy="201168"/>
           </a:xfrm>
           <a:prstGeom prst="rect">
             <a:avLst/>
@@ -4998,7 +5412,7 @@
                 <a:ea typeface="Aptos" pitchFamily="34" charset="-122"/>
                 <a:cs typeface="Aptos" pitchFamily="34" charset="-120"/>
               </a:rPr>
-              <a:t>Â© Paula Soper</a:t>
+              <a:t>Copyright Paula Soper</a:t>
             </a:r>
             <a:endParaRPr lang="en-US" sz="800" dirty="0"/>
           </a:p>
@@ -5045,77 +5459,13 @@
       </p:sp>
       <p:sp>
         <p:nvSpPr>
-          <p:cNvPr id="8" name="Shape 6"/>
+          <p:cNvPr id="8" name="Text 6"/>
           <p:cNvSpPr/>
           <p:nvPr/>
         </p:nvSpPr>
         <p:spPr>
           <a:xfrm>
             <a:off x="640080" y="658368"/>
-            <a:ext cx="420624" cy="420624"/>
-          </a:xfrm>
-          <a:prstGeom prst="ellipse">
-            <a:avLst/>
-          </a:prstGeom>
-          <a:solidFill>
-            <a:srgbClr val="0068B7"/>
-          </a:solidFill>
-          <a:ln w="12700">
-            <a:solidFill>
-              <a:srgbClr val="0068B7"/>
-            </a:solidFill>
-            <a:prstDash val="solid"/>
-          </a:ln>
-        </p:spPr>
-      </p:sp>
-      <p:sp>
-        <p:nvSpPr>
-          <p:cNvPr id="9" name="Text 7"/>
-          <p:cNvSpPr/>
-          <p:nvPr/>
-        </p:nvSpPr>
-        <p:spPr>
-          <a:xfrm>
-            <a:off x="640080" y="731520"/>
-            <a:ext cx="420624" cy="164592"/>
-          </a:xfrm>
-          <a:prstGeom prst="rect">
-            <a:avLst/>
-          </a:prstGeom>
-          <a:noFill/>
-          <a:ln/>
-        </p:spPr>
-        <p:txBody>
-          <a:bodyPr wrap="square" lIns="0" tIns="0" rIns="0" bIns="0" rtlCol="0" anchor="ctr"/>
-          <a:lstStyle/>
-          <a:p>
-            <a:pPr algn="ctr" indent="0" marL="0">
-              <a:buNone/>
-            </a:pPr>
-            <a:r>
-              <a:rPr lang="en-US" sz="1100" b="1" dirty="0">
-                <a:solidFill>
-                  <a:srgbClr val="FFFFFF"/>
-                </a:solidFill>
-                <a:latin typeface="Aptos" pitchFamily="34" charset="0"/>
-                <a:ea typeface="Aptos" pitchFamily="34" charset="-122"/>
-                <a:cs typeface="Aptos" pitchFamily="34" charset="-120"/>
-              </a:rPr>
-              <a:t>9</a:t>
-            </a:r>
-            <a:endParaRPr lang="en-US" sz="1100" dirty="0"/>
-          </a:p>
-        </p:txBody>
-      </p:sp>
-      <p:sp>
-        <p:nvSpPr>
-          <p:cNvPr id="10" name="Text 8"/>
-          <p:cNvSpPr/>
-          <p:nvPr/>
-        </p:nvSpPr>
-        <p:spPr>
-          <a:xfrm>
-            <a:off x="640080" y="621792"/>
             <a:ext cx="10881360" cy="713232"/>
           </a:xfrm>
           <a:prstGeom prst="rect">
@@ -5150,14 +5500,14 @@
       </p:sp>
       <p:sp>
         <p:nvSpPr>
-          <p:cNvPr id="11" name="Text 9"/>
+          <p:cNvPr id="9" name="Text 7"/>
           <p:cNvSpPr/>
           <p:nvPr/>
         </p:nvSpPr>
         <p:spPr>
           <a:xfrm>
             <a:off x="868680" y="1508760"/>
-            <a:ext cx="6537960" cy="4160520"/>
+            <a:ext cx="6309360" cy="4160520"/>
           </a:xfrm>
           <a:prstGeom prst="rect">
             <a:avLst/>
@@ -5216,18 +5566,18 @@
       </p:sp>
       <p:sp>
         <p:nvSpPr>
-          <p:cNvPr id="12" name="Shape 10"/>
-          <p:cNvSpPr/>
-          <p:nvPr/>
-        </p:nvSpPr>
-        <p:spPr>
-          <a:xfrm>
-            <a:off x="7909560" y="1417320"/>
-            <a:ext cx="3154680" cy="1828800"/>
+          <p:cNvPr id="10" name="Shape 8"/>
+          <p:cNvSpPr/>
+          <p:nvPr/>
+        </p:nvSpPr>
+        <p:spPr>
+          <a:xfrm>
+            <a:off x="7635240" y="1325880"/>
+            <a:ext cx="3474720" cy="1325880"/>
           </a:xfrm>
           <a:prstGeom prst="roundRect">
             <a:avLst>
-              <a:gd name="adj" fmla="val 6000"/>
+              <a:gd name="adj" fmla="val 8276"/>
             </a:avLst>
           </a:prstGeom>
           <a:solidFill>
@@ -5243,14 +5593,14 @@
       </p:sp>
       <p:sp>
         <p:nvSpPr>
-          <p:cNvPr id="13" name="Text 11"/>
-          <p:cNvSpPr/>
-          <p:nvPr/>
-        </p:nvSpPr>
-        <p:spPr>
-          <a:xfrm>
-            <a:off x="8074152" y="1563624"/>
-            <a:ext cx="2825496" cy="256032"/>
+          <p:cNvPr id="11" name="Text 9"/>
+          <p:cNvSpPr/>
+          <p:nvPr/>
+        </p:nvSpPr>
+        <p:spPr>
+          <a:xfrm>
+            <a:off x="7799832" y="1472184"/>
+            <a:ext cx="3145536" cy="256032"/>
           </a:xfrm>
           <a:prstGeom prst="rect">
             <a:avLst/>
@@ -5274,7 +5624,7 @@
                 <a:ea typeface="Aptos" pitchFamily="34" charset="-122"/>
                 <a:cs typeface="Aptos" pitchFamily="34" charset="-120"/>
               </a:rPr>
-              <a:t>Key idea</a:t>
+              <a:t>Core concept</a:t>
             </a:r>
             <a:endParaRPr lang="en-US" sz="1300" dirty="0"/>
           </a:p>
@@ -5282,14 +5632,14 @@
       </p:sp>
       <p:sp>
         <p:nvSpPr>
-          <p:cNvPr id="14" name="Text 12"/>
-          <p:cNvSpPr/>
-          <p:nvPr/>
-        </p:nvSpPr>
-        <p:spPr>
-          <a:xfrm>
-            <a:off x="8074152" y="1920240"/>
-            <a:ext cx="2825496" cy="1188720"/>
+          <p:cNvPr id="12" name="Text 10"/>
+          <p:cNvSpPr/>
+          <p:nvPr/>
+        </p:nvSpPr>
+        <p:spPr>
+          <a:xfrm>
+            <a:off x="7799832" y="1828800"/>
+            <a:ext cx="3145536" cy="685800"/>
           </a:xfrm>
           <a:prstGeom prst="rect">
             <a:avLst/>
@@ -5323,18 +5673,159 @@
       </p:sp>
       <p:sp>
         <p:nvSpPr>
-          <p:cNvPr id="15" name="Shape 13"/>
-          <p:cNvSpPr/>
-          <p:nvPr/>
-        </p:nvSpPr>
-        <p:spPr>
-          <a:xfrm>
-            <a:off x="7909560" y="3520440"/>
-            <a:ext cx="3154680" cy="1737360"/>
+          <p:cNvPr id="13" name="Shape 11"/>
+          <p:cNvSpPr/>
+          <p:nvPr/>
+        </p:nvSpPr>
+        <p:spPr>
+          <a:xfrm>
+            <a:off x="7635240" y="2788920"/>
+            <a:ext cx="3474720" cy="1536192"/>
           </a:xfrm>
           <a:prstGeom prst="roundRect">
             <a:avLst>
-              <a:gd name="adj" fmla="val 6316"/>
+              <a:gd name="adj" fmla="val 7143"/>
+            </a:avLst>
+          </a:prstGeom>
+          <a:solidFill>
+            <a:srgbClr val="FFFFFF">
+              <a:alpha val="88000"/>
+            </a:srgbClr>
+          </a:solidFill>
+          <a:ln w="12700">
+            <a:solidFill>
+              <a:srgbClr val="D6E8F2"/>
+            </a:solidFill>
+            <a:prstDash val="solid"/>
+          </a:ln>
+        </p:spPr>
+      </p:sp>
+      <p:sp>
+        <p:nvSpPr>
+          <p:cNvPr id="14" name="Shape 12"/>
+          <p:cNvSpPr/>
+          <p:nvPr/>
+        </p:nvSpPr>
+        <p:spPr>
+          <a:xfrm>
+            <a:off x="8074152" y="3291840"/>
+            <a:ext cx="2596896" cy="749808"/>
+          </a:xfrm>
+          <a:prstGeom prst="rect">
+            <a:avLst/>
+          </a:prstGeom>
+          <a:solidFill>
+            <a:srgbClr val="EAF6F8"/>
+          </a:solidFill>
+          <a:ln w="12700">
+            <a:solidFill>
+              <a:srgbClr val="8ABBD8"/>
+            </a:solidFill>
+            <a:prstDash val="solid"/>
+          </a:ln>
+        </p:spPr>
+      </p:sp>
+      <p:sp>
+        <p:nvSpPr>
+          <p:cNvPr id="15" name="Shape 13"/>
+          <p:cNvSpPr/>
+          <p:nvPr/>
+        </p:nvSpPr>
+        <p:spPr>
+          <a:xfrm>
+            <a:off x="8202168" y="3721608"/>
+            <a:ext cx="2340864" cy="0"/>
+          </a:xfrm>
+          <a:prstGeom prst="line">
+            <a:avLst/>
+          </a:prstGeom>
+          <a:noFill/>
+          <a:ln w="19050">
+            <a:solidFill>
+              <a:srgbClr val="0068B7"/>
+            </a:solidFill>
+            <a:prstDash val="solid"/>
+          </a:ln>
+        </p:spPr>
+      </p:sp>
+      <p:sp>
+        <p:nvSpPr>
+          <p:cNvPr id="16" name="Shape 14"/>
+          <p:cNvSpPr/>
+          <p:nvPr/>
+        </p:nvSpPr>
+        <p:spPr>
+          <a:xfrm>
+            <a:off x="9198864" y="4206240"/>
+            <a:ext cx="347472" cy="347472"/>
+          </a:xfrm>
+          <a:prstGeom prst="ellipse">
+            <a:avLst/>
+          </a:prstGeom>
+          <a:solidFill>
+            <a:srgbClr val="2F8A28"/>
+          </a:solidFill>
+          <a:ln w="12700">
+            <a:solidFill>
+              <a:srgbClr val="2F8A28"/>
+            </a:solidFill>
+            <a:prstDash val="solid"/>
+          </a:ln>
+        </p:spPr>
+      </p:sp>
+      <p:sp>
+        <p:nvSpPr>
+          <p:cNvPr id="17" name="Text 15"/>
+          <p:cNvSpPr/>
+          <p:nvPr/>
+        </p:nvSpPr>
+        <p:spPr>
+          <a:xfrm>
+            <a:off x="7909560" y="3977640"/>
+            <a:ext cx="2926080" cy="182880"/>
+          </a:xfrm>
+          <a:prstGeom prst="rect">
+            <a:avLst/>
+          </a:prstGeom>
+          <a:noFill/>
+          <a:ln/>
+        </p:spPr>
+        <p:txBody>
+          <a:bodyPr wrap="square" lIns="0" tIns="0" rIns="0" bIns="0" rtlCol="0" anchor="ctr"/>
+          <a:lstStyle/>
+          <a:p>
+            <a:pPr algn="ctr" indent="0" marL="0">
+              <a:buNone/>
+            </a:pPr>
+            <a:r>
+              <a:rPr lang="en-US" sz="1000" dirty="0">
+                <a:solidFill>
+                  <a:srgbClr val="003A63"/>
+                </a:solidFill>
+                <a:latin typeface="Aptos" pitchFamily="34" charset="0"/>
+                <a:ea typeface="Aptos" pitchFamily="34" charset="-122"/>
+                <a:cs typeface="Aptos" pitchFamily="34" charset="-120"/>
+              </a:rPr>
+              <a:t>Concept to action</a:t>
+            </a:r>
+            <a:endParaRPr lang="en-US" sz="1000" dirty="0"/>
+          </a:p>
+        </p:txBody>
+      </p:sp>
+      <p:sp>
+        <p:nvSpPr>
+          <p:cNvPr id="18" name="Shape 16"/>
+          <p:cNvSpPr/>
+          <p:nvPr/>
+        </p:nvSpPr>
+        <p:spPr>
+          <a:xfrm>
+            <a:off x="7635240" y="4498848"/>
+            <a:ext cx="3474720" cy="1143000"/>
+          </a:xfrm>
+          <a:prstGeom prst="roundRect">
+            <a:avLst>
+              <a:gd name="adj" fmla="val 9600"/>
             </a:avLst>
           </a:prstGeom>
           <a:solidFill>
@@ -5350,14 +5841,14 @@
       </p:sp>
       <p:sp>
         <p:nvSpPr>
-          <p:cNvPr id="16" name="Text 14"/>
-          <p:cNvSpPr/>
-          <p:nvPr/>
-        </p:nvSpPr>
-        <p:spPr>
-          <a:xfrm>
-            <a:off x="8074152" y="3666744"/>
-            <a:ext cx="2825496" cy="256032"/>
+          <p:cNvPr id="19" name="Text 17"/>
+          <p:cNvSpPr/>
+          <p:nvPr/>
+        </p:nvSpPr>
+        <p:spPr>
+          <a:xfrm>
+            <a:off x="7799832" y="4645152"/>
+            <a:ext cx="3145536" cy="256032"/>
           </a:xfrm>
           <a:prstGeom prst="rect">
             <a:avLst/>
@@ -5381,7 +5872,7 @@
                 <a:ea typeface="Aptos" pitchFamily="34" charset="-122"/>
                 <a:cs typeface="Aptos" pitchFamily="34" charset="-120"/>
               </a:rPr>
-              <a:t>Use this for</a:t>
+              <a:t>Apply it</a:t>
             </a:r>
             <a:endParaRPr lang="en-US" sz="1300" dirty="0"/>
           </a:p>
@@ -5389,14 +5880,14 @@
       </p:sp>
       <p:sp>
         <p:nvSpPr>
-          <p:cNvPr id="17" name="Text 15"/>
-          <p:cNvSpPr/>
-          <p:nvPr/>
-        </p:nvSpPr>
-        <p:spPr>
-          <a:xfrm>
-            <a:off x="8074152" y="4023360"/>
-            <a:ext cx="2825496" cy="1097280"/>
+          <p:cNvPr id="20" name="Text 18"/>
+          <p:cNvSpPr/>
+          <p:nvPr/>
+        </p:nvSpPr>
+        <p:spPr>
+          <a:xfrm>
+            <a:off x="7799832" y="5001768"/>
+            <a:ext cx="3145536" cy="502920"/>
           </a:xfrm>
           <a:prstGeom prst="rect">
             <a:avLst/>
@@ -5422,7 +5913,7 @@
                 <a:ea typeface="Aptos" pitchFamily="34" charset="-122"/>
                 <a:cs typeface="Aptos" pitchFamily="34" charset="-120"/>
               </a:rPr>
-              <a:t>Connect the concept to public health decisions, safeguards, documentation, or implementation work.</a:t>
+              <a:t>Connect the concept to public health purpose, responsible use, required safeguards, documentation, and the next action a department should take.</a:t>
             </a:r>
             <a:endParaRPr lang="en-US" sz="1550" dirty="0"/>
           </a:p>
@@ -5596,8 +6087,8 @@
         </p:nvSpPr>
         <p:spPr>
           <a:xfrm>
-            <a:off x="9966960" y="6537960"/>
-            <a:ext cx="1645920" cy="201168"/>
+            <a:off x="9646920" y="6537960"/>
+            <a:ext cx="1965960" cy="201168"/>
           </a:xfrm>
           <a:prstGeom prst="rect">
             <a:avLst/>
@@ -5621,7 +6112,7 @@
                 <a:ea typeface="Aptos" pitchFamily="34" charset="-122"/>
                 <a:cs typeface="Aptos" pitchFamily="34" charset="-120"/>
               </a:rPr>
-              <a:t>Â© Paula Soper</a:t>
+              <a:t>Copyright Paula Soper</a:t>
             </a:r>
             <a:endParaRPr lang="en-US" sz="800" dirty="0"/>
           </a:p>
@@ -5716,7 +6207,7 @@
         <p:spPr>
           <a:xfrm>
             <a:off x="868680" y="1508760"/>
-            <a:ext cx="6537960" cy="4160520"/>
+            <a:ext cx="6309360" cy="4160520"/>
           </a:xfrm>
           <a:prstGeom prst="rect">
             <a:avLst/>
@@ -5767,12 +6258,12 @@
         </p:nvSpPr>
         <p:spPr>
           <a:xfrm>
-            <a:off x="7909560" y="1417320"/>
-            <a:ext cx="3154680" cy="1828800"/>
+            <a:off x="7635240" y="1325880"/>
+            <a:ext cx="3474720" cy="1325880"/>
           </a:xfrm>
           <a:prstGeom prst="roundRect">
             <a:avLst>
-              <a:gd name="adj" fmla="val 6000"/>
+              <a:gd name="adj" fmla="val 8276"/>
             </a:avLst>
           </a:prstGeom>
           <a:solidFill>
@@ -5794,8 +6285,8 @@
         </p:nvSpPr>
         <p:spPr>
           <a:xfrm>
-            <a:off x="8074152" y="1563624"/>
-            <a:ext cx="2825496" cy="256032"/>
+            <a:off x="7799832" y="1472184"/>
+            <a:ext cx="3145536" cy="256032"/>
           </a:xfrm>
           <a:prstGeom prst="rect">
             <a:avLst/>
@@ -5819,7 +6310,7 @@
                 <a:ea typeface="Aptos" pitchFamily="34" charset="-122"/>
                 <a:cs typeface="Aptos" pitchFamily="34" charset="-120"/>
               </a:rPr>
-              <a:t>Key idea</a:t>
+              <a:t>Core concept</a:t>
             </a:r>
             <a:endParaRPr lang="en-US" sz="1300" dirty="0"/>
           </a:p>
@@ -5833,8 +6324,8 @@
         </p:nvSpPr>
         <p:spPr>
           <a:xfrm>
-            <a:off x="8074152" y="1920240"/>
-            <a:ext cx="2825496" cy="1188720"/>
+            <a:off x="7799832" y="1828800"/>
+            <a:ext cx="3145536" cy="685800"/>
           </a:xfrm>
           <a:prstGeom prst="rect">
             <a:avLst/>
@@ -5874,12 +6365,153 @@
         </p:nvSpPr>
         <p:spPr>
           <a:xfrm>
-            <a:off x="7909560" y="3520440"/>
-            <a:ext cx="3154680" cy="1737360"/>
+            <a:off x="7635240" y="2788920"/>
+            <a:ext cx="3474720" cy="1536192"/>
           </a:xfrm>
           <a:prstGeom prst="roundRect">
             <a:avLst>
-              <a:gd name="adj" fmla="val 6316"/>
+              <a:gd name="adj" fmla="val 7143"/>
+            </a:avLst>
+          </a:prstGeom>
+          <a:solidFill>
+            <a:srgbClr val="FFFFFF">
+              <a:alpha val="88000"/>
+            </a:srgbClr>
+          </a:solidFill>
+          <a:ln w="12700">
+            <a:solidFill>
+              <a:srgbClr val="D6E8F2"/>
+            </a:solidFill>
+            <a:prstDash val="solid"/>
+          </a:ln>
+        </p:spPr>
+      </p:sp>
+      <p:sp>
+        <p:nvSpPr>
+          <p:cNvPr id="14" name="Shape 12"/>
+          <p:cNvSpPr/>
+          <p:nvPr/>
+        </p:nvSpPr>
+        <p:spPr>
+          <a:xfrm>
+            <a:off x="8074152" y="3291840"/>
+            <a:ext cx="2596896" cy="749808"/>
+          </a:xfrm>
+          <a:prstGeom prst="rect">
+            <a:avLst/>
+          </a:prstGeom>
+          <a:solidFill>
+            <a:srgbClr val="EAF6F8"/>
+          </a:solidFill>
+          <a:ln w="12700">
+            <a:solidFill>
+              <a:srgbClr val="8ABBD8"/>
+            </a:solidFill>
+            <a:prstDash val="solid"/>
+          </a:ln>
+        </p:spPr>
+      </p:sp>
+      <p:sp>
+        <p:nvSpPr>
+          <p:cNvPr id="15" name="Shape 13"/>
+          <p:cNvSpPr/>
+          <p:nvPr/>
+        </p:nvSpPr>
+        <p:spPr>
+          <a:xfrm>
+            <a:off x="8202168" y="3721608"/>
+            <a:ext cx="2340864" cy="0"/>
+          </a:xfrm>
+          <a:prstGeom prst="line">
+            <a:avLst/>
+          </a:prstGeom>
+          <a:noFill/>
+          <a:ln w="19050">
+            <a:solidFill>
+              <a:srgbClr val="0068B7"/>
+            </a:solidFill>
+            <a:prstDash val="solid"/>
+          </a:ln>
+        </p:spPr>
+      </p:sp>
+      <p:sp>
+        <p:nvSpPr>
+          <p:cNvPr id="16" name="Shape 14"/>
+          <p:cNvSpPr/>
+          <p:nvPr/>
+        </p:nvSpPr>
+        <p:spPr>
+          <a:xfrm>
+            <a:off x="9198864" y="4206240"/>
+            <a:ext cx="347472" cy="347472"/>
+          </a:xfrm>
+          <a:prstGeom prst="ellipse">
+            <a:avLst/>
+          </a:prstGeom>
+          <a:solidFill>
+            <a:srgbClr val="2F8A28"/>
+          </a:solidFill>
+          <a:ln w="12700">
+            <a:solidFill>
+              <a:srgbClr val="2F8A28"/>
+            </a:solidFill>
+            <a:prstDash val="solid"/>
+          </a:ln>
+        </p:spPr>
+      </p:sp>
+      <p:sp>
+        <p:nvSpPr>
+          <p:cNvPr id="17" name="Text 15"/>
+          <p:cNvSpPr/>
+          <p:nvPr/>
+        </p:nvSpPr>
+        <p:spPr>
+          <a:xfrm>
+            <a:off x="7909560" y="3977640"/>
+            <a:ext cx="2926080" cy="182880"/>
+          </a:xfrm>
+          <a:prstGeom prst="rect">
+            <a:avLst/>
+          </a:prstGeom>
+          <a:noFill/>
+          <a:ln/>
+        </p:spPr>
+        <p:txBody>
+          <a:bodyPr wrap="square" lIns="0" tIns="0" rIns="0" bIns="0" rtlCol="0" anchor="ctr"/>
+          <a:lstStyle/>
+          <a:p>
+            <a:pPr algn="ctr" indent="0" marL="0">
+              <a:buNone/>
+            </a:pPr>
+            <a:r>
+              <a:rPr lang="en-US" sz="1000" dirty="0">
+                <a:solidFill>
+                  <a:srgbClr val="003A63"/>
+                </a:solidFill>
+                <a:latin typeface="Aptos" pitchFamily="34" charset="0"/>
+                <a:ea typeface="Aptos" pitchFamily="34" charset="-122"/>
+                <a:cs typeface="Aptos" pitchFamily="34" charset="-120"/>
+              </a:rPr>
+              <a:t>Concept to action</a:t>
+            </a:r>
+            <a:endParaRPr lang="en-US" sz="1000" dirty="0"/>
+          </a:p>
+        </p:txBody>
+      </p:sp>
+      <p:sp>
+        <p:nvSpPr>
+          <p:cNvPr id="18" name="Shape 16"/>
+          <p:cNvSpPr/>
+          <p:nvPr/>
+        </p:nvSpPr>
+        <p:spPr>
+          <a:xfrm>
+            <a:off x="7635240" y="4498848"/>
+            <a:ext cx="3474720" cy="1143000"/>
+          </a:xfrm>
+          <a:prstGeom prst="roundRect">
+            <a:avLst>
+              <a:gd name="adj" fmla="val 9600"/>
             </a:avLst>
           </a:prstGeom>
           <a:solidFill>
@@ -5895,14 +6527,14 @@
       </p:sp>
       <p:sp>
         <p:nvSpPr>
-          <p:cNvPr id="14" name="Text 12"/>
-          <p:cNvSpPr/>
-          <p:nvPr/>
-        </p:nvSpPr>
-        <p:spPr>
-          <a:xfrm>
-            <a:off x="8074152" y="3666744"/>
-            <a:ext cx="2825496" cy="256032"/>
+          <p:cNvPr id="19" name="Text 17"/>
+          <p:cNvSpPr/>
+          <p:nvPr/>
+        </p:nvSpPr>
+        <p:spPr>
+          <a:xfrm>
+            <a:off x="7799832" y="4645152"/>
+            <a:ext cx="3145536" cy="256032"/>
           </a:xfrm>
           <a:prstGeom prst="rect">
             <a:avLst/>
@@ -5926,7 +6558,7 @@
                 <a:ea typeface="Aptos" pitchFamily="34" charset="-122"/>
                 <a:cs typeface="Aptos" pitchFamily="34" charset="-120"/>
               </a:rPr>
-              <a:t>Use this for</a:t>
+              <a:t>Apply it</a:t>
             </a:r>
             <a:endParaRPr lang="en-US" sz="1300" dirty="0"/>
           </a:p>
@@ -5934,14 +6566,14 @@
       </p:sp>
       <p:sp>
         <p:nvSpPr>
-          <p:cNvPr id="15" name="Text 13"/>
-          <p:cNvSpPr/>
-          <p:nvPr/>
-        </p:nvSpPr>
-        <p:spPr>
-          <a:xfrm>
-            <a:off x="8074152" y="4023360"/>
-            <a:ext cx="2825496" cy="1097280"/>
+          <p:cNvPr id="20" name="Text 18"/>
+          <p:cNvSpPr/>
+          <p:nvPr/>
+        </p:nvSpPr>
+        <p:spPr>
+          <a:xfrm>
+            <a:off x="7799832" y="5001768"/>
+            <a:ext cx="3145536" cy="502920"/>
           </a:xfrm>
           <a:prstGeom prst="rect">
             <a:avLst/>
@@ -5967,7 +6599,7 @@
                 <a:ea typeface="Aptos" pitchFamily="34" charset="-122"/>
                 <a:cs typeface="Aptos" pitchFamily="34" charset="-120"/>
               </a:rPr>
-              <a:t>Connect the concept to public health decisions, safeguards, documentation, or implementation work.</a:t>
+              <a:t>Connect the concept to public health purpose, responsible use, required safeguards, documentation, and the next action a department should take.</a:t>
             </a:r>
             <a:endParaRPr lang="en-US" sz="1550" dirty="0"/>
           </a:p>
@@ -6141,8 +6773,8 @@
         </p:nvSpPr>
         <p:spPr>
           <a:xfrm>
-            <a:off x="9966960" y="6537960"/>
-            <a:ext cx="1645920" cy="201168"/>
+            <a:off x="9646920" y="6537960"/>
+            <a:ext cx="1965960" cy="201168"/>
           </a:xfrm>
           <a:prstGeom prst="rect">
             <a:avLst/>
@@ -6166,7 +6798,7 @@
                 <a:ea typeface="Aptos" pitchFamily="34" charset="-122"/>
                 <a:cs typeface="Aptos" pitchFamily="34" charset="-120"/>
               </a:rPr>
-              <a:t>Â© Paula Soper</a:t>
+              <a:t>Copyright Paula Soper</a:t>
             </a:r>
             <a:endParaRPr lang="en-US" sz="800" dirty="0"/>
           </a:p>
@@ -6213,77 +6845,13 @@
       </p:sp>
       <p:sp>
         <p:nvSpPr>
-          <p:cNvPr id="8" name="Shape 6"/>
+          <p:cNvPr id="8" name="Text 6"/>
           <p:cNvSpPr/>
           <p:nvPr/>
         </p:nvSpPr>
         <p:spPr>
           <a:xfrm>
             <a:off x="640080" y="658368"/>
-            <a:ext cx="420624" cy="420624"/>
-          </a:xfrm>
-          <a:prstGeom prst="ellipse">
-            <a:avLst/>
-          </a:prstGeom>
-          <a:solidFill>
-            <a:srgbClr val="0068B7"/>
-          </a:solidFill>
-          <a:ln w="12700">
-            <a:solidFill>
-              <a:srgbClr val="0068B7"/>
-            </a:solidFill>
-            <a:prstDash val="solid"/>
-          </a:ln>
-        </p:spPr>
-      </p:sp>
-      <p:sp>
-        <p:nvSpPr>
-          <p:cNvPr id="9" name="Text 7"/>
-          <p:cNvSpPr/>
-          <p:nvPr/>
-        </p:nvSpPr>
-        <p:spPr>
-          <a:xfrm>
-            <a:off x="640080" y="731520"/>
-            <a:ext cx="420624" cy="164592"/>
-          </a:xfrm>
-          <a:prstGeom prst="rect">
-            <a:avLst/>
-          </a:prstGeom>
-          <a:noFill/>
-          <a:ln/>
-        </p:spPr>
-        <p:txBody>
-          <a:bodyPr wrap="square" lIns="0" tIns="0" rIns="0" bIns="0" rtlCol="0" anchor="ctr"/>
-          <a:lstStyle/>
-          <a:p>
-            <a:pPr algn="ctr" indent="0" marL="0">
-              <a:buNone/>
-            </a:pPr>
-            <a:r>
-              <a:rPr lang="en-US" sz="1100" b="1" dirty="0">
-                <a:solidFill>
-                  <a:srgbClr val="FFFFFF"/>
-                </a:solidFill>
-                <a:latin typeface="Aptos" pitchFamily="34" charset="0"/>
-                <a:ea typeface="Aptos" pitchFamily="34" charset="-122"/>
-                <a:cs typeface="Aptos" pitchFamily="34" charset="-120"/>
-              </a:rPr>
-              <a:t>10</a:t>
-            </a:r>
-            <a:endParaRPr lang="en-US" sz="1100" dirty="0"/>
-          </a:p>
-        </p:txBody>
-      </p:sp>
-      <p:sp>
-        <p:nvSpPr>
-          <p:cNvPr id="10" name="Text 8"/>
-          <p:cNvSpPr/>
-          <p:nvPr/>
-        </p:nvSpPr>
-        <p:spPr>
-          <a:xfrm>
-            <a:off x="640080" y="621792"/>
             <a:ext cx="10881360" cy="713232"/>
           </a:xfrm>
           <a:prstGeom prst="rect">
@@ -6318,14 +6886,14 @@
       </p:sp>
       <p:sp>
         <p:nvSpPr>
-          <p:cNvPr id="11" name="Text 9"/>
+          <p:cNvPr id="9" name="Text 7"/>
           <p:cNvSpPr/>
           <p:nvPr/>
         </p:nvSpPr>
         <p:spPr>
           <a:xfrm>
             <a:off x="868680" y="1508760"/>
-            <a:ext cx="6537960" cy="4160520"/>
+            <a:ext cx="6309360" cy="4160520"/>
           </a:xfrm>
           <a:prstGeom prst="rect">
             <a:avLst/>
@@ -6370,18 +6938,18 @@
       </p:sp>
       <p:sp>
         <p:nvSpPr>
-          <p:cNvPr id="12" name="Shape 10"/>
-          <p:cNvSpPr/>
-          <p:nvPr/>
-        </p:nvSpPr>
-        <p:spPr>
-          <a:xfrm>
-            <a:off x="7909560" y="1417320"/>
-            <a:ext cx="3154680" cy="1828800"/>
+          <p:cNvPr id="10" name="Shape 8"/>
+          <p:cNvSpPr/>
+          <p:nvPr/>
+        </p:nvSpPr>
+        <p:spPr>
+          <a:xfrm>
+            <a:off x="7635240" y="1325880"/>
+            <a:ext cx="3474720" cy="1325880"/>
           </a:xfrm>
           <a:prstGeom prst="roundRect">
             <a:avLst>
-              <a:gd name="adj" fmla="val 6000"/>
+              <a:gd name="adj" fmla="val 8276"/>
             </a:avLst>
           </a:prstGeom>
           <a:solidFill>
@@ -6397,14 +6965,14 @@
       </p:sp>
       <p:sp>
         <p:nvSpPr>
-          <p:cNvPr id="13" name="Text 11"/>
-          <p:cNvSpPr/>
-          <p:nvPr/>
-        </p:nvSpPr>
-        <p:spPr>
-          <a:xfrm>
-            <a:off x="8074152" y="1563624"/>
-            <a:ext cx="2825496" cy="256032"/>
+          <p:cNvPr id="11" name="Text 9"/>
+          <p:cNvSpPr/>
+          <p:nvPr/>
+        </p:nvSpPr>
+        <p:spPr>
+          <a:xfrm>
+            <a:off x="7799832" y="1472184"/>
+            <a:ext cx="3145536" cy="256032"/>
           </a:xfrm>
           <a:prstGeom prst="rect">
             <a:avLst/>
@@ -6428,7 +6996,7 @@
                 <a:ea typeface="Aptos" pitchFamily="34" charset="-122"/>
                 <a:cs typeface="Aptos" pitchFamily="34" charset="-120"/>
               </a:rPr>
-              <a:t>Key idea</a:t>
+              <a:t>Practice focus</a:t>
             </a:r>
             <a:endParaRPr lang="en-US" sz="1300" dirty="0"/>
           </a:p>
@@ -6436,14 +7004,14 @@
       </p:sp>
       <p:sp>
         <p:nvSpPr>
-          <p:cNvPr id="14" name="Text 12"/>
-          <p:cNvSpPr/>
-          <p:nvPr/>
-        </p:nvSpPr>
-        <p:spPr>
-          <a:xfrm>
-            <a:off x="8074152" y="1920240"/>
-            <a:ext cx="2825496" cy="1188720"/>
+          <p:cNvPr id="12" name="Text 10"/>
+          <p:cNvSpPr/>
+          <p:nvPr/>
+        </p:nvSpPr>
+        <p:spPr>
+          <a:xfrm>
+            <a:off x="7799832" y="1828800"/>
+            <a:ext cx="3145536" cy="685800"/>
           </a:xfrm>
           <a:prstGeom prst="rect">
             <a:avLst/>
@@ -6477,18 +7045,159 @@
       </p:sp>
       <p:sp>
         <p:nvSpPr>
-          <p:cNvPr id="15" name="Shape 13"/>
-          <p:cNvSpPr/>
-          <p:nvPr/>
-        </p:nvSpPr>
-        <p:spPr>
-          <a:xfrm>
-            <a:off x="7909560" y="3520440"/>
-            <a:ext cx="3154680" cy="1737360"/>
+          <p:cNvPr id="13" name="Shape 11"/>
+          <p:cNvSpPr/>
+          <p:nvPr/>
+        </p:nvSpPr>
+        <p:spPr>
+          <a:xfrm>
+            <a:off x="7635240" y="2788920"/>
+            <a:ext cx="3474720" cy="1536192"/>
           </a:xfrm>
           <a:prstGeom prst="roundRect">
             <a:avLst>
-              <a:gd name="adj" fmla="val 6316"/>
+              <a:gd name="adj" fmla="val 7143"/>
+            </a:avLst>
+          </a:prstGeom>
+          <a:solidFill>
+            <a:srgbClr val="FFFFFF">
+              <a:alpha val="88000"/>
+            </a:srgbClr>
+          </a:solidFill>
+          <a:ln w="12700">
+            <a:solidFill>
+              <a:srgbClr val="D6E8F2"/>
+            </a:solidFill>
+            <a:prstDash val="solid"/>
+          </a:ln>
+        </p:spPr>
+      </p:sp>
+      <p:sp>
+        <p:nvSpPr>
+          <p:cNvPr id="14" name="Shape 12"/>
+          <p:cNvSpPr/>
+          <p:nvPr/>
+        </p:nvSpPr>
+        <p:spPr>
+          <a:xfrm>
+            <a:off x="8074152" y="3291840"/>
+            <a:ext cx="2596896" cy="749808"/>
+          </a:xfrm>
+          <a:prstGeom prst="rect">
+            <a:avLst/>
+          </a:prstGeom>
+          <a:solidFill>
+            <a:srgbClr val="EAF6F8"/>
+          </a:solidFill>
+          <a:ln w="12700">
+            <a:solidFill>
+              <a:srgbClr val="8ABBD8"/>
+            </a:solidFill>
+            <a:prstDash val="solid"/>
+          </a:ln>
+        </p:spPr>
+      </p:sp>
+      <p:sp>
+        <p:nvSpPr>
+          <p:cNvPr id="15" name="Shape 13"/>
+          <p:cNvSpPr/>
+          <p:nvPr/>
+        </p:nvSpPr>
+        <p:spPr>
+          <a:xfrm>
+            <a:off x="8202168" y="3721608"/>
+            <a:ext cx="2340864" cy="0"/>
+          </a:xfrm>
+          <a:prstGeom prst="line">
+            <a:avLst/>
+          </a:prstGeom>
+          <a:noFill/>
+          <a:ln w="19050">
+            <a:solidFill>
+              <a:srgbClr val="0068B7"/>
+            </a:solidFill>
+            <a:prstDash val="solid"/>
+          </a:ln>
+        </p:spPr>
+      </p:sp>
+      <p:sp>
+        <p:nvSpPr>
+          <p:cNvPr id="16" name="Shape 14"/>
+          <p:cNvSpPr/>
+          <p:nvPr/>
+        </p:nvSpPr>
+        <p:spPr>
+          <a:xfrm>
+            <a:off x="9198864" y="4206240"/>
+            <a:ext cx="347472" cy="347472"/>
+          </a:xfrm>
+          <a:prstGeom prst="ellipse">
+            <a:avLst/>
+          </a:prstGeom>
+          <a:solidFill>
+            <a:srgbClr val="2F8A28"/>
+          </a:solidFill>
+          <a:ln w="12700">
+            <a:solidFill>
+              <a:srgbClr val="2F8A28"/>
+            </a:solidFill>
+            <a:prstDash val="solid"/>
+          </a:ln>
+        </p:spPr>
+      </p:sp>
+      <p:sp>
+        <p:nvSpPr>
+          <p:cNvPr id="17" name="Text 15"/>
+          <p:cNvSpPr/>
+          <p:nvPr/>
+        </p:nvSpPr>
+        <p:spPr>
+          <a:xfrm>
+            <a:off x="7909560" y="3977640"/>
+            <a:ext cx="2926080" cy="182880"/>
+          </a:xfrm>
+          <a:prstGeom prst="rect">
+            <a:avLst/>
+          </a:prstGeom>
+          <a:noFill/>
+          <a:ln/>
+        </p:spPr>
+        <p:txBody>
+          <a:bodyPr wrap="square" lIns="0" tIns="0" rIns="0" bIns="0" rtlCol="0" anchor="ctr"/>
+          <a:lstStyle/>
+          <a:p>
+            <a:pPr algn="ctr" indent="0" marL="0">
+              <a:buNone/>
+            </a:pPr>
+            <a:r>
+              <a:rPr lang="en-US" sz="1000" dirty="0">
+                <a:solidFill>
+                  <a:srgbClr val="003A63"/>
+                </a:solidFill>
+                <a:latin typeface="Aptos" pitchFamily="34" charset="0"/>
+                <a:ea typeface="Aptos" pitchFamily="34" charset="-122"/>
+                <a:cs typeface="Aptos" pitchFamily="34" charset="-120"/>
+              </a:rPr>
+              <a:t>Concept to action</a:t>
+            </a:r>
+            <a:endParaRPr lang="en-US" sz="1000" dirty="0"/>
+          </a:p>
+        </p:txBody>
+      </p:sp>
+      <p:sp>
+        <p:nvSpPr>
+          <p:cNvPr id="18" name="Shape 16"/>
+          <p:cNvSpPr/>
+          <p:nvPr/>
+        </p:nvSpPr>
+        <p:spPr>
+          <a:xfrm>
+            <a:off x="7635240" y="4498848"/>
+            <a:ext cx="3474720" cy="1143000"/>
+          </a:xfrm>
+          <a:prstGeom prst="roundRect">
+            <a:avLst>
+              <a:gd name="adj" fmla="val 9600"/>
             </a:avLst>
           </a:prstGeom>
           <a:solidFill>
@@ -6504,14 +7213,14 @@
       </p:sp>
       <p:sp>
         <p:nvSpPr>
-          <p:cNvPr id="16" name="Text 14"/>
-          <p:cNvSpPr/>
-          <p:nvPr/>
-        </p:nvSpPr>
-        <p:spPr>
-          <a:xfrm>
-            <a:off x="8074152" y="3666744"/>
-            <a:ext cx="2825496" cy="256032"/>
+          <p:cNvPr id="19" name="Text 17"/>
+          <p:cNvSpPr/>
+          <p:nvPr/>
+        </p:nvSpPr>
+        <p:spPr>
+          <a:xfrm>
+            <a:off x="7799832" y="4645152"/>
+            <a:ext cx="3145536" cy="256032"/>
           </a:xfrm>
           <a:prstGeom prst="rect">
             <a:avLst/>
@@ -6535,7 +7244,7 @@
                 <a:ea typeface="Aptos" pitchFamily="34" charset="-122"/>
                 <a:cs typeface="Aptos" pitchFamily="34" charset="-120"/>
               </a:rPr>
-              <a:t>Use this for</a:t>
+              <a:t>What to produce</a:t>
             </a:r>
             <a:endParaRPr lang="en-US" sz="1300" dirty="0"/>
           </a:p>
@@ -6543,14 +7252,14 @@
       </p:sp>
       <p:sp>
         <p:nvSpPr>
-          <p:cNvPr id="17" name="Text 15"/>
-          <p:cNvSpPr/>
-          <p:nvPr/>
-        </p:nvSpPr>
-        <p:spPr>
-          <a:xfrm>
-            <a:off x="8074152" y="4023360"/>
-            <a:ext cx="2825496" cy="1097280"/>
+          <p:cNvPr id="20" name="Text 18"/>
+          <p:cNvSpPr/>
+          <p:nvPr/>
+        </p:nvSpPr>
+        <p:spPr>
+          <a:xfrm>
+            <a:off x="7799832" y="5001768"/>
+            <a:ext cx="3145536" cy="502920"/>
           </a:xfrm>
           <a:prstGeom prst="rect">
             <a:avLst/>
@@ -6576,7 +7285,7 @@
                 <a:ea typeface="Aptos" pitchFamily="34" charset="-122"/>
                 <a:cs typeface="Aptos" pitchFamily="34" charset="-120"/>
               </a:rPr>
-              <a:t>Connect the concept to public health decisions, safeguards, documentation, or implementation work.</a:t>
+              <a:t>Use the assignment to test whether you can explain the concept, apply it to a realistic public health situation, and identify what would need review before the work moves forward.</a:t>
             </a:r>
             <a:endParaRPr lang="en-US" sz="1550" dirty="0"/>
           </a:p>
@@ -6750,8 +7459,8 @@
         </p:nvSpPr>
         <p:spPr>
           <a:xfrm>
-            <a:off x="9966960" y="6537960"/>
-            <a:ext cx="1645920" cy="201168"/>
+            <a:off x="9646920" y="6537960"/>
+            <a:ext cx="1965960" cy="201168"/>
           </a:xfrm>
           <a:prstGeom prst="rect">
             <a:avLst/>
@@ -6775,7 +7484,7 @@
                 <a:ea typeface="Aptos" pitchFamily="34" charset="-122"/>
                 <a:cs typeface="Aptos" pitchFamily="34" charset="-120"/>
               </a:rPr>
-              <a:t>Â© Paula Soper</a:t>
+              <a:t>Copyright Paula Soper</a:t>
             </a:r>
             <a:endParaRPr lang="en-US" sz="800" dirty="0"/>
           </a:p>
@@ -6822,77 +7531,13 @@
       </p:sp>
       <p:sp>
         <p:nvSpPr>
-          <p:cNvPr id="8" name="Shape 6"/>
+          <p:cNvPr id="8" name="Text 6"/>
           <p:cNvSpPr/>
           <p:nvPr/>
         </p:nvSpPr>
         <p:spPr>
           <a:xfrm>
             <a:off x="640080" y="658368"/>
-            <a:ext cx="420624" cy="420624"/>
-          </a:xfrm>
-          <a:prstGeom prst="ellipse">
-            <a:avLst/>
-          </a:prstGeom>
-          <a:solidFill>
-            <a:srgbClr val="0068B7"/>
-          </a:solidFill>
-          <a:ln w="12700">
-            <a:solidFill>
-              <a:srgbClr val="0068B7"/>
-            </a:solidFill>
-            <a:prstDash val="solid"/>
-          </a:ln>
-        </p:spPr>
-      </p:sp>
-      <p:sp>
-        <p:nvSpPr>
-          <p:cNvPr id="9" name="Text 7"/>
-          <p:cNvSpPr/>
-          <p:nvPr/>
-        </p:nvSpPr>
-        <p:spPr>
-          <a:xfrm>
-            <a:off x="640080" y="731520"/>
-            <a:ext cx="420624" cy="164592"/>
-          </a:xfrm>
-          <a:prstGeom prst="rect">
-            <a:avLst/>
-          </a:prstGeom>
-          <a:noFill/>
-          <a:ln/>
-        </p:spPr>
-        <p:txBody>
-          <a:bodyPr wrap="square" lIns="0" tIns="0" rIns="0" bIns="0" rtlCol="0" anchor="ctr"/>
-          <a:lstStyle/>
-          <a:p>
-            <a:pPr algn="ctr" indent="0" marL="0">
-              <a:buNone/>
-            </a:pPr>
-            <a:r>
-              <a:rPr lang="en-US" sz="1100" b="1" dirty="0">
-                <a:solidFill>
-                  <a:srgbClr val="FFFFFF"/>
-                </a:solidFill>
-                <a:latin typeface="Aptos" pitchFamily="34" charset="0"/>
-                <a:ea typeface="Aptos" pitchFamily="34" charset="-122"/>
-                <a:cs typeface="Aptos" pitchFamily="34" charset="-120"/>
-              </a:rPr>
-              <a:t>11</a:t>
-            </a:r>
-            <a:endParaRPr lang="en-US" sz="1100" dirty="0"/>
-          </a:p>
-        </p:txBody>
-      </p:sp>
-      <p:sp>
-        <p:nvSpPr>
-          <p:cNvPr id="10" name="Text 8"/>
-          <p:cNvSpPr/>
-          <p:nvPr/>
-        </p:nvSpPr>
-        <p:spPr>
-          <a:xfrm>
-            <a:off x="640080" y="621792"/>
             <a:ext cx="10881360" cy="713232"/>
           </a:xfrm>
           <a:prstGeom prst="rect">
@@ -6927,14 +7572,14 @@
       </p:sp>
       <p:sp>
         <p:nvSpPr>
-          <p:cNvPr id="11" name="Text 9"/>
+          <p:cNvPr id="9" name="Text 7"/>
           <p:cNvSpPr/>
           <p:nvPr/>
         </p:nvSpPr>
         <p:spPr>
           <a:xfrm>
             <a:off x="868680" y="1508760"/>
-            <a:ext cx="6537960" cy="4160520"/>
+            <a:ext cx="6309360" cy="4160520"/>
           </a:xfrm>
           <a:prstGeom prst="rect">
             <a:avLst/>
@@ -6993,18 +7638,18 @@
       </p:sp>
       <p:sp>
         <p:nvSpPr>
-          <p:cNvPr id="12" name="Shape 10"/>
-          <p:cNvSpPr/>
-          <p:nvPr/>
-        </p:nvSpPr>
-        <p:spPr>
-          <a:xfrm>
-            <a:off x="7909560" y="1417320"/>
-            <a:ext cx="3154680" cy="1828800"/>
+          <p:cNvPr id="10" name="Shape 8"/>
+          <p:cNvSpPr/>
+          <p:nvPr/>
+        </p:nvSpPr>
+        <p:spPr>
+          <a:xfrm>
+            <a:off x="7635240" y="1325880"/>
+            <a:ext cx="3474720" cy="1325880"/>
           </a:xfrm>
           <a:prstGeom prst="roundRect">
             <a:avLst>
-              <a:gd name="adj" fmla="val 6000"/>
+              <a:gd name="adj" fmla="val 8276"/>
             </a:avLst>
           </a:prstGeom>
           <a:solidFill>
@@ -7020,14 +7665,14 @@
       </p:sp>
       <p:sp>
         <p:nvSpPr>
-          <p:cNvPr id="13" name="Text 11"/>
-          <p:cNvSpPr/>
-          <p:nvPr/>
-        </p:nvSpPr>
-        <p:spPr>
-          <a:xfrm>
-            <a:off x="8074152" y="1563624"/>
-            <a:ext cx="2825496" cy="256032"/>
+          <p:cNvPr id="11" name="Text 9"/>
+          <p:cNvSpPr/>
+          <p:nvPr/>
+        </p:nvSpPr>
+        <p:spPr>
+          <a:xfrm>
+            <a:off x="7799832" y="1472184"/>
+            <a:ext cx="3145536" cy="256032"/>
           </a:xfrm>
           <a:prstGeom prst="rect">
             <a:avLst/>
@@ -7051,7 +7696,7 @@
                 <a:ea typeface="Aptos" pitchFamily="34" charset="-122"/>
                 <a:cs typeface="Aptos" pitchFamily="34" charset="-120"/>
               </a:rPr>
-              <a:t>Key idea</a:t>
+              <a:t>Core concept</a:t>
             </a:r>
             <a:endParaRPr lang="en-US" sz="1300" dirty="0"/>
           </a:p>
@@ -7059,14 +7704,14 @@
       </p:sp>
       <p:sp>
         <p:nvSpPr>
-          <p:cNvPr id="14" name="Text 12"/>
-          <p:cNvSpPr/>
-          <p:nvPr/>
-        </p:nvSpPr>
-        <p:spPr>
-          <a:xfrm>
-            <a:off x="8074152" y="1920240"/>
-            <a:ext cx="2825496" cy="1188720"/>
+          <p:cNvPr id="12" name="Text 10"/>
+          <p:cNvSpPr/>
+          <p:nvPr/>
+        </p:nvSpPr>
+        <p:spPr>
+          <a:xfrm>
+            <a:off x="7799832" y="1828800"/>
+            <a:ext cx="3145536" cy="685800"/>
           </a:xfrm>
           <a:prstGeom prst="rect">
             <a:avLst/>
@@ -7100,18 +7745,159 @@
       </p:sp>
       <p:sp>
         <p:nvSpPr>
-          <p:cNvPr id="15" name="Shape 13"/>
-          <p:cNvSpPr/>
-          <p:nvPr/>
-        </p:nvSpPr>
-        <p:spPr>
-          <a:xfrm>
-            <a:off x="7909560" y="3520440"/>
-            <a:ext cx="3154680" cy="1737360"/>
+          <p:cNvPr id="13" name="Shape 11"/>
+          <p:cNvSpPr/>
+          <p:nvPr/>
+        </p:nvSpPr>
+        <p:spPr>
+          <a:xfrm>
+            <a:off x="7635240" y="2788920"/>
+            <a:ext cx="3474720" cy="1536192"/>
           </a:xfrm>
           <a:prstGeom prst="roundRect">
             <a:avLst>
-              <a:gd name="adj" fmla="val 6316"/>
+              <a:gd name="adj" fmla="val 7143"/>
+            </a:avLst>
+          </a:prstGeom>
+          <a:solidFill>
+            <a:srgbClr val="FFFFFF">
+              <a:alpha val="88000"/>
+            </a:srgbClr>
+          </a:solidFill>
+          <a:ln w="12700">
+            <a:solidFill>
+              <a:srgbClr val="D6E8F2"/>
+            </a:solidFill>
+            <a:prstDash val="solid"/>
+          </a:ln>
+        </p:spPr>
+      </p:sp>
+      <p:sp>
+        <p:nvSpPr>
+          <p:cNvPr id="14" name="Shape 12"/>
+          <p:cNvSpPr/>
+          <p:nvPr/>
+        </p:nvSpPr>
+        <p:spPr>
+          <a:xfrm>
+            <a:off x="8074152" y="3291840"/>
+            <a:ext cx="2596896" cy="749808"/>
+          </a:xfrm>
+          <a:prstGeom prst="rect">
+            <a:avLst/>
+          </a:prstGeom>
+          <a:solidFill>
+            <a:srgbClr val="EAF6F8"/>
+          </a:solidFill>
+          <a:ln w="12700">
+            <a:solidFill>
+              <a:srgbClr val="8ABBD8"/>
+            </a:solidFill>
+            <a:prstDash val="solid"/>
+          </a:ln>
+        </p:spPr>
+      </p:sp>
+      <p:sp>
+        <p:nvSpPr>
+          <p:cNvPr id="15" name="Shape 13"/>
+          <p:cNvSpPr/>
+          <p:nvPr/>
+        </p:nvSpPr>
+        <p:spPr>
+          <a:xfrm>
+            <a:off x="8202168" y="3721608"/>
+            <a:ext cx="2340864" cy="0"/>
+          </a:xfrm>
+          <a:prstGeom prst="line">
+            <a:avLst/>
+          </a:prstGeom>
+          <a:noFill/>
+          <a:ln w="19050">
+            <a:solidFill>
+              <a:srgbClr val="0068B7"/>
+            </a:solidFill>
+            <a:prstDash val="solid"/>
+          </a:ln>
+        </p:spPr>
+      </p:sp>
+      <p:sp>
+        <p:nvSpPr>
+          <p:cNvPr id="16" name="Shape 14"/>
+          <p:cNvSpPr/>
+          <p:nvPr/>
+        </p:nvSpPr>
+        <p:spPr>
+          <a:xfrm>
+            <a:off x="9198864" y="4206240"/>
+            <a:ext cx="347472" cy="347472"/>
+          </a:xfrm>
+          <a:prstGeom prst="ellipse">
+            <a:avLst/>
+          </a:prstGeom>
+          <a:solidFill>
+            <a:srgbClr val="2F8A28"/>
+          </a:solidFill>
+          <a:ln w="12700">
+            <a:solidFill>
+              <a:srgbClr val="2F8A28"/>
+            </a:solidFill>
+            <a:prstDash val="solid"/>
+          </a:ln>
+        </p:spPr>
+      </p:sp>
+      <p:sp>
+        <p:nvSpPr>
+          <p:cNvPr id="17" name="Text 15"/>
+          <p:cNvSpPr/>
+          <p:nvPr/>
+        </p:nvSpPr>
+        <p:spPr>
+          <a:xfrm>
+            <a:off x="7909560" y="3977640"/>
+            <a:ext cx="2926080" cy="182880"/>
+          </a:xfrm>
+          <a:prstGeom prst="rect">
+            <a:avLst/>
+          </a:prstGeom>
+          <a:noFill/>
+          <a:ln/>
+        </p:spPr>
+        <p:txBody>
+          <a:bodyPr wrap="square" lIns="0" tIns="0" rIns="0" bIns="0" rtlCol="0" anchor="ctr"/>
+          <a:lstStyle/>
+          <a:p>
+            <a:pPr algn="ctr" indent="0" marL="0">
+              <a:buNone/>
+            </a:pPr>
+            <a:r>
+              <a:rPr lang="en-US" sz="1000" dirty="0">
+                <a:solidFill>
+                  <a:srgbClr val="003A63"/>
+                </a:solidFill>
+                <a:latin typeface="Aptos" pitchFamily="34" charset="0"/>
+                <a:ea typeface="Aptos" pitchFamily="34" charset="-122"/>
+                <a:cs typeface="Aptos" pitchFamily="34" charset="-120"/>
+              </a:rPr>
+              <a:t>Concept to action</a:t>
+            </a:r>
+            <a:endParaRPr lang="en-US" sz="1000" dirty="0"/>
+          </a:p>
+        </p:txBody>
+      </p:sp>
+      <p:sp>
+        <p:nvSpPr>
+          <p:cNvPr id="18" name="Shape 16"/>
+          <p:cNvSpPr/>
+          <p:nvPr/>
+        </p:nvSpPr>
+        <p:spPr>
+          <a:xfrm>
+            <a:off x="7635240" y="4498848"/>
+            <a:ext cx="3474720" cy="1143000"/>
+          </a:xfrm>
+          <a:prstGeom prst="roundRect">
+            <a:avLst>
+              <a:gd name="adj" fmla="val 9600"/>
             </a:avLst>
           </a:prstGeom>
           <a:solidFill>
@@ -7127,14 +7913,14 @@
       </p:sp>
       <p:sp>
         <p:nvSpPr>
-          <p:cNvPr id="16" name="Text 14"/>
-          <p:cNvSpPr/>
-          <p:nvPr/>
-        </p:nvSpPr>
-        <p:spPr>
-          <a:xfrm>
-            <a:off x="8074152" y="3666744"/>
-            <a:ext cx="2825496" cy="256032"/>
+          <p:cNvPr id="19" name="Text 17"/>
+          <p:cNvSpPr/>
+          <p:nvPr/>
+        </p:nvSpPr>
+        <p:spPr>
+          <a:xfrm>
+            <a:off x="7799832" y="4645152"/>
+            <a:ext cx="3145536" cy="256032"/>
           </a:xfrm>
           <a:prstGeom prst="rect">
             <a:avLst/>
@@ -7158,7 +7944,7 @@
                 <a:ea typeface="Aptos" pitchFamily="34" charset="-122"/>
                 <a:cs typeface="Aptos" pitchFamily="34" charset="-120"/>
               </a:rPr>
-              <a:t>Use this for</a:t>
+              <a:t>Apply it</a:t>
             </a:r>
             <a:endParaRPr lang="en-US" sz="1300" dirty="0"/>
           </a:p>
@@ -7166,14 +7952,14 @@
       </p:sp>
       <p:sp>
         <p:nvSpPr>
-          <p:cNvPr id="17" name="Text 15"/>
-          <p:cNvSpPr/>
-          <p:nvPr/>
-        </p:nvSpPr>
-        <p:spPr>
-          <a:xfrm>
-            <a:off x="8074152" y="4023360"/>
-            <a:ext cx="2825496" cy="1097280"/>
+          <p:cNvPr id="20" name="Text 18"/>
+          <p:cNvSpPr/>
+          <p:nvPr/>
+        </p:nvSpPr>
+        <p:spPr>
+          <a:xfrm>
+            <a:off x="7799832" y="5001768"/>
+            <a:ext cx="3145536" cy="502920"/>
           </a:xfrm>
           <a:prstGeom prst="rect">
             <a:avLst/>
@@ -7199,7 +7985,7 @@
                 <a:ea typeface="Aptos" pitchFamily="34" charset="-122"/>
                 <a:cs typeface="Aptos" pitchFamily="34" charset="-120"/>
               </a:rPr>
-              <a:t>Connect the concept to public health decisions, safeguards, documentation, or implementation work.</a:t>
+              <a:t>Connect the concept to public health purpose, responsible use, required safeguards, documentation, and the next action a department should take.</a:t>
             </a:r>
             <a:endParaRPr lang="en-US" sz="1550" dirty="0"/>
           </a:p>
@@ -7373,8 +8159,8 @@
         </p:nvSpPr>
         <p:spPr>
           <a:xfrm>
-            <a:off x="9966960" y="6537960"/>
-            <a:ext cx="1645920" cy="201168"/>
+            <a:off x="9646920" y="6537960"/>
+            <a:ext cx="1965960" cy="201168"/>
           </a:xfrm>
           <a:prstGeom prst="rect">
             <a:avLst/>
@@ -7398,7 +8184,7 @@
                 <a:ea typeface="Aptos" pitchFamily="34" charset="-122"/>
                 <a:cs typeface="Aptos" pitchFamily="34" charset="-120"/>
               </a:rPr>
-              <a:t>Â© Paula Soper</a:t>
+              <a:t>Copyright Paula Soper</a:t>
             </a:r>
             <a:endParaRPr lang="en-US" sz="800" dirty="0"/>
           </a:p>
@@ -7493,7 +8279,7 @@
         <p:spPr>
           <a:xfrm>
             <a:off x="868680" y="1508760"/>
-            <a:ext cx="6537960" cy="4160520"/>
+            <a:ext cx="6309360" cy="4160520"/>
           </a:xfrm>
           <a:prstGeom prst="rect">
             <a:avLst/>
@@ -7544,12 +8330,12 @@
         </p:nvSpPr>
         <p:spPr>
           <a:xfrm>
-            <a:off x="7909560" y="1417320"/>
-            <a:ext cx="3154680" cy="1828800"/>
+            <a:off x="7635240" y="1325880"/>
+            <a:ext cx="3474720" cy="1325880"/>
           </a:xfrm>
           <a:prstGeom prst="roundRect">
             <a:avLst>
-              <a:gd name="adj" fmla="val 6000"/>
+              <a:gd name="adj" fmla="val 8276"/>
             </a:avLst>
           </a:prstGeom>
           <a:solidFill>
@@ -7571,8 +8357,8 @@
         </p:nvSpPr>
         <p:spPr>
           <a:xfrm>
-            <a:off x="8074152" y="1563624"/>
-            <a:ext cx="2825496" cy="256032"/>
+            <a:off x="7799832" y="1472184"/>
+            <a:ext cx="3145536" cy="256032"/>
           </a:xfrm>
           <a:prstGeom prst="rect">
             <a:avLst/>
@@ -7596,7 +8382,7 @@
                 <a:ea typeface="Aptos" pitchFamily="34" charset="-122"/>
                 <a:cs typeface="Aptos" pitchFamily="34" charset="-120"/>
               </a:rPr>
-              <a:t>Key idea</a:t>
+              <a:t>Core concept</a:t>
             </a:r>
             <a:endParaRPr lang="en-US" sz="1300" dirty="0"/>
           </a:p>
@@ -7610,8 +8396,8 @@
         </p:nvSpPr>
         <p:spPr>
           <a:xfrm>
-            <a:off x="8074152" y="1920240"/>
-            <a:ext cx="2825496" cy="1188720"/>
+            <a:off x="7799832" y="1828800"/>
+            <a:ext cx="3145536" cy="685800"/>
           </a:xfrm>
           <a:prstGeom prst="rect">
             <a:avLst/>
@@ -7651,12 +8437,153 @@
         </p:nvSpPr>
         <p:spPr>
           <a:xfrm>
-            <a:off x="7909560" y="3520440"/>
-            <a:ext cx="3154680" cy="1737360"/>
+            <a:off x="7635240" y="2788920"/>
+            <a:ext cx="3474720" cy="1536192"/>
           </a:xfrm>
           <a:prstGeom prst="roundRect">
             <a:avLst>
-              <a:gd name="adj" fmla="val 6316"/>
+              <a:gd name="adj" fmla="val 7143"/>
+            </a:avLst>
+          </a:prstGeom>
+          <a:solidFill>
+            <a:srgbClr val="FFFFFF">
+              <a:alpha val="88000"/>
+            </a:srgbClr>
+          </a:solidFill>
+          <a:ln w="12700">
+            <a:solidFill>
+              <a:srgbClr val="D6E8F2"/>
+            </a:solidFill>
+            <a:prstDash val="solid"/>
+          </a:ln>
+        </p:spPr>
+      </p:sp>
+      <p:sp>
+        <p:nvSpPr>
+          <p:cNvPr id="14" name="Shape 12"/>
+          <p:cNvSpPr/>
+          <p:nvPr/>
+        </p:nvSpPr>
+        <p:spPr>
+          <a:xfrm>
+            <a:off x="8074152" y="3291840"/>
+            <a:ext cx="2596896" cy="749808"/>
+          </a:xfrm>
+          <a:prstGeom prst="rect">
+            <a:avLst/>
+          </a:prstGeom>
+          <a:solidFill>
+            <a:srgbClr val="EAF6F8"/>
+          </a:solidFill>
+          <a:ln w="12700">
+            <a:solidFill>
+              <a:srgbClr val="8ABBD8"/>
+            </a:solidFill>
+            <a:prstDash val="solid"/>
+          </a:ln>
+        </p:spPr>
+      </p:sp>
+      <p:sp>
+        <p:nvSpPr>
+          <p:cNvPr id="15" name="Shape 13"/>
+          <p:cNvSpPr/>
+          <p:nvPr/>
+        </p:nvSpPr>
+        <p:spPr>
+          <a:xfrm>
+            <a:off x="8202168" y="3721608"/>
+            <a:ext cx="2340864" cy="0"/>
+          </a:xfrm>
+          <a:prstGeom prst="line">
+            <a:avLst/>
+          </a:prstGeom>
+          <a:noFill/>
+          <a:ln w="19050">
+            <a:solidFill>
+              <a:srgbClr val="0068B7"/>
+            </a:solidFill>
+            <a:prstDash val="solid"/>
+          </a:ln>
+        </p:spPr>
+      </p:sp>
+      <p:sp>
+        <p:nvSpPr>
+          <p:cNvPr id="16" name="Shape 14"/>
+          <p:cNvSpPr/>
+          <p:nvPr/>
+        </p:nvSpPr>
+        <p:spPr>
+          <a:xfrm>
+            <a:off x="9198864" y="4206240"/>
+            <a:ext cx="347472" cy="347472"/>
+          </a:xfrm>
+          <a:prstGeom prst="ellipse">
+            <a:avLst/>
+          </a:prstGeom>
+          <a:solidFill>
+            <a:srgbClr val="2F8A28"/>
+          </a:solidFill>
+          <a:ln w="12700">
+            <a:solidFill>
+              <a:srgbClr val="2F8A28"/>
+            </a:solidFill>
+            <a:prstDash val="solid"/>
+          </a:ln>
+        </p:spPr>
+      </p:sp>
+      <p:sp>
+        <p:nvSpPr>
+          <p:cNvPr id="17" name="Text 15"/>
+          <p:cNvSpPr/>
+          <p:nvPr/>
+        </p:nvSpPr>
+        <p:spPr>
+          <a:xfrm>
+            <a:off x="7909560" y="3977640"/>
+            <a:ext cx="2926080" cy="182880"/>
+          </a:xfrm>
+          <a:prstGeom prst="rect">
+            <a:avLst/>
+          </a:prstGeom>
+          <a:noFill/>
+          <a:ln/>
+        </p:spPr>
+        <p:txBody>
+          <a:bodyPr wrap="square" lIns="0" tIns="0" rIns="0" bIns="0" rtlCol="0" anchor="ctr"/>
+          <a:lstStyle/>
+          <a:p>
+            <a:pPr algn="ctr" indent="0" marL="0">
+              <a:buNone/>
+            </a:pPr>
+            <a:r>
+              <a:rPr lang="en-US" sz="1000" dirty="0">
+                <a:solidFill>
+                  <a:srgbClr val="003A63"/>
+                </a:solidFill>
+                <a:latin typeface="Aptos" pitchFamily="34" charset="0"/>
+                <a:ea typeface="Aptos" pitchFamily="34" charset="-122"/>
+                <a:cs typeface="Aptos" pitchFamily="34" charset="-120"/>
+              </a:rPr>
+              <a:t>Concept to action</a:t>
+            </a:r>
+            <a:endParaRPr lang="en-US" sz="1000" dirty="0"/>
+          </a:p>
+        </p:txBody>
+      </p:sp>
+      <p:sp>
+        <p:nvSpPr>
+          <p:cNvPr id="18" name="Shape 16"/>
+          <p:cNvSpPr/>
+          <p:nvPr/>
+        </p:nvSpPr>
+        <p:spPr>
+          <a:xfrm>
+            <a:off x="7635240" y="4498848"/>
+            <a:ext cx="3474720" cy="1143000"/>
+          </a:xfrm>
+          <a:prstGeom prst="roundRect">
+            <a:avLst>
+              <a:gd name="adj" fmla="val 9600"/>
             </a:avLst>
           </a:prstGeom>
           <a:solidFill>
@@ -7672,14 +8599,14 @@
       </p:sp>
       <p:sp>
         <p:nvSpPr>
-          <p:cNvPr id="14" name="Text 12"/>
-          <p:cNvSpPr/>
-          <p:nvPr/>
-        </p:nvSpPr>
-        <p:spPr>
-          <a:xfrm>
-            <a:off x="8074152" y="3666744"/>
-            <a:ext cx="2825496" cy="256032"/>
+          <p:cNvPr id="19" name="Text 17"/>
+          <p:cNvSpPr/>
+          <p:nvPr/>
+        </p:nvSpPr>
+        <p:spPr>
+          <a:xfrm>
+            <a:off x="7799832" y="4645152"/>
+            <a:ext cx="3145536" cy="256032"/>
           </a:xfrm>
           <a:prstGeom prst="rect">
             <a:avLst/>
@@ -7703,7 +8630,7 @@
                 <a:ea typeface="Aptos" pitchFamily="34" charset="-122"/>
                 <a:cs typeface="Aptos" pitchFamily="34" charset="-120"/>
               </a:rPr>
-              <a:t>Use this for</a:t>
+              <a:t>Apply it</a:t>
             </a:r>
             <a:endParaRPr lang="en-US" sz="1300" dirty="0"/>
           </a:p>
@@ -7711,14 +8638,14 @@
       </p:sp>
       <p:sp>
         <p:nvSpPr>
-          <p:cNvPr id="15" name="Text 13"/>
-          <p:cNvSpPr/>
-          <p:nvPr/>
-        </p:nvSpPr>
-        <p:spPr>
-          <a:xfrm>
-            <a:off x="8074152" y="4023360"/>
-            <a:ext cx="2825496" cy="1097280"/>
+          <p:cNvPr id="20" name="Text 18"/>
+          <p:cNvSpPr/>
+          <p:nvPr/>
+        </p:nvSpPr>
+        <p:spPr>
+          <a:xfrm>
+            <a:off x="7799832" y="5001768"/>
+            <a:ext cx="3145536" cy="502920"/>
           </a:xfrm>
           <a:prstGeom prst="rect">
             <a:avLst/>
@@ -7744,7 +8671,7 @@
                 <a:ea typeface="Aptos" pitchFamily="34" charset="-122"/>
                 <a:cs typeface="Aptos" pitchFamily="34" charset="-120"/>
               </a:rPr>
-              <a:t>Connect the concept to public health decisions, safeguards, documentation, or implementation work.</a:t>
+              <a:t>Connect the concept to public health purpose, responsible use, required safeguards, documentation, and the next action a department should take.</a:t>
             </a:r>
             <a:endParaRPr lang="en-US" sz="1550" dirty="0"/>
           </a:p>
@@ -7918,8 +8845,8 @@
         </p:nvSpPr>
         <p:spPr>
           <a:xfrm>
-            <a:off x="9966960" y="6537960"/>
-            <a:ext cx="1645920" cy="201168"/>
+            <a:off x="9646920" y="6537960"/>
+            <a:ext cx="1965960" cy="201168"/>
           </a:xfrm>
           <a:prstGeom prst="rect">
             <a:avLst/>
@@ -7943,7 +8870,7 @@
                 <a:ea typeface="Aptos" pitchFamily="34" charset="-122"/>
                 <a:cs typeface="Aptos" pitchFamily="34" charset="-120"/>
               </a:rPr>
-              <a:t>Â© Paula Soper</a:t>
+              <a:t>Copyright Paula Soper</a:t>
             </a:r>
             <a:endParaRPr lang="en-US" sz="800" dirty="0"/>
           </a:p>
@@ -7990,77 +8917,13 @@
       </p:sp>
       <p:sp>
         <p:nvSpPr>
-          <p:cNvPr id="8" name="Shape 6"/>
+          <p:cNvPr id="8" name="Text 6"/>
           <p:cNvSpPr/>
           <p:nvPr/>
         </p:nvSpPr>
         <p:spPr>
           <a:xfrm>
             <a:off x="640080" y="658368"/>
-            <a:ext cx="420624" cy="420624"/>
-          </a:xfrm>
-          <a:prstGeom prst="ellipse">
-            <a:avLst/>
-          </a:prstGeom>
-          <a:solidFill>
-            <a:srgbClr val="0068B7"/>
-          </a:solidFill>
-          <a:ln w="12700">
-            <a:solidFill>
-              <a:srgbClr val="0068B7"/>
-            </a:solidFill>
-            <a:prstDash val="solid"/>
-          </a:ln>
-        </p:spPr>
-      </p:sp>
-      <p:sp>
-        <p:nvSpPr>
-          <p:cNvPr id="9" name="Text 7"/>
-          <p:cNvSpPr/>
-          <p:nvPr/>
-        </p:nvSpPr>
-        <p:spPr>
-          <a:xfrm>
-            <a:off x="640080" y="731520"/>
-            <a:ext cx="420624" cy="164592"/>
-          </a:xfrm>
-          <a:prstGeom prst="rect">
-            <a:avLst/>
-          </a:prstGeom>
-          <a:noFill/>
-          <a:ln/>
-        </p:spPr>
-        <p:txBody>
-          <a:bodyPr wrap="square" lIns="0" tIns="0" rIns="0" bIns="0" rtlCol="0" anchor="ctr"/>
-          <a:lstStyle/>
-          <a:p>
-            <a:pPr algn="ctr" indent="0" marL="0">
-              <a:buNone/>
-            </a:pPr>
-            <a:r>
-              <a:rPr lang="en-US" sz="1100" b="1" dirty="0">
-                <a:solidFill>
-                  <a:srgbClr val="FFFFFF"/>
-                </a:solidFill>
-                <a:latin typeface="Aptos" pitchFamily="34" charset="0"/>
-                <a:ea typeface="Aptos" pitchFamily="34" charset="-122"/>
-                <a:cs typeface="Aptos" pitchFamily="34" charset="-120"/>
-              </a:rPr>
-              <a:t>12</a:t>
-            </a:r>
-            <a:endParaRPr lang="en-US" sz="1100" dirty="0"/>
-          </a:p>
-        </p:txBody>
-      </p:sp>
-      <p:sp>
-        <p:nvSpPr>
-          <p:cNvPr id="10" name="Text 8"/>
-          <p:cNvSpPr/>
-          <p:nvPr/>
-        </p:nvSpPr>
-        <p:spPr>
-          <a:xfrm>
-            <a:off x="640080" y="621792"/>
             <a:ext cx="10881360" cy="713232"/>
           </a:xfrm>
           <a:prstGeom prst="rect">
@@ -8095,14 +8958,14 @@
       </p:sp>
       <p:sp>
         <p:nvSpPr>
-          <p:cNvPr id="11" name="Text 9"/>
+          <p:cNvPr id="9" name="Text 7"/>
           <p:cNvSpPr/>
           <p:nvPr/>
         </p:nvSpPr>
         <p:spPr>
           <a:xfrm>
             <a:off x="868680" y="1508760"/>
-            <a:ext cx="6537960" cy="4160520"/>
+            <a:ext cx="6309360" cy="4160520"/>
           </a:xfrm>
           <a:prstGeom prst="rect">
             <a:avLst/>
@@ -8161,18 +9024,18 @@
       </p:sp>
       <p:sp>
         <p:nvSpPr>
-          <p:cNvPr id="12" name="Shape 10"/>
-          <p:cNvSpPr/>
-          <p:nvPr/>
-        </p:nvSpPr>
-        <p:spPr>
-          <a:xfrm>
-            <a:off x="7909560" y="1417320"/>
-            <a:ext cx="3154680" cy="1828800"/>
+          <p:cNvPr id="10" name="Shape 8"/>
+          <p:cNvSpPr/>
+          <p:nvPr/>
+        </p:nvSpPr>
+        <p:spPr>
+          <a:xfrm>
+            <a:off x="7635240" y="1325880"/>
+            <a:ext cx="3474720" cy="1325880"/>
           </a:xfrm>
           <a:prstGeom prst="roundRect">
             <a:avLst>
-              <a:gd name="adj" fmla="val 6000"/>
+              <a:gd name="adj" fmla="val 8276"/>
             </a:avLst>
           </a:prstGeom>
           <a:solidFill>
@@ -8188,14 +9051,14 @@
       </p:sp>
       <p:sp>
         <p:nvSpPr>
-          <p:cNvPr id="13" name="Text 11"/>
-          <p:cNvSpPr/>
-          <p:nvPr/>
-        </p:nvSpPr>
-        <p:spPr>
-          <a:xfrm>
-            <a:off x="8074152" y="1563624"/>
-            <a:ext cx="2825496" cy="256032"/>
+          <p:cNvPr id="11" name="Text 9"/>
+          <p:cNvSpPr/>
+          <p:nvPr/>
+        </p:nvSpPr>
+        <p:spPr>
+          <a:xfrm>
+            <a:off x="7799832" y="1472184"/>
+            <a:ext cx="3145536" cy="256032"/>
           </a:xfrm>
           <a:prstGeom prst="rect">
             <a:avLst/>
@@ -8219,7 +9082,7 @@
                 <a:ea typeface="Aptos" pitchFamily="34" charset="-122"/>
                 <a:cs typeface="Aptos" pitchFamily="34" charset="-120"/>
               </a:rPr>
-              <a:t>Key idea</a:t>
+              <a:t>Practice focus</a:t>
             </a:r>
             <a:endParaRPr lang="en-US" sz="1300" dirty="0"/>
           </a:p>
@@ -8227,14 +9090,14 @@
       </p:sp>
       <p:sp>
         <p:nvSpPr>
-          <p:cNvPr id="14" name="Text 12"/>
-          <p:cNvSpPr/>
-          <p:nvPr/>
-        </p:nvSpPr>
-        <p:spPr>
-          <a:xfrm>
-            <a:off x="8074152" y="1920240"/>
-            <a:ext cx="2825496" cy="1188720"/>
+          <p:cNvPr id="12" name="Text 10"/>
+          <p:cNvSpPr/>
+          <p:nvPr/>
+        </p:nvSpPr>
+        <p:spPr>
+          <a:xfrm>
+            <a:off x="7799832" y="1828800"/>
+            <a:ext cx="3145536" cy="685800"/>
           </a:xfrm>
           <a:prstGeom prst="rect">
             <a:avLst/>
@@ -8268,18 +9131,159 @@
       </p:sp>
       <p:sp>
         <p:nvSpPr>
-          <p:cNvPr id="15" name="Shape 13"/>
-          <p:cNvSpPr/>
-          <p:nvPr/>
-        </p:nvSpPr>
-        <p:spPr>
-          <a:xfrm>
-            <a:off x="7909560" y="3520440"/>
-            <a:ext cx="3154680" cy="1737360"/>
+          <p:cNvPr id="13" name="Shape 11"/>
+          <p:cNvSpPr/>
+          <p:nvPr/>
+        </p:nvSpPr>
+        <p:spPr>
+          <a:xfrm>
+            <a:off x="7635240" y="2788920"/>
+            <a:ext cx="3474720" cy="1536192"/>
           </a:xfrm>
           <a:prstGeom prst="roundRect">
             <a:avLst>
-              <a:gd name="adj" fmla="val 6316"/>
+              <a:gd name="adj" fmla="val 7143"/>
+            </a:avLst>
+          </a:prstGeom>
+          <a:solidFill>
+            <a:srgbClr val="FFFFFF">
+              <a:alpha val="88000"/>
+            </a:srgbClr>
+          </a:solidFill>
+          <a:ln w="12700">
+            <a:solidFill>
+              <a:srgbClr val="D6E8F2"/>
+            </a:solidFill>
+            <a:prstDash val="solid"/>
+          </a:ln>
+        </p:spPr>
+      </p:sp>
+      <p:sp>
+        <p:nvSpPr>
+          <p:cNvPr id="14" name="Shape 12"/>
+          <p:cNvSpPr/>
+          <p:nvPr/>
+        </p:nvSpPr>
+        <p:spPr>
+          <a:xfrm>
+            <a:off x="8074152" y="3291840"/>
+            <a:ext cx="2596896" cy="749808"/>
+          </a:xfrm>
+          <a:prstGeom prst="rect">
+            <a:avLst/>
+          </a:prstGeom>
+          <a:solidFill>
+            <a:srgbClr val="EAF6F8"/>
+          </a:solidFill>
+          <a:ln w="12700">
+            <a:solidFill>
+              <a:srgbClr val="8ABBD8"/>
+            </a:solidFill>
+            <a:prstDash val="solid"/>
+          </a:ln>
+        </p:spPr>
+      </p:sp>
+      <p:sp>
+        <p:nvSpPr>
+          <p:cNvPr id="15" name="Shape 13"/>
+          <p:cNvSpPr/>
+          <p:nvPr/>
+        </p:nvSpPr>
+        <p:spPr>
+          <a:xfrm>
+            <a:off x="8202168" y="3721608"/>
+            <a:ext cx="2340864" cy="0"/>
+          </a:xfrm>
+          <a:prstGeom prst="line">
+            <a:avLst/>
+          </a:prstGeom>
+          <a:noFill/>
+          <a:ln w="19050">
+            <a:solidFill>
+              <a:srgbClr val="0068B7"/>
+            </a:solidFill>
+            <a:prstDash val="solid"/>
+          </a:ln>
+        </p:spPr>
+      </p:sp>
+      <p:sp>
+        <p:nvSpPr>
+          <p:cNvPr id="16" name="Shape 14"/>
+          <p:cNvSpPr/>
+          <p:nvPr/>
+        </p:nvSpPr>
+        <p:spPr>
+          <a:xfrm>
+            <a:off x="9198864" y="4206240"/>
+            <a:ext cx="347472" cy="347472"/>
+          </a:xfrm>
+          <a:prstGeom prst="ellipse">
+            <a:avLst/>
+          </a:prstGeom>
+          <a:solidFill>
+            <a:srgbClr val="2F8A28"/>
+          </a:solidFill>
+          <a:ln w="12700">
+            <a:solidFill>
+              <a:srgbClr val="2F8A28"/>
+            </a:solidFill>
+            <a:prstDash val="solid"/>
+          </a:ln>
+        </p:spPr>
+      </p:sp>
+      <p:sp>
+        <p:nvSpPr>
+          <p:cNvPr id="17" name="Text 15"/>
+          <p:cNvSpPr/>
+          <p:nvPr/>
+        </p:nvSpPr>
+        <p:spPr>
+          <a:xfrm>
+            <a:off x="7909560" y="3977640"/>
+            <a:ext cx="2926080" cy="182880"/>
+          </a:xfrm>
+          <a:prstGeom prst="rect">
+            <a:avLst/>
+          </a:prstGeom>
+          <a:noFill/>
+          <a:ln/>
+        </p:spPr>
+        <p:txBody>
+          <a:bodyPr wrap="square" lIns="0" tIns="0" rIns="0" bIns="0" rtlCol="0" anchor="ctr"/>
+          <a:lstStyle/>
+          <a:p>
+            <a:pPr algn="ctr" indent="0" marL="0">
+              <a:buNone/>
+            </a:pPr>
+            <a:r>
+              <a:rPr lang="en-US" sz="1000" dirty="0">
+                <a:solidFill>
+                  <a:srgbClr val="003A63"/>
+                </a:solidFill>
+                <a:latin typeface="Aptos" pitchFamily="34" charset="0"/>
+                <a:ea typeface="Aptos" pitchFamily="34" charset="-122"/>
+                <a:cs typeface="Aptos" pitchFamily="34" charset="-120"/>
+              </a:rPr>
+              <a:t>Concept to action</a:t>
+            </a:r>
+            <a:endParaRPr lang="en-US" sz="1000" dirty="0"/>
+          </a:p>
+        </p:txBody>
+      </p:sp>
+      <p:sp>
+        <p:nvSpPr>
+          <p:cNvPr id="18" name="Shape 16"/>
+          <p:cNvSpPr/>
+          <p:nvPr/>
+        </p:nvSpPr>
+        <p:spPr>
+          <a:xfrm>
+            <a:off x="7635240" y="4498848"/>
+            <a:ext cx="3474720" cy="1143000"/>
+          </a:xfrm>
+          <a:prstGeom prst="roundRect">
+            <a:avLst>
+              <a:gd name="adj" fmla="val 9600"/>
             </a:avLst>
           </a:prstGeom>
           <a:solidFill>
@@ -8295,14 +9299,14 @@
       </p:sp>
       <p:sp>
         <p:nvSpPr>
-          <p:cNvPr id="16" name="Text 14"/>
-          <p:cNvSpPr/>
-          <p:nvPr/>
-        </p:nvSpPr>
-        <p:spPr>
-          <a:xfrm>
-            <a:off x="8074152" y="3666744"/>
-            <a:ext cx="2825496" cy="256032"/>
+          <p:cNvPr id="19" name="Text 17"/>
+          <p:cNvSpPr/>
+          <p:nvPr/>
+        </p:nvSpPr>
+        <p:spPr>
+          <a:xfrm>
+            <a:off x="7799832" y="4645152"/>
+            <a:ext cx="3145536" cy="256032"/>
           </a:xfrm>
           <a:prstGeom prst="rect">
             <a:avLst/>
@@ -8326,7 +9330,7 @@
                 <a:ea typeface="Aptos" pitchFamily="34" charset="-122"/>
                 <a:cs typeface="Aptos" pitchFamily="34" charset="-120"/>
               </a:rPr>
-              <a:t>Use this for</a:t>
+              <a:t>What to produce</a:t>
             </a:r>
             <a:endParaRPr lang="en-US" sz="1300" dirty="0"/>
           </a:p>
@@ -8334,14 +9338,14 @@
       </p:sp>
       <p:sp>
         <p:nvSpPr>
-          <p:cNvPr id="17" name="Text 15"/>
-          <p:cNvSpPr/>
-          <p:nvPr/>
-        </p:nvSpPr>
-        <p:spPr>
-          <a:xfrm>
-            <a:off x="8074152" y="4023360"/>
-            <a:ext cx="2825496" cy="1097280"/>
+          <p:cNvPr id="20" name="Text 18"/>
+          <p:cNvSpPr/>
+          <p:nvPr/>
+        </p:nvSpPr>
+        <p:spPr>
+          <a:xfrm>
+            <a:off x="7799832" y="5001768"/>
+            <a:ext cx="3145536" cy="502920"/>
           </a:xfrm>
           <a:prstGeom prst="rect">
             <a:avLst/>
@@ -8367,7 +9371,7 @@
                 <a:ea typeface="Aptos" pitchFamily="34" charset="-122"/>
                 <a:cs typeface="Aptos" pitchFamily="34" charset="-120"/>
               </a:rPr>
-              <a:t>Connect the concept to public health decisions, safeguards, documentation, or implementation work.</a:t>
+              <a:t>Use the assignment to test whether you can explain the concept, apply it to a realistic public health situation, and identify what would need review before the work moves forward.</a:t>
             </a:r>
             <a:endParaRPr lang="en-US" sz="1550" dirty="0"/>
           </a:p>
@@ -8541,8 +9545,8 @@
         </p:nvSpPr>
         <p:spPr>
           <a:xfrm>
-            <a:off x="9966960" y="6537960"/>
-            <a:ext cx="1645920" cy="201168"/>
+            <a:off x="9646920" y="6537960"/>
+            <a:ext cx="1965960" cy="201168"/>
           </a:xfrm>
           <a:prstGeom prst="rect">
             <a:avLst/>
@@ -8566,7 +9570,7 @@
                 <a:ea typeface="Aptos" pitchFamily="34" charset="-122"/>
                 <a:cs typeface="Aptos" pitchFamily="34" charset="-120"/>
               </a:rPr>
-              <a:t>Â© Paula Soper</a:t>
+              <a:t>Copyright Paula Soper</a:t>
             </a:r>
             <a:endParaRPr lang="en-US" sz="800" dirty="0"/>
           </a:p>
@@ -8613,77 +9617,13 @@
       </p:sp>
       <p:sp>
         <p:nvSpPr>
-          <p:cNvPr id="8" name="Shape 6"/>
+          <p:cNvPr id="8" name="Text 6"/>
           <p:cNvSpPr/>
           <p:nvPr/>
         </p:nvSpPr>
         <p:spPr>
           <a:xfrm>
             <a:off x="640080" y="658368"/>
-            <a:ext cx="420624" cy="420624"/>
-          </a:xfrm>
-          <a:prstGeom prst="ellipse">
-            <a:avLst/>
-          </a:prstGeom>
-          <a:solidFill>
-            <a:srgbClr val="0068B7"/>
-          </a:solidFill>
-          <a:ln w="12700">
-            <a:solidFill>
-              <a:srgbClr val="0068B7"/>
-            </a:solidFill>
-            <a:prstDash val="solid"/>
-          </a:ln>
-        </p:spPr>
-      </p:sp>
-      <p:sp>
-        <p:nvSpPr>
-          <p:cNvPr id="9" name="Text 7"/>
-          <p:cNvSpPr/>
-          <p:nvPr/>
-        </p:nvSpPr>
-        <p:spPr>
-          <a:xfrm>
-            <a:off x="640080" y="731520"/>
-            <a:ext cx="420624" cy="164592"/>
-          </a:xfrm>
-          <a:prstGeom prst="rect">
-            <a:avLst/>
-          </a:prstGeom>
-          <a:noFill/>
-          <a:ln/>
-        </p:spPr>
-        <p:txBody>
-          <a:bodyPr wrap="square" lIns="0" tIns="0" rIns="0" bIns="0" rtlCol="0" anchor="ctr"/>
-          <a:lstStyle/>
-          <a:p>
-            <a:pPr algn="ctr" indent="0" marL="0">
-              <a:buNone/>
-            </a:pPr>
-            <a:r>
-              <a:rPr lang="en-US" sz="1100" b="1" dirty="0">
-                <a:solidFill>
-                  <a:srgbClr val="FFFFFF"/>
-                </a:solidFill>
-                <a:latin typeface="Aptos" pitchFamily="34" charset="0"/>
-                <a:ea typeface="Aptos" pitchFamily="34" charset="-122"/>
-                <a:cs typeface="Aptos" pitchFamily="34" charset="-120"/>
-              </a:rPr>
-              <a:t>13</a:t>
-            </a:r>
-            <a:endParaRPr lang="en-US" sz="1100" dirty="0"/>
-          </a:p>
-        </p:txBody>
-      </p:sp>
-      <p:sp>
-        <p:nvSpPr>
-          <p:cNvPr id="10" name="Text 8"/>
-          <p:cNvSpPr/>
-          <p:nvPr/>
-        </p:nvSpPr>
-        <p:spPr>
-          <a:xfrm>
-            <a:off x="640080" y="621792"/>
             <a:ext cx="10881360" cy="713232"/>
           </a:xfrm>
           <a:prstGeom prst="rect">
@@ -8718,14 +9658,14 @@
       </p:sp>
       <p:sp>
         <p:nvSpPr>
-          <p:cNvPr id="11" name="Text 9"/>
+          <p:cNvPr id="9" name="Text 7"/>
           <p:cNvSpPr/>
           <p:nvPr/>
         </p:nvSpPr>
         <p:spPr>
           <a:xfrm>
             <a:off x="868680" y="1508760"/>
-            <a:ext cx="6537960" cy="4160520"/>
+            <a:ext cx="6309360" cy="4160520"/>
           </a:xfrm>
           <a:prstGeom prst="rect">
             <a:avLst/>
@@ -8784,18 +9724,18 @@
       </p:sp>
       <p:sp>
         <p:nvSpPr>
-          <p:cNvPr id="12" name="Shape 10"/>
-          <p:cNvSpPr/>
-          <p:nvPr/>
-        </p:nvSpPr>
-        <p:spPr>
-          <a:xfrm>
-            <a:off x="7909560" y="1417320"/>
-            <a:ext cx="3154680" cy="1828800"/>
+          <p:cNvPr id="10" name="Shape 8"/>
+          <p:cNvSpPr/>
+          <p:nvPr/>
+        </p:nvSpPr>
+        <p:spPr>
+          <a:xfrm>
+            <a:off x="7635240" y="1325880"/>
+            <a:ext cx="3474720" cy="1325880"/>
           </a:xfrm>
           <a:prstGeom prst="roundRect">
             <a:avLst>
-              <a:gd name="adj" fmla="val 6000"/>
+              <a:gd name="adj" fmla="val 8276"/>
             </a:avLst>
           </a:prstGeom>
           <a:solidFill>
@@ -8811,14 +9751,14 @@
       </p:sp>
       <p:sp>
         <p:nvSpPr>
-          <p:cNvPr id="13" name="Text 11"/>
-          <p:cNvSpPr/>
-          <p:nvPr/>
-        </p:nvSpPr>
-        <p:spPr>
-          <a:xfrm>
-            <a:off x="8074152" y="1563624"/>
-            <a:ext cx="2825496" cy="256032"/>
+          <p:cNvPr id="11" name="Text 9"/>
+          <p:cNvSpPr/>
+          <p:nvPr/>
+        </p:nvSpPr>
+        <p:spPr>
+          <a:xfrm>
+            <a:off x="7799832" y="1472184"/>
+            <a:ext cx="3145536" cy="256032"/>
           </a:xfrm>
           <a:prstGeom prst="rect">
             <a:avLst/>
@@ -8842,7 +9782,7 @@
                 <a:ea typeface="Aptos" pitchFamily="34" charset="-122"/>
                 <a:cs typeface="Aptos" pitchFamily="34" charset="-120"/>
               </a:rPr>
-              <a:t>Key idea</a:t>
+              <a:t>Practice focus</a:t>
             </a:r>
             <a:endParaRPr lang="en-US" sz="1300" dirty="0"/>
           </a:p>
@@ -8850,14 +9790,14 @@
       </p:sp>
       <p:sp>
         <p:nvSpPr>
-          <p:cNvPr id="14" name="Text 12"/>
-          <p:cNvSpPr/>
-          <p:nvPr/>
-        </p:nvSpPr>
-        <p:spPr>
-          <a:xfrm>
-            <a:off x="8074152" y="1920240"/>
-            <a:ext cx="2825496" cy="1188720"/>
+          <p:cNvPr id="12" name="Text 10"/>
+          <p:cNvSpPr/>
+          <p:nvPr/>
+        </p:nvSpPr>
+        <p:spPr>
+          <a:xfrm>
+            <a:off x="7799832" y="1828800"/>
+            <a:ext cx="3145536" cy="685800"/>
           </a:xfrm>
           <a:prstGeom prst="rect">
             <a:avLst/>
@@ -8891,18 +9831,159 @@
       </p:sp>
       <p:sp>
         <p:nvSpPr>
-          <p:cNvPr id="15" name="Shape 13"/>
-          <p:cNvSpPr/>
-          <p:nvPr/>
-        </p:nvSpPr>
-        <p:spPr>
-          <a:xfrm>
-            <a:off x="7909560" y="3520440"/>
-            <a:ext cx="3154680" cy="1737360"/>
+          <p:cNvPr id="13" name="Shape 11"/>
+          <p:cNvSpPr/>
+          <p:nvPr/>
+        </p:nvSpPr>
+        <p:spPr>
+          <a:xfrm>
+            <a:off x="7635240" y="2788920"/>
+            <a:ext cx="3474720" cy="1536192"/>
           </a:xfrm>
           <a:prstGeom prst="roundRect">
             <a:avLst>
-              <a:gd name="adj" fmla="val 6316"/>
+              <a:gd name="adj" fmla="val 7143"/>
+            </a:avLst>
+          </a:prstGeom>
+          <a:solidFill>
+            <a:srgbClr val="FFFFFF">
+              <a:alpha val="88000"/>
+            </a:srgbClr>
+          </a:solidFill>
+          <a:ln w="12700">
+            <a:solidFill>
+              <a:srgbClr val="D6E8F2"/>
+            </a:solidFill>
+            <a:prstDash val="solid"/>
+          </a:ln>
+        </p:spPr>
+      </p:sp>
+      <p:sp>
+        <p:nvSpPr>
+          <p:cNvPr id="14" name="Shape 12"/>
+          <p:cNvSpPr/>
+          <p:nvPr/>
+        </p:nvSpPr>
+        <p:spPr>
+          <a:xfrm>
+            <a:off x="8074152" y="3291840"/>
+            <a:ext cx="2596896" cy="749808"/>
+          </a:xfrm>
+          <a:prstGeom prst="rect">
+            <a:avLst/>
+          </a:prstGeom>
+          <a:solidFill>
+            <a:srgbClr val="EAF6F8"/>
+          </a:solidFill>
+          <a:ln w="12700">
+            <a:solidFill>
+              <a:srgbClr val="8ABBD8"/>
+            </a:solidFill>
+            <a:prstDash val="solid"/>
+          </a:ln>
+        </p:spPr>
+      </p:sp>
+      <p:sp>
+        <p:nvSpPr>
+          <p:cNvPr id="15" name="Shape 13"/>
+          <p:cNvSpPr/>
+          <p:nvPr/>
+        </p:nvSpPr>
+        <p:spPr>
+          <a:xfrm>
+            <a:off x="8202168" y="3721608"/>
+            <a:ext cx="2340864" cy="0"/>
+          </a:xfrm>
+          <a:prstGeom prst="line">
+            <a:avLst/>
+          </a:prstGeom>
+          <a:noFill/>
+          <a:ln w="19050">
+            <a:solidFill>
+              <a:srgbClr val="0068B7"/>
+            </a:solidFill>
+            <a:prstDash val="solid"/>
+          </a:ln>
+        </p:spPr>
+      </p:sp>
+      <p:sp>
+        <p:nvSpPr>
+          <p:cNvPr id="16" name="Shape 14"/>
+          <p:cNvSpPr/>
+          <p:nvPr/>
+        </p:nvSpPr>
+        <p:spPr>
+          <a:xfrm>
+            <a:off x="9198864" y="4206240"/>
+            <a:ext cx="347472" cy="347472"/>
+          </a:xfrm>
+          <a:prstGeom prst="ellipse">
+            <a:avLst/>
+          </a:prstGeom>
+          <a:solidFill>
+            <a:srgbClr val="2F8A28"/>
+          </a:solidFill>
+          <a:ln w="12700">
+            <a:solidFill>
+              <a:srgbClr val="2F8A28"/>
+            </a:solidFill>
+            <a:prstDash val="solid"/>
+          </a:ln>
+        </p:spPr>
+      </p:sp>
+      <p:sp>
+        <p:nvSpPr>
+          <p:cNvPr id="17" name="Text 15"/>
+          <p:cNvSpPr/>
+          <p:nvPr/>
+        </p:nvSpPr>
+        <p:spPr>
+          <a:xfrm>
+            <a:off x="7909560" y="3977640"/>
+            <a:ext cx="2926080" cy="182880"/>
+          </a:xfrm>
+          <a:prstGeom prst="rect">
+            <a:avLst/>
+          </a:prstGeom>
+          <a:noFill/>
+          <a:ln/>
+        </p:spPr>
+        <p:txBody>
+          <a:bodyPr wrap="square" lIns="0" tIns="0" rIns="0" bIns="0" rtlCol="0" anchor="ctr"/>
+          <a:lstStyle/>
+          <a:p>
+            <a:pPr algn="ctr" indent="0" marL="0">
+              <a:buNone/>
+            </a:pPr>
+            <a:r>
+              <a:rPr lang="en-US" sz="1000" dirty="0">
+                <a:solidFill>
+                  <a:srgbClr val="003A63"/>
+                </a:solidFill>
+                <a:latin typeface="Aptos" pitchFamily="34" charset="0"/>
+                <a:ea typeface="Aptos" pitchFamily="34" charset="-122"/>
+                <a:cs typeface="Aptos" pitchFamily="34" charset="-120"/>
+              </a:rPr>
+              <a:t>Concept to action</a:t>
+            </a:r>
+            <a:endParaRPr lang="en-US" sz="1000" dirty="0"/>
+          </a:p>
+        </p:txBody>
+      </p:sp>
+      <p:sp>
+        <p:nvSpPr>
+          <p:cNvPr id="18" name="Shape 16"/>
+          <p:cNvSpPr/>
+          <p:nvPr/>
+        </p:nvSpPr>
+        <p:spPr>
+          <a:xfrm>
+            <a:off x="7635240" y="4498848"/>
+            <a:ext cx="3474720" cy="1143000"/>
+          </a:xfrm>
+          <a:prstGeom prst="roundRect">
+            <a:avLst>
+              <a:gd name="adj" fmla="val 9600"/>
             </a:avLst>
           </a:prstGeom>
           <a:solidFill>
@@ -8918,14 +9999,14 @@
       </p:sp>
       <p:sp>
         <p:nvSpPr>
-          <p:cNvPr id="16" name="Text 14"/>
-          <p:cNvSpPr/>
-          <p:nvPr/>
-        </p:nvSpPr>
-        <p:spPr>
-          <a:xfrm>
-            <a:off x="8074152" y="3666744"/>
-            <a:ext cx="2825496" cy="256032"/>
+          <p:cNvPr id="19" name="Text 17"/>
+          <p:cNvSpPr/>
+          <p:nvPr/>
+        </p:nvSpPr>
+        <p:spPr>
+          <a:xfrm>
+            <a:off x="7799832" y="4645152"/>
+            <a:ext cx="3145536" cy="256032"/>
           </a:xfrm>
           <a:prstGeom prst="rect">
             <a:avLst/>
@@ -8949,7 +10030,7 @@
                 <a:ea typeface="Aptos" pitchFamily="34" charset="-122"/>
                 <a:cs typeface="Aptos" pitchFamily="34" charset="-120"/>
               </a:rPr>
-              <a:t>Use this for</a:t>
+              <a:t>What to produce</a:t>
             </a:r>
             <a:endParaRPr lang="en-US" sz="1300" dirty="0"/>
           </a:p>
@@ -8957,14 +10038,14 @@
       </p:sp>
       <p:sp>
         <p:nvSpPr>
-          <p:cNvPr id="17" name="Text 15"/>
-          <p:cNvSpPr/>
-          <p:nvPr/>
-        </p:nvSpPr>
-        <p:spPr>
-          <a:xfrm>
-            <a:off x="8074152" y="4023360"/>
-            <a:ext cx="2825496" cy="1097280"/>
+          <p:cNvPr id="20" name="Text 18"/>
+          <p:cNvSpPr/>
+          <p:nvPr/>
+        </p:nvSpPr>
+        <p:spPr>
+          <a:xfrm>
+            <a:off x="7799832" y="5001768"/>
+            <a:ext cx="3145536" cy="502920"/>
           </a:xfrm>
           <a:prstGeom prst="rect">
             <a:avLst/>
@@ -8990,7 +10071,7 @@
                 <a:ea typeface="Aptos" pitchFamily="34" charset="-122"/>
                 <a:cs typeface="Aptos" pitchFamily="34" charset="-120"/>
               </a:rPr>
-              <a:t>Connect the concept to public health decisions, safeguards, documentation, or implementation work.</a:t>
+              <a:t>Use the assignment to test whether you can explain the concept, apply it to a realistic public health situation, and identify what would need review before the work moves forward.</a:t>
             </a:r>
             <a:endParaRPr lang="en-US" sz="1550" dirty="0"/>
           </a:p>
@@ -9164,8 +10245,8 @@
         </p:nvSpPr>
         <p:spPr>
           <a:xfrm>
-            <a:off x="9966960" y="6537960"/>
-            <a:ext cx="1645920" cy="201168"/>
+            <a:off x="9646920" y="6537960"/>
+            <a:ext cx="1965960" cy="201168"/>
           </a:xfrm>
           <a:prstGeom prst="rect">
             <a:avLst/>
@@ -9189,7 +10270,7 @@
                 <a:ea typeface="Aptos" pitchFamily="34" charset="-122"/>
                 <a:cs typeface="Aptos" pitchFamily="34" charset="-120"/>
               </a:rPr>
-              <a:t>Â© Paula Soper</a:t>
+              <a:t>Copyright Paula Soper</a:t>
             </a:r>
             <a:endParaRPr lang="en-US" sz="800" dirty="0"/>
           </a:p>
@@ -9552,46 +10633,7 @@
       </p:sp>
       <p:sp>
         <p:nvSpPr>
-          <p:cNvPr id="15" name="Text 13"/>
-          <p:cNvSpPr/>
-          <p:nvPr/>
-        </p:nvSpPr>
-        <p:spPr>
-          <a:xfrm>
-            <a:off x="8695944" y="3941064"/>
-            <a:ext cx="201168" cy="256032"/>
-          </a:xfrm>
-          <a:prstGeom prst="rect">
-            <a:avLst/>
-          </a:prstGeom>
-          <a:noFill/>
-          <a:ln/>
-        </p:spPr>
-        <p:txBody>
-          <a:bodyPr wrap="square" lIns="0" tIns="0" rIns="0" bIns="0" rtlCol="0" anchor="ctr"/>
-          <a:lstStyle/>
-          <a:p>
-            <a:pPr algn="ctr" indent="0" marL="0">
-              <a:buNone/>
-            </a:pPr>
-            <a:r>
-              <a:rPr lang="en-US" sz="1800" b="1" dirty="0">
-                <a:solidFill>
-                  <a:srgbClr val="0068B7"/>
-                </a:solidFill>
-                <a:latin typeface="Aptos" pitchFamily="34" charset="0"/>
-                <a:ea typeface="Aptos" pitchFamily="34" charset="-122"/>
-                <a:cs typeface="Aptos" pitchFamily="34" charset="-120"/>
-              </a:rPr>
-              <a:t>â†’</a:t>
-            </a:r>
-            <a:endParaRPr lang="en-US" sz="1800" dirty="0"/>
-          </a:p>
-        </p:txBody>
-      </p:sp>
-      <p:sp>
-        <p:nvSpPr>
-          <p:cNvPr id="16" name="Shape 14"/>
+          <p:cNvPr id="15" name="Shape 13"/>
           <p:cNvSpPr/>
           <p:nvPr/>
         </p:nvSpPr>
@@ -9618,7 +10660,7 @@
       </p:sp>
       <p:sp>
         <p:nvSpPr>
-          <p:cNvPr id="17" name="Text 15"/>
+          <p:cNvPr id="16" name="Text 14"/>
           <p:cNvSpPr/>
           <p:nvPr/>
         </p:nvSpPr>
@@ -9659,46 +10701,7 @@
       </p:sp>
       <p:sp>
         <p:nvSpPr>
-          <p:cNvPr id="18" name="Text 16"/>
-          <p:cNvSpPr/>
-          <p:nvPr/>
-        </p:nvSpPr>
-        <p:spPr>
-          <a:xfrm>
-            <a:off x="9985248" y="3941064"/>
-            <a:ext cx="201168" cy="256032"/>
-          </a:xfrm>
-          <a:prstGeom prst="rect">
-            <a:avLst/>
-          </a:prstGeom>
-          <a:noFill/>
-          <a:ln/>
-        </p:spPr>
-        <p:txBody>
-          <a:bodyPr wrap="square" lIns="0" tIns="0" rIns="0" bIns="0" rtlCol="0" anchor="ctr"/>
-          <a:lstStyle/>
-          <a:p>
-            <a:pPr algn="ctr" indent="0" marL="0">
-              <a:buNone/>
-            </a:pPr>
-            <a:r>
-              <a:rPr lang="en-US" sz="1800" b="1" dirty="0">
-                <a:solidFill>
-                  <a:srgbClr val="0068B7"/>
-                </a:solidFill>
-                <a:latin typeface="Aptos" pitchFamily="34" charset="0"/>
-                <a:ea typeface="Aptos" pitchFamily="34" charset="-122"/>
-                <a:cs typeface="Aptos" pitchFamily="34" charset="-120"/>
-              </a:rPr>
-              <a:t>â†’</a:t>
-            </a:r>
-            <a:endParaRPr lang="en-US" sz="1800" dirty="0"/>
-          </a:p>
-        </p:txBody>
-      </p:sp>
-      <p:sp>
-        <p:nvSpPr>
-          <p:cNvPr id="19" name="Shape 17"/>
+          <p:cNvPr id="17" name="Shape 15"/>
           <p:cNvSpPr/>
           <p:nvPr/>
         </p:nvSpPr>
@@ -9725,7 +10728,7 @@
       </p:sp>
       <p:sp>
         <p:nvSpPr>
-          <p:cNvPr id="20" name="Text 18"/>
+          <p:cNvPr id="18" name="Text 16"/>
           <p:cNvSpPr/>
           <p:nvPr/>
         </p:nvSpPr>
@@ -9932,8 +10935,8 @@
         </p:nvSpPr>
         <p:spPr>
           <a:xfrm>
-            <a:off x="9966960" y="6537960"/>
-            <a:ext cx="1645920" cy="201168"/>
+            <a:off x="9646920" y="6537960"/>
+            <a:ext cx="1965960" cy="201168"/>
           </a:xfrm>
           <a:prstGeom prst="rect">
             <a:avLst/>
@@ -9957,7 +10960,7 @@
                 <a:ea typeface="Aptos" pitchFamily="34" charset="-122"/>
                 <a:cs typeface="Aptos" pitchFamily="34" charset="-120"/>
               </a:rPr>
-              <a:t>Â© Paula Soper</a:t>
+              <a:t>Copyright Paula Soper</a:t>
             </a:r>
             <a:endParaRPr lang="en-US" sz="800" dirty="0"/>
           </a:p>
@@ -10004,77 +11007,13 @@
       </p:sp>
       <p:sp>
         <p:nvSpPr>
-          <p:cNvPr id="8" name="Shape 6"/>
+          <p:cNvPr id="8" name="Text 6"/>
           <p:cNvSpPr/>
           <p:nvPr/>
         </p:nvSpPr>
         <p:spPr>
           <a:xfrm>
             <a:off x="640080" y="658368"/>
-            <a:ext cx="420624" cy="420624"/>
-          </a:xfrm>
-          <a:prstGeom prst="ellipse">
-            <a:avLst/>
-          </a:prstGeom>
-          <a:solidFill>
-            <a:srgbClr val="0068B7"/>
-          </a:solidFill>
-          <a:ln w="12700">
-            <a:solidFill>
-              <a:srgbClr val="0068B7"/>
-            </a:solidFill>
-            <a:prstDash val="solid"/>
-          </a:ln>
-        </p:spPr>
-      </p:sp>
-      <p:sp>
-        <p:nvSpPr>
-          <p:cNvPr id="9" name="Text 7"/>
-          <p:cNvSpPr/>
-          <p:nvPr/>
-        </p:nvSpPr>
-        <p:spPr>
-          <a:xfrm>
-            <a:off x="640080" y="731520"/>
-            <a:ext cx="420624" cy="164592"/>
-          </a:xfrm>
-          <a:prstGeom prst="rect">
-            <a:avLst/>
-          </a:prstGeom>
-          <a:noFill/>
-          <a:ln/>
-        </p:spPr>
-        <p:txBody>
-          <a:bodyPr wrap="square" lIns="0" tIns="0" rIns="0" bIns="0" rtlCol="0" anchor="ctr"/>
-          <a:lstStyle/>
-          <a:p>
-            <a:pPr algn="ctr" indent="0" marL="0">
-              <a:buNone/>
-            </a:pPr>
-            <a:r>
-              <a:rPr lang="en-US" sz="1100" b="1" dirty="0">
-                <a:solidFill>
-                  <a:srgbClr val="FFFFFF"/>
-                </a:solidFill>
-                <a:latin typeface="Aptos" pitchFamily="34" charset="0"/>
-                <a:ea typeface="Aptos" pitchFamily="34" charset="-122"/>
-                <a:cs typeface="Aptos" pitchFamily="34" charset="-120"/>
-              </a:rPr>
-              <a:t>14</a:t>
-            </a:r>
-            <a:endParaRPr lang="en-US" sz="1100" dirty="0"/>
-          </a:p>
-        </p:txBody>
-      </p:sp>
-      <p:sp>
-        <p:nvSpPr>
-          <p:cNvPr id="10" name="Text 8"/>
-          <p:cNvSpPr/>
-          <p:nvPr/>
-        </p:nvSpPr>
-        <p:spPr>
-          <a:xfrm>
-            <a:off x="640080" y="621792"/>
             <a:ext cx="10881360" cy="713232"/>
           </a:xfrm>
           <a:prstGeom prst="rect">
@@ -10109,14 +11048,14 @@
       </p:sp>
       <p:sp>
         <p:nvSpPr>
-          <p:cNvPr id="11" name="Text 9"/>
+          <p:cNvPr id="9" name="Text 7"/>
           <p:cNvSpPr/>
           <p:nvPr/>
         </p:nvSpPr>
         <p:spPr>
           <a:xfrm>
             <a:off x="868680" y="1508760"/>
-            <a:ext cx="6537960" cy="4160520"/>
+            <a:ext cx="6309360" cy="4160520"/>
           </a:xfrm>
           <a:prstGeom prst="rect">
             <a:avLst/>
@@ -10175,18 +11114,18 @@
       </p:sp>
       <p:sp>
         <p:nvSpPr>
-          <p:cNvPr id="12" name="Shape 10"/>
-          <p:cNvSpPr/>
-          <p:nvPr/>
-        </p:nvSpPr>
-        <p:spPr>
-          <a:xfrm>
-            <a:off x="7909560" y="1417320"/>
-            <a:ext cx="3154680" cy="1828800"/>
+          <p:cNvPr id="10" name="Shape 8"/>
+          <p:cNvSpPr/>
+          <p:nvPr/>
+        </p:nvSpPr>
+        <p:spPr>
+          <a:xfrm>
+            <a:off x="7635240" y="1325880"/>
+            <a:ext cx="3474720" cy="1325880"/>
           </a:xfrm>
           <a:prstGeom prst="roundRect">
             <a:avLst>
-              <a:gd name="adj" fmla="val 6000"/>
+              <a:gd name="adj" fmla="val 8276"/>
             </a:avLst>
           </a:prstGeom>
           <a:solidFill>
@@ -10202,14 +11141,14 @@
       </p:sp>
       <p:sp>
         <p:nvSpPr>
-          <p:cNvPr id="13" name="Text 11"/>
-          <p:cNvSpPr/>
-          <p:nvPr/>
-        </p:nvSpPr>
-        <p:spPr>
-          <a:xfrm>
-            <a:off x="8074152" y="1563624"/>
-            <a:ext cx="2825496" cy="256032"/>
+          <p:cNvPr id="11" name="Text 9"/>
+          <p:cNvSpPr/>
+          <p:nvPr/>
+        </p:nvSpPr>
+        <p:spPr>
+          <a:xfrm>
+            <a:off x="7799832" y="1472184"/>
+            <a:ext cx="3145536" cy="256032"/>
           </a:xfrm>
           <a:prstGeom prst="rect">
             <a:avLst/>
@@ -10233,7 +11172,7 @@
                 <a:ea typeface="Aptos" pitchFamily="34" charset="-122"/>
                 <a:cs typeface="Aptos" pitchFamily="34" charset="-120"/>
               </a:rPr>
-              <a:t>Key idea</a:t>
+              <a:t>Core concept</a:t>
             </a:r>
             <a:endParaRPr lang="en-US" sz="1300" dirty="0"/>
           </a:p>
@@ -10241,14 +11180,14 @@
       </p:sp>
       <p:sp>
         <p:nvSpPr>
-          <p:cNvPr id="14" name="Text 12"/>
-          <p:cNvSpPr/>
-          <p:nvPr/>
-        </p:nvSpPr>
-        <p:spPr>
-          <a:xfrm>
-            <a:off x="8074152" y="1920240"/>
-            <a:ext cx="2825496" cy="1188720"/>
+          <p:cNvPr id="12" name="Text 10"/>
+          <p:cNvSpPr/>
+          <p:nvPr/>
+        </p:nvSpPr>
+        <p:spPr>
+          <a:xfrm>
+            <a:off x="7799832" y="1828800"/>
+            <a:ext cx="3145536" cy="685800"/>
           </a:xfrm>
           <a:prstGeom prst="rect">
             <a:avLst/>
@@ -10282,18 +11221,159 @@
       </p:sp>
       <p:sp>
         <p:nvSpPr>
-          <p:cNvPr id="15" name="Shape 13"/>
-          <p:cNvSpPr/>
-          <p:nvPr/>
-        </p:nvSpPr>
-        <p:spPr>
-          <a:xfrm>
-            <a:off x="7909560" y="3520440"/>
-            <a:ext cx="3154680" cy="1737360"/>
+          <p:cNvPr id="13" name="Shape 11"/>
+          <p:cNvSpPr/>
+          <p:nvPr/>
+        </p:nvSpPr>
+        <p:spPr>
+          <a:xfrm>
+            <a:off x="7635240" y="2788920"/>
+            <a:ext cx="3474720" cy="1536192"/>
           </a:xfrm>
           <a:prstGeom prst="roundRect">
             <a:avLst>
-              <a:gd name="adj" fmla="val 6316"/>
+              <a:gd name="adj" fmla="val 7143"/>
+            </a:avLst>
+          </a:prstGeom>
+          <a:solidFill>
+            <a:srgbClr val="FFFFFF">
+              <a:alpha val="88000"/>
+            </a:srgbClr>
+          </a:solidFill>
+          <a:ln w="12700">
+            <a:solidFill>
+              <a:srgbClr val="D6E8F2"/>
+            </a:solidFill>
+            <a:prstDash val="solid"/>
+          </a:ln>
+        </p:spPr>
+      </p:sp>
+      <p:sp>
+        <p:nvSpPr>
+          <p:cNvPr id="14" name="Shape 12"/>
+          <p:cNvSpPr/>
+          <p:nvPr/>
+        </p:nvSpPr>
+        <p:spPr>
+          <a:xfrm>
+            <a:off x="8074152" y="3291840"/>
+            <a:ext cx="2596896" cy="749808"/>
+          </a:xfrm>
+          <a:prstGeom prst="rect">
+            <a:avLst/>
+          </a:prstGeom>
+          <a:solidFill>
+            <a:srgbClr val="EAF6F8"/>
+          </a:solidFill>
+          <a:ln w="12700">
+            <a:solidFill>
+              <a:srgbClr val="8ABBD8"/>
+            </a:solidFill>
+            <a:prstDash val="solid"/>
+          </a:ln>
+        </p:spPr>
+      </p:sp>
+      <p:sp>
+        <p:nvSpPr>
+          <p:cNvPr id="15" name="Shape 13"/>
+          <p:cNvSpPr/>
+          <p:nvPr/>
+        </p:nvSpPr>
+        <p:spPr>
+          <a:xfrm>
+            <a:off x="8202168" y="3721608"/>
+            <a:ext cx="2340864" cy="0"/>
+          </a:xfrm>
+          <a:prstGeom prst="line">
+            <a:avLst/>
+          </a:prstGeom>
+          <a:noFill/>
+          <a:ln w="19050">
+            <a:solidFill>
+              <a:srgbClr val="0068B7"/>
+            </a:solidFill>
+            <a:prstDash val="solid"/>
+          </a:ln>
+        </p:spPr>
+      </p:sp>
+      <p:sp>
+        <p:nvSpPr>
+          <p:cNvPr id="16" name="Shape 14"/>
+          <p:cNvSpPr/>
+          <p:nvPr/>
+        </p:nvSpPr>
+        <p:spPr>
+          <a:xfrm>
+            <a:off x="9198864" y="4206240"/>
+            <a:ext cx="347472" cy="347472"/>
+          </a:xfrm>
+          <a:prstGeom prst="ellipse">
+            <a:avLst/>
+          </a:prstGeom>
+          <a:solidFill>
+            <a:srgbClr val="2F8A28"/>
+          </a:solidFill>
+          <a:ln w="12700">
+            <a:solidFill>
+              <a:srgbClr val="2F8A28"/>
+            </a:solidFill>
+            <a:prstDash val="solid"/>
+          </a:ln>
+        </p:spPr>
+      </p:sp>
+      <p:sp>
+        <p:nvSpPr>
+          <p:cNvPr id="17" name="Text 15"/>
+          <p:cNvSpPr/>
+          <p:nvPr/>
+        </p:nvSpPr>
+        <p:spPr>
+          <a:xfrm>
+            <a:off x="7909560" y="3977640"/>
+            <a:ext cx="2926080" cy="182880"/>
+          </a:xfrm>
+          <a:prstGeom prst="rect">
+            <a:avLst/>
+          </a:prstGeom>
+          <a:noFill/>
+          <a:ln/>
+        </p:spPr>
+        <p:txBody>
+          <a:bodyPr wrap="square" lIns="0" tIns="0" rIns="0" bIns="0" rtlCol="0" anchor="ctr"/>
+          <a:lstStyle/>
+          <a:p>
+            <a:pPr algn="ctr" indent="0" marL="0">
+              <a:buNone/>
+            </a:pPr>
+            <a:r>
+              <a:rPr lang="en-US" sz="1000" dirty="0">
+                <a:solidFill>
+                  <a:srgbClr val="003A63"/>
+                </a:solidFill>
+                <a:latin typeface="Aptos" pitchFamily="34" charset="0"/>
+                <a:ea typeface="Aptos" pitchFamily="34" charset="-122"/>
+                <a:cs typeface="Aptos" pitchFamily="34" charset="-120"/>
+              </a:rPr>
+              <a:t>Concept to action</a:t>
+            </a:r>
+            <a:endParaRPr lang="en-US" sz="1000" dirty="0"/>
+          </a:p>
+        </p:txBody>
+      </p:sp>
+      <p:sp>
+        <p:nvSpPr>
+          <p:cNvPr id="18" name="Shape 16"/>
+          <p:cNvSpPr/>
+          <p:nvPr/>
+        </p:nvSpPr>
+        <p:spPr>
+          <a:xfrm>
+            <a:off x="7635240" y="4498848"/>
+            <a:ext cx="3474720" cy="1143000"/>
+          </a:xfrm>
+          <a:prstGeom prst="roundRect">
+            <a:avLst>
+              <a:gd name="adj" fmla="val 9600"/>
             </a:avLst>
           </a:prstGeom>
           <a:solidFill>
@@ -10309,14 +11389,14 @@
       </p:sp>
       <p:sp>
         <p:nvSpPr>
-          <p:cNvPr id="16" name="Text 14"/>
-          <p:cNvSpPr/>
-          <p:nvPr/>
-        </p:nvSpPr>
-        <p:spPr>
-          <a:xfrm>
-            <a:off x="8074152" y="3666744"/>
-            <a:ext cx="2825496" cy="256032"/>
+          <p:cNvPr id="19" name="Text 17"/>
+          <p:cNvSpPr/>
+          <p:nvPr/>
+        </p:nvSpPr>
+        <p:spPr>
+          <a:xfrm>
+            <a:off x="7799832" y="4645152"/>
+            <a:ext cx="3145536" cy="256032"/>
           </a:xfrm>
           <a:prstGeom prst="rect">
             <a:avLst/>
@@ -10340,7 +11420,7 @@
                 <a:ea typeface="Aptos" pitchFamily="34" charset="-122"/>
                 <a:cs typeface="Aptos" pitchFamily="34" charset="-120"/>
               </a:rPr>
-              <a:t>Use this for</a:t>
+              <a:t>Apply it</a:t>
             </a:r>
             <a:endParaRPr lang="en-US" sz="1300" dirty="0"/>
           </a:p>
@@ -10348,14 +11428,14 @@
       </p:sp>
       <p:sp>
         <p:nvSpPr>
-          <p:cNvPr id="17" name="Text 15"/>
-          <p:cNvSpPr/>
-          <p:nvPr/>
-        </p:nvSpPr>
-        <p:spPr>
-          <a:xfrm>
-            <a:off x="8074152" y="4023360"/>
-            <a:ext cx="2825496" cy="1097280"/>
+          <p:cNvPr id="20" name="Text 18"/>
+          <p:cNvSpPr/>
+          <p:nvPr/>
+        </p:nvSpPr>
+        <p:spPr>
+          <a:xfrm>
+            <a:off x="7799832" y="5001768"/>
+            <a:ext cx="3145536" cy="502920"/>
           </a:xfrm>
           <a:prstGeom prst="rect">
             <a:avLst/>
@@ -10381,7 +11461,7 @@
                 <a:ea typeface="Aptos" pitchFamily="34" charset="-122"/>
                 <a:cs typeface="Aptos" pitchFamily="34" charset="-120"/>
               </a:rPr>
-              <a:t>Connect the concept to public health decisions, safeguards, documentation, or implementation work.</a:t>
+              <a:t>Connect the concept to public health purpose, responsible use, required safeguards, documentation, and the next action a department should take.</a:t>
             </a:r>
             <a:endParaRPr lang="en-US" sz="1550" dirty="0"/>
           </a:p>
@@ -10555,8 +11635,8 @@
         </p:nvSpPr>
         <p:spPr>
           <a:xfrm>
-            <a:off x="9966960" y="6537960"/>
-            <a:ext cx="1645920" cy="201168"/>
+            <a:off x="9646920" y="6537960"/>
+            <a:ext cx="1965960" cy="201168"/>
           </a:xfrm>
           <a:prstGeom prst="rect">
             <a:avLst/>
@@ -10580,7 +11660,7 @@
                 <a:ea typeface="Aptos" pitchFamily="34" charset="-122"/>
                 <a:cs typeface="Aptos" pitchFamily="34" charset="-120"/>
               </a:rPr>
-              <a:t>Â© Paula Soper</a:t>
+              <a:t>Copyright Paula Soper</a:t>
             </a:r>
             <a:endParaRPr lang="en-US" sz="800" dirty="0"/>
           </a:p>
@@ -10675,7 +11755,7 @@
         <p:spPr>
           <a:xfrm>
             <a:off x="868680" y="1508760"/>
-            <a:ext cx="6537960" cy="4160520"/>
+            <a:ext cx="6309360" cy="4160520"/>
           </a:xfrm>
           <a:prstGeom prst="rect">
             <a:avLst/>
@@ -10712,12 +11792,12 @@
         </p:nvSpPr>
         <p:spPr>
           <a:xfrm>
-            <a:off x="7909560" y="1417320"/>
-            <a:ext cx="3154680" cy="1828800"/>
+            <a:off x="7635240" y="1325880"/>
+            <a:ext cx="3474720" cy="1325880"/>
           </a:xfrm>
           <a:prstGeom prst="roundRect">
             <a:avLst>
-              <a:gd name="adj" fmla="val 6000"/>
+              <a:gd name="adj" fmla="val 8276"/>
             </a:avLst>
           </a:prstGeom>
           <a:solidFill>
@@ -10739,8 +11819,8 @@
         </p:nvSpPr>
         <p:spPr>
           <a:xfrm>
-            <a:off x="8074152" y="1563624"/>
-            <a:ext cx="2825496" cy="256032"/>
+            <a:off x="7799832" y="1472184"/>
+            <a:ext cx="3145536" cy="256032"/>
           </a:xfrm>
           <a:prstGeom prst="rect">
             <a:avLst/>
@@ -10764,7 +11844,7 @@
                 <a:ea typeface="Aptos" pitchFamily="34" charset="-122"/>
                 <a:cs typeface="Aptos" pitchFamily="34" charset="-120"/>
               </a:rPr>
-              <a:t>Key idea</a:t>
+              <a:t>Core concept</a:t>
             </a:r>
             <a:endParaRPr lang="en-US" sz="1300" dirty="0"/>
           </a:p>
@@ -10778,8 +11858,8 @@
         </p:nvSpPr>
         <p:spPr>
           <a:xfrm>
-            <a:off x="8074152" y="1920240"/>
-            <a:ext cx="2825496" cy="1188720"/>
+            <a:off x="7799832" y="1828800"/>
+            <a:ext cx="3145536" cy="685800"/>
           </a:xfrm>
           <a:prstGeom prst="rect">
             <a:avLst/>
@@ -10819,12 +11899,153 @@
         </p:nvSpPr>
         <p:spPr>
           <a:xfrm>
-            <a:off x="7909560" y="3520440"/>
-            <a:ext cx="3154680" cy="1737360"/>
+            <a:off x="7635240" y="2788920"/>
+            <a:ext cx="3474720" cy="1536192"/>
           </a:xfrm>
           <a:prstGeom prst="roundRect">
             <a:avLst>
-              <a:gd name="adj" fmla="val 6316"/>
+              <a:gd name="adj" fmla="val 7143"/>
+            </a:avLst>
+          </a:prstGeom>
+          <a:solidFill>
+            <a:srgbClr val="FFFFFF">
+              <a:alpha val="88000"/>
+            </a:srgbClr>
+          </a:solidFill>
+          <a:ln w="12700">
+            <a:solidFill>
+              <a:srgbClr val="D6E8F2"/>
+            </a:solidFill>
+            <a:prstDash val="solid"/>
+          </a:ln>
+        </p:spPr>
+      </p:sp>
+      <p:sp>
+        <p:nvSpPr>
+          <p:cNvPr id="14" name="Shape 12"/>
+          <p:cNvSpPr/>
+          <p:nvPr/>
+        </p:nvSpPr>
+        <p:spPr>
+          <a:xfrm>
+            <a:off x="8074152" y="3291840"/>
+            <a:ext cx="2596896" cy="749808"/>
+          </a:xfrm>
+          <a:prstGeom prst="rect">
+            <a:avLst/>
+          </a:prstGeom>
+          <a:solidFill>
+            <a:srgbClr val="EAF6F8"/>
+          </a:solidFill>
+          <a:ln w="12700">
+            <a:solidFill>
+              <a:srgbClr val="8ABBD8"/>
+            </a:solidFill>
+            <a:prstDash val="solid"/>
+          </a:ln>
+        </p:spPr>
+      </p:sp>
+      <p:sp>
+        <p:nvSpPr>
+          <p:cNvPr id="15" name="Shape 13"/>
+          <p:cNvSpPr/>
+          <p:nvPr/>
+        </p:nvSpPr>
+        <p:spPr>
+          <a:xfrm>
+            <a:off x="8202168" y="3721608"/>
+            <a:ext cx="2340864" cy="0"/>
+          </a:xfrm>
+          <a:prstGeom prst="line">
+            <a:avLst/>
+          </a:prstGeom>
+          <a:noFill/>
+          <a:ln w="19050">
+            <a:solidFill>
+              <a:srgbClr val="0068B7"/>
+            </a:solidFill>
+            <a:prstDash val="solid"/>
+          </a:ln>
+        </p:spPr>
+      </p:sp>
+      <p:sp>
+        <p:nvSpPr>
+          <p:cNvPr id="16" name="Shape 14"/>
+          <p:cNvSpPr/>
+          <p:nvPr/>
+        </p:nvSpPr>
+        <p:spPr>
+          <a:xfrm>
+            <a:off x="9198864" y="4206240"/>
+            <a:ext cx="347472" cy="347472"/>
+          </a:xfrm>
+          <a:prstGeom prst="ellipse">
+            <a:avLst/>
+          </a:prstGeom>
+          <a:solidFill>
+            <a:srgbClr val="2F8A28"/>
+          </a:solidFill>
+          <a:ln w="12700">
+            <a:solidFill>
+              <a:srgbClr val="2F8A28"/>
+            </a:solidFill>
+            <a:prstDash val="solid"/>
+          </a:ln>
+        </p:spPr>
+      </p:sp>
+      <p:sp>
+        <p:nvSpPr>
+          <p:cNvPr id="17" name="Text 15"/>
+          <p:cNvSpPr/>
+          <p:nvPr/>
+        </p:nvSpPr>
+        <p:spPr>
+          <a:xfrm>
+            <a:off x="7909560" y="3977640"/>
+            <a:ext cx="2926080" cy="182880"/>
+          </a:xfrm>
+          <a:prstGeom prst="rect">
+            <a:avLst/>
+          </a:prstGeom>
+          <a:noFill/>
+          <a:ln/>
+        </p:spPr>
+        <p:txBody>
+          <a:bodyPr wrap="square" lIns="0" tIns="0" rIns="0" bIns="0" rtlCol="0" anchor="ctr"/>
+          <a:lstStyle/>
+          <a:p>
+            <a:pPr algn="ctr" indent="0" marL="0">
+              <a:buNone/>
+            </a:pPr>
+            <a:r>
+              <a:rPr lang="en-US" sz="1000" dirty="0">
+                <a:solidFill>
+                  <a:srgbClr val="003A63"/>
+                </a:solidFill>
+                <a:latin typeface="Aptos" pitchFamily="34" charset="0"/>
+                <a:ea typeface="Aptos" pitchFamily="34" charset="-122"/>
+                <a:cs typeface="Aptos" pitchFamily="34" charset="-120"/>
+              </a:rPr>
+              <a:t>Concept to action</a:t>
+            </a:r>
+            <a:endParaRPr lang="en-US" sz="1000" dirty="0"/>
+          </a:p>
+        </p:txBody>
+      </p:sp>
+      <p:sp>
+        <p:nvSpPr>
+          <p:cNvPr id="18" name="Shape 16"/>
+          <p:cNvSpPr/>
+          <p:nvPr/>
+        </p:nvSpPr>
+        <p:spPr>
+          <a:xfrm>
+            <a:off x="7635240" y="4498848"/>
+            <a:ext cx="3474720" cy="1143000"/>
+          </a:xfrm>
+          <a:prstGeom prst="roundRect">
+            <a:avLst>
+              <a:gd name="adj" fmla="val 9600"/>
             </a:avLst>
           </a:prstGeom>
           <a:solidFill>
@@ -10840,14 +12061,14 @@
       </p:sp>
       <p:sp>
         <p:nvSpPr>
-          <p:cNvPr id="14" name="Text 12"/>
-          <p:cNvSpPr/>
-          <p:nvPr/>
-        </p:nvSpPr>
-        <p:spPr>
-          <a:xfrm>
-            <a:off x="8074152" y="3666744"/>
-            <a:ext cx="2825496" cy="256032"/>
+          <p:cNvPr id="19" name="Text 17"/>
+          <p:cNvSpPr/>
+          <p:nvPr/>
+        </p:nvSpPr>
+        <p:spPr>
+          <a:xfrm>
+            <a:off x="7799832" y="4645152"/>
+            <a:ext cx="3145536" cy="256032"/>
           </a:xfrm>
           <a:prstGeom prst="rect">
             <a:avLst/>
@@ -10871,7 +12092,7 @@
                 <a:ea typeface="Aptos" pitchFamily="34" charset="-122"/>
                 <a:cs typeface="Aptos" pitchFamily="34" charset="-120"/>
               </a:rPr>
-              <a:t>Use this for</a:t>
+              <a:t>Apply it</a:t>
             </a:r>
             <a:endParaRPr lang="en-US" sz="1300" dirty="0"/>
           </a:p>
@@ -10879,14 +12100,14 @@
       </p:sp>
       <p:sp>
         <p:nvSpPr>
-          <p:cNvPr id="15" name="Text 13"/>
-          <p:cNvSpPr/>
-          <p:nvPr/>
-        </p:nvSpPr>
-        <p:spPr>
-          <a:xfrm>
-            <a:off x="8074152" y="4023360"/>
-            <a:ext cx="2825496" cy="1097280"/>
+          <p:cNvPr id="20" name="Text 18"/>
+          <p:cNvSpPr/>
+          <p:nvPr/>
+        </p:nvSpPr>
+        <p:spPr>
+          <a:xfrm>
+            <a:off x="7799832" y="5001768"/>
+            <a:ext cx="3145536" cy="502920"/>
           </a:xfrm>
           <a:prstGeom prst="rect">
             <a:avLst/>
@@ -10912,7 +12133,7 @@
                 <a:ea typeface="Aptos" pitchFamily="34" charset="-122"/>
                 <a:cs typeface="Aptos" pitchFamily="34" charset="-120"/>
               </a:rPr>
-              <a:t>Connect the concept to public health decisions, safeguards, documentation, or implementation work.</a:t>
+              <a:t>Connect the concept to public health purpose, responsible use, required safeguards, documentation, and the next action a department should take.</a:t>
             </a:r>
             <a:endParaRPr lang="en-US" sz="1550" dirty="0"/>
           </a:p>
@@ -11086,8 +12307,8 @@
         </p:nvSpPr>
         <p:spPr>
           <a:xfrm>
-            <a:off x="9966960" y="6537960"/>
-            <a:ext cx="1645920" cy="201168"/>
+            <a:off x="9646920" y="6537960"/>
+            <a:ext cx="1965960" cy="201168"/>
           </a:xfrm>
           <a:prstGeom prst="rect">
             <a:avLst/>
@@ -11111,7 +12332,7 @@
                 <a:ea typeface="Aptos" pitchFamily="34" charset="-122"/>
                 <a:cs typeface="Aptos" pitchFamily="34" charset="-120"/>
               </a:rPr>
-              <a:t>Â© Paula Soper</a:t>
+              <a:t>Copyright Paula Soper</a:t>
             </a:r>
             <a:endParaRPr lang="en-US" sz="800" dirty="0"/>
           </a:p>
@@ -11454,46 +12675,7 @@
       </p:sp>
       <p:sp>
         <p:nvSpPr>
-          <p:cNvPr id="15" name="Text 13"/>
-          <p:cNvSpPr/>
-          <p:nvPr/>
-        </p:nvSpPr>
-        <p:spPr>
-          <a:xfrm>
-            <a:off x="8817864" y="4187952"/>
-            <a:ext cx="201168" cy="256032"/>
-          </a:xfrm>
-          <a:prstGeom prst="rect">
-            <a:avLst/>
-          </a:prstGeom>
-          <a:noFill/>
-          <a:ln/>
-        </p:spPr>
-        <p:txBody>
-          <a:bodyPr wrap="square" lIns="0" tIns="0" rIns="0" bIns="0" rtlCol="0" anchor="ctr"/>
-          <a:lstStyle/>
-          <a:p>
-            <a:pPr algn="ctr" indent="0" marL="0">
-              <a:buNone/>
-            </a:pPr>
-            <a:r>
-              <a:rPr lang="en-US" sz="1800" b="1" dirty="0">
-                <a:solidFill>
-                  <a:srgbClr val="0068B7"/>
-                </a:solidFill>
-                <a:latin typeface="Aptos" pitchFamily="34" charset="0"/>
-                <a:ea typeface="Aptos" pitchFamily="34" charset="-122"/>
-                <a:cs typeface="Aptos" pitchFamily="34" charset="-120"/>
-              </a:rPr>
-              <a:t>â†’</a:t>
-            </a:r>
-            <a:endParaRPr lang="en-US" sz="1800" dirty="0"/>
-          </a:p>
-        </p:txBody>
-      </p:sp>
-      <p:sp>
-        <p:nvSpPr>
-          <p:cNvPr id="16" name="Shape 14"/>
+          <p:cNvPr id="15" name="Shape 13"/>
           <p:cNvSpPr/>
           <p:nvPr/>
         </p:nvSpPr>
@@ -11520,7 +12702,7 @@
       </p:sp>
       <p:sp>
         <p:nvSpPr>
-          <p:cNvPr id="17" name="Text 15"/>
+          <p:cNvPr id="16" name="Text 14"/>
           <p:cNvSpPr/>
           <p:nvPr/>
         </p:nvSpPr>
@@ -11561,46 +12743,7 @@
       </p:sp>
       <p:sp>
         <p:nvSpPr>
-          <p:cNvPr id="18" name="Text 16"/>
-          <p:cNvSpPr/>
-          <p:nvPr/>
-        </p:nvSpPr>
-        <p:spPr>
-          <a:xfrm>
-            <a:off x="10046208" y="4187952"/>
-            <a:ext cx="201168" cy="256032"/>
-          </a:xfrm>
-          <a:prstGeom prst="rect">
-            <a:avLst/>
-          </a:prstGeom>
-          <a:noFill/>
-          <a:ln/>
-        </p:spPr>
-        <p:txBody>
-          <a:bodyPr wrap="square" lIns="0" tIns="0" rIns="0" bIns="0" rtlCol="0" anchor="ctr"/>
-          <a:lstStyle/>
-          <a:p>
-            <a:pPr algn="ctr" indent="0" marL="0">
-              <a:buNone/>
-            </a:pPr>
-            <a:r>
-              <a:rPr lang="en-US" sz="1800" b="1" dirty="0">
-                <a:solidFill>
-                  <a:srgbClr val="0068B7"/>
-                </a:solidFill>
-                <a:latin typeface="Aptos" pitchFamily="34" charset="0"/>
-                <a:ea typeface="Aptos" pitchFamily="34" charset="-122"/>
-                <a:cs typeface="Aptos" pitchFamily="34" charset="-120"/>
-              </a:rPr>
-              <a:t>â†’</a:t>
-            </a:r>
-            <a:endParaRPr lang="en-US" sz="1800" dirty="0"/>
-          </a:p>
-        </p:txBody>
-      </p:sp>
-      <p:sp>
-        <p:nvSpPr>
-          <p:cNvPr id="19" name="Shape 17"/>
+          <p:cNvPr id="17" name="Shape 15"/>
           <p:cNvSpPr/>
           <p:nvPr/>
         </p:nvSpPr>
@@ -11627,7 +12770,7 @@
       </p:sp>
       <p:sp>
         <p:nvSpPr>
-          <p:cNvPr id="20" name="Text 18"/>
+          <p:cNvPr id="18" name="Text 16"/>
           <p:cNvSpPr/>
           <p:nvPr/>
         </p:nvSpPr>
@@ -11834,8 +12977,8 @@
         </p:nvSpPr>
         <p:spPr>
           <a:xfrm>
-            <a:off x="9966960" y="6537960"/>
-            <a:ext cx="1645920" cy="201168"/>
+            <a:off x="9646920" y="6537960"/>
+            <a:ext cx="1965960" cy="201168"/>
           </a:xfrm>
           <a:prstGeom prst="rect">
             <a:avLst/>
@@ -11859,7 +13002,7 @@
                 <a:ea typeface="Aptos" pitchFamily="34" charset="-122"/>
                 <a:cs typeface="Aptos" pitchFamily="34" charset="-120"/>
               </a:rPr>
-              <a:t>Â© Paula Soper</a:t>
+              <a:t>Copyright Paula Soper</a:t>
             </a:r>
             <a:endParaRPr lang="en-US" sz="800" dirty="0"/>
           </a:p>
@@ -12202,46 +13345,7 @@
       </p:sp>
       <p:sp>
         <p:nvSpPr>
-          <p:cNvPr id="15" name="Text 13"/>
-          <p:cNvSpPr/>
-          <p:nvPr/>
-        </p:nvSpPr>
-        <p:spPr>
-          <a:xfrm>
-            <a:off x="8817864" y="4187952"/>
-            <a:ext cx="201168" cy="256032"/>
-          </a:xfrm>
-          <a:prstGeom prst="rect">
-            <a:avLst/>
-          </a:prstGeom>
-          <a:noFill/>
-          <a:ln/>
-        </p:spPr>
-        <p:txBody>
-          <a:bodyPr wrap="square" lIns="0" tIns="0" rIns="0" bIns="0" rtlCol="0" anchor="ctr"/>
-          <a:lstStyle/>
-          <a:p>
-            <a:pPr algn="ctr" indent="0" marL="0">
-              <a:buNone/>
-            </a:pPr>
-            <a:r>
-              <a:rPr lang="en-US" sz="1800" b="1" dirty="0">
-                <a:solidFill>
-                  <a:srgbClr val="0068B7"/>
-                </a:solidFill>
-                <a:latin typeface="Aptos" pitchFamily="34" charset="0"/>
-                <a:ea typeface="Aptos" pitchFamily="34" charset="-122"/>
-                <a:cs typeface="Aptos" pitchFamily="34" charset="-120"/>
-              </a:rPr>
-              <a:t>â†’</a:t>
-            </a:r>
-            <a:endParaRPr lang="en-US" sz="1800" dirty="0"/>
-          </a:p>
-        </p:txBody>
-      </p:sp>
-      <p:sp>
-        <p:nvSpPr>
-          <p:cNvPr id="16" name="Shape 14"/>
+          <p:cNvPr id="15" name="Shape 13"/>
           <p:cNvSpPr/>
           <p:nvPr/>
         </p:nvSpPr>
@@ -12268,7 +13372,7 @@
       </p:sp>
       <p:sp>
         <p:nvSpPr>
-          <p:cNvPr id="17" name="Text 15"/>
+          <p:cNvPr id="16" name="Text 14"/>
           <p:cNvSpPr/>
           <p:nvPr/>
         </p:nvSpPr>
@@ -12309,46 +13413,7 @@
       </p:sp>
       <p:sp>
         <p:nvSpPr>
-          <p:cNvPr id="18" name="Text 16"/>
-          <p:cNvSpPr/>
-          <p:nvPr/>
-        </p:nvSpPr>
-        <p:spPr>
-          <a:xfrm>
-            <a:off x="10046208" y="4187952"/>
-            <a:ext cx="201168" cy="256032"/>
-          </a:xfrm>
-          <a:prstGeom prst="rect">
-            <a:avLst/>
-          </a:prstGeom>
-          <a:noFill/>
-          <a:ln/>
-        </p:spPr>
-        <p:txBody>
-          <a:bodyPr wrap="square" lIns="0" tIns="0" rIns="0" bIns="0" rtlCol="0" anchor="ctr"/>
-          <a:lstStyle/>
-          <a:p>
-            <a:pPr algn="ctr" indent="0" marL="0">
-              <a:buNone/>
-            </a:pPr>
-            <a:r>
-              <a:rPr lang="en-US" sz="1800" b="1" dirty="0">
-                <a:solidFill>
-                  <a:srgbClr val="0068B7"/>
-                </a:solidFill>
-                <a:latin typeface="Aptos" pitchFamily="34" charset="0"/>
-                <a:ea typeface="Aptos" pitchFamily="34" charset="-122"/>
-                <a:cs typeface="Aptos" pitchFamily="34" charset="-120"/>
-              </a:rPr>
-              <a:t>â†’</a:t>
-            </a:r>
-            <a:endParaRPr lang="en-US" sz="1800" dirty="0"/>
-          </a:p>
-        </p:txBody>
-      </p:sp>
-      <p:sp>
-        <p:nvSpPr>
-          <p:cNvPr id="19" name="Shape 17"/>
+          <p:cNvPr id="17" name="Shape 15"/>
           <p:cNvSpPr/>
           <p:nvPr/>
         </p:nvSpPr>
@@ -12375,7 +13440,7 @@
       </p:sp>
       <p:sp>
         <p:nvSpPr>
-          <p:cNvPr id="20" name="Text 18"/>
+          <p:cNvPr id="18" name="Text 16"/>
           <p:cNvSpPr/>
           <p:nvPr/>
         </p:nvSpPr>
@@ -12582,8 +13647,8 @@
         </p:nvSpPr>
         <p:spPr>
           <a:xfrm>
-            <a:off x="9966960" y="6537960"/>
-            <a:ext cx="1645920" cy="201168"/>
+            <a:off x="9646920" y="6537960"/>
+            <a:ext cx="1965960" cy="201168"/>
           </a:xfrm>
           <a:prstGeom prst="rect">
             <a:avLst/>
@@ -12607,7 +13672,7 @@
                 <a:ea typeface="Aptos" pitchFamily="34" charset="-122"/>
                 <a:cs typeface="Aptos" pitchFamily="34" charset="-120"/>
               </a:rPr>
-              <a:t>Â© Paula Soper</a:t>
+              <a:t>Copyright Paula Soper</a:t>
             </a:r>
             <a:endParaRPr lang="en-US" sz="800" dirty="0"/>
           </a:p>
@@ -12654,77 +13719,13 @@
       </p:sp>
       <p:sp>
         <p:nvSpPr>
-          <p:cNvPr id="8" name="Shape 6"/>
+          <p:cNvPr id="8" name="Text 6"/>
           <p:cNvSpPr/>
           <p:nvPr/>
         </p:nvSpPr>
         <p:spPr>
           <a:xfrm>
             <a:off x="640080" y="658368"/>
-            <a:ext cx="420624" cy="420624"/>
-          </a:xfrm>
-          <a:prstGeom prst="ellipse">
-            <a:avLst/>
-          </a:prstGeom>
-          <a:solidFill>
-            <a:srgbClr val="0068B7"/>
-          </a:solidFill>
-          <a:ln w="12700">
-            <a:solidFill>
-              <a:srgbClr val="0068B7"/>
-            </a:solidFill>
-            <a:prstDash val="solid"/>
-          </a:ln>
-        </p:spPr>
-      </p:sp>
-      <p:sp>
-        <p:nvSpPr>
-          <p:cNvPr id="9" name="Text 7"/>
-          <p:cNvSpPr/>
-          <p:nvPr/>
-        </p:nvSpPr>
-        <p:spPr>
-          <a:xfrm>
-            <a:off x="640080" y="731520"/>
-            <a:ext cx="420624" cy="164592"/>
-          </a:xfrm>
-          <a:prstGeom prst="rect">
-            <a:avLst/>
-          </a:prstGeom>
-          <a:noFill/>
-          <a:ln/>
-        </p:spPr>
-        <p:txBody>
-          <a:bodyPr wrap="square" lIns="0" tIns="0" rIns="0" bIns="0" rtlCol="0" anchor="ctr"/>
-          <a:lstStyle/>
-          <a:p>
-            <a:pPr algn="ctr" indent="0" marL="0">
-              <a:buNone/>
-            </a:pPr>
-            <a:r>
-              <a:rPr lang="en-US" sz="1100" b="1" dirty="0">
-                <a:solidFill>
-                  <a:srgbClr val="FFFFFF"/>
-                </a:solidFill>
-                <a:latin typeface="Aptos" pitchFamily="34" charset="0"/>
-                <a:ea typeface="Aptos" pitchFamily="34" charset="-122"/>
-                <a:cs typeface="Aptos" pitchFamily="34" charset="-120"/>
-              </a:rPr>
-              <a:t>1</a:t>
-            </a:r>
-            <a:endParaRPr lang="en-US" sz="1100" dirty="0"/>
-          </a:p>
-        </p:txBody>
-      </p:sp>
-      <p:sp>
-        <p:nvSpPr>
-          <p:cNvPr id="10" name="Text 8"/>
-          <p:cNvSpPr/>
-          <p:nvPr/>
-        </p:nvSpPr>
-        <p:spPr>
-          <a:xfrm>
-            <a:off x="640080" y="621792"/>
             <a:ext cx="10881360" cy="713232"/>
           </a:xfrm>
           <a:prstGeom prst="rect">
@@ -12759,14 +13760,14 @@
       </p:sp>
       <p:sp>
         <p:nvSpPr>
-          <p:cNvPr id="11" name="Text 9"/>
+          <p:cNvPr id="9" name="Text 7"/>
           <p:cNvSpPr/>
           <p:nvPr/>
         </p:nvSpPr>
         <p:spPr>
           <a:xfrm>
             <a:off x="868680" y="1508760"/>
-            <a:ext cx="6537960" cy="4160520"/>
+            <a:ext cx="6309360" cy="4160520"/>
           </a:xfrm>
           <a:prstGeom prst="rect">
             <a:avLst/>
@@ -12825,18 +13826,18 @@
       </p:sp>
       <p:sp>
         <p:nvSpPr>
-          <p:cNvPr id="12" name="Shape 10"/>
-          <p:cNvSpPr/>
-          <p:nvPr/>
-        </p:nvSpPr>
-        <p:spPr>
-          <a:xfrm>
-            <a:off x="7909560" y="1417320"/>
-            <a:ext cx="3154680" cy="1828800"/>
+          <p:cNvPr id="10" name="Shape 8"/>
+          <p:cNvSpPr/>
+          <p:nvPr/>
+        </p:nvSpPr>
+        <p:spPr>
+          <a:xfrm>
+            <a:off x="7635240" y="1325880"/>
+            <a:ext cx="3474720" cy="1325880"/>
           </a:xfrm>
           <a:prstGeom prst="roundRect">
             <a:avLst>
-              <a:gd name="adj" fmla="val 6000"/>
+              <a:gd name="adj" fmla="val 8276"/>
             </a:avLst>
           </a:prstGeom>
           <a:solidFill>
@@ -12852,14 +13853,14 @@
       </p:sp>
       <p:sp>
         <p:nvSpPr>
-          <p:cNvPr id="13" name="Text 11"/>
-          <p:cNvSpPr/>
-          <p:nvPr/>
-        </p:nvSpPr>
-        <p:spPr>
-          <a:xfrm>
-            <a:off x="8074152" y="1563624"/>
-            <a:ext cx="2825496" cy="256032"/>
+          <p:cNvPr id="11" name="Text 9"/>
+          <p:cNvSpPr/>
+          <p:nvPr/>
+        </p:nvSpPr>
+        <p:spPr>
+          <a:xfrm>
+            <a:off x="7799832" y="1472184"/>
+            <a:ext cx="3145536" cy="256032"/>
           </a:xfrm>
           <a:prstGeom prst="rect">
             <a:avLst/>
@@ -12883,7 +13884,7 @@
                 <a:ea typeface="Aptos" pitchFamily="34" charset="-122"/>
                 <a:cs typeface="Aptos" pitchFamily="34" charset="-120"/>
               </a:rPr>
-              <a:t>Key idea</a:t>
+              <a:t>Practice focus</a:t>
             </a:r>
             <a:endParaRPr lang="en-US" sz="1300" dirty="0"/>
           </a:p>
@@ -12891,14 +13892,14 @@
       </p:sp>
       <p:sp>
         <p:nvSpPr>
-          <p:cNvPr id="14" name="Text 12"/>
-          <p:cNvSpPr/>
-          <p:nvPr/>
-        </p:nvSpPr>
-        <p:spPr>
-          <a:xfrm>
-            <a:off x="8074152" y="1920240"/>
-            <a:ext cx="2825496" cy="1188720"/>
+          <p:cNvPr id="12" name="Text 10"/>
+          <p:cNvSpPr/>
+          <p:nvPr/>
+        </p:nvSpPr>
+        <p:spPr>
+          <a:xfrm>
+            <a:off x="7799832" y="1828800"/>
+            <a:ext cx="3145536" cy="685800"/>
           </a:xfrm>
           <a:prstGeom prst="rect">
             <a:avLst/>
@@ -12932,18 +13933,159 @@
       </p:sp>
       <p:sp>
         <p:nvSpPr>
-          <p:cNvPr id="15" name="Shape 13"/>
-          <p:cNvSpPr/>
-          <p:nvPr/>
-        </p:nvSpPr>
-        <p:spPr>
-          <a:xfrm>
-            <a:off x="7909560" y="3520440"/>
-            <a:ext cx="3154680" cy="1737360"/>
+          <p:cNvPr id="13" name="Shape 11"/>
+          <p:cNvSpPr/>
+          <p:nvPr/>
+        </p:nvSpPr>
+        <p:spPr>
+          <a:xfrm>
+            <a:off x="7635240" y="2788920"/>
+            <a:ext cx="3474720" cy="1536192"/>
           </a:xfrm>
           <a:prstGeom prst="roundRect">
             <a:avLst>
-              <a:gd name="adj" fmla="val 6316"/>
+              <a:gd name="adj" fmla="val 7143"/>
+            </a:avLst>
+          </a:prstGeom>
+          <a:solidFill>
+            <a:srgbClr val="FFFFFF">
+              <a:alpha val="88000"/>
+            </a:srgbClr>
+          </a:solidFill>
+          <a:ln w="12700">
+            <a:solidFill>
+              <a:srgbClr val="D6E8F2"/>
+            </a:solidFill>
+            <a:prstDash val="solid"/>
+          </a:ln>
+        </p:spPr>
+      </p:sp>
+      <p:sp>
+        <p:nvSpPr>
+          <p:cNvPr id="14" name="Shape 12"/>
+          <p:cNvSpPr/>
+          <p:nvPr/>
+        </p:nvSpPr>
+        <p:spPr>
+          <a:xfrm>
+            <a:off x="8074152" y="3291840"/>
+            <a:ext cx="2596896" cy="749808"/>
+          </a:xfrm>
+          <a:prstGeom prst="rect">
+            <a:avLst/>
+          </a:prstGeom>
+          <a:solidFill>
+            <a:srgbClr val="EAF6F8"/>
+          </a:solidFill>
+          <a:ln w="12700">
+            <a:solidFill>
+              <a:srgbClr val="8ABBD8"/>
+            </a:solidFill>
+            <a:prstDash val="solid"/>
+          </a:ln>
+        </p:spPr>
+      </p:sp>
+      <p:sp>
+        <p:nvSpPr>
+          <p:cNvPr id="15" name="Shape 13"/>
+          <p:cNvSpPr/>
+          <p:nvPr/>
+        </p:nvSpPr>
+        <p:spPr>
+          <a:xfrm>
+            <a:off x="8202168" y="3721608"/>
+            <a:ext cx="2340864" cy="0"/>
+          </a:xfrm>
+          <a:prstGeom prst="line">
+            <a:avLst/>
+          </a:prstGeom>
+          <a:noFill/>
+          <a:ln w="19050">
+            <a:solidFill>
+              <a:srgbClr val="0068B7"/>
+            </a:solidFill>
+            <a:prstDash val="solid"/>
+          </a:ln>
+        </p:spPr>
+      </p:sp>
+      <p:sp>
+        <p:nvSpPr>
+          <p:cNvPr id="16" name="Shape 14"/>
+          <p:cNvSpPr/>
+          <p:nvPr/>
+        </p:nvSpPr>
+        <p:spPr>
+          <a:xfrm>
+            <a:off x="9198864" y="4206240"/>
+            <a:ext cx="347472" cy="347472"/>
+          </a:xfrm>
+          <a:prstGeom prst="ellipse">
+            <a:avLst/>
+          </a:prstGeom>
+          <a:solidFill>
+            <a:srgbClr val="2F8A28"/>
+          </a:solidFill>
+          <a:ln w="12700">
+            <a:solidFill>
+              <a:srgbClr val="2F8A28"/>
+            </a:solidFill>
+            <a:prstDash val="solid"/>
+          </a:ln>
+        </p:spPr>
+      </p:sp>
+      <p:sp>
+        <p:nvSpPr>
+          <p:cNvPr id="17" name="Text 15"/>
+          <p:cNvSpPr/>
+          <p:nvPr/>
+        </p:nvSpPr>
+        <p:spPr>
+          <a:xfrm>
+            <a:off x="7909560" y="3977640"/>
+            <a:ext cx="2926080" cy="182880"/>
+          </a:xfrm>
+          <a:prstGeom prst="rect">
+            <a:avLst/>
+          </a:prstGeom>
+          <a:noFill/>
+          <a:ln/>
+        </p:spPr>
+        <p:txBody>
+          <a:bodyPr wrap="square" lIns="0" tIns="0" rIns="0" bIns="0" rtlCol="0" anchor="ctr"/>
+          <a:lstStyle/>
+          <a:p>
+            <a:pPr algn="ctr" indent="0" marL="0">
+              <a:buNone/>
+            </a:pPr>
+            <a:r>
+              <a:rPr lang="en-US" sz="1000" dirty="0">
+                <a:solidFill>
+                  <a:srgbClr val="003A63"/>
+                </a:solidFill>
+                <a:latin typeface="Aptos" pitchFamily="34" charset="0"/>
+                <a:ea typeface="Aptos" pitchFamily="34" charset="-122"/>
+                <a:cs typeface="Aptos" pitchFamily="34" charset="-120"/>
+              </a:rPr>
+              <a:t>Concept to action</a:t>
+            </a:r>
+            <a:endParaRPr lang="en-US" sz="1000" dirty="0"/>
+          </a:p>
+        </p:txBody>
+      </p:sp>
+      <p:sp>
+        <p:nvSpPr>
+          <p:cNvPr id="18" name="Shape 16"/>
+          <p:cNvSpPr/>
+          <p:nvPr/>
+        </p:nvSpPr>
+        <p:spPr>
+          <a:xfrm>
+            <a:off x="7635240" y="4498848"/>
+            <a:ext cx="3474720" cy="1143000"/>
+          </a:xfrm>
+          <a:prstGeom prst="roundRect">
+            <a:avLst>
+              <a:gd name="adj" fmla="val 9600"/>
             </a:avLst>
           </a:prstGeom>
           <a:solidFill>
@@ -12959,14 +14101,14 @@
       </p:sp>
       <p:sp>
         <p:nvSpPr>
-          <p:cNvPr id="16" name="Text 14"/>
-          <p:cNvSpPr/>
-          <p:nvPr/>
-        </p:nvSpPr>
-        <p:spPr>
-          <a:xfrm>
-            <a:off x="8074152" y="3666744"/>
-            <a:ext cx="2825496" cy="256032"/>
+          <p:cNvPr id="19" name="Text 17"/>
+          <p:cNvSpPr/>
+          <p:nvPr/>
+        </p:nvSpPr>
+        <p:spPr>
+          <a:xfrm>
+            <a:off x="7799832" y="4645152"/>
+            <a:ext cx="3145536" cy="256032"/>
           </a:xfrm>
           <a:prstGeom prst="rect">
             <a:avLst/>
@@ -12990,7 +14132,7 @@
                 <a:ea typeface="Aptos" pitchFamily="34" charset="-122"/>
                 <a:cs typeface="Aptos" pitchFamily="34" charset="-120"/>
               </a:rPr>
-              <a:t>Use this for</a:t>
+              <a:t>What to produce</a:t>
             </a:r>
             <a:endParaRPr lang="en-US" sz="1300" dirty="0"/>
           </a:p>
@@ -12998,14 +14140,14 @@
       </p:sp>
       <p:sp>
         <p:nvSpPr>
-          <p:cNvPr id="17" name="Text 15"/>
-          <p:cNvSpPr/>
-          <p:nvPr/>
-        </p:nvSpPr>
-        <p:spPr>
-          <a:xfrm>
-            <a:off x="8074152" y="4023360"/>
-            <a:ext cx="2825496" cy="1097280"/>
+          <p:cNvPr id="20" name="Text 18"/>
+          <p:cNvSpPr/>
+          <p:nvPr/>
+        </p:nvSpPr>
+        <p:spPr>
+          <a:xfrm>
+            <a:off x="7799832" y="5001768"/>
+            <a:ext cx="3145536" cy="502920"/>
           </a:xfrm>
           <a:prstGeom prst="rect">
             <a:avLst/>
@@ -13031,7 +14173,7 @@
                 <a:ea typeface="Aptos" pitchFamily="34" charset="-122"/>
                 <a:cs typeface="Aptos" pitchFamily="34" charset="-120"/>
               </a:rPr>
-              <a:t>Connect the concept to public health decisions, safeguards, documentation, or implementation work.</a:t>
+              <a:t>Use the assignment to test whether you can explain the concept, apply it to a realistic public health situation, and identify what would need review before the work moves forward.</a:t>
             </a:r>
             <a:endParaRPr lang="en-US" sz="1550" dirty="0"/>
           </a:p>
@@ -13205,8 +14347,8 @@
         </p:nvSpPr>
         <p:spPr>
           <a:xfrm>
-            <a:off x="9966960" y="6537960"/>
-            <a:ext cx="1645920" cy="201168"/>
+            <a:off x="9646920" y="6537960"/>
+            <a:ext cx="1965960" cy="201168"/>
           </a:xfrm>
           <a:prstGeom prst="rect">
             <a:avLst/>
@@ -13230,7 +14372,7 @@
                 <a:ea typeface="Aptos" pitchFamily="34" charset="-122"/>
                 <a:cs typeface="Aptos" pitchFamily="34" charset="-120"/>
               </a:rPr>
-              <a:t>Â© Paula Soper</a:t>
+              <a:t>Copyright Paula Soper</a:t>
             </a:r>
             <a:endParaRPr lang="en-US" sz="800" dirty="0"/>
           </a:p>
@@ -13277,77 +14419,13 @@
       </p:sp>
       <p:sp>
         <p:nvSpPr>
-          <p:cNvPr id="8" name="Shape 6"/>
+          <p:cNvPr id="8" name="Text 6"/>
           <p:cNvSpPr/>
           <p:nvPr/>
         </p:nvSpPr>
         <p:spPr>
           <a:xfrm>
             <a:off x="640080" y="658368"/>
-            <a:ext cx="420624" cy="420624"/>
-          </a:xfrm>
-          <a:prstGeom prst="ellipse">
-            <a:avLst/>
-          </a:prstGeom>
-          <a:solidFill>
-            <a:srgbClr val="0068B7"/>
-          </a:solidFill>
-          <a:ln w="12700">
-            <a:solidFill>
-              <a:srgbClr val="0068B7"/>
-            </a:solidFill>
-            <a:prstDash val="solid"/>
-          </a:ln>
-        </p:spPr>
-      </p:sp>
-      <p:sp>
-        <p:nvSpPr>
-          <p:cNvPr id="9" name="Text 7"/>
-          <p:cNvSpPr/>
-          <p:nvPr/>
-        </p:nvSpPr>
-        <p:spPr>
-          <a:xfrm>
-            <a:off x="640080" y="731520"/>
-            <a:ext cx="420624" cy="164592"/>
-          </a:xfrm>
-          <a:prstGeom prst="rect">
-            <a:avLst/>
-          </a:prstGeom>
-          <a:noFill/>
-          <a:ln/>
-        </p:spPr>
-        <p:txBody>
-          <a:bodyPr wrap="square" lIns="0" tIns="0" rIns="0" bIns="0" rtlCol="0" anchor="ctr"/>
-          <a:lstStyle/>
-          <a:p>
-            <a:pPr algn="ctr" indent="0" marL="0">
-              <a:buNone/>
-            </a:pPr>
-            <a:r>
-              <a:rPr lang="en-US" sz="1100" b="1" dirty="0">
-                <a:solidFill>
-                  <a:srgbClr val="FFFFFF"/>
-                </a:solidFill>
-                <a:latin typeface="Aptos" pitchFamily="34" charset="0"/>
-                <a:ea typeface="Aptos" pitchFamily="34" charset="-122"/>
-                <a:cs typeface="Aptos" pitchFamily="34" charset="-120"/>
-              </a:rPr>
-              <a:t>2</a:t>
-            </a:r>
-            <a:endParaRPr lang="en-US" sz="1100" dirty="0"/>
-          </a:p>
-        </p:txBody>
-      </p:sp>
-      <p:sp>
-        <p:nvSpPr>
-          <p:cNvPr id="10" name="Text 8"/>
-          <p:cNvSpPr/>
-          <p:nvPr/>
-        </p:nvSpPr>
-        <p:spPr>
-          <a:xfrm>
-            <a:off x="640080" y="621792"/>
             <a:ext cx="10881360" cy="713232"/>
           </a:xfrm>
           <a:prstGeom prst="rect">
@@ -13382,14 +14460,14 @@
       </p:sp>
       <p:sp>
         <p:nvSpPr>
-          <p:cNvPr id="11" name="Text 9"/>
+          <p:cNvPr id="9" name="Text 7"/>
           <p:cNvSpPr/>
           <p:nvPr/>
         </p:nvSpPr>
         <p:spPr>
           <a:xfrm>
             <a:off x="868680" y="1508760"/>
-            <a:ext cx="6537960" cy="4160520"/>
+            <a:ext cx="6309360" cy="4160520"/>
           </a:xfrm>
           <a:prstGeom prst="rect">
             <a:avLst/>
@@ -13448,18 +14526,18 @@
       </p:sp>
       <p:sp>
         <p:nvSpPr>
-          <p:cNvPr id="12" name="Shape 10"/>
-          <p:cNvSpPr/>
-          <p:nvPr/>
-        </p:nvSpPr>
-        <p:spPr>
-          <a:xfrm>
-            <a:off x="7909560" y="1417320"/>
-            <a:ext cx="3154680" cy="1828800"/>
+          <p:cNvPr id="10" name="Shape 8"/>
+          <p:cNvSpPr/>
+          <p:nvPr/>
+        </p:nvSpPr>
+        <p:spPr>
+          <a:xfrm>
+            <a:off x="7635240" y="1325880"/>
+            <a:ext cx="3474720" cy="1325880"/>
           </a:xfrm>
           <a:prstGeom prst="roundRect">
             <a:avLst>
-              <a:gd name="adj" fmla="val 6000"/>
+              <a:gd name="adj" fmla="val 8276"/>
             </a:avLst>
           </a:prstGeom>
           <a:solidFill>
@@ -13475,14 +14553,14 @@
       </p:sp>
       <p:sp>
         <p:nvSpPr>
-          <p:cNvPr id="13" name="Text 11"/>
-          <p:cNvSpPr/>
-          <p:nvPr/>
-        </p:nvSpPr>
-        <p:spPr>
-          <a:xfrm>
-            <a:off x="8074152" y="1563624"/>
-            <a:ext cx="2825496" cy="256032"/>
+          <p:cNvPr id="11" name="Text 9"/>
+          <p:cNvSpPr/>
+          <p:nvPr/>
+        </p:nvSpPr>
+        <p:spPr>
+          <a:xfrm>
+            <a:off x="7799832" y="1472184"/>
+            <a:ext cx="3145536" cy="256032"/>
           </a:xfrm>
           <a:prstGeom prst="rect">
             <a:avLst/>
@@ -13506,7 +14584,7 @@
                 <a:ea typeface="Aptos" pitchFamily="34" charset="-122"/>
                 <a:cs typeface="Aptos" pitchFamily="34" charset="-120"/>
               </a:rPr>
-              <a:t>Key idea</a:t>
+              <a:t>Core concept</a:t>
             </a:r>
             <a:endParaRPr lang="en-US" sz="1300" dirty="0"/>
           </a:p>
@@ -13514,14 +14592,14 @@
       </p:sp>
       <p:sp>
         <p:nvSpPr>
-          <p:cNvPr id="14" name="Text 12"/>
-          <p:cNvSpPr/>
-          <p:nvPr/>
-        </p:nvSpPr>
-        <p:spPr>
-          <a:xfrm>
-            <a:off x="8074152" y="1920240"/>
-            <a:ext cx="2825496" cy="1188720"/>
+          <p:cNvPr id="12" name="Text 10"/>
+          <p:cNvSpPr/>
+          <p:nvPr/>
+        </p:nvSpPr>
+        <p:spPr>
+          <a:xfrm>
+            <a:off x="7799832" y="1828800"/>
+            <a:ext cx="3145536" cy="685800"/>
           </a:xfrm>
           <a:prstGeom prst="rect">
             <a:avLst/>
@@ -13555,18 +14633,159 @@
       </p:sp>
       <p:sp>
         <p:nvSpPr>
-          <p:cNvPr id="15" name="Shape 13"/>
-          <p:cNvSpPr/>
-          <p:nvPr/>
-        </p:nvSpPr>
-        <p:spPr>
-          <a:xfrm>
-            <a:off x="7909560" y="3520440"/>
-            <a:ext cx="3154680" cy="1737360"/>
+          <p:cNvPr id="13" name="Shape 11"/>
+          <p:cNvSpPr/>
+          <p:nvPr/>
+        </p:nvSpPr>
+        <p:spPr>
+          <a:xfrm>
+            <a:off x="7635240" y="2788920"/>
+            <a:ext cx="3474720" cy="1536192"/>
           </a:xfrm>
           <a:prstGeom prst="roundRect">
             <a:avLst>
-              <a:gd name="adj" fmla="val 6316"/>
+              <a:gd name="adj" fmla="val 7143"/>
+            </a:avLst>
+          </a:prstGeom>
+          <a:solidFill>
+            <a:srgbClr val="FFFFFF">
+              <a:alpha val="88000"/>
+            </a:srgbClr>
+          </a:solidFill>
+          <a:ln w="12700">
+            <a:solidFill>
+              <a:srgbClr val="D6E8F2"/>
+            </a:solidFill>
+            <a:prstDash val="solid"/>
+          </a:ln>
+        </p:spPr>
+      </p:sp>
+      <p:sp>
+        <p:nvSpPr>
+          <p:cNvPr id="14" name="Shape 12"/>
+          <p:cNvSpPr/>
+          <p:nvPr/>
+        </p:nvSpPr>
+        <p:spPr>
+          <a:xfrm>
+            <a:off x="8074152" y="3291840"/>
+            <a:ext cx="2596896" cy="749808"/>
+          </a:xfrm>
+          <a:prstGeom prst="rect">
+            <a:avLst/>
+          </a:prstGeom>
+          <a:solidFill>
+            <a:srgbClr val="EAF6F8"/>
+          </a:solidFill>
+          <a:ln w="12700">
+            <a:solidFill>
+              <a:srgbClr val="8ABBD8"/>
+            </a:solidFill>
+            <a:prstDash val="solid"/>
+          </a:ln>
+        </p:spPr>
+      </p:sp>
+      <p:sp>
+        <p:nvSpPr>
+          <p:cNvPr id="15" name="Shape 13"/>
+          <p:cNvSpPr/>
+          <p:nvPr/>
+        </p:nvSpPr>
+        <p:spPr>
+          <a:xfrm>
+            <a:off x="8202168" y="3721608"/>
+            <a:ext cx="2340864" cy="0"/>
+          </a:xfrm>
+          <a:prstGeom prst="line">
+            <a:avLst/>
+          </a:prstGeom>
+          <a:noFill/>
+          <a:ln w="19050">
+            <a:solidFill>
+              <a:srgbClr val="0068B7"/>
+            </a:solidFill>
+            <a:prstDash val="solid"/>
+          </a:ln>
+        </p:spPr>
+      </p:sp>
+      <p:sp>
+        <p:nvSpPr>
+          <p:cNvPr id="16" name="Shape 14"/>
+          <p:cNvSpPr/>
+          <p:nvPr/>
+        </p:nvSpPr>
+        <p:spPr>
+          <a:xfrm>
+            <a:off x="9198864" y="4206240"/>
+            <a:ext cx="347472" cy="347472"/>
+          </a:xfrm>
+          <a:prstGeom prst="ellipse">
+            <a:avLst/>
+          </a:prstGeom>
+          <a:solidFill>
+            <a:srgbClr val="2F8A28"/>
+          </a:solidFill>
+          <a:ln w="12700">
+            <a:solidFill>
+              <a:srgbClr val="2F8A28"/>
+            </a:solidFill>
+            <a:prstDash val="solid"/>
+          </a:ln>
+        </p:spPr>
+      </p:sp>
+      <p:sp>
+        <p:nvSpPr>
+          <p:cNvPr id="17" name="Text 15"/>
+          <p:cNvSpPr/>
+          <p:nvPr/>
+        </p:nvSpPr>
+        <p:spPr>
+          <a:xfrm>
+            <a:off x="7909560" y="3977640"/>
+            <a:ext cx="2926080" cy="182880"/>
+          </a:xfrm>
+          <a:prstGeom prst="rect">
+            <a:avLst/>
+          </a:prstGeom>
+          <a:noFill/>
+          <a:ln/>
+        </p:spPr>
+        <p:txBody>
+          <a:bodyPr wrap="square" lIns="0" tIns="0" rIns="0" bIns="0" rtlCol="0" anchor="ctr"/>
+          <a:lstStyle/>
+          <a:p>
+            <a:pPr algn="ctr" indent="0" marL="0">
+              <a:buNone/>
+            </a:pPr>
+            <a:r>
+              <a:rPr lang="en-US" sz="1000" dirty="0">
+                <a:solidFill>
+                  <a:srgbClr val="003A63"/>
+                </a:solidFill>
+                <a:latin typeface="Aptos" pitchFamily="34" charset="0"/>
+                <a:ea typeface="Aptos" pitchFamily="34" charset="-122"/>
+                <a:cs typeface="Aptos" pitchFamily="34" charset="-120"/>
+              </a:rPr>
+              <a:t>Concept to action</a:t>
+            </a:r>
+            <a:endParaRPr lang="en-US" sz="1000" dirty="0"/>
+          </a:p>
+        </p:txBody>
+      </p:sp>
+      <p:sp>
+        <p:nvSpPr>
+          <p:cNvPr id="18" name="Shape 16"/>
+          <p:cNvSpPr/>
+          <p:nvPr/>
+        </p:nvSpPr>
+        <p:spPr>
+          <a:xfrm>
+            <a:off x="7635240" y="4498848"/>
+            <a:ext cx="3474720" cy="1143000"/>
+          </a:xfrm>
+          <a:prstGeom prst="roundRect">
+            <a:avLst>
+              <a:gd name="adj" fmla="val 9600"/>
             </a:avLst>
           </a:prstGeom>
           <a:solidFill>
@@ -13582,14 +14801,14 @@
       </p:sp>
       <p:sp>
         <p:nvSpPr>
-          <p:cNvPr id="16" name="Text 14"/>
-          <p:cNvSpPr/>
-          <p:nvPr/>
-        </p:nvSpPr>
-        <p:spPr>
-          <a:xfrm>
-            <a:off x="8074152" y="3666744"/>
-            <a:ext cx="2825496" cy="256032"/>
+          <p:cNvPr id="19" name="Text 17"/>
+          <p:cNvSpPr/>
+          <p:nvPr/>
+        </p:nvSpPr>
+        <p:spPr>
+          <a:xfrm>
+            <a:off x="7799832" y="4645152"/>
+            <a:ext cx="3145536" cy="256032"/>
           </a:xfrm>
           <a:prstGeom prst="rect">
             <a:avLst/>
@@ -13613,7 +14832,7 @@
                 <a:ea typeface="Aptos" pitchFamily="34" charset="-122"/>
                 <a:cs typeface="Aptos" pitchFamily="34" charset="-120"/>
               </a:rPr>
-              <a:t>Use this for</a:t>
+              <a:t>Apply it</a:t>
             </a:r>
             <a:endParaRPr lang="en-US" sz="1300" dirty="0"/>
           </a:p>
@@ -13621,14 +14840,14 @@
       </p:sp>
       <p:sp>
         <p:nvSpPr>
-          <p:cNvPr id="17" name="Text 15"/>
-          <p:cNvSpPr/>
-          <p:nvPr/>
-        </p:nvSpPr>
-        <p:spPr>
-          <a:xfrm>
-            <a:off x="8074152" y="4023360"/>
-            <a:ext cx="2825496" cy="1097280"/>
+          <p:cNvPr id="20" name="Text 18"/>
+          <p:cNvSpPr/>
+          <p:nvPr/>
+        </p:nvSpPr>
+        <p:spPr>
+          <a:xfrm>
+            <a:off x="7799832" y="5001768"/>
+            <a:ext cx="3145536" cy="502920"/>
           </a:xfrm>
           <a:prstGeom prst="rect">
             <a:avLst/>
@@ -13654,7 +14873,7 @@
                 <a:ea typeface="Aptos" pitchFamily="34" charset="-122"/>
                 <a:cs typeface="Aptos" pitchFamily="34" charset="-120"/>
               </a:rPr>
-              <a:t>Connect the concept to public health decisions, safeguards, documentation, or implementation work.</a:t>
+              <a:t>Connect the concept to public health purpose, responsible use, required safeguards, documentation, and the next action a department should take.</a:t>
             </a:r>
             <a:endParaRPr lang="en-US" sz="1550" dirty="0"/>
           </a:p>
@@ -13828,8 +15047,8 @@
         </p:nvSpPr>
         <p:spPr>
           <a:xfrm>
-            <a:off x="9966960" y="6537960"/>
-            <a:ext cx="1645920" cy="201168"/>
+            <a:off x="9646920" y="6537960"/>
+            <a:ext cx="1965960" cy="201168"/>
           </a:xfrm>
           <a:prstGeom prst="rect">
             <a:avLst/>
@@ -13853,7 +15072,7 @@
                 <a:ea typeface="Aptos" pitchFamily="34" charset="-122"/>
                 <a:cs typeface="Aptos" pitchFamily="34" charset="-120"/>
               </a:rPr>
-              <a:t>Â© Paula Soper</a:t>
+              <a:t>Copyright Paula Soper</a:t>
             </a:r>
             <a:endParaRPr lang="en-US" sz="800" dirty="0"/>
           </a:p>
@@ -13900,77 +15119,13 @@
       </p:sp>
       <p:sp>
         <p:nvSpPr>
-          <p:cNvPr id="8" name="Shape 6"/>
+          <p:cNvPr id="8" name="Text 6"/>
           <p:cNvSpPr/>
           <p:nvPr/>
         </p:nvSpPr>
         <p:spPr>
           <a:xfrm>
             <a:off x="640080" y="658368"/>
-            <a:ext cx="420624" cy="420624"/>
-          </a:xfrm>
-          <a:prstGeom prst="ellipse">
-            <a:avLst/>
-          </a:prstGeom>
-          <a:solidFill>
-            <a:srgbClr val="0068B7"/>
-          </a:solidFill>
-          <a:ln w="12700">
-            <a:solidFill>
-              <a:srgbClr val="0068B7"/>
-            </a:solidFill>
-            <a:prstDash val="solid"/>
-          </a:ln>
-        </p:spPr>
-      </p:sp>
-      <p:sp>
-        <p:nvSpPr>
-          <p:cNvPr id="9" name="Text 7"/>
-          <p:cNvSpPr/>
-          <p:nvPr/>
-        </p:nvSpPr>
-        <p:spPr>
-          <a:xfrm>
-            <a:off x="640080" y="731520"/>
-            <a:ext cx="420624" cy="164592"/>
-          </a:xfrm>
-          <a:prstGeom prst="rect">
-            <a:avLst/>
-          </a:prstGeom>
-          <a:noFill/>
-          <a:ln/>
-        </p:spPr>
-        <p:txBody>
-          <a:bodyPr wrap="square" lIns="0" tIns="0" rIns="0" bIns="0" rtlCol="0" anchor="ctr"/>
-          <a:lstStyle/>
-          <a:p>
-            <a:pPr algn="ctr" indent="0" marL="0">
-              <a:buNone/>
-            </a:pPr>
-            <a:r>
-              <a:rPr lang="en-US" sz="1100" b="1" dirty="0">
-                <a:solidFill>
-                  <a:srgbClr val="FFFFFF"/>
-                </a:solidFill>
-                <a:latin typeface="Aptos" pitchFamily="34" charset="0"/>
-                <a:ea typeface="Aptos" pitchFamily="34" charset="-122"/>
-                <a:cs typeface="Aptos" pitchFamily="34" charset="-120"/>
-              </a:rPr>
-              <a:t>3</a:t>
-            </a:r>
-            <a:endParaRPr lang="en-US" sz="1100" dirty="0"/>
-          </a:p>
-        </p:txBody>
-      </p:sp>
-      <p:sp>
-        <p:nvSpPr>
-          <p:cNvPr id="10" name="Text 8"/>
-          <p:cNvSpPr/>
-          <p:nvPr/>
-        </p:nvSpPr>
-        <p:spPr>
-          <a:xfrm>
-            <a:off x="640080" y="621792"/>
             <a:ext cx="10881360" cy="713232"/>
           </a:xfrm>
           <a:prstGeom prst="rect">
@@ -14005,14 +15160,14 @@
       </p:sp>
       <p:sp>
         <p:nvSpPr>
-          <p:cNvPr id="11" name="Text 9"/>
+          <p:cNvPr id="9" name="Text 7"/>
           <p:cNvSpPr/>
           <p:nvPr/>
         </p:nvSpPr>
         <p:spPr>
           <a:xfrm>
             <a:off x="868680" y="1508760"/>
-            <a:ext cx="6537960" cy="4160520"/>
+            <a:ext cx="6309360" cy="4160520"/>
           </a:xfrm>
           <a:prstGeom prst="rect">
             <a:avLst/>
@@ -14071,18 +15226,18 @@
       </p:sp>
       <p:sp>
         <p:nvSpPr>
-          <p:cNvPr id="12" name="Shape 10"/>
-          <p:cNvSpPr/>
-          <p:nvPr/>
-        </p:nvSpPr>
-        <p:spPr>
-          <a:xfrm>
-            <a:off x="7909560" y="1417320"/>
-            <a:ext cx="3154680" cy="1828800"/>
+          <p:cNvPr id="10" name="Shape 8"/>
+          <p:cNvSpPr/>
+          <p:nvPr/>
+        </p:nvSpPr>
+        <p:spPr>
+          <a:xfrm>
+            <a:off x="7635240" y="1325880"/>
+            <a:ext cx="3474720" cy="1325880"/>
           </a:xfrm>
           <a:prstGeom prst="roundRect">
             <a:avLst>
-              <a:gd name="adj" fmla="val 6000"/>
+              <a:gd name="adj" fmla="val 8276"/>
             </a:avLst>
           </a:prstGeom>
           <a:solidFill>
@@ -14098,14 +15253,14 @@
       </p:sp>
       <p:sp>
         <p:nvSpPr>
-          <p:cNvPr id="13" name="Text 11"/>
-          <p:cNvSpPr/>
-          <p:nvPr/>
-        </p:nvSpPr>
-        <p:spPr>
-          <a:xfrm>
-            <a:off x="8074152" y="1563624"/>
-            <a:ext cx="2825496" cy="256032"/>
+          <p:cNvPr id="11" name="Text 9"/>
+          <p:cNvSpPr/>
+          <p:nvPr/>
+        </p:nvSpPr>
+        <p:spPr>
+          <a:xfrm>
+            <a:off x="7799832" y="1472184"/>
+            <a:ext cx="3145536" cy="256032"/>
           </a:xfrm>
           <a:prstGeom prst="rect">
             <a:avLst/>
@@ -14129,7 +15284,7 @@
                 <a:ea typeface="Aptos" pitchFamily="34" charset="-122"/>
                 <a:cs typeface="Aptos" pitchFamily="34" charset="-120"/>
               </a:rPr>
-              <a:t>Key idea</a:t>
+              <a:t>Core concept</a:t>
             </a:r>
             <a:endParaRPr lang="en-US" sz="1300" dirty="0"/>
           </a:p>
@@ -14137,14 +15292,14 @@
       </p:sp>
       <p:sp>
         <p:nvSpPr>
-          <p:cNvPr id="14" name="Text 12"/>
-          <p:cNvSpPr/>
-          <p:nvPr/>
-        </p:nvSpPr>
-        <p:spPr>
-          <a:xfrm>
-            <a:off x="8074152" y="1920240"/>
-            <a:ext cx="2825496" cy="1188720"/>
+          <p:cNvPr id="12" name="Text 10"/>
+          <p:cNvSpPr/>
+          <p:nvPr/>
+        </p:nvSpPr>
+        <p:spPr>
+          <a:xfrm>
+            <a:off x="7799832" y="1828800"/>
+            <a:ext cx="3145536" cy="685800"/>
           </a:xfrm>
           <a:prstGeom prst="rect">
             <a:avLst/>
@@ -14178,18 +15333,159 @@
       </p:sp>
       <p:sp>
         <p:nvSpPr>
-          <p:cNvPr id="15" name="Shape 13"/>
-          <p:cNvSpPr/>
-          <p:nvPr/>
-        </p:nvSpPr>
-        <p:spPr>
-          <a:xfrm>
-            <a:off x="7909560" y="3520440"/>
-            <a:ext cx="3154680" cy="1737360"/>
+          <p:cNvPr id="13" name="Shape 11"/>
+          <p:cNvSpPr/>
+          <p:nvPr/>
+        </p:nvSpPr>
+        <p:spPr>
+          <a:xfrm>
+            <a:off x="7635240" y="2788920"/>
+            <a:ext cx="3474720" cy="1536192"/>
           </a:xfrm>
           <a:prstGeom prst="roundRect">
             <a:avLst>
-              <a:gd name="adj" fmla="val 6316"/>
+              <a:gd name="adj" fmla="val 7143"/>
+            </a:avLst>
+          </a:prstGeom>
+          <a:solidFill>
+            <a:srgbClr val="FFFFFF">
+              <a:alpha val="88000"/>
+            </a:srgbClr>
+          </a:solidFill>
+          <a:ln w="12700">
+            <a:solidFill>
+              <a:srgbClr val="D6E8F2"/>
+            </a:solidFill>
+            <a:prstDash val="solid"/>
+          </a:ln>
+        </p:spPr>
+      </p:sp>
+      <p:sp>
+        <p:nvSpPr>
+          <p:cNvPr id="14" name="Shape 12"/>
+          <p:cNvSpPr/>
+          <p:nvPr/>
+        </p:nvSpPr>
+        <p:spPr>
+          <a:xfrm>
+            <a:off x="8074152" y="3291840"/>
+            <a:ext cx="2596896" cy="749808"/>
+          </a:xfrm>
+          <a:prstGeom prst="rect">
+            <a:avLst/>
+          </a:prstGeom>
+          <a:solidFill>
+            <a:srgbClr val="EAF6F8"/>
+          </a:solidFill>
+          <a:ln w="12700">
+            <a:solidFill>
+              <a:srgbClr val="8ABBD8"/>
+            </a:solidFill>
+            <a:prstDash val="solid"/>
+          </a:ln>
+        </p:spPr>
+      </p:sp>
+      <p:sp>
+        <p:nvSpPr>
+          <p:cNvPr id="15" name="Shape 13"/>
+          <p:cNvSpPr/>
+          <p:nvPr/>
+        </p:nvSpPr>
+        <p:spPr>
+          <a:xfrm>
+            <a:off x="8202168" y="3721608"/>
+            <a:ext cx="2340864" cy="0"/>
+          </a:xfrm>
+          <a:prstGeom prst="line">
+            <a:avLst/>
+          </a:prstGeom>
+          <a:noFill/>
+          <a:ln w="19050">
+            <a:solidFill>
+              <a:srgbClr val="0068B7"/>
+            </a:solidFill>
+            <a:prstDash val="solid"/>
+          </a:ln>
+        </p:spPr>
+      </p:sp>
+      <p:sp>
+        <p:nvSpPr>
+          <p:cNvPr id="16" name="Shape 14"/>
+          <p:cNvSpPr/>
+          <p:nvPr/>
+        </p:nvSpPr>
+        <p:spPr>
+          <a:xfrm>
+            <a:off x="9198864" y="4206240"/>
+            <a:ext cx="347472" cy="347472"/>
+          </a:xfrm>
+          <a:prstGeom prst="ellipse">
+            <a:avLst/>
+          </a:prstGeom>
+          <a:solidFill>
+            <a:srgbClr val="2F8A28"/>
+          </a:solidFill>
+          <a:ln w="12700">
+            <a:solidFill>
+              <a:srgbClr val="2F8A28"/>
+            </a:solidFill>
+            <a:prstDash val="solid"/>
+          </a:ln>
+        </p:spPr>
+      </p:sp>
+      <p:sp>
+        <p:nvSpPr>
+          <p:cNvPr id="17" name="Text 15"/>
+          <p:cNvSpPr/>
+          <p:nvPr/>
+        </p:nvSpPr>
+        <p:spPr>
+          <a:xfrm>
+            <a:off x="7909560" y="3977640"/>
+            <a:ext cx="2926080" cy="182880"/>
+          </a:xfrm>
+          <a:prstGeom prst="rect">
+            <a:avLst/>
+          </a:prstGeom>
+          <a:noFill/>
+          <a:ln/>
+        </p:spPr>
+        <p:txBody>
+          <a:bodyPr wrap="square" lIns="0" tIns="0" rIns="0" bIns="0" rtlCol="0" anchor="ctr"/>
+          <a:lstStyle/>
+          <a:p>
+            <a:pPr algn="ctr" indent="0" marL="0">
+              <a:buNone/>
+            </a:pPr>
+            <a:r>
+              <a:rPr lang="en-US" sz="1000" dirty="0">
+                <a:solidFill>
+                  <a:srgbClr val="003A63"/>
+                </a:solidFill>
+                <a:latin typeface="Aptos" pitchFamily="34" charset="0"/>
+                <a:ea typeface="Aptos" pitchFamily="34" charset="-122"/>
+                <a:cs typeface="Aptos" pitchFamily="34" charset="-120"/>
+              </a:rPr>
+              <a:t>Concept to action</a:t>
+            </a:r>
+            <a:endParaRPr lang="en-US" sz="1000" dirty="0"/>
+          </a:p>
+        </p:txBody>
+      </p:sp>
+      <p:sp>
+        <p:nvSpPr>
+          <p:cNvPr id="18" name="Shape 16"/>
+          <p:cNvSpPr/>
+          <p:nvPr/>
+        </p:nvSpPr>
+        <p:spPr>
+          <a:xfrm>
+            <a:off x="7635240" y="4498848"/>
+            <a:ext cx="3474720" cy="1143000"/>
+          </a:xfrm>
+          <a:prstGeom prst="roundRect">
+            <a:avLst>
+              <a:gd name="adj" fmla="val 9600"/>
             </a:avLst>
           </a:prstGeom>
           <a:solidFill>
@@ -14205,14 +15501,14 @@
       </p:sp>
       <p:sp>
         <p:nvSpPr>
-          <p:cNvPr id="16" name="Text 14"/>
-          <p:cNvSpPr/>
-          <p:nvPr/>
-        </p:nvSpPr>
-        <p:spPr>
-          <a:xfrm>
-            <a:off x="8074152" y="3666744"/>
-            <a:ext cx="2825496" cy="256032"/>
+          <p:cNvPr id="19" name="Text 17"/>
+          <p:cNvSpPr/>
+          <p:nvPr/>
+        </p:nvSpPr>
+        <p:spPr>
+          <a:xfrm>
+            <a:off x="7799832" y="4645152"/>
+            <a:ext cx="3145536" cy="256032"/>
           </a:xfrm>
           <a:prstGeom prst="rect">
             <a:avLst/>
@@ -14236,7 +15532,7 @@
                 <a:ea typeface="Aptos" pitchFamily="34" charset="-122"/>
                 <a:cs typeface="Aptos" pitchFamily="34" charset="-120"/>
               </a:rPr>
-              <a:t>Use this for</a:t>
+              <a:t>Apply it</a:t>
             </a:r>
             <a:endParaRPr lang="en-US" sz="1300" dirty="0"/>
           </a:p>
@@ -14244,14 +15540,14 @@
       </p:sp>
       <p:sp>
         <p:nvSpPr>
-          <p:cNvPr id="17" name="Text 15"/>
-          <p:cNvSpPr/>
-          <p:nvPr/>
-        </p:nvSpPr>
-        <p:spPr>
-          <a:xfrm>
-            <a:off x="8074152" y="4023360"/>
-            <a:ext cx="2825496" cy="1097280"/>
+          <p:cNvPr id="20" name="Text 18"/>
+          <p:cNvSpPr/>
+          <p:nvPr/>
+        </p:nvSpPr>
+        <p:spPr>
+          <a:xfrm>
+            <a:off x="7799832" y="5001768"/>
+            <a:ext cx="3145536" cy="502920"/>
           </a:xfrm>
           <a:prstGeom prst="rect">
             <a:avLst/>
@@ -14277,7 +15573,7 @@
                 <a:ea typeface="Aptos" pitchFamily="34" charset="-122"/>
                 <a:cs typeface="Aptos" pitchFamily="34" charset="-120"/>
               </a:rPr>
-              <a:t>Connect the concept to public health decisions, safeguards, documentation, or implementation work.</a:t>
+              <a:t>Connect the concept to public health purpose, responsible use, required safeguards, documentation, and the next action a department should take.</a:t>
             </a:r>
             <a:endParaRPr lang="en-US" sz="1550" dirty="0"/>
           </a:p>
@@ -14451,8 +15747,8 @@
         </p:nvSpPr>
         <p:spPr>
           <a:xfrm>
-            <a:off x="9966960" y="6537960"/>
-            <a:ext cx="1645920" cy="201168"/>
+            <a:off x="9646920" y="6537960"/>
+            <a:ext cx="1965960" cy="201168"/>
           </a:xfrm>
           <a:prstGeom prst="rect">
             <a:avLst/>
@@ -14476,7 +15772,7 @@
                 <a:ea typeface="Aptos" pitchFamily="34" charset="-122"/>
                 <a:cs typeface="Aptos" pitchFamily="34" charset="-120"/>
               </a:rPr>
-              <a:t>Â© Paula Soper</a:t>
+              <a:t>Copyright Paula Soper</a:t>
             </a:r>
             <a:endParaRPr lang="en-US" sz="800" dirty="0"/>
           </a:p>
@@ -14523,77 +15819,13 @@
       </p:sp>
       <p:sp>
         <p:nvSpPr>
-          <p:cNvPr id="8" name="Shape 6"/>
+          <p:cNvPr id="8" name="Text 6"/>
           <p:cNvSpPr/>
           <p:nvPr/>
         </p:nvSpPr>
         <p:spPr>
           <a:xfrm>
             <a:off x="640080" y="658368"/>
-            <a:ext cx="420624" cy="420624"/>
-          </a:xfrm>
-          <a:prstGeom prst="ellipse">
-            <a:avLst/>
-          </a:prstGeom>
-          <a:solidFill>
-            <a:srgbClr val="0068B7"/>
-          </a:solidFill>
-          <a:ln w="12700">
-            <a:solidFill>
-              <a:srgbClr val="0068B7"/>
-            </a:solidFill>
-            <a:prstDash val="solid"/>
-          </a:ln>
-        </p:spPr>
-      </p:sp>
-      <p:sp>
-        <p:nvSpPr>
-          <p:cNvPr id="9" name="Text 7"/>
-          <p:cNvSpPr/>
-          <p:nvPr/>
-        </p:nvSpPr>
-        <p:spPr>
-          <a:xfrm>
-            <a:off x="640080" y="731520"/>
-            <a:ext cx="420624" cy="164592"/>
-          </a:xfrm>
-          <a:prstGeom prst="rect">
-            <a:avLst/>
-          </a:prstGeom>
-          <a:noFill/>
-          <a:ln/>
-        </p:spPr>
-        <p:txBody>
-          <a:bodyPr wrap="square" lIns="0" tIns="0" rIns="0" bIns="0" rtlCol="0" anchor="ctr"/>
-          <a:lstStyle/>
-          <a:p>
-            <a:pPr algn="ctr" indent="0" marL="0">
-              <a:buNone/>
-            </a:pPr>
-            <a:r>
-              <a:rPr lang="en-US" sz="1100" b="1" dirty="0">
-                <a:solidFill>
-                  <a:srgbClr val="FFFFFF"/>
-                </a:solidFill>
-                <a:latin typeface="Aptos" pitchFamily="34" charset="0"/>
-                <a:ea typeface="Aptos" pitchFamily="34" charset="-122"/>
-                <a:cs typeface="Aptos" pitchFamily="34" charset="-120"/>
-              </a:rPr>
-              <a:t>4</a:t>
-            </a:r>
-            <a:endParaRPr lang="en-US" sz="1100" dirty="0"/>
-          </a:p>
-        </p:txBody>
-      </p:sp>
-      <p:sp>
-        <p:nvSpPr>
-          <p:cNvPr id="10" name="Text 8"/>
-          <p:cNvSpPr/>
-          <p:nvPr/>
-        </p:nvSpPr>
-        <p:spPr>
-          <a:xfrm>
-            <a:off x="640080" y="621792"/>
             <a:ext cx="10881360" cy="713232"/>
           </a:xfrm>
           <a:prstGeom prst="rect">
@@ -14628,14 +15860,14 @@
       </p:sp>
       <p:sp>
         <p:nvSpPr>
-          <p:cNvPr id="11" name="Text 9"/>
+          <p:cNvPr id="9" name="Text 7"/>
           <p:cNvSpPr/>
           <p:nvPr/>
         </p:nvSpPr>
         <p:spPr>
           <a:xfrm>
             <a:off x="868680" y="1508760"/>
-            <a:ext cx="6537960" cy="4160520"/>
+            <a:ext cx="6309360" cy="4160520"/>
           </a:xfrm>
           <a:prstGeom prst="rect">
             <a:avLst/>
@@ -14694,18 +15926,18 @@
       </p:sp>
       <p:sp>
         <p:nvSpPr>
-          <p:cNvPr id="12" name="Shape 10"/>
-          <p:cNvSpPr/>
-          <p:nvPr/>
-        </p:nvSpPr>
-        <p:spPr>
-          <a:xfrm>
-            <a:off x="7909560" y="1417320"/>
-            <a:ext cx="3154680" cy="1828800"/>
+          <p:cNvPr id="10" name="Shape 8"/>
+          <p:cNvSpPr/>
+          <p:nvPr/>
+        </p:nvSpPr>
+        <p:spPr>
+          <a:xfrm>
+            <a:off x="7635240" y="1325880"/>
+            <a:ext cx="3474720" cy="1325880"/>
           </a:xfrm>
           <a:prstGeom prst="roundRect">
             <a:avLst>
-              <a:gd name="adj" fmla="val 6000"/>
+              <a:gd name="adj" fmla="val 8276"/>
             </a:avLst>
           </a:prstGeom>
           <a:solidFill>
@@ -14721,14 +15953,14 @@
       </p:sp>
       <p:sp>
         <p:nvSpPr>
-          <p:cNvPr id="13" name="Text 11"/>
-          <p:cNvSpPr/>
-          <p:nvPr/>
-        </p:nvSpPr>
-        <p:spPr>
-          <a:xfrm>
-            <a:off x="8074152" y="1563624"/>
-            <a:ext cx="2825496" cy="256032"/>
+          <p:cNvPr id="11" name="Text 9"/>
+          <p:cNvSpPr/>
+          <p:nvPr/>
+        </p:nvSpPr>
+        <p:spPr>
+          <a:xfrm>
+            <a:off x="7799832" y="1472184"/>
+            <a:ext cx="3145536" cy="256032"/>
           </a:xfrm>
           <a:prstGeom prst="rect">
             <a:avLst/>
@@ -14752,7 +15984,7 @@
                 <a:ea typeface="Aptos" pitchFamily="34" charset="-122"/>
                 <a:cs typeface="Aptos" pitchFamily="34" charset="-120"/>
               </a:rPr>
-              <a:t>Key idea</a:t>
+              <a:t>Core concept</a:t>
             </a:r>
             <a:endParaRPr lang="en-US" sz="1300" dirty="0"/>
           </a:p>
@@ -14760,14 +15992,14 @@
       </p:sp>
       <p:sp>
         <p:nvSpPr>
-          <p:cNvPr id="14" name="Text 12"/>
-          <p:cNvSpPr/>
-          <p:nvPr/>
-        </p:nvSpPr>
-        <p:spPr>
-          <a:xfrm>
-            <a:off x="8074152" y="1920240"/>
-            <a:ext cx="2825496" cy="1188720"/>
+          <p:cNvPr id="12" name="Text 10"/>
+          <p:cNvSpPr/>
+          <p:nvPr/>
+        </p:nvSpPr>
+        <p:spPr>
+          <a:xfrm>
+            <a:off x="7799832" y="1828800"/>
+            <a:ext cx="3145536" cy="685800"/>
           </a:xfrm>
           <a:prstGeom prst="rect">
             <a:avLst/>
@@ -14801,18 +16033,159 @@
       </p:sp>
       <p:sp>
         <p:nvSpPr>
-          <p:cNvPr id="15" name="Shape 13"/>
-          <p:cNvSpPr/>
-          <p:nvPr/>
-        </p:nvSpPr>
-        <p:spPr>
-          <a:xfrm>
-            <a:off x="7909560" y="3520440"/>
-            <a:ext cx="3154680" cy="1737360"/>
+          <p:cNvPr id="13" name="Shape 11"/>
+          <p:cNvSpPr/>
+          <p:nvPr/>
+        </p:nvSpPr>
+        <p:spPr>
+          <a:xfrm>
+            <a:off x="7635240" y="2788920"/>
+            <a:ext cx="3474720" cy="1536192"/>
           </a:xfrm>
           <a:prstGeom prst="roundRect">
             <a:avLst>
-              <a:gd name="adj" fmla="val 6316"/>
+              <a:gd name="adj" fmla="val 7143"/>
+            </a:avLst>
+          </a:prstGeom>
+          <a:solidFill>
+            <a:srgbClr val="FFFFFF">
+              <a:alpha val="88000"/>
+            </a:srgbClr>
+          </a:solidFill>
+          <a:ln w="12700">
+            <a:solidFill>
+              <a:srgbClr val="D6E8F2"/>
+            </a:solidFill>
+            <a:prstDash val="solid"/>
+          </a:ln>
+        </p:spPr>
+      </p:sp>
+      <p:sp>
+        <p:nvSpPr>
+          <p:cNvPr id="14" name="Shape 12"/>
+          <p:cNvSpPr/>
+          <p:nvPr/>
+        </p:nvSpPr>
+        <p:spPr>
+          <a:xfrm>
+            <a:off x="8074152" y="3291840"/>
+            <a:ext cx="2596896" cy="749808"/>
+          </a:xfrm>
+          <a:prstGeom prst="rect">
+            <a:avLst/>
+          </a:prstGeom>
+          <a:solidFill>
+            <a:srgbClr val="EAF6F8"/>
+          </a:solidFill>
+          <a:ln w="12700">
+            <a:solidFill>
+              <a:srgbClr val="8ABBD8"/>
+            </a:solidFill>
+            <a:prstDash val="solid"/>
+          </a:ln>
+        </p:spPr>
+      </p:sp>
+      <p:sp>
+        <p:nvSpPr>
+          <p:cNvPr id="15" name="Shape 13"/>
+          <p:cNvSpPr/>
+          <p:nvPr/>
+        </p:nvSpPr>
+        <p:spPr>
+          <a:xfrm>
+            <a:off x="8202168" y="3721608"/>
+            <a:ext cx="2340864" cy="0"/>
+          </a:xfrm>
+          <a:prstGeom prst="line">
+            <a:avLst/>
+          </a:prstGeom>
+          <a:noFill/>
+          <a:ln w="19050">
+            <a:solidFill>
+              <a:srgbClr val="0068B7"/>
+            </a:solidFill>
+            <a:prstDash val="solid"/>
+          </a:ln>
+        </p:spPr>
+      </p:sp>
+      <p:sp>
+        <p:nvSpPr>
+          <p:cNvPr id="16" name="Shape 14"/>
+          <p:cNvSpPr/>
+          <p:nvPr/>
+        </p:nvSpPr>
+        <p:spPr>
+          <a:xfrm>
+            <a:off x="9198864" y="4206240"/>
+            <a:ext cx="347472" cy="347472"/>
+          </a:xfrm>
+          <a:prstGeom prst="ellipse">
+            <a:avLst/>
+          </a:prstGeom>
+          <a:solidFill>
+            <a:srgbClr val="2F8A28"/>
+          </a:solidFill>
+          <a:ln w="12700">
+            <a:solidFill>
+              <a:srgbClr val="2F8A28"/>
+            </a:solidFill>
+            <a:prstDash val="solid"/>
+          </a:ln>
+        </p:spPr>
+      </p:sp>
+      <p:sp>
+        <p:nvSpPr>
+          <p:cNvPr id="17" name="Text 15"/>
+          <p:cNvSpPr/>
+          <p:nvPr/>
+        </p:nvSpPr>
+        <p:spPr>
+          <a:xfrm>
+            <a:off x="7909560" y="3977640"/>
+            <a:ext cx="2926080" cy="182880"/>
+          </a:xfrm>
+          <a:prstGeom prst="rect">
+            <a:avLst/>
+          </a:prstGeom>
+          <a:noFill/>
+          <a:ln/>
+        </p:spPr>
+        <p:txBody>
+          <a:bodyPr wrap="square" lIns="0" tIns="0" rIns="0" bIns="0" rtlCol="0" anchor="ctr"/>
+          <a:lstStyle/>
+          <a:p>
+            <a:pPr algn="ctr" indent="0" marL="0">
+              <a:buNone/>
+            </a:pPr>
+            <a:r>
+              <a:rPr lang="en-US" sz="1000" dirty="0">
+                <a:solidFill>
+                  <a:srgbClr val="003A63"/>
+                </a:solidFill>
+                <a:latin typeface="Aptos" pitchFamily="34" charset="0"/>
+                <a:ea typeface="Aptos" pitchFamily="34" charset="-122"/>
+                <a:cs typeface="Aptos" pitchFamily="34" charset="-120"/>
+              </a:rPr>
+              <a:t>Concept to action</a:t>
+            </a:r>
+            <a:endParaRPr lang="en-US" sz="1000" dirty="0"/>
+          </a:p>
+        </p:txBody>
+      </p:sp>
+      <p:sp>
+        <p:nvSpPr>
+          <p:cNvPr id="18" name="Shape 16"/>
+          <p:cNvSpPr/>
+          <p:nvPr/>
+        </p:nvSpPr>
+        <p:spPr>
+          <a:xfrm>
+            <a:off x="7635240" y="4498848"/>
+            <a:ext cx="3474720" cy="1143000"/>
+          </a:xfrm>
+          <a:prstGeom prst="roundRect">
+            <a:avLst>
+              <a:gd name="adj" fmla="val 9600"/>
             </a:avLst>
           </a:prstGeom>
           <a:solidFill>
@@ -14828,14 +16201,14 @@
       </p:sp>
       <p:sp>
         <p:nvSpPr>
-          <p:cNvPr id="16" name="Text 14"/>
-          <p:cNvSpPr/>
-          <p:nvPr/>
-        </p:nvSpPr>
-        <p:spPr>
-          <a:xfrm>
-            <a:off x="8074152" y="3666744"/>
-            <a:ext cx="2825496" cy="256032"/>
+          <p:cNvPr id="19" name="Text 17"/>
+          <p:cNvSpPr/>
+          <p:nvPr/>
+        </p:nvSpPr>
+        <p:spPr>
+          <a:xfrm>
+            <a:off x="7799832" y="4645152"/>
+            <a:ext cx="3145536" cy="256032"/>
           </a:xfrm>
           <a:prstGeom prst="rect">
             <a:avLst/>
@@ -14859,7 +16232,7 @@
                 <a:ea typeface="Aptos" pitchFamily="34" charset="-122"/>
                 <a:cs typeface="Aptos" pitchFamily="34" charset="-120"/>
               </a:rPr>
-              <a:t>Use this for</a:t>
+              <a:t>Apply it</a:t>
             </a:r>
             <a:endParaRPr lang="en-US" sz="1300" dirty="0"/>
           </a:p>
@@ -14867,14 +16240,14 @@
       </p:sp>
       <p:sp>
         <p:nvSpPr>
-          <p:cNvPr id="17" name="Text 15"/>
-          <p:cNvSpPr/>
-          <p:nvPr/>
-        </p:nvSpPr>
-        <p:spPr>
-          <a:xfrm>
-            <a:off x="8074152" y="4023360"/>
-            <a:ext cx="2825496" cy="1097280"/>
+          <p:cNvPr id="20" name="Text 18"/>
+          <p:cNvSpPr/>
+          <p:nvPr/>
+        </p:nvSpPr>
+        <p:spPr>
+          <a:xfrm>
+            <a:off x="7799832" y="5001768"/>
+            <a:ext cx="3145536" cy="502920"/>
           </a:xfrm>
           <a:prstGeom prst="rect">
             <a:avLst/>
@@ -14900,7 +16273,7 @@
                 <a:ea typeface="Aptos" pitchFamily="34" charset="-122"/>
                 <a:cs typeface="Aptos" pitchFamily="34" charset="-120"/>
               </a:rPr>
-              <a:t>Connect the concept to public health decisions, safeguards, documentation, or implementation work.</a:t>
+              <a:t>Connect the concept to public health purpose, responsible use, required safeguards, documentation, and the next action a department should take.</a:t>
             </a:r>
             <a:endParaRPr lang="en-US" sz="1550" dirty="0"/>
           </a:p>
@@ -15074,8 +16447,8 @@
         </p:nvSpPr>
         <p:spPr>
           <a:xfrm>
-            <a:off x="9966960" y="6537960"/>
-            <a:ext cx="1645920" cy="201168"/>
+            <a:off x="9646920" y="6537960"/>
+            <a:ext cx="1965960" cy="201168"/>
           </a:xfrm>
           <a:prstGeom prst="rect">
             <a:avLst/>
@@ -15099,7 +16472,7 @@
                 <a:ea typeface="Aptos" pitchFamily="34" charset="-122"/>
                 <a:cs typeface="Aptos" pitchFamily="34" charset="-120"/>
               </a:rPr>
-              <a:t>Â© Paula Soper</a:t>
+              <a:t>Copyright Paula Soper</a:t>
             </a:r>
             <a:endParaRPr lang="en-US" sz="800" dirty="0"/>
           </a:p>
@@ -15146,77 +16519,13 @@
       </p:sp>
       <p:sp>
         <p:nvSpPr>
-          <p:cNvPr id="8" name="Shape 6"/>
+          <p:cNvPr id="8" name="Text 6"/>
           <p:cNvSpPr/>
           <p:nvPr/>
         </p:nvSpPr>
         <p:spPr>
           <a:xfrm>
             <a:off x="640080" y="658368"/>
-            <a:ext cx="420624" cy="420624"/>
-          </a:xfrm>
-          <a:prstGeom prst="ellipse">
-            <a:avLst/>
-          </a:prstGeom>
-          <a:solidFill>
-            <a:srgbClr val="0068B7"/>
-          </a:solidFill>
-          <a:ln w="12700">
-            <a:solidFill>
-              <a:srgbClr val="0068B7"/>
-            </a:solidFill>
-            <a:prstDash val="solid"/>
-          </a:ln>
-        </p:spPr>
-      </p:sp>
-      <p:sp>
-        <p:nvSpPr>
-          <p:cNvPr id="9" name="Text 7"/>
-          <p:cNvSpPr/>
-          <p:nvPr/>
-        </p:nvSpPr>
-        <p:spPr>
-          <a:xfrm>
-            <a:off x="640080" y="731520"/>
-            <a:ext cx="420624" cy="164592"/>
-          </a:xfrm>
-          <a:prstGeom prst="rect">
-            <a:avLst/>
-          </a:prstGeom>
-          <a:noFill/>
-          <a:ln/>
-        </p:spPr>
-        <p:txBody>
-          <a:bodyPr wrap="square" lIns="0" tIns="0" rIns="0" bIns="0" rtlCol="0" anchor="ctr"/>
-          <a:lstStyle/>
-          <a:p>
-            <a:pPr algn="ctr" indent="0" marL="0">
-              <a:buNone/>
-            </a:pPr>
-            <a:r>
-              <a:rPr lang="en-US" sz="1100" b="1" dirty="0">
-                <a:solidFill>
-                  <a:srgbClr val="FFFFFF"/>
-                </a:solidFill>
-                <a:latin typeface="Aptos" pitchFamily="34" charset="0"/>
-                <a:ea typeface="Aptos" pitchFamily="34" charset="-122"/>
-                <a:cs typeface="Aptos" pitchFamily="34" charset="-120"/>
-              </a:rPr>
-              <a:t>5</a:t>
-            </a:r>
-            <a:endParaRPr lang="en-US" sz="1100" dirty="0"/>
-          </a:p>
-        </p:txBody>
-      </p:sp>
-      <p:sp>
-        <p:nvSpPr>
-          <p:cNvPr id="10" name="Text 8"/>
-          <p:cNvSpPr/>
-          <p:nvPr/>
-        </p:nvSpPr>
-        <p:spPr>
-          <a:xfrm>
-            <a:off x="640080" y="621792"/>
             <a:ext cx="10881360" cy="713232"/>
           </a:xfrm>
           <a:prstGeom prst="rect">
@@ -15251,14 +16560,14 @@
       </p:sp>
       <p:sp>
         <p:nvSpPr>
-          <p:cNvPr id="11" name="Text 9"/>
+          <p:cNvPr id="9" name="Text 7"/>
           <p:cNvSpPr/>
           <p:nvPr/>
         </p:nvSpPr>
         <p:spPr>
           <a:xfrm>
             <a:off x="868680" y="1508760"/>
-            <a:ext cx="6537960" cy="4160520"/>
+            <a:ext cx="6309360" cy="4160520"/>
           </a:xfrm>
           <a:prstGeom prst="rect">
             <a:avLst/>
@@ -15317,18 +16626,18 @@
       </p:sp>
       <p:sp>
         <p:nvSpPr>
-          <p:cNvPr id="12" name="Shape 10"/>
-          <p:cNvSpPr/>
-          <p:nvPr/>
-        </p:nvSpPr>
-        <p:spPr>
-          <a:xfrm>
-            <a:off x="7909560" y="1417320"/>
-            <a:ext cx="3154680" cy="1828800"/>
+          <p:cNvPr id="10" name="Shape 8"/>
+          <p:cNvSpPr/>
+          <p:nvPr/>
+        </p:nvSpPr>
+        <p:spPr>
+          <a:xfrm>
+            <a:off x="7635240" y="1325880"/>
+            <a:ext cx="3474720" cy="1325880"/>
           </a:xfrm>
           <a:prstGeom prst="roundRect">
             <a:avLst>
-              <a:gd name="adj" fmla="val 6000"/>
+              <a:gd name="adj" fmla="val 8276"/>
             </a:avLst>
           </a:prstGeom>
           <a:solidFill>
@@ -15344,14 +16653,14 @@
       </p:sp>
       <p:sp>
         <p:nvSpPr>
-          <p:cNvPr id="13" name="Text 11"/>
-          <p:cNvSpPr/>
-          <p:nvPr/>
-        </p:nvSpPr>
-        <p:spPr>
-          <a:xfrm>
-            <a:off x="8074152" y="1563624"/>
-            <a:ext cx="2825496" cy="256032"/>
+          <p:cNvPr id="11" name="Text 9"/>
+          <p:cNvSpPr/>
+          <p:nvPr/>
+        </p:nvSpPr>
+        <p:spPr>
+          <a:xfrm>
+            <a:off x="7799832" y="1472184"/>
+            <a:ext cx="3145536" cy="256032"/>
           </a:xfrm>
           <a:prstGeom prst="rect">
             <a:avLst/>
@@ -15375,7 +16684,7 @@
                 <a:ea typeface="Aptos" pitchFamily="34" charset="-122"/>
                 <a:cs typeface="Aptos" pitchFamily="34" charset="-120"/>
               </a:rPr>
-              <a:t>Key idea</a:t>
+              <a:t>Core concept</a:t>
             </a:r>
             <a:endParaRPr lang="en-US" sz="1300" dirty="0"/>
           </a:p>
@@ -15383,14 +16692,14 @@
       </p:sp>
       <p:sp>
         <p:nvSpPr>
-          <p:cNvPr id="14" name="Text 12"/>
-          <p:cNvSpPr/>
-          <p:nvPr/>
-        </p:nvSpPr>
-        <p:spPr>
-          <a:xfrm>
-            <a:off x="8074152" y="1920240"/>
-            <a:ext cx="2825496" cy="1188720"/>
+          <p:cNvPr id="12" name="Text 10"/>
+          <p:cNvSpPr/>
+          <p:nvPr/>
+        </p:nvSpPr>
+        <p:spPr>
+          <a:xfrm>
+            <a:off x="7799832" y="1828800"/>
+            <a:ext cx="3145536" cy="685800"/>
           </a:xfrm>
           <a:prstGeom prst="rect">
             <a:avLst/>
@@ -15424,18 +16733,159 @@
       </p:sp>
       <p:sp>
         <p:nvSpPr>
-          <p:cNvPr id="15" name="Shape 13"/>
-          <p:cNvSpPr/>
-          <p:nvPr/>
-        </p:nvSpPr>
-        <p:spPr>
-          <a:xfrm>
-            <a:off x="7909560" y="3520440"/>
-            <a:ext cx="3154680" cy="1737360"/>
+          <p:cNvPr id="13" name="Shape 11"/>
+          <p:cNvSpPr/>
+          <p:nvPr/>
+        </p:nvSpPr>
+        <p:spPr>
+          <a:xfrm>
+            <a:off x="7635240" y="2788920"/>
+            <a:ext cx="3474720" cy="1536192"/>
           </a:xfrm>
           <a:prstGeom prst="roundRect">
             <a:avLst>
-              <a:gd name="adj" fmla="val 6316"/>
+              <a:gd name="adj" fmla="val 7143"/>
+            </a:avLst>
+          </a:prstGeom>
+          <a:solidFill>
+            <a:srgbClr val="FFFFFF">
+              <a:alpha val="88000"/>
+            </a:srgbClr>
+          </a:solidFill>
+          <a:ln w="12700">
+            <a:solidFill>
+              <a:srgbClr val="D6E8F2"/>
+            </a:solidFill>
+            <a:prstDash val="solid"/>
+          </a:ln>
+        </p:spPr>
+      </p:sp>
+      <p:sp>
+        <p:nvSpPr>
+          <p:cNvPr id="14" name="Shape 12"/>
+          <p:cNvSpPr/>
+          <p:nvPr/>
+        </p:nvSpPr>
+        <p:spPr>
+          <a:xfrm>
+            <a:off x="8074152" y="3291840"/>
+            <a:ext cx="2596896" cy="749808"/>
+          </a:xfrm>
+          <a:prstGeom prst="rect">
+            <a:avLst/>
+          </a:prstGeom>
+          <a:solidFill>
+            <a:srgbClr val="EAF6F8"/>
+          </a:solidFill>
+          <a:ln w="12700">
+            <a:solidFill>
+              <a:srgbClr val="8ABBD8"/>
+            </a:solidFill>
+            <a:prstDash val="solid"/>
+          </a:ln>
+        </p:spPr>
+      </p:sp>
+      <p:sp>
+        <p:nvSpPr>
+          <p:cNvPr id="15" name="Shape 13"/>
+          <p:cNvSpPr/>
+          <p:nvPr/>
+        </p:nvSpPr>
+        <p:spPr>
+          <a:xfrm>
+            <a:off x="8202168" y="3721608"/>
+            <a:ext cx="2340864" cy="0"/>
+          </a:xfrm>
+          <a:prstGeom prst="line">
+            <a:avLst/>
+          </a:prstGeom>
+          <a:noFill/>
+          <a:ln w="19050">
+            <a:solidFill>
+              <a:srgbClr val="0068B7"/>
+            </a:solidFill>
+            <a:prstDash val="solid"/>
+          </a:ln>
+        </p:spPr>
+      </p:sp>
+      <p:sp>
+        <p:nvSpPr>
+          <p:cNvPr id="16" name="Shape 14"/>
+          <p:cNvSpPr/>
+          <p:nvPr/>
+        </p:nvSpPr>
+        <p:spPr>
+          <a:xfrm>
+            <a:off x="9198864" y="4206240"/>
+            <a:ext cx="347472" cy="347472"/>
+          </a:xfrm>
+          <a:prstGeom prst="ellipse">
+            <a:avLst/>
+          </a:prstGeom>
+          <a:solidFill>
+            <a:srgbClr val="2F8A28"/>
+          </a:solidFill>
+          <a:ln w="12700">
+            <a:solidFill>
+              <a:srgbClr val="2F8A28"/>
+            </a:solidFill>
+            <a:prstDash val="solid"/>
+          </a:ln>
+        </p:spPr>
+      </p:sp>
+      <p:sp>
+        <p:nvSpPr>
+          <p:cNvPr id="17" name="Text 15"/>
+          <p:cNvSpPr/>
+          <p:nvPr/>
+        </p:nvSpPr>
+        <p:spPr>
+          <a:xfrm>
+            <a:off x="7909560" y="3977640"/>
+            <a:ext cx="2926080" cy="182880"/>
+          </a:xfrm>
+          <a:prstGeom prst="rect">
+            <a:avLst/>
+          </a:prstGeom>
+          <a:noFill/>
+          <a:ln/>
+        </p:spPr>
+        <p:txBody>
+          <a:bodyPr wrap="square" lIns="0" tIns="0" rIns="0" bIns="0" rtlCol="0" anchor="ctr"/>
+          <a:lstStyle/>
+          <a:p>
+            <a:pPr algn="ctr" indent="0" marL="0">
+              <a:buNone/>
+            </a:pPr>
+            <a:r>
+              <a:rPr lang="en-US" sz="1000" dirty="0">
+                <a:solidFill>
+                  <a:srgbClr val="003A63"/>
+                </a:solidFill>
+                <a:latin typeface="Aptos" pitchFamily="34" charset="0"/>
+                <a:ea typeface="Aptos" pitchFamily="34" charset="-122"/>
+                <a:cs typeface="Aptos" pitchFamily="34" charset="-120"/>
+              </a:rPr>
+              <a:t>Concept to action</a:t>
+            </a:r>
+            <a:endParaRPr lang="en-US" sz="1000" dirty="0"/>
+          </a:p>
+        </p:txBody>
+      </p:sp>
+      <p:sp>
+        <p:nvSpPr>
+          <p:cNvPr id="18" name="Shape 16"/>
+          <p:cNvSpPr/>
+          <p:nvPr/>
+        </p:nvSpPr>
+        <p:spPr>
+          <a:xfrm>
+            <a:off x="7635240" y="4498848"/>
+            <a:ext cx="3474720" cy="1143000"/>
+          </a:xfrm>
+          <a:prstGeom prst="roundRect">
+            <a:avLst>
+              <a:gd name="adj" fmla="val 9600"/>
             </a:avLst>
           </a:prstGeom>
           <a:solidFill>
@@ -15451,14 +16901,14 @@
       </p:sp>
       <p:sp>
         <p:nvSpPr>
-          <p:cNvPr id="16" name="Text 14"/>
-          <p:cNvSpPr/>
-          <p:nvPr/>
-        </p:nvSpPr>
-        <p:spPr>
-          <a:xfrm>
-            <a:off x="8074152" y="3666744"/>
-            <a:ext cx="2825496" cy="256032"/>
+          <p:cNvPr id="19" name="Text 17"/>
+          <p:cNvSpPr/>
+          <p:nvPr/>
+        </p:nvSpPr>
+        <p:spPr>
+          <a:xfrm>
+            <a:off x="7799832" y="4645152"/>
+            <a:ext cx="3145536" cy="256032"/>
           </a:xfrm>
           <a:prstGeom prst="rect">
             <a:avLst/>
@@ -15482,7 +16932,7 @@
                 <a:ea typeface="Aptos" pitchFamily="34" charset="-122"/>
                 <a:cs typeface="Aptos" pitchFamily="34" charset="-120"/>
               </a:rPr>
-              <a:t>Use this for</a:t>
+              <a:t>Apply it</a:t>
             </a:r>
             <a:endParaRPr lang="en-US" sz="1300" dirty="0"/>
           </a:p>
@@ -15490,14 +16940,14 @@
       </p:sp>
       <p:sp>
         <p:nvSpPr>
-          <p:cNvPr id="17" name="Text 15"/>
-          <p:cNvSpPr/>
-          <p:nvPr/>
-        </p:nvSpPr>
-        <p:spPr>
-          <a:xfrm>
-            <a:off x="8074152" y="4023360"/>
-            <a:ext cx="2825496" cy="1097280"/>
+          <p:cNvPr id="20" name="Text 18"/>
+          <p:cNvSpPr/>
+          <p:nvPr/>
+        </p:nvSpPr>
+        <p:spPr>
+          <a:xfrm>
+            <a:off x="7799832" y="5001768"/>
+            <a:ext cx="3145536" cy="502920"/>
           </a:xfrm>
           <a:prstGeom prst="rect">
             <a:avLst/>
@@ -15523,7 +16973,7 @@
                 <a:ea typeface="Aptos" pitchFamily="34" charset="-122"/>
                 <a:cs typeface="Aptos" pitchFamily="34" charset="-120"/>
               </a:rPr>
-              <a:t>Connect the concept to public health decisions, safeguards, documentation, or implementation work.</a:t>
+              <a:t>Connect the concept to public health purpose, responsible use, required safeguards, documentation, and the next action a department should take.</a:t>
             </a:r>
             <a:endParaRPr lang="en-US" sz="1550" dirty="0"/>
           </a:p>

--- a/downloads/presentations/modules/epi-310.pptx
+++ b/downloads/presentations/modules/epi-310.pptx
@@ -3436,13 +3436,11 @@
             </a:avLst>
           </a:prstGeom>
           <a:solidFill>
-            <a:srgbClr val="FFFFFF">
-              <a:alpha val="88000"/>
-            </a:srgbClr>
+            <a:srgbClr val="FFFFFF"/>
           </a:solidFill>
           <a:ln w="12700">
             <a:solidFill>
-              <a:srgbClr val="D6E8F2"/>
+              <a:srgbClr val="B9D7E6"/>
             </a:solidFill>
             <a:prstDash val="solid"/>
           </a:ln>
@@ -3450,119 +3448,112 @@
       </p:sp>
       <p:sp>
         <p:nvSpPr>
-          <p:cNvPr id="14" name="Shape 12"/>
-          <p:cNvSpPr/>
-          <p:nvPr/>
-        </p:nvSpPr>
-        <p:spPr>
-          <a:xfrm>
-            <a:off x="8074152" y="3291840"/>
-            <a:ext cx="2596896" cy="749808"/>
-          </a:xfrm>
-          <a:prstGeom prst="rect">
-            <a:avLst/>
-          </a:prstGeom>
-          <a:solidFill>
-            <a:srgbClr val="EAF6F8"/>
-          </a:solidFill>
-          <a:ln w="12700">
-            <a:solidFill>
-              <a:srgbClr val="8ABBD8"/>
-            </a:solidFill>
-            <a:prstDash val="solid"/>
-          </a:ln>
-        </p:spPr>
-      </p:sp>
-      <p:sp>
-        <p:nvSpPr>
-          <p:cNvPr id="15" name="Shape 13"/>
-          <p:cNvSpPr/>
-          <p:nvPr/>
-        </p:nvSpPr>
-        <p:spPr>
-          <a:xfrm>
-            <a:off x="8202168" y="3721608"/>
-            <a:ext cx="2340864" cy="0"/>
-          </a:xfrm>
-          <a:prstGeom prst="line">
-            <a:avLst/>
-          </a:prstGeom>
-          <a:noFill/>
-          <a:ln w="19050">
-            <a:solidFill>
-              <a:srgbClr val="0068B7"/>
-            </a:solidFill>
-            <a:prstDash val="solid"/>
-          </a:ln>
-        </p:spPr>
+          <p:cNvPr id="14" name="Text 12"/>
+          <p:cNvSpPr/>
+          <p:nvPr/>
+        </p:nvSpPr>
+        <p:spPr>
+          <a:xfrm>
+            <a:off x="7799832" y="2935224"/>
+            <a:ext cx="3145536" cy="256032"/>
+          </a:xfrm>
+          <a:prstGeom prst="rect">
+            <a:avLst/>
+          </a:prstGeom>
+          <a:noFill/>
+          <a:ln/>
+        </p:spPr>
+        <p:txBody>
+          <a:bodyPr wrap="square" lIns="0" tIns="0" rIns="0" bIns="0" rtlCol="0" anchor="ctr"/>
+          <a:lstStyle/>
+          <a:p>
+            <a:pPr indent="0" marL="0">
+              <a:buNone/>
+            </a:pPr>
+            <a:r>
+              <a:rPr lang="en-US" sz="1300" b="1" dirty="0">
+                <a:solidFill>
+                  <a:srgbClr val="0068B7"/>
+                </a:solidFill>
+                <a:latin typeface="Aptos" pitchFamily="34" charset="0"/>
+                <a:ea typeface="Aptos" pitchFamily="34" charset="-122"/>
+                <a:cs typeface="Aptos" pitchFamily="34" charset="-120"/>
+              </a:rPr>
+              <a:t>Concept checkpoints</a:t>
+            </a:r>
+            <a:endParaRPr lang="en-US" sz="1300" dirty="0"/>
+          </a:p>
+        </p:txBody>
+      </p:sp>
+      <p:sp>
+        <p:nvSpPr>
+          <p:cNvPr id="15" name="Text 13"/>
+          <p:cNvSpPr/>
+          <p:nvPr/>
+        </p:nvSpPr>
+        <p:spPr>
+          <a:xfrm>
+            <a:off x="7818120" y="3300984"/>
+            <a:ext cx="3090672" cy="877824"/>
+          </a:xfrm>
+          <a:prstGeom prst="rect">
+            <a:avLst/>
+          </a:prstGeom>
+          <a:noFill/>
+          <a:ln/>
+        </p:spPr>
+        <p:txBody>
+          <a:bodyPr wrap="square" lIns="254" tIns="254" rIns="254" bIns="254" rtlCol="0" anchor="t">
+            <a:normAutofit/>
+          </a:bodyPr>
+          <a:lstStyle/>
+          <a:p>
+            <a:r>
+              <a:rPr lang="en-US" sz="1380" dirty="0">
+                <a:solidFill>
+                  <a:srgbClr val="17364A"/>
+                </a:solidFill>
+                <a:latin typeface="Aptos" pitchFamily="34" charset="0"/>
+                <a:ea typeface="Aptos" pitchFamily="34" charset="-122"/>
+                <a:cs typeface="Aptos" pitchFamily="34" charset="-120"/>
+              </a:rPr>
+              <a:t>Staff should identify who is affected, what data are used, what AI output is produced, who.</a:t>
+            </a:r>
+            <a:endParaRPr lang="en-US" sz="1380" dirty="0"/>
+          </a:p>
+          <a:p>
+            <a:r>
+              <a:rPr lang="en-US" sz="1380" dirty="0">
+                <a:solidFill>
+                  <a:srgbClr val="17364A"/>
+                </a:solidFill>
+                <a:latin typeface="Aptos" pitchFamily="34" charset="0"/>
+                <a:ea typeface="Aptos" pitchFamily="34" charset="-122"/>
+                <a:cs typeface="Aptos" pitchFamily="34" charset="-120"/>
+              </a:rPr>
+              <a:t>The second step is to assign responsibilities.</a:t>
+            </a:r>
+            <a:endParaRPr lang="en-US" sz="1380" dirty="0"/>
+          </a:p>
+          <a:p>
+            <a:r>
+              <a:rPr lang="en-US" sz="1380" dirty="0">
+                <a:solidFill>
+                  <a:srgbClr val="17364A"/>
+                </a:solidFill>
+                <a:latin typeface="Aptos" pitchFamily="34" charset="0"/>
+                <a:ea typeface="Aptos" pitchFamily="34" charset="-122"/>
+                <a:cs typeface="Aptos" pitchFamily="34" charset="-120"/>
+              </a:rPr>
+              <a:t>AI-supported workflows often cross program, IT, legal, privacy, communications,.</a:t>
+            </a:r>
+            <a:endParaRPr lang="en-US" sz="1380" dirty="0"/>
+          </a:p>
+        </p:txBody>
       </p:sp>
       <p:sp>
         <p:nvSpPr>
           <p:cNvPr id="16" name="Shape 14"/>
-          <p:cNvSpPr/>
-          <p:nvPr/>
-        </p:nvSpPr>
-        <p:spPr>
-          <a:xfrm>
-            <a:off x="9198864" y="4206240"/>
-            <a:ext cx="347472" cy="347472"/>
-          </a:xfrm>
-          <a:prstGeom prst="ellipse">
-            <a:avLst/>
-          </a:prstGeom>
-          <a:solidFill>
-            <a:srgbClr val="2F8A28"/>
-          </a:solidFill>
-          <a:ln w="12700">
-            <a:solidFill>
-              <a:srgbClr val="2F8A28"/>
-            </a:solidFill>
-            <a:prstDash val="solid"/>
-          </a:ln>
-        </p:spPr>
-      </p:sp>
-      <p:sp>
-        <p:nvSpPr>
-          <p:cNvPr id="17" name="Text 15"/>
-          <p:cNvSpPr/>
-          <p:nvPr/>
-        </p:nvSpPr>
-        <p:spPr>
-          <a:xfrm>
-            <a:off x="7909560" y="3977640"/>
-            <a:ext cx="2926080" cy="182880"/>
-          </a:xfrm>
-          <a:prstGeom prst="rect">
-            <a:avLst/>
-          </a:prstGeom>
-          <a:noFill/>
-          <a:ln/>
-        </p:spPr>
-        <p:txBody>
-          <a:bodyPr wrap="square" lIns="0" tIns="0" rIns="0" bIns="0" rtlCol="0" anchor="ctr"/>
-          <a:lstStyle/>
-          <a:p>
-            <a:pPr algn="ctr" indent="0" marL="0">
-              <a:buNone/>
-            </a:pPr>
-            <a:r>
-              <a:rPr lang="en-US" sz="1000" dirty="0">
-                <a:solidFill>
-                  <a:srgbClr val="003A63"/>
-                </a:solidFill>
-                <a:latin typeface="Aptos" pitchFamily="34" charset="0"/>
-                <a:ea typeface="Aptos" pitchFamily="34" charset="-122"/>
-                <a:cs typeface="Aptos" pitchFamily="34" charset="-120"/>
-              </a:rPr>
-              <a:t>Concept to action</a:t>
-            </a:r>
-            <a:endParaRPr lang="en-US" sz="1000" dirty="0"/>
-          </a:p>
-        </p:txBody>
-      </p:sp>
-      <p:sp>
-        <p:nvSpPr>
-          <p:cNvPr id="18" name="Shape 16"/>
           <p:cNvSpPr/>
           <p:nvPr/>
         </p:nvSpPr>
@@ -3589,7 +3580,7 @@
       </p:sp>
       <p:sp>
         <p:nvSpPr>
-          <p:cNvPr id="19" name="Text 17"/>
+          <p:cNvPr id="17" name="Text 15"/>
           <p:cNvSpPr/>
           <p:nvPr/>
         </p:nvSpPr>
@@ -3628,7 +3619,7 @@
       </p:sp>
       <p:sp>
         <p:nvSpPr>
-          <p:cNvPr id="20" name="Text 18"/>
+          <p:cNvPr id="18" name="Text 16"/>
           <p:cNvSpPr/>
           <p:nvPr/>
         </p:nvSpPr>
@@ -4136,13 +4127,11 @@
             </a:avLst>
           </a:prstGeom>
           <a:solidFill>
-            <a:srgbClr val="FFFFFF">
-              <a:alpha val="88000"/>
-            </a:srgbClr>
+            <a:srgbClr val="FFFFFF"/>
           </a:solidFill>
           <a:ln w="12700">
             <a:solidFill>
-              <a:srgbClr val="D6E8F2"/>
+              <a:srgbClr val="B9D7E6"/>
             </a:solidFill>
             <a:prstDash val="solid"/>
           </a:ln>
@@ -4150,26 +4139,42 @@
       </p:sp>
       <p:sp>
         <p:nvSpPr>
-          <p:cNvPr id="14" name="Shape 12"/>
-          <p:cNvSpPr/>
-          <p:nvPr/>
-        </p:nvSpPr>
-        <p:spPr>
-          <a:xfrm>
-            <a:off x="8046720" y="3108960"/>
-            <a:ext cx="2651760" cy="896112"/>
-          </a:xfrm>
-          <a:prstGeom prst="arc">
-            <a:avLst/>
-          </a:prstGeom>
-          <a:noFill/>
-          <a:ln w="25400">
-            <a:solidFill>
-              <a:srgbClr val="0068B7"/>
-            </a:solidFill>
-            <a:prstDash val="solid"/>
-          </a:ln>
-        </p:spPr>
+          <p:cNvPr id="14" name="Text 12"/>
+          <p:cNvSpPr/>
+          <p:nvPr/>
+        </p:nvSpPr>
+        <p:spPr>
+          <a:xfrm>
+            <a:off x="7799832" y="2935224"/>
+            <a:ext cx="3145536" cy="256032"/>
+          </a:xfrm>
+          <a:prstGeom prst="rect">
+            <a:avLst/>
+          </a:prstGeom>
+          <a:noFill/>
+          <a:ln/>
+        </p:spPr>
+        <p:txBody>
+          <a:bodyPr wrap="square" lIns="0" tIns="0" rIns="0" bIns="0" rtlCol="0" anchor="ctr"/>
+          <a:lstStyle/>
+          <a:p>
+            <a:pPr indent="0" marL="0">
+              <a:buNone/>
+            </a:pPr>
+            <a:r>
+              <a:rPr lang="en-US" sz="1300" b="1" dirty="0">
+                <a:solidFill>
+                  <a:srgbClr val="0068B7"/>
+                </a:solidFill>
+                <a:latin typeface="Aptos" pitchFamily="34" charset="0"/>
+                <a:ea typeface="Aptos" pitchFamily="34" charset="-122"/>
+                <a:cs typeface="Aptos" pitchFamily="34" charset="-120"/>
+              </a:rPr>
+              <a:t>Concept checkpoints</a:t>
+            </a:r>
+            <a:endParaRPr lang="en-US" sz="1300" dirty="0"/>
+          </a:p>
+        </p:txBody>
       </p:sp>
       <p:sp>
         <p:nvSpPr>
@@ -4179,102 +4184,67 @@
         </p:nvSpPr>
         <p:spPr>
           <a:xfrm>
-            <a:off x="7909560" y="3099816"/>
-            <a:ext cx="2926080" cy="256032"/>
-          </a:xfrm>
-          <a:prstGeom prst="rect">
-            <a:avLst/>
-          </a:prstGeom>
-          <a:noFill/>
-          <a:ln/>
-        </p:spPr>
-        <p:txBody>
-          <a:bodyPr wrap="square" lIns="0" tIns="0" rIns="0" bIns="0" rtlCol="0" anchor="ctr"/>
-          <a:lstStyle/>
-          <a:p>
-            <a:pPr algn="ctr" indent="0" marL="0">
-              <a:buNone/>
-            </a:pPr>
-            <a:r>
-              <a:rPr lang="en-US" sz="1500" b="1" dirty="0">
-                <a:solidFill>
-                  <a:srgbClr val="003A63"/>
-                </a:solidFill>
-                <a:latin typeface="Aptos" pitchFamily="34" charset="0"/>
-                <a:ea typeface="Aptos" pitchFamily="34" charset="-122"/>
-                <a:cs typeface="Aptos" pitchFamily="34" charset="-120"/>
-              </a:rPr>
-              <a:t>Risk</a:t>
-            </a:r>
-            <a:endParaRPr lang="en-US" sz="1500" dirty="0"/>
+            <a:off x="7818120" y="3300984"/>
+            <a:ext cx="3090672" cy="877824"/>
+          </a:xfrm>
+          <a:prstGeom prst="rect">
+            <a:avLst/>
+          </a:prstGeom>
+          <a:noFill/>
+          <a:ln/>
+        </p:spPr>
+        <p:txBody>
+          <a:bodyPr wrap="square" lIns="254" tIns="254" rIns="254" bIns="254" rtlCol="0" anchor="t">
+            <a:normAutofit/>
+          </a:bodyPr>
+          <a:lstStyle/>
+          <a:p>
+            <a:r>
+              <a:rPr lang="en-US" sz="1380" dirty="0">
+                <a:solidFill>
+                  <a:srgbClr val="17364A"/>
+                </a:solidFill>
+                <a:latin typeface="Aptos" pitchFamily="34" charset="0"/>
+                <a:ea typeface="Aptos" pitchFamily="34" charset="-122"/>
+                <a:cs typeface="Aptos" pitchFamily="34" charset="-120"/>
+              </a:rPr>
+              <a:t>Another failure mode is unclear ownership.</a:t>
+            </a:r>
+            <a:endParaRPr lang="en-US" sz="1380" dirty="0"/>
+          </a:p>
+          <a:p>
+            <a:r>
+              <a:rPr lang="en-US" sz="1380" dirty="0">
+                <a:solidFill>
+                  <a:srgbClr val="17364A"/>
+                </a:solidFill>
+                <a:latin typeface="Aptos" pitchFamily="34" charset="0"/>
+                <a:ea typeface="Aptos" pitchFamily="34" charset="-122"/>
+                <a:cs typeface="Aptos" pitchFamily="34" charset="-120"/>
+              </a:rPr>
+              <a:t>When everyone is responsible in general, no one may be responsible in practice.</a:t>
+            </a:r>
+            <a:endParaRPr lang="en-US" sz="1380" dirty="0"/>
+          </a:p>
+          <a:p>
+            <a:r>
+              <a:rPr lang="en-US" sz="1380" dirty="0">
+                <a:solidFill>
+                  <a:srgbClr val="17364A"/>
+                </a:solidFill>
+                <a:latin typeface="Aptos" pitchFamily="34" charset="0"/>
+                <a:ea typeface="Aptos" pitchFamily="34" charset="-122"/>
+                <a:cs typeface="Aptos" pitchFamily="34" charset="-120"/>
+              </a:rPr>
+              <a:t>A guardrail is to assign an accountability owner and name escalation pathways.</a:t>
+            </a:r>
+            <a:endParaRPr lang="en-US" sz="1380" dirty="0"/>
           </a:p>
         </p:txBody>
       </p:sp>
       <p:sp>
         <p:nvSpPr>
           <p:cNvPr id="16" name="Shape 14"/>
-          <p:cNvSpPr/>
-          <p:nvPr/>
-        </p:nvSpPr>
-        <p:spPr>
-          <a:xfrm>
-            <a:off x="8366760" y="3639312"/>
-            <a:ext cx="2011680" cy="0"/>
-          </a:xfrm>
-          <a:prstGeom prst="line">
-            <a:avLst/>
-          </a:prstGeom>
-          <a:noFill/>
-          <a:ln w="63500">
-            <a:solidFill>
-              <a:srgbClr val="2F8A28"/>
-            </a:solidFill>
-            <a:prstDash val="solid"/>
-          </a:ln>
-        </p:spPr>
-      </p:sp>
-      <p:sp>
-        <p:nvSpPr>
-          <p:cNvPr id="17" name="Text 15"/>
-          <p:cNvSpPr/>
-          <p:nvPr/>
-        </p:nvSpPr>
-        <p:spPr>
-          <a:xfrm>
-            <a:off x="7909560" y="3849624"/>
-            <a:ext cx="2926080" cy="164592"/>
-          </a:xfrm>
-          <a:prstGeom prst="rect">
-            <a:avLst/>
-          </a:prstGeom>
-          <a:noFill/>
-          <a:ln/>
-        </p:spPr>
-        <p:txBody>
-          <a:bodyPr wrap="square" lIns="0" tIns="0" rIns="0" bIns="0" rtlCol="0" anchor="ctr"/>
-          <a:lstStyle/>
-          <a:p>
-            <a:pPr algn="ctr" indent="0" marL="0">
-              <a:buNone/>
-            </a:pPr>
-            <a:r>
-              <a:rPr lang="en-US" sz="900" dirty="0">
-                <a:solidFill>
-                  <a:srgbClr val="003A63"/>
-                </a:solidFill>
-                <a:latin typeface="Aptos" pitchFamily="34" charset="0"/>
-                <a:ea typeface="Aptos" pitchFamily="34" charset="-122"/>
-                <a:cs typeface="Aptos" pitchFamily="34" charset="-120"/>
-              </a:rPr>
-              <a:t>Human review</a:t>
-            </a:r>
-            <a:endParaRPr lang="en-US" sz="900" dirty="0"/>
-          </a:p>
-        </p:txBody>
-      </p:sp>
-      <p:sp>
-        <p:nvSpPr>
-          <p:cNvPr id="18" name="Shape 16"/>
           <p:cNvSpPr/>
           <p:nvPr/>
         </p:nvSpPr>
@@ -4301,7 +4271,7 @@
       </p:sp>
       <p:sp>
         <p:nvSpPr>
-          <p:cNvPr id="19" name="Text 17"/>
+          <p:cNvPr id="17" name="Text 15"/>
           <p:cNvSpPr/>
           <p:nvPr/>
         </p:nvSpPr>
@@ -4340,7 +4310,7 @@
       </p:sp>
       <p:sp>
         <p:nvSpPr>
-          <p:cNvPr id="20" name="Text 18"/>
+          <p:cNvPr id="18" name="Text 16"/>
           <p:cNvSpPr/>
           <p:nvPr/>
         </p:nvSpPr>
@@ -4834,13 +4804,11 @@
             </a:avLst>
           </a:prstGeom>
           <a:solidFill>
-            <a:srgbClr val="FFFFFF">
-              <a:alpha val="88000"/>
-            </a:srgbClr>
+            <a:srgbClr val="FFFFFF"/>
           </a:solidFill>
           <a:ln w="12700">
             <a:solidFill>
-              <a:srgbClr val="D6E8F2"/>
+              <a:srgbClr val="B9D7E6"/>
             </a:solidFill>
             <a:prstDash val="solid"/>
           </a:ln>
@@ -4848,30 +4816,42 @@
       </p:sp>
       <p:sp>
         <p:nvSpPr>
-          <p:cNvPr id="14" name="Shape 12"/>
-          <p:cNvSpPr/>
-          <p:nvPr/>
-        </p:nvSpPr>
-        <p:spPr>
-          <a:xfrm>
-            <a:off x="7927848" y="3319272"/>
-            <a:ext cx="792480" cy="749808"/>
-          </a:xfrm>
-          <a:prstGeom prst="roundRect">
-            <a:avLst>
-              <a:gd name="adj" fmla="val 14634"/>
-            </a:avLst>
-          </a:prstGeom>
-          <a:solidFill>
-            <a:srgbClr val="0068B7"/>
-          </a:solidFill>
-          <a:ln w="12700">
-            <a:solidFill>
-              <a:srgbClr val="0068B7"/>
-            </a:solidFill>
-            <a:prstDash val="solid"/>
-          </a:ln>
-        </p:spPr>
+          <p:cNvPr id="14" name="Text 12"/>
+          <p:cNvSpPr/>
+          <p:nvPr/>
+        </p:nvSpPr>
+        <p:spPr>
+          <a:xfrm>
+            <a:off x="7799832" y="2935224"/>
+            <a:ext cx="3145536" cy="256032"/>
+          </a:xfrm>
+          <a:prstGeom prst="rect">
+            <a:avLst/>
+          </a:prstGeom>
+          <a:noFill/>
+          <a:ln/>
+        </p:spPr>
+        <p:txBody>
+          <a:bodyPr wrap="square" lIns="0" tIns="0" rIns="0" bIns="0" rtlCol="0" anchor="ctr"/>
+          <a:lstStyle/>
+          <a:p>
+            <a:pPr indent="0" marL="0">
+              <a:buNone/>
+            </a:pPr>
+            <a:r>
+              <a:rPr lang="en-US" sz="1300" b="1" dirty="0">
+                <a:solidFill>
+                  <a:srgbClr val="0068B7"/>
+                </a:solidFill>
+                <a:latin typeface="Aptos" pitchFamily="34" charset="0"/>
+                <a:ea typeface="Aptos" pitchFamily="34" charset="-122"/>
+                <a:cs typeface="Aptos" pitchFamily="34" charset="-120"/>
+              </a:rPr>
+              <a:t>Concept checkpoints</a:t>
+            </a:r>
+            <a:endParaRPr lang="en-US" sz="1300" dirty="0"/>
+          </a:p>
+        </p:txBody>
       </p:sp>
       <p:sp>
         <p:nvSpPr>
@@ -4881,240 +4861,53 @@
         </p:nvSpPr>
         <p:spPr>
           <a:xfrm>
-            <a:off x="8001000" y="3511296"/>
-            <a:ext cx="646176" cy="310896"/>
-          </a:xfrm>
-          <a:prstGeom prst="rect">
-            <a:avLst/>
-          </a:prstGeom>
-          <a:noFill/>
-          <a:ln/>
-        </p:spPr>
-        <p:txBody>
-          <a:bodyPr wrap="square" lIns="0" tIns="0" rIns="0" bIns="0" rtlCol="0" anchor="ctr">
+            <a:off x="7818120" y="3300984"/>
+            <a:ext cx="3090672" cy="877824"/>
+          </a:xfrm>
+          <a:prstGeom prst="rect">
+            <a:avLst/>
+          </a:prstGeom>
+          <a:noFill/>
+          <a:ln/>
+        </p:spPr>
+        <p:txBody>
+          <a:bodyPr wrap="square" lIns="254" tIns="254" rIns="254" bIns="254" rtlCol="0" anchor="t">
             <a:normAutofit/>
           </a:bodyPr>
           <a:lstStyle/>
           <a:p>
-            <a:pPr algn="ctr" indent="0" marL="0">
-              <a:buNone/>
-            </a:pPr>
-            <a:r>
-              <a:rPr lang="en-US" sz="1500" b="1" dirty="0">
-                <a:solidFill>
-                  <a:srgbClr val="FFFFFF"/>
-                </a:solidFill>
-                <a:latin typeface="Aptos" pitchFamily="34" charset="0"/>
-                <a:ea typeface="Aptos" pitchFamily="34" charset="-122"/>
-                <a:cs typeface="Aptos" pitchFamily="34" charset="-120"/>
-              </a:rPr>
-              <a:t>Plan</a:t>
-            </a:r>
-            <a:endParaRPr lang="en-US" sz="1500" dirty="0"/>
+            <a:r>
+              <a:rPr lang="en-US" sz="1380" dirty="0">
+                <a:solidFill>
+                  <a:srgbClr val="17364A"/>
+                </a:solidFill>
+                <a:latin typeface="Aptos" pitchFamily="34" charset="0"/>
+                <a:ea typeface="Aptos" pitchFamily="34" charset="-122"/>
+                <a:cs typeface="Aptos" pitchFamily="34" charset="-120"/>
+              </a:rPr>
+              <a:t>This topic applies across generative AI, predictive analytics, NLP, RAG, automation, and.</a:t>
+            </a:r>
+            <a:endParaRPr lang="en-US" sz="1380" dirty="0"/>
+          </a:p>
+          <a:p>
+            <a:r>
+              <a:rPr lang="en-US" sz="1380" dirty="0">
+                <a:solidFill>
+                  <a:srgbClr val="17364A"/>
+                </a:solidFill>
+                <a:latin typeface="Aptos" pitchFamily="34" charset="0"/>
+                <a:ea typeface="Aptos" pitchFamily="34" charset="-122"/>
+                <a:cs typeface="Aptos" pitchFamily="34" charset="-120"/>
+              </a:rPr>
+              <a:t>The more sensitive the data, the more consequential the output, or the more automated the.</a:t>
+            </a:r>
+            <a:endParaRPr lang="en-US" sz="1380" dirty="0"/>
           </a:p>
         </p:txBody>
       </p:sp>
       <p:sp>
         <p:nvSpPr>
           <p:cNvPr id="16" name="Shape 14"/>
-          <p:cNvSpPr/>
-          <p:nvPr/>
-        </p:nvSpPr>
-        <p:spPr>
-          <a:xfrm>
-            <a:off x="8976360" y="3319272"/>
-            <a:ext cx="792480" cy="749808"/>
-          </a:xfrm>
-          <a:prstGeom prst="roundRect">
-            <a:avLst>
-              <a:gd name="adj" fmla="val 14634"/>
-            </a:avLst>
-          </a:prstGeom>
-          <a:solidFill>
-            <a:srgbClr val="2F8A28"/>
-          </a:solidFill>
-          <a:ln w="12700">
-            <a:solidFill>
-              <a:srgbClr val="2F8A28"/>
-            </a:solidFill>
-            <a:prstDash val="solid"/>
-          </a:ln>
-        </p:spPr>
-      </p:sp>
-      <p:sp>
-        <p:nvSpPr>
-          <p:cNvPr id="17" name="Text 15"/>
-          <p:cNvSpPr/>
-          <p:nvPr/>
-        </p:nvSpPr>
-        <p:spPr>
-          <a:xfrm>
-            <a:off x="9049512" y="3511296"/>
-            <a:ext cx="646176" cy="310896"/>
-          </a:xfrm>
-          <a:prstGeom prst="rect">
-            <a:avLst/>
-          </a:prstGeom>
-          <a:noFill/>
-          <a:ln/>
-        </p:spPr>
-        <p:txBody>
-          <a:bodyPr wrap="square" lIns="0" tIns="0" rIns="0" bIns="0" rtlCol="0" anchor="ctr">
-            <a:normAutofit/>
-          </a:bodyPr>
-          <a:lstStyle/>
-          <a:p>
-            <a:pPr algn="ctr" indent="0" marL="0">
-              <a:buNone/>
-            </a:pPr>
-            <a:r>
-              <a:rPr lang="en-US" sz="1500" b="1" dirty="0">
-                <a:solidFill>
-                  <a:srgbClr val="FFFFFF"/>
-                </a:solidFill>
-                <a:latin typeface="Aptos" pitchFamily="34" charset="0"/>
-                <a:ea typeface="Aptos" pitchFamily="34" charset="-122"/>
-                <a:cs typeface="Aptos" pitchFamily="34" charset="-120"/>
-              </a:rPr>
-              <a:t>Do</a:t>
-            </a:r>
-            <a:endParaRPr lang="en-US" sz="1500" dirty="0"/>
-          </a:p>
-        </p:txBody>
-      </p:sp>
-      <p:sp>
-        <p:nvSpPr>
-          <p:cNvPr id="18" name="Shape 16"/>
-          <p:cNvSpPr/>
-          <p:nvPr/>
-        </p:nvSpPr>
-        <p:spPr>
-          <a:xfrm>
-            <a:off x="10024872" y="3319272"/>
-            <a:ext cx="792480" cy="749808"/>
-          </a:xfrm>
-          <a:prstGeom prst="roundRect">
-            <a:avLst>
-              <a:gd name="adj" fmla="val 14634"/>
-            </a:avLst>
-          </a:prstGeom>
-          <a:solidFill>
-            <a:srgbClr val="D69A2D"/>
-          </a:solidFill>
-          <a:ln w="12700">
-            <a:solidFill>
-              <a:srgbClr val="D69A2D"/>
-            </a:solidFill>
-            <a:prstDash val="solid"/>
-          </a:ln>
-        </p:spPr>
-      </p:sp>
-      <p:sp>
-        <p:nvSpPr>
-          <p:cNvPr id="19" name="Text 17"/>
-          <p:cNvSpPr/>
-          <p:nvPr/>
-        </p:nvSpPr>
-        <p:spPr>
-          <a:xfrm>
-            <a:off x="10098024" y="3511296"/>
-            <a:ext cx="646176" cy="310896"/>
-          </a:xfrm>
-          <a:prstGeom prst="rect">
-            <a:avLst/>
-          </a:prstGeom>
-          <a:noFill/>
-          <a:ln/>
-        </p:spPr>
-        <p:txBody>
-          <a:bodyPr wrap="square" lIns="0" tIns="0" rIns="0" bIns="0" rtlCol="0" anchor="ctr">
-            <a:normAutofit/>
-          </a:bodyPr>
-          <a:lstStyle/>
-          <a:p>
-            <a:pPr algn="ctr" indent="0" marL="0">
-              <a:buNone/>
-            </a:pPr>
-            <a:r>
-              <a:rPr lang="en-US" sz="1500" b="1" dirty="0">
-                <a:solidFill>
-                  <a:srgbClr val="FFFFFF"/>
-                </a:solidFill>
-                <a:latin typeface="Aptos" pitchFamily="34" charset="0"/>
-                <a:ea typeface="Aptos" pitchFamily="34" charset="-122"/>
-                <a:cs typeface="Aptos" pitchFamily="34" charset="-120"/>
-              </a:rPr>
-              <a:t>Review</a:t>
-            </a:r>
-            <a:endParaRPr lang="en-US" sz="1500" dirty="0"/>
-          </a:p>
-        </p:txBody>
-      </p:sp>
-      <p:sp>
-        <p:nvSpPr>
-          <p:cNvPr id="20" name="Shape 18"/>
-          <p:cNvSpPr/>
-          <p:nvPr/>
-        </p:nvSpPr>
-        <p:spPr>
-          <a:xfrm>
-            <a:off x="8293608" y="4389120"/>
-            <a:ext cx="2157984" cy="0"/>
-          </a:xfrm>
-          <a:prstGeom prst="line">
-            <a:avLst/>
-          </a:prstGeom>
-          <a:noFill/>
-          <a:ln w="25400">
-            <a:solidFill>
-              <a:srgbClr val="8ABBD8"/>
-            </a:solidFill>
-            <a:prstDash val="solid"/>
-          </a:ln>
-        </p:spPr>
-      </p:sp>
-      <p:sp>
-        <p:nvSpPr>
-          <p:cNvPr id="21" name="Text 19"/>
-          <p:cNvSpPr/>
-          <p:nvPr/>
-        </p:nvSpPr>
-        <p:spPr>
-          <a:xfrm>
-            <a:off x="7909560" y="3977640"/>
-            <a:ext cx="2926080" cy="182880"/>
-          </a:xfrm>
-          <a:prstGeom prst="rect">
-            <a:avLst/>
-          </a:prstGeom>
-          <a:noFill/>
-          <a:ln/>
-        </p:spPr>
-        <p:txBody>
-          <a:bodyPr wrap="square" lIns="0" tIns="0" rIns="0" bIns="0" rtlCol="0" anchor="ctr"/>
-          <a:lstStyle/>
-          <a:p>
-            <a:pPr algn="ctr" indent="0" marL="0">
-              <a:buNone/>
-            </a:pPr>
-            <a:r>
-              <a:rPr lang="en-US" sz="1000" dirty="0">
-                <a:solidFill>
-                  <a:srgbClr val="003A63"/>
-                </a:solidFill>
-                <a:latin typeface="Aptos" pitchFamily="34" charset="0"/>
-                <a:ea typeface="Aptos" pitchFamily="34" charset="-122"/>
-                <a:cs typeface="Aptos" pitchFamily="34" charset="-120"/>
-              </a:rPr>
-              <a:t>Dependencies visible</a:t>
-            </a:r>
-            <a:endParaRPr lang="en-US" sz="1000" dirty="0"/>
-          </a:p>
-        </p:txBody>
-      </p:sp>
-      <p:sp>
-        <p:nvSpPr>
-          <p:cNvPr id="22" name="Shape 20"/>
           <p:cNvSpPr/>
           <p:nvPr/>
         </p:nvSpPr>
@@ -5141,7 +4934,7 @@
       </p:sp>
       <p:sp>
         <p:nvSpPr>
-          <p:cNvPr id="23" name="Text 21"/>
+          <p:cNvPr id="17" name="Text 15"/>
           <p:cNvSpPr/>
           <p:nvPr/>
         </p:nvSpPr>
@@ -5180,7 +4973,7 @@
       </p:sp>
       <p:sp>
         <p:nvSpPr>
-          <p:cNvPr id="24" name="Text 22"/>
+          <p:cNvPr id="18" name="Text 16"/>
           <p:cNvSpPr/>
           <p:nvPr/>
         </p:nvSpPr>
@@ -5688,13 +5481,11 @@
             </a:avLst>
           </a:prstGeom>
           <a:solidFill>
-            <a:srgbClr val="FFFFFF">
-              <a:alpha val="88000"/>
-            </a:srgbClr>
+            <a:srgbClr val="FFFFFF"/>
           </a:solidFill>
           <a:ln w="12700">
             <a:solidFill>
-              <a:srgbClr val="D6E8F2"/>
+              <a:srgbClr val="B9D7E6"/>
             </a:solidFill>
             <a:prstDash val="solid"/>
           </a:ln>
@@ -5702,119 +5493,112 @@
       </p:sp>
       <p:sp>
         <p:nvSpPr>
-          <p:cNvPr id="14" name="Shape 12"/>
-          <p:cNvSpPr/>
-          <p:nvPr/>
-        </p:nvSpPr>
-        <p:spPr>
-          <a:xfrm>
-            <a:off x="8074152" y="3291840"/>
-            <a:ext cx="2596896" cy="749808"/>
-          </a:xfrm>
-          <a:prstGeom prst="rect">
-            <a:avLst/>
-          </a:prstGeom>
-          <a:solidFill>
-            <a:srgbClr val="EAF6F8"/>
-          </a:solidFill>
-          <a:ln w="12700">
-            <a:solidFill>
-              <a:srgbClr val="8ABBD8"/>
-            </a:solidFill>
-            <a:prstDash val="solid"/>
-          </a:ln>
-        </p:spPr>
-      </p:sp>
-      <p:sp>
-        <p:nvSpPr>
-          <p:cNvPr id="15" name="Shape 13"/>
-          <p:cNvSpPr/>
-          <p:nvPr/>
-        </p:nvSpPr>
-        <p:spPr>
-          <a:xfrm>
-            <a:off x="8202168" y="3721608"/>
-            <a:ext cx="2340864" cy="0"/>
-          </a:xfrm>
-          <a:prstGeom prst="line">
-            <a:avLst/>
-          </a:prstGeom>
-          <a:noFill/>
-          <a:ln w="19050">
-            <a:solidFill>
-              <a:srgbClr val="0068B7"/>
-            </a:solidFill>
-            <a:prstDash val="solid"/>
-          </a:ln>
-        </p:spPr>
+          <p:cNvPr id="14" name="Text 12"/>
+          <p:cNvSpPr/>
+          <p:nvPr/>
+        </p:nvSpPr>
+        <p:spPr>
+          <a:xfrm>
+            <a:off x="7799832" y="2935224"/>
+            <a:ext cx="3145536" cy="256032"/>
+          </a:xfrm>
+          <a:prstGeom prst="rect">
+            <a:avLst/>
+          </a:prstGeom>
+          <a:noFill/>
+          <a:ln/>
+        </p:spPr>
+        <p:txBody>
+          <a:bodyPr wrap="square" lIns="0" tIns="0" rIns="0" bIns="0" rtlCol="0" anchor="ctr"/>
+          <a:lstStyle/>
+          <a:p>
+            <a:pPr indent="0" marL="0">
+              <a:buNone/>
+            </a:pPr>
+            <a:r>
+              <a:rPr lang="en-US" sz="1300" b="1" dirty="0">
+                <a:solidFill>
+                  <a:srgbClr val="0068B7"/>
+                </a:solidFill>
+                <a:latin typeface="Aptos" pitchFamily="34" charset="0"/>
+                <a:ea typeface="Aptos" pitchFamily="34" charset="-122"/>
+                <a:cs typeface="Aptos" pitchFamily="34" charset="-120"/>
+              </a:rPr>
+              <a:t>Concept checkpoints</a:t>
+            </a:r>
+            <a:endParaRPr lang="en-US" sz="1300" dirty="0"/>
+          </a:p>
+        </p:txBody>
+      </p:sp>
+      <p:sp>
+        <p:nvSpPr>
+          <p:cNvPr id="15" name="Text 13"/>
+          <p:cNvSpPr/>
+          <p:nvPr/>
+        </p:nvSpPr>
+        <p:spPr>
+          <a:xfrm>
+            <a:off x="7818120" y="3300984"/>
+            <a:ext cx="3090672" cy="877824"/>
+          </a:xfrm>
+          <a:prstGeom prst="rect">
+            <a:avLst/>
+          </a:prstGeom>
+          <a:noFill/>
+          <a:ln/>
+        </p:spPr>
+        <p:txBody>
+          <a:bodyPr wrap="square" lIns="254" tIns="254" rIns="254" bIns="254" rtlCol="0" anchor="t">
+            <a:normAutofit/>
+          </a:bodyPr>
+          <a:lstStyle/>
+          <a:p>
+            <a:r>
+              <a:rPr lang="en-US" sz="1380" dirty="0">
+                <a:solidFill>
+                  <a:srgbClr val="17364A"/>
+                </a:solidFill>
+                <a:latin typeface="Aptos" pitchFamily="34" charset="0"/>
+                <a:ea typeface="Aptos" pitchFamily="34" charset="-122"/>
+                <a:cs typeface="Aptos" pitchFamily="34" charset="-120"/>
+              </a:rPr>
+              <a:t>What public health decision or workflow does this topic affect?</a:t>
+            </a:r>
+            <a:endParaRPr lang="en-US" sz="1380" dirty="0"/>
+          </a:p>
+          <a:p>
+            <a:r>
+              <a:rPr lang="en-US" sz="1380" dirty="0">
+                <a:solidFill>
+                  <a:srgbClr val="17364A"/>
+                </a:solidFill>
+                <a:latin typeface="Aptos" pitchFamily="34" charset="0"/>
+                <a:ea typeface="Aptos" pitchFamily="34" charset="-122"/>
+                <a:cs typeface="Aptos" pitchFamily="34" charset="-120"/>
+              </a:rPr>
+              <a:t>Who has authority to approve or pause the work?</a:t>
+            </a:r>
+            <a:endParaRPr lang="en-US" sz="1380" dirty="0"/>
+          </a:p>
+          <a:p>
+            <a:r>
+              <a:rPr lang="en-US" sz="1380" dirty="0">
+                <a:solidFill>
+                  <a:srgbClr val="17364A"/>
+                </a:solidFill>
+                <a:latin typeface="Aptos" pitchFamily="34" charset="0"/>
+                <a:ea typeface="Aptos" pitchFamily="34" charset="-122"/>
+                <a:cs typeface="Aptos" pitchFamily="34" charset="-120"/>
+              </a:rPr>
+              <a:t>What evidence would show that the workflow is responsible and effective?</a:t>
+            </a:r>
+            <a:endParaRPr lang="en-US" sz="1380" dirty="0"/>
+          </a:p>
+        </p:txBody>
       </p:sp>
       <p:sp>
         <p:nvSpPr>
           <p:cNvPr id="16" name="Shape 14"/>
-          <p:cNvSpPr/>
-          <p:nvPr/>
-        </p:nvSpPr>
-        <p:spPr>
-          <a:xfrm>
-            <a:off x="9198864" y="4206240"/>
-            <a:ext cx="347472" cy="347472"/>
-          </a:xfrm>
-          <a:prstGeom prst="ellipse">
-            <a:avLst/>
-          </a:prstGeom>
-          <a:solidFill>
-            <a:srgbClr val="2F8A28"/>
-          </a:solidFill>
-          <a:ln w="12700">
-            <a:solidFill>
-              <a:srgbClr val="2F8A28"/>
-            </a:solidFill>
-            <a:prstDash val="solid"/>
-          </a:ln>
-        </p:spPr>
-      </p:sp>
-      <p:sp>
-        <p:nvSpPr>
-          <p:cNvPr id="17" name="Text 15"/>
-          <p:cNvSpPr/>
-          <p:nvPr/>
-        </p:nvSpPr>
-        <p:spPr>
-          <a:xfrm>
-            <a:off x="7909560" y="3977640"/>
-            <a:ext cx="2926080" cy="182880"/>
-          </a:xfrm>
-          <a:prstGeom prst="rect">
-            <a:avLst/>
-          </a:prstGeom>
-          <a:noFill/>
-          <a:ln/>
-        </p:spPr>
-        <p:txBody>
-          <a:bodyPr wrap="square" lIns="0" tIns="0" rIns="0" bIns="0" rtlCol="0" anchor="ctr"/>
-          <a:lstStyle/>
-          <a:p>
-            <a:pPr algn="ctr" indent="0" marL="0">
-              <a:buNone/>
-            </a:pPr>
-            <a:r>
-              <a:rPr lang="en-US" sz="1000" dirty="0">
-                <a:solidFill>
-                  <a:srgbClr val="003A63"/>
-                </a:solidFill>
-                <a:latin typeface="Aptos" pitchFamily="34" charset="0"/>
-                <a:ea typeface="Aptos" pitchFamily="34" charset="-122"/>
-                <a:cs typeface="Aptos" pitchFamily="34" charset="-120"/>
-              </a:rPr>
-              <a:t>Concept to action</a:t>
-            </a:r>
-            <a:endParaRPr lang="en-US" sz="1000" dirty="0"/>
-          </a:p>
-        </p:txBody>
-      </p:sp>
-      <p:sp>
-        <p:nvSpPr>
-          <p:cNvPr id="18" name="Shape 16"/>
           <p:cNvSpPr/>
           <p:nvPr/>
         </p:nvSpPr>
@@ -5841,7 +5625,7 @@
       </p:sp>
       <p:sp>
         <p:nvSpPr>
-          <p:cNvPr id="19" name="Text 17"/>
+          <p:cNvPr id="17" name="Text 15"/>
           <p:cNvSpPr/>
           <p:nvPr/>
         </p:nvSpPr>
@@ -5880,7 +5664,7 @@
       </p:sp>
       <p:sp>
         <p:nvSpPr>
-          <p:cNvPr id="20" name="Text 18"/>
+          <p:cNvPr id="18" name="Text 16"/>
           <p:cNvSpPr/>
           <p:nvPr/>
         </p:nvSpPr>
@@ -6374,13 +6158,11 @@
             </a:avLst>
           </a:prstGeom>
           <a:solidFill>
-            <a:srgbClr val="FFFFFF">
-              <a:alpha val="88000"/>
-            </a:srgbClr>
+            <a:srgbClr val="FFFFFF"/>
           </a:solidFill>
           <a:ln w="12700">
             <a:solidFill>
-              <a:srgbClr val="D6E8F2"/>
+              <a:srgbClr val="B9D7E6"/>
             </a:solidFill>
             <a:prstDash val="solid"/>
           </a:ln>
@@ -6388,119 +6170,98 @@
       </p:sp>
       <p:sp>
         <p:nvSpPr>
-          <p:cNvPr id="14" name="Shape 12"/>
-          <p:cNvSpPr/>
-          <p:nvPr/>
-        </p:nvSpPr>
-        <p:spPr>
-          <a:xfrm>
-            <a:off x="8074152" y="3291840"/>
-            <a:ext cx="2596896" cy="749808"/>
-          </a:xfrm>
-          <a:prstGeom prst="rect">
-            <a:avLst/>
-          </a:prstGeom>
-          <a:solidFill>
-            <a:srgbClr val="EAF6F8"/>
-          </a:solidFill>
-          <a:ln w="12700">
-            <a:solidFill>
-              <a:srgbClr val="8ABBD8"/>
-            </a:solidFill>
-            <a:prstDash val="solid"/>
-          </a:ln>
-        </p:spPr>
-      </p:sp>
-      <p:sp>
-        <p:nvSpPr>
-          <p:cNvPr id="15" name="Shape 13"/>
-          <p:cNvSpPr/>
-          <p:nvPr/>
-        </p:nvSpPr>
-        <p:spPr>
-          <a:xfrm>
-            <a:off x="8202168" y="3721608"/>
-            <a:ext cx="2340864" cy="0"/>
-          </a:xfrm>
-          <a:prstGeom prst="line">
-            <a:avLst/>
-          </a:prstGeom>
-          <a:noFill/>
-          <a:ln w="19050">
-            <a:solidFill>
-              <a:srgbClr val="0068B7"/>
-            </a:solidFill>
-            <a:prstDash val="solid"/>
-          </a:ln>
-        </p:spPr>
+          <p:cNvPr id="14" name="Text 12"/>
+          <p:cNvSpPr/>
+          <p:nvPr/>
+        </p:nvSpPr>
+        <p:spPr>
+          <a:xfrm>
+            <a:off x="7799832" y="2935224"/>
+            <a:ext cx="3145536" cy="256032"/>
+          </a:xfrm>
+          <a:prstGeom prst="rect">
+            <a:avLst/>
+          </a:prstGeom>
+          <a:noFill/>
+          <a:ln/>
+        </p:spPr>
+        <p:txBody>
+          <a:bodyPr wrap="square" lIns="0" tIns="0" rIns="0" bIns="0" rtlCol="0" anchor="ctr"/>
+          <a:lstStyle/>
+          <a:p>
+            <a:pPr indent="0" marL="0">
+              <a:buNone/>
+            </a:pPr>
+            <a:r>
+              <a:rPr lang="en-US" sz="1300" b="1" dirty="0">
+                <a:solidFill>
+                  <a:srgbClr val="0068B7"/>
+                </a:solidFill>
+                <a:latin typeface="Aptos" pitchFamily="34" charset="0"/>
+                <a:ea typeface="Aptos" pitchFamily="34" charset="-122"/>
+                <a:cs typeface="Aptos" pitchFamily="34" charset="-120"/>
+              </a:rPr>
+              <a:t>Concept checkpoints</a:t>
+            </a:r>
+            <a:endParaRPr lang="en-US" sz="1300" dirty="0"/>
+          </a:p>
+        </p:txBody>
+      </p:sp>
+      <p:sp>
+        <p:nvSpPr>
+          <p:cNvPr id="15" name="Text 13"/>
+          <p:cNvSpPr/>
+          <p:nvPr/>
+        </p:nvSpPr>
+        <p:spPr>
+          <a:xfrm>
+            <a:off x="7818120" y="3300984"/>
+            <a:ext cx="3090672" cy="877824"/>
+          </a:xfrm>
+          <a:prstGeom prst="rect">
+            <a:avLst/>
+          </a:prstGeom>
+          <a:noFill/>
+          <a:ln/>
+        </p:spPr>
+        <p:txBody>
+          <a:bodyPr wrap="square" lIns="254" tIns="254" rIns="254" bIns="254" rtlCol="0" anchor="t">
+            <a:normAutofit/>
+          </a:bodyPr>
+          <a:lstStyle/>
+          <a:p>
+            <a:r>
+              <a:rPr lang="en-US" sz="1380" dirty="0">
+                <a:solidFill>
+                  <a:srgbClr val="17364A"/>
+                </a:solidFill>
+                <a:latin typeface="Aptos" pitchFamily="34" charset="0"/>
+                <a:ea typeface="Aptos" pitchFamily="34" charset="-122"/>
+                <a:cs typeface="Aptos" pitchFamily="34" charset="-120"/>
+              </a:rPr>
+              <a:t>What equity, privacy, legal, security, or public trust risks require review?</a:t>
+            </a:r>
+            <a:endParaRPr lang="en-US" sz="1380" dirty="0"/>
+          </a:p>
+          <a:p>
+            <a:r>
+              <a:rPr lang="en-US" sz="1380" dirty="0">
+                <a:solidFill>
+                  <a:srgbClr val="17364A"/>
+                </a:solidFill>
+                <a:latin typeface="Aptos" pitchFamily="34" charset="0"/>
+                <a:ea typeface="Aptos" pitchFamily="34" charset="-122"/>
+                <a:cs typeface="Aptos" pitchFamily="34" charset="-120"/>
+              </a:rPr>
+              <a:t>How will the agency know when the workflow needs to be revised?</a:t>
+            </a:r>
+            <a:endParaRPr lang="en-US" sz="1380" dirty="0"/>
+          </a:p>
+        </p:txBody>
       </p:sp>
       <p:sp>
         <p:nvSpPr>
           <p:cNvPr id="16" name="Shape 14"/>
-          <p:cNvSpPr/>
-          <p:nvPr/>
-        </p:nvSpPr>
-        <p:spPr>
-          <a:xfrm>
-            <a:off x="9198864" y="4206240"/>
-            <a:ext cx="347472" cy="347472"/>
-          </a:xfrm>
-          <a:prstGeom prst="ellipse">
-            <a:avLst/>
-          </a:prstGeom>
-          <a:solidFill>
-            <a:srgbClr val="2F8A28"/>
-          </a:solidFill>
-          <a:ln w="12700">
-            <a:solidFill>
-              <a:srgbClr val="2F8A28"/>
-            </a:solidFill>
-            <a:prstDash val="solid"/>
-          </a:ln>
-        </p:spPr>
-      </p:sp>
-      <p:sp>
-        <p:nvSpPr>
-          <p:cNvPr id="17" name="Text 15"/>
-          <p:cNvSpPr/>
-          <p:nvPr/>
-        </p:nvSpPr>
-        <p:spPr>
-          <a:xfrm>
-            <a:off x="7909560" y="3977640"/>
-            <a:ext cx="2926080" cy="182880"/>
-          </a:xfrm>
-          <a:prstGeom prst="rect">
-            <a:avLst/>
-          </a:prstGeom>
-          <a:noFill/>
-          <a:ln/>
-        </p:spPr>
-        <p:txBody>
-          <a:bodyPr wrap="square" lIns="0" tIns="0" rIns="0" bIns="0" rtlCol="0" anchor="ctr"/>
-          <a:lstStyle/>
-          <a:p>
-            <a:pPr algn="ctr" indent="0" marL="0">
-              <a:buNone/>
-            </a:pPr>
-            <a:r>
-              <a:rPr lang="en-US" sz="1000" dirty="0">
-                <a:solidFill>
-                  <a:srgbClr val="003A63"/>
-                </a:solidFill>
-                <a:latin typeface="Aptos" pitchFamily="34" charset="0"/>
-                <a:ea typeface="Aptos" pitchFamily="34" charset="-122"/>
-                <a:cs typeface="Aptos" pitchFamily="34" charset="-120"/>
-              </a:rPr>
-              <a:t>Concept to action</a:t>
-            </a:r>
-            <a:endParaRPr lang="en-US" sz="1000" dirty="0"/>
-          </a:p>
-        </p:txBody>
-      </p:sp>
-      <p:sp>
-        <p:nvSpPr>
-          <p:cNvPr id="18" name="Shape 16"/>
           <p:cNvSpPr/>
           <p:nvPr/>
         </p:nvSpPr>
@@ -6527,7 +6288,7 @@
       </p:sp>
       <p:sp>
         <p:nvSpPr>
-          <p:cNvPr id="19" name="Text 17"/>
+          <p:cNvPr id="17" name="Text 15"/>
           <p:cNvSpPr/>
           <p:nvPr/>
         </p:nvSpPr>
@@ -6566,7 +6327,7 @@
       </p:sp>
       <p:sp>
         <p:nvSpPr>
-          <p:cNvPr id="20" name="Text 18"/>
+          <p:cNvPr id="18" name="Text 16"/>
           <p:cNvSpPr/>
           <p:nvPr/>
         </p:nvSpPr>
@@ -7060,13 +6821,11 @@
             </a:avLst>
           </a:prstGeom>
           <a:solidFill>
-            <a:srgbClr val="FFFFFF">
-              <a:alpha val="88000"/>
-            </a:srgbClr>
+            <a:srgbClr val="FFFFFF"/>
           </a:solidFill>
           <a:ln w="12700">
             <a:solidFill>
-              <a:srgbClr val="D6E8F2"/>
+              <a:srgbClr val="B9D7E6"/>
             </a:solidFill>
             <a:prstDash val="solid"/>
           </a:ln>
@@ -7074,119 +6833,98 @@
       </p:sp>
       <p:sp>
         <p:nvSpPr>
-          <p:cNvPr id="14" name="Shape 12"/>
-          <p:cNvSpPr/>
-          <p:nvPr/>
-        </p:nvSpPr>
-        <p:spPr>
-          <a:xfrm>
-            <a:off x="8074152" y="3291840"/>
-            <a:ext cx="2596896" cy="749808"/>
-          </a:xfrm>
-          <a:prstGeom prst="rect">
-            <a:avLst/>
-          </a:prstGeom>
-          <a:solidFill>
-            <a:srgbClr val="EAF6F8"/>
-          </a:solidFill>
-          <a:ln w="12700">
-            <a:solidFill>
-              <a:srgbClr val="8ABBD8"/>
-            </a:solidFill>
-            <a:prstDash val="solid"/>
-          </a:ln>
-        </p:spPr>
-      </p:sp>
-      <p:sp>
-        <p:nvSpPr>
-          <p:cNvPr id="15" name="Shape 13"/>
-          <p:cNvSpPr/>
-          <p:nvPr/>
-        </p:nvSpPr>
-        <p:spPr>
-          <a:xfrm>
-            <a:off x="8202168" y="3721608"/>
-            <a:ext cx="2340864" cy="0"/>
-          </a:xfrm>
-          <a:prstGeom prst="line">
-            <a:avLst/>
-          </a:prstGeom>
-          <a:noFill/>
-          <a:ln w="19050">
-            <a:solidFill>
-              <a:srgbClr val="0068B7"/>
-            </a:solidFill>
-            <a:prstDash val="solid"/>
-          </a:ln>
-        </p:spPr>
+          <p:cNvPr id="14" name="Text 12"/>
+          <p:cNvSpPr/>
+          <p:nvPr/>
+        </p:nvSpPr>
+        <p:spPr>
+          <a:xfrm>
+            <a:off x="7799832" y="2935224"/>
+            <a:ext cx="3145536" cy="256032"/>
+          </a:xfrm>
+          <a:prstGeom prst="rect">
+            <a:avLst/>
+          </a:prstGeom>
+          <a:noFill/>
+          <a:ln/>
+        </p:spPr>
+        <p:txBody>
+          <a:bodyPr wrap="square" lIns="0" tIns="0" rIns="0" bIns="0" rtlCol="0" anchor="ctr"/>
+          <a:lstStyle/>
+          <a:p>
+            <a:pPr indent="0" marL="0">
+              <a:buNone/>
+            </a:pPr>
+            <a:r>
+              <a:rPr lang="en-US" sz="1300" b="1" dirty="0">
+                <a:solidFill>
+                  <a:srgbClr val="0068B7"/>
+                </a:solidFill>
+                <a:latin typeface="Aptos" pitchFamily="34" charset="0"/>
+                <a:ea typeface="Aptos" pitchFamily="34" charset="-122"/>
+                <a:cs typeface="Aptos" pitchFamily="34" charset="-120"/>
+              </a:rPr>
+              <a:t>Concept checkpoints</a:t>
+            </a:r>
+            <a:endParaRPr lang="en-US" sz="1300" dirty="0"/>
+          </a:p>
+        </p:txBody>
+      </p:sp>
+      <p:sp>
+        <p:nvSpPr>
+          <p:cNvPr id="15" name="Text 13"/>
+          <p:cNvSpPr/>
+          <p:nvPr/>
+        </p:nvSpPr>
+        <p:spPr>
+          <a:xfrm>
+            <a:off x="7818120" y="3300984"/>
+            <a:ext cx="3090672" cy="877824"/>
+          </a:xfrm>
+          <a:prstGeom prst="rect">
+            <a:avLst/>
+          </a:prstGeom>
+          <a:noFill/>
+          <a:ln/>
+        </p:spPr>
+        <p:txBody>
+          <a:bodyPr wrap="square" lIns="254" tIns="254" rIns="254" bIns="254" rtlCol="0" anchor="t">
+            <a:normAutofit/>
+          </a:bodyPr>
+          <a:lstStyle/>
+          <a:p>
+            <a:r>
+              <a:rPr lang="en-US" sz="1380" dirty="0">
+                <a:solidFill>
+                  <a:srgbClr val="17364A"/>
+                </a:solidFill>
+                <a:latin typeface="Aptos" pitchFamily="34" charset="0"/>
+                <a:ea typeface="Aptos" pitchFamily="34" charset="-122"/>
+                <a:cs typeface="Aptos" pitchFamily="34" charset="-120"/>
+              </a:rPr>
+              <a:t>Create a practical ai for surveillance signal review and epidemiologic judgment artifact.</a:t>
+            </a:r>
+            <a:endParaRPr lang="en-US" sz="1380" dirty="0"/>
+          </a:p>
+          <a:p>
+            <a:r>
+              <a:rPr lang="en-US" sz="1380" dirty="0">
+                <a:solidFill>
+                  <a:srgbClr val="17364A"/>
+                </a:solidFill>
+                <a:latin typeface="Aptos" pitchFamily="34" charset="0"/>
+                <a:ea typeface="Aptos" pitchFamily="34" charset="-122"/>
+                <a:cs typeface="Aptos" pitchFamily="34" charset="-120"/>
+              </a:rPr>
+              <a:t>The artifact should define the use case, affected roles, review criteria, safeguards,.</a:t>
+            </a:r>
+            <a:endParaRPr lang="en-US" sz="1380" dirty="0"/>
+          </a:p>
+        </p:txBody>
       </p:sp>
       <p:sp>
         <p:nvSpPr>
           <p:cNvPr id="16" name="Shape 14"/>
-          <p:cNvSpPr/>
-          <p:nvPr/>
-        </p:nvSpPr>
-        <p:spPr>
-          <a:xfrm>
-            <a:off x="9198864" y="4206240"/>
-            <a:ext cx="347472" cy="347472"/>
-          </a:xfrm>
-          <a:prstGeom prst="ellipse">
-            <a:avLst/>
-          </a:prstGeom>
-          <a:solidFill>
-            <a:srgbClr val="2F8A28"/>
-          </a:solidFill>
-          <a:ln w="12700">
-            <a:solidFill>
-              <a:srgbClr val="2F8A28"/>
-            </a:solidFill>
-            <a:prstDash val="solid"/>
-          </a:ln>
-        </p:spPr>
-      </p:sp>
-      <p:sp>
-        <p:nvSpPr>
-          <p:cNvPr id="17" name="Text 15"/>
-          <p:cNvSpPr/>
-          <p:nvPr/>
-        </p:nvSpPr>
-        <p:spPr>
-          <a:xfrm>
-            <a:off x="7909560" y="3977640"/>
-            <a:ext cx="2926080" cy="182880"/>
-          </a:xfrm>
-          <a:prstGeom prst="rect">
-            <a:avLst/>
-          </a:prstGeom>
-          <a:noFill/>
-          <a:ln/>
-        </p:spPr>
-        <p:txBody>
-          <a:bodyPr wrap="square" lIns="0" tIns="0" rIns="0" bIns="0" rtlCol="0" anchor="ctr"/>
-          <a:lstStyle/>
-          <a:p>
-            <a:pPr algn="ctr" indent="0" marL="0">
-              <a:buNone/>
-            </a:pPr>
-            <a:r>
-              <a:rPr lang="en-US" sz="1000" dirty="0">
-                <a:solidFill>
-                  <a:srgbClr val="003A63"/>
-                </a:solidFill>
-                <a:latin typeface="Aptos" pitchFamily="34" charset="0"/>
-                <a:ea typeface="Aptos" pitchFamily="34" charset="-122"/>
-                <a:cs typeface="Aptos" pitchFamily="34" charset="-120"/>
-              </a:rPr>
-              <a:t>Concept to action</a:t>
-            </a:r>
-            <a:endParaRPr lang="en-US" sz="1000" dirty="0"/>
-          </a:p>
-        </p:txBody>
-      </p:sp>
-      <p:sp>
-        <p:nvSpPr>
-          <p:cNvPr id="18" name="Shape 16"/>
           <p:cNvSpPr/>
           <p:nvPr/>
         </p:nvSpPr>
@@ -7213,7 +6951,7 @@
       </p:sp>
       <p:sp>
         <p:nvSpPr>
-          <p:cNvPr id="19" name="Text 17"/>
+          <p:cNvPr id="17" name="Text 15"/>
           <p:cNvSpPr/>
           <p:nvPr/>
         </p:nvSpPr>
@@ -7252,7 +6990,7 @@
       </p:sp>
       <p:sp>
         <p:nvSpPr>
-          <p:cNvPr id="20" name="Text 18"/>
+          <p:cNvPr id="18" name="Text 16"/>
           <p:cNvSpPr/>
           <p:nvPr/>
         </p:nvSpPr>
@@ -7760,13 +7498,11 @@
             </a:avLst>
           </a:prstGeom>
           <a:solidFill>
-            <a:srgbClr val="FFFFFF">
-              <a:alpha val="88000"/>
-            </a:srgbClr>
+            <a:srgbClr val="FFFFFF"/>
           </a:solidFill>
           <a:ln w="12700">
             <a:solidFill>
-              <a:srgbClr val="D6E8F2"/>
+              <a:srgbClr val="B9D7E6"/>
             </a:solidFill>
             <a:prstDash val="solid"/>
           </a:ln>
@@ -7774,119 +7510,112 @@
       </p:sp>
       <p:sp>
         <p:nvSpPr>
-          <p:cNvPr id="14" name="Shape 12"/>
-          <p:cNvSpPr/>
-          <p:nvPr/>
-        </p:nvSpPr>
-        <p:spPr>
-          <a:xfrm>
-            <a:off x="8074152" y="3291840"/>
-            <a:ext cx="2596896" cy="749808"/>
-          </a:xfrm>
-          <a:prstGeom prst="rect">
-            <a:avLst/>
-          </a:prstGeom>
-          <a:solidFill>
-            <a:srgbClr val="EAF6F8"/>
-          </a:solidFill>
-          <a:ln w="12700">
-            <a:solidFill>
-              <a:srgbClr val="8ABBD8"/>
-            </a:solidFill>
-            <a:prstDash val="solid"/>
-          </a:ln>
-        </p:spPr>
-      </p:sp>
-      <p:sp>
-        <p:nvSpPr>
-          <p:cNvPr id="15" name="Shape 13"/>
-          <p:cNvSpPr/>
-          <p:nvPr/>
-        </p:nvSpPr>
-        <p:spPr>
-          <a:xfrm>
-            <a:off x="8202168" y="3721608"/>
-            <a:ext cx="2340864" cy="0"/>
-          </a:xfrm>
-          <a:prstGeom prst="line">
-            <a:avLst/>
-          </a:prstGeom>
-          <a:noFill/>
-          <a:ln w="19050">
-            <a:solidFill>
-              <a:srgbClr val="0068B7"/>
-            </a:solidFill>
-            <a:prstDash val="solid"/>
-          </a:ln>
-        </p:spPr>
+          <p:cNvPr id="14" name="Text 12"/>
+          <p:cNvSpPr/>
+          <p:nvPr/>
+        </p:nvSpPr>
+        <p:spPr>
+          <a:xfrm>
+            <a:off x="7799832" y="2935224"/>
+            <a:ext cx="3145536" cy="256032"/>
+          </a:xfrm>
+          <a:prstGeom prst="rect">
+            <a:avLst/>
+          </a:prstGeom>
+          <a:noFill/>
+          <a:ln/>
+        </p:spPr>
+        <p:txBody>
+          <a:bodyPr wrap="square" lIns="0" tIns="0" rIns="0" bIns="0" rtlCol="0" anchor="ctr"/>
+          <a:lstStyle/>
+          <a:p>
+            <a:pPr indent="0" marL="0">
+              <a:buNone/>
+            </a:pPr>
+            <a:r>
+              <a:rPr lang="en-US" sz="1300" b="1" dirty="0">
+                <a:solidFill>
+                  <a:srgbClr val="0068B7"/>
+                </a:solidFill>
+                <a:latin typeface="Aptos" pitchFamily="34" charset="0"/>
+                <a:ea typeface="Aptos" pitchFamily="34" charset="-122"/>
+                <a:cs typeface="Aptos" pitchFamily="34" charset="-120"/>
+              </a:rPr>
+              <a:t>Concept checkpoints</a:t>
+            </a:r>
+            <a:endParaRPr lang="en-US" sz="1300" dirty="0"/>
+          </a:p>
+        </p:txBody>
+      </p:sp>
+      <p:sp>
+        <p:nvSpPr>
+          <p:cNvPr id="15" name="Text 13"/>
+          <p:cNvSpPr/>
+          <p:nvPr/>
+        </p:nvSpPr>
+        <p:spPr>
+          <a:xfrm>
+            <a:off x="7818120" y="3300984"/>
+            <a:ext cx="3090672" cy="877824"/>
+          </a:xfrm>
+          <a:prstGeom prst="rect">
+            <a:avLst/>
+          </a:prstGeom>
+          <a:noFill/>
+          <a:ln/>
+        </p:spPr>
+        <p:txBody>
+          <a:bodyPr wrap="square" lIns="254" tIns="254" rIns="254" bIns="254" rtlCol="0" anchor="t">
+            <a:normAutofit/>
+          </a:bodyPr>
+          <a:lstStyle/>
+          <a:p>
+            <a:r>
+              <a:rPr lang="en-US" sz="1380" dirty="0">
+                <a:solidFill>
+                  <a:srgbClr val="17364A"/>
+                </a:solidFill>
+                <a:latin typeface="Aptos" pitchFamily="34" charset="0"/>
+                <a:ea typeface="Aptos" pitchFamily="34" charset="-122"/>
+                <a:cs typeface="Aptos" pitchFamily="34" charset="-120"/>
+              </a:rPr>
+              <a:t>AI for Surveillance Signal Review and Epidemiologic Judgment artifact</a:t>
+            </a:r>
+            <a:endParaRPr lang="en-US" sz="1380" dirty="0"/>
+          </a:p>
+          <a:p>
+            <a:r>
+              <a:rPr lang="en-US" sz="1380" dirty="0">
+                <a:solidFill>
+                  <a:srgbClr val="17364A"/>
+                </a:solidFill>
+                <a:latin typeface="Aptos" pitchFamily="34" charset="0"/>
+                <a:ea typeface="Aptos" pitchFamily="34" charset="-122"/>
+                <a:cs typeface="Aptos" pitchFamily="34" charset="-120"/>
+              </a:rPr>
+              <a:t>Role and responsibility table</a:t>
+            </a:r>
+            <a:endParaRPr lang="en-US" sz="1380" dirty="0"/>
+          </a:p>
+          <a:p>
+            <a:r>
+              <a:rPr lang="en-US" sz="1380" dirty="0">
+                <a:solidFill>
+                  <a:srgbClr val="17364A"/>
+                </a:solidFill>
+                <a:latin typeface="Aptos" pitchFamily="34" charset="0"/>
+                <a:ea typeface="Aptos" pitchFamily="34" charset="-122"/>
+                <a:cs typeface="Aptos" pitchFamily="34" charset="-120"/>
+              </a:rPr>
+              <a:t>Risk and safeguard summary</a:t>
+            </a:r>
+            <a:endParaRPr lang="en-US" sz="1380" dirty="0"/>
+          </a:p>
+        </p:txBody>
       </p:sp>
       <p:sp>
         <p:nvSpPr>
           <p:cNvPr id="16" name="Shape 14"/>
-          <p:cNvSpPr/>
-          <p:nvPr/>
-        </p:nvSpPr>
-        <p:spPr>
-          <a:xfrm>
-            <a:off x="9198864" y="4206240"/>
-            <a:ext cx="347472" cy="347472"/>
-          </a:xfrm>
-          <a:prstGeom prst="ellipse">
-            <a:avLst/>
-          </a:prstGeom>
-          <a:solidFill>
-            <a:srgbClr val="2F8A28"/>
-          </a:solidFill>
-          <a:ln w="12700">
-            <a:solidFill>
-              <a:srgbClr val="2F8A28"/>
-            </a:solidFill>
-            <a:prstDash val="solid"/>
-          </a:ln>
-        </p:spPr>
-      </p:sp>
-      <p:sp>
-        <p:nvSpPr>
-          <p:cNvPr id="17" name="Text 15"/>
-          <p:cNvSpPr/>
-          <p:nvPr/>
-        </p:nvSpPr>
-        <p:spPr>
-          <a:xfrm>
-            <a:off x="7909560" y="3977640"/>
-            <a:ext cx="2926080" cy="182880"/>
-          </a:xfrm>
-          <a:prstGeom prst="rect">
-            <a:avLst/>
-          </a:prstGeom>
-          <a:noFill/>
-          <a:ln/>
-        </p:spPr>
-        <p:txBody>
-          <a:bodyPr wrap="square" lIns="0" tIns="0" rIns="0" bIns="0" rtlCol="0" anchor="ctr"/>
-          <a:lstStyle/>
-          <a:p>
-            <a:pPr algn="ctr" indent="0" marL="0">
-              <a:buNone/>
-            </a:pPr>
-            <a:r>
-              <a:rPr lang="en-US" sz="1000" dirty="0">
-                <a:solidFill>
-                  <a:srgbClr val="003A63"/>
-                </a:solidFill>
-                <a:latin typeface="Aptos" pitchFamily="34" charset="0"/>
-                <a:ea typeface="Aptos" pitchFamily="34" charset="-122"/>
-                <a:cs typeface="Aptos" pitchFamily="34" charset="-120"/>
-              </a:rPr>
-              <a:t>Concept to action</a:t>
-            </a:r>
-            <a:endParaRPr lang="en-US" sz="1000" dirty="0"/>
-          </a:p>
-        </p:txBody>
-      </p:sp>
-      <p:sp>
-        <p:nvSpPr>
-          <p:cNvPr id="18" name="Shape 16"/>
           <p:cNvSpPr/>
           <p:nvPr/>
         </p:nvSpPr>
@@ -7913,7 +7642,7 @@
       </p:sp>
       <p:sp>
         <p:nvSpPr>
-          <p:cNvPr id="19" name="Text 17"/>
+          <p:cNvPr id="17" name="Text 15"/>
           <p:cNvSpPr/>
           <p:nvPr/>
         </p:nvSpPr>
@@ -7952,7 +7681,7 @@
       </p:sp>
       <p:sp>
         <p:nvSpPr>
-          <p:cNvPr id="20" name="Text 18"/>
+          <p:cNvPr id="18" name="Text 16"/>
           <p:cNvSpPr/>
           <p:nvPr/>
         </p:nvSpPr>
@@ -8446,13 +8175,11 @@
             </a:avLst>
           </a:prstGeom>
           <a:solidFill>
-            <a:srgbClr val="FFFFFF">
-              <a:alpha val="88000"/>
-            </a:srgbClr>
+            <a:srgbClr val="FFFFFF"/>
           </a:solidFill>
           <a:ln w="12700">
             <a:solidFill>
-              <a:srgbClr val="D6E8F2"/>
+              <a:srgbClr val="B9D7E6"/>
             </a:solidFill>
             <a:prstDash val="solid"/>
           </a:ln>
@@ -8460,119 +8187,98 @@
       </p:sp>
       <p:sp>
         <p:nvSpPr>
-          <p:cNvPr id="14" name="Shape 12"/>
-          <p:cNvSpPr/>
-          <p:nvPr/>
-        </p:nvSpPr>
-        <p:spPr>
-          <a:xfrm>
-            <a:off x="8074152" y="3291840"/>
-            <a:ext cx="2596896" cy="749808"/>
-          </a:xfrm>
-          <a:prstGeom prst="rect">
-            <a:avLst/>
-          </a:prstGeom>
-          <a:solidFill>
-            <a:srgbClr val="EAF6F8"/>
-          </a:solidFill>
-          <a:ln w="12700">
-            <a:solidFill>
-              <a:srgbClr val="8ABBD8"/>
-            </a:solidFill>
-            <a:prstDash val="solid"/>
-          </a:ln>
-        </p:spPr>
-      </p:sp>
-      <p:sp>
-        <p:nvSpPr>
-          <p:cNvPr id="15" name="Shape 13"/>
-          <p:cNvSpPr/>
-          <p:nvPr/>
-        </p:nvSpPr>
-        <p:spPr>
-          <a:xfrm>
-            <a:off x="8202168" y="3721608"/>
-            <a:ext cx="2340864" cy="0"/>
-          </a:xfrm>
-          <a:prstGeom prst="line">
-            <a:avLst/>
-          </a:prstGeom>
-          <a:noFill/>
-          <a:ln w="19050">
-            <a:solidFill>
-              <a:srgbClr val="0068B7"/>
-            </a:solidFill>
-            <a:prstDash val="solid"/>
-          </a:ln>
-        </p:spPr>
+          <p:cNvPr id="14" name="Text 12"/>
+          <p:cNvSpPr/>
+          <p:nvPr/>
+        </p:nvSpPr>
+        <p:spPr>
+          <a:xfrm>
+            <a:off x="7799832" y="2935224"/>
+            <a:ext cx="3145536" cy="256032"/>
+          </a:xfrm>
+          <a:prstGeom prst="rect">
+            <a:avLst/>
+          </a:prstGeom>
+          <a:noFill/>
+          <a:ln/>
+        </p:spPr>
+        <p:txBody>
+          <a:bodyPr wrap="square" lIns="0" tIns="0" rIns="0" bIns="0" rtlCol="0" anchor="ctr"/>
+          <a:lstStyle/>
+          <a:p>
+            <a:pPr indent="0" marL="0">
+              <a:buNone/>
+            </a:pPr>
+            <a:r>
+              <a:rPr lang="en-US" sz="1300" b="1" dirty="0">
+                <a:solidFill>
+                  <a:srgbClr val="0068B7"/>
+                </a:solidFill>
+                <a:latin typeface="Aptos" pitchFamily="34" charset="0"/>
+                <a:ea typeface="Aptos" pitchFamily="34" charset="-122"/>
+                <a:cs typeface="Aptos" pitchFamily="34" charset="-120"/>
+              </a:rPr>
+              <a:t>Concept checkpoints</a:t>
+            </a:r>
+            <a:endParaRPr lang="en-US" sz="1300" dirty="0"/>
+          </a:p>
+        </p:txBody>
+      </p:sp>
+      <p:sp>
+        <p:nvSpPr>
+          <p:cNvPr id="15" name="Text 13"/>
+          <p:cNvSpPr/>
+          <p:nvPr/>
+        </p:nvSpPr>
+        <p:spPr>
+          <a:xfrm>
+            <a:off x="7818120" y="3300984"/>
+            <a:ext cx="3090672" cy="877824"/>
+          </a:xfrm>
+          <a:prstGeom prst="rect">
+            <a:avLst/>
+          </a:prstGeom>
+          <a:noFill/>
+          <a:ln/>
+        </p:spPr>
+        <p:txBody>
+          <a:bodyPr wrap="square" lIns="254" tIns="254" rIns="254" bIns="254" rtlCol="0" anchor="t">
+            <a:normAutofit/>
+          </a:bodyPr>
+          <a:lstStyle/>
+          <a:p>
+            <a:r>
+              <a:rPr lang="en-US" sz="1380" dirty="0">
+                <a:solidFill>
+                  <a:srgbClr val="17364A"/>
+                </a:solidFill>
+                <a:latin typeface="Aptos" pitchFamily="34" charset="0"/>
+                <a:ea typeface="Aptos" pitchFamily="34" charset="-122"/>
+                <a:cs typeface="Aptos" pitchFamily="34" charset="-120"/>
+              </a:rPr>
+              <a:t>Escalation and monitoring plan</a:t>
+            </a:r>
+            <a:endParaRPr lang="en-US" sz="1380" dirty="0"/>
+          </a:p>
+          <a:p>
+            <a:r>
+              <a:rPr lang="en-US" sz="1380" dirty="0">
+                <a:solidFill>
+                  <a:srgbClr val="17364A"/>
+                </a:solidFill>
+                <a:latin typeface="Aptos" pitchFamily="34" charset="0"/>
+                <a:ea typeface="Aptos" pitchFamily="34" charset="-122"/>
+                <a:cs typeface="Aptos" pitchFamily="34" charset="-120"/>
+              </a:rPr>
+              <a:t>Approval or review note</a:t>
+            </a:r>
+            <a:endParaRPr lang="en-US" sz="1380" dirty="0"/>
+          </a:p>
+        </p:txBody>
       </p:sp>
       <p:sp>
         <p:nvSpPr>
           <p:cNvPr id="16" name="Shape 14"/>
-          <p:cNvSpPr/>
-          <p:nvPr/>
-        </p:nvSpPr>
-        <p:spPr>
-          <a:xfrm>
-            <a:off x="9198864" y="4206240"/>
-            <a:ext cx="347472" cy="347472"/>
-          </a:xfrm>
-          <a:prstGeom prst="ellipse">
-            <a:avLst/>
-          </a:prstGeom>
-          <a:solidFill>
-            <a:srgbClr val="2F8A28"/>
-          </a:solidFill>
-          <a:ln w="12700">
-            <a:solidFill>
-              <a:srgbClr val="2F8A28"/>
-            </a:solidFill>
-            <a:prstDash val="solid"/>
-          </a:ln>
-        </p:spPr>
-      </p:sp>
-      <p:sp>
-        <p:nvSpPr>
-          <p:cNvPr id="17" name="Text 15"/>
-          <p:cNvSpPr/>
-          <p:nvPr/>
-        </p:nvSpPr>
-        <p:spPr>
-          <a:xfrm>
-            <a:off x="7909560" y="3977640"/>
-            <a:ext cx="2926080" cy="182880"/>
-          </a:xfrm>
-          <a:prstGeom prst="rect">
-            <a:avLst/>
-          </a:prstGeom>
-          <a:noFill/>
-          <a:ln/>
-        </p:spPr>
-        <p:txBody>
-          <a:bodyPr wrap="square" lIns="0" tIns="0" rIns="0" bIns="0" rtlCol="0" anchor="ctr"/>
-          <a:lstStyle/>
-          <a:p>
-            <a:pPr algn="ctr" indent="0" marL="0">
-              <a:buNone/>
-            </a:pPr>
-            <a:r>
-              <a:rPr lang="en-US" sz="1000" dirty="0">
-                <a:solidFill>
-                  <a:srgbClr val="003A63"/>
-                </a:solidFill>
-                <a:latin typeface="Aptos" pitchFamily="34" charset="0"/>
-                <a:ea typeface="Aptos" pitchFamily="34" charset="-122"/>
-                <a:cs typeface="Aptos" pitchFamily="34" charset="-120"/>
-              </a:rPr>
-              <a:t>Concept to action</a:t>
-            </a:r>
-            <a:endParaRPr lang="en-US" sz="1000" dirty="0"/>
-          </a:p>
-        </p:txBody>
-      </p:sp>
-      <p:sp>
-        <p:nvSpPr>
-          <p:cNvPr id="18" name="Shape 16"/>
           <p:cNvSpPr/>
           <p:nvPr/>
         </p:nvSpPr>
@@ -8599,7 +8305,7 @@
       </p:sp>
       <p:sp>
         <p:nvSpPr>
-          <p:cNvPr id="19" name="Text 17"/>
+          <p:cNvPr id="17" name="Text 15"/>
           <p:cNvSpPr/>
           <p:nvPr/>
         </p:nvSpPr>
@@ -8638,7 +8344,7 @@
       </p:sp>
       <p:sp>
         <p:nvSpPr>
-          <p:cNvPr id="20" name="Text 18"/>
+          <p:cNvPr id="18" name="Text 16"/>
           <p:cNvSpPr/>
           <p:nvPr/>
         </p:nvSpPr>
@@ -9146,13 +8852,11 @@
             </a:avLst>
           </a:prstGeom>
           <a:solidFill>
-            <a:srgbClr val="FFFFFF">
-              <a:alpha val="88000"/>
-            </a:srgbClr>
+            <a:srgbClr val="FFFFFF"/>
           </a:solidFill>
           <a:ln w="12700">
             <a:solidFill>
-              <a:srgbClr val="D6E8F2"/>
+              <a:srgbClr val="B9D7E6"/>
             </a:solidFill>
             <a:prstDash val="solid"/>
           </a:ln>
@@ -9160,119 +8864,98 @@
       </p:sp>
       <p:sp>
         <p:nvSpPr>
-          <p:cNvPr id="14" name="Shape 12"/>
-          <p:cNvSpPr/>
-          <p:nvPr/>
-        </p:nvSpPr>
-        <p:spPr>
-          <a:xfrm>
-            <a:off x="8074152" y="3291840"/>
-            <a:ext cx="2596896" cy="749808"/>
-          </a:xfrm>
-          <a:prstGeom prst="rect">
-            <a:avLst/>
-          </a:prstGeom>
-          <a:solidFill>
-            <a:srgbClr val="EAF6F8"/>
-          </a:solidFill>
-          <a:ln w="12700">
-            <a:solidFill>
-              <a:srgbClr val="8ABBD8"/>
-            </a:solidFill>
-            <a:prstDash val="solid"/>
-          </a:ln>
-        </p:spPr>
-      </p:sp>
-      <p:sp>
-        <p:nvSpPr>
-          <p:cNvPr id="15" name="Shape 13"/>
-          <p:cNvSpPr/>
-          <p:nvPr/>
-        </p:nvSpPr>
-        <p:spPr>
-          <a:xfrm>
-            <a:off x="8202168" y="3721608"/>
-            <a:ext cx="2340864" cy="0"/>
-          </a:xfrm>
-          <a:prstGeom prst="line">
-            <a:avLst/>
-          </a:prstGeom>
-          <a:noFill/>
-          <a:ln w="19050">
-            <a:solidFill>
-              <a:srgbClr val="0068B7"/>
-            </a:solidFill>
-            <a:prstDash val="solid"/>
-          </a:ln>
-        </p:spPr>
+          <p:cNvPr id="14" name="Text 12"/>
+          <p:cNvSpPr/>
+          <p:nvPr/>
+        </p:nvSpPr>
+        <p:spPr>
+          <a:xfrm>
+            <a:off x="7799832" y="2935224"/>
+            <a:ext cx="3145536" cy="256032"/>
+          </a:xfrm>
+          <a:prstGeom prst="rect">
+            <a:avLst/>
+          </a:prstGeom>
+          <a:noFill/>
+          <a:ln/>
+        </p:spPr>
+        <p:txBody>
+          <a:bodyPr wrap="square" lIns="0" tIns="0" rIns="0" bIns="0" rtlCol="0" anchor="ctr"/>
+          <a:lstStyle/>
+          <a:p>
+            <a:pPr indent="0" marL="0">
+              <a:buNone/>
+            </a:pPr>
+            <a:r>
+              <a:rPr lang="en-US" sz="1300" b="1" dirty="0">
+                <a:solidFill>
+                  <a:srgbClr val="0068B7"/>
+                </a:solidFill>
+                <a:latin typeface="Aptos" pitchFamily="34" charset="0"/>
+                <a:ea typeface="Aptos" pitchFamily="34" charset="-122"/>
+                <a:cs typeface="Aptos" pitchFamily="34" charset="-120"/>
+              </a:rPr>
+              <a:t>Concept checkpoints</a:t>
+            </a:r>
+            <a:endParaRPr lang="en-US" sz="1300" dirty="0"/>
+          </a:p>
+        </p:txBody>
+      </p:sp>
+      <p:sp>
+        <p:nvSpPr>
+          <p:cNvPr id="15" name="Text 13"/>
+          <p:cNvSpPr/>
+          <p:nvPr/>
+        </p:nvSpPr>
+        <p:spPr>
+          <a:xfrm>
+            <a:off x="7818120" y="3300984"/>
+            <a:ext cx="3090672" cy="877824"/>
+          </a:xfrm>
+          <a:prstGeom prst="rect">
+            <a:avLst/>
+          </a:prstGeom>
+          <a:noFill/>
+          <a:ln/>
+        </p:spPr>
+        <p:txBody>
+          <a:bodyPr wrap="square" lIns="254" tIns="254" rIns="254" bIns="254" rtlCol="0" anchor="t">
+            <a:normAutofit/>
+          </a:bodyPr>
+          <a:lstStyle/>
+          <a:p>
+            <a:r>
+              <a:rPr lang="en-US" sz="1380" dirty="0">
+                <a:solidFill>
+                  <a:srgbClr val="17364A"/>
+                </a:solidFill>
+                <a:latin typeface="Aptos" pitchFamily="34" charset="0"/>
+                <a:ea typeface="Aptos" pitchFamily="34" charset="-122"/>
+                <a:cs typeface="Aptos" pitchFamily="34" charset="-120"/>
+              </a:rPr>
+              <a:t>Escalation and monitoring plan</a:t>
+            </a:r>
+            <a:endParaRPr lang="en-US" sz="1380" dirty="0"/>
+          </a:p>
+          <a:p>
+            <a:r>
+              <a:rPr lang="en-US" sz="1380" dirty="0">
+                <a:solidFill>
+                  <a:srgbClr val="17364A"/>
+                </a:solidFill>
+                <a:latin typeface="Aptos" pitchFamily="34" charset="0"/>
+                <a:ea typeface="Aptos" pitchFamily="34" charset="-122"/>
+                <a:cs typeface="Aptos" pitchFamily="34" charset="-120"/>
+              </a:rPr>
+              <a:t>Approval or review note</a:t>
+            </a:r>
+            <a:endParaRPr lang="en-US" sz="1380" dirty="0"/>
+          </a:p>
+        </p:txBody>
       </p:sp>
       <p:sp>
         <p:nvSpPr>
           <p:cNvPr id="16" name="Shape 14"/>
-          <p:cNvSpPr/>
-          <p:nvPr/>
-        </p:nvSpPr>
-        <p:spPr>
-          <a:xfrm>
-            <a:off x="9198864" y="4206240"/>
-            <a:ext cx="347472" cy="347472"/>
-          </a:xfrm>
-          <a:prstGeom prst="ellipse">
-            <a:avLst/>
-          </a:prstGeom>
-          <a:solidFill>
-            <a:srgbClr val="2F8A28"/>
-          </a:solidFill>
-          <a:ln w="12700">
-            <a:solidFill>
-              <a:srgbClr val="2F8A28"/>
-            </a:solidFill>
-            <a:prstDash val="solid"/>
-          </a:ln>
-        </p:spPr>
-      </p:sp>
-      <p:sp>
-        <p:nvSpPr>
-          <p:cNvPr id="17" name="Text 15"/>
-          <p:cNvSpPr/>
-          <p:nvPr/>
-        </p:nvSpPr>
-        <p:spPr>
-          <a:xfrm>
-            <a:off x="7909560" y="3977640"/>
-            <a:ext cx="2926080" cy="182880"/>
-          </a:xfrm>
-          <a:prstGeom prst="rect">
-            <a:avLst/>
-          </a:prstGeom>
-          <a:noFill/>
-          <a:ln/>
-        </p:spPr>
-        <p:txBody>
-          <a:bodyPr wrap="square" lIns="0" tIns="0" rIns="0" bIns="0" rtlCol="0" anchor="ctr"/>
-          <a:lstStyle/>
-          <a:p>
-            <a:pPr algn="ctr" indent="0" marL="0">
-              <a:buNone/>
-            </a:pPr>
-            <a:r>
-              <a:rPr lang="en-US" sz="1000" dirty="0">
-                <a:solidFill>
-                  <a:srgbClr val="003A63"/>
-                </a:solidFill>
-                <a:latin typeface="Aptos" pitchFamily="34" charset="0"/>
-                <a:ea typeface="Aptos" pitchFamily="34" charset="-122"/>
-                <a:cs typeface="Aptos" pitchFamily="34" charset="-120"/>
-              </a:rPr>
-              <a:t>Concept to action</a:t>
-            </a:r>
-            <a:endParaRPr lang="en-US" sz="1000" dirty="0"/>
-          </a:p>
-        </p:txBody>
-      </p:sp>
-      <p:sp>
-        <p:nvSpPr>
-          <p:cNvPr id="18" name="Shape 16"/>
           <p:cNvSpPr/>
           <p:nvPr/>
         </p:nvSpPr>
@@ -9299,7 +8982,7 @@
       </p:sp>
       <p:sp>
         <p:nvSpPr>
-          <p:cNvPr id="19" name="Text 17"/>
+          <p:cNvPr id="17" name="Text 15"/>
           <p:cNvSpPr/>
           <p:nvPr/>
         </p:nvSpPr>
@@ -9338,7 +9021,7 @@
       </p:sp>
       <p:sp>
         <p:nvSpPr>
-          <p:cNvPr id="20" name="Text 18"/>
+          <p:cNvPr id="18" name="Text 16"/>
           <p:cNvSpPr/>
           <p:nvPr/>
         </p:nvSpPr>
@@ -9846,13 +9529,11 @@
             </a:avLst>
           </a:prstGeom>
           <a:solidFill>
-            <a:srgbClr val="FFFFFF">
-              <a:alpha val="88000"/>
-            </a:srgbClr>
+            <a:srgbClr val="FFFFFF"/>
           </a:solidFill>
           <a:ln w="12700">
             <a:solidFill>
-              <a:srgbClr val="D6E8F2"/>
+              <a:srgbClr val="B9D7E6"/>
             </a:solidFill>
             <a:prstDash val="solid"/>
           </a:ln>
@@ -9860,119 +9541,112 @@
       </p:sp>
       <p:sp>
         <p:nvSpPr>
-          <p:cNvPr id="14" name="Shape 12"/>
-          <p:cNvSpPr/>
-          <p:nvPr/>
-        </p:nvSpPr>
-        <p:spPr>
-          <a:xfrm>
-            <a:off x="8074152" y="3291840"/>
-            <a:ext cx="2596896" cy="749808"/>
-          </a:xfrm>
-          <a:prstGeom prst="rect">
-            <a:avLst/>
-          </a:prstGeom>
-          <a:solidFill>
-            <a:srgbClr val="EAF6F8"/>
-          </a:solidFill>
-          <a:ln w="12700">
-            <a:solidFill>
-              <a:srgbClr val="8ABBD8"/>
-            </a:solidFill>
-            <a:prstDash val="solid"/>
-          </a:ln>
-        </p:spPr>
-      </p:sp>
-      <p:sp>
-        <p:nvSpPr>
-          <p:cNvPr id="15" name="Shape 13"/>
-          <p:cNvSpPr/>
-          <p:nvPr/>
-        </p:nvSpPr>
-        <p:spPr>
-          <a:xfrm>
-            <a:off x="8202168" y="3721608"/>
-            <a:ext cx="2340864" cy="0"/>
-          </a:xfrm>
-          <a:prstGeom prst="line">
-            <a:avLst/>
-          </a:prstGeom>
-          <a:noFill/>
-          <a:ln w="19050">
-            <a:solidFill>
-              <a:srgbClr val="0068B7"/>
-            </a:solidFill>
-            <a:prstDash val="solid"/>
-          </a:ln>
-        </p:spPr>
+          <p:cNvPr id="14" name="Text 12"/>
+          <p:cNvSpPr/>
+          <p:nvPr/>
+        </p:nvSpPr>
+        <p:spPr>
+          <a:xfrm>
+            <a:off x="7799832" y="2935224"/>
+            <a:ext cx="3145536" cy="256032"/>
+          </a:xfrm>
+          <a:prstGeom prst="rect">
+            <a:avLst/>
+          </a:prstGeom>
+          <a:noFill/>
+          <a:ln/>
+        </p:spPr>
+        <p:txBody>
+          <a:bodyPr wrap="square" lIns="0" tIns="0" rIns="0" bIns="0" rtlCol="0" anchor="ctr"/>
+          <a:lstStyle/>
+          <a:p>
+            <a:pPr indent="0" marL="0">
+              <a:buNone/>
+            </a:pPr>
+            <a:r>
+              <a:rPr lang="en-US" sz="1300" b="1" dirty="0">
+                <a:solidFill>
+                  <a:srgbClr val="0068B7"/>
+                </a:solidFill>
+                <a:latin typeface="Aptos" pitchFamily="34" charset="0"/>
+                <a:ea typeface="Aptos" pitchFamily="34" charset="-122"/>
+                <a:cs typeface="Aptos" pitchFamily="34" charset="-120"/>
+              </a:rPr>
+              <a:t>Concept checkpoints</a:t>
+            </a:r>
+            <a:endParaRPr lang="en-US" sz="1300" dirty="0"/>
+          </a:p>
+        </p:txBody>
+      </p:sp>
+      <p:sp>
+        <p:nvSpPr>
+          <p:cNvPr id="15" name="Text 13"/>
+          <p:cNvSpPr/>
+          <p:nvPr/>
+        </p:nvSpPr>
+        <p:spPr>
+          <a:xfrm>
+            <a:off x="7818120" y="3300984"/>
+            <a:ext cx="3090672" cy="877824"/>
+          </a:xfrm>
+          <a:prstGeom prst="rect">
+            <a:avLst/>
+          </a:prstGeom>
+          <a:noFill/>
+          <a:ln/>
+        </p:spPr>
+        <p:txBody>
+          <a:bodyPr wrap="square" lIns="254" tIns="254" rIns="254" bIns="254" rtlCol="0" anchor="t">
+            <a:normAutofit/>
+          </a:bodyPr>
+          <a:lstStyle/>
+          <a:p>
+            <a:r>
+              <a:rPr lang="en-US" sz="1380" dirty="0">
+                <a:solidFill>
+                  <a:srgbClr val="17364A"/>
+                </a:solidFill>
+                <a:latin typeface="Aptos" pitchFamily="34" charset="0"/>
+                <a:ea typeface="Aptos" pitchFamily="34" charset="-122"/>
+                <a:cs typeface="Aptos" pitchFamily="34" charset="-120"/>
+              </a:rPr>
+              <a:t>1.</a:t>
+            </a:r>
+            <a:endParaRPr lang="en-US" sz="1380" dirty="0"/>
+          </a:p>
+          <a:p>
+            <a:r>
+              <a:rPr lang="en-US" sz="1380" dirty="0">
+                <a:solidFill>
+                  <a:srgbClr val="17364A"/>
+                </a:solidFill>
+                <a:latin typeface="Aptos" pitchFamily="34" charset="0"/>
+                <a:ea typeface="Aptos" pitchFamily="34" charset="-122"/>
+                <a:cs typeface="Aptos" pitchFamily="34" charset="-120"/>
+              </a:rPr>
+              <a:t>What is the strongest evidence that ai for surveillance signal review and epidemiologic.</a:t>
+            </a:r>
+            <a:endParaRPr lang="en-US" sz="1380" dirty="0"/>
+          </a:p>
+          <a:p>
+            <a:r>
+              <a:rPr lang="en-US" sz="1380" dirty="0">
+                <a:solidFill>
+                  <a:srgbClr val="17364A"/>
+                </a:solidFill>
+                <a:latin typeface="Aptos" pitchFamily="34" charset="0"/>
+                <a:ea typeface="Aptos" pitchFamily="34" charset="-122"/>
+                <a:cs typeface="Aptos" pitchFamily="34" charset="-120"/>
+              </a:rPr>
+              <a:t>2.</a:t>
+            </a:r>
+            <a:endParaRPr lang="en-US" sz="1380" dirty="0"/>
+          </a:p>
+        </p:txBody>
       </p:sp>
       <p:sp>
         <p:nvSpPr>
           <p:cNvPr id="16" name="Shape 14"/>
-          <p:cNvSpPr/>
-          <p:nvPr/>
-        </p:nvSpPr>
-        <p:spPr>
-          <a:xfrm>
-            <a:off x="9198864" y="4206240"/>
-            <a:ext cx="347472" cy="347472"/>
-          </a:xfrm>
-          <a:prstGeom prst="ellipse">
-            <a:avLst/>
-          </a:prstGeom>
-          <a:solidFill>
-            <a:srgbClr val="2F8A28"/>
-          </a:solidFill>
-          <a:ln w="12700">
-            <a:solidFill>
-              <a:srgbClr val="2F8A28"/>
-            </a:solidFill>
-            <a:prstDash val="solid"/>
-          </a:ln>
-        </p:spPr>
-      </p:sp>
-      <p:sp>
-        <p:nvSpPr>
-          <p:cNvPr id="17" name="Text 15"/>
-          <p:cNvSpPr/>
-          <p:nvPr/>
-        </p:nvSpPr>
-        <p:spPr>
-          <a:xfrm>
-            <a:off x="7909560" y="3977640"/>
-            <a:ext cx="2926080" cy="182880"/>
-          </a:xfrm>
-          <a:prstGeom prst="rect">
-            <a:avLst/>
-          </a:prstGeom>
-          <a:noFill/>
-          <a:ln/>
-        </p:spPr>
-        <p:txBody>
-          <a:bodyPr wrap="square" lIns="0" tIns="0" rIns="0" bIns="0" rtlCol="0" anchor="ctr"/>
-          <a:lstStyle/>
-          <a:p>
-            <a:pPr algn="ctr" indent="0" marL="0">
-              <a:buNone/>
-            </a:pPr>
-            <a:r>
-              <a:rPr lang="en-US" sz="1000" dirty="0">
-                <a:solidFill>
-                  <a:srgbClr val="003A63"/>
-                </a:solidFill>
-                <a:latin typeface="Aptos" pitchFamily="34" charset="0"/>
-                <a:ea typeface="Aptos" pitchFamily="34" charset="-122"/>
-                <a:cs typeface="Aptos" pitchFamily="34" charset="-120"/>
-              </a:rPr>
-              <a:t>Concept to action</a:t>
-            </a:r>
-            <a:endParaRPr lang="en-US" sz="1000" dirty="0"/>
-          </a:p>
-        </p:txBody>
-      </p:sp>
-      <p:sp>
-        <p:nvSpPr>
-          <p:cNvPr id="18" name="Shape 16"/>
           <p:cNvSpPr/>
           <p:nvPr/>
         </p:nvSpPr>
@@ -9999,7 +9673,7 @@
       </p:sp>
       <p:sp>
         <p:nvSpPr>
-          <p:cNvPr id="19" name="Text 17"/>
+          <p:cNvPr id="17" name="Text 15"/>
           <p:cNvSpPr/>
           <p:nvPr/>
         </p:nvSpPr>
@@ -10038,7 +9712,7 @@
       </p:sp>
       <p:sp>
         <p:nvSpPr>
-          <p:cNvPr id="20" name="Text 18"/>
+          <p:cNvPr id="18" name="Text 16"/>
           <p:cNvSpPr/>
           <p:nvPr/>
         </p:nvSpPr>
@@ -10571,20 +10245,20 @@
         </p:nvSpPr>
         <p:spPr>
           <a:xfrm>
-            <a:off x="7635240" y="3730752"/>
-            <a:ext cx="1033272" cy="749808"/>
+            <a:off x="7909560" y="3675888"/>
+            <a:ext cx="3154680" cy="1691640"/>
           </a:xfrm>
           <a:prstGeom prst="roundRect">
             <a:avLst>
-              <a:gd name="adj" fmla="val 14634"/>
+              <a:gd name="adj" fmla="val 6486"/>
             </a:avLst>
           </a:prstGeom>
           <a:solidFill>
-            <a:srgbClr val="0068B7"/>
+            <a:srgbClr val="FFFFFF"/>
           </a:solidFill>
           <a:ln w="12700">
             <a:solidFill>
-              <a:srgbClr val="0068B7"/>
+              <a:srgbClr val="B9D7E6"/>
             </a:solidFill>
             <a:prstDash val="solid"/>
           </a:ln>
@@ -10598,172 +10272,100 @@
         </p:nvSpPr>
         <p:spPr>
           <a:xfrm>
-            <a:off x="7708392" y="3922776"/>
-            <a:ext cx="886968" cy="310896"/>
-          </a:xfrm>
-          <a:prstGeom prst="rect">
-            <a:avLst/>
-          </a:prstGeom>
-          <a:noFill/>
-          <a:ln/>
-        </p:spPr>
-        <p:txBody>
-          <a:bodyPr wrap="square" lIns="0" tIns="0" rIns="0" bIns="0" rtlCol="0" anchor="ctr">
+            <a:off x="8074152" y="3822192"/>
+            <a:ext cx="2825496" cy="256032"/>
+          </a:xfrm>
+          <a:prstGeom prst="rect">
+            <a:avLst/>
+          </a:prstGeom>
+          <a:noFill/>
+          <a:ln/>
+        </p:spPr>
+        <p:txBody>
+          <a:bodyPr wrap="square" lIns="0" tIns="0" rIns="0" bIns="0" rtlCol="0" anchor="ctr"/>
+          <a:lstStyle/>
+          <a:p>
+            <a:pPr indent="0" marL="0">
+              <a:buNone/>
+            </a:pPr>
+            <a:r>
+              <a:rPr lang="en-US" sz="1300" b="1" dirty="0">
+                <a:solidFill>
+                  <a:srgbClr val="0068B7"/>
+                </a:solidFill>
+                <a:latin typeface="Aptos" pitchFamily="34" charset="0"/>
+                <a:ea typeface="Aptos" pitchFamily="34" charset="-122"/>
+                <a:cs typeface="Aptos" pitchFamily="34" charset="-120"/>
+              </a:rPr>
+              <a:t>Learning sequence</a:t>
+            </a:r>
+            <a:endParaRPr lang="en-US" sz="1300" dirty="0"/>
+          </a:p>
+        </p:txBody>
+      </p:sp>
+      <p:sp>
+        <p:nvSpPr>
+          <p:cNvPr id="15" name="Text 13"/>
+          <p:cNvSpPr/>
+          <p:nvPr/>
+        </p:nvSpPr>
+        <p:spPr>
+          <a:xfrm>
+            <a:off x="8092440" y="4187952"/>
+            <a:ext cx="2770632" cy="1033272"/>
+          </a:xfrm>
+          <a:prstGeom prst="rect">
+            <a:avLst/>
+          </a:prstGeom>
+          <a:noFill/>
+          <a:ln/>
+        </p:spPr>
+        <p:txBody>
+          <a:bodyPr wrap="square" lIns="254" tIns="254" rIns="254" bIns="254" rtlCol="0" anchor="t">
             <a:normAutofit/>
           </a:bodyPr>
           <a:lstStyle/>
           <a:p>
-            <a:pPr algn="ctr" indent="0" marL="0">
-              <a:buNone/>
-            </a:pPr>
-            <a:r>
-              <a:rPr lang="en-US" sz="1500" b="1" dirty="0">
-                <a:solidFill>
-                  <a:srgbClr val="FFFFFF"/>
-                </a:solidFill>
-                <a:latin typeface="Aptos" pitchFamily="34" charset="0"/>
-                <a:ea typeface="Aptos" pitchFamily="34" charset="-122"/>
-                <a:cs typeface="Aptos" pitchFamily="34" charset="-120"/>
-              </a:rPr>
-              <a:t>Learn</a:t>
-            </a:r>
-            <a:endParaRPr lang="en-US" sz="1500" dirty="0"/>
-          </a:p>
-        </p:txBody>
-      </p:sp>
-      <p:sp>
-        <p:nvSpPr>
-          <p:cNvPr id="15" name="Shape 13"/>
-          <p:cNvSpPr/>
-          <p:nvPr/>
-        </p:nvSpPr>
-        <p:spPr>
-          <a:xfrm>
-            <a:off x="8924544" y="3730752"/>
-            <a:ext cx="1033272" cy="749808"/>
-          </a:xfrm>
-          <a:prstGeom prst="roundRect">
-            <a:avLst>
-              <a:gd name="adj" fmla="val 14634"/>
-            </a:avLst>
-          </a:prstGeom>
-          <a:solidFill>
-            <a:srgbClr val="2F8A28"/>
-          </a:solidFill>
-          <a:ln w="12700">
-            <a:solidFill>
-              <a:srgbClr val="2F8A28"/>
-            </a:solidFill>
-            <a:prstDash val="solid"/>
-          </a:ln>
-        </p:spPr>
-      </p:sp>
-      <p:sp>
-        <p:nvSpPr>
-          <p:cNvPr id="16" name="Text 14"/>
-          <p:cNvSpPr/>
-          <p:nvPr/>
-        </p:nvSpPr>
-        <p:spPr>
-          <a:xfrm>
-            <a:off x="8997696" y="3922776"/>
-            <a:ext cx="886968" cy="310896"/>
-          </a:xfrm>
-          <a:prstGeom prst="rect">
-            <a:avLst/>
-          </a:prstGeom>
-          <a:noFill/>
-          <a:ln/>
-        </p:spPr>
-        <p:txBody>
-          <a:bodyPr wrap="square" lIns="0" tIns="0" rIns="0" bIns="0" rtlCol="0" anchor="ctr">
-            <a:normAutofit/>
-          </a:bodyPr>
-          <a:lstStyle/>
-          <a:p>
-            <a:pPr algn="ctr" indent="0" marL="0">
-              <a:buNone/>
-            </a:pPr>
-            <a:r>
-              <a:rPr lang="en-US" sz="1500" b="1" dirty="0">
-                <a:solidFill>
-                  <a:srgbClr val="FFFFFF"/>
-                </a:solidFill>
-                <a:latin typeface="Aptos" pitchFamily="34" charset="0"/>
-                <a:ea typeface="Aptos" pitchFamily="34" charset="-122"/>
-                <a:cs typeface="Aptos" pitchFamily="34" charset="-120"/>
-              </a:rPr>
-              <a:t>Apply</a:t>
-            </a:r>
-            <a:endParaRPr lang="en-US" sz="1500" dirty="0"/>
-          </a:p>
-        </p:txBody>
-      </p:sp>
-      <p:sp>
-        <p:nvSpPr>
-          <p:cNvPr id="17" name="Shape 15"/>
-          <p:cNvSpPr/>
-          <p:nvPr/>
-        </p:nvSpPr>
-        <p:spPr>
-          <a:xfrm>
-            <a:off x="10213848" y="3730752"/>
-            <a:ext cx="1033272" cy="749808"/>
-          </a:xfrm>
-          <a:prstGeom prst="roundRect">
-            <a:avLst>
-              <a:gd name="adj" fmla="val 14634"/>
-            </a:avLst>
-          </a:prstGeom>
-          <a:solidFill>
-            <a:srgbClr val="6A4CA3"/>
-          </a:solidFill>
-          <a:ln w="12700">
-            <a:solidFill>
-              <a:srgbClr val="6A4CA3"/>
-            </a:solidFill>
-            <a:prstDash val="solid"/>
-          </a:ln>
-        </p:spPr>
-      </p:sp>
-      <p:sp>
-        <p:nvSpPr>
-          <p:cNvPr id="18" name="Text 16"/>
-          <p:cNvSpPr/>
-          <p:nvPr/>
-        </p:nvSpPr>
-        <p:spPr>
-          <a:xfrm>
-            <a:off x="10287000" y="3922776"/>
-            <a:ext cx="886968" cy="310896"/>
-          </a:xfrm>
-          <a:prstGeom prst="rect">
-            <a:avLst/>
-          </a:prstGeom>
-          <a:noFill/>
-          <a:ln/>
-        </p:spPr>
-        <p:txBody>
-          <a:bodyPr wrap="square" lIns="0" tIns="0" rIns="0" bIns="0" rtlCol="0" anchor="ctr">
-            <a:normAutofit/>
-          </a:bodyPr>
-          <a:lstStyle/>
-          <a:p>
-            <a:pPr algn="ctr" indent="0" marL="0">
-              <a:buNone/>
-            </a:pPr>
-            <a:r>
-              <a:rPr lang="en-US" sz="1500" b="1" dirty="0">
-                <a:solidFill>
-                  <a:srgbClr val="FFFFFF"/>
-                </a:solidFill>
-                <a:latin typeface="Aptos" pitchFamily="34" charset="0"/>
-                <a:ea typeface="Aptos" pitchFamily="34" charset="-122"/>
-                <a:cs typeface="Aptos" pitchFamily="34" charset="-120"/>
-              </a:rPr>
-              <a:t>Document</a:t>
-            </a:r>
-            <a:endParaRPr lang="en-US" sz="1500" dirty="0"/>
+            <a:r>
+              <a:rPr lang="en-US" sz="1380" dirty="0">
+                <a:solidFill>
+                  <a:srgbClr val="17364A"/>
+                </a:solidFill>
+                <a:latin typeface="Aptos" pitchFamily="34" charset="0"/>
+                <a:ea typeface="Aptos" pitchFamily="34" charset="-122"/>
+                <a:cs typeface="Aptos" pitchFamily="34" charset="-120"/>
+              </a:rPr>
+              <a:t>Read the module for shared vocabulary and context.</a:t>
+            </a:r>
+            <a:endParaRPr lang="en-US" sz="1380" dirty="0"/>
+          </a:p>
+          <a:p>
+            <a:r>
+              <a:rPr lang="en-US" sz="1380" dirty="0">
+                <a:solidFill>
+                  <a:srgbClr val="17364A"/>
+                </a:solidFill>
+                <a:latin typeface="Aptos" pitchFamily="34" charset="0"/>
+                <a:ea typeface="Aptos" pitchFamily="34" charset="-122"/>
+                <a:cs typeface="Aptos" pitchFamily="34" charset="-120"/>
+              </a:rPr>
+              <a:t>Complete the practical exercise to apply the concept.</a:t>
+            </a:r>
+            <a:endParaRPr lang="en-US" sz="1380" dirty="0"/>
+          </a:p>
+          <a:p>
+            <a:r>
+              <a:rPr lang="en-US" sz="1380" dirty="0">
+                <a:solidFill>
+                  <a:srgbClr val="17364A"/>
+                </a:solidFill>
+                <a:latin typeface="Aptos" pitchFamily="34" charset="0"/>
+                <a:ea typeface="Aptos" pitchFamily="34" charset="-122"/>
+                <a:cs typeface="Aptos" pitchFamily="34" charset="-120"/>
+              </a:rPr>
+              <a:t>Use the notes and references for deeper review.</a:t>
+            </a:r>
+            <a:endParaRPr lang="en-US" sz="1380" dirty="0"/>
           </a:p>
         </p:txBody>
       </p:sp>
@@ -11236,13 +10838,11 @@
             </a:avLst>
           </a:prstGeom>
           <a:solidFill>
-            <a:srgbClr val="FFFFFF">
-              <a:alpha val="88000"/>
-            </a:srgbClr>
+            <a:srgbClr val="FFFFFF"/>
           </a:solidFill>
           <a:ln w="12700">
             <a:solidFill>
-              <a:srgbClr val="D6E8F2"/>
+              <a:srgbClr val="B9D7E6"/>
             </a:solidFill>
             <a:prstDash val="solid"/>
           </a:ln>
@@ -11250,119 +10850,98 @@
       </p:sp>
       <p:sp>
         <p:nvSpPr>
-          <p:cNvPr id="14" name="Shape 12"/>
-          <p:cNvSpPr/>
-          <p:nvPr/>
-        </p:nvSpPr>
-        <p:spPr>
-          <a:xfrm>
-            <a:off x="8074152" y="3291840"/>
-            <a:ext cx="2596896" cy="749808"/>
-          </a:xfrm>
-          <a:prstGeom prst="rect">
-            <a:avLst/>
-          </a:prstGeom>
-          <a:solidFill>
-            <a:srgbClr val="EAF6F8"/>
-          </a:solidFill>
-          <a:ln w="12700">
-            <a:solidFill>
-              <a:srgbClr val="8ABBD8"/>
-            </a:solidFill>
-            <a:prstDash val="solid"/>
-          </a:ln>
-        </p:spPr>
-      </p:sp>
-      <p:sp>
-        <p:nvSpPr>
-          <p:cNvPr id="15" name="Shape 13"/>
-          <p:cNvSpPr/>
-          <p:nvPr/>
-        </p:nvSpPr>
-        <p:spPr>
-          <a:xfrm>
-            <a:off x="8202168" y="3721608"/>
-            <a:ext cx="2340864" cy="0"/>
-          </a:xfrm>
-          <a:prstGeom prst="line">
-            <a:avLst/>
-          </a:prstGeom>
-          <a:noFill/>
-          <a:ln w="19050">
-            <a:solidFill>
-              <a:srgbClr val="0068B7"/>
-            </a:solidFill>
-            <a:prstDash val="solid"/>
-          </a:ln>
-        </p:spPr>
+          <p:cNvPr id="14" name="Text 12"/>
+          <p:cNvSpPr/>
+          <p:nvPr/>
+        </p:nvSpPr>
+        <p:spPr>
+          <a:xfrm>
+            <a:off x="7799832" y="2935224"/>
+            <a:ext cx="3145536" cy="256032"/>
+          </a:xfrm>
+          <a:prstGeom prst="rect">
+            <a:avLst/>
+          </a:prstGeom>
+          <a:noFill/>
+          <a:ln/>
+        </p:spPr>
+        <p:txBody>
+          <a:bodyPr wrap="square" lIns="0" tIns="0" rIns="0" bIns="0" rtlCol="0" anchor="ctr"/>
+          <a:lstStyle/>
+          <a:p>
+            <a:pPr indent="0" marL="0">
+              <a:buNone/>
+            </a:pPr>
+            <a:r>
+              <a:rPr lang="en-US" sz="1300" b="1" dirty="0">
+                <a:solidFill>
+                  <a:srgbClr val="0068B7"/>
+                </a:solidFill>
+                <a:latin typeface="Aptos" pitchFamily="34" charset="0"/>
+                <a:ea typeface="Aptos" pitchFamily="34" charset="-122"/>
+                <a:cs typeface="Aptos" pitchFamily="34" charset="-120"/>
+              </a:rPr>
+              <a:t>Concept checkpoints</a:t>
+            </a:r>
+            <a:endParaRPr lang="en-US" sz="1300" dirty="0"/>
+          </a:p>
+        </p:txBody>
+      </p:sp>
+      <p:sp>
+        <p:nvSpPr>
+          <p:cNvPr id="15" name="Text 13"/>
+          <p:cNvSpPr/>
+          <p:nvPr/>
+        </p:nvSpPr>
+        <p:spPr>
+          <a:xfrm>
+            <a:off x="7818120" y="3300984"/>
+            <a:ext cx="3090672" cy="877824"/>
+          </a:xfrm>
+          <a:prstGeom prst="rect">
+            <a:avLst/>
+          </a:prstGeom>
+          <a:noFill/>
+          <a:ln/>
+        </p:spPr>
+        <p:txBody>
+          <a:bodyPr wrap="square" lIns="254" tIns="254" rIns="254" bIns="254" rtlCol="0" anchor="t">
+            <a:normAutofit/>
+          </a:bodyPr>
+          <a:lstStyle/>
+          <a:p>
+            <a:r>
+              <a:rPr lang="en-US" sz="1380" dirty="0">
+                <a:solidFill>
+                  <a:srgbClr val="17364A"/>
+                </a:solidFill>
+                <a:latin typeface="Aptos" pitchFamily="34" charset="0"/>
+                <a:ea typeface="Aptos" pitchFamily="34" charset="-122"/>
+                <a:cs typeface="Aptos" pitchFamily="34" charset="-120"/>
+              </a:rPr>
+              <a:t>OWASP Top 10 for Large Language Model Applications:.</a:t>
+            </a:r>
+            <a:endParaRPr lang="en-US" sz="1380" dirty="0"/>
+          </a:p>
+          <a:p>
+            <a:r>
+              <a:rPr lang="en-US" sz="1380" dirty="0">
+                <a:solidFill>
+                  <a:srgbClr val="17364A"/>
+                </a:solidFill>
+                <a:latin typeface="Aptos" pitchFamily="34" charset="0"/>
+                <a:ea typeface="Aptos" pitchFamily="34" charset="-122"/>
+                <a:cs typeface="Aptos" pitchFamily="34" charset="-120"/>
+              </a:rPr>
+              <a:t>ONC health IT, interoperability, and information blocking resources:.</a:t>
+            </a:r>
+            <a:endParaRPr lang="en-US" sz="1380" dirty="0"/>
+          </a:p>
+        </p:txBody>
       </p:sp>
       <p:sp>
         <p:nvSpPr>
           <p:cNvPr id="16" name="Shape 14"/>
-          <p:cNvSpPr/>
-          <p:nvPr/>
-        </p:nvSpPr>
-        <p:spPr>
-          <a:xfrm>
-            <a:off x="9198864" y="4206240"/>
-            <a:ext cx="347472" cy="347472"/>
-          </a:xfrm>
-          <a:prstGeom prst="ellipse">
-            <a:avLst/>
-          </a:prstGeom>
-          <a:solidFill>
-            <a:srgbClr val="2F8A28"/>
-          </a:solidFill>
-          <a:ln w="12700">
-            <a:solidFill>
-              <a:srgbClr val="2F8A28"/>
-            </a:solidFill>
-            <a:prstDash val="solid"/>
-          </a:ln>
-        </p:spPr>
-      </p:sp>
-      <p:sp>
-        <p:nvSpPr>
-          <p:cNvPr id="17" name="Text 15"/>
-          <p:cNvSpPr/>
-          <p:nvPr/>
-        </p:nvSpPr>
-        <p:spPr>
-          <a:xfrm>
-            <a:off x="7909560" y="3977640"/>
-            <a:ext cx="2926080" cy="182880"/>
-          </a:xfrm>
-          <a:prstGeom prst="rect">
-            <a:avLst/>
-          </a:prstGeom>
-          <a:noFill/>
-          <a:ln/>
-        </p:spPr>
-        <p:txBody>
-          <a:bodyPr wrap="square" lIns="0" tIns="0" rIns="0" bIns="0" rtlCol="0" anchor="ctr"/>
-          <a:lstStyle/>
-          <a:p>
-            <a:pPr algn="ctr" indent="0" marL="0">
-              <a:buNone/>
-            </a:pPr>
-            <a:r>
-              <a:rPr lang="en-US" sz="1000" dirty="0">
-                <a:solidFill>
-                  <a:srgbClr val="003A63"/>
-                </a:solidFill>
-                <a:latin typeface="Aptos" pitchFamily="34" charset="0"/>
-                <a:ea typeface="Aptos" pitchFamily="34" charset="-122"/>
-                <a:cs typeface="Aptos" pitchFamily="34" charset="-120"/>
-              </a:rPr>
-              <a:t>Concept to action</a:t>
-            </a:r>
-            <a:endParaRPr lang="en-US" sz="1000" dirty="0"/>
-          </a:p>
-        </p:txBody>
-      </p:sp>
-      <p:sp>
-        <p:nvSpPr>
-          <p:cNvPr id="18" name="Shape 16"/>
           <p:cNvSpPr/>
           <p:nvPr/>
         </p:nvSpPr>
@@ -11389,7 +10968,7 @@
       </p:sp>
       <p:sp>
         <p:nvSpPr>
-          <p:cNvPr id="19" name="Text 17"/>
+          <p:cNvPr id="17" name="Text 15"/>
           <p:cNvSpPr/>
           <p:nvPr/>
         </p:nvSpPr>
@@ -11428,7 +11007,7 @@
       </p:sp>
       <p:sp>
         <p:nvSpPr>
-          <p:cNvPr id="20" name="Text 18"/>
+          <p:cNvPr id="18" name="Text 16"/>
           <p:cNvSpPr/>
           <p:nvPr/>
         </p:nvSpPr>
@@ -11908,13 +11487,11 @@
             </a:avLst>
           </a:prstGeom>
           <a:solidFill>
-            <a:srgbClr val="FFFFFF">
-              <a:alpha val="88000"/>
-            </a:srgbClr>
+            <a:srgbClr val="FFFFFF"/>
           </a:solidFill>
           <a:ln w="12700">
             <a:solidFill>
-              <a:srgbClr val="D6E8F2"/>
+              <a:srgbClr val="B9D7E6"/>
             </a:solidFill>
             <a:prstDash val="solid"/>
           </a:ln>
@@ -11922,119 +11499,84 @@
       </p:sp>
       <p:sp>
         <p:nvSpPr>
-          <p:cNvPr id="14" name="Shape 12"/>
-          <p:cNvSpPr/>
-          <p:nvPr/>
-        </p:nvSpPr>
-        <p:spPr>
-          <a:xfrm>
-            <a:off x="8074152" y="3291840"/>
-            <a:ext cx="2596896" cy="749808"/>
-          </a:xfrm>
-          <a:prstGeom prst="rect">
-            <a:avLst/>
-          </a:prstGeom>
-          <a:solidFill>
-            <a:srgbClr val="EAF6F8"/>
-          </a:solidFill>
-          <a:ln w="12700">
-            <a:solidFill>
-              <a:srgbClr val="8ABBD8"/>
-            </a:solidFill>
-            <a:prstDash val="solid"/>
-          </a:ln>
-        </p:spPr>
-      </p:sp>
-      <p:sp>
-        <p:nvSpPr>
-          <p:cNvPr id="15" name="Shape 13"/>
-          <p:cNvSpPr/>
-          <p:nvPr/>
-        </p:nvSpPr>
-        <p:spPr>
-          <a:xfrm>
-            <a:off x="8202168" y="3721608"/>
-            <a:ext cx="2340864" cy="0"/>
-          </a:xfrm>
-          <a:prstGeom prst="line">
-            <a:avLst/>
-          </a:prstGeom>
-          <a:noFill/>
-          <a:ln w="19050">
-            <a:solidFill>
-              <a:srgbClr val="0068B7"/>
-            </a:solidFill>
-            <a:prstDash val="solid"/>
-          </a:ln>
-        </p:spPr>
+          <p:cNvPr id="14" name="Text 12"/>
+          <p:cNvSpPr/>
+          <p:nvPr/>
+        </p:nvSpPr>
+        <p:spPr>
+          <a:xfrm>
+            <a:off x="7799832" y="2935224"/>
+            <a:ext cx="3145536" cy="256032"/>
+          </a:xfrm>
+          <a:prstGeom prst="rect">
+            <a:avLst/>
+          </a:prstGeom>
+          <a:noFill/>
+          <a:ln/>
+        </p:spPr>
+        <p:txBody>
+          <a:bodyPr wrap="square" lIns="0" tIns="0" rIns="0" bIns="0" rtlCol="0" anchor="ctr"/>
+          <a:lstStyle/>
+          <a:p>
+            <a:pPr indent="0" marL="0">
+              <a:buNone/>
+            </a:pPr>
+            <a:r>
+              <a:rPr lang="en-US" sz="1300" b="1" dirty="0">
+                <a:solidFill>
+                  <a:srgbClr val="0068B7"/>
+                </a:solidFill>
+                <a:latin typeface="Aptos" pitchFamily="34" charset="0"/>
+                <a:ea typeface="Aptos" pitchFamily="34" charset="-122"/>
+                <a:cs typeface="Aptos" pitchFamily="34" charset="-120"/>
+              </a:rPr>
+              <a:t>Concept checkpoints</a:t>
+            </a:r>
+            <a:endParaRPr lang="en-US" sz="1300" dirty="0"/>
+          </a:p>
+        </p:txBody>
+      </p:sp>
+      <p:sp>
+        <p:nvSpPr>
+          <p:cNvPr id="15" name="Text 13"/>
+          <p:cNvSpPr/>
+          <p:nvPr/>
+        </p:nvSpPr>
+        <p:spPr>
+          <a:xfrm>
+            <a:off x="7818120" y="3300984"/>
+            <a:ext cx="3090672" cy="877824"/>
+          </a:xfrm>
+          <a:prstGeom prst="rect">
+            <a:avLst/>
+          </a:prstGeom>
+          <a:noFill/>
+          <a:ln/>
+        </p:spPr>
+        <p:txBody>
+          <a:bodyPr wrap="square" lIns="254" tIns="254" rIns="254" bIns="254" rtlCol="0" anchor="t">
+            <a:normAutofit/>
+          </a:bodyPr>
+          <a:lstStyle/>
+          <a:p>
+            <a:r>
+              <a:rPr lang="en-US" sz="1380" dirty="0">
+                <a:solidFill>
+                  <a:srgbClr val="17364A"/>
+                </a:solidFill>
+                <a:latin typeface="Aptos" pitchFamily="34" charset="0"/>
+                <a:ea typeface="Aptos" pitchFamily="34" charset="-122"/>
+                <a:cs typeface="Aptos" pitchFamily="34" charset="-120"/>
+              </a:rPr>
+              <a:t>Agency policies for privacy, public records, cybersecurity, procurement, civil rights,.</a:t>
+            </a:r>
+            <a:endParaRPr lang="en-US" sz="1380" dirty="0"/>
+          </a:p>
+        </p:txBody>
       </p:sp>
       <p:sp>
         <p:nvSpPr>
           <p:cNvPr id="16" name="Shape 14"/>
-          <p:cNvSpPr/>
-          <p:nvPr/>
-        </p:nvSpPr>
-        <p:spPr>
-          <a:xfrm>
-            <a:off x="9198864" y="4206240"/>
-            <a:ext cx="347472" cy="347472"/>
-          </a:xfrm>
-          <a:prstGeom prst="ellipse">
-            <a:avLst/>
-          </a:prstGeom>
-          <a:solidFill>
-            <a:srgbClr val="2F8A28"/>
-          </a:solidFill>
-          <a:ln w="12700">
-            <a:solidFill>
-              <a:srgbClr val="2F8A28"/>
-            </a:solidFill>
-            <a:prstDash val="solid"/>
-          </a:ln>
-        </p:spPr>
-      </p:sp>
-      <p:sp>
-        <p:nvSpPr>
-          <p:cNvPr id="17" name="Text 15"/>
-          <p:cNvSpPr/>
-          <p:nvPr/>
-        </p:nvSpPr>
-        <p:spPr>
-          <a:xfrm>
-            <a:off x="7909560" y="3977640"/>
-            <a:ext cx="2926080" cy="182880"/>
-          </a:xfrm>
-          <a:prstGeom prst="rect">
-            <a:avLst/>
-          </a:prstGeom>
-          <a:noFill/>
-          <a:ln/>
-        </p:spPr>
-        <p:txBody>
-          <a:bodyPr wrap="square" lIns="0" tIns="0" rIns="0" bIns="0" rtlCol="0" anchor="ctr"/>
-          <a:lstStyle/>
-          <a:p>
-            <a:pPr algn="ctr" indent="0" marL="0">
-              <a:buNone/>
-            </a:pPr>
-            <a:r>
-              <a:rPr lang="en-US" sz="1000" dirty="0">
-                <a:solidFill>
-                  <a:srgbClr val="003A63"/>
-                </a:solidFill>
-                <a:latin typeface="Aptos" pitchFamily="34" charset="0"/>
-                <a:ea typeface="Aptos" pitchFamily="34" charset="-122"/>
-                <a:cs typeface="Aptos" pitchFamily="34" charset="-120"/>
-              </a:rPr>
-              <a:t>Concept to action</a:t>
-            </a:r>
-            <a:endParaRPr lang="en-US" sz="1000" dirty="0"/>
-          </a:p>
-        </p:txBody>
-      </p:sp>
-      <p:sp>
-        <p:nvSpPr>
-          <p:cNvPr id="18" name="Shape 16"/>
           <p:cNvSpPr/>
           <p:nvPr/>
         </p:nvSpPr>
@@ -12061,7 +11603,7 @@
       </p:sp>
       <p:sp>
         <p:nvSpPr>
-          <p:cNvPr id="19" name="Text 17"/>
+          <p:cNvPr id="17" name="Text 15"/>
           <p:cNvSpPr/>
           <p:nvPr/>
         </p:nvSpPr>
@@ -12100,7 +11642,7 @@
       </p:sp>
       <p:sp>
         <p:nvSpPr>
-          <p:cNvPr id="20" name="Text 18"/>
+          <p:cNvPr id="18" name="Text 16"/>
           <p:cNvSpPr/>
           <p:nvPr/>
         </p:nvSpPr>
@@ -12613,20 +12155,20 @@
         </p:nvSpPr>
         <p:spPr>
           <a:xfrm>
-            <a:off x="7818120" y="3977640"/>
-            <a:ext cx="972312" cy="749808"/>
+            <a:off x="8046720" y="3794760"/>
+            <a:ext cx="3063240" cy="1600200"/>
           </a:xfrm>
           <a:prstGeom prst="roundRect">
             <a:avLst>
-              <a:gd name="adj" fmla="val 14634"/>
+              <a:gd name="adj" fmla="val 6857"/>
             </a:avLst>
           </a:prstGeom>
           <a:solidFill>
-            <a:srgbClr val="0068B7"/>
+            <a:srgbClr val="FFFFFF"/>
           </a:solidFill>
           <a:ln w="12700">
             <a:solidFill>
-              <a:srgbClr val="0068B7"/>
+              <a:srgbClr val="B9D7E6"/>
             </a:solidFill>
             <a:prstDash val="solid"/>
           </a:ln>
@@ -12640,172 +12182,100 @@
         </p:nvSpPr>
         <p:spPr>
           <a:xfrm>
-            <a:off x="7891272" y="4169664"/>
-            <a:ext cx="826008" cy="310896"/>
-          </a:xfrm>
-          <a:prstGeom prst="rect">
-            <a:avLst/>
-          </a:prstGeom>
-          <a:noFill/>
-          <a:ln/>
-        </p:spPr>
-        <p:txBody>
-          <a:bodyPr wrap="square" lIns="0" tIns="0" rIns="0" bIns="0" rtlCol="0" anchor="ctr">
+            <a:off x="8211312" y="3941064"/>
+            <a:ext cx="2734056" cy="256032"/>
+          </a:xfrm>
+          <a:prstGeom prst="rect">
+            <a:avLst/>
+          </a:prstGeom>
+          <a:noFill/>
+          <a:ln/>
+        </p:spPr>
+        <p:txBody>
+          <a:bodyPr wrap="square" lIns="0" tIns="0" rIns="0" bIns="0" rtlCol="0" anchor="ctr"/>
+          <a:lstStyle/>
+          <a:p>
+            <a:pPr indent="0" marL="0">
+              <a:buNone/>
+            </a:pPr>
+            <a:r>
+              <a:rPr lang="en-US" sz="1300" b="1" dirty="0">
+                <a:solidFill>
+                  <a:srgbClr val="0068B7"/>
+                </a:solidFill>
+                <a:latin typeface="Aptos" pitchFamily="34" charset="0"/>
+                <a:ea typeface="Aptos" pitchFamily="34" charset="-122"/>
+                <a:cs typeface="Aptos" pitchFamily="34" charset="-120"/>
+              </a:rPr>
+              <a:t>Use the play links to</a:t>
+            </a:r>
+            <a:endParaRPr lang="en-US" sz="1300" dirty="0"/>
+          </a:p>
+        </p:txBody>
+      </p:sp>
+      <p:sp>
+        <p:nvSpPr>
+          <p:cNvPr id="15" name="Text 13"/>
+          <p:cNvSpPr/>
+          <p:nvPr/>
+        </p:nvSpPr>
+        <p:spPr>
+          <a:xfrm>
+            <a:off x="8229600" y="4306824"/>
+            <a:ext cx="2679192" cy="941832"/>
+          </a:xfrm>
+          <a:prstGeom prst="rect">
+            <a:avLst/>
+          </a:prstGeom>
+          <a:noFill/>
+          <a:ln/>
+        </p:spPr>
+        <p:txBody>
+          <a:bodyPr wrap="square" lIns="254" tIns="254" rIns="254" bIns="254" rtlCol="0" anchor="t">
             <a:normAutofit/>
           </a:bodyPr>
           <a:lstStyle/>
           <a:p>
-            <a:pPr algn="ctr" indent="0" marL="0">
-              <a:buNone/>
-            </a:pPr>
-            <a:r>
-              <a:rPr lang="en-US" sz="1500" b="1" dirty="0">
-                <a:solidFill>
-                  <a:srgbClr val="FFFFFF"/>
-                </a:solidFill>
-                <a:latin typeface="Aptos" pitchFamily="34" charset="0"/>
-                <a:ea typeface="Aptos" pitchFamily="34" charset="-122"/>
-                <a:cs typeface="Aptos" pitchFamily="34" charset="-120"/>
-              </a:rPr>
-              <a:t>Lesson</a:t>
-            </a:r>
-            <a:endParaRPr lang="en-US" sz="1500" dirty="0"/>
-          </a:p>
-        </p:txBody>
-      </p:sp>
-      <p:sp>
-        <p:nvSpPr>
-          <p:cNvPr id="15" name="Shape 13"/>
-          <p:cNvSpPr/>
-          <p:nvPr/>
-        </p:nvSpPr>
-        <p:spPr>
-          <a:xfrm>
-            <a:off x="9046464" y="3977640"/>
-            <a:ext cx="972312" cy="749808"/>
-          </a:xfrm>
-          <a:prstGeom prst="roundRect">
-            <a:avLst>
-              <a:gd name="adj" fmla="val 14634"/>
-            </a:avLst>
-          </a:prstGeom>
-          <a:solidFill>
-            <a:srgbClr val="2F8A28"/>
-          </a:solidFill>
-          <a:ln w="12700">
-            <a:solidFill>
-              <a:srgbClr val="2F8A28"/>
-            </a:solidFill>
-            <a:prstDash val="solid"/>
-          </a:ln>
-        </p:spPr>
-      </p:sp>
-      <p:sp>
-        <p:nvSpPr>
-          <p:cNvPr id="16" name="Text 14"/>
-          <p:cNvSpPr/>
-          <p:nvPr/>
-        </p:nvSpPr>
-        <p:spPr>
-          <a:xfrm>
-            <a:off x="9119616" y="4169664"/>
-            <a:ext cx="826008" cy="310896"/>
-          </a:xfrm>
-          <a:prstGeom prst="rect">
-            <a:avLst/>
-          </a:prstGeom>
-          <a:noFill/>
-          <a:ln/>
-        </p:spPr>
-        <p:txBody>
-          <a:bodyPr wrap="square" lIns="0" tIns="0" rIns="0" bIns="0" rtlCol="0" anchor="ctr">
-            <a:normAutofit/>
-          </a:bodyPr>
-          <a:lstStyle/>
-          <a:p>
-            <a:pPr algn="ctr" indent="0" marL="0">
-              <a:buNone/>
-            </a:pPr>
-            <a:r>
-              <a:rPr lang="en-US" sz="1500" b="1" dirty="0">
-                <a:solidFill>
-                  <a:srgbClr val="FFFFFF"/>
-                </a:solidFill>
-                <a:latin typeface="Aptos" pitchFamily="34" charset="0"/>
-                <a:ea typeface="Aptos" pitchFamily="34" charset="-122"/>
-                <a:cs typeface="Aptos" pitchFamily="34" charset="-120"/>
-              </a:rPr>
-              <a:t>Plays</a:t>
-            </a:r>
-            <a:endParaRPr lang="en-US" sz="1500" dirty="0"/>
-          </a:p>
-        </p:txBody>
-      </p:sp>
-      <p:sp>
-        <p:nvSpPr>
-          <p:cNvPr id="17" name="Shape 15"/>
-          <p:cNvSpPr/>
-          <p:nvPr/>
-        </p:nvSpPr>
-        <p:spPr>
-          <a:xfrm>
-            <a:off x="10274808" y="3977640"/>
-            <a:ext cx="972312" cy="749808"/>
-          </a:xfrm>
-          <a:prstGeom prst="roundRect">
-            <a:avLst>
-              <a:gd name="adj" fmla="val 14634"/>
-            </a:avLst>
-          </a:prstGeom>
-          <a:solidFill>
-            <a:srgbClr val="6A4CA3"/>
-          </a:solidFill>
-          <a:ln w="12700">
-            <a:solidFill>
-              <a:srgbClr val="6A4CA3"/>
-            </a:solidFill>
-            <a:prstDash val="solid"/>
-          </a:ln>
-        </p:spPr>
-      </p:sp>
-      <p:sp>
-        <p:nvSpPr>
-          <p:cNvPr id="18" name="Text 16"/>
-          <p:cNvSpPr/>
-          <p:nvPr/>
-        </p:nvSpPr>
-        <p:spPr>
-          <a:xfrm>
-            <a:off x="10347960" y="4169664"/>
-            <a:ext cx="826008" cy="310896"/>
-          </a:xfrm>
-          <a:prstGeom prst="rect">
-            <a:avLst/>
-          </a:prstGeom>
-          <a:noFill/>
-          <a:ln/>
-        </p:spPr>
-        <p:txBody>
-          <a:bodyPr wrap="square" lIns="0" tIns="0" rIns="0" bIns="0" rtlCol="0" anchor="ctr">
-            <a:normAutofit/>
-          </a:bodyPr>
-          <a:lstStyle/>
-          <a:p>
-            <a:pPr algn="ctr" indent="0" marL="0">
-              <a:buNone/>
-            </a:pPr>
-            <a:r>
-              <a:rPr lang="en-US" sz="1500" b="1" dirty="0">
-                <a:solidFill>
-                  <a:srgbClr val="FFFFFF"/>
-                </a:solidFill>
-                <a:latin typeface="Aptos" pitchFamily="34" charset="0"/>
-                <a:ea typeface="Aptos" pitchFamily="34" charset="-122"/>
-                <a:cs typeface="Aptos" pitchFamily="34" charset="-120"/>
-              </a:rPr>
-              <a:t>Action</a:t>
-            </a:r>
-            <a:endParaRPr lang="en-US" sz="1500" dirty="0"/>
+            <a:r>
+              <a:rPr lang="en-US" sz="1380" dirty="0">
+                <a:solidFill>
+                  <a:srgbClr val="17364A"/>
+                </a:solidFill>
+                <a:latin typeface="Aptos" pitchFamily="34" charset="0"/>
+                <a:ea typeface="Aptos" pitchFamily="34" charset="-122"/>
+                <a:cs typeface="Aptos" pitchFamily="34" charset="-120"/>
+              </a:rPr>
+              <a:t>Locate the decision point in the playbook sequence.</a:t>
+            </a:r>
+            <a:endParaRPr lang="en-US" sz="1380" dirty="0"/>
+          </a:p>
+          <a:p>
+            <a:r>
+              <a:rPr lang="en-US" sz="1380" dirty="0">
+                <a:solidFill>
+                  <a:srgbClr val="17364A"/>
+                </a:solidFill>
+                <a:latin typeface="Aptos" pitchFamily="34" charset="0"/>
+                <a:ea typeface="Aptos" pitchFamily="34" charset="-122"/>
+                <a:cs typeface="Aptos" pitchFamily="34" charset="-120"/>
+              </a:rPr>
+              <a:t>Identify who should participate in the work.</a:t>
+            </a:r>
+            <a:endParaRPr lang="en-US" sz="1380" dirty="0"/>
+          </a:p>
+          <a:p>
+            <a:r>
+              <a:rPr lang="en-US" sz="1380" dirty="0">
+                <a:solidFill>
+                  <a:srgbClr val="17364A"/>
+                </a:solidFill>
+                <a:latin typeface="Aptos" pitchFamily="34" charset="0"/>
+                <a:ea typeface="Aptos" pitchFamily="34" charset="-122"/>
+                <a:cs typeface="Aptos" pitchFamily="34" charset="-120"/>
+              </a:rPr>
+              <a:t>Document the review, approval, or implementation step.</a:t>
+            </a:r>
+            <a:endParaRPr lang="en-US" sz="1380" dirty="0"/>
           </a:p>
         </p:txBody>
       </p:sp>
@@ -13283,20 +12753,20 @@
         </p:nvSpPr>
         <p:spPr>
           <a:xfrm>
-            <a:off x="7818120" y="3977640"/>
-            <a:ext cx="972312" cy="749808"/>
+            <a:off x="8046720" y="3794760"/>
+            <a:ext cx="3063240" cy="1600200"/>
           </a:xfrm>
           <a:prstGeom prst="roundRect">
             <a:avLst>
-              <a:gd name="adj" fmla="val 14634"/>
+              <a:gd name="adj" fmla="val 6857"/>
             </a:avLst>
           </a:prstGeom>
           <a:solidFill>
-            <a:srgbClr val="0068B7"/>
+            <a:srgbClr val="FFFFFF"/>
           </a:solidFill>
           <a:ln w="12700">
             <a:solidFill>
-              <a:srgbClr val="0068B7"/>
+              <a:srgbClr val="B9D7E6"/>
             </a:solidFill>
             <a:prstDash val="solid"/>
           </a:ln>
@@ -13310,172 +12780,100 @@
         </p:nvSpPr>
         <p:spPr>
           <a:xfrm>
-            <a:off x="7891272" y="4169664"/>
-            <a:ext cx="826008" cy="310896"/>
-          </a:xfrm>
-          <a:prstGeom prst="rect">
-            <a:avLst/>
-          </a:prstGeom>
-          <a:noFill/>
-          <a:ln/>
-        </p:spPr>
-        <p:txBody>
-          <a:bodyPr wrap="square" lIns="0" tIns="0" rIns="0" bIns="0" rtlCol="0" anchor="ctr">
+            <a:off x="8211312" y="3941064"/>
+            <a:ext cx="2734056" cy="256032"/>
+          </a:xfrm>
+          <a:prstGeom prst="rect">
+            <a:avLst/>
+          </a:prstGeom>
+          <a:noFill/>
+          <a:ln/>
+        </p:spPr>
+        <p:txBody>
+          <a:bodyPr wrap="square" lIns="0" tIns="0" rIns="0" bIns="0" rtlCol="0" anchor="ctr"/>
+          <a:lstStyle/>
+          <a:p>
+            <a:pPr indent="0" marL="0">
+              <a:buNone/>
+            </a:pPr>
+            <a:r>
+              <a:rPr lang="en-US" sz="1300" b="1" dirty="0">
+                <a:solidFill>
+                  <a:srgbClr val="0068B7"/>
+                </a:solidFill>
+                <a:latin typeface="Aptos" pitchFamily="34" charset="0"/>
+                <a:ea typeface="Aptos" pitchFamily="34" charset="-122"/>
+                <a:cs typeface="Aptos" pitchFamily="34" charset="-120"/>
+              </a:rPr>
+              <a:t>Tool selection cues</a:t>
+            </a:r>
+            <a:endParaRPr lang="en-US" sz="1300" dirty="0"/>
+          </a:p>
+        </p:txBody>
+      </p:sp>
+      <p:sp>
+        <p:nvSpPr>
+          <p:cNvPr id="15" name="Text 13"/>
+          <p:cNvSpPr/>
+          <p:nvPr/>
+        </p:nvSpPr>
+        <p:spPr>
+          <a:xfrm>
+            <a:off x="8229600" y="4306824"/>
+            <a:ext cx="2679192" cy="941832"/>
+          </a:xfrm>
+          <a:prstGeom prst="rect">
+            <a:avLst/>
+          </a:prstGeom>
+          <a:noFill/>
+          <a:ln/>
+        </p:spPr>
+        <p:txBody>
+          <a:bodyPr wrap="square" lIns="254" tIns="254" rIns="254" bIns="254" rtlCol="0" anchor="t">
             <a:normAutofit/>
           </a:bodyPr>
           <a:lstStyle/>
           <a:p>
-            <a:pPr algn="ctr" indent="0" marL="0">
-              <a:buNone/>
-            </a:pPr>
-            <a:r>
-              <a:rPr lang="en-US" sz="1500" b="1" dirty="0">
-                <a:solidFill>
-                  <a:srgbClr val="FFFFFF"/>
-                </a:solidFill>
-                <a:latin typeface="Aptos" pitchFamily="34" charset="0"/>
-                <a:ea typeface="Aptos" pitchFamily="34" charset="-122"/>
-                <a:cs typeface="Aptos" pitchFamily="34" charset="-120"/>
-              </a:rPr>
-              <a:t>Concept</a:t>
-            </a:r>
-            <a:endParaRPr lang="en-US" sz="1500" dirty="0"/>
-          </a:p>
-        </p:txBody>
-      </p:sp>
-      <p:sp>
-        <p:nvSpPr>
-          <p:cNvPr id="15" name="Shape 13"/>
-          <p:cNvSpPr/>
-          <p:nvPr/>
-        </p:nvSpPr>
-        <p:spPr>
-          <a:xfrm>
-            <a:off x="9046464" y="3977640"/>
-            <a:ext cx="972312" cy="749808"/>
-          </a:xfrm>
-          <a:prstGeom prst="roundRect">
-            <a:avLst>
-              <a:gd name="adj" fmla="val 14634"/>
-            </a:avLst>
-          </a:prstGeom>
-          <a:solidFill>
-            <a:srgbClr val="2F8A28"/>
-          </a:solidFill>
-          <a:ln w="12700">
-            <a:solidFill>
-              <a:srgbClr val="2F8A28"/>
-            </a:solidFill>
-            <a:prstDash val="solid"/>
-          </a:ln>
-        </p:spPr>
-      </p:sp>
-      <p:sp>
-        <p:nvSpPr>
-          <p:cNvPr id="16" name="Text 14"/>
-          <p:cNvSpPr/>
-          <p:nvPr/>
-        </p:nvSpPr>
-        <p:spPr>
-          <a:xfrm>
-            <a:off x="9119616" y="4169664"/>
-            <a:ext cx="826008" cy="310896"/>
-          </a:xfrm>
-          <a:prstGeom prst="rect">
-            <a:avLst/>
-          </a:prstGeom>
-          <a:noFill/>
-          <a:ln/>
-        </p:spPr>
-        <p:txBody>
-          <a:bodyPr wrap="square" lIns="0" tIns="0" rIns="0" bIns="0" rtlCol="0" anchor="ctr">
-            <a:normAutofit/>
-          </a:bodyPr>
-          <a:lstStyle/>
-          <a:p>
-            <a:pPr algn="ctr" indent="0" marL="0">
-              <a:buNone/>
-            </a:pPr>
-            <a:r>
-              <a:rPr lang="en-US" sz="1500" b="1" dirty="0">
-                <a:solidFill>
-                  <a:srgbClr val="FFFFFF"/>
-                </a:solidFill>
-                <a:latin typeface="Aptos" pitchFamily="34" charset="0"/>
-                <a:ea typeface="Aptos" pitchFamily="34" charset="-122"/>
-                <a:cs typeface="Aptos" pitchFamily="34" charset="-120"/>
-              </a:rPr>
-              <a:t>Tool</a:t>
-            </a:r>
-            <a:endParaRPr lang="en-US" sz="1500" dirty="0"/>
-          </a:p>
-        </p:txBody>
-      </p:sp>
-      <p:sp>
-        <p:nvSpPr>
-          <p:cNvPr id="17" name="Shape 15"/>
-          <p:cNvSpPr/>
-          <p:nvPr/>
-        </p:nvSpPr>
-        <p:spPr>
-          <a:xfrm>
-            <a:off x="10274808" y="3977640"/>
-            <a:ext cx="972312" cy="749808"/>
-          </a:xfrm>
-          <a:prstGeom prst="roundRect">
-            <a:avLst>
-              <a:gd name="adj" fmla="val 14634"/>
-            </a:avLst>
-          </a:prstGeom>
-          <a:solidFill>
-            <a:srgbClr val="D69A2D"/>
-          </a:solidFill>
-          <a:ln w="12700">
-            <a:solidFill>
-              <a:srgbClr val="D69A2D"/>
-            </a:solidFill>
-            <a:prstDash val="solid"/>
-          </a:ln>
-        </p:spPr>
-      </p:sp>
-      <p:sp>
-        <p:nvSpPr>
-          <p:cNvPr id="18" name="Text 16"/>
-          <p:cNvSpPr/>
-          <p:nvPr/>
-        </p:nvSpPr>
-        <p:spPr>
-          <a:xfrm>
-            <a:off x="10347960" y="4169664"/>
-            <a:ext cx="826008" cy="310896"/>
-          </a:xfrm>
-          <a:prstGeom prst="rect">
-            <a:avLst/>
-          </a:prstGeom>
-          <a:noFill/>
-          <a:ln/>
-        </p:spPr>
-        <p:txBody>
-          <a:bodyPr wrap="square" lIns="0" tIns="0" rIns="0" bIns="0" rtlCol="0" anchor="ctr">
-            <a:normAutofit/>
-          </a:bodyPr>
-          <a:lstStyle/>
-          <a:p>
-            <a:pPr algn="ctr" indent="0" marL="0">
-              <a:buNone/>
-            </a:pPr>
-            <a:r>
-              <a:rPr lang="en-US" sz="1500" b="1" dirty="0">
-                <a:solidFill>
-                  <a:srgbClr val="FFFFFF"/>
-                </a:solidFill>
-                <a:latin typeface="Aptos" pitchFamily="34" charset="0"/>
-                <a:ea typeface="Aptos" pitchFamily="34" charset="-122"/>
-                <a:cs typeface="Aptos" pitchFamily="34" charset="-120"/>
-              </a:rPr>
-              <a:t>Artifact</a:t>
-            </a:r>
-            <a:endParaRPr lang="en-US" sz="1500" dirty="0"/>
+            <a:r>
+              <a:rPr lang="en-US" sz="1380" dirty="0">
+                <a:solidFill>
+                  <a:srgbClr val="17364A"/>
+                </a:solidFill>
+                <a:latin typeface="Aptos" pitchFamily="34" charset="0"/>
+                <a:ea typeface="Aptos" pitchFamily="34" charset="-122"/>
+                <a:cs typeface="Aptos" pitchFamily="34" charset="-120"/>
+              </a:rPr>
+              <a:t>Use a tool when no comparable local process exists.</a:t>
+            </a:r>
+            <a:endParaRPr lang="en-US" sz="1380" dirty="0"/>
+          </a:p>
+          <a:p>
+            <a:r>
+              <a:rPr lang="en-US" sz="1380" dirty="0">
+                <a:solidFill>
+                  <a:srgbClr val="17364A"/>
+                </a:solidFill>
+                <a:latin typeface="Aptos" pitchFamily="34" charset="0"/>
+                <a:ea typeface="Aptos" pitchFamily="34" charset="-122"/>
+                <a:cs typeface="Aptos" pitchFamily="34" charset="-120"/>
+              </a:rPr>
+              <a:t>Adapt existing department templates when they already fit the purpose.</a:t>
+            </a:r>
+            <a:endParaRPr lang="en-US" sz="1380" dirty="0"/>
+          </a:p>
+          <a:p>
+            <a:r>
+              <a:rPr lang="en-US" sz="1380" dirty="0">
+                <a:solidFill>
+                  <a:srgbClr val="17364A"/>
+                </a:solidFill>
+                <a:latin typeface="Aptos" pitchFamily="34" charset="0"/>
+                <a:ea typeface="Aptos" pitchFamily="34" charset="-122"/>
+                <a:cs typeface="Aptos" pitchFamily="34" charset="-120"/>
+              </a:rPr>
+              <a:t>Save the completed artifact as evidence of the decision.</a:t>
+            </a:r>
+            <a:endParaRPr lang="en-US" sz="1380" dirty="0"/>
           </a:p>
         </p:txBody>
       </p:sp>
@@ -13948,13 +13346,11 @@
             </a:avLst>
           </a:prstGeom>
           <a:solidFill>
-            <a:srgbClr val="FFFFFF">
-              <a:alpha val="88000"/>
-            </a:srgbClr>
+            <a:srgbClr val="FFFFFF"/>
           </a:solidFill>
           <a:ln w="12700">
             <a:solidFill>
-              <a:srgbClr val="D6E8F2"/>
+              <a:srgbClr val="B9D7E6"/>
             </a:solidFill>
             <a:prstDash val="solid"/>
           </a:ln>
@@ -13962,119 +13358,98 @@
       </p:sp>
       <p:sp>
         <p:nvSpPr>
-          <p:cNvPr id="14" name="Shape 12"/>
-          <p:cNvSpPr/>
-          <p:nvPr/>
-        </p:nvSpPr>
-        <p:spPr>
-          <a:xfrm>
-            <a:off x="8074152" y="3291840"/>
-            <a:ext cx="2596896" cy="749808"/>
-          </a:xfrm>
-          <a:prstGeom prst="rect">
-            <a:avLst/>
-          </a:prstGeom>
-          <a:solidFill>
-            <a:srgbClr val="EAF6F8"/>
-          </a:solidFill>
-          <a:ln w="12700">
-            <a:solidFill>
-              <a:srgbClr val="8ABBD8"/>
-            </a:solidFill>
-            <a:prstDash val="solid"/>
-          </a:ln>
-        </p:spPr>
-      </p:sp>
-      <p:sp>
-        <p:nvSpPr>
-          <p:cNvPr id="15" name="Shape 13"/>
-          <p:cNvSpPr/>
-          <p:nvPr/>
-        </p:nvSpPr>
-        <p:spPr>
-          <a:xfrm>
-            <a:off x="8202168" y="3721608"/>
-            <a:ext cx="2340864" cy="0"/>
-          </a:xfrm>
-          <a:prstGeom prst="line">
-            <a:avLst/>
-          </a:prstGeom>
-          <a:noFill/>
-          <a:ln w="19050">
-            <a:solidFill>
-              <a:srgbClr val="0068B7"/>
-            </a:solidFill>
-            <a:prstDash val="solid"/>
-          </a:ln>
-        </p:spPr>
+          <p:cNvPr id="14" name="Text 12"/>
+          <p:cNvSpPr/>
+          <p:nvPr/>
+        </p:nvSpPr>
+        <p:spPr>
+          <a:xfrm>
+            <a:off x="7799832" y="2935224"/>
+            <a:ext cx="3145536" cy="256032"/>
+          </a:xfrm>
+          <a:prstGeom prst="rect">
+            <a:avLst/>
+          </a:prstGeom>
+          <a:noFill/>
+          <a:ln/>
+        </p:spPr>
+        <p:txBody>
+          <a:bodyPr wrap="square" lIns="0" tIns="0" rIns="0" bIns="0" rtlCol="0" anchor="ctr"/>
+          <a:lstStyle/>
+          <a:p>
+            <a:pPr indent="0" marL="0">
+              <a:buNone/>
+            </a:pPr>
+            <a:r>
+              <a:rPr lang="en-US" sz="1300" b="1" dirty="0">
+                <a:solidFill>
+                  <a:srgbClr val="0068B7"/>
+                </a:solidFill>
+                <a:latin typeface="Aptos" pitchFamily="34" charset="0"/>
+                <a:ea typeface="Aptos" pitchFamily="34" charset="-122"/>
+                <a:cs typeface="Aptos" pitchFamily="34" charset="-120"/>
+              </a:rPr>
+              <a:t>Concept checkpoints</a:t>
+            </a:r>
+            <a:endParaRPr lang="en-US" sz="1300" dirty="0"/>
+          </a:p>
+        </p:txBody>
+      </p:sp>
+      <p:sp>
+        <p:nvSpPr>
+          <p:cNvPr id="15" name="Text 13"/>
+          <p:cNvSpPr/>
+          <p:nvPr/>
+        </p:nvSpPr>
+        <p:spPr>
+          <a:xfrm>
+            <a:off x="7818120" y="3300984"/>
+            <a:ext cx="3090672" cy="877824"/>
+          </a:xfrm>
+          <a:prstGeom prst="rect">
+            <a:avLst/>
+          </a:prstGeom>
+          <a:noFill/>
+          <a:ln/>
+        </p:spPr>
+        <p:txBody>
+          <a:bodyPr wrap="square" lIns="254" tIns="254" rIns="254" bIns="254" rtlCol="0" anchor="t">
+            <a:normAutofit/>
+          </a:bodyPr>
+          <a:lstStyle/>
+          <a:p>
+            <a:r>
+              <a:rPr lang="en-US" sz="1380" dirty="0">
+                <a:solidFill>
+                  <a:srgbClr val="17364A"/>
+                </a:solidFill>
+                <a:latin typeface="Aptos" pitchFamily="34" charset="0"/>
+                <a:ea typeface="Aptos" pitchFamily="34" charset="-122"/>
+                <a:cs typeface="Aptos" pitchFamily="34" charset="-120"/>
+              </a:rPr>
+              <a:t>Recognize equity, privacy, security, legal, operational, and public trust implications.</a:t>
+            </a:r>
+            <a:endParaRPr lang="en-US" sz="1380" dirty="0"/>
+          </a:p>
+          <a:p>
+            <a:r>
+              <a:rPr lang="en-US" sz="1380" dirty="0">
+                <a:solidFill>
+                  <a:srgbClr val="17364A"/>
+                </a:solidFill>
+                <a:latin typeface="Aptos" pitchFamily="34" charset="0"/>
+                <a:ea typeface="Aptos" pitchFamily="34" charset="-122"/>
+                <a:cs typeface="Aptos" pitchFamily="34" charset="-120"/>
+              </a:rPr>
+              <a:t>Produce a practical artifact that supports readiness, governance, implementation,.</a:t>
+            </a:r>
+            <a:endParaRPr lang="en-US" sz="1380" dirty="0"/>
+          </a:p>
+        </p:txBody>
       </p:sp>
       <p:sp>
         <p:nvSpPr>
           <p:cNvPr id="16" name="Shape 14"/>
-          <p:cNvSpPr/>
-          <p:nvPr/>
-        </p:nvSpPr>
-        <p:spPr>
-          <a:xfrm>
-            <a:off x="9198864" y="4206240"/>
-            <a:ext cx="347472" cy="347472"/>
-          </a:xfrm>
-          <a:prstGeom prst="ellipse">
-            <a:avLst/>
-          </a:prstGeom>
-          <a:solidFill>
-            <a:srgbClr val="2F8A28"/>
-          </a:solidFill>
-          <a:ln w="12700">
-            <a:solidFill>
-              <a:srgbClr val="2F8A28"/>
-            </a:solidFill>
-            <a:prstDash val="solid"/>
-          </a:ln>
-        </p:spPr>
-      </p:sp>
-      <p:sp>
-        <p:nvSpPr>
-          <p:cNvPr id="17" name="Text 15"/>
-          <p:cNvSpPr/>
-          <p:nvPr/>
-        </p:nvSpPr>
-        <p:spPr>
-          <a:xfrm>
-            <a:off x="7909560" y="3977640"/>
-            <a:ext cx="2926080" cy="182880"/>
-          </a:xfrm>
-          <a:prstGeom prst="rect">
-            <a:avLst/>
-          </a:prstGeom>
-          <a:noFill/>
-          <a:ln/>
-        </p:spPr>
-        <p:txBody>
-          <a:bodyPr wrap="square" lIns="0" tIns="0" rIns="0" bIns="0" rtlCol="0" anchor="ctr"/>
-          <a:lstStyle/>
-          <a:p>
-            <a:pPr algn="ctr" indent="0" marL="0">
-              <a:buNone/>
-            </a:pPr>
-            <a:r>
-              <a:rPr lang="en-US" sz="1000" dirty="0">
-                <a:solidFill>
-                  <a:srgbClr val="003A63"/>
-                </a:solidFill>
-                <a:latin typeface="Aptos" pitchFamily="34" charset="0"/>
-                <a:ea typeface="Aptos" pitchFamily="34" charset="-122"/>
-                <a:cs typeface="Aptos" pitchFamily="34" charset="-120"/>
-              </a:rPr>
-              <a:t>Concept to action</a:t>
-            </a:r>
-            <a:endParaRPr lang="en-US" sz="1000" dirty="0"/>
-          </a:p>
-        </p:txBody>
-      </p:sp>
-      <p:sp>
-        <p:nvSpPr>
-          <p:cNvPr id="18" name="Shape 16"/>
           <p:cNvSpPr/>
           <p:nvPr/>
         </p:nvSpPr>
@@ -14101,7 +13476,7 @@
       </p:sp>
       <p:sp>
         <p:nvSpPr>
-          <p:cNvPr id="19" name="Text 17"/>
+          <p:cNvPr id="17" name="Text 15"/>
           <p:cNvSpPr/>
           <p:nvPr/>
         </p:nvSpPr>
@@ -14140,7 +13515,7 @@
       </p:sp>
       <p:sp>
         <p:nvSpPr>
-          <p:cNvPr id="20" name="Text 18"/>
+          <p:cNvPr id="18" name="Text 16"/>
           <p:cNvSpPr/>
           <p:nvPr/>
         </p:nvSpPr>
@@ -14648,13 +14023,11 @@
             </a:avLst>
           </a:prstGeom>
           <a:solidFill>
-            <a:srgbClr val="FFFFFF">
-              <a:alpha val="88000"/>
-            </a:srgbClr>
+            <a:srgbClr val="FFFFFF"/>
           </a:solidFill>
           <a:ln w="12700">
             <a:solidFill>
-              <a:srgbClr val="D6E8F2"/>
+              <a:srgbClr val="B9D7E6"/>
             </a:solidFill>
             <a:prstDash val="solid"/>
           </a:ln>
@@ -14662,119 +14035,112 @@
       </p:sp>
       <p:sp>
         <p:nvSpPr>
-          <p:cNvPr id="14" name="Shape 12"/>
-          <p:cNvSpPr/>
-          <p:nvPr/>
-        </p:nvSpPr>
-        <p:spPr>
-          <a:xfrm>
-            <a:off x="8074152" y="3291840"/>
-            <a:ext cx="2596896" cy="749808"/>
-          </a:xfrm>
-          <a:prstGeom prst="rect">
-            <a:avLst/>
-          </a:prstGeom>
-          <a:solidFill>
-            <a:srgbClr val="EAF6F8"/>
-          </a:solidFill>
-          <a:ln w="12700">
-            <a:solidFill>
-              <a:srgbClr val="8ABBD8"/>
-            </a:solidFill>
-            <a:prstDash val="solid"/>
-          </a:ln>
-        </p:spPr>
-      </p:sp>
-      <p:sp>
-        <p:nvSpPr>
-          <p:cNvPr id="15" name="Shape 13"/>
-          <p:cNvSpPr/>
-          <p:nvPr/>
-        </p:nvSpPr>
-        <p:spPr>
-          <a:xfrm>
-            <a:off x="8202168" y="3721608"/>
-            <a:ext cx="2340864" cy="0"/>
-          </a:xfrm>
-          <a:prstGeom prst="line">
-            <a:avLst/>
-          </a:prstGeom>
-          <a:noFill/>
-          <a:ln w="19050">
-            <a:solidFill>
-              <a:srgbClr val="0068B7"/>
-            </a:solidFill>
-            <a:prstDash val="solid"/>
-          </a:ln>
-        </p:spPr>
+          <p:cNvPr id="14" name="Text 12"/>
+          <p:cNvSpPr/>
+          <p:nvPr/>
+        </p:nvSpPr>
+        <p:spPr>
+          <a:xfrm>
+            <a:off x="7799832" y="2935224"/>
+            <a:ext cx="3145536" cy="256032"/>
+          </a:xfrm>
+          <a:prstGeom prst="rect">
+            <a:avLst/>
+          </a:prstGeom>
+          <a:noFill/>
+          <a:ln/>
+        </p:spPr>
+        <p:txBody>
+          <a:bodyPr wrap="square" lIns="0" tIns="0" rIns="0" bIns="0" rtlCol="0" anchor="ctr"/>
+          <a:lstStyle/>
+          <a:p>
+            <a:pPr indent="0" marL="0">
+              <a:buNone/>
+            </a:pPr>
+            <a:r>
+              <a:rPr lang="en-US" sz="1300" b="1" dirty="0">
+                <a:solidFill>
+                  <a:srgbClr val="0068B7"/>
+                </a:solidFill>
+                <a:latin typeface="Aptos" pitchFamily="34" charset="0"/>
+                <a:ea typeface="Aptos" pitchFamily="34" charset="-122"/>
+                <a:cs typeface="Aptos" pitchFamily="34" charset="-120"/>
+              </a:rPr>
+              <a:t>Concept checkpoints</a:t>
+            </a:r>
+            <a:endParaRPr lang="en-US" sz="1300" dirty="0"/>
+          </a:p>
+        </p:txBody>
+      </p:sp>
+      <p:sp>
+        <p:nvSpPr>
+          <p:cNvPr id="15" name="Text 13"/>
+          <p:cNvSpPr/>
+          <p:nvPr/>
+        </p:nvSpPr>
+        <p:spPr>
+          <a:xfrm>
+            <a:off x="7818120" y="3300984"/>
+            <a:ext cx="3090672" cy="877824"/>
+          </a:xfrm>
+          <a:prstGeom prst="rect">
+            <a:avLst/>
+          </a:prstGeom>
+          <a:noFill/>
+          <a:ln/>
+        </p:spPr>
+        <p:txBody>
+          <a:bodyPr wrap="square" lIns="254" tIns="254" rIns="254" bIns="254" rtlCol="0" anchor="t">
+            <a:normAutofit/>
+          </a:bodyPr>
+          <a:lstStyle/>
+          <a:p>
+            <a:r>
+              <a:rPr lang="en-US" sz="1380" dirty="0">
+                <a:solidFill>
+                  <a:srgbClr val="17364A"/>
+                </a:solidFill>
+                <a:latin typeface="Aptos" pitchFamily="34" charset="0"/>
+                <a:ea typeface="Aptos" pitchFamily="34" charset="-122"/>
+                <a:cs typeface="Aptos" pitchFamily="34" charset="-120"/>
+              </a:rPr>
+              <a:t>It is designed for public health staff who must translate responsible AI principles into.</a:t>
+            </a:r>
+            <a:endParaRPr lang="en-US" sz="1380" dirty="0"/>
+          </a:p>
+          <a:p>
+            <a:r>
+              <a:rPr lang="en-US" sz="1380" dirty="0">
+                <a:solidFill>
+                  <a:srgbClr val="17364A"/>
+                </a:solidFill>
+                <a:latin typeface="Aptos" pitchFamily="34" charset="0"/>
+                <a:ea typeface="Aptos" pitchFamily="34" charset="-122"/>
+                <a:cs typeface="Aptos" pitchFamily="34" charset="-120"/>
+              </a:rPr>
+              <a:t>The module helps learners move beyond general awareness by producing a practical artifact.</a:t>
+            </a:r>
+            <a:endParaRPr lang="en-US" sz="1380" dirty="0"/>
+          </a:p>
+          <a:p>
+            <a:r>
+              <a:rPr lang="en-US" sz="1380" dirty="0">
+                <a:solidFill>
+                  <a:srgbClr val="17364A"/>
+                </a:solidFill>
+                <a:latin typeface="Aptos" pitchFamily="34" charset="0"/>
+                <a:ea typeface="Aptos" pitchFamily="34" charset="-122"/>
+                <a:cs typeface="Aptos" pitchFamily="34" charset="-120"/>
+              </a:rPr>
+              <a:t>It emphasizes paragraph-based reasoning, defined responsibilities, and documentation that.</a:t>
+            </a:r>
+            <a:endParaRPr lang="en-US" sz="1380" dirty="0"/>
+          </a:p>
+        </p:txBody>
       </p:sp>
       <p:sp>
         <p:nvSpPr>
           <p:cNvPr id="16" name="Shape 14"/>
-          <p:cNvSpPr/>
-          <p:nvPr/>
-        </p:nvSpPr>
-        <p:spPr>
-          <a:xfrm>
-            <a:off x="9198864" y="4206240"/>
-            <a:ext cx="347472" cy="347472"/>
-          </a:xfrm>
-          <a:prstGeom prst="ellipse">
-            <a:avLst/>
-          </a:prstGeom>
-          <a:solidFill>
-            <a:srgbClr val="2F8A28"/>
-          </a:solidFill>
-          <a:ln w="12700">
-            <a:solidFill>
-              <a:srgbClr val="2F8A28"/>
-            </a:solidFill>
-            <a:prstDash val="solid"/>
-          </a:ln>
-        </p:spPr>
-      </p:sp>
-      <p:sp>
-        <p:nvSpPr>
-          <p:cNvPr id="17" name="Text 15"/>
-          <p:cNvSpPr/>
-          <p:nvPr/>
-        </p:nvSpPr>
-        <p:spPr>
-          <a:xfrm>
-            <a:off x="7909560" y="3977640"/>
-            <a:ext cx="2926080" cy="182880"/>
-          </a:xfrm>
-          <a:prstGeom prst="rect">
-            <a:avLst/>
-          </a:prstGeom>
-          <a:noFill/>
-          <a:ln/>
-        </p:spPr>
-        <p:txBody>
-          <a:bodyPr wrap="square" lIns="0" tIns="0" rIns="0" bIns="0" rtlCol="0" anchor="ctr"/>
-          <a:lstStyle/>
-          <a:p>
-            <a:pPr algn="ctr" indent="0" marL="0">
-              <a:buNone/>
-            </a:pPr>
-            <a:r>
-              <a:rPr lang="en-US" sz="1000" dirty="0">
-                <a:solidFill>
-                  <a:srgbClr val="003A63"/>
-                </a:solidFill>
-                <a:latin typeface="Aptos" pitchFamily="34" charset="0"/>
-                <a:ea typeface="Aptos" pitchFamily="34" charset="-122"/>
-                <a:cs typeface="Aptos" pitchFamily="34" charset="-120"/>
-              </a:rPr>
-              <a:t>Concept to action</a:t>
-            </a:r>
-            <a:endParaRPr lang="en-US" sz="1000" dirty="0"/>
-          </a:p>
-        </p:txBody>
-      </p:sp>
-      <p:sp>
-        <p:nvSpPr>
-          <p:cNvPr id="18" name="Shape 16"/>
           <p:cNvSpPr/>
           <p:nvPr/>
         </p:nvSpPr>
@@ -14801,7 +14167,7 @@
       </p:sp>
       <p:sp>
         <p:nvSpPr>
-          <p:cNvPr id="19" name="Text 17"/>
+          <p:cNvPr id="17" name="Text 15"/>
           <p:cNvSpPr/>
           <p:nvPr/>
         </p:nvSpPr>
@@ -14840,7 +14206,7 @@
       </p:sp>
       <p:sp>
         <p:nvSpPr>
-          <p:cNvPr id="20" name="Text 18"/>
+          <p:cNvPr id="18" name="Text 16"/>
           <p:cNvSpPr/>
           <p:nvPr/>
         </p:nvSpPr>
@@ -15348,13 +14714,11 @@
             </a:avLst>
           </a:prstGeom>
           <a:solidFill>
-            <a:srgbClr val="FFFFFF">
-              <a:alpha val="88000"/>
-            </a:srgbClr>
+            <a:srgbClr val="FFFFFF"/>
           </a:solidFill>
           <a:ln w="12700">
             <a:solidFill>
-              <a:srgbClr val="D6E8F2"/>
+              <a:srgbClr val="B9D7E6"/>
             </a:solidFill>
             <a:prstDash val="solid"/>
           </a:ln>
@@ -15362,119 +14726,112 @@
       </p:sp>
       <p:sp>
         <p:nvSpPr>
-          <p:cNvPr id="14" name="Shape 12"/>
-          <p:cNvSpPr/>
-          <p:nvPr/>
-        </p:nvSpPr>
-        <p:spPr>
-          <a:xfrm>
-            <a:off x="8074152" y="3291840"/>
-            <a:ext cx="2596896" cy="749808"/>
-          </a:xfrm>
-          <a:prstGeom prst="rect">
-            <a:avLst/>
-          </a:prstGeom>
-          <a:solidFill>
-            <a:srgbClr val="EAF6F8"/>
-          </a:solidFill>
-          <a:ln w="12700">
-            <a:solidFill>
-              <a:srgbClr val="8ABBD8"/>
-            </a:solidFill>
-            <a:prstDash val="solid"/>
-          </a:ln>
-        </p:spPr>
-      </p:sp>
-      <p:sp>
-        <p:nvSpPr>
-          <p:cNvPr id="15" name="Shape 13"/>
-          <p:cNvSpPr/>
-          <p:nvPr/>
-        </p:nvSpPr>
-        <p:spPr>
-          <a:xfrm>
-            <a:off x="8202168" y="3721608"/>
-            <a:ext cx="2340864" cy="0"/>
-          </a:xfrm>
-          <a:prstGeom prst="line">
-            <a:avLst/>
-          </a:prstGeom>
-          <a:noFill/>
-          <a:ln w="19050">
-            <a:solidFill>
-              <a:srgbClr val="0068B7"/>
-            </a:solidFill>
-            <a:prstDash val="solid"/>
-          </a:ln>
-        </p:spPr>
+          <p:cNvPr id="14" name="Text 12"/>
+          <p:cNvSpPr/>
+          <p:nvPr/>
+        </p:nvSpPr>
+        <p:spPr>
+          <a:xfrm>
+            <a:off x="7799832" y="2935224"/>
+            <a:ext cx="3145536" cy="256032"/>
+          </a:xfrm>
+          <a:prstGeom prst="rect">
+            <a:avLst/>
+          </a:prstGeom>
+          <a:noFill/>
+          <a:ln/>
+        </p:spPr>
+        <p:txBody>
+          <a:bodyPr wrap="square" lIns="0" tIns="0" rIns="0" bIns="0" rtlCol="0" anchor="ctr"/>
+          <a:lstStyle/>
+          <a:p>
+            <a:pPr indent="0" marL="0">
+              <a:buNone/>
+            </a:pPr>
+            <a:r>
+              <a:rPr lang="en-US" sz="1300" b="1" dirty="0">
+                <a:solidFill>
+                  <a:srgbClr val="0068B7"/>
+                </a:solidFill>
+                <a:latin typeface="Aptos" pitchFamily="34" charset="0"/>
+                <a:ea typeface="Aptos" pitchFamily="34" charset="-122"/>
+                <a:cs typeface="Aptos" pitchFamily="34" charset="-120"/>
+              </a:rPr>
+              <a:t>Concept checkpoints</a:t>
+            </a:r>
+            <a:endParaRPr lang="en-US" sz="1300" dirty="0"/>
+          </a:p>
+        </p:txBody>
+      </p:sp>
+      <p:sp>
+        <p:nvSpPr>
+          <p:cNvPr id="15" name="Text 13"/>
+          <p:cNvSpPr/>
+          <p:nvPr/>
+        </p:nvSpPr>
+        <p:spPr>
+          <a:xfrm>
+            <a:off x="7818120" y="3300984"/>
+            <a:ext cx="3090672" cy="877824"/>
+          </a:xfrm>
+          <a:prstGeom prst="rect">
+            <a:avLst/>
+          </a:prstGeom>
+          <a:noFill/>
+          <a:ln/>
+        </p:spPr>
+        <p:txBody>
+          <a:bodyPr wrap="square" lIns="254" tIns="254" rIns="254" bIns="254" rtlCol="0" anchor="t">
+            <a:normAutofit/>
+          </a:bodyPr>
+          <a:lstStyle/>
+          <a:p>
+            <a:r>
+              <a:rPr lang="en-US" sz="1380" dirty="0">
+                <a:solidFill>
+                  <a:srgbClr val="17364A"/>
+                </a:solidFill>
+                <a:latin typeface="Aptos" pitchFamily="34" charset="0"/>
+                <a:ea typeface="Aptos" pitchFamily="34" charset="-122"/>
+                <a:cs typeface="Aptos" pitchFamily="34" charset="-120"/>
+              </a:rPr>
+              <a:t>Decision right: The authority to approve, deny, modify, pause, or escalate an AI use case.</a:t>
+            </a:r>
+            <a:endParaRPr lang="en-US" sz="1380" dirty="0"/>
+          </a:p>
+          <a:p>
+            <a:r>
+              <a:rPr lang="en-US" sz="1380" dirty="0">
+                <a:solidFill>
+                  <a:srgbClr val="17364A"/>
+                </a:solidFill>
+                <a:latin typeface="Aptos" pitchFamily="34" charset="0"/>
+                <a:ea typeface="Aptos" pitchFamily="34" charset="-122"/>
+                <a:cs typeface="Aptos" pitchFamily="34" charset="-120"/>
+              </a:rPr>
+              <a:t>Evidence artifact: A document, log, checklist, test result, approval record, or review.</a:t>
+            </a:r>
+            <a:endParaRPr lang="en-US" sz="1380" dirty="0"/>
+          </a:p>
+          <a:p>
+            <a:r>
+              <a:rPr lang="en-US" sz="1380" dirty="0">
+                <a:solidFill>
+                  <a:srgbClr val="17364A"/>
+                </a:solidFill>
+                <a:latin typeface="Aptos" pitchFamily="34" charset="0"/>
+                <a:ea typeface="Aptos" pitchFamily="34" charset="-122"/>
+                <a:cs typeface="Aptos" pitchFamily="34" charset="-120"/>
+              </a:rPr>
+              <a:t>Accountability owner: The person or role responsible for ensuring that an AI use case is.</a:t>
+            </a:r>
+            <a:endParaRPr lang="en-US" sz="1380" dirty="0"/>
+          </a:p>
+        </p:txBody>
       </p:sp>
       <p:sp>
         <p:nvSpPr>
           <p:cNvPr id="16" name="Shape 14"/>
-          <p:cNvSpPr/>
-          <p:nvPr/>
-        </p:nvSpPr>
-        <p:spPr>
-          <a:xfrm>
-            <a:off x="9198864" y="4206240"/>
-            <a:ext cx="347472" cy="347472"/>
-          </a:xfrm>
-          <a:prstGeom prst="ellipse">
-            <a:avLst/>
-          </a:prstGeom>
-          <a:solidFill>
-            <a:srgbClr val="2F8A28"/>
-          </a:solidFill>
-          <a:ln w="12700">
-            <a:solidFill>
-              <a:srgbClr val="2F8A28"/>
-            </a:solidFill>
-            <a:prstDash val="solid"/>
-          </a:ln>
-        </p:spPr>
-      </p:sp>
-      <p:sp>
-        <p:nvSpPr>
-          <p:cNvPr id="17" name="Text 15"/>
-          <p:cNvSpPr/>
-          <p:nvPr/>
-        </p:nvSpPr>
-        <p:spPr>
-          <a:xfrm>
-            <a:off x="7909560" y="3977640"/>
-            <a:ext cx="2926080" cy="182880"/>
-          </a:xfrm>
-          <a:prstGeom prst="rect">
-            <a:avLst/>
-          </a:prstGeom>
-          <a:noFill/>
-          <a:ln/>
-        </p:spPr>
-        <p:txBody>
-          <a:bodyPr wrap="square" lIns="0" tIns="0" rIns="0" bIns="0" rtlCol="0" anchor="ctr"/>
-          <a:lstStyle/>
-          <a:p>
-            <a:pPr algn="ctr" indent="0" marL="0">
-              <a:buNone/>
-            </a:pPr>
-            <a:r>
-              <a:rPr lang="en-US" sz="1000" dirty="0">
-                <a:solidFill>
-                  <a:srgbClr val="003A63"/>
-                </a:solidFill>
-                <a:latin typeface="Aptos" pitchFamily="34" charset="0"/>
-                <a:ea typeface="Aptos" pitchFamily="34" charset="-122"/>
-                <a:cs typeface="Aptos" pitchFamily="34" charset="-120"/>
-              </a:rPr>
-              <a:t>Concept to action</a:t>
-            </a:r>
-            <a:endParaRPr lang="en-US" sz="1000" dirty="0"/>
-          </a:p>
-        </p:txBody>
-      </p:sp>
-      <p:sp>
-        <p:nvSpPr>
-          <p:cNvPr id="18" name="Shape 16"/>
           <p:cNvSpPr/>
           <p:nvPr/>
         </p:nvSpPr>
@@ -15501,7 +14858,7 @@
       </p:sp>
       <p:sp>
         <p:nvSpPr>
-          <p:cNvPr id="19" name="Text 17"/>
+          <p:cNvPr id="17" name="Text 15"/>
           <p:cNvSpPr/>
           <p:nvPr/>
         </p:nvSpPr>
@@ -15540,7 +14897,7 @@
       </p:sp>
       <p:sp>
         <p:nvSpPr>
-          <p:cNvPr id="20" name="Text 18"/>
+          <p:cNvPr id="18" name="Text 16"/>
           <p:cNvSpPr/>
           <p:nvPr/>
         </p:nvSpPr>
@@ -16048,13 +15405,11 @@
             </a:avLst>
           </a:prstGeom>
           <a:solidFill>
-            <a:srgbClr val="FFFFFF">
-              <a:alpha val="88000"/>
-            </a:srgbClr>
+            <a:srgbClr val="FFFFFF"/>
           </a:solidFill>
           <a:ln w="12700">
             <a:solidFill>
-              <a:srgbClr val="D6E8F2"/>
+              <a:srgbClr val="B9D7E6"/>
             </a:solidFill>
             <a:prstDash val="solid"/>
           </a:ln>
@@ -16062,119 +15417,112 @@
       </p:sp>
       <p:sp>
         <p:nvSpPr>
-          <p:cNvPr id="14" name="Shape 12"/>
-          <p:cNvSpPr/>
-          <p:nvPr/>
-        </p:nvSpPr>
-        <p:spPr>
-          <a:xfrm>
-            <a:off x="8074152" y="3291840"/>
-            <a:ext cx="2596896" cy="749808"/>
-          </a:xfrm>
-          <a:prstGeom prst="rect">
-            <a:avLst/>
-          </a:prstGeom>
-          <a:solidFill>
-            <a:srgbClr val="EAF6F8"/>
-          </a:solidFill>
-          <a:ln w="12700">
-            <a:solidFill>
-              <a:srgbClr val="8ABBD8"/>
-            </a:solidFill>
-            <a:prstDash val="solid"/>
-          </a:ln>
-        </p:spPr>
-      </p:sp>
-      <p:sp>
-        <p:nvSpPr>
-          <p:cNvPr id="15" name="Shape 13"/>
-          <p:cNvSpPr/>
-          <p:nvPr/>
-        </p:nvSpPr>
-        <p:spPr>
-          <a:xfrm>
-            <a:off x="8202168" y="3721608"/>
-            <a:ext cx="2340864" cy="0"/>
-          </a:xfrm>
-          <a:prstGeom prst="line">
-            <a:avLst/>
-          </a:prstGeom>
-          <a:noFill/>
-          <a:ln w="19050">
-            <a:solidFill>
-              <a:srgbClr val="0068B7"/>
-            </a:solidFill>
-            <a:prstDash val="solid"/>
-          </a:ln>
-        </p:spPr>
+          <p:cNvPr id="14" name="Text 12"/>
+          <p:cNvSpPr/>
+          <p:nvPr/>
+        </p:nvSpPr>
+        <p:spPr>
+          <a:xfrm>
+            <a:off x="7799832" y="2935224"/>
+            <a:ext cx="3145536" cy="256032"/>
+          </a:xfrm>
+          <a:prstGeom prst="rect">
+            <a:avLst/>
+          </a:prstGeom>
+          <a:noFill/>
+          <a:ln/>
+        </p:spPr>
+        <p:txBody>
+          <a:bodyPr wrap="square" lIns="0" tIns="0" rIns="0" bIns="0" rtlCol="0" anchor="ctr"/>
+          <a:lstStyle/>
+          <a:p>
+            <a:pPr indent="0" marL="0">
+              <a:buNone/>
+            </a:pPr>
+            <a:r>
+              <a:rPr lang="en-US" sz="1300" b="1" dirty="0">
+                <a:solidFill>
+                  <a:srgbClr val="0068B7"/>
+                </a:solidFill>
+                <a:latin typeface="Aptos" pitchFamily="34" charset="0"/>
+                <a:ea typeface="Aptos" pitchFamily="34" charset="-122"/>
+                <a:cs typeface="Aptos" pitchFamily="34" charset="-120"/>
+              </a:rPr>
+              <a:t>Concept checkpoints</a:t>
+            </a:r>
+            <a:endParaRPr lang="en-US" sz="1300" dirty="0"/>
+          </a:p>
+        </p:txBody>
+      </p:sp>
+      <p:sp>
+        <p:nvSpPr>
+          <p:cNvPr id="15" name="Text 13"/>
+          <p:cNvSpPr/>
+          <p:nvPr/>
+        </p:nvSpPr>
+        <p:spPr>
+          <a:xfrm>
+            <a:off x="7818120" y="3300984"/>
+            <a:ext cx="3090672" cy="877824"/>
+          </a:xfrm>
+          <a:prstGeom prst="rect">
+            <a:avLst/>
+          </a:prstGeom>
+          <a:noFill/>
+          <a:ln/>
+        </p:spPr>
+        <p:txBody>
+          <a:bodyPr wrap="square" lIns="254" tIns="254" rIns="254" bIns="254" rtlCol="0" anchor="t">
+            <a:normAutofit/>
+          </a:bodyPr>
+          <a:lstStyle/>
+          <a:p>
+            <a:r>
+              <a:rPr lang="en-US" sz="1380" dirty="0">
+                <a:solidFill>
+                  <a:srgbClr val="17364A"/>
+                </a:solidFill>
+                <a:latin typeface="Aptos" pitchFamily="34" charset="0"/>
+                <a:ea typeface="Aptos" pitchFamily="34" charset="-122"/>
+                <a:cs typeface="Aptos" pitchFamily="34" charset="-120"/>
+              </a:rPr>
+              <a:t>AI for Surveillance Signal Review and Epidemiologic Judgment matters because AI adoption.</a:t>
+            </a:r>
+            <a:endParaRPr lang="en-US" sz="1380" dirty="0"/>
+          </a:p>
+          <a:p>
+            <a:r>
+              <a:rPr lang="en-US" sz="1380" dirty="0">
+                <a:solidFill>
+                  <a:srgbClr val="17364A"/>
+                </a:solidFill>
+                <a:latin typeface="Aptos" pitchFamily="34" charset="0"/>
+                <a:ea typeface="Aptos" pitchFamily="34" charset="-122"/>
+                <a:cs typeface="Aptos" pitchFamily="34" charset="-120"/>
+              </a:rPr>
+              <a:t>Without a structured approach, staff may rely on informal practices, vendor assurances, or.</a:t>
+            </a:r>
+            <a:endParaRPr lang="en-US" sz="1380" dirty="0"/>
+          </a:p>
+          <a:p>
+            <a:r>
+              <a:rPr lang="en-US" sz="1380" dirty="0">
+                <a:solidFill>
+                  <a:srgbClr val="17364A"/>
+                </a:solidFill>
+                <a:latin typeface="Aptos" pitchFamily="34" charset="0"/>
+                <a:ea typeface="Aptos" pitchFamily="34" charset="-122"/>
+                <a:cs typeface="Aptos" pitchFamily="34" charset="-120"/>
+              </a:rPr>
+              <a:t>Public health agencies operate under legal authorities, public accountability, resource.</a:t>
+            </a:r>
+            <a:endParaRPr lang="en-US" sz="1380" dirty="0"/>
+          </a:p>
+        </p:txBody>
       </p:sp>
       <p:sp>
         <p:nvSpPr>
           <p:cNvPr id="16" name="Shape 14"/>
-          <p:cNvSpPr/>
-          <p:nvPr/>
-        </p:nvSpPr>
-        <p:spPr>
-          <a:xfrm>
-            <a:off x="9198864" y="4206240"/>
-            <a:ext cx="347472" cy="347472"/>
-          </a:xfrm>
-          <a:prstGeom prst="ellipse">
-            <a:avLst/>
-          </a:prstGeom>
-          <a:solidFill>
-            <a:srgbClr val="2F8A28"/>
-          </a:solidFill>
-          <a:ln w="12700">
-            <a:solidFill>
-              <a:srgbClr val="2F8A28"/>
-            </a:solidFill>
-            <a:prstDash val="solid"/>
-          </a:ln>
-        </p:spPr>
-      </p:sp>
-      <p:sp>
-        <p:nvSpPr>
-          <p:cNvPr id="17" name="Text 15"/>
-          <p:cNvSpPr/>
-          <p:nvPr/>
-        </p:nvSpPr>
-        <p:spPr>
-          <a:xfrm>
-            <a:off x="7909560" y="3977640"/>
-            <a:ext cx="2926080" cy="182880"/>
-          </a:xfrm>
-          <a:prstGeom prst="rect">
-            <a:avLst/>
-          </a:prstGeom>
-          <a:noFill/>
-          <a:ln/>
-        </p:spPr>
-        <p:txBody>
-          <a:bodyPr wrap="square" lIns="0" tIns="0" rIns="0" bIns="0" rtlCol="0" anchor="ctr"/>
-          <a:lstStyle/>
-          <a:p>
-            <a:pPr algn="ctr" indent="0" marL="0">
-              <a:buNone/>
-            </a:pPr>
-            <a:r>
-              <a:rPr lang="en-US" sz="1000" dirty="0">
-                <a:solidFill>
-                  <a:srgbClr val="003A63"/>
-                </a:solidFill>
-                <a:latin typeface="Aptos" pitchFamily="34" charset="0"/>
-                <a:ea typeface="Aptos" pitchFamily="34" charset="-122"/>
-                <a:cs typeface="Aptos" pitchFamily="34" charset="-120"/>
-              </a:rPr>
-              <a:t>Concept to action</a:t>
-            </a:r>
-            <a:endParaRPr lang="en-US" sz="1000" dirty="0"/>
-          </a:p>
-        </p:txBody>
-      </p:sp>
-      <p:sp>
-        <p:nvSpPr>
-          <p:cNvPr id="18" name="Shape 16"/>
           <p:cNvSpPr/>
           <p:nvPr/>
         </p:nvSpPr>
@@ -16201,7 +15549,7 @@
       </p:sp>
       <p:sp>
         <p:nvSpPr>
-          <p:cNvPr id="19" name="Text 17"/>
+          <p:cNvPr id="17" name="Text 15"/>
           <p:cNvSpPr/>
           <p:nvPr/>
         </p:nvSpPr>
@@ -16240,7 +15588,7 @@
       </p:sp>
       <p:sp>
         <p:nvSpPr>
-          <p:cNvPr id="20" name="Text 18"/>
+          <p:cNvPr id="18" name="Text 16"/>
           <p:cNvSpPr/>
           <p:nvPr/>
         </p:nvSpPr>
@@ -16748,13 +16096,11 @@
             </a:avLst>
           </a:prstGeom>
           <a:solidFill>
-            <a:srgbClr val="FFFFFF">
-              <a:alpha val="88000"/>
-            </a:srgbClr>
+            <a:srgbClr val="FFFFFF"/>
           </a:solidFill>
           <a:ln w="12700">
             <a:solidFill>
-              <a:srgbClr val="D6E8F2"/>
+              <a:srgbClr val="B9D7E6"/>
             </a:solidFill>
             <a:prstDash val="solid"/>
           </a:ln>
@@ -16762,119 +16108,112 @@
       </p:sp>
       <p:sp>
         <p:nvSpPr>
-          <p:cNvPr id="14" name="Shape 12"/>
-          <p:cNvSpPr/>
-          <p:nvPr/>
-        </p:nvSpPr>
-        <p:spPr>
-          <a:xfrm>
-            <a:off x="8074152" y="3291840"/>
-            <a:ext cx="2596896" cy="749808"/>
-          </a:xfrm>
-          <a:prstGeom prst="rect">
-            <a:avLst/>
-          </a:prstGeom>
-          <a:solidFill>
-            <a:srgbClr val="EAF6F8"/>
-          </a:solidFill>
-          <a:ln w="12700">
-            <a:solidFill>
-              <a:srgbClr val="8ABBD8"/>
-            </a:solidFill>
-            <a:prstDash val="solid"/>
-          </a:ln>
-        </p:spPr>
-      </p:sp>
-      <p:sp>
-        <p:nvSpPr>
-          <p:cNvPr id="15" name="Shape 13"/>
-          <p:cNvSpPr/>
-          <p:nvPr/>
-        </p:nvSpPr>
-        <p:spPr>
-          <a:xfrm>
-            <a:off x="8202168" y="3721608"/>
-            <a:ext cx="2340864" cy="0"/>
-          </a:xfrm>
-          <a:prstGeom prst="line">
-            <a:avLst/>
-          </a:prstGeom>
-          <a:noFill/>
-          <a:ln w="19050">
-            <a:solidFill>
-              <a:srgbClr val="0068B7"/>
-            </a:solidFill>
-            <a:prstDash val="solid"/>
-          </a:ln>
-        </p:spPr>
+          <p:cNvPr id="14" name="Text 12"/>
+          <p:cNvSpPr/>
+          <p:nvPr/>
+        </p:nvSpPr>
+        <p:spPr>
+          <a:xfrm>
+            <a:off x="7799832" y="2935224"/>
+            <a:ext cx="3145536" cy="256032"/>
+          </a:xfrm>
+          <a:prstGeom prst="rect">
+            <a:avLst/>
+          </a:prstGeom>
+          <a:noFill/>
+          <a:ln/>
+        </p:spPr>
+        <p:txBody>
+          <a:bodyPr wrap="square" lIns="0" tIns="0" rIns="0" bIns="0" rtlCol="0" anchor="ctr"/>
+          <a:lstStyle/>
+          <a:p>
+            <a:pPr indent="0" marL="0">
+              <a:buNone/>
+            </a:pPr>
+            <a:r>
+              <a:rPr lang="en-US" sz="1300" b="1" dirty="0">
+                <a:solidFill>
+                  <a:srgbClr val="0068B7"/>
+                </a:solidFill>
+                <a:latin typeface="Aptos" pitchFamily="34" charset="0"/>
+                <a:ea typeface="Aptos" pitchFamily="34" charset="-122"/>
+                <a:cs typeface="Aptos" pitchFamily="34" charset="-120"/>
+              </a:rPr>
+              <a:t>Concept checkpoints</a:t>
+            </a:r>
+            <a:endParaRPr lang="en-US" sz="1300" dirty="0"/>
+          </a:p>
+        </p:txBody>
+      </p:sp>
+      <p:sp>
+        <p:nvSpPr>
+          <p:cNvPr id="15" name="Text 13"/>
+          <p:cNvSpPr/>
+          <p:nvPr/>
+        </p:nvSpPr>
+        <p:spPr>
+          <a:xfrm>
+            <a:off x="7818120" y="3300984"/>
+            <a:ext cx="3090672" cy="877824"/>
+          </a:xfrm>
+          <a:prstGeom prst="rect">
+            <a:avLst/>
+          </a:prstGeom>
+          <a:noFill/>
+          <a:ln/>
+        </p:spPr>
+        <p:txBody>
+          <a:bodyPr wrap="square" lIns="254" tIns="254" rIns="254" bIns="254" rtlCol="0" anchor="t">
+            <a:normAutofit/>
+          </a:bodyPr>
+          <a:lstStyle/>
+          <a:p>
+            <a:r>
+              <a:rPr lang="en-US" sz="1380" dirty="0">
+                <a:solidFill>
+                  <a:srgbClr val="17364A"/>
+                </a:solidFill>
+                <a:latin typeface="Aptos" pitchFamily="34" charset="0"/>
+                <a:ea typeface="Aptos" pitchFamily="34" charset="-122"/>
+                <a:cs typeface="Aptos" pitchFamily="34" charset="-120"/>
+              </a:rPr>
+              <a:t>A public health agency is preparing to use AI in a workflow related to using AI to support.</a:t>
+            </a:r>
+            <a:endParaRPr lang="en-US" sz="1380" dirty="0"/>
+          </a:p>
+          <a:p>
+            <a:r>
+              <a:rPr lang="en-US" sz="1380" dirty="0">
+                <a:solidFill>
+                  <a:srgbClr val="17364A"/>
+                </a:solidFill>
+                <a:latin typeface="Aptos" pitchFamily="34" charset="0"/>
+                <a:ea typeface="Aptos" pitchFamily="34" charset="-122"/>
+                <a:cs typeface="Aptos" pitchFamily="34" charset="-120"/>
+              </a:rPr>
+              <a:t>The project team initially treats the tool as a helpful efficiency aid, but governance.</a:t>
+            </a:r>
+            <a:endParaRPr lang="en-US" sz="1380" dirty="0"/>
+          </a:p>
+          <a:p>
+            <a:r>
+              <a:rPr lang="en-US" sz="1380" dirty="0">
+                <a:solidFill>
+                  <a:srgbClr val="17364A"/>
+                </a:solidFill>
+                <a:latin typeface="Aptos" pitchFamily="34" charset="0"/>
+                <a:ea typeface="Aptos" pitchFamily="34" charset="-122"/>
+                <a:cs typeface="Aptos" pitchFamily="34" charset="-120"/>
+              </a:rPr>
+              <a:t>The agency responds by creating a clear artifact that defines intended use, prohibited.</a:t>
+            </a:r>
+            <a:endParaRPr lang="en-US" sz="1380" dirty="0"/>
+          </a:p>
+        </p:txBody>
       </p:sp>
       <p:sp>
         <p:nvSpPr>
           <p:cNvPr id="16" name="Shape 14"/>
-          <p:cNvSpPr/>
-          <p:nvPr/>
-        </p:nvSpPr>
-        <p:spPr>
-          <a:xfrm>
-            <a:off x="9198864" y="4206240"/>
-            <a:ext cx="347472" cy="347472"/>
-          </a:xfrm>
-          <a:prstGeom prst="ellipse">
-            <a:avLst/>
-          </a:prstGeom>
-          <a:solidFill>
-            <a:srgbClr val="2F8A28"/>
-          </a:solidFill>
-          <a:ln w="12700">
-            <a:solidFill>
-              <a:srgbClr val="2F8A28"/>
-            </a:solidFill>
-            <a:prstDash val="solid"/>
-          </a:ln>
-        </p:spPr>
-      </p:sp>
-      <p:sp>
-        <p:nvSpPr>
-          <p:cNvPr id="17" name="Text 15"/>
-          <p:cNvSpPr/>
-          <p:nvPr/>
-        </p:nvSpPr>
-        <p:spPr>
-          <a:xfrm>
-            <a:off x="7909560" y="3977640"/>
-            <a:ext cx="2926080" cy="182880"/>
-          </a:xfrm>
-          <a:prstGeom prst="rect">
-            <a:avLst/>
-          </a:prstGeom>
-          <a:noFill/>
-          <a:ln/>
-        </p:spPr>
-        <p:txBody>
-          <a:bodyPr wrap="square" lIns="0" tIns="0" rIns="0" bIns="0" rtlCol="0" anchor="ctr"/>
-          <a:lstStyle/>
-          <a:p>
-            <a:pPr algn="ctr" indent="0" marL="0">
-              <a:buNone/>
-            </a:pPr>
-            <a:r>
-              <a:rPr lang="en-US" sz="1000" dirty="0">
-                <a:solidFill>
-                  <a:srgbClr val="003A63"/>
-                </a:solidFill>
-                <a:latin typeface="Aptos" pitchFamily="34" charset="0"/>
-                <a:ea typeface="Aptos" pitchFamily="34" charset="-122"/>
-                <a:cs typeface="Aptos" pitchFamily="34" charset="-120"/>
-              </a:rPr>
-              <a:t>Concept to action</a:t>
-            </a:r>
-            <a:endParaRPr lang="en-US" sz="1000" dirty="0"/>
-          </a:p>
-        </p:txBody>
-      </p:sp>
-      <p:sp>
-        <p:nvSpPr>
-          <p:cNvPr id="18" name="Shape 16"/>
           <p:cNvSpPr/>
           <p:nvPr/>
         </p:nvSpPr>
@@ -16901,7 +16240,7 @@
       </p:sp>
       <p:sp>
         <p:nvSpPr>
-          <p:cNvPr id="19" name="Text 17"/>
+          <p:cNvPr id="17" name="Text 15"/>
           <p:cNvSpPr/>
           <p:nvPr/>
         </p:nvSpPr>
@@ -16940,7 +16279,7 @@
       </p:sp>
       <p:sp>
         <p:nvSpPr>
-          <p:cNvPr id="20" name="Text 18"/>
+          <p:cNvPr id="18" name="Text 16"/>
           <p:cNvSpPr/>
           <p:nvPr/>
         </p:nvSpPr>

--- a/downloads/presentations/modules/epi-310.pptx
+++ b/downloads/presentations/modules/epi-310.pptx
@@ -3264,49 +3264,58 @@
           <a:ln/>
         </p:spPr>
         <p:txBody>
-          <a:bodyPr wrap="square" lIns="635" tIns="635" rIns="635" bIns="635" rtlCol="0" anchor="t">
+          <a:bodyPr wrap="square" lIns="1016" tIns="1016" rIns="1016" bIns="1016" rtlCol="0" anchor="t">
             <a:normAutofit/>
           </a:bodyPr>
           <a:lstStyle/>
           <a:p>
+            <a:pPr indent="0" marL="0">
+              <a:buNone/>
+            </a:pPr>
             <a:r>
               <a:rPr lang="en-US" sz="2100" dirty="0">
                 <a:solidFill>
-                  <a:srgbClr val="17364A"/>
-                </a:solidFill>
-                <a:latin typeface="Aptos" pitchFamily="34" charset="0"/>
-                <a:ea typeface="Aptos" pitchFamily="34" charset="-122"/>
-                <a:cs typeface="Aptos" pitchFamily="34" charset="-120"/>
-              </a:rPr>
-              <a:t>The first step in this topic is to define the decision or workflow clearly.</a:t>
+                  <a:srgbClr val="003A63"/>
+                </a:solidFill>
+                <a:latin typeface="Aptos" pitchFamily="34" charset="0"/>
+                <a:ea typeface="Aptos" pitchFamily="34" charset="-122"/>
+                <a:cs typeface="Aptos" pitchFamily="34" charset="-120"/>
+              </a:rPr>
+              <a:t>• The first step in this topic is to define the decision or workflow clearly.</a:t>
             </a:r>
             <a:endParaRPr lang="en-US" sz="2100" dirty="0"/>
           </a:p>
           <a:p>
+            <a:pPr indent="0" marL="0">
+              <a:buNone/>
+            </a:pPr>
             <a:r>
               <a:rPr lang="en-US" sz="2100" dirty="0">
                 <a:solidFill>
-                  <a:srgbClr val="17364A"/>
-                </a:solidFill>
-                <a:latin typeface="Aptos" pitchFamily="34" charset="0"/>
-                <a:ea typeface="Aptos" pitchFamily="34" charset="-122"/>
-                <a:cs typeface="Aptos" pitchFamily="34" charset="-120"/>
-              </a:rPr>
-              <a:t>Staff should identify who is affected, what data are used, what AI output is produced, who reviews the.</a:t>
+                  <a:srgbClr val="003A63"/>
+                </a:solidFill>
+                <a:latin typeface="Aptos" pitchFamily="34" charset="0"/>
+                <a:ea typeface="Aptos" pitchFamily="34" charset="-122"/>
+                <a:cs typeface="Aptos" pitchFamily="34" charset="-120"/>
+              </a:rPr>
+              <a:t>• Staff should identify who is affected, what data are used, what AI output is produced, who.</a:t>
             </a:r>
             <a:endParaRPr lang="en-US" sz="2100" dirty="0"/>
           </a:p>
           <a:p>
+            <a:pPr indent="0" marL="0">
+              <a:buNone/>
+            </a:pPr>
             <a:r>
               <a:rPr lang="en-US" sz="2100" dirty="0">
                 <a:solidFill>
-                  <a:srgbClr val="17364A"/>
-                </a:solidFill>
-                <a:latin typeface="Aptos" pitchFamily="34" charset="0"/>
-                <a:ea typeface="Aptos" pitchFamily="34" charset="-122"/>
-                <a:cs typeface="Aptos" pitchFamily="34" charset="-120"/>
-              </a:rPr>
-              <a:t>This prevents the module from becoming abstract and anchors the work in public health practice.</a:t>
+                  <a:srgbClr val="003A63"/>
+                </a:solidFill>
+                <a:latin typeface="Aptos" pitchFamily="34" charset="0"/>
+                <a:ea typeface="Aptos" pitchFamily="34" charset="-122"/>
+                <a:cs typeface="Aptos" pitchFamily="34" charset="-120"/>
+              </a:rPr>
+              <a:t>• This prevents the module from becoming abstract and anchors the work in public health practice.</a:t>
             </a:r>
             <a:endParaRPr lang="en-US" sz="2100" dirty="0"/>
           </a:p>
@@ -3386,17 +3395,17 @@
         </p:nvSpPr>
         <p:spPr>
           <a:xfrm>
-            <a:off x="7799832" y="1828800"/>
-            <a:ext cx="3145536" cy="685800"/>
-          </a:xfrm>
-          <a:prstGeom prst="rect">
-            <a:avLst/>
-          </a:prstGeom>
-          <a:noFill/>
-          <a:ln/>
-        </p:spPr>
-        <p:txBody>
-          <a:bodyPr wrap="square" lIns="0" tIns="0" rIns="0" bIns="0" rtlCol="0" anchor="t">
+            <a:off x="7799832" y="1801368"/>
+            <a:ext cx="3145536" cy="758952"/>
+          </a:xfrm>
+          <a:prstGeom prst="rect">
+            <a:avLst/>
+          </a:prstGeom>
+          <a:noFill/>
+          <a:ln/>
+        </p:spPr>
+        <p:txBody>
+          <a:bodyPr wrap="square" lIns="254" tIns="254" rIns="254" bIns="254" rtlCol="0" anchor="t">
             <a:normAutofit/>
           </a:bodyPr>
           <a:lstStyle/>
@@ -3405,7 +3414,7 @@
               <a:buNone/>
             </a:pPr>
             <a:r>
-              <a:rPr lang="en-US" sz="1550" dirty="0">
+              <a:rPr lang="en-US" sz="1320" dirty="0">
                 <a:solidFill>
                   <a:srgbClr val="17364A"/>
                 </a:solidFill>
@@ -3415,7 +3424,7 @@
               </a:rPr>
               <a:t>The first step in this topic is to define the decision or workflow clearly.</a:t>
             </a:r>
-            <a:endParaRPr lang="en-US" sz="1550" dirty="0"/>
+            <a:endParaRPr lang="en-US" sz="1320" dirty="0"/>
           </a:p>
         </p:txBody>
       </p:sp>
@@ -3503,13 +3512,16 @@
           <a:ln/>
         </p:spPr>
         <p:txBody>
-          <a:bodyPr wrap="square" lIns="254" tIns="254" rIns="254" bIns="254" rtlCol="0" anchor="t">
+          <a:bodyPr wrap="square" lIns="508" tIns="508" rIns="508" bIns="508" rtlCol="0" anchor="t">
             <a:normAutofit/>
           </a:bodyPr>
           <a:lstStyle/>
           <a:p>
-            <a:r>
-              <a:rPr lang="en-US" sz="1380" dirty="0">
+            <a:pPr indent="0" marL="0">
+              <a:buNone/>
+            </a:pPr>
+            <a:r>
+              <a:rPr lang="en-US" sz="1220" dirty="0">
                 <a:solidFill>
                   <a:srgbClr val="17364A"/>
                 </a:solidFill>
@@ -3517,13 +3529,16 @@
                 <a:ea typeface="Aptos" pitchFamily="34" charset="-122"/>
                 <a:cs typeface="Aptos" pitchFamily="34" charset="-120"/>
               </a:rPr>
-              <a:t>Staff should identify who is affected, what data are used, what AI output is produced, who.</a:t>
-            </a:r>
-            <a:endParaRPr lang="en-US" sz="1380" dirty="0"/>
-          </a:p>
-          <a:p>
-            <a:r>
-              <a:rPr lang="en-US" sz="1380" dirty="0">
+              <a:t>Staff should identify who is affected, what data are used, what AI.</a:t>
+            </a:r>
+            <a:endParaRPr lang="en-US" sz="1220" dirty="0"/>
+          </a:p>
+          <a:p>
+            <a:pPr indent="0" marL="0">
+              <a:buNone/>
+            </a:pPr>
+            <a:r>
+              <a:rPr lang="en-US" sz="1220" dirty="0">
                 <a:solidFill>
                   <a:srgbClr val="17364A"/>
                 </a:solidFill>
@@ -3533,11 +3548,14 @@
               </a:rPr>
               <a:t>The second step is to assign responsibilities.</a:t>
             </a:r>
-            <a:endParaRPr lang="en-US" sz="1380" dirty="0"/>
-          </a:p>
-          <a:p>
-            <a:r>
-              <a:rPr lang="en-US" sz="1380" dirty="0">
+            <a:endParaRPr lang="en-US" sz="1220" dirty="0"/>
+          </a:p>
+          <a:p>
+            <a:pPr indent="0" marL="0">
+              <a:buNone/>
+            </a:pPr>
+            <a:r>
+              <a:rPr lang="en-US" sz="1220" dirty="0">
                 <a:solidFill>
                   <a:srgbClr val="17364A"/>
                 </a:solidFill>
@@ -3545,9 +3563,9 @@
                 <a:ea typeface="Aptos" pitchFamily="34" charset="-122"/>
                 <a:cs typeface="Aptos" pitchFamily="34" charset="-120"/>
               </a:rPr>
-              <a:t>AI-supported workflows often cross program, IT, legal, privacy, communications,.</a:t>
-            </a:r>
-            <a:endParaRPr lang="en-US" sz="1380" dirty="0"/>
+              <a:t>AI-supported workflows often cross program, IT, legal, privacy,.</a:t>
+            </a:r>
+            <a:endParaRPr lang="en-US" sz="1220" dirty="0"/>
           </a:p>
         </p:txBody>
       </p:sp>
@@ -3625,17 +3643,17 @@
         </p:nvSpPr>
         <p:spPr>
           <a:xfrm>
-            <a:off x="7799832" y="5001768"/>
-            <a:ext cx="3145536" cy="502920"/>
-          </a:xfrm>
-          <a:prstGeom prst="rect">
-            <a:avLst/>
-          </a:prstGeom>
-          <a:noFill/>
-          <a:ln/>
-        </p:spPr>
-        <p:txBody>
-          <a:bodyPr wrap="square" lIns="0" tIns="0" rIns="0" bIns="0" rtlCol="0" anchor="t">
+            <a:off x="7799832" y="4974336"/>
+            <a:ext cx="3145536" cy="576072"/>
+          </a:xfrm>
+          <a:prstGeom prst="rect">
+            <a:avLst/>
+          </a:prstGeom>
+          <a:noFill/>
+          <a:ln/>
+        </p:spPr>
+        <p:txBody>
+          <a:bodyPr wrap="square" lIns="254" tIns="254" rIns="254" bIns="254" rtlCol="0" anchor="t">
             <a:normAutofit/>
           </a:bodyPr>
           <a:lstStyle/>
@@ -3644,7 +3662,7 @@
               <a:buNone/>
             </a:pPr>
             <a:r>
-              <a:rPr lang="en-US" sz="1550" dirty="0">
+              <a:rPr lang="en-US" sz="1320" dirty="0">
                 <a:solidFill>
                   <a:srgbClr val="17364A"/>
                 </a:solidFill>
@@ -3652,9 +3670,9 @@
                 <a:ea typeface="Aptos" pitchFamily="34" charset="-122"/>
                 <a:cs typeface="Aptos" pitchFamily="34" charset="-120"/>
               </a:rPr>
-              <a:t>Connect the concept to public health purpose, responsible use, required safeguards, documentation, and the next action a department should take.</a:t>
-            </a:r>
-            <a:endParaRPr lang="en-US" sz="1550" dirty="0"/>
+              <a:t>Connect the concept to public health purpose, responsible use, required safeguards, documentation, and the next action a.</a:t>
+            </a:r>
+            <a:endParaRPr lang="en-US" sz="1320" dirty="0"/>
           </a:p>
         </p:txBody>
       </p:sp>
@@ -3955,49 +3973,58 @@
           <a:ln/>
         </p:spPr>
         <p:txBody>
-          <a:bodyPr wrap="square" lIns="635" tIns="635" rIns="635" bIns="635" rtlCol="0" anchor="t">
+          <a:bodyPr wrap="square" lIns="1016" tIns="1016" rIns="1016" bIns="1016" rtlCol="0" anchor="t">
             <a:normAutofit/>
           </a:bodyPr>
           <a:lstStyle/>
           <a:p>
+            <a:pPr indent="0" marL="0">
+              <a:buNone/>
+            </a:pPr>
             <a:r>
               <a:rPr lang="en-US" sz="2100" dirty="0">
                 <a:solidFill>
-                  <a:srgbClr val="17364A"/>
-                </a:solidFill>
-                <a:latin typeface="Aptos" pitchFamily="34" charset="0"/>
-                <a:ea typeface="Aptos" pitchFamily="34" charset="-122"/>
-                <a:cs typeface="Aptos" pitchFamily="34" charset="-120"/>
-              </a:rPr>
-              <a:t>A common failure mode is treating the topic as a one-time checklist.</a:t>
+                  <a:srgbClr val="003A63"/>
+                </a:solidFill>
+                <a:latin typeface="Aptos" pitchFamily="34" charset="0"/>
+                <a:ea typeface="Aptos" pitchFamily="34" charset="-122"/>
+                <a:cs typeface="Aptos" pitchFamily="34" charset="-120"/>
+              </a:rPr>
+              <a:t>• A common failure mode is treating the topic as a one-time checklist.</a:t>
             </a:r>
             <a:endParaRPr lang="en-US" sz="2100" dirty="0"/>
           </a:p>
           <a:p>
+            <a:pPr indent="0" marL="0">
+              <a:buNone/>
+            </a:pPr>
             <a:r>
               <a:rPr lang="en-US" sz="2100" dirty="0">
                 <a:solidFill>
-                  <a:srgbClr val="17364A"/>
-                </a:solidFill>
-                <a:latin typeface="Aptos" pitchFamily="34" charset="0"/>
-                <a:ea typeface="Aptos" pitchFamily="34" charset="-122"/>
-                <a:cs typeface="Aptos" pitchFamily="34" charset="-120"/>
-              </a:rPr>
-              <a:t>AI risks can change when data sources, models, vendors, policies, users, or public expectations change.</a:t>
+                  <a:srgbClr val="003A63"/>
+                </a:solidFill>
+                <a:latin typeface="Aptos" pitchFamily="34" charset="0"/>
+                <a:ea typeface="Aptos" pitchFamily="34" charset="-122"/>
+                <a:cs typeface="Aptos" pitchFamily="34" charset="-120"/>
+              </a:rPr>
+              <a:t>• AI risks can change when data sources, models, vendors, policies, users, or public.</a:t>
             </a:r>
             <a:endParaRPr lang="en-US" sz="2100" dirty="0"/>
           </a:p>
           <a:p>
+            <a:pPr indent="0" marL="0">
+              <a:buNone/>
+            </a:pPr>
             <a:r>
               <a:rPr lang="en-US" sz="2100" dirty="0">
                 <a:solidFill>
-                  <a:srgbClr val="17364A"/>
-                </a:solidFill>
-                <a:latin typeface="Aptos" pitchFamily="34" charset="0"/>
-                <a:ea typeface="Aptos" pitchFamily="34" charset="-122"/>
-                <a:cs typeface="Aptos" pitchFamily="34" charset="-120"/>
-              </a:rPr>
-              <a:t>A guardrail is to define review intervals and change triggers.</a:t>
+                  <a:srgbClr val="003A63"/>
+                </a:solidFill>
+                <a:latin typeface="Aptos" pitchFamily="34" charset="0"/>
+                <a:ea typeface="Aptos" pitchFamily="34" charset="-122"/>
+                <a:cs typeface="Aptos" pitchFamily="34" charset="-120"/>
+              </a:rPr>
+              <a:t>• A guardrail is to define review intervals and change triggers.</a:t>
             </a:r>
             <a:endParaRPr lang="en-US" sz="2100" dirty="0"/>
           </a:p>
@@ -4077,17 +4104,17 @@
         </p:nvSpPr>
         <p:spPr>
           <a:xfrm>
-            <a:off x="7799832" y="1828800"/>
-            <a:ext cx="3145536" cy="685800"/>
-          </a:xfrm>
-          <a:prstGeom prst="rect">
-            <a:avLst/>
-          </a:prstGeom>
-          <a:noFill/>
-          <a:ln/>
-        </p:spPr>
-        <p:txBody>
-          <a:bodyPr wrap="square" lIns="0" tIns="0" rIns="0" bIns="0" rtlCol="0" anchor="t">
+            <a:off x="7799832" y="1801368"/>
+            <a:ext cx="3145536" cy="758952"/>
+          </a:xfrm>
+          <a:prstGeom prst="rect">
+            <a:avLst/>
+          </a:prstGeom>
+          <a:noFill/>
+          <a:ln/>
+        </p:spPr>
+        <p:txBody>
+          <a:bodyPr wrap="square" lIns="254" tIns="254" rIns="254" bIns="254" rtlCol="0" anchor="t">
             <a:normAutofit/>
           </a:bodyPr>
           <a:lstStyle/>
@@ -4096,7 +4123,7 @@
               <a:buNone/>
             </a:pPr>
             <a:r>
-              <a:rPr lang="en-US" sz="1550" dirty="0">
+              <a:rPr lang="en-US" sz="1320" dirty="0">
                 <a:solidFill>
                   <a:srgbClr val="17364A"/>
                 </a:solidFill>
@@ -4106,7 +4133,7 @@
               </a:rPr>
               <a:t>A common failure mode is treating the topic as a one-time checklist.</a:t>
             </a:r>
-            <a:endParaRPr lang="en-US" sz="1550" dirty="0"/>
+            <a:endParaRPr lang="en-US" sz="1320" dirty="0"/>
           </a:p>
         </p:txBody>
       </p:sp>
@@ -4194,13 +4221,16 @@
           <a:ln/>
         </p:spPr>
         <p:txBody>
-          <a:bodyPr wrap="square" lIns="254" tIns="254" rIns="254" bIns="254" rtlCol="0" anchor="t">
+          <a:bodyPr wrap="square" lIns="508" tIns="508" rIns="508" bIns="508" rtlCol="0" anchor="t">
             <a:normAutofit/>
           </a:bodyPr>
           <a:lstStyle/>
           <a:p>
-            <a:r>
-              <a:rPr lang="en-US" sz="1380" dirty="0">
+            <a:pPr indent="0" marL="0">
+              <a:buNone/>
+            </a:pPr>
+            <a:r>
+              <a:rPr lang="en-US" sz="1220" dirty="0">
                 <a:solidFill>
                   <a:srgbClr val="17364A"/>
                 </a:solidFill>
@@ -4210,11 +4240,14 @@
               </a:rPr>
               <a:t>Another failure mode is unclear ownership.</a:t>
             </a:r>
-            <a:endParaRPr lang="en-US" sz="1380" dirty="0"/>
-          </a:p>
-          <a:p>
-            <a:r>
-              <a:rPr lang="en-US" sz="1380" dirty="0">
+            <a:endParaRPr lang="en-US" sz="1220" dirty="0"/>
+          </a:p>
+          <a:p>
+            <a:pPr indent="0" marL="0">
+              <a:buNone/>
+            </a:pPr>
+            <a:r>
+              <a:rPr lang="en-US" sz="1220" dirty="0">
                 <a:solidFill>
                   <a:srgbClr val="17364A"/>
                 </a:solidFill>
@@ -4222,13 +4255,16 @@
                 <a:ea typeface="Aptos" pitchFamily="34" charset="-122"/>
                 <a:cs typeface="Aptos" pitchFamily="34" charset="-120"/>
               </a:rPr>
-              <a:t>When everyone is responsible in general, no one may be responsible in practice.</a:t>
-            </a:r>
-            <a:endParaRPr lang="en-US" sz="1380" dirty="0"/>
-          </a:p>
-          <a:p>
-            <a:r>
-              <a:rPr lang="en-US" sz="1380" dirty="0">
+              <a:t>When everyone is responsible in general, no one may be responsible.</a:t>
+            </a:r>
+            <a:endParaRPr lang="en-US" sz="1220" dirty="0"/>
+          </a:p>
+          <a:p>
+            <a:pPr indent="0" marL="0">
+              <a:buNone/>
+            </a:pPr>
+            <a:r>
+              <a:rPr lang="en-US" sz="1220" dirty="0">
                 <a:solidFill>
                   <a:srgbClr val="17364A"/>
                 </a:solidFill>
@@ -4236,9 +4272,9 @@
                 <a:ea typeface="Aptos" pitchFamily="34" charset="-122"/>
                 <a:cs typeface="Aptos" pitchFamily="34" charset="-120"/>
               </a:rPr>
-              <a:t>A guardrail is to assign an accountability owner and name escalation pathways.</a:t>
-            </a:r>
-            <a:endParaRPr lang="en-US" sz="1380" dirty="0"/>
+              <a:t>A guardrail is to assign an accountability owner and name.</a:t>
+            </a:r>
+            <a:endParaRPr lang="en-US" sz="1220" dirty="0"/>
           </a:p>
         </p:txBody>
       </p:sp>
@@ -4316,17 +4352,17 @@
         </p:nvSpPr>
         <p:spPr>
           <a:xfrm>
-            <a:off x="7799832" y="5001768"/>
-            <a:ext cx="3145536" cy="502920"/>
-          </a:xfrm>
-          <a:prstGeom prst="rect">
-            <a:avLst/>
-          </a:prstGeom>
-          <a:noFill/>
-          <a:ln/>
-        </p:spPr>
-        <p:txBody>
-          <a:bodyPr wrap="square" lIns="0" tIns="0" rIns="0" bIns="0" rtlCol="0" anchor="t">
+            <a:off x="7799832" y="4974336"/>
+            <a:ext cx="3145536" cy="576072"/>
+          </a:xfrm>
+          <a:prstGeom prst="rect">
+            <a:avLst/>
+          </a:prstGeom>
+          <a:noFill/>
+          <a:ln/>
+        </p:spPr>
+        <p:txBody>
+          <a:bodyPr wrap="square" lIns="254" tIns="254" rIns="254" bIns="254" rtlCol="0" anchor="t">
             <a:normAutofit/>
           </a:bodyPr>
           <a:lstStyle/>
@@ -4335,7 +4371,7 @@
               <a:buNone/>
             </a:pPr>
             <a:r>
-              <a:rPr lang="en-US" sz="1550" dirty="0">
+              <a:rPr lang="en-US" sz="1320" dirty="0">
                 <a:solidFill>
                   <a:srgbClr val="17364A"/>
                 </a:solidFill>
@@ -4343,9 +4379,9 @@
                 <a:ea typeface="Aptos" pitchFamily="34" charset="-122"/>
                 <a:cs typeface="Aptos" pitchFamily="34" charset="-120"/>
               </a:rPr>
-              <a:t>Identify what could go wrong, who could be affected, what safeguards are needed, and what evidence should be reviewed before use expands.</a:t>
-            </a:r>
-            <a:endParaRPr lang="en-US" sz="1550" dirty="0"/>
+              <a:t>Identify what could go wrong, who could be affected, what safeguards are needed, and what evidence should be reviewed.</a:t>
+            </a:r>
+            <a:endParaRPr lang="en-US" sz="1320" dirty="0"/>
           </a:p>
         </p:txBody>
       </p:sp>
@@ -4646,35 +4682,41 @@
           <a:ln/>
         </p:spPr>
         <p:txBody>
-          <a:bodyPr wrap="square" lIns="635" tIns="635" rIns="635" bIns="635" rtlCol="0" anchor="t">
+          <a:bodyPr wrap="square" lIns="1016" tIns="1016" rIns="1016" bIns="1016" rtlCol="0" anchor="t">
             <a:normAutofit/>
           </a:bodyPr>
           <a:lstStyle/>
           <a:p>
+            <a:pPr indent="0" marL="0">
+              <a:buNone/>
+            </a:pPr>
             <a:r>
               <a:rPr lang="en-US" sz="2100" dirty="0">
                 <a:solidFill>
-                  <a:srgbClr val="17364A"/>
-                </a:solidFill>
-                <a:latin typeface="Aptos" pitchFamily="34" charset="0"/>
-                <a:ea typeface="Aptos" pitchFamily="34" charset="-122"/>
-                <a:cs typeface="Aptos" pitchFamily="34" charset="-120"/>
-              </a:rPr>
-              <a:t>This topic applies across generative AI, predictive analytics, NLP, RAG, automation, and agentic.</a:t>
+                  <a:srgbClr val="003A63"/>
+                </a:solidFill>
+                <a:latin typeface="Aptos" pitchFamily="34" charset="0"/>
+                <a:ea typeface="Aptos" pitchFamily="34" charset="-122"/>
+                <a:cs typeface="Aptos" pitchFamily="34" charset="-120"/>
+              </a:rPr>
+              <a:t>• This topic applies across generative AI, predictive analytics, NLP, RAG, automation, and.</a:t>
             </a:r>
             <a:endParaRPr lang="en-US" sz="2100" dirty="0"/>
           </a:p>
           <a:p>
+            <a:pPr indent="0" marL="0">
+              <a:buNone/>
+            </a:pPr>
             <a:r>
               <a:rPr lang="en-US" sz="2100" dirty="0">
                 <a:solidFill>
-                  <a:srgbClr val="17364A"/>
-                </a:solidFill>
-                <a:latin typeface="Aptos" pitchFamily="34" charset="0"/>
-                <a:ea typeface="Aptos" pitchFamily="34" charset="-122"/>
-                <a:cs typeface="Aptos" pitchFamily="34" charset="-120"/>
-              </a:rPr>
-              <a:t>The more sensitive the data, the more consequential the output, or the more automated the action, the.</a:t>
+                  <a:srgbClr val="003A63"/>
+                </a:solidFill>
+                <a:latin typeface="Aptos" pitchFamily="34" charset="0"/>
+                <a:ea typeface="Aptos" pitchFamily="34" charset="-122"/>
+                <a:cs typeface="Aptos" pitchFamily="34" charset="-120"/>
+              </a:rPr>
+              <a:t>• The more sensitive the data, the more consequential the output, or the more automated the.</a:t>
             </a:r>
             <a:endParaRPr lang="en-US" sz="2100" dirty="0"/>
           </a:p>
@@ -4754,17 +4796,17 @@
         </p:nvSpPr>
         <p:spPr>
           <a:xfrm>
-            <a:off x="7799832" y="1828800"/>
-            <a:ext cx="3145536" cy="685800"/>
-          </a:xfrm>
-          <a:prstGeom prst="rect">
-            <a:avLst/>
-          </a:prstGeom>
-          <a:noFill/>
-          <a:ln/>
-        </p:spPr>
-        <p:txBody>
-          <a:bodyPr wrap="square" lIns="0" tIns="0" rIns="0" bIns="0" rtlCol="0" anchor="t">
+            <a:off x="7799832" y="1801368"/>
+            <a:ext cx="3145536" cy="758952"/>
+          </a:xfrm>
+          <a:prstGeom prst="rect">
+            <a:avLst/>
+          </a:prstGeom>
+          <a:noFill/>
+          <a:ln/>
+        </p:spPr>
+        <p:txBody>
+          <a:bodyPr wrap="square" lIns="254" tIns="254" rIns="254" bIns="254" rtlCol="0" anchor="t">
             <a:normAutofit/>
           </a:bodyPr>
           <a:lstStyle/>
@@ -4773,7 +4815,7 @@
               <a:buNone/>
             </a:pPr>
             <a:r>
-              <a:rPr lang="en-US" sz="1550" dirty="0">
+              <a:rPr lang="en-US" sz="1320" dirty="0">
                 <a:solidFill>
                   <a:srgbClr val="17364A"/>
                 </a:solidFill>
@@ -4783,7 +4825,7 @@
               </a:rPr>
               <a:t>This topic applies across generative AI, predictive analytics, NLP, RAG, automation, and agentic.</a:t>
             </a:r>
-            <a:endParaRPr lang="en-US" sz="1550" dirty="0"/>
+            <a:endParaRPr lang="en-US" sz="1320" dirty="0"/>
           </a:p>
         </p:txBody>
       </p:sp>
@@ -4871,13 +4913,16 @@
           <a:ln/>
         </p:spPr>
         <p:txBody>
-          <a:bodyPr wrap="square" lIns="254" tIns="254" rIns="254" bIns="254" rtlCol="0" anchor="t">
+          <a:bodyPr wrap="square" lIns="508" tIns="508" rIns="508" bIns="508" rtlCol="0" anchor="t">
             <a:normAutofit/>
           </a:bodyPr>
           <a:lstStyle/>
           <a:p>
-            <a:r>
-              <a:rPr lang="en-US" sz="1380" dirty="0">
+            <a:pPr indent="0" marL="0">
+              <a:buNone/>
+            </a:pPr>
+            <a:r>
+              <a:rPr lang="en-US" sz="1220" dirty="0">
                 <a:solidFill>
                   <a:srgbClr val="17364A"/>
                 </a:solidFill>
@@ -4885,13 +4930,16 @@
                 <a:ea typeface="Aptos" pitchFamily="34" charset="-122"/>
                 <a:cs typeface="Aptos" pitchFamily="34" charset="-120"/>
               </a:rPr>
-              <a:t>This topic applies across generative AI, predictive analytics, NLP, RAG, automation, and.</a:t>
-            </a:r>
-            <a:endParaRPr lang="en-US" sz="1380" dirty="0"/>
-          </a:p>
-          <a:p>
-            <a:r>
-              <a:rPr lang="en-US" sz="1380" dirty="0">
+              <a:t>This topic applies across generative AI, predictive analytics,.</a:t>
+            </a:r>
+            <a:endParaRPr lang="en-US" sz="1220" dirty="0"/>
+          </a:p>
+          <a:p>
+            <a:pPr indent="0" marL="0">
+              <a:buNone/>
+            </a:pPr>
+            <a:r>
+              <a:rPr lang="en-US" sz="1220" dirty="0">
                 <a:solidFill>
                   <a:srgbClr val="17364A"/>
                 </a:solidFill>
@@ -4899,9 +4947,9 @@
                 <a:ea typeface="Aptos" pitchFamily="34" charset="-122"/>
                 <a:cs typeface="Aptos" pitchFamily="34" charset="-120"/>
               </a:rPr>
-              <a:t>The more sensitive the data, the more consequential the output, or the more automated the.</a:t>
-            </a:r>
-            <a:endParaRPr lang="en-US" sz="1380" dirty="0"/>
+              <a:t>The more sensitive the data, the more consequential the output, or.</a:t>
+            </a:r>
+            <a:endParaRPr lang="en-US" sz="1220" dirty="0"/>
           </a:p>
         </p:txBody>
       </p:sp>
@@ -4979,17 +5027,17 @@
         </p:nvSpPr>
         <p:spPr>
           <a:xfrm>
-            <a:off x="7799832" y="5001768"/>
-            <a:ext cx="3145536" cy="502920"/>
-          </a:xfrm>
-          <a:prstGeom prst="rect">
-            <a:avLst/>
-          </a:prstGeom>
-          <a:noFill/>
-          <a:ln/>
-        </p:spPr>
-        <p:txBody>
-          <a:bodyPr wrap="square" lIns="0" tIns="0" rIns="0" bIns="0" rtlCol="0" anchor="t">
+            <a:off x="7799832" y="4974336"/>
+            <a:ext cx="3145536" cy="576072"/>
+          </a:xfrm>
+          <a:prstGeom prst="rect">
+            <a:avLst/>
+          </a:prstGeom>
+          <a:noFill/>
+          <a:ln/>
+        </p:spPr>
+        <p:txBody>
+          <a:bodyPr wrap="square" lIns="254" tIns="254" rIns="254" bIns="254" rtlCol="0" anchor="t">
             <a:normAutofit/>
           </a:bodyPr>
           <a:lstStyle/>
@@ -4998,7 +5046,7 @@
               <a:buNone/>
             </a:pPr>
             <a:r>
-              <a:rPr lang="en-US" sz="1550" dirty="0">
+              <a:rPr lang="en-US" sz="1320" dirty="0">
                 <a:solidFill>
                   <a:srgbClr val="17364A"/>
                 </a:solidFill>
@@ -5006,9 +5054,9 @@
                 <a:ea typeface="Aptos" pitchFamily="34" charset="-122"/>
                 <a:cs typeface="Aptos" pitchFamily="34" charset="-120"/>
               </a:rPr>
-              <a:t>Use the concept to clarify workflow changes, dependencies, staffing, procurement requirements, training needs, and implementation checkpoints.</a:t>
-            </a:r>
-            <a:endParaRPr lang="en-US" sz="1550" dirty="0"/>
+              <a:t>Use the concept to clarify workflow changes, dependencies, staffing, procurement requirements, training needs, and.</a:t>
+            </a:r>
+            <a:endParaRPr lang="en-US" sz="1320" dirty="0"/>
           </a:p>
         </p:txBody>
       </p:sp>
@@ -5309,49 +5357,58 @@
           <a:ln/>
         </p:spPr>
         <p:txBody>
-          <a:bodyPr wrap="square" lIns="635" tIns="635" rIns="635" bIns="635" rtlCol="0" anchor="t">
+          <a:bodyPr wrap="square" lIns="1016" tIns="1016" rIns="1016" bIns="1016" rtlCol="0" anchor="t">
             <a:normAutofit/>
           </a:bodyPr>
           <a:lstStyle/>
           <a:p>
+            <a:pPr indent="0" marL="0">
+              <a:buNone/>
+            </a:pPr>
             <a:r>
               <a:rPr lang="en-US" sz="2100" dirty="0">
                 <a:solidFill>
-                  <a:srgbClr val="17364A"/>
-                </a:solidFill>
-                <a:latin typeface="Aptos" pitchFamily="34" charset="0"/>
-                <a:ea typeface="Aptos" pitchFamily="34" charset="-122"/>
-                <a:cs typeface="Aptos" pitchFamily="34" charset="-120"/>
-              </a:rPr>
-              <a:t>What public health decision or workflow does this topic affect?</a:t>
+                  <a:srgbClr val="003A63"/>
+                </a:solidFill>
+                <a:latin typeface="Aptos" pitchFamily="34" charset="0"/>
+                <a:ea typeface="Aptos" pitchFamily="34" charset="-122"/>
+                <a:cs typeface="Aptos" pitchFamily="34" charset="-120"/>
+              </a:rPr>
+              <a:t>• What public health decision or workflow does this topic affect?</a:t>
             </a:r>
             <a:endParaRPr lang="en-US" sz="2100" dirty="0"/>
           </a:p>
           <a:p>
+            <a:pPr indent="0" marL="0">
+              <a:buNone/>
+            </a:pPr>
             <a:r>
               <a:rPr lang="en-US" sz="2100" dirty="0">
                 <a:solidFill>
-                  <a:srgbClr val="17364A"/>
-                </a:solidFill>
-                <a:latin typeface="Aptos" pitchFamily="34" charset="0"/>
-                <a:ea typeface="Aptos" pitchFamily="34" charset="-122"/>
-                <a:cs typeface="Aptos" pitchFamily="34" charset="-120"/>
-              </a:rPr>
-              <a:t>Who has authority to approve or pause the work?</a:t>
+                  <a:srgbClr val="003A63"/>
+                </a:solidFill>
+                <a:latin typeface="Aptos" pitchFamily="34" charset="0"/>
+                <a:ea typeface="Aptos" pitchFamily="34" charset="-122"/>
+                <a:cs typeface="Aptos" pitchFamily="34" charset="-120"/>
+              </a:rPr>
+              <a:t>• Who has authority to approve or pause the work?</a:t>
             </a:r>
             <a:endParaRPr lang="en-US" sz="2100" dirty="0"/>
           </a:p>
           <a:p>
+            <a:pPr indent="0" marL="0">
+              <a:buNone/>
+            </a:pPr>
             <a:r>
               <a:rPr lang="en-US" sz="2100" dirty="0">
                 <a:solidFill>
-                  <a:srgbClr val="17364A"/>
-                </a:solidFill>
-                <a:latin typeface="Aptos" pitchFamily="34" charset="0"/>
-                <a:ea typeface="Aptos" pitchFamily="34" charset="-122"/>
-                <a:cs typeface="Aptos" pitchFamily="34" charset="-120"/>
-              </a:rPr>
-              <a:t>What evidence would show that the workflow is responsible and effective?</a:t>
+                  <a:srgbClr val="003A63"/>
+                </a:solidFill>
+                <a:latin typeface="Aptos" pitchFamily="34" charset="0"/>
+                <a:ea typeface="Aptos" pitchFamily="34" charset="-122"/>
+                <a:cs typeface="Aptos" pitchFamily="34" charset="-120"/>
+              </a:rPr>
+              <a:t>• What evidence would show that the workflow is responsible and effective?</a:t>
             </a:r>
             <a:endParaRPr lang="en-US" sz="2100" dirty="0"/>
           </a:p>
@@ -5431,17 +5488,17 @@
         </p:nvSpPr>
         <p:spPr>
           <a:xfrm>
-            <a:off x="7799832" y="1828800"/>
-            <a:ext cx="3145536" cy="685800"/>
-          </a:xfrm>
-          <a:prstGeom prst="rect">
-            <a:avLst/>
-          </a:prstGeom>
-          <a:noFill/>
-          <a:ln/>
-        </p:spPr>
-        <p:txBody>
-          <a:bodyPr wrap="square" lIns="0" tIns="0" rIns="0" bIns="0" rtlCol="0" anchor="t">
+            <a:off x="7799832" y="1801368"/>
+            <a:ext cx="3145536" cy="758952"/>
+          </a:xfrm>
+          <a:prstGeom prst="rect">
+            <a:avLst/>
+          </a:prstGeom>
+          <a:noFill/>
+          <a:ln/>
+        </p:spPr>
+        <p:txBody>
+          <a:bodyPr wrap="square" lIns="254" tIns="254" rIns="254" bIns="254" rtlCol="0" anchor="t">
             <a:normAutofit/>
           </a:bodyPr>
           <a:lstStyle/>
@@ -5450,7 +5507,7 @@
               <a:buNone/>
             </a:pPr>
             <a:r>
-              <a:rPr lang="en-US" sz="1550" dirty="0">
+              <a:rPr lang="en-US" sz="1320" dirty="0">
                 <a:solidFill>
                   <a:srgbClr val="17364A"/>
                 </a:solidFill>
@@ -5460,7 +5517,7 @@
               </a:rPr>
               <a:t>What public health decision or workflow does this topic affect?</a:t>
             </a:r>
-            <a:endParaRPr lang="en-US" sz="1550" dirty="0"/>
+            <a:endParaRPr lang="en-US" sz="1320" dirty="0"/>
           </a:p>
         </p:txBody>
       </p:sp>
@@ -5548,13 +5605,16 @@
           <a:ln/>
         </p:spPr>
         <p:txBody>
-          <a:bodyPr wrap="square" lIns="254" tIns="254" rIns="254" bIns="254" rtlCol="0" anchor="t">
+          <a:bodyPr wrap="square" lIns="508" tIns="508" rIns="508" bIns="508" rtlCol="0" anchor="t">
             <a:normAutofit/>
           </a:bodyPr>
           <a:lstStyle/>
           <a:p>
-            <a:r>
-              <a:rPr lang="en-US" sz="1380" dirty="0">
+            <a:pPr indent="0" marL="0">
+              <a:buNone/>
+            </a:pPr>
+            <a:r>
+              <a:rPr lang="en-US" sz="1220" dirty="0">
                 <a:solidFill>
                   <a:srgbClr val="17364A"/>
                 </a:solidFill>
@@ -5564,11 +5624,14 @@
               </a:rPr>
               <a:t>What public health decision or workflow does this topic affect?</a:t>
             </a:r>
-            <a:endParaRPr lang="en-US" sz="1380" dirty="0"/>
-          </a:p>
-          <a:p>
-            <a:r>
-              <a:rPr lang="en-US" sz="1380" dirty="0">
+            <a:endParaRPr lang="en-US" sz="1220" dirty="0"/>
+          </a:p>
+          <a:p>
+            <a:pPr indent="0" marL="0">
+              <a:buNone/>
+            </a:pPr>
+            <a:r>
+              <a:rPr lang="en-US" sz="1220" dirty="0">
                 <a:solidFill>
                   <a:srgbClr val="17364A"/>
                 </a:solidFill>
@@ -5578,11 +5641,14 @@
               </a:rPr>
               <a:t>Who has authority to approve or pause the work?</a:t>
             </a:r>
-            <a:endParaRPr lang="en-US" sz="1380" dirty="0"/>
-          </a:p>
-          <a:p>
-            <a:r>
-              <a:rPr lang="en-US" sz="1380" dirty="0">
+            <a:endParaRPr lang="en-US" sz="1220" dirty="0"/>
+          </a:p>
+          <a:p>
+            <a:pPr indent="0" marL="0">
+              <a:buNone/>
+            </a:pPr>
+            <a:r>
+              <a:rPr lang="en-US" sz="1220" dirty="0">
                 <a:solidFill>
                   <a:srgbClr val="17364A"/>
                 </a:solidFill>
@@ -5590,9 +5656,9 @@
                 <a:ea typeface="Aptos" pitchFamily="34" charset="-122"/>
                 <a:cs typeface="Aptos" pitchFamily="34" charset="-120"/>
               </a:rPr>
-              <a:t>What evidence would show that the workflow is responsible and effective?</a:t>
-            </a:r>
-            <a:endParaRPr lang="en-US" sz="1380" dirty="0"/>
+              <a:t>What evidence would show that the workflow is responsible and.</a:t>
+            </a:r>
+            <a:endParaRPr lang="en-US" sz="1220" dirty="0"/>
           </a:p>
         </p:txBody>
       </p:sp>
@@ -5670,17 +5736,17 @@
         </p:nvSpPr>
         <p:spPr>
           <a:xfrm>
-            <a:off x="7799832" y="5001768"/>
-            <a:ext cx="3145536" cy="502920"/>
-          </a:xfrm>
-          <a:prstGeom prst="rect">
-            <a:avLst/>
-          </a:prstGeom>
-          <a:noFill/>
-          <a:ln/>
-        </p:spPr>
-        <p:txBody>
-          <a:bodyPr wrap="square" lIns="0" tIns="0" rIns="0" bIns="0" rtlCol="0" anchor="t">
+            <a:off x="7799832" y="4974336"/>
+            <a:ext cx="3145536" cy="576072"/>
+          </a:xfrm>
+          <a:prstGeom prst="rect">
+            <a:avLst/>
+          </a:prstGeom>
+          <a:noFill/>
+          <a:ln/>
+        </p:spPr>
+        <p:txBody>
+          <a:bodyPr wrap="square" lIns="254" tIns="254" rIns="254" bIns="254" rtlCol="0" anchor="t">
             <a:normAutofit/>
           </a:bodyPr>
           <a:lstStyle/>
@@ -5689,7 +5755,7 @@
               <a:buNone/>
             </a:pPr>
             <a:r>
-              <a:rPr lang="en-US" sz="1550" dirty="0">
+              <a:rPr lang="en-US" sz="1320" dirty="0">
                 <a:solidFill>
                   <a:srgbClr val="17364A"/>
                 </a:solidFill>
@@ -5697,9 +5763,9 @@
                 <a:ea typeface="Aptos" pitchFamily="34" charset="-122"/>
                 <a:cs typeface="Aptos" pitchFamily="34" charset="-120"/>
               </a:rPr>
-              <a:t>Connect the concept to public health purpose, responsible use, required safeguards, documentation, and the next action a department should take.</a:t>
-            </a:r>
-            <a:endParaRPr lang="en-US" sz="1550" dirty="0"/>
+              <a:t>Connect the concept to public health purpose, responsible use, required safeguards, documentation, and the next action a.</a:t>
+            </a:r>
+            <a:endParaRPr lang="en-US" sz="1320" dirty="0"/>
           </a:p>
         </p:txBody>
       </p:sp>
@@ -6000,35 +6066,41 @@
           <a:ln/>
         </p:spPr>
         <p:txBody>
-          <a:bodyPr wrap="square" lIns="635" tIns="635" rIns="635" bIns="635" rtlCol="0" anchor="t">
+          <a:bodyPr wrap="square" lIns="1016" tIns="1016" rIns="1016" bIns="1016" rtlCol="0" anchor="t">
             <a:normAutofit/>
           </a:bodyPr>
           <a:lstStyle/>
           <a:p>
+            <a:pPr indent="0" marL="0">
+              <a:buNone/>
+            </a:pPr>
             <a:r>
               <a:rPr lang="en-US" sz="2100" dirty="0">
                 <a:solidFill>
-                  <a:srgbClr val="17364A"/>
-                </a:solidFill>
-                <a:latin typeface="Aptos" pitchFamily="34" charset="0"/>
-                <a:ea typeface="Aptos" pitchFamily="34" charset="-122"/>
-                <a:cs typeface="Aptos" pitchFamily="34" charset="-120"/>
-              </a:rPr>
-              <a:t>What equity, privacy, legal, security, or public trust risks require review?</a:t>
+                  <a:srgbClr val="003A63"/>
+                </a:solidFill>
+                <a:latin typeface="Aptos" pitchFamily="34" charset="0"/>
+                <a:ea typeface="Aptos" pitchFamily="34" charset="-122"/>
+                <a:cs typeface="Aptos" pitchFamily="34" charset="-120"/>
+              </a:rPr>
+              <a:t>• What equity, privacy, legal, security, or public trust risks require review?</a:t>
             </a:r>
             <a:endParaRPr lang="en-US" sz="2100" dirty="0"/>
           </a:p>
           <a:p>
+            <a:pPr indent="0" marL="0">
+              <a:buNone/>
+            </a:pPr>
             <a:r>
               <a:rPr lang="en-US" sz="2100" dirty="0">
                 <a:solidFill>
-                  <a:srgbClr val="17364A"/>
-                </a:solidFill>
-                <a:latin typeface="Aptos" pitchFamily="34" charset="0"/>
-                <a:ea typeface="Aptos" pitchFamily="34" charset="-122"/>
-                <a:cs typeface="Aptos" pitchFamily="34" charset="-120"/>
-              </a:rPr>
-              <a:t>How will the agency know when the workflow needs to be revised?</a:t>
+                  <a:srgbClr val="003A63"/>
+                </a:solidFill>
+                <a:latin typeface="Aptos" pitchFamily="34" charset="0"/>
+                <a:ea typeface="Aptos" pitchFamily="34" charset="-122"/>
+                <a:cs typeface="Aptos" pitchFamily="34" charset="-120"/>
+              </a:rPr>
+              <a:t>• How will the agency know when the workflow needs to be revised?</a:t>
             </a:r>
             <a:endParaRPr lang="en-US" sz="2100" dirty="0"/>
           </a:p>
@@ -6108,17 +6180,17 @@
         </p:nvSpPr>
         <p:spPr>
           <a:xfrm>
-            <a:off x="7799832" y="1828800"/>
-            <a:ext cx="3145536" cy="685800"/>
-          </a:xfrm>
-          <a:prstGeom prst="rect">
-            <a:avLst/>
-          </a:prstGeom>
-          <a:noFill/>
-          <a:ln/>
-        </p:spPr>
-        <p:txBody>
-          <a:bodyPr wrap="square" lIns="0" tIns="0" rIns="0" bIns="0" rtlCol="0" anchor="t">
+            <a:off x="7799832" y="1801368"/>
+            <a:ext cx="3145536" cy="758952"/>
+          </a:xfrm>
+          <a:prstGeom prst="rect">
+            <a:avLst/>
+          </a:prstGeom>
+          <a:noFill/>
+          <a:ln/>
+        </p:spPr>
+        <p:txBody>
+          <a:bodyPr wrap="square" lIns="254" tIns="254" rIns="254" bIns="254" rtlCol="0" anchor="t">
             <a:normAutofit/>
           </a:bodyPr>
           <a:lstStyle/>
@@ -6127,7 +6199,7 @@
               <a:buNone/>
             </a:pPr>
             <a:r>
-              <a:rPr lang="en-US" sz="1550" dirty="0">
+              <a:rPr lang="en-US" sz="1320" dirty="0">
                 <a:solidFill>
                   <a:srgbClr val="17364A"/>
                 </a:solidFill>
@@ -6137,7 +6209,7 @@
               </a:rPr>
               <a:t>What equity, privacy, legal, security, or public trust risks require review?</a:t>
             </a:r>
-            <a:endParaRPr lang="en-US" sz="1550" dirty="0"/>
+            <a:endParaRPr lang="en-US" sz="1320" dirty="0"/>
           </a:p>
         </p:txBody>
       </p:sp>
@@ -6225,13 +6297,16 @@
           <a:ln/>
         </p:spPr>
         <p:txBody>
-          <a:bodyPr wrap="square" lIns="254" tIns="254" rIns="254" bIns="254" rtlCol="0" anchor="t">
+          <a:bodyPr wrap="square" lIns="508" tIns="508" rIns="508" bIns="508" rtlCol="0" anchor="t">
             <a:normAutofit/>
           </a:bodyPr>
           <a:lstStyle/>
           <a:p>
-            <a:r>
-              <a:rPr lang="en-US" sz="1380" dirty="0">
+            <a:pPr indent="0" marL="0">
+              <a:buNone/>
+            </a:pPr>
+            <a:r>
+              <a:rPr lang="en-US" sz="1220" dirty="0">
                 <a:solidFill>
                   <a:srgbClr val="17364A"/>
                 </a:solidFill>
@@ -6239,13 +6314,16 @@
                 <a:ea typeface="Aptos" pitchFamily="34" charset="-122"/>
                 <a:cs typeface="Aptos" pitchFamily="34" charset="-120"/>
               </a:rPr>
-              <a:t>What equity, privacy, legal, security, or public trust risks require review?</a:t>
-            </a:r>
-            <a:endParaRPr lang="en-US" sz="1380" dirty="0"/>
-          </a:p>
-          <a:p>
-            <a:r>
-              <a:rPr lang="en-US" sz="1380" dirty="0">
+              <a:t>What equity, privacy, legal, security, or public trust risks.</a:t>
+            </a:r>
+            <a:endParaRPr lang="en-US" sz="1220" dirty="0"/>
+          </a:p>
+          <a:p>
+            <a:pPr indent="0" marL="0">
+              <a:buNone/>
+            </a:pPr>
+            <a:r>
+              <a:rPr lang="en-US" sz="1220" dirty="0">
                 <a:solidFill>
                   <a:srgbClr val="17364A"/>
                 </a:solidFill>
@@ -6255,7 +6333,7 @@
               </a:rPr>
               <a:t>How will the agency know when the workflow needs to be revised?</a:t>
             </a:r>
-            <a:endParaRPr lang="en-US" sz="1380" dirty="0"/>
+            <a:endParaRPr lang="en-US" sz="1220" dirty="0"/>
           </a:p>
         </p:txBody>
       </p:sp>
@@ -6333,17 +6411,17 @@
         </p:nvSpPr>
         <p:spPr>
           <a:xfrm>
-            <a:off x="7799832" y="5001768"/>
-            <a:ext cx="3145536" cy="502920"/>
-          </a:xfrm>
-          <a:prstGeom prst="rect">
-            <a:avLst/>
-          </a:prstGeom>
-          <a:noFill/>
-          <a:ln/>
-        </p:spPr>
-        <p:txBody>
-          <a:bodyPr wrap="square" lIns="0" tIns="0" rIns="0" bIns="0" rtlCol="0" anchor="t">
+            <a:off x="7799832" y="4974336"/>
+            <a:ext cx="3145536" cy="576072"/>
+          </a:xfrm>
+          <a:prstGeom prst="rect">
+            <a:avLst/>
+          </a:prstGeom>
+          <a:noFill/>
+          <a:ln/>
+        </p:spPr>
+        <p:txBody>
+          <a:bodyPr wrap="square" lIns="254" tIns="254" rIns="254" bIns="254" rtlCol="0" anchor="t">
             <a:normAutofit/>
           </a:bodyPr>
           <a:lstStyle/>
@@ -6352,7 +6430,7 @@
               <a:buNone/>
             </a:pPr>
             <a:r>
-              <a:rPr lang="en-US" sz="1550" dirty="0">
+              <a:rPr lang="en-US" sz="1320" dirty="0">
                 <a:solidFill>
                   <a:srgbClr val="17364A"/>
                 </a:solidFill>
@@ -6360,9 +6438,9 @@
                 <a:ea typeface="Aptos" pitchFamily="34" charset="-122"/>
                 <a:cs typeface="Aptos" pitchFamily="34" charset="-120"/>
               </a:rPr>
-              <a:t>Connect the concept to public health purpose, responsible use, required safeguards, documentation, and the next action a department should take.</a:t>
-            </a:r>
-            <a:endParaRPr lang="en-US" sz="1550" dirty="0"/>
+              <a:t>Connect the concept to public health purpose, responsible use, required safeguards, documentation, and the next action a.</a:t>
+            </a:r>
+            <a:endParaRPr lang="en-US" sz="1320" dirty="0"/>
           </a:p>
         </p:txBody>
       </p:sp>
@@ -6663,35 +6741,41 @@
           <a:ln/>
         </p:spPr>
         <p:txBody>
-          <a:bodyPr wrap="square" lIns="635" tIns="635" rIns="635" bIns="635" rtlCol="0" anchor="t">
+          <a:bodyPr wrap="square" lIns="1016" tIns="1016" rIns="1016" bIns="1016" rtlCol="0" anchor="t">
             <a:normAutofit/>
           </a:bodyPr>
           <a:lstStyle/>
           <a:p>
+            <a:pPr indent="0" marL="0">
+              <a:buNone/>
+            </a:pPr>
             <a:r>
               <a:rPr lang="en-US" sz="2100" dirty="0">
                 <a:solidFill>
-                  <a:srgbClr val="17364A"/>
-                </a:solidFill>
-                <a:latin typeface="Aptos" pitchFamily="34" charset="0"/>
-                <a:ea typeface="Aptos" pitchFamily="34" charset="-122"/>
-                <a:cs typeface="Aptos" pitchFamily="34" charset="-120"/>
-              </a:rPr>
-              <a:t>Create a practical ai for surveillance signal review and epidemiologic judgment artifact for one.</a:t>
+                  <a:srgbClr val="003A63"/>
+                </a:solidFill>
+                <a:latin typeface="Aptos" pitchFamily="34" charset="0"/>
+                <a:ea typeface="Aptos" pitchFamily="34" charset="-122"/>
+                <a:cs typeface="Aptos" pitchFamily="34" charset="-120"/>
+              </a:rPr>
+              <a:t>• Create a practical ai for surveillance signal review and epidemiologic judgment artifact for.</a:t>
             </a:r>
             <a:endParaRPr lang="en-US" sz="2100" dirty="0"/>
           </a:p>
           <a:p>
+            <a:pPr indent="0" marL="0">
+              <a:buNone/>
+            </a:pPr>
             <a:r>
               <a:rPr lang="en-US" sz="2100" dirty="0">
                 <a:solidFill>
-                  <a:srgbClr val="17364A"/>
-                </a:solidFill>
-                <a:latin typeface="Aptos" pitchFamily="34" charset="0"/>
-                <a:ea typeface="Aptos" pitchFamily="34" charset="-122"/>
-                <a:cs typeface="Aptos" pitchFamily="34" charset="-120"/>
-              </a:rPr>
-              <a:t>The artifact should define the use case, affected roles, review criteria, safeguards, documentation.</a:t>
+                  <a:srgbClr val="003A63"/>
+                </a:solidFill>
+                <a:latin typeface="Aptos" pitchFamily="34" charset="0"/>
+                <a:ea typeface="Aptos" pitchFamily="34" charset="-122"/>
+                <a:cs typeface="Aptos" pitchFamily="34" charset="-120"/>
+              </a:rPr>
+              <a:t>• The artifact should define the use case, affected roles, review criteria, safeguards,.</a:t>
             </a:r>
             <a:endParaRPr lang="en-US" sz="2100" dirty="0"/>
           </a:p>
@@ -6771,17 +6855,17 @@
         </p:nvSpPr>
         <p:spPr>
           <a:xfrm>
-            <a:off x="7799832" y="1828800"/>
-            <a:ext cx="3145536" cy="685800"/>
-          </a:xfrm>
-          <a:prstGeom prst="rect">
-            <a:avLst/>
-          </a:prstGeom>
-          <a:noFill/>
-          <a:ln/>
-        </p:spPr>
-        <p:txBody>
-          <a:bodyPr wrap="square" lIns="0" tIns="0" rIns="0" bIns="0" rtlCol="0" anchor="t">
+            <a:off x="7799832" y="1801368"/>
+            <a:ext cx="3145536" cy="758952"/>
+          </a:xfrm>
+          <a:prstGeom prst="rect">
+            <a:avLst/>
+          </a:prstGeom>
+          <a:noFill/>
+          <a:ln/>
+        </p:spPr>
+        <p:txBody>
+          <a:bodyPr wrap="square" lIns="254" tIns="254" rIns="254" bIns="254" rtlCol="0" anchor="t">
             <a:normAutofit/>
           </a:bodyPr>
           <a:lstStyle/>
@@ -6790,7 +6874,7 @@
               <a:buNone/>
             </a:pPr>
             <a:r>
-              <a:rPr lang="en-US" sz="1550" dirty="0">
+              <a:rPr lang="en-US" sz="1320" dirty="0">
                 <a:solidFill>
                   <a:srgbClr val="17364A"/>
                 </a:solidFill>
@@ -6800,7 +6884,7 @@
               </a:rPr>
               <a:t>Create a practical ai for surveillance signal review and epidemiologic judgment artifact for one.</a:t>
             </a:r>
-            <a:endParaRPr lang="en-US" sz="1550" dirty="0"/>
+            <a:endParaRPr lang="en-US" sz="1320" dirty="0"/>
           </a:p>
         </p:txBody>
       </p:sp>
@@ -6888,13 +6972,16 @@
           <a:ln/>
         </p:spPr>
         <p:txBody>
-          <a:bodyPr wrap="square" lIns="254" tIns="254" rIns="254" bIns="254" rtlCol="0" anchor="t">
+          <a:bodyPr wrap="square" lIns="508" tIns="508" rIns="508" bIns="508" rtlCol="0" anchor="t">
             <a:normAutofit/>
           </a:bodyPr>
           <a:lstStyle/>
           <a:p>
-            <a:r>
-              <a:rPr lang="en-US" sz="1380" dirty="0">
+            <a:pPr indent="0" marL="0">
+              <a:buNone/>
+            </a:pPr>
+            <a:r>
+              <a:rPr lang="en-US" sz="1220" dirty="0">
                 <a:solidFill>
                   <a:srgbClr val="17364A"/>
                 </a:solidFill>
@@ -6902,13 +6989,16 @@
                 <a:ea typeface="Aptos" pitchFamily="34" charset="-122"/>
                 <a:cs typeface="Aptos" pitchFamily="34" charset="-120"/>
               </a:rPr>
-              <a:t>Create a practical ai for surveillance signal review and epidemiologic judgment artifact.</a:t>
-            </a:r>
-            <a:endParaRPr lang="en-US" sz="1380" dirty="0"/>
-          </a:p>
-          <a:p>
-            <a:r>
-              <a:rPr lang="en-US" sz="1380" dirty="0">
+              <a:t>Create a practical ai for surveillance signal review and.</a:t>
+            </a:r>
+            <a:endParaRPr lang="en-US" sz="1220" dirty="0"/>
+          </a:p>
+          <a:p>
+            <a:pPr indent="0" marL="0">
+              <a:buNone/>
+            </a:pPr>
+            <a:r>
+              <a:rPr lang="en-US" sz="1220" dirty="0">
                 <a:solidFill>
                   <a:srgbClr val="17364A"/>
                 </a:solidFill>
@@ -6916,9 +7006,9 @@
                 <a:ea typeface="Aptos" pitchFamily="34" charset="-122"/>
                 <a:cs typeface="Aptos" pitchFamily="34" charset="-120"/>
               </a:rPr>
-              <a:t>The artifact should define the use case, affected roles, review criteria, safeguards,.</a:t>
-            </a:r>
-            <a:endParaRPr lang="en-US" sz="1380" dirty="0"/>
+              <a:t>The artifact should define the use case, affected roles, review.</a:t>
+            </a:r>
+            <a:endParaRPr lang="en-US" sz="1220" dirty="0"/>
           </a:p>
         </p:txBody>
       </p:sp>
@@ -6996,17 +7086,17 @@
         </p:nvSpPr>
         <p:spPr>
           <a:xfrm>
-            <a:off x="7799832" y="5001768"/>
-            <a:ext cx="3145536" cy="502920"/>
-          </a:xfrm>
-          <a:prstGeom prst="rect">
-            <a:avLst/>
-          </a:prstGeom>
-          <a:noFill/>
-          <a:ln/>
-        </p:spPr>
-        <p:txBody>
-          <a:bodyPr wrap="square" lIns="0" tIns="0" rIns="0" bIns="0" rtlCol="0" anchor="t">
+            <a:off x="7799832" y="4974336"/>
+            <a:ext cx="3145536" cy="576072"/>
+          </a:xfrm>
+          <a:prstGeom prst="rect">
+            <a:avLst/>
+          </a:prstGeom>
+          <a:noFill/>
+          <a:ln/>
+        </p:spPr>
+        <p:txBody>
+          <a:bodyPr wrap="square" lIns="254" tIns="254" rIns="254" bIns="254" rtlCol="0" anchor="t">
             <a:normAutofit/>
           </a:bodyPr>
           <a:lstStyle/>
@@ -7015,7 +7105,7 @@
               <a:buNone/>
             </a:pPr>
             <a:r>
-              <a:rPr lang="en-US" sz="1550" dirty="0">
+              <a:rPr lang="en-US" sz="1320" dirty="0">
                 <a:solidFill>
                   <a:srgbClr val="17364A"/>
                 </a:solidFill>
@@ -7023,9 +7113,9 @@
                 <a:ea typeface="Aptos" pitchFamily="34" charset="-122"/>
                 <a:cs typeface="Aptos" pitchFamily="34" charset="-120"/>
               </a:rPr>
-              <a:t>Use the assignment to test whether you can explain the concept, apply it to a realistic public health situation, and identify what would need review before the work moves forward.</a:t>
-            </a:r>
-            <a:endParaRPr lang="en-US" sz="1550" dirty="0"/>
+              <a:t>Use the assignment to test whether you can explain the concept, apply it to a realistic public health situation, and.</a:t>
+            </a:r>
+            <a:endParaRPr lang="en-US" sz="1320" dirty="0"/>
           </a:p>
         </p:txBody>
       </p:sp>
@@ -7326,49 +7416,58 @@
           <a:ln/>
         </p:spPr>
         <p:txBody>
-          <a:bodyPr wrap="square" lIns="635" tIns="635" rIns="635" bIns="635" rtlCol="0" anchor="t">
+          <a:bodyPr wrap="square" lIns="1016" tIns="1016" rIns="1016" bIns="1016" rtlCol="0" anchor="t">
             <a:normAutofit/>
           </a:bodyPr>
           <a:lstStyle/>
           <a:p>
+            <a:pPr indent="0" marL="0">
+              <a:buNone/>
+            </a:pPr>
             <a:r>
               <a:rPr lang="en-US" sz="2100" dirty="0">
                 <a:solidFill>
-                  <a:srgbClr val="17364A"/>
-                </a:solidFill>
-                <a:latin typeface="Aptos" pitchFamily="34" charset="0"/>
-                <a:ea typeface="Aptos" pitchFamily="34" charset="-122"/>
-                <a:cs typeface="Aptos" pitchFamily="34" charset="-120"/>
-              </a:rPr>
-              <a:t>AI for Surveillance Signal Review and Epidemiologic Judgment artifact</a:t>
+                  <a:srgbClr val="003A63"/>
+                </a:solidFill>
+                <a:latin typeface="Aptos" pitchFamily="34" charset="0"/>
+                <a:ea typeface="Aptos" pitchFamily="34" charset="-122"/>
+                <a:cs typeface="Aptos" pitchFamily="34" charset="-120"/>
+              </a:rPr>
+              <a:t>• AI for Surveillance Signal Review and Epidemiologic Judgment artifact</a:t>
             </a:r>
             <a:endParaRPr lang="en-US" sz="2100" dirty="0"/>
           </a:p>
           <a:p>
+            <a:pPr indent="0" marL="0">
+              <a:buNone/>
+            </a:pPr>
             <a:r>
               <a:rPr lang="en-US" sz="2100" dirty="0">
                 <a:solidFill>
-                  <a:srgbClr val="17364A"/>
-                </a:solidFill>
-                <a:latin typeface="Aptos" pitchFamily="34" charset="0"/>
-                <a:ea typeface="Aptos" pitchFamily="34" charset="-122"/>
-                <a:cs typeface="Aptos" pitchFamily="34" charset="-120"/>
-              </a:rPr>
-              <a:t>Role and responsibility table</a:t>
+                  <a:srgbClr val="003A63"/>
+                </a:solidFill>
+                <a:latin typeface="Aptos" pitchFamily="34" charset="0"/>
+                <a:ea typeface="Aptos" pitchFamily="34" charset="-122"/>
+                <a:cs typeface="Aptos" pitchFamily="34" charset="-120"/>
+              </a:rPr>
+              <a:t>• Role and responsibility table</a:t>
             </a:r>
             <a:endParaRPr lang="en-US" sz="2100" dirty="0"/>
           </a:p>
           <a:p>
+            <a:pPr indent="0" marL="0">
+              <a:buNone/>
+            </a:pPr>
             <a:r>
               <a:rPr lang="en-US" sz="2100" dirty="0">
                 <a:solidFill>
-                  <a:srgbClr val="17364A"/>
-                </a:solidFill>
-                <a:latin typeface="Aptos" pitchFamily="34" charset="0"/>
-                <a:ea typeface="Aptos" pitchFamily="34" charset="-122"/>
-                <a:cs typeface="Aptos" pitchFamily="34" charset="-120"/>
-              </a:rPr>
-              <a:t>Risk and safeguard summary</a:t>
+                  <a:srgbClr val="003A63"/>
+                </a:solidFill>
+                <a:latin typeface="Aptos" pitchFamily="34" charset="0"/>
+                <a:ea typeface="Aptos" pitchFamily="34" charset="-122"/>
+                <a:cs typeface="Aptos" pitchFamily="34" charset="-120"/>
+              </a:rPr>
+              <a:t>• Risk and safeguard summary</a:t>
             </a:r>
             <a:endParaRPr lang="en-US" sz="2100" dirty="0"/>
           </a:p>
@@ -7448,17 +7547,17 @@
         </p:nvSpPr>
         <p:spPr>
           <a:xfrm>
-            <a:off x="7799832" y="1828800"/>
-            <a:ext cx="3145536" cy="685800"/>
-          </a:xfrm>
-          <a:prstGeom prst="rect">
-            <a:avLst/>
-          </a:prstGeom>
-          <a:noFill/>
-          <a:ln/>
-        </p:spPr>
-        <p:txBody>
-          <a:bodyPr wrap="square" lIns="0" tIns="0" rIns="0" bIns="0" rtlCol="0" anchor="t">
+            <a:off x="7799832" y="1801368"/>
+            <a:ext cx="3145536" cy="758952"/>
+          </a:xfrm>
+          <a:prstGeom prst="rect">
+            <a:avLst/>
+          </a:prstGeom>
+          <a:noFill/>
+          <a:ln/>
+        </p:spPr>
+        <p:txBody>
+          <a:bodyPr wrap="square" lIns="254" tIns="254" rIns="254" bIns="254" rtlCol="0" anchor="t">
             <a:normAutofit/>
           </a:bodyPr>
           <a:lstStyle/>
@@ -7467,7 +7566,7 @@
               <a:buNone/>
             </a:pPr>
             <a:r>
-              <a:rPr lang="en-US" sz="1550" dirty="0">
+              <a:rPr lang="en-US" sz="1320" dirty="0">
                 <a:solidFill>
                   <a:srgbClr val="17364A"/>
                 </a:solidFill>
@@ -7477,7 +7576,7 @@
               </a:rPr>
               <a:t>AI for Surveillance Signal Review and Epidemiologic Judgment artifact</a:t>
             </a:r>
-            <a:endParaRPr lang="en-US" sz="1550" dirty="0"/>
+            <a:endParaRPr lang="en-US" sz="1320" dirty="0"/>
           </a:p>
         </p:txBody>
       </p:sp>
@@ -7565,13 +7664,16 @@
           <a:ln/>
         </p:spPr>
         <p:txBody>
-          <a:bodyPr wrap="square" lIns="254" tIns="254" rIns="254" bIns="254" rtlCol="0" anchor="t">
+          <a:bodyPr wrap="square" lIns="508" tIns="508" rIns="508" bIns="508" rtlCol="0" anchor="t">
             <a:normAutofit/>
           </a:bodyPr>
           <a:lstStyle/>
           <a:p>
-            <a:r>
-              <a:rPr lang="en-US" sz="1380" dirty="0">
+            <a:pPr indent="0" marL="0">
+              <a:buNone/>
+            </a:pPr>
+            <a:r>
+              <a:rPr lang="en-US" sz="1220" dirty="0">
                 <a:solidFill>
                   <a:srgbClr val="17364A"/>
                 </a:solidFill>
@@ -7579,13 +7681,16 @@
                 <a:ea typeface="Aptos" pitchFamily="34" charset="-122"/>
                 <a:cs typeface="Aptos" pitchFamily="34" charset="-120"/>
               </a:rPr>
-              <a:t>AI for Surveillance Signal Review and Epidemiologic Judgment artifact</a:t>
-            </a:r>
-            <a:endParaRPr lang="en-US" sz="1380" dirty="0"/>
-          </a:p>
-          <a:p>
-            <a:r>
-              <a:rPr lang="en-US" sz="1380" dirty="0">
+              <a:t>AI for Surveillance Signal Review and Epidemiologic Judgment.</a:t>
+            </a:r>
+            <a:endParaRPr lang="en-US" sz="1220" dirty="0"/>
+          </a:p>
+          <a:p>
+            <a:pPr indent="0" marL="0">
+              <a:buNone/>
+            </a:pPr>
+            <a:r>
+              <a:rPr lang="en-US" sz="1220" dirty="0">
                 <a:solidFill>
                   <a:srgbClr val="17364A"/>
                 </a:solidFill>
@@ -7595,11 +7700,14 @@
               </a:rPr>
               <a:t>Role and responsibility table</a:t>
             </a:r>
-            <a:endParaRPr lang="en-US" sz="1380" dirty="0"/>
-          </a:p>
-          <a:p>
-            <a:r>
-              <a:rPr lang="en-US" sz="1380" dirty="0">
+            <a:endParaRPr lang="en-US" sz="1220" dirty="0"/>
+          </a:p>
+          <a:p>
+            <a:pPr indent="0" marL="0">
+              <a:buNone/>
+            </a:pPr>
+            <a:r>
+              <a:rPr lang="en-US" sz="1220" dirty="0">
                 <a:solidFill>
                   <a:srgbClr val="17364A"/>
                 </a:solidFill>
@@ -7609,7 +7717,7 @@
               </a:rPr>
               <a:t>Risk and safeguard summary</a:t>
             </a:r>
-            <a:endParaRPr lang="en-US" sz="1380" dirty="0"/>
+            <a:endParaRPr lang="en-US" sz="1220" dirty="0"/>
           </a:p>
         </p:txBody>
       </p:sp>
@@ -7687,17 +7795,17 @@
         </p:nvSpPr>
         <p:spPr>
           <a:xfrm>
-            <a:off x="7799832" y="5001768"/>
-            <a:ext cx="3145536" cy="502920"/>
-          </a:xfrm>
-          <a:prstGeom prst="rect">
-            <a:avLst/>
-          </a:prstGeom>
-          <a:noFill/>
-          <a:ln/>
-        </p:spPr>
-        <p:txBody>
-          <a:bodyPr wrap="square" lIns="0" tIns="0" rIns="0" bIns="0" rtlCol="0" anchor="t">
+            <a:off x="7799832" y="4974336"/>
+            <a:ext cx="3145536" cy="576072"/>
+          </a:xfrm>
+          <a:prstGeom prst="rect">
+            <a:avLst/>
+          </a:prstGeom>
+          <a:noFill/>
+          <a:ln/>
+        </p:spPr>
+        <p:txBody>
+          <a:bodyPr wrap="square" lIns="254" tIns="254" rIns="254" bIns="254" rtlCol="0" anchor="t">
             <a:normAutofit/>
           </a:bodyPr>
           <a:lstStyle/>
@@ -7706,7 +7814,7 @@
               <a:buNone/>
             </a:pPr>
             <a:r>
-              <a:rPr lang="en-US" sz="1550" dirty="0">
+              <a:rPr lang="en-US" sz="1320" dirty="0">
                 <a:solidFill>
                   <a:srgbClr val="17364A"/>
                 </a:solidFill>
@@ -7714,9 +7822,9 @@
                 <a:ea typeface="Aptos" pitchFamily="34" charset="-122"/>
                 <a:cs typeface="Aptos" pitchFamily="34" charset="-120"/>
               </a:rPr>
-              <a:t>Connect the concept to public health purpose, responsible use, required safeguards, documentation, and the next action a department should take.</a:t>
-            </a:r>
-            <a:endParaRPr lang="en-US" sz="1550" dirty="0"/>
+              <a:t>Connect the concept to public health purpose, responsible use, required safeguards, documentation, and the next action a.</a:t>
+            </a:r>
+            <a:endParaRPr lang="en-US" sz="1320" dirty="0"/>
           </a:p>
         </p:txBody>
       </p:sp>
@@ -8017,35 +8125,41 @@
           <a:ln/>
         </p:spPr>
         <p:txBody>
-          <a:bodyPr wrap="square" lIns="635" tIns="635" rIns="635" bIns="635" rtlCol="0" anchor="t">
+          <a:bodyPr wrap="square" lIns="1016" tIns="1016" rIns="1016" bIns="1016" rtlCol="0" anchor="t">
             <a:normAutofit/>
           </a:bodyPr>
           <a:lstStyle/>
           <a:p>
+            <a:pPr indent="0" marL="0">
+              <a:buNone/>
+            </a:pPr>
             <a:r>
               <a:rPr lang="en-US" sz="2100" dirty="0">
                 <a:solidFill>
-                  <a:srgbClr val="17364A"/>
-                </a:solidFill>
-                <a:latin typeface="Aptos" pitchFamily="34" charset="0"/>
-                <a:ea typeface="Aptos" pitchFamily="34" charset="-122"/>
-                <a:cs typeface="Aptos" pitchFamily="34" charset="-120"/>
-              </a:rPr>
-              <a:t>Escalation and monitoring plan</a:t>
+                  <a:srgbClr val="003A63"/>
+                </a:solidFill>
+                <a:latin typeface="Aptos" pitchFamily="34" charset="0"/>
+                <a:ea typeface="Aptos" pitchFamily="34" charset="-122"/>
+                <a:cs typeface="Aptos" pitchFamily="34" charset="-120"/>
+              </a:rPr>
+              <a:t>• Escalation and monitoring plan</a:t>
             </a:r>
             <a:endParaRPr lang="en-US" sz="2100" dirty="0"/>
           </a:p>
           <a:p>
+            <a:pPr indent="0" marL="0">
+              <a:buNone/>
+            </a:pPr>
             <a:r>
               <a:rPr lang="en-US" sz="2100" dirty="0">
                 <a:solidFill>
-                  <a:srgbClr val="17364A"/>
-                </a:solidFill>
-                <a:latin typeface="Aptos" pitchFamily="34" charset="0"/>
-                <a:ea typeface="Aptos" pitchFamily="34" charset="-122"/>
-                <a:cs typeface="Aptos" pitchFamily="34" charset="-120"/>
-              </a:rPr>
-              <a:t>Approval or review note</a:t>
+                  <a:srgbClr val="003A63"/>
+                </a:solidFill>
+                <a:latin typeface="Aptos" pitchFamily="34" charset="0"/>
+                <a:ea typeface="Aptos" pitchFamily="34" charset="-122"/>
+                <a:cs typeface="Aptos" pitchFamily="34" charset="-120"/>
+              </a:rPr>
+              <a:t>• Approval or review note</a:t>
             </a:r>
             <a:endParaRPr lang="en-US" sz="2100" dirty="0"/>
           </a:p>
@@ -8125,17 +8239,17 @@
         </p:nvSpPr>
         <p:spPr>
           <a:xfrm>
-            <a:off x="7799832" y="1828800"/>
-            <a:ext cx="3145536" cy="685800"/>
-          </a:xfrm>
-          <a:prstGeom prst="rect">
-            <a:avLst/>
-          </a:prstGeom>
-          <a:noFill/>
-          <a:ln/>
-        </p:spPr>
-        <p:txBody>
-          <a:bodyPr wrap="square" lIns="0" tIns="0" rIns="0" bIns="0" rtlCol="0" anchor="t">
+            <a:off x="7799832" y="1801368"/>
+            <a:ext cx="3145536" cy="758952"/>
+          </a:xfrm>
+          <a:prstGeom prst="rect">
+            <a:avLst/>
+          </a:prstGeom>
+          <a:noFill/>
+          <a:ln/>
+        </p:spPr>
+        <p:txBody>
+          <a:bodyPr wrap="square" lIns="254" tIns="254" rIns="254" bIns="254" rtlCol="0" anchor="t">
             <a:normAutofit/>
           </a:bodyPr>
           <a:lstStyle/>
@@ -8144,7 +8258,7 @@
               <a:buNone/>
             </a:pPr>
             <a:r>
-              <a:rPr lang="en-US" sz="1550" dirty="0">
+              <a:rPr lang="en-US" sz="1320" dirty="0">
                 <a:solidFill>
                   <a:srgbClr val="17364A"/>
                 </a:solidFill>
@@ -8154,7 +8268,7 @@
               </a:rPr>
               <a:t>Escalation and monitoring plan</a:t>
             </a:r>
-            <a:endParaRPr lang="en-US" sz="1550" dirty="0"/>
+            <a:endParaRPr lang="en-US" sz="1320" dirty="0"/>
           </a:p>
         </p:txBody>
       </p:sp>
@@ -8242,13 +8356,16 @@
           <a:ln/>
         </p:spPr>
         <p:txBody>
-          <a:bodyPr wrap="square" lIns="254" tIns="254" rIns="254" bIns="254" rtlCol="0" anchor="t">
+          <a:bodyPr wrap="square" lIns="508" tIns="508" rIns="508" bIns="508" rtlCol="0" anchor="t">
             <a:normAutofit/>
           </a:bodyPr>
           <a:lstStyle/>
           <a:p>
-            <a:r>
-              <a:rPr lang="en-US" sz="1380" dirty="0">
+            <a:pPr indent="0" marL="0">
+              <a:buNone/>
+            </a:pPr>
+            <a:r>
+              <a:rPr lang="en-US" sz="1220" dirty="0">
                 <a:solidFill>
                   <a:srgbClr val="17364A"/>
                 </a:solidFill>
@@ -8258,11 +8375,14 @@
               </a:rPr>
               <a:t>Escalation and monitoring plan</a:t>
             </a:r>
-            <a:endParaRPr lang="en-US" sz="1380" dirty="0"/>
-          </a:p>
-          <a:p>
-            <a:r>
-              <a:rPr lang="en-US" sz="1380" dirty="0">
+            <a:endParaRPr lang="en-US" sz="1220" dirty="0"/>
+          </a:p>
+          <a:p>
+            <a:pPr indent="0" marL="0">
+              <a:buNone/>
+            </a:pPr>
+            <a:r>
+              <a:rPr lang="en-US" sz="1220" dirty="0">
                 <a:solidFill>
                   <a:srgbClr val="17364A"/>
                 </a:solidFill>
@@ -8272,7 +8392,7 @@
               </a:rPr>
               <a:t>Approval or review note</a:t>
             </a:r>
-            <a:endParaRPr lang="en-US" sz="1380" dirty="0"/>
+            <a:endParaRPr lang="en-US" sz="1220" dirty="0"/>
           </a:p>
         </p:txBody>
       </p:sp>
@@ -8350,17 +8470,17 @@
         </p:nvSpPr>
         <p:spPr>
           <a:xfrm>
-            <a:off x="7799832" y="5001768"/>
-            <a:ext cx="3145536" cy="502920"/>
-          </a:xfrm>
-          <a:prstGeom prst="rect">
-            <a:avLst/>
-          </a:prstGeom>
-          <a:noFill/>
-          <a:ln/>
-        </p:spPr>
-        <p:txBody>
-          <a:bodyPr wrap="square" lIns="0" tIns="0" rIns="0" bIns="0" rtlCol="0" anchor="t">
+            <a:off x="7799832" y="4974336"/>
+            <a:ext cx="3145536" cy="576072"/>
+          </a:xfrm>
+          <a:prstGeom prst="rect">
+            <a:avLst/>
+          </a:prstGeom>
+          <a:noFill/>
+          <a:ln/>
+        </p:spPr>
+        <p:txBody>
+          <a:bodyPr wrap="square" lIns="254" tIns="254" rIns="254" bIns="254" rtlCol="0" anchor="t">
             <a:normAutofit/>
           </a:bodyPr>
           <a:lstStyle/>
@@ -8369,7 +8489,7 @@
               <a:buNone/>
             </a:pPr>
             <a:r>
-              <a:rPr lang="en-US" sz="1550" dirty="0">
+              <a:rPr lang="en-US" sz="1320" dirty="0">
                 <a:solidFill>
                   <a:srgbClr val="17364A"/>
                 </a:solidFill>
@@ -8377,9 +8497,9 @@
                 <a:ea typeface="Aptos" pitchFamily="34" charset="-122"/>
                 <a:cs typeface="Aptos" pitchFamily="34" charset="-120"/>
               </a:rPr>
-              <a:t>Connect the concept to public health purpose, responsible use, required safeguards, documentation, and the next action a department should take.</a:t>
-            </a:r>
-            <a:endParaRPr lang="en-US" sz="1550" dirty="0"/>
+              <a:t>Connect the concept to public health purpose, responsible use, required safeguards, documentation, and the next action a.</a:t>
+            </a:r>
+            <a:endParaRPr lang="en-US" sz="1320" dirty="0"/>
           </a:p>
         </p:txBody>
       </p:sp>
@@ -8680,49 +8800,58 @@
           <a:ln/>
         </p:spPr>
         <p:txBody>
-          <a:bodyPr wrap="square" lIns="635" tIns="635" rIns="635" bIns="635" rtlCol="0" anchor="t">
+          <a:bodyPr wrap="square" lIns="1016" tIns="1016" rIns="1016" bIns="1016" rtlCol="0" anchor="t">
             <a:normAutofit/>
           </a:bodyPr>
           <a:lstStyle/>
           <a:p>
+            <a:pPr indent="0" marL="0">
+              <a:buNone/>
+            </a:pPr>
             <a:r>
               <a:rPr lang="en-US" sz="2100" dirty="0">
                 <a:solidFill>
-                  <a:srgbClr val="17364A"/>
-                </a:solidFill>
-                <a:latin typeface="Aptos" pitchFamily="34" charset="0"/>
-                <a:ea typeface="Aptos" pitchFamily="34" charset="-122"/>
-                <a:cs typeface="Aptos" pitchFamily="34" charset="-120"/>
-              </a:rPr>
-              <a:t>AI for Surveillance Signal Review and Epidemiologic Judgment artifact</a:t>
+                  <a:srgbClr val="003A63"/>
+                </a:solidFill>
+                <a:latin typeface="Aptos" pitchFamily="34" charset="0"/>
+                <a:ea typeface="Aptos" pitchFamily="34" charset="-122"/>
+                <a:cs typeface="Aptos" pitchFamily="34" charset="-120"/>
+              </a:rPr>
+              <a:t>• AI for Surveillance Signal Review and Epidemiologic Judgment artifact</a:t>
             </a:r>
             <a:endParaRPr lang="en-US" sz="2100" dirty="0"/>
           </a:p>
           <a:p>
+            <a:pPr indent="0" marL="0">
+              <a:buNone/>
+            </a:pPr>
             <a:r>
               <a:rPr lang="en-US" sz="2100" dirty="0">
                 <a:solidFill>
-                  <a:srgbClr val="17364A"/>
-                </a:solidFill>
-                <a:latin typeface="Aptos" pitchFamily="34" charset="0"/>
-                <a:ea typeface="Aptos" pitchFamily="34" charset="-122"/>
-                <a:cs typeface="Aptos" pitchFamily="34" charset="-120"/>
-              </a:rPr>
-              <a:t>Role and responsibility table</a:t>
+                  <a:srgbClr val="003A63"/>
+                </a:solidFill>
+                <a:latin typeface="Aptos" pitchFamily="34" charset="0"/>
+                <a:ea typeface="Aptos" pitchFamily="34" charset="-122"/>
+                <a:cs typeface="Aptos" pitchFamily="34" charset="-120"/>
+              </a:rPr>
+              <a:t>• Role and responsibility table</a:t>
             </a:r>
             <a:endParaRPr lang="en-US" sz="2100" dirty="0"/>
           </a:p>
           <a:p>
+            <a:pPr indent="0" marL="0">
+              <a:buNone/>
+            </a:pPr>
             <a:r>
               <a:rPr lang="en-US" sz="2100" dirty="0">
                 <a:solidFill>
-                  <a:srgbClr val="17364A"/>
-                </a:solidFill>
-                <a:latin typeface="Aptos" pitchFamily="34" charset="0"/>
-                <a:ea typeface="Aptos" pitchFamily="34" charset="-122"/>
-                <a:cs typeface="Aptos" pitchFamily="34" charset="-120"/>
-              </a:rPr>
-              <a:t>Risk and safeguard summary</a:t>
+                  <a:srgbClr val="003A63"/>
+                </a:solidFill>
+                <a:latin typeface="Aptos" pitchFamily="34" charset="0"/>
+                <a:ea typeface="Aptos" pitchFamily="34" charset="-122"/>
+                <a:cs typeface="Aptos" pitchFamily="34" charset="-120"/>
+              </a:rPr>
+              <a:t>• Risk and safeguard summary</a:t>
             </a:r>
             <a:endParaRPr lang="en-US" sz="2100" dirty="0"/>
           </a:p>
@@ -8802,17 +8931,17 @@
         </p:nvSpPr>
         <p:spPr>
           <a:xfrm>
-            <a:off x="7799832" y="1828800"/>
-            <a:ext cx="3145536" cy="685800"/>
-          </a:xfrm>
-          <a:prstGeom prst="rect">
-            <a:avLst/>
-          </a:prstGeom>
-          <a:noFill/>
-          <a:ln/>
-        </p:spPr>
-        <p:txBody>
-          <a:bodyPr wrap="square" lIns="0" tIns="0" rIns="0" bIns="0" rtlCol="0" anchor="t">
+            <a:off x="7799832" y="1801368"/>
+            <a:ext cx="3145536" cy="758952"/>
+          </a:xfrm>
+          <a:prstGeom prst="rect">
+            <a:avLst/>
+          </a:prstGeom>
+          <a:noFill/>
+          <a:ln/>
+        </p:spPr>
+        <p:txBody>
+          <a:bodyPr wrap="square" lIns="254" tIns="254" rIns="254" bIns="254" rtlCol="0" anchor="t">
             <a:normAutofit/>
           </a:bodyPr>
           <a:lstStyle/>
@@ -8821,7 +8950,7 @@
               <a:buNone/>
             </a:pPr>
             <a:r>
-              <a:rPr lang="en-US" sz="1550" dirty="0">
+              <a:rPr lang="en-US" sz="1320" dirty="0">
                 <a:solidFill>
                   <a:srgbClr val="17364A"/>
                 </a:solidFill>
@@ -8831,7 +8960,7 @@
               </a:rPr>
               <a:t>AI for Surveillance Signal Review and Epidemiologic Judgment artifact</a:t>
             </a:r>
-            <a:endParaRPr lang="en-US" sz="1550" dirty="0"/>
+            <a:endParaRPr lang="en-US" sz="1320" dirty="0"/>
           </a:p>
         </p:txBody>
       </p:sp>
@@ -8919,13 +9048,16 @@
           <a:ln/>
         </p:spPr>
         <p:txBody>
-          <a:bodyPr wrap="square" lIns="254" tIns="254" rIns="254" bIns="254" rtlCol="0" anchor="t">
+          <a:bodyPr wrap="square" lIns="508" tIns="508" rIns="508" bIns="508" rtlCol="0" anchor="t">
             <a:normAutofit/>
           </a:bodyPr>
           <a:lstStyle/>
           <a:p>
-            <a:r>
-              <a:rPr lang="en-US" sz="1380" dirty="0">
+            <a:pPr indent="0" marL="0">
+              <a:buNone/>
+            </a:pPr>
+            <a:r>
+              <a:rPr lang="en-US" sz="1220" dirty="0">
                 <a:solidFill>
                   <a:srgbClr val="17364A"/>
                 </a:solidFill>
@@ -8935,11 +9067,14 @@
               </a:rPr>
               <a:t>Escalation and monitoring plan</a:t>
             </a:r>
-            <a:endParaRPr lang="en-US" sz="1380" dirty="0"/>
-          </a:p>
-          <a:p>
-            <a:r>
-              <a:rPr lang="en-US" sz="1380" dirty="0">
+            <a:endParaRPr lang="en-US" sz="1220" dirty="0"/>
+          </a:p>
+          <a:p>
+            <a:pPr indent="0" marL="0">
+              <a:buNone/>
+            </a:pPr>
+            <a:r>
+              <a:rPr lang="en-US" sz="1220" dirty="0">
                 <a:solidFill>
                   <a:srgbClr val="17364A"/>
                 </a:solidFill>
@@ -8949,7 +9084,7 @@
               </a:rPr>
               <a:t>Approval or review note</a:t>
             </a:r>
-            <a:endParaRPr lang="en-US" sz="1380" dirty="0"/>
+            <a:endParaRPr lang="en-US" sz="1220" dirty="0"/>
           </a:p>
         </p:txBody>
       </p:sp>
@@ -9027,17 +9162,17 @@
         </p:nvSpPr>
         <p:spPr>
           <a:xfrm>
-            <a:off x="7799832" y="5001768"/>
-            <a:ext cx="3145536" cy="502920"/>
-          </a:xfrm>
-          <a:prstGeom prst="rect">
-            <a:avLst/>
-          </a:prstGeom>
-          <a:noFill/>
-          <a:ln/>
-        </p:spPr>
-        <p:txBody>
-          <a:bodyPr wrap="square" lIns="0" tIns="0" rIns="0" bIns="0" rtlCol="0" anchor="t">
+            <a:off x="7799832" y="4974336"/>
+            <a:ext cx="3145536" cy="576072"/>
+          </a:xfrm>
+          <a:prstGeom prst="rect">
+            <a:avLst/>
+          </a:prstGeom>
+          <a:noFill/>
+          <a:ln/>
+        </p:spPr>
+        <p:txBody>
+          <a:bodyPr wrap="square" lIns="254" tIns="254" rIns="254" bIns="254" rtlCol="0" anchor="t">
             <a:normAutofit/>
           </a:bodyPr>
           <a:lstStyle/>
@@ -9046,7 +9181,7 @@
               <a:buNone/>
             </a:pPr>
             <a:r>
-              <a:rPr lang="en-US" sz="1550" dirty="0">
+              <a:rPr lang="en-US" sz="1320" dirty="0">
                 <a:solidFill>
                   <a:srgbClr val="17364A"/>
                 </a:solidFill>
@@ -9054,9 +9189,9 @@
                 <a:ea typeface="Aptos" pitchFamily="34" charset="-122"/>
                 <a:cs typeface="Aptos" pitchFamily="34" charset="-120"/>
               </a:rPr>
-              <a:t>Use the assignment to test whether you can explain the concept, apply it to a realistic public health situation, and identify what would need review before the work moves forward.</a:t>
-            </a:r>
-            <a:endParaRPr lang="en-US" sz="1550" dirty="0"/>
+              <a:t>Use the assignment to test whether you can explain the concept, apply it to a realistic public health situation, and.</a:t>
+            </a:r>
+            <a:endParaRPr lang="en-US" sz="1320" dirty="0"/>
           </a:p>
         </p:txBody>
       </p:sp>
@@ -9357,49 +9492,58 @@
           <a:ln/>
         </p:spPr>
         <p:txBody>
-          <a:bodyPr wrap="square" lIns="635" tIns="635" rIns="635" bIns="635" rtlCol="0" anchor="t">
+          <a:bodyPr wrap="square" lIns="1016" tIns="1016" rIns="1016" bIns="1016" rtlCol="0" anchor="t">
             <a:normAutofit/>
           </a:bodyPr>
           <a:lstStyle/>
           <a:p>
+            <a:pPr indent="0" marL="0">
+              <a:buNone/>
+            </a:pPr>
             <a:r>
               <a:rPr lang="en-US" sz="2100" dirty="0">
                 <a:solidFill>
-                  <a:srgbClr val="17364A"/>
-                </a:solidFill>
-                <a:latin typeface="Aptos" pitchFamily="34" charset="0"/>
-                <a:ea typeface="Aptos" pitchFamily="34" charset="-122"/>
-                <a:cs typeface="Aptos" pitchFamily="34" charset="-120"/>
-              </a:rPr>
-              <a:t>1. What is the strongest evidence that ai for surveillance signal review and epidemiologic judgment has.</a:t>
+                  <a:srgbClr val="003A63"/>
+                </a:solidFill>
+                <a:latin typeface="Aptos" pitchFamily="34" charset="0"/>
+                <a:ea typeface="Aptos" pitchFamily="34" charset="-122"/>
+                <a:cs typeface="Aptos" pitchFamily="34" charset="-120"/>
+              </a:rPr>
+              <a:t>• 1. What is the strongest evidence that ai for surveillance signal review and epidemiologic.</a:t>
             </a:r>
             <a:endParaRPr lang="en-US" sz="2100" dirty="0"/>
           </a:p>
           <a:p>
+            <a:pPr indent="0" marL="0">
+              <a:buNone/>
+            </a:pPr>
             <a:r>
               <a:rPr lang="en-US" sz="2100" dirty="0">
                 <a:solidFill>
-                  <a:srgbClr val="17364A"/>
-                </a:solidFill>
-                <a:latin typeface="Aptos" pitchFamily="34" charset="0"/>
-                <a:ea typeface="Aptos" pitchFamily="34" charset="-122"/>
-                <a:cs typeface="Aptos" pitchFamily="34" charset="-120"/>
-              </a:rPr>
-              <a:t>2. What is the best reason to assign an accountability owner?</a:t>
+                  <a:srgbClr val="003A63"/>
+                </a:solidFill>
+                <a:latin typeface="Aptos" pitchFamily="34" charset="0"/>
+                <a:ea typeface="Aptos" pitchFamily="34" charset="-122"/>
+                <a:cs typeface="Aptos" pitchFamily="34" charset="-120"/>
+              </a:rPr>
+              <a:t>• 2. What is the best reason to assign an accountability owner?</a:t>
             </a:r>
             <a:endParaRPr lang="en-US" sz="2100" dirty="0"/>
           </a:p>
           <a:p>
+            <a:pPr indent="0" marL="0">
+              <a:buNone/>
+            </a:pPr>
             <a:r>
               <a:rPr lang="en-US" sz="2100" dirty="0">
                 <a:solidFill>
-                  <a:srgbClr val="17364A"/>
-                </a:solidFill>
-                <a:latin typeface="Aptos" pitchFamily="34" charset="0"/>
-                <a:ea typeface="Aptos" pitchFamily="34" charset="-122"/>
-                <a:cs typeface="Aptos" pitchFamily="34" charset="-120"/>
-              </a:rPr>
-              <a:t>3. When should an AI-supported workflow be escalated for review?</a:t>
+                  <a:srgbClr val="003A63"/>
+                </a:solidFill>
+                <a:latin typeface="Aptos" pitchFamily="34" charset="0"/>
+                <a:ea typeface="Aptos" pitchFamily="34" charset="-122"/>
+                <a:cs typeface="Aptos" pitchFamily="34" charset="-120"/>
+              </a:rPr>
+              <a:t>• 3. When should an AI-supported workflow be escalated for review?</a:t>
             </a:r>
             <a:endParaRPr lang="en-US" sz="2100" dirty="0"/>
           </a:p>
@@ -9479,17 +9623,17 @@
         </p:nvSpPr>
         <p:spPr>
           <a:xfrm>
-            <a:off x="7799832" y="1828800"/>
-            <a:ext cx="3145536" cy="685800"/>
-          </a:xfrm>
-          <a:prstGeom prst="rect">
-            <a:avLst/>
-          </a:prstGeom>
-          <a:noFill/>
-          <a:ln/>
-        </p:spPr>
-        <p:txBody>
-          <a:bodyPr wrap="square" lIns="0" tIns="0" rIns="0" bIns="0" rtlCol="0" anchor="t">
+            <a:off x="7799832" y="1801368"/>
+            <a:ext cx="3145536" cy="758952"/>
+          </a:xfrm>
+          <a:prstGeom prst="rect">
+            <a:avLst/>
+          </a:prstGeom>
+          <a:noFill/>
+          <a:ln/>
+        </p:spPr>
+        <p:txBody>
+          <a:bodyPr wrap="square" lIns="254" tIns="254" rIns="254" bIns="254" rtlCol="0" anchor="t">
             <a:normAutofit/>
           </a:bodyPr>
           <a:lstStyle/>
@@ -9498,7 +9642,7 @@
               <a:buNone/>
             </a:pPr>
             <a:r>
-              <a:rPr lang="en-US" sz="1550" dirty="0">
+              <a:rPr lang="en-US" sz="1320" dirty="0">
                 <a:solidFill>
                   <a:srgbClr val="17364A"/>
                 </a:solidFill>
@@ -9508,7 +9652,7 @@
               </a:rPr>
               <a:t>1. What is the strongest evidence that ai for surveillance signal review and epidemiologic judgment has.</a:t>
             </a:r>
-            <a:endParaRPr lang="en-US" sz="1550" dirty="0"/>
+            <a:endParaRPr lang="en-US" sz="1320" dirty="0"/>
           </a:p>
         </p:txBody>
       </p:sp>
@@ -9596,13 +9740,16 @@
           <a:ln/>
         </p:spPr>
         <p:txBody>
-          <a:bodyPr wrap="square" lIns="254" tIns="254" rIns="254" bIns="254" rtlCol="0" anchor="t">
+          <a:bodyPr wrap="square" lIns="508" tIns="508" rIns="508" bIns="508" rtlCol="0" anchor="t">
             <a:normAutofit/>
           </a:bodyPr>
           <a:lstStyle/>
           <a:p>
-            <a:r>
-              <a:rPr lang="en-US" sz="1380" dirty="0">
+            <a:pPr indent="0" marL="0">
+              <a:buNone/>
+            </a:pPr>
+            <a:r>
+              <a:rPr lang="en-US" sz="1220" dirty="0">
                 <a:solidFill>
                   <a:srgbClr val="17364A"/>
                 </a:solidFill>
@@ -9612,11 +9759,14 @@
               </a:rPr>
               <a:t>1.</a:t>
             </a:r>
-            <a:endParaRPr lang="en-US" sz="1380" dirty="0"/>
-          </a:p>
-          <a:p>
-            <a:r>
-              <a:rPr lang="en-US" sz="1380" dirty="0">
+            <a:endParaRPr lang="en-US" sz="1220" dirty="0"/>
+          </a:p>
+          <a:p>
+            <a:pPr indent="0" marL="0">
+              <a:buNone/>
+            </a:pPr>
+            <a:r>
+              <a:rPr lang="en-US" sz="1220" dirty="0">
                 <a:solidFill>
                   <a:srgbClr val="17364A"/>
                 </a:solidFill>
@@ -9624,13 +9774,16 @@
                 <a:ea typeface="Aptos" pitchFamily="34" charset="-122"/>
                 <a:cs typeface="Aptos" pitchFamily="34" charset="-120"/>
               </a:rPr>
-              <a:t>What is the strongest evidence that ai for surveillance signal review and epidemiologic.</a:t>
-            </a:r>
-            <a:endParaRPr lang="en-US" sz="1380" dirty="0"/>
-          </a:p>
-          <a:p>
-            <a:r>
-              <a:rPr lang="en-US" sz="1380" dirty="0">
+              <a:t>What is the strongest evidence that ai for surveillance signal.</a:t>
+            </a:r>
+            <a:endParaRPr lang="en-US" sz="1220" dirty="0"/>
+          </a:p>
+          <a:p>
+            <a:pPr indent="0" marL="0">
+              <a:buNone/>
+            </a:pPr>
+            <a:r>
+              <a:rPr lang="en-US" sz="1220" dirty="0">
                 <a:solidFill>
                   <a:srgbClr val="17364A"/>
                 </a:solidFill>
@@ -9640,7 +9793,7 @@
               </a:rPr>
               <a:t>2.</a:t>
             </a:r>
-            <a:endParaRPr lang="en-US" sz="1380" dirty="0"/>
+            <a:endParaRPr lang="en-US" sz="1220" dirty="0"/>
           </a:p>
         </p:txBody>
       </p:sp>
@@ -9718,17 +9871,17 @@
         </p:nvSpPr>
         <p:spPr>
           <a:xfrm>
-            <a:off x="7799832" y="5001768"/>
-            <a:ext cx="3145536" cy="502920"/>
-          </a:xfrm>
-          <a:prstGeom prst="rect">
-            <a:avLst/>
-          </a:prstGeom>
-          <a:noFill/>
-          <a:ln/>
-        </p:spPr>
-        <p:txBody>
-          <a:bodyPr wrap="square" lIns="0" tIns="0" rIns="0" bIns="0" rtlCol="0" anchor="t">
+            <a:off x="7799832" y="4974336"/>
+            <a:ext cx="3145536" cy="576072"/>
+          </a:xfrm>
+          <a:prstGeom prst="rect">
+            <a:avLst/>
+          </a:prstGeom>
+          <a:noFill/>
+          <a:ln/>
+        </p:spPr>
+        <p:txBody>
+          <a:bodyPr wrap="square" lIns="254" tIns="254" rIns="254" bIns="254" rtlCol="0" anchor="t">
             <a:normAutofit/>
           </a:bodyPr>
           <a:lstStyle/>
@@ -9737,7 +9890,7 @@
               <a:buNone/>
             </a:pPr>
             <a:r>
-              <a:rPr lang="en-US" sz="1550" dirty="0">
+              <a:rPr lang="en-US" sz="1320" dirty="0">
                 <a:solidFill>
                   <a:srgbClr val="17364A"/>
                 </a:solidFill>
@@ -9745,9 +9898,9 @@
                 <a:ea typeface="Aptos" pitchFamily="34" charset="-122"/>
                 <a:cs typeface="Aptos" pitchFamily="34" charset="-120"/>
               </a:rPr>
-              <a:t>Use the assignment to test whether you can explain the concept, apply it to a realistic public health situation, and identify what would need review before the work moves forward.</a:t>
-            </a:r>
-            <a:endParaRPr lang="en-US" sz="1550" dirty="0"/>
+              <a:t>Use the assignment to test whether you can explain the concept, apply it to a realistic public health situation, and.</a:t>
+            </a:r>
+            <a:endParaRPr lang="en-US" sz="1320" dirty="0"/>
           </a:p>
         </p:txBody>
       </p:sp>
@@ -10048,49 +10201,58 @@
           <a:ln/>
         </p:spPr>
         <p:txBody>
-          <a:bodyPr wrap="square" lIns="635" tIns="635" rIns="635" bIns="635" rtlCol="0" anchor="t">
+          <a:bodyPr wrap="square" lIns="1016" tIns="1016" rIns="1016" bIns="1016" rtlCol="0" anchor="t">
             <a:normAutofit/>
           </a:bodyPr>
           <a:lstStyle/>
           <a:p>
+            <a:pPr indent="0" marL="0">
+              <a:buNone/>
+            </a:pPr>
             <a:r>
               <a:rPr lang="en-US" sz="2100" dirty="0">
                 <a:solidFill>
-                  <a:srgbClr val="17364A"/>
-                </a:solidFill>
-                <a:latin typeface="Aptos" pitchFamily="34" charset="0"/>
-                <a:ea typeface="Aptos" pitchFamily="34" charset="-122"/>
-                <a:cs typeface="Aptos" pitchFamily="34" charset="-120"/>
-              </a:rPr>
-              <a:t>This module focuses on using AI to support signal detection while preserving epidemiologic judgment.</a:t>
+                  <a:srgbClr val="003A63"/>
+                </a:solidFill>
+                <a:latin typeface="Aptos" pitchFamily="34" charset="0"/>
+                <a:ea typeface="Aptos" pitchFamily="34" charset="-122"/>
+                <a:cs typeface="Aptos" pitchFamily="34" charset="-120"/>
+              </a:rPr>
+              <a:t>• This module focuses on using AI to support signal detection while preserving epidemiologic.</a:t>
             </a:r>
             <a:endParaRPr lang="en-US" sz="2100" dirty="0"/>
           </a:p>
           <a:p>
+            <a:pPr indent="0" marL="0">
+              <a:buNone/>
+            </a:pPr>
             <a:r>
               <a:rPr lang="en-US" sz="2100" dirty="0">
                 <a:solidFill>
-                  <a:srgbClr val="17364A"/>
-                </a:solidFill>
-                <a:latin typeface="Aptos" pitchFamily="34" charset="0"/>
-                <a:ea typeface="Aptos" pitchFamily="34" charset="-122"/>
-                <a:cs typeface="Aptos" pitchFamily="34" charset="-120"/>
-              </a:rPr>
-              <a:t>It is designed for public health staff who must translate responsible AI principles into repeatable decisions,.</a:t>
+                  <a:srgbClr val="003A63"/>
+                </a:solidFill>
+                <a:latin typeface="Aptos" pitchFamily="34" charset="0"/>
+                <a:ea typeface="Aptos" pitchFamily="34" charset="-122"/>
+                <a:cs typeface="Aptos" pitchFamily="34" charset="-120"/>
+              </a:rPr>
+              <a:t>• It is designed for public health staff who must translate responsible AI principles into.</a:t>
             </a:r>
             <a:endParaRPr lang="en-US" sz="2100" dirty="0"/>
           </a:p>
           <a:p>
+            <a:pPr indent="0" marL="0">
+              <a:buNone/>
+            </a:pPr>
             <a:r>
               <a:rPr lang="en-US" sz="2100" dirty="0">
                 <a:solidFill>
-                  <a:srgbClr val="17364A"/>
-                </a:solidFill>
-                <a:latin typeface="Aptos" pitchFamily="34" charset="0"/>
-                <a:ea typeface="Aptos" pitchFamily="34" charset="-122"/>
-                <a:cs typeface="Aptos" pitchFamily="34" charset="-120"/>
-              </a:rPr>
-              <a:t>The module helps learners move beyond general awareness by producing a practical artifact that can be used in.</a:t>
+                  <a:srgbClr val="003A63"/>
+                </a:solidFill>
+                <a:latin typeface="Aptos" pitchFamily="34" charset="0"/>
+                <a:ea typeface="Aptos" pitchFamily="34" charset="-122"/>
+                <a:cs typeface="Aptos" pitchFamily="34" charset="-120"/>
+              </a:rPr>
+              <a:t>• The module helps learners move beyond general awareness by producing a practical artifact that.</a:t>
             </a:r>
             <a:endParaRPr lang="en-US" sz="2100" dirty="0"/>
           </a:p>
@@ -10170,17 +10332,17 @@
         </p:nvSpPr>
         <p:spPr>
           <a:xfrm>
-            <a:off x="8074152" y="1920240"/>
-            <a:ext cx="2825496" cy="1280160"/>
-          </a:xfrm>
-          <a:prstGeom prst="rect">
-            <a:avLst/>
-          </a:prstGeom>
-          <a:noFill/>
-          <a:ln/>
-        </p:spPr>
-        <p:txBody>
-          <a:bodyPr wrap="square" lIns="0" tIns="0" rIns="0" bIns="0" rtlCol="0" anchor="t">
+            <a:off x="8074152" y="1892808"/>
+            <a:ext cx="2825496" cy="1353312"/>
+          </a:xfrm>
+          <a:prstGeom prst="rect">
+            <a:avLst/>
+          </a:prstGeom>
+          <a:noFill/>
+          <a:ln/>
+        </p:spPr>
+        <p:txBody>
+          <a:bodyPr wrap="square" lIns="254" tIns="254" rIns="254" bIns="254" rtlCol="0" anchor="t">
             <a:normAutofit/>
           </a:bodyPr>
           <a:lstStyle/>
@@ -10189,7 +10351,7 @@
               <a:buNone/>
             </a:pPr>
             <a:r>
-              <a:rPr lang="en-US" sz="1550" dirty="0">
+              <a:rPr lang="en-US" sz="1320" dirty="0">
                 <a:solidFill>
                   <a:srgbClr val="17364A"/>
                 </a:solidFill>
@@ -10197,43 +10359,9 @@
                 <a:ea typeface="Aptos" pitchFamily="34" charset="-122"/>
                 <a:cs typeface="Aptos" pitchFamily="34" charset="-120"/>
               </a:rPr>
-              <a:t>Level: intermediate/practitioner</a:t>
-            </a:r>
-            <a:endParaRPr lang="en-US" sz="1550" dirty="0"/>
-          </a:p>
-          <a:p>
-            <a:pPr indent="0" marL="0">
-              <a:buNone/>
-            </a:pPr>
-            <a:r>
-              <a:rPr lang="en-US" sz="1550" dirty="0">
-                <a:solidFill>
-                  <a:srgbClr val="17364A"/>
-                </a:solidFill>
-                <a:latin typeface="Aptos" pitchFamily="34" charset="0"/>
-                <a:ea typeface="Aptos" pitchFamily="34" charset="-122"/>
-                <a:cs typeface="Aptos" pitchFamily="34" charset="-120"/>
-              </a:rPr>
-              <a:t>Primary track: Epidemiology Role-Based Track</a:t>
-            </a:r>
-            <a:endParaRPr lang="en-US" sz="1550" dirty="0"/>
-          </a:p>
-          <a:p>
-            <a:pPr indent="0" marL="0">
-              <a:buNone/>
-            </a:pPr>
-            <a:r>
-              <a:rPr lang="en-US" sz="1550" dirty="0">
-                <a:solidFill>
-                  <a:srgbClr val="17364A"/>
-                </a:solidFill>
-                <a:latin typeface="Aptos" pitchFamily="34" charset="0"/>
-                <a:ea typeface="Aptos" pitchFamily="34" charset="-122"/>
-                <a:cs typeface="Aptos" pitchFamily="34" charset="-120"/>
-              </a:rPr>
-              <a:t>Appears in tracks: epidemiology, analytics-modeling, operations-data-quality, governance-security</a:t>
-            </a:r>
-            <a:endParaRPr lang="en-US" sz="1550" dirty="0"/>
+              <a:t>Level: intermediate/practitioner Primary track: Epidemiology Role-Based Track Appears in tracks: epidemiology,.</a:t>
+            </a:r>
+            <a:endParaRPr lang="en-US" sz="1320" dirty="0"/>
           </a:p>
         </p:txBody>
       </p:sp>
@@ -10321,13 +10449,16 @@
           <a:ln/>
         </p:spPr>
         <p:txBody>
-          <a:bodyPr wrap="square" lIns="254" tIns="254" rIns="254" bIns="254" rtlCol="0" anchor="t">
+          <a:bodyPr wrap="square" lIns="508" tIns="508" rIns="508" bIns="508" rtlCol="0" anchor="t">
             <a:normAutofit/>
           </a:bodyPr>
           <a:lstStyle/>
           <a:p>
-            <a:r>
-              <a:rPr lang="en-US" sz="1380" dirty="0">
+            <a:pPr indent="0" marL="0">
+              <a:buNone/>
+            </a:pPr>
+            <a:r>
+              <a:rPr lang="en-US" sz="1220" dirty="0">
                 <a:solidFill>
                   <a:srgbClr val="17364A"/>
                 </a:solidFill>
@@ -10337,11 +10468,14 @@
               </a:rPr>
               <a:t>Read the module for shared vocabulary and context.</a:t>
             </a:r>
-            <a:endParaRPr lang="en-US" sz="1380" dirty="0"/>
-          </a:p>
-          <a:p>
-            <a:r>
-              <a:rPr lang="en-US" sz="1380" dirty="0">
+            <a:endParaRPr lang="en-US" sz="1220" dirty="0"/>
+          </a:p>
+          <a:p>
+            <a:pPr indent="0" marL="0">
+              <a:buNone/>
+            </a:pPr>
+            <a:r>
+              <a:rPr lang="en-US" sz="1220" dirty="0">
                 <a:solidFill>
                   <a:srgbClr val="17364A"/>
                 </a:solidFill>
@@ -10351,11 +10485,14 @@
               </a:rPr>
               <a:t>Complete the practical exercise to apply the concept.</a:t>
             </a:r>
-            <a:endParaRPr lang="en-US" sz="1380" dirty="0"/>
-          </a:p>
-          <a:p>
-            <a:r>
-              <a:rPr lang="en-US" sz="1380" dirty="0">
+            <a:endParaRPr lang="en-US" sz="1220" dirty="0"/>
+          </a:p>
+          <a:p>
+            <a:pPr indent="0" marL="0">
+              <a:buNone/>
+            </a:pPr>
+            <a:r>
+              <a:rPr lang="en-US" sz="1220" dirty="0">
                 <a:solidFill>
                   <a:srgbClr val="17364A"/>
                 </a:solidFill>
@@ -10365,7 +10502,7 @@
               </a:rPr>
               <a:t>Use the notes and references for deeper review.</a:t>
             </a:r>
-            <a:endParaRPr lang="en-US" sz="1380" dirty="0"/>
+            <a:endParaRPr lang="en-US" sz="1220" dirty="0"/>
           </a:p>
         </p:txBody>
       </p:sp>
@@ -10666,49 +10803,58 @@
           <a:ln/>
         </p:spPr>
         <p:txBody>
-          <a:bodyPr wrap="square" lIns="635" tIns="635" rIns="635" bIns="635" rtlCol="0" anchor="t">
+          <a:bodyPr wrap="square" lIns="1016" tIns="1016" rIns="1016" bIns="1016" rtlCol="0" anchor="t">
             <a:normAutofit/>
           </a:bodyPr>
           <a:lstStyle/>
           <a:p>
+            <a:pPr indent="0" marL="0">
+              <a:buNone/>
+            </a:pPr>
             <a:r>
               <a:rPr lang="en-US" sz="2100" dirty="0">
                 <a:solidFill>
-                  <a:srgbClr val="17364A"/>
-                </a:solidFill>
-                <a:latin typeface="Aptos" pitchFamily="34" charset="0"/>
-                <a:ea typeface="Aptos" pitchFamily="34" charset="-122"/>
-                <a:cs typeface="Aptos" pitchFamily="34" charset="-120"/>
-              </a:rPr>
-              <a:t>CDC Public Health Data Strategy and Data Modernization resources:.</a:t>
+                  <a:srgbClr val="003A63"/>
+                </a:solidFill>
+                <a:latin typeface="Aptos" pitchFamily="34" charset="0"/>
+                <a:ea typeface="Aptos" pitchFamily="34" charset="-122"/>
+                <a:cs typeface="Aptos" pitchFamily="34" charset="-120"/>
+              </a:rPr>
+              <a:t>• CDC Public Health Data Strategy and Data Modernization resources:.</a:t>
             </a:r>
             <a:endParaRPr lang="en-US" sz="2100" dirty="0"/>
           </a:p>
           <a:p>
+            <a:pPr indent="0" marL="0">
+              <a:buNone/>
+            </a:pPr>
             <a:r>
               <a:rPr lang="en-US" sz="2100" dirty="0">
                 <a:solidFill>
-                  <a:srgbClr val="17364A"/>
-                </a:solidFill>
-                <a:latin typeface="Aptos" pitchFamily="34" charset="0"/>
-                <a:ea typeface="Aptos" pitchFamily="34" charset="-122"/>
-                <a:cs typeface="Aptos" pitchFamily="34" charset="-120"/>
-              </a:rPr>
-              <a:t>NIST Artificial Intelligence Risk Management Framework and NIST Generative AI Profile:.</a:t>
+                  <a:srgbClr val="003A63"/>
+                </a:solidFill>
+                <a:latin typeface="Aptos" pitchFamily="34" charset="0"/>
+                <a:ea typeface="Aptos" pitchFamily="34" charset="-122"/>
+                <a:cs typeface="Aptos" pitchFamily="34" charset="-120"/>
+              </a:rPr>
+              <a:t>• NIST Artificial Intelligence Risk Management Framework and NIST Generative AI Profile:.</a:t>
             </a:r>
             <a:endParaRPr lang="en-US" sz="2100" dirty="0"/>
           </a:p>
           <a:p>
+            <a:pPr indent="0" marL="0">
+              <a:buNone/>
+            </a:pPr>
             <a:r>
               <a:rPr lang="en-US" sz="2100" dirty="0">
                 <a:solidFill>
-                  <a:srgbClr val="17364A"/>
-                </a:solidFill>
-                <a:latin typeface="Aptos" pitchFamily="34" charset="0"/>
-                <a:ea typeface="Aptos" pitchFamily="34" charset="-122"/>
-                <a:cs typeface="Aptos" pitchFamily="34" charset="-120"/>
-              </a:rPr>
-              <a:t>WHO Ethics and Governance of Artificial Intelligence for Health guidance:.</a:t>
+                  <a:srgbClr val="003A63"/>
+                </a:solidFill>
+                <a:latin typeface="Aptos" pitchFamily="34" charset="0"/>
+                <a:ea typeface="Aptos" pitchFamily="34" charset="-122"/>
+                <a:cs typeface="Aptos" pitchFamily="34" charset="-120"/>
+              </a:rPr>
+              <a:t>• WHO Ethics and Governance of Artificial Intelligence for Health guidance:.</a:t>
             </a:r>
             <a:endParaRPr lang="en-US" sz="2100" dirty="0"/>
           </a:p>
@@ -10788,17 +10934,17 @@
         </p:nvSpPr>
         <p:spPr>
           <a:xfrm>
-            <a:off x="7799832" y="1828800"/>
-            <a:ext cx="3145536" cy="685800"/>
-          </a:xfrm>
-          <a:prstGeom prst="rect">
-            <a:avLst/>
-          </a:prstGeom>
-          <a:noFill/>
-          <a:ln/>
-        </p:spPr>
-        <p:txBody>
-          <a:bodyPr wrap="square" lIns="0" tIns="0" rIns="0" bIns="0" rtlCol="0" anchor="t">
+            <a:off x="7799832" y="1801368"/>
+            <a:ext cx="3145536" cy="758952"/>
+          </a:xfrm>
+          <a:prstGeom prst="rect">
+            <a:avLst/>
+          </a:prstGeom>
+          <a:noFill/>
+          <a:ln/>
+        </p:spPr>
+        <p:txBody>
+          <a:bodyPr wrap="square" lIns="254" tIns="254" rIns="254" bIns="254" rtlCol="0" anchor="t">
             <a:normAutofit/>
           </a:bodyPr>
           <a:lstStyle/>
@@ -10807,7 +10953,7 @@
               <a:buNone/>
             </a:pPr>
             <a:r>
-              <a:rPr lang="en-US" sz="1550" dirty="0">
+              <a:rPr lang="en-US" sz="1320" dirty="0">
                 <a:solidFill>
                   <a:srgbClr val="17364A"/>
                 </a:solidFill>
@@ -10817,7 +10963,7 @@
               </a:rPr>
               <a:t>CDC Public Health Data Strategy and Data Modernization resources:.</a:t>
             </a:r>
-            <a:endParaRPr lang="en-US" sz="1550" dirty="0"/>
+            <a:endParaRPr lang="en-US" sz="1320" dirty="0"/>
           </a:p>
         </p:txBody>
       </p:sp>
@@ -10905,13 +11051,16 @@
           <a:ln/>
         </p:spPr>
         <p:txBody>
-          <a:bodyPr wrap="square" lIns="254" tIns="254" rIns="254" bIns="254" rtlCol="0" anchor="t">
+          <a:bodyPr wrap="square" lIns="508" tIns="508" rIns="508" bIns="508" rtlCol="0" anchor="t">
             <a:normAutofit/>
           </a:bodyPr>
           <a:lstStyle/>
           <a:p>
-            <a:r>
-              <a:rPr lang="en-US" sz="1380" dirty="0">
+            <a:pPr indent="0" marL="0">
+              <a:buNone/>
+            </a:pPr>
+            <a:r>
+              <a:rPr lang="en-US" sz="1220" dirty="0">
                 <a:solidFill>
                   <a:srgbClr val="17364A"/>
                 </a:solidFill>
@@ -10921,11 +11070,14 @@
               </a:rPr>
               <a:t>OWASP Top 10 for Large Language Model Applications:.</a:t>
             </a:r>
-            <a:endParaRPr lang="en-US" sz="1380" dirty="0"/>
-          </a:p>
-          <a:p>
-            <a:r>
-              <a:rPr lang="en-US" sz="1380" dirty="0">
+            <a:endParaRPr lang="en-US" sz="1220" dirty="0"/>
+          </a:p>
+          <a:p>
+            <a:pPr indent="0" marL="0">
+              <a:buNone/>
+            </a:pPr>
+            <a:r>
+              <a:rPr lang="en-US" sz="1220" dirty="0">
                 <a:solidFill>
                   <a:srgbClr val="17364A"/>
                 </a:solidFill>
@@ -10933,9 +11085,9 @@
                 <a:ea typeface="Aptos" pitchFamily="34" charset="-122"/>
                 <a:cs typeface="Aptos" pitchFamily="34" charset="-120"/>
               </a:rPr>
-              <a:t>ONC health IT, interoperability, and information blocking resources:.</a:t>
-            </a:r>
-            <a:endParaRPr lang="en-US" sz="1380" dirty="0"/>
+              <a:t>ONC health IT, interoperability, and information blocking.</a:t>
+            </a:r>
+            <a:endParaRPr lang="en-US" sz="1220" dirty="0"/>
           </a:p>
         </p:txBody>
       </p:sp>
@@ -11013,17 +11165,17 @@
         </p:nvSpPr>
         <p:spPr>
           <a:xfrm>
-            <a:off x="7799832" y="5001768"/>
-            <a:ext cx="3145536" cy="502920"/>
-          </a:xfrm>
-          <a:prstGeom prst="rect">
-            <a:avLst/>
-          </a:prstGeom>
-          <a:noFill/>
-          <a:ln/>
-        </p:spPr>
-        <p:txBody>
-          <a:bodyPr wrap="square" lIns="0" tIns="0" rIns="0" bIns="0" rtlCol="0" anchor="t">
+            <a:off x="7799832" y="4974336"/>
+            <a:ext cx="3145536" cy="576072"/>
+          </a:xfrm>
+          <a:prstGeom prst="rect">
+            <a:avLst/>
+          </a:prstGeom>
+          <a:noFill/>
+          <a:ln/>
+        </p:spPr>
+        <p:txBody>
+          <a:bodyPr wrap="square" lIns="254" tIns="254" rIns="254" bIns="254" rtlCol="0" anchor="t">
             <a:normAutofit/>
           </a:bodyPr>
           <a:lstStyle/>
@@ -11032,7 +11184,7 @@
               <a:buNone/>
             </a:pPr>
             <a:r>
-              <a:rPr lang="en-US" sz="1550" dirty="0">
+              <a:rPr lang="en-US" sz="1320" dirty="0">
                 <a:solidFill>
                   <a:srgbClr val="17364A"/>
                 </a:solidFill>
@@ -11040,9 +11192,9 @@
                 <a:ea typeface="Aptos" pitchFamily="34" charset="-122"/>
                 <a:cs typeface="Aptos" pitchFamily="34" charset="-120"/>
               </a:rPr>
-              <a:t>Connect the concept to public health purpose, responsible use, required safeguards, documentation, and the next action a department should take.</a:t>
-            </a:r>
-            <a:endParaRPr lang="en-US" sz="1550" dirty="0"/>
+              <a:t>Connect the concept to public health purpose, responsible use, required safeguards, documentation, and the next action a.</a:t>
+            </a:r>
+            <a:endParaRPr lang="en-US" sz="1320" dirty="0"/>
           </a:p>
         </p:txBody>
       </p:sp>
@@ -11343,21 +11495,24 @@
           <a:ln/>
         </p:spPr>
         <p:txBody>
-          <a:bodyPr wrap="square" lIns="635" tIns="635" rIns="635" bIns="635" rtlCol="0" anchor="t">
+          <a:bodyPr wrap="square" lIns="1016" tIns="1016" rIns="1016" bIns="1016" rtlCol="0" anchor="t">
             <a:normAutofit/>
           </a:bodyPr>
           <a:lstStyle/>
           <a:p>
+            <a:pPr indent="0" marL="0">
+              <a:buNone/>
+            </a:pPr>
             <a:r>
               <a:rPr lang="en-US" sz="2100" dirty="0">
                 <a:solidFill>
-                  <a:srgbClr val="17364A"/>
-                </a:solidFill>
-                <a:latin typeface="Aptos" pitchFamily="34" charset="0"/>
-                <a:ea typeface="Aptos" pitchFamily="34" charset="-122"/>
-                <a:cs typeface="Aptos" pitchFamily="34" charset="-120"/>
-              </a:rPr>
-              <a:t>Agency policies for privacy, public records, cybersecurity, procurement, civil rights, accessibility,.</a:t>
+                  <a:srgbClr val="003A63"/>
+                </a:solidFill>
+                <a:latin typeface="Aptos" pitchFamily="34" charset="0"/>
+                <a:ea typeface="Aptos" pitchFamily="34" charset="-122"/>
+                <a:cs typeface="Aptos" pitchFamily="34" charset="-120"/>
+              </a:rPr>
+              <a:t>• Agency policies for privacy, public records, cybersecurity, procurement, civil rights,.</a:t>
             </a:r>
             <a:endParaRPr lang="en-US" sz="2100" dirty="0"/>
           </a:p>
@@ -11437,17 +11592,17 @@
         </p:nvSpPr>
         <p:spPr>
           <a:xfrm>
-            <a:off x="7799832" y="1828800"/>
-            <a:ext cx="3145536" cy="685800"/>
-          </a:xfrm>
-          <a:prstGeom prst="rect">
-            <a:avLst/>
-          </a:prstGeom>
-          <a:noFill/>
-          <a:ln/>
-        </p:spPr>
-        <p:txBody>
-          <a:bodyPr wrap="square" lIns="0" tIns="0" rIns="0" bIns="0" rtlCol="0" anchor="t">
+            <a:off x="7799832" y="1801368"/>
+            <a:ext cx="3145536" cy="758952"/>
+          </a:xfrm>
+          <a:prstGeom prst="rect">
+            <a:avLst/>
+          </a:prstGeom>
+          <a:noFill/>
+          <a:ln/>
+        </p:spPr>
+        <p:txBody>
+          <a:bodyPr wrap="square" lIns="254" tIns="254" rIns="254" bIns="254" rtlCol="0" anchor="t">
             <a:normAutofit/>
           </a:bodyPr>
           <a:lstStyle/>
@@ -11456,7 +11611,7 @@
               <a:buNone/>
             </a:pPr>
             <a:r>
-              <a:rPr lang="en-US" sz="1550" dirty="0">
+              <a:rPr lang="en-US" sz="1320" dirty="0">
                 <a:solidFill>
                   <a:srgbClr val="17364A"/>
                 </a:solidFill>
@@ -11466,7 +11621,7 @@
               </a:rPr>
               <a:t>Agency policies for privacy, public records, cybersecurity, procurement, civil rights, accessibility,.</a:t>
             </a:r>
-            <a:endParaRPr lang="en-US" sz="1550" dirty="0"/>
+            <a:endParaRPr lang="en-US" sz="1320" dirty="0"/>
           </a:p>
         </p:txBody>
       </p:sp>
@@ -11554,13 +11709,16 @@
           <a:ln/>
         </p:spPr>
         <p:txBody>
-          <a:bodyPr wrap="square" lIns="254" tIns="254" rIns="254" bIns="254" rtlCol="0" anchor="t">
+          <a:bodyPr wrap="square" lIns="508" tIns="508" rIns="508" bIns="508" rtlCol="0" anchor="t">
             <a:normAutofit/>
           </a:bodyPr>
           <a:lstStyle/>
           <a:p>
-            <a:r>
-              <a:rPr lang="en-US" sz="1380" dirty="0">
+            <a:pPr indent="0" marL="0">
+              <a:buNone/>
+            </a:pPr>
+            <a:r>
+              <a:rPr lang="en-US" sz="1220" dirty="0">
                 <a:solidFill>
                   <a:srgbClr val="17364A"/>
                 </a:solidFill>
@@ -11568,9 +11726,9 @@
                 <a:ea typeface="Aptos" pitchFamily="34" charset="-122"/>
                 <a:cs typeface="Aptos" pitchFamily="34" charset="-120"/>
               </a:rPr>
-              <a:t>Agency policies for privacy, public records, cybersecurity, procurement, civil rights,.</a:t>
-            </a:r>
-            <a:endParaRPr lang="en-US" sz="1380" dirty="0"/>
+              <a:t>Agency policies for privacy, public records, cybersecurity,.</a:t>
+            </a:r>
+            <a:endParaRPr lang="en-US" sz="1220" dirty="0"/>
           </a:p>
         </p:txBody>
       </p:sp>
@@ -11648,17 +11806,17 @@
         </p:nvSpPr>
         <p:spPr>
           <a:xfrm>
-            <a:off x="7799832" y="5001768"/>
-            <a:ext cx="3145536" cy="502920"/>
-          </a:xfrm>
-          <a:prstGeom prst="rect">
-            <a:avLst/>
-          </a:prstGeom>
-          <a:noFill/>
-          <a:ln/>
-        </p:spPr>
-        <p:txBody>
-          <a:bodyPr wrap="square" lIns="0" tIns="0" rIns="0" bIns="0" rtlCol="0" anchor="t">
+            <a:off x="7799832" y="4974336"/>
+            <a:ext cx="3145536" cy="576072"/>
+          </a:xfrm>
+          <a:prstGeom prst="rect">
+            <a:avLst/>
+          </a:prstGeom>
+          <a:noFill/>
+          <a:ln/>
+        </p:spPr>
+        <p:txBody>
+          <a:bodyPr wrap="square" lIns="254" tIns="254" rIns="254" bIns="254" rtlCol="0" anchor="t">
             <a:normAutofit/>
           </a:bodyPr>
           <a:lstStyle/>
@@ -11667,7 +11825,7 @@
               <a:buNone/>
             </a:pPr>
             <a:r>
-              <a:rPr lang="en-US" sz="1550" dirty="0">
+              <a:rPr lang="en-US" sz="1320" dirty="0">
                 <a:solidFill>
                   <a:srgbClr val="17364A"/>
                 </a:solidFill>
@@ -11675,9 +11833,9 @@
                 <a:ea typeface="Aptos" pitchFamily="34" charset="-122"/>
                 <a:cs typeface="Aptos" pitchFamily="34" charset="-120"/>
               </a:rPr>
-              <a:t>Connect the concept to public health purpose, responsible use, required safeguards, documentation, and the next action a department should take.</a:t>
-            </a:r>
-            <a:endParaRPr lang="en-US" sz="1550" dirty="0"/>
+              <a:t>Connect the concept to public health purpose, responsible use, required safeguards, documentation, and the next action a.</a:t>
+            </a:r>
+            <a:endParaRPr lang="en-US" sz="1320" dirty="0"/>
           </a:p>
         </p:txBody>
       </p:sp>
@@ -11978,63 +12136,75 @@
           <a:ln/>
         </p:spPr>
         <p:txBody>
-          <a:bodyPr wrap="square" lIns="635" tIns="635" rIns="635" bIns="635" rtlCol="0" anchor="t">
+          <a:bodyPr wrap="square" lIns="1016" tIns="1016" rIns="1016" bIns="1016" rtlCol="0" anchor="t">
             <a:normAutofit/>
           </a:bodyPr>
           <a:lstStyle/>
           <a:p>
+            <a:pPr indent="0" marL="0">
+              <a:buNone/>
+            </a:pPr>
             <a:r>
               <a:rPr lang="en-US" sz="1900" dirty="0">
                 <a:solidFill>
-                  <a:srgbClr val="17364A"/>
-                </a:solidFill>
-                <a:latin typeface="Aptos" pitchFamily="34" charset="0"/>
-                <a:ea typeface="Aptos" pitchFamily="34" charset="-122"/>
-                <a:cs typeface="Aptos" pitchFamily="34" charset="-120"/>
-              </a:rPr>
-              <a:t>Play 11: Build and Deploy AI Solutions - This lesson informs Play 11 by helping learners connect the lesson.</a:t>
+                  <a:srgbClr val="003A63"/>
+                </a:solidFill>
+                <a:latin typeface="Aptos" pitchFamily="34" charset="0"/>
+                <a:ea typeface="Aptos" pitchFamily="34" charset="-122"/>
+                <a:cs typeface="Aptos" pitchFamily="34" charset="-120"/>
+              </a:rPr>
+              <a:t>• Play 11: Build and Deploy AI Solutions - This lesson informs Play 11 by helping learners.</a:t>
             </a:r>
             <a:endParaRPr lang="en-US" sz="1900" dirty="0"/>
           </a:p>
           <a:p>
+            <a:pPr indent="0" marL="0">
+              <a:buNone/>
+            </a:pPr>
             <a:r>
               <a:rPr lang="en-US" sz="1900" dirty="0">
                 <a:solidFill>
-                  <a:srgbClr val="17364A"/>
-                </a:solidFill>
-                <a:latin typeface="Aptos" pitchFamily="34" charset="0"/>
-                <a:ea typeface="Aptos" pitchFamily="34" charset="-122"/>
-                <a:cs typeface="Aptos" pitchFamily="34" charset="-120"/>
-              </a:rPr>
-              <a:t>Play 2: Readiness Assessment - This lesson informs Play 2 by helping learners connect the lesson topic to.</a:t>
+                  <a:srgbClr val="003A63"/>
+                </a:solidFill>
+                <a:latin typeface="Aptos" pitchFamily="34" charset="0"/>
+                <a:ea typeface="Aptos" pitchFamily="34" charset="-122"/>
+                <a:cs typeface="Aptos" pitchFamily="34" charset="-120"/>
+              </a:rPr>
+              <a:t>• Play 2: Readiness Assessment - This lesson informs Play 2 by helping learners connect the.</a:t>
             </a:r>
             <a:endParaRPr lang="en-US" sz="1900" dirty="0"/>
           </a:p>
           <a:p>
+            <a:pPr indent="0" marL="0">
+              <a:buNone/>
+            </a:pPr>
             <a:r>
               <a:rPr lang="en-US" sz="1900" dirty="0">
                 <a:solidFill>
-                  <a:srgbClr val="17364A"/>
-                </a:solidFill>
-                <a:latin typeface="Aptos" pitchFamily="34" charset="0"/>
-                <a:ea typeface="Aptos" pitchFamily="34" charset="-122"/>
-                <a:cs typeface="Aptos" pitchFamily="34" charset="-120"/>
-              </a:rPr>
-              <a:t>Play 3: Establish AI Governance - This lesson informs Play 3 by helping learners connect the lesson topic to.</a:t>
+                  <a:srgbClr val="003A63"/>
+                </a:solidFill>
+                <a:latin typeface="Aptos" pitchFamily="34" charset="0"/>
+                <a:ea typeface="Aptos" pitchFamily="34" charset="-122"/>
+                <a:cs typeface="Aptos" pitchFamily="34" charset="-120"/>
+              </a:rPr>
+              <a:t>• Play 3: Establish AI Governance - This lesson informs Play 3 by helping learners connect the.</a:t>
             </a:r>
             <a:endParaRPr lang="en-US" sz="1900" dirty="0"/>
           </a:p>
           <a:p>
+            <a:pPr indent="0" marL="0">
+              <a:buNone/>
+            </a:pPr>
             <a:r>
               <a:rPr lang="en-US" sz="1900" dirty="0">
                 <a:solidFill>
-                  <a:srgbClr val="17364A"/>
-                </a:solidFill>
-                <a:latin typeface="Aptos" pitchFamily="34" charset="0"/>
-                <a:ea typeface="Aptos" pitchFamily="34" charset="-122"/>
-                <a:cs typeface="Aptos" pitchFamily="34" charset="-120"/>
-              </a:rPr>
-              <a:t>Play 1: Vision &amp; Guardrails - This lesson informs Play 1 by helping learners connect the lesson topic to.</a:t>
+                  <a:srgbClr val="003A63"/>
+                </a:solidFill>
+                <a:latin typeface="Aptos" pitchFamily="34" charset="0"/>
+                <a:ea typeface="Aptos" pitchFamily="34" charset="-122"/>
+                <a:cs typeface="Aptos" pitchFamily="34" charset="-120"/>
+              </a:rPr>
+              <a:t>• Play 1: Vision &amp; Guardrails - This lesson informs Play 1 by helping learners connect the.</a:t>
             </a:r>
             <a:endParaRPr lang="en-US" sz="1900" dirty="0"/>
           </a:p>
@@ -12114,17 +12284,17 @@
         </p:nvSpPr>
         <p:spPr>
           <a:xfrm>
-            <a:off x="8211312" y="1920240"/>
-            <a:ext cx="2734056" cy="1463040"/>
-          </a:xfrm>
-          <a:prstGeom prst="rect">
-            <a:avLst/>
-          </a:prstGeom>
-          <a:noFill/>
-          <a:ln/>
-        </p:spPr>
-        <p:txBody>
-          <a:bodyPr wrap="square" lIns="0" tIns="0" rIns="0" bIns="0" rtlCol="0" anchor="t">
+            <a:off x="8211312" y="1892808"/>
+            <a:ext cx="2734056" cy="1536192"/>
+          </a:xfrm>
+          <a:prstGeom prst="rect">
+            <a:avLst/>
+          </a:prstGeom>
+          <a:noFill/>
+          <a:ln/>
+        </p:spPr>
+        <p:txBody>
+          <a:bodyPr wrap="square" lIns="254" tIns="254" rIns="254" bIns="254" rtlCol="0" anchor="t">
             <a:normAutofit/>
           </a:bodyPr>
           <a:lstStyle/>
@@ -12133,7 +12303,7 @@
               <a:buNone/>
             </a:pPr>
             <a:r>
-              <a:rPr lang="en-US" sz="1550" dirty="0">
+              <a:rPr lang="en-US" sz="1320" dirty="0">
                 <a:solidFill>
                   <a:srgbClr val="17364A"/>
                 </a:solidFill>
@@ -12141,9 +12311,9 @@
                 <a:ea typeface="Aptos" pitchFamily="34" charset="-122"/>
                 <a:cs typeface="Aptos" pitchFamily="34" charset="-120"/>
               </a:rPr>
-              <a:t>Use the related plays to identify decisions, participants, timing, approvals, and documentation needed for responsible implementation.</a:t>
-            </a:r>
-            <a:endParaRPr lang="en-US" sz="1550" dirty="0"/>
+              <a:t>Use the related plays to identify decisions, participants, timing, approvals, and documentation needed for responsible.</a:t>
+            </a:r>
+            <a:endParaRPr lang="en-US" sz="1320" dirty="0"/>
           </a:p>
         </p:txBody>
       </p:sp>
@@ -12231,13 +12401,16 @@
           <a:ln/>
         </p:spPr>
         <p:txBody>
-          <a:bodyPr wrap="square" lIns="254" tIns="254" rIns="254" bIns="254" rtlCol="0" anchor="t">
+          <a:bodyPr wrap="square" lIns="508" tIns="508" rIns="508" bIns="508" rtlCol="0" anchor="t">
             <a:normAutofit/>
           </a:bodyPr>
           <a:lstStyle/>
           <a:p>
-            <a:r>
-              <a:rPr lang="en-US" sz="1380" dirty="0">
+            <a:pPr indent="0" marL="0">
+              <a:buNone/>
+            </a:pPr>
+            <a:r>
+              <a:rPr lang="en-US" sz="1220" dirty="0">
                 <a:solidFill>
                   <a:srgbClr val="17364A"/>
                 </a:solidFill>
@@ -12247,11 +12420,14 @@
               </a:rPr>
               <a:t>Locate the decision point in the playbook sequence.</a:t>
             </a:r>
-            <a:endParaRPr lang="en-US" sz="1380" dirty="0"/>
-          </a:p>
-          <a:p>
-            <a:r>
-              <a:rPr lang="en-US" sz="1380" dirty="0">
+            <a:endParaRPr lang="en-US" sz="1220" dirty="0"/>
+          </a:p>
+          <a:p>
+            <a:pPr indent="0" marL="0">
+              <a:buNone/>
+            </a:pPr>
+            <a:r>
+              <a:rPr lang="en-US" sz="1220" dirty="0">
                 <a:solidFill>
                   <a:srgbClr val="17364A"/>
                 </a:solidFill>
@@ -12261,11 +12437,14 @@
               </a:rPr>
               <a:t>Identify who should participate in the work.</a:t>
             </a:r>
-            <a:endParaRPr lang="en-US" sz="1380" dirty="0"/>
-          </a:p>
-          <a:p>
-            <a:r>
-              <a:rPr lang="en-US" sz="1380" dirty="0">
+            <a:endParaRPr lang="en-US" sz="1220" dirty="0"/>
+          </a:p>
+          <a:p>
+            <a:pPr indent="0" marL="0">
+              <a:buNone/>
+            </a:pPr>
+            <a:r>
+              <a:rPr lang="en-US" sz="1220" dirty="0">
                 <a:solidFill>
                   <a:srgbClr val="17364A"/>
                 </a:solidFill>
@@ -12275,7 +12454,7 @@
               </a:rPr>
               <a:t>Document the review, approval, or implementation step.</a:t>
             </a:r>
-            <a:endParaRPr lang="en-US" sz="1380" dirty="0"/>
+            <a:endParaRPr lang="en-US" sz="1220" dirty="0"/>
           </a:p>
         </p:txBody>
       </p:sp>
@@ -12576,63 +12755,75 @@
           <a:ln/>
         </p:spPr>
         <p:txBody>
-          <a:bodyPr wrap="square" lIns="635" tIns="635" rIns="635" bIns="635" rtlCol="0" anchor="t">
+          <a:bodyPr wrap="square" lIns="1016" tIns="1016" rIns="1016" bIns="1016" rtlCol="0" anchor="t">
             <a:normAutofit/>
           </a:bodyPr>
           <a:lstStyle/>
           <a:p>
+            <a:pPr indent="0" marL="0">
+              <a:buNone/>
+            </a:pPr>
             <a:r>
               <a:rPr lang="en-US" sz="1850" dirty="0">
                 <a:solidFill>
-                  <a:srgbClr val="17364A"/>
-                </a:solidFill>
-                <a:latin typeface="Aptos" pitchFamily="34" charset="0"/>
-                <a:ea typeface="Aptos" pitchFamily="34" charset="-122"/>
-                <a:cs typeface="Aptos" pitchFamily="34" charset="-120"/>
-              </a:rPr>
-              <a:t>Tool 4: AI Policy Landscape Scan (Worksheet) - Use AI Policy Landscape Scan to translate this lesson into a.</a:t>
+                  <a:srgbClr val="003A63"/>
+                </a:solidFill>
+                <a:latin typeface="Aptos" pitchFamily="34" charset="0"/>
+                <a:ea typeface="Aptos" pitchFamily="34" charset="-122"/>
+                <a:cs typeface="Aptos" pitchFamily="34" charset="-120"/>
+              </a:rPr>
+              <a:t>• Tool 4: AI Policy Landscape Scan (Worksheet) - Use AI Policy Landscape Scan to translate this.</a:t>
             </a:r>
             <a:endParaRPr lang="en-US" sz="1850" dirty="0"/>
           </a:p>
           <a:p>
+            <a:pPr indent="0" marL="0">
+              <a:buNone/>
+            </a:pPr>
             <a:r>
               <a:rPr lang="en-US" sz="1850" dirty="0">
                 <a:solidFill>
-                  <a:srgbClr val="17364A"/>
-                </a:solidFill>
-                <a:latin typeface="Aptos" pitchFamily="34" charset="0"/>
-                <a:ea typeface="Aptos" pitchFamily="34" charset="-122"/>
-                <a:cs typeface="Aptos" pitchFamily="34" charset="-120"/>
-              </a:rPr>
-              <a:t>Tool 5: AI Environmental and Resource Impact Review (Checklist) - Use AI Environmental and Resource Impact.</a:t>
+                  <a:srgbClr val="003A63"/>
+                </a:solidFill>
+                <a:latin typeface="Aptos" pitchFamily="34" charset="0"/>
+                <a:ea typeface="Aptos" pitchFamily="34" charset="-122"/>
+                <a:cs typeface="Aptos" pitchFamily="34" charset="-120"/>
+              </a:rPr>
+              <a:t>• Tool 5: AI Environmental and Resource Impact Review (Checklist) - Use AI Environmental and.</a:t>
             </a:r>
             <a:endParaRPr lang="en-US" sz="1850" dirty="0"/>
           </a:p>
           <a:p>
+            <a:pPr indent="0" marL="0">
+              <a:buNone/>
+            </a:pPr>
             <a:r>
               <a:rPr lang="en-US" sz="1850" dirty="0">
                 <a:solidFill>
-                  <a:srgbClr val="17364A"/>
-                </a:solidFill>
-                <a:latin typeface="Aptos" pitchFamily="34" charset="0"/>
-                <a:ea typeface="Aptos" pitchFamily="34" charset="-122"/>
-                <a:cs typeface="Aptos" pitchFamily="34" charset="-120"/>
-              </a:rPr>
-              <a:t>Tool 6: Human-Centered AI Decision Rule Checklist (Checklist) - Use Human-Centered AI Decision Rule.</a:t>
+                  <a:srgbClr val="003A63"/>
+                </a:solidFill>
+                <a:latin typeface="Aptos" pitchFamily="34" charset="0"/>
+                <a:ea typeface="Aptos" pitchFamily="34" charset="-122"/>
+                <a:cs typeface="Aptos" pitchFamily="34" charset="-120"/>
+              </a:rPr>
+              <a:t>• Tool 6: Human-Centered AI Decision Rule Checklist (Checklist) - Use Human-Centered AI Decision.</a:t>
             </a:r>
             <a:endParaRPr lang="en-US" sz="1850" dirty="0"/>
           </a:p>
           <a:p>
+            <a:pPr indent="0" marL="0">
+              <a:buNone/>
+            </a:pPr>
             <a:r>
               <a:rPr lang="en-US" sz="1850" dirty="0">
                 <a:solidFill>
-                  <a:srgbClr val="17364A"/>
-                </a:solidFill>
-                <a:latin typeface="Aptos" pitchFamily="34" charset="0"/>
-                <a:ea typeface="Aptos" pitchFamily="34" charset="-122"/>
-                <a:cs typeface="Aptos" pitchFamily="34" charset="-120"/>
-              </a:rPr>
-              <a:t>Tool 8: AI Project Charter (Planning) - Use AI Project Charter to translate this lesson into a documented.</a:t>
+                  <a:srgbClr val="003A63"/>
+                </a:solidFill>
+                <a:latin typeface="Aptos" pitchFamily="34" charset="0"/>
+                <a:ea typeface="Aptos" pitchFamily="34" charset="-122"/>
+                <a:cs typeface="Aptos" pitchFamily="34" charset="-120"/>
+              </a:rPr>
+              <a:t>• Tool 8: AI Project Charter (Planning) - Use AI Project Charter to translate this lesson into a.</a:t>
             </a:r>
             <a:endParaRPr lang="en-US" sz="1850" dirty="0"/>
           </a:p>
@@ -12712,17 +12903,17 @@
         </p:nvSpPr>
         <p:spPr>
           <a:xfrm>
-            <a:off x="8211312" y="1920240"/>
-            <a:ext cx="2734056" cy="1463040"/>
-          </a:xfrm>
-          <a:prstGeom prst="rect">
-            <a:avLst/>
-          </a:prstGeom>
-          <a:noFill/>
-          <a:ln/>
-        </p:spPr>
-        <p:txBody>
-          <a:bodyPr wrap="square" lIns="0" tIns="0" rIns="0" bIns="0" rtlCol="0" anchor="t">
+            <a:off x="8211312" y="1892808"/>
+            <a:ext cx="2734056" cy="1536192"/>
+          </a:xfrm>
+          <a:prstGeom prst="rect">
+            <a:avLst/>
+          </a:prstGeom>
+          <a:noFill/>
+          <a:ln/>
+        </p:spPr>
+        <p:txBody>
+          <a:bodyPr wrap="square" lIns="254" tIns="254" rIns="254" bIns="254" rtlCol="0" anchor="t">
             <a:normAutofit/>
           </a:bodyPr>
           <a:lstStyle/>
@@ -12731,7 +12922,7 @@
               <a:buNone/>
             </a:pPr>
             <a:r>
-              <a:rPr lang="en-US" sz="1550" dirty="0">
+              <a:rPr lang="en-US" sz="1320" dirty="0">
                 <a:solidFill>
                   <a:srgbClr val="17364A"/>
                 </a:solidFill>
@@ -12739,9 +12930,9 @@
                 <a:ea typeface="Aptos" pitchFamily="34" charset="-122"/>
                 <a:cs typeface="Aptos" pitchFamily="34" charset="-120"/>
               </a:rPr>
-              <a:t>Use linked tools when your department needs a structured worksheet, template, checklist, review process, or documentation artifact.</a:t>
-            </a:r>
-            <a:endParaRPr lang="en-US" sz="1550" dirty="0"/>
+              <a:t>Use linked tools when your department needs a structured worksheet, template, checklist, review process, or.</a:t>
+            </a:r>
+            <a:endParaRPr lang="en-US" sz="1320" dirty="0"/>
           </a:p>
         </p:txBody>
       </p:sp>
@@ -12829,13 +13020,16 @@
           <a:ln/>
         </p:spPr>
         <p:txBody>
-          <a:bodyPr wrap="square" lIns="254" tIns="254" rIns="254" bIns="254" rtlCol="0" anchor="t">
+          <a:bodyPr wrap="square" lIns="508" tIns="508" rIns="508" bIns="508" rtlCol="0" anchor="t">
             <a:normAutofit/>
           </a:bodyPr>
           <a:lstStyle/>
           <a:p>
-            <a:r>
-              <a:rPr lang="en-US" sz="1380" dirty="0">
+            <a:pPr indent="0" marL="0">
+              <a:buNone/>
+            </a:pPr>
+            <a:r>
+              <a:rPr lang="en-US" sz="1220" dirty="0">
                 <a:solidFill>
                   <a:srgbClr val="17364A"/>
                 </a:solidFill>
@@ -12845,11 +13039,14 @@
               </a:rPr>
               <a:t>Use a tool when no comparable local process exists.</a:t>
             </a:r>
-            <a:endParaRPr lang="en-US" sz="1380" dirty="0"/>
-          </a:p>
-          <a:p>
-            <a:r>
-              <a:rPr lang="en-US" sz="1380" dirty="0">
+            <a:endParaRPr lang="en-US" sz="1220" dirty="0"/>
+          </a:p>
+          <a:p>
+            <a:pPr indent="0" marL="0">
+              <a:buNone/>
+            </a:pPr>
+            <a:r>
+              <a:rPr lang="en-US" sz="1220" dirty="0">
                 <a:solidFill>
                   <a:srgbClr val="17364A"/>
                 </a:solidFill>
@@ -12857,13 +13054,16 @@
                 <a:ea typeface="Aptos" pitchFamily="34" charset="-122"/>
                 <a:cs typeface="Aptos" pitchFamily="34" charset="-120"/>
               </a:rPr>
-              <a:t>Adapt existing department templates when they already fit the purpose.</a:t>
-            </a:r>
-            <a:endParaRPr lang="en-US" sz="1380" dirty="0"/>
-          </a:p>
-          <a:p>
-            <a:r>
-              <a:rPr lang="en-US" sz="1380" dirty="0">
+              <a:t>Adapt existing department templates when they already fit the.</a:t>
+            </a:r>
+            <a:endParaRPr lang="en-US" sz="1220" dirty="0"/>
+          </a:p>
+          <a:p>
+            <a:pPr indent="0" marL="0">
+              <a:buNone/>
+            </a:pPr>
+            <a:r>
+              <a:rPr lang="en-US" sz="1220" dirty="0">
                 <a:solidFill>
                   <a:srgbClr val="17364A"/>
                 </a:solidFill>
@@ -12873,7 +13073,7 @@
               </a:rPr>
               <a:t>Save the completed artifact as evidence of the decision.</a:t>
             </a:r>
-            <a:endParaRPr lang="en-US" sz="1380" dirty="0"/>
+            <a:endParaRPr lang="en-US" sz="1220" dirty="0"/>
           </a:p>
         </p:txBody>
       </p:sp>
@@ -13174,49 +13374,58 @@
           <a:ln/>
         </p:spPr>
         <p:txBody>
-          <a:bodyPr wrap="square" lIns="635" tIns="635" rIns="635" bIns="635" rtlCol="0" anchor="t">
+          <a:bodyPr wrap="square" lIns="1016" tIns="1016" rIns="1016" bIns="1016" rtlCol="0" anchor="t">
             <a:normAutofit/>
           </a:bodyPr>
           <a:lstStyle/>
           <a:p>
+            <a:pPr indent="0" marL="0">
+              <a:buNone/>
+            </a:pPr>
             <a:r>
               <a:rPr lang="en-US" sz="2100" dirty="0">
                 <a:solidFill>
-                  <a:srgbClr val="17364A"/>
-                </a:solidFill>
-                <a:latin typeface="Aptos" pitchFamily="34" charset="0"/>
-                <a:ea typeface="Aptos" pitchFamily="34" charset="-122"/>
-                <a:cs typeface="Aptos" pitchFamily="34" charset="-120"/>
-              </a:rPr>
-              <a:t>Explain the purpose of ai for surveillance signal review and epidemiologic judgment in public health AI.</a:t>
+                  <a:srgbClr val="003A63"/>
+                </a:solidFill>
+                <a:latin typeface="Aptos" pitchFamily="34" charset="0"/>
+                <a:ea typeface="Aptos" pitchFamily="34" charset="-122"/>
+                <a:cs typeface="Aptos" pitchFamily="34" charset="-120"/>
+              </a:rPr>
+              <a:t>• Explain the purpose of ai for surveillance signal review and epidemiologic judgment in public.</a:t>
             </a:r>
             <a:endParaRPr lang="en-US" sz="2100" dirty="0"/>
           </a:p>
           <a:p>
+            <a:pPr indent="0" marL="0">
+              <a:buNone/>
+            </a:pPr>
             <a:r>
               <a:rPr lang="en-US" sz="2100" dirty="0">
                 <a:solidFill>
-                  <a:srgbClr val="17364A"/>
-                </a:solidFill>
-                <a:latin typeface="Aptos" pitchFamily="34" charset="0"/>
-                <a:ea typeface="Aptos" pitchFamily="34" charset="-122"/>
-                <a:cs typeface="Aptos" pitchFamily="34" charset="-120"/>
-              </a:rPr>
-              <a:t>Identify the roles, decisions, risks, and documentation needed for the topic.</a:t>
+                  <a:srgbClr val="003A63"/>
+                </a:solidFill>
+                <a:latin typeface="Aptos" pitchFamily="34" charset="0"/>
+                <a:ea typeface="Aptos" pitchFamily="34" charset="-122"/>
+                <a:cs typeface="Aptos" pitchFamily="34" charset="-120"/>
+              </a:rPr>
+              <a:t>• Identify the roles, decisions, risks, and documentation needed for the topic.</a:t>
             </a:r>
             <a:endParaRPr lang="en-US" sz="2100" dirty="0"/>
           </a:p>
           <a:p>
+            <a:pPr indent="0" marL="0">
+              <a:buNone/>
+            </a:pPr>
             <a:r>
               <a:rPr lang="en-US" sz="2100" dirty="0">
                 <a:solidFill>
-                  <a:srgbClr val="17364A"/>
-                </a:solidFill>
-                <a:latin typeface="Aptos" pitchFamily="34" charset="0"/>
-                <a:ea typeface="Aptos" pitchFamily="34" charset="-122"/>
-                <a:cs typeface="Aptos" pitchFamily="34" charset="-120"/>
-              </a:rPr>
-              <a:t>Apply the topic to a real or realistic public health workflow or decision.</a:t>
+                  <a:srgbClr val="003A63"/>
+                </a:solidFill>
+                <a:latin typeface="Aptos" pitchFamily="34" charset="0"/>
+                <a:ea typeface="Aptos" pitchFamily="34" charset="-122"/>
+                <a:cs typeface="Aptos" pitchFamily="34" charset="-120"/>
+              </a:rPr>
+              <a:t>• Apply the topic to a real or realistic public health workflow or decision.</a:t>
             </a:r>
             <a:endParaRPr lang="en-US" sz="2100" dirty="0"/>
           </a:p>
@@ -13296,17 +13505,17 @@
         </p:nvSpPr>
         <p:spPr>
           <a:xfrm>
-            <a:off x="7799832" y="1828800"/>
-            <a:ext cx="3145536" cy="685800"/>
-          </a:xfrm>
-          <a:prstGeom prst="rect">
-            <a:avLst/>
-          </a:prstGeom>
-          <a:noFill/>
-          <a:ln/>
-        </p:spPr>
-        <p:txBody>
-          <a:bodyPr wrap="square" lIns="0" tIns="0" rIns="0" bIns="0" rtlCol="0" anchor="t">
+            <a:off x="7799832" y="1801368"/>
+            <a:ext cx="3145536" cy="758952"/>
+          </a:xfrm>
+          <a:prstGeom prst="rect">
+            <a:avLst/>
+          </a:prstGeom>
+          <a:noFill/>
+          <a:ln/>
+        </p:spPr>
+        <p:txBody>
+          <a:bodyPr wrap="square" lIns="254" tIns="254" rIns="254" bIns="254" rtlCol="0" anchor="t">
             <a:normAutofit/>
           </a:bodyPr>
           <a:lstStyle/>
@@ -13315,7 +13524,7 @@
               <a:buNone/>
             </a:pPr>
             <a:r>
-              <a:rPr lang="en-US" sz="1550" dirty="0">
+              <a:rPr lang="en-US" sz="1320" dirty="0">
                 <a:solidFill>
                   <a:srgbClr val="17364A"/>
                 </a:solidFill>
@@ -13325,7 +13534,7 @@
               </a:rPr>
               <a:t>Explain the purpose of ai for surveillance signal review and epidemiologic judgment in public health AI.</a:t>
             </a:r>
-            <a:endParaRPr lang="en-US" sz="1550" dirty="0"/>
+            <a:endParaRPr lang="en-US" sz="1320" dirty="0"/>
           </a:p>
         </p:txBody>
       </p:sp>
@@ -13413,13 +13622,16 @@
           <a:ln/>
         </p:spPr>
         <p:txBody>
-          <a:bodyPr wrap="square" lIns="254" tIns="254" rIns="254" bIns="254" rtlCol="0" anchor="t">
+          <a:bodyPr wrap="square" lIns="508" tIns="508" rIns="508" bIns="508" rtlCol="0" anchor="t">
             <a:normAutofit/>
           </a:bodyPr>
           <a:lstStyle/>
           <a:p>
-            <a:r>
-              <a:rPr lang="en-US" sz="1380" dirty="0">
+            <a:pPr indent="0" marL="0">
+              <a:buNone/>
+            </a:pPr>
+            <a:r>
+              <a:rPr lang="en-US" sz="1220" dirty="0">
                 <a:solidFill>
                   <a:srgbClr val="17364A"/>
                 </a:solidFill>
@@ -13427,13 +13639,16 @@
                 <a:ea typeface="Aptos" pitchFamily="34" charset="-122"/>
                 <a:cs typeface="Aptos" pitchFamily="34" charset="-120"/>
               </a:rPr>
-              <a:t>Recognize equity, privacy, security, legal, operational, and public trust implications.</a:t>
-            </a:r>
-            <a:endParaRPr lang="en-US" sz="1380" dirty="0"/>
-          </a:p>
-          <a:p>
-            <a:r>
-              <a:rPr lang="en-US" sz="1380" dirty="0">
+              <a:t>Recognize equity, privacy, security, legal, operational, and.</a:t>
+            </a:r>
+            <a:endParaRPr lang="en-US" sz="1220" dirty="0"/>
+          </a:p>
+          <a:p>
+            <a:pPr indent="0" marL="0">
+              <a:buNone/>
+            </a:pPr>
+            <a:r>
+              <a:rPr lang="en-US" sz="1220" dirty="0">
                 <a:solidFill>
                   <a:srgbClr val="17364A"/>
                 </a:solidFill>
@@ -13441,9 +13656,9 @@
                 <a:ea typeface="Aptos" pitchFamily="34" charset="-122"/>
                 <a:cs typeface="Aptos" pitchFamily="34" charset="-120"/>
               </a:rPr>
-              <a:t>Produce a practical artifact that supports readiness, governance, implementation,.</a:t>
-            </a:r>
-            <a:endParaRPr lang="en-US" sz="1380" dirty="0"/>
+              <a:t>Produce a practical artifact that supports readiness, governance,.</a:t>
+            </a:r>
+            <a:endParaRPr lang="en-US" sz="1220" dirty="0"/>
           </a:p>
         </p:txBody>
       </p:sp>
@@ -13521,17 +13736,17 @@
         </p:nvSpPr>
         <p:spPr>
           <a:xfrm>
-            <a:off x="7799832" y="5001768"/>
-            <a:ext cx="3145536" cy="502920"/>
-          </a:xfrm>
-          <a:prstGeom prst="rect">
-            <a:avLst/>
-          </a:prstGeom>
-          <a:noFill/>
-          <a:ln/>
-        </p:spPr>
-        <p:txBody>
-          <a:bodyPr wrap="square" lIns="0" tIns="0" rIns="0" bIns="0" rtlCol="0" anchor="t">
+            <a:off x="7799832" y="4974336"/>
+            <a:ext cx="3145536" cy="576072"/>
+          </a:xfrm>
+          <a:prstGeom prst="rect">
+            <a:avLst/>
+          </a:prstGeom>
+          <a:noFill/>
+          <a:ln/>
+        </p:spPr>
+        <p:txBody>
+          <a:bodyPr wrap="square" lIns="254" tIns="254" rIns="254" bIns="254" rtlCol="0" anchor="t">
             <a:normAutofit/>
           </a:bodyPr>
           <a:lstStyle/>
@@ -13540,7 +13755,7 @@
               <a:buNone/>
             </a:pPr>
             <a:r>
-              <a:rPr lang="en-US" sz="1550" dirty="0">
+              <a:rPr lang="en-US" sz="1320" dirty="0">
                 <a:solidFill>
                   <a:srgbClr val="17364A"/>
                 </a:solidFill>
@@ -13548,9 +13763,9 @@
                 <a:ea typeface="Aptos" pitchFamily="34" charset="-122"/>
                 <a:cs typeface="Aptos" pitchFamily="34" charset="-120"/>
               </a:rPr>
-              <a:t>Use the assignment to test whether you can explain the concept, apply it to a realistic public health situation, and identify what would need review before the work moves forward.</a:t>
-            </a:r>
-            <a:endParaRPr lang="en-US" sz="1550" dirty="0"/>
+              <a:t>Use the assignment to test whether you can explain the concept, apply it to a realistic public health situation, and.</a:t>
+            </a:r>
+            <a:endParaRPr lang="en-US" sz="1320" dirty="0"/>
           </a:p>
         </p:txBody>
       </p:sp>
@@ -13851,49 +14066,58 @@
           <a:ln/>
         </p:spPr>
         <p:txBody>
-          <a:bodyPr wrap="square" lIns="635" tIns="635" rIns="635" bIns="635" rtlCol="0" anchor="t">
+          <a:bodyPr wrap="square" lIns="1016" tIns="1016" rIns="1016" bIns="1016" rtlCol="0" anchor="t">
             <a:normAutofit/>
           </a:bodyPr>
           <a:lstStyle/>
           <a:p>
+            <a:pPr indent="0" marL="0">
+              <a:buNone/>
+            </a:pPr>
             <a:r>
               <a:rPr lang="en-US" sz="2100" dirty="0">
                 <a:solidFill>
-                  <a:srgbClr val="17364A"/>
-                </a:solidFill>
-                <a:latin typeface="Aptos" pitchFamily="34" charset="0"/>
-                <a:ea typeface="Aptos" pitchFamily="34" charset="-122"/>
-                <a:cs typeface="Aptos" pitchFamily="34" charset="-120"/>
-              </a:rPr>
-              <a:t>This module focuses on using AI to support signal detection while preserving epidemiologic judgment.</a:t>
+                  <a:srgbClr val="003A63"/>
+                </a:solidFill>
+                <a:latin typeface="Aptos" pitchFamily="34" charset="0"/>
+                <a:ea typeface="Aptos" pitchFamily="34" charset="-122"/>
+                <a:cs typeface="Aptos" pitchFamily="34" charset="-120"/>
+              </a:rPr>
+              <a:t>• This module focuses on using AI to support signal detection while preserving epidemiologic.</a:t>
             </a:r>
             <a:endParaRPr lang="en-US" sz="2100" dirty="0"/>
           </a:p>
           <a:p>
+            <a:pPr indent="0" marL="0">
+              <a:buNone/>
+            </a:pPr>
             <a:r>
               <a:rPr lang="en-US" sz="2100" dirty="0">
                 <a:solidFill>
-                  <a:srgbClr val="17364A"/>
-                </a:solidFill>
-                <a:latin typeface="Aptos" pitchFamily="34" charset="0"/>
-                <a:ea typeface="Aptos" pitchFamily="34" charset="-122"/>
-                <a:cs typeface="Aptos" pitchFamily="34" charset="-120"/>
-              </a:rPr>
-              <a:t>It is designed for public health staff who must translate responsible AI principles into repeatable.</a:t>
+                  <a:srgbClr val="003A63"/>
+                </a:solidFill>
+                <a:latin typeface="Aptos" pitchFamily="34" charset="0"/>
+                <a:ea typeface="Aptos" pitchFamily="34" charset="-122"/>
+                <a:cs typeface="Aptos" pitchFamily="34" charset="-120"/>
+              </a:rPr>
+              <a:t>• It is designed for public health staff who must translate responsible AI principles into.</a:t>
             </a:r>
             <a:endParaRPr lang="en-US" sz="2100" dirty="0"/>
           </a:p>
           <a:p>
+            <a:pPr indent="0" marL="0">
+              <a:buNone/>
+            </a:pPr>
             <a:r>
               <a:rPr lang="en-US" sz="2100" dirty="0">
                 <a:solidFill>
-                  <a:srgbClr val="17364A"/>
-                </a:solidFill>
-                <a:latin typeface="Aptos" pitchFamily="34" charset="0"/>
-                <a:ea typeface="Aptos" pitchFamily="34" charset="-122"/>
-                <a:cs typeface="Aptos" pitchFamily="34" charset="-120"/>
-              </a:rPr>
-              <a:t>The module helps learners move beyond general awareness by producing a practical artifact that can be.</a:t>
+                  <a:srgbClr val="003A63"/>
+                </a:solidFill>
+                <a:latin typeface="Aptos" pitchFamily="34" charset="0"/>
+                <a:ea typeface="Aptos" pitchFamily="34" charset="-122"/>
+                <a:cs typeface="Aptos" pitchFamily="34" charset="-120"/>
+              </a:rPr>
+              <a:t>• The module helps learners move beyond general awareness by producing a practical artifact that.</a:t>
             </a:r>
             <a:endParaRPr lang="en-US" sz="2100" dirty="0"/>
           </a:p>
@@ -13973,17 +14197,17 @@
         </p:nvSpPr>
         <p:spPr>
           <a:xfrm>
-            <a:off x="7799832" y="1828800"/>
-            <a:ext cx="3145536" cy="685800"/>
-          </a:xfrm>
-          <a:prstGeom prst="rect">
-            <a:avLst/>
-          </a:prstGeom>
-          <a:noFill/>
-          <a:ln/>
-        </p:spPr>
-        <p:txBody>
-          <a:bodyPr wrap="square" lIns="0" tIns="0" rIns="0" bIns="0" rtlCol="0" anchor="t">
+            <a:off x="7799832" y="1801368"/>
+            <a:ext cx="3145536" cy="758952"/>
+          </a:xfrm>
+          <a:prstGeom prst="rect">
+            <a:avLst/>
+          </a:prstGeom>
+          <a:noFill/>
+          <a:ln/>
+        </p:spPr>
+        <p:txBody>
+          <a:bodyPr wrap="square" lIns="254" tIns="254" rIns="254" bIns="254" rtlCol="0" anchor="t">
             <a:normAutofit/>
           </a:bodyPr>
           <a:lstStyle/>
@@ -13992,7 +14216,7 @@
               <a:buNone/>
             </a:pPr>
             <a:r>
-              <a:rPr lang="en-US" sz="1550" dirty="0">
+              <a:rPr lang="en-US" sz="1320" dirty="0">
                 <a:solidFill>
                   <a:srgbClr val="17364A"/>
                 </a:solidFill>
@@ -14002,7 +14226,7 @@
               </a:rPr>
               <a:t>This module focuses on using AI to support signal detection while preserving epidemiologic judgment.</a:t>
             </a:r>
-            <a:endParaRPr lang="en-US" sz="1550" dirty="0"/>
+            <a:endParaRPr lang="en-US" sz="1320" dirty="0"/>
           </a:p>
         </p:txBody>
       </p:sp>
@@ -14090,13 +14314,16 @@
           <a:ln/>
         </p:spPr>
         <p:txBody>
-          <a:bodyPr wrap="square" lIns="254" tIns="254" rIns="254" bIns="254" rtlCol="0" anchor="t">
+          <a:bodyPr wrap="square" lIns="508" tIns="508" rIns="508" bIns="508" rtlCol="0" anchor="t">
             <a:normAutofit/>
           </a:bodyPr>
           <a:lstStyle/>
           <a:p>
-            <a:r>
-              <a:rPr lang="en-US" sz="1380" dirty="0">
+            <a:pPr indent="0" marL="0">
+              <a:buNone/>
+            </a:pPr>
+            <a:r>
+              <a:rPr lang="en-US" sz="1220" dirty="0">
                 <a:solidFill>
                   <a:srgbClr val="17364A"/>
                 </a:solidFill>
@@ -14104,13 +14331,16 @@
                 <a:ea typeface="Aptos" pitchFamily="34" charset="-122"/>
                 <a:cs typeface="Aptos" pitchFamily="34" charset="-120"/>
               </a:rPr>
-              <a:t>It is designed for public health staff who must translate responsible AI principles into.</a:t>
-            </a:r>
-            <a:endParaRPr lang="en-US" sz="1380" dirty="0"/>
-          </a:p>
-          <a:p>
-            <a:r>
-              <a:rPr lang="en-US" sz="1380" dirty="0">
+              <a:t>It is designed for public health staff who must translate.</a:t>
+            </a:r>
+            <a:endParaRPr lang="en-US" sz="1220" dirty="0"/>
+          </a:p>
+          <a:p>
+            <a:pPr indent="0" marL="0">
+              <a:buNone/>
+            </a:pPr>
+            <a:r>
+              <a:rPr lang="en-US" sz="1220" dirty="0">
                 <a:solidFill>
                   <a:srgbClr val="17364A"/>
                 </a:solidFill>
@@ -14118,13 +14348,16 @@
                 <a:ea typeface="Aptos" pitchFamily="34" charset="-122"/>
                 <a:cs typeface="Aptos" pitchFamily="34" charset="-120"/>
               </a:rPr>
-              <a:t>The module helps learners move beyond general awareness by producing a practical artifact.</a:t>
-            </a:r>
-            <a:endParaRPr lang="en-US" sz="1380" dirty="0"/>
-          </a:p>
-          <a:p>
-            <a:r>
-              <a:rPr lang="en-US" sz="1380" dirty="0">
+              <a:t>The module helps learners move beyond general awareness by.</a:t>
+            </a:r>
+            <a:endParaRPr lang="en-US" sz="1220" dirty="0"/>
+          </a:p>
+          <a:p>
+            <a:pPr indent="0" marL="0">
+              <a:buNone/>
+            </a:pPr>
+            <a:r>
+              <a:rPr lang="en-US" sz="1220" dirty="0">
                 <a:solidFill>
                   <a:srgbClr val="17364A"/>
                 </a:solidFill>
@@ -14132,9 +14365,9 @@
                 <a:ea typeface="Aptos" pitchFamily="34" charset="-122"/>
                 <a:cs typeface="Aptos" pitchFamily="34" charset="-120"/>
               </a:rPr>
-              <a:t>It emphasizes paragraph-based reasoning, defined responsibilities, and documentation that.</a:t>
-            </a:r>
-            <a:endParaRPr lang="en-US" sz="1380" dirty="0"/>
+              <a:t>It emphasizes paragraph-based reasoning, defined responsibilities,.</a:t>
+            </a:r>
+            <a:endParaRPr lang="en-US" sz="1220" dirty="0"/>
           </a:p>
         </p:txBody>
       </p:sp>
@@ -14212,17 +14445,17 @@
         </p:nvSpPr>
         <p:spPr>
           <a:xfrm>
-            <a:off x="7799832" y="5001768"/>
-            <a:ext cx="3145536" cy="502920"/>
-          </a:xfrm>
-          <a:prstGeom prst="rect">
-            <a:avLst/>
-          </a:prstGeom>
-          <a:noFill/>
-          <a:ln/>
-        </p:spPr>
-        <p:txBody>
-          <a:bodyPr wrap="square" lIns="0" tIns="0" rIns="0" bIns="0" rtlCol="0" anchor="t">
+            <a:off x="7799832" y="4974336"/>
+            <a:ext cx="3145536" cy="576072"/>
+          </a:xfrm>
+          <a:prstGeom prst="rect">
+            <a:avLst/>
+          </a:prstGeom>
+          <a:noFill/>
+          <a:ln/>
+        </p:spPr>
+        <p:txBody>
+          <a:bodyPr wrap="square" lIns="254" tIns="254" rIns="254" bIns="254" rtlCol="0" anchor="t">
             <a:normAutofit/>
           </a:bodyPr>
           <a:lstStyle/>
@@ -14231,7 +14464,7 @@
               <a:buNone/>
             </a:pPr>
             <a:r>
-              <a:rPr lang="en-US" sz="1550" dirty="0">
+              <a:rPr lang="en-US" sz="1320" dirty="0">
                 <a:solidFill>
                   <a:srgbClr val="17364A"/>
                 </a:solidFill>
@@ -14239,9 +14472,9 @@
                 <a:ea typeface="Aptos" pitchFamily="34" charset="-122"/>
                 <a:cs typeface="Aptos" pitchFamily="34" charset="-120"/>
               </a:rPr>
-              <a:t>Connect the concept to public health purpose, responsible use, required safeguards, documentation, and the next action a department should take.</a:t>
-            </a:r>
-            <a:endParaRPr lang="en-US" sz="1550" dirty="0"/>
+              <a:t>Connect the concept to public health purpose, responsible use, required safeguards, documentation, and the next action a.</a:t>
+            </a:r>
+            <a:endParaRPr lang="en-US" sz="1320" dirty="0"/>
           </a:p>
         </p:txBody>
       </p:sp>
@@ -14542,49 +14775,58 @@
           <a:ln/>
         </p:spPr>
         <p:txBody>
-          <a:bodyPr wrap="square" lIns="635" tIns="635" rIns="635" bIns="635" rtlCol="0" anchor="t">
+          <a:bodyPr wrap="square" lIns="1016" tIns="1016" rIns="1016" bIns="1016" rtlCol="0" anchor="t">
             <a:normAutofit/>
           </a:bodyPr>
           <a:lstStyle/>
           <a:p>
+            <a:pPr indent="0" marL="0">
+              <a:buNone/>
+            </a:pPr>
             <a:r>
               <a:rPr lang="en-US" sz="2100" dirty="0">
                 <a:solidFill>
-                  <a:srgbClr val="17364A"/>
-                </a:solidFill>
-                <a:latin typeface="Aptos" pitchFamily="34" charset="0"/>
-                <a:ea typeface="Aptos" pitchFamily="34" charset="-122"/>
-                <a:cs typeface="Aptos" pitchFamily="34" charset="-120"/>
-              </a:rPr>
-              <a:t>Decision right: The authority to approve, deny, modify, pause, or escalate an AI use case or.</a:t>
+                  <a:srgbClr val="003A63"/>
+                </a:solidFill>
+                <a:latin typeface="Aptos" pitchFamily="34" charset="0"/>
+                <a:ea typeface="Aptos" pitchFamily="34" charset="-122"/>
+                <a:cs typeface="Aptos" pitchFamily="34" charset="-120"/>
+              </a:rPr>
+              <a:t>• Decision right: The authority to approve, deny, modify, pause, or escalate an AI use case or.</a:t>
             </a:r>
             <a:endParaRPr lang="en-US" sz="2100" dirty="0"/>
           </a:p>
           <a:p>
+            <a:pPr indent="0" marL="0">
+              <a:buNone/>
+            </a:pPr>
             <a:r>
               <a:rPr lang="en-US" sz="2100" dirty="0">
                 <a:solidFill>
-                  <a:srgbClr val="17364A"/>
-                </a:solidFill>
-                <a:latin typeface="Aptos" pitchFamily="34" charset="0"/>
-                <a:ea typeface="Aptos" pitchFamily="34" charset="-122"/>
-                <a:cs typeface="Aptos" pitchFamily="34" charset="-120"/>
-              </a:rPr>
-              <a:t>Evidence artifact: A document, log, checklist, test result, approval record, or review note that.</a:t>
+                  <a:srgbClr val="003A63"/>
+                </a:solidFill>
+                <a:latin typeface="Aptos" pitchFamily="34" charset="0"/>
+                <a:ea typeface="Aptos" pitchFamily="34" charset="-122"/>
+                <a:cs typeface="Aptos" pitchFamily="34" charset="-120"/>
+              </a:rPr>
+              <a:t>• Evidence artifact: A document, log, checklist, test result, approval record, or review note.</a:t>
             </a:r>
             <a:endParaRPr lang="en-US" sz="2100" dirty="0"/>
           </a:p>
           <a:p>
+            <a:pPr indent="0" marL="0">
+              <a:buNone/>
+            </a:pPr>
             <a:r>
               <a:rPr lang="en-US" sz="2100" dirty="0">
                 <a:solidFill>
-                  <a:srgbClr val="17364A"/>
-                </a:solidFill>
-                <a:latin typeface="Aptos" pitchFamily="34" charset="0"/>
-                <a:ea typeface="Aptos" pitchFamily="34" charset="-122"/>
-                <a:cs typeface="Aptos" pitchFamily="34" charset="-120"/>
-              </a:rPr>
-              <a:t>Escalation pathway: A defined route for raising concerns to the appropriate reviewer or decision-maker.</a:t>
+                  <a:srgbClr val="003A63"/>
+                </a:solidFill>
+                <a:latin typeface="Aptos" pitchFamily="34" charset="0"/>
+                <a:ea typeface="Aptos" pitchFamily="34" charset="-122"/>
+                <a:cs typeface="Aptos" pitchFamily="34" charset="-120"/>
+              </a:rPr>
+              <a:t>• Escalation pathway: A defined route for raising concerns to the appropriate reviewer or.</a:t>
             </a:r>
             <a:endParaRPr lang="en-US" sz="2100" dirty="0"/>
           </a:p>
@@ -14664,17 +14906,17 @@
         </p:nvSpPr>
         <p:spPr>
           <a:xfrm>
-            <a:off x="7799832" y="1828800"/>
-            <a:ext cx="3145536" cy="685800"/>
-          </a:xfrm>
-          <a:prstGeom prst="rect">
-            <a:avLst/>
-          </a:prstGeom>
-          <a:noFill/>
-          <a:ln/>
-        </p:spPr>
-        <p:txBody>
-          <a:bodyPr wrap="square" lIns="0" tIns="0" rIns="0" bIns="0" rtlCol="0" anchor="t">
+            <a:off x="7799832" y="1801368"/>
+            <a:ext cx="3145536" cy="758952"/>
+          </a:xfrm>
+          <a:prstGeom prst="rect">
+            <a:avLst/>
+          </a:prstGeom>
+          <a:noFill/>
+          <a:ln/>
+        </p:spPr>
+        <p:txBody>
+          <a:bodyPr wrap="square" lIns="254" tIns="254" rIns="254" bIns="254" rtlCol="0" anchor="t">
             <a:normAutofit/>
           </a:bodyPr>
           <a:lstStyle/>
@@ -14683,7 +14925,7 @@
               <a:buNone/>
             </a:pPr>
             <a:r>
-              <a:rPr lang="en-US" sz="1550" dirty="0">
+              <a:rPr lang="en-US" sz="1320" dirty="0">
                 <a:solidFill>
                   <a:srgbClr val="17364A"/>
                 </a:solidFill>
@@ -14693,7 +14935,7 @@
               </a:rPr>
               <a:t>Decision right: The authority to approve, deny, modify, pause, or escalate an AI use case or.</a:t>
             </a:r>
-            <a:endParaRPr lang="en-US" sz="1550" dirty="0"/>
+            <a:endParaRPr lang="en-US" sz="1320" dirty="0"/>
           </a:p>
         </p:txBody>
       </p:sp>
@@ -14781,13 +15023,16 @@
           <a:ln/>
         </p:spPr>
         <p:txBody>
-          <a:bodyPr wrap="square" lIns="254" tIns="254" rIns="254" bIns="254" rtlCol="0" anchor="t">
+          <a:bodyPr wrap="square" lIns="508" tIns="508" rIns="508" bIns="508" rtlCol="0" anchor="t">
             <a:normAutofit/>
           </a:bodyPr>
           <a:lstStyle/>
           <a:p>
-            <a:r>
-              <a:rPr lang="en-US" sz="1380" dirty="0">
+            <a:pPr indent="0" marL="0">
+              <a:buNone/>
+            </a:pPr>
+            <a:r>
+              <a:rPr lang="en-US" sz="1220" dirty="0">
                 <a:solidFill>
                   <a:srgbClr val="17364A"/>
                 </a:solidFill>
@@ -14795,13 +15040,16 @@
                 <a:ea typeface="Aptos" pitchFamily="34" charset="-122"/>
                 <a:cs typeface="Aptos" pitchFamily="34" charset="-120"/>
               </a:rPr>
-              <a:t>Decision right: The authority to approve, deny, modify, pause, or escalate an AI use case.</a:t>
-            </a:r>
-            <a:endParaRPr lang="en-US" sz="1380" dirty="0"/>
-          </a:p>
-          <a:p>
-            <a:r>
-              <a:rPr lang="en-US" sz="1380" dirty="0">
+              <a:t>Decision right: The authority to approve, deny, modify, pause, or.</a:t>
+            </a:r>
+            <a:endParaRPr lang="en-US" sz="1220" dirty="0"/>
+          </a:p>
+          <a:p>
+            <a:pPr indent="0" marL="0">
+              <a:buNone/>
+            </a:pPr>
+            <a:r>
+              <a:rPr lang="en-US" sz="1220" dirty="0">
                 <a:solidFill>
                   <a:srgbClr val="17364A"/>
                 </a:solidFill>
@@ -14809,13 +15057,16 @@
                 <a:ea typeface="Aptos" pitchFamily="34" charset="-122"/>
                 <a:cs typeface="Aptos" pitchFamily="34" charset="-120"/>
               </a:rPr>
-              <a:t>Evidence artifact: A document, log, checklist, test result, approval record, or review.</a:t>
-            </a:r>
-            <a:endParaRPr lang="en-US" sz="1380" dirty="0"/>
-          </a:p>
-          <a:p>
-            <a:r>
-              <a:rPr lang="en-US" sz="1380" dirty="0">
+              <a:t>Evidence artifact: A document, log, checklist, test result,.</a:t>
+            </a:r>
+            <a:endParaRPr lang="en-US" sz="1220" dirty="0"/>
+          </a:p>
+          <a:p>
+            <a:pPr indent="0" marL="0">
+              <a:buNone/>
+            </a:pPr>
+            <a:r>
+              <a:rPr lang="en-US" sz="1220" dirty="0">
                 <a:solidFill>
                   <a:srgbClr val="17364A"/>
                 </a:solidFill>
@@ -14823,9 +15074,9 @@
                 <a:ea typeface="Aptos" pitchFamily="34" charset="-122"/>
                 <a:cs typeface="Aptos" pitchFamily="34" charset="-120"/>
               </a:rPr>
-              <a:t>Accountability owner: The person or role responsible for ensuring that an AI use case is.</a:t>
-            </a:r>
-            <a:endParaRPr lang="en-US" sz="1380" dirty="0"/>
+              <a:t>Accountability owner: The person or role responsible for ensuring.</a:t>
+            </a:r>
+            <a:endParaRPr lang="en-US" sz="1220" dirty="0"/>
           </a:p>
         </p:txBody>
       </p:sp>
@@ -14903,17 +15154,17 @@
         </p:nvSpPr>
         <p:spPr>
           <a:xfrm>
-            <a:off x="7799832" y="5001768"/>
-            <a:ext cx="3145536" cy="502920"/>
-          </a:xfrm>
-          <a:prstGeom prst="rect">
-            <a:avLst/>
-          </a:prstGeom>
-          <a:noFill/>
-          <a:ln/>
-        </p:spPr>
-        <p:txBody>
-          <a:bodyPr wrap="square" lIns="0" tIns="0" rIns="0" bIns="0" rtlCol="0" anchor="t">
+            <a:off x="7799832" y="4974336"/>
+            <a:ext cx="3145536" cy="576072"/>
+          </a:xfrm>
+          <a:prstGeom prst="rect">
+            <a:avLst/>
+          </a:prstGeom>
+          <a:noFill/>
+          <a:ln/>
+        </p:spPr>
+        <p:txBody>
+          <a:bodyPr wrap="square" lIns="254" tIns="254" rIns="254" bIns="254" rtlCol="0" anchor="t">
             <a:normAutofit/>
           </a:bodyPr>
           <a:lstStyle/>
@@ -14922,7 +15173,7 @@
               <a:buNone/>
             </a:pPr>
             <a:r>
-              <a:rPr lang="en-US" sz="1550" dirty="0">
+              <a:rPr lang="en-US" sz="1320" dirty="0">
                 <a:solidFill>
                   <a:srgbClr val="17364A"/>
                 </a:solidFill>
@@ -14930,9 +15181,9 @@
                 <a:ea typeface="Aptos" pitchFamily="34" charset="-122"/>
                 <a:cs typeface="Aptos" pitchFamily="34" charset="-120"/>
               </a:rPr>
-              <a:t>Connect the concept to public health purpose, responsible use, required safeguards, documentation, and the next action a department should take.</a:t>
-            </a:r>
-            <a:endParaRPr lang="en-US" sz="1550" dirty="0"/>
+              <a:t>Connect the concept to public health purpose, responsible use, required safeguards, documentation, and the next action a.</a:t>
+            </a:r>
+            <a:endParaRPr lang="en-US" sz="1320" dirty="0"/>
           </a:p>
         </p:txBody>
       </p:sp>
@@ -15233,49 +15484,58 @@
           <a:ln/>
         </p:spPr>
         <p:txBody>
-          <a:bodyPr wrap="square" lIns="635" tIns="635" rIns="635" bIns="635" rtlCol="0" anchor="t">
+          <a:bodyPr wrap="square" lIns="1016" tIns="1016" rIns="1016" bIns="1016" rtlCol="0" anchor="t">
             <a:normAutofit/>
           </a:bodyPr>
           <a:lstStyle/>
           <a:p>
+            <a:pPr indent="0" marL="0">
+              <a:buNone/>
+            </a:pPr>
             <a:r>
               <a:rPr lang="en-US" sz="2100" dirty="0">
                 <a:solidFill>
-                  <a:srgbClr val="17364A"/>
-                </a:solidFill>
-                <a:latin typeface="Aptos" pitchFamily="34" charset="0"/>
-                <a:ea typeface="Aptos" pitchFamily="34" charset="-122"/>
-                <a:cs typeface="Aptos" pitchFamily="34" charset="-120"/>
-              </a:rPr>
-              <a:t>AI for Surveillance Signal Review and Epidemiologic Judgment matters because AI adoption changes how.</a:t>
+                  <a:srgbClr val="003A63"/>
+                </a:solidFill>
+                <a:latin typeface="Aptos" pitchFamily="34" charset="0"/>
+                <a:ea typeface="Aptos" pitchFamily="34" charset="-122"/>
+                <a:cs typeface="Aptos" pitchFamily="34" charset="-120"/>
+              </a:rPr>
+              <a:t>• AI for Surveillance Signal Review and Epidemiologic Judgment matters because AI adoption.</a:t>
             </a:r>
             <a:endParaRPr lang="en-US" sz="2100" dirty="0"/>
           </a:p>
           <a:p>
+            <a:pPr indent="0" marL="0">
+              <a:buNone/>
+            </a:pPr>
             <a:r>
               <a:rPr lang="en-US" sz="2100" dirty="0">
                 <a:solidFill>
-                  <a:srgbClr val="17364A"/>
-                </a:solidFill>
-                <a:latin typeface="Aptos" pitchFamily="34" charset="0"/>
-                <a:ea typeface="Aptos" pitchFamily="34" charset="-122"/>
-                <a:cs typeface="Aptos" pitchFamily="34" charset="-120"/>
-              </a:rPr>
-              <a:t>Without a structured approach, staff may rely on informal practices, vendor assurances, or one-time.</a:t>
+                  <a:srgbClr val="003A63"/>
+                </a:solidFill>
+                <a:latin typeface="Aptos" pitchFamily="34" charset="0"/>
+                <a:ea typeface="Aptos" pitchFamily="34" charset="-122"/>
+                <a:cs typeface="Aptos" pitchFamily="34" charset="-120"/>
+              </a:rPr>
+              <a:t>• Without a structured approach, staff may rely on informal practices, vendor assurances, or.</a:t>
             </a:r>
             <a:endParaRPr lang="en-US" sz="2100" dirty="0"/>
           </a:p>
           <a:p>
+            <a:pPr indent="0" marL="0">
+              <a:buNone/>
+            </a:pPr>
             <a:r>
               <a:rPr lang="en-US" sz="2100" dirty="0">
                 <a:solidFill>
-                  <a:srgbClr val="17364A"/>
-                </a:solidFill>
-                <a:latin typeface="Aptos" pitchFamily="34" charset="0"/>
-                <a:ea typeface="Aptos" pitchFamily="34" charset="-122"/>
-                <a:cs typeface="Aptos" pitchFamily="34" charset="-120"/>
-              </a:rPr>
-              <a:t>Public health agencies operate under legal authorities, public accountability, resource constraints,.</a:t>
+                  <a:srgbClr val="003A63"/>
+                </a:solidFill>
+                <a:latin typeface="Aptos" pitchFamily="34" charset="0"/>
+                <a:ea typeface="Aptos" pitchFamily="34" charset="-122"/>
+                <a:cs typeface="Aptos" pitchFamily="34" charset="-120"/>
+              </a:rPr>
+              <a:t>• Public health agencies operate under legal authorities, public accountability, resource.</a:t>
             </a:r>
             <a:endParaRPr lang="en-US" sz="2100" dirty="0"/>
           </a:p>
@@ -15355,17 +15615,17 @@
         </p:nvSpPr>
         <p:spPr>
           <a:xfrm>
-            <a:off x="7799832" y="1828800"/>
-            <a:ext cx="3145536" cy="685800"/>
-          </a:xfrm>
-          <a:prstGeom prst="rect">
-            <a:avLst/>
-          </a:prstGeom>
-          <a:noFill/>
-          <a:ln/>
-        </p:spPr>
-        <p:txBody>
-          <a:bodyPr wrap="square" lIns="0" tIns="0" rIns="0" bIns="0" rtlCol="0" anchor="t">
+            <a:off x="7799832" y="1801368"/>
+            <a:ext cx="3145536" cy="758952"/>
+          </a:xfrm>
+          <a:prstGeom prst="rect">
+            <a:avLst/>
+          </a:prstGeom>
+          <a:noFill/>
+          <a:ln/>
+        </p:spPr>
+        <p:txBody>
+          <a:bodyPr wrap="square" lIns="254" tIns="254" rIns="254" bIns="254" rtlCol="0" anchor="t">
             <a:normAutofit/>
           </a:bodyPr>
           <a:lstStyle/>
@@ -15374,7 +15634,7 @@
               <a:buNone/>
             </a:pPr>
             <a:r>
-              <a:rPr lang="en-US" sz="1550" dirty="0">
+              <a:rPr lang="en-US" sz="1320" dirty="0">
                 <a:solidFill>
                   <a:srgbClr val="17364A"/>
                 </a:solidFill>
@@ -15384,7 +15644,7 @@
               </a:rPr>
               <a:t>AI for Surveillance Signal Review and Epidemiologic Judgment matters because AI adoption changes how.</a:t>
             </a:r>
-            <a:endParaRPr lang="en-US" sz="1550" dirty="0"/>
+            <a:endParaRPr lang="en-US" sz="1320" dirty="0"/>
           </a:p>
         </p:txBody>
       </p:sp>
@@ -15472,13 +15732,16 @@
           <a:ln/>
         </p:spPr>
         <p:txBody>
-          <a:bodyPr wrap="square" lIns="254" tIns="254" rIns="254" bIns="254" rtlCol="0" anchor="t">
+          <a:bodyPr wrap="square" lIns="508" tIns="508" rIns="508" bIns="508" rtlCol="0" anchor="t">
             <a:normAutofit/>
           </a:bodyPr>
           <a:lstStyle/>
           <a:p>
-            <a:r>
-              <a:rPr lang="en-US" sz="1380" dirty="0">
+            <a:pPr indent="0" marL="0">
+              <a:buNone/>
+            </a:pPr>
+            <a:r>
+              <a:rPr lang="en-US" sz="1220" dirty="0">
                 <a:solidFill>
                   <a:srgbClr val="17364A"/>
                 </a:solidFill>
@@ -15486,13 +15749,16 @@
                 <a:ea typeface="Aptos" pitchFamily="34" charset="-122"/>
                 <a:cs typeface="Aptos" pitchFamily="34" charset="-120"/>
               </a:rPr>
-              <a:t>AI for Surveillance Signal Review and Epidemiologic Judgment matters because AI adoption.</a:t>
-            </a:r>
-            <a:endParaRPr lang="en-US" sz="1380" dirty="0"/>
-          </a:p>
-          <a:p>
-            <a:r>
-              <a:rPr lang="en-US" sz="1380" dirty="0">
+              <a:t>AI for Surveillance Signal Review and Epidemiologic Judgment.</a:t>
+            </a:r>
+            <a:endParaRPr lang="en-US" sz="1220" dirty="0"/>
+          </a:p>
+          <a:p>
+            <a:pPr indent="0" marL="0">
+              <a:buNone/>
+            </a:pPr>
+            <a:r>
+              <a:rPr lang="en-US" sz="1220" dirty="0">
                 <a:solidFill>
                   <a:srgbClr val="17364A"/>
                 </a:solidFill>
@@ -15500,13 +15766,16 @@
                 <a:ea typeface="Aptos" pitchFamily="34" charset="-122"/>
                 <a:cs typeface="Aptos" pitchFamily="34" charset="-120"/>
               </a:rPr>
-              <a:t>Without a structured approach, staff may rely on informal practices, vendor assurances, or.</a:t>
-            </a:r>
-            <a:endParaRPr lang="en-US" sz="1380" dirty="0"/>
-          </a:p>
-          <a:p>
-            <a:r>
-              <a:rPr lang="en-US" sz="1380" dirty="0">
+              <a:t>Without a structured approach, staff may rely on informal.</a:t>
+            </a:r>
+            <a:endParaRPr lang="en-US" sz="1220" dirty="0"/>
+          </a:p>
+          <a:p>
+            <a:pPr indent="0" marL="0">
+              <a:buNone/>
+            </a:pPr>
+            <a:r>
+              <a:rPr lang="en-US" sz="1220" dirty="0">
                 <a:solidFill>
                   <a:srgbClr val="17364A"/>
                 </a:solidFill>
@@ -15514,9 +15783,9 @@
                 <a:ea typeface="Aptos" pitchFamily="34" charset="-122"/>
                 <a:cs typeface="Aptos" pitchFamily="34" charset="-120"/>
               </a:rPr>
-              <a:t>Public health agencies operate under legal authorities, public accountability, resource.</a:t>
-            </a:r>
-            <a:endParaRPr lang="en-US" sz="1380" dirty="0"/>
+              <a:t>Public health agencies operate under legal authorities, public.</a:t>
+            </a:r>
+            <a:endParaRPr lang="en-US" sz="1220" dirty="0"/>
           </a:p>
         </p:txBody>
       </p:sp>
@@ -15594,17 +15863,17 @@
         </p:nvSpPr>
         <p:spPr>
           <a:xfrm>
-            <a:off x="7799832" y="5001768"/>
-            <a:ext cx="3145536" cy="502920"/>
-          </a:xfrm>
-          <a:prstGeom prst="rect">
-            <a:avLst/>
-          </a:prstGeom>
-          <a:noFill/>
-          <a:ln/>
-        </p:spPr>
-        <p:txBody>
-          <a:bodyPr wrap="square" lIns="0" tIns="0" rIns="0" bIns="0" rtlCol="0" anchor="t">
+            <a:off x="7799832" y="4974336"/>
+            <a:ext cx="3145536" cy="576072"/>
+          </a:xfrm>
+          <a:prstGeom prst="rect">
+            <a:avLst/>
+          </a:prstGeom>
+          <a:noFill/>
+          <a:ln/>
+        </p:spPr>
+        <p:txBody>
+          <a:bodyPr wrap="square" lIns="254" tIns="254" rIns="254" bIns="254" rtlCol="0" anchor="t">
             <a:normAutofit/>
           </a:bodyPr>
           <a:lstStyle/>
@@ -15613,7 +15882,7 @@
               <a:buNone/>
             </a:pPr>
             <a:r>
-              <a:rPr lang="en-US" sz="1550" dirty="0">
+              <a:rPr lang="en-US" sz="1320" dirty="0">
                 <a:solidFill>
                   <a:srgbClr val="17364A"/>
                 </a:solidFill>
@@ -15621,9 +15890,9 @@
                 <a:ea typeface="Aptos" pitchFamily="34" charset="-122"/>
                 <a:cs typeface="Aptos" pitchFamily="34" charset="-120"/>
               </a:rPr>
-              <a:t>Connect the concept to public health purpose, responsible use, required safeguards, documentation, and the next action a department should take.</a:t>
-            </a:r>
-            <a:endParaRPr lang="en-US" sz="1550" dirty="0"/>
+              <a:t>Connect the concept to public health purpose, responsible use, required safeguards, documentation, and the next action a.</a:t>
+            </a:r>
+            <a:endParaRPr lang="en-US" sz="1320" dirty="0"/>
           </a:p>
         </p:txBody>
       </p:sp>
@@ -15924,49 +16193,58 @@
           <a:ln/>
         </p:spPr>
         <p:txBody>
-          <a:bodyPr wrap="square" lIns="635" tIns="635" rIns="635" bIns="635" rtlCol="0" anchor="t">
+          <a:bodyPr wrap="square" lIns="1016" tIns="1016" rIns="1016" bIns="1016" rtlCol="0" anchor="t">
             <a:normAutofit/>
           </a:bodyPr>
           <a:lstStyle/>
           <a:p>
+            <a:pPr indent="0" marL="0">
+              <a:buNone/>
+            </a:pPr>
             <a:r>
               <a:rPr lang="en-US" sz="2100" dirty="0">
                 <a:solidFill>
-                  <a:srgbClr val="17364A"/>
-                </a:solidFill>
-                <a:latin typeface="Aptos" pitchFamily="34" charset="0"/>
-                <a:ea typeface="Aptos" pitchFamily="34" charset="-122"/>
-                <a:cs typeface="Aptos" pitchFamily="34" charset="-120"/>
-              </a:rPr>
-              <a:t>A public health agency is preparing to use AI in a workflow related to using AI to support signal.</a:t>
+                  <a:srgbClr val="003A63"/>
+                </a:solidFill>
+                <a:latin typeface="Aptos" pitchFamily="34" charset="0"/>
+                <a:ea typeface="Aptos" pitchFamily="34" charset="-122"/>
+                <a:cs typeface="Aptos" pitchFamily="34" charset="-120"/>
+              </a:rPr>
+              <a:t>• A public health agency is preparing to use AI in a workflow related to using AI to support.</a:t>
             </a:r>
             <a:endParaRPr lang="en-US" sz="2100" dirty="0"/>
           </a:p>
           <a:p>
+            <a:pPr indent="0" marL="0">
+              <a:buNone/>
+            </a:pPr>
             <a:r>
               <a:rPr lang="en-US" sz="2100" dirty="0">
                 <a:solidFill>
-                  <a:srgbClr val="17364A"/>
-                </a:solidFill>
-                <a:latin typeface="Aptos" pitchFamily="34" charset="0"/>
-                <a:ea typeface="Aptos" pitchFamily="34" charset="-122"/>
-                <a:cs typeface="Aptos" pitchFamily="34" charset="-120"/>
-              </a:rPr>
-              <a:t>The project team initially treats the tool as a helpful efficiency aid, but governance reviewers.</a:t>
+                  <a:srgbClr val="003A63"/>
+                </a:solidFill>
+                <a:latin typeface="Aptos" pitchFamily="34" charset="0"/>
+                <a:ea typeface="Aptos" pitchFamily="34" charset="-122"/>
+                <a:cs typeface="Aptos" pitchFamily="34" charset="-120"/>
+              </a:rPr>
+              <a:t>• The project team initially treats the tool as a helpful efficiency aid, but governance.</a:t>
             </a:r>
             <a:endParaRPr lang="en-US" sz="2100" dirty="0"/>
           </a:p>
           <a:p>
+            <a:pPr indent="0" marL="0">
+              <a:buNone/>
+            </a:pPr>
             <a:r>
               <a:rPr lang="en-US" sz="2100" dirty="0">
                 <a:solidFill>
-                  <a:srgbClr val="17364A"/>
-                </a:solidFill>
-                <a:latin typeface="Aptos" pitchFamily="34" charset="0"/>
-                <a:ea typeface="Aptos" pitchFamily="34" charset="-122"/>
-                <a:cs typeface="Aptos" pitchFamily="34" charset="-120"/>
-              </a:rPr>
-              <a:t>The agency responds by creating a clear artifact that defines intended use, prohibited use, responsible.</a:t>
+                  <a:srgbClr val="003A63"/>
+                </a:solidFill>
+                <a:latin typeface="Aptos" pitchFamily="34" charset="0"/>
+                <a:ea typeface="Aptos" pitchFamily="34" charset="-122"/>
+                <a:cs typeface="Aptos" pitchFamily="34" charset="-120"/>
+              </a:rPr>
+              <a:t>• The agency responds by creating a clear artifact that defines intended use, prohibited use,.</a:t>
             </a:r>
             <a:endParaRPr lang="en-US" sz="2100" dirty="0"/>
           </a:p>
@@ -16046,17 +16324,17 @@
         </p:nvSpPr>
         <p:spPr>
           <a:xfrm>
-            <a:off x="7799832" y="1828800"/>
-            <a:ext cx="3145536" cy="685800"/>
-          </a:xfrm>
-          <a:prstGeom prst="rect">
-            <a:avLst/>
-          </a:prstGeom>
-          <a:noFill/>
-          <a:ln/>
-        </p:spPr>
-        <p:txBody>
-          <a:bodyPr wrap="square" lIns="0" tIns="0" rIns="0" bIns="0" rtlCol="0" anchor="t">
+            <a:off x="7799832" y="1801368"/>
+            <a:ext cx="3145536" cy="758952"/>
+          </a:xfrm>
+          <a:prstGeom prst="rect">
+            <a:avLst/>
+          </a:prstGeom>
+          <a:noFill/>
+          <a:ln/>
+        </p:spPr>
+        <p:txBody>
+          <a:bodyPr wrap="square" lIns="254" tIns="254" rIns="254" bIns="254" rtlCol="0" anchor="t">
             <a:normAutofit/>
           </a:bodyPr>
           <a:lstStyle/>
@@ -16065,7 +16343,7 @@
               <a:buNone/>
             </a:pPr>
             <a:r>
-              <a:rPr lang="en-US" sz="1550" dirty="0">
+              <a:rPr lang="en-US" sz="1320" dirty="0">
                 <a:solidFill>
                   <a:srgbClr val="17364A"/>
                 </a:solidFill>
@@ -16075,7 +16353,7 @@
               </a:rPr>
               <a:t>A public health agency is preparing to use AI in a workflow related to using AI to support signal.</a:t>
             </a:r>
-            <a:endParaRPr lang="en-US" sz="1550" dirty="0"/>
+            <a:endParaRPr lang="en-US" sz="1320" dirty="0"/>
           </a:p>
         </p:txBody>
       </p:sp>
@@ -16163,13 +16441,16 @@
           <a:ln/>
         </p:spPr>
         <p:txBody>
-          <a:bodyPr wrap="square" lIns="254" tIns="254" rIns="254" bIns="254" rtlCol="0" anchor="t">
+          <a:bodyPr wrap="square" lIns="508" tIns="508" rIns="508" bIns="508" rtlCol="0" anchor="t">
             <a:normAutofit/>
           </a:bodyPr>
           <a:lstStyle/>
           <a:p>
-            <a:r>
-              <a:rPr lang="en-US" sz="1380" dirty="0">
+            <a:pPr indent="0" marL="0">
+              <a:buNone/>
+            </a:pPr>
+            <a:r>
+              <a:rPr lang="en-US" sz="1220" dirty="0">
                 <a:solidFill>
                   <a:srgbClr val="17364A"/>
                 </a:solidFill>
@@ -16177,13 +16458,16 @@
                 <a:ea typeface="Aptos" pitchFamily="34" charset="-122"/>
                 <a:cs typeface="Aptos" pitchFamily="34" charset="-120"/>
               </a:rPr>
-              <a:t>A public health agency is preparing to use AI in a workflow related to using AI to support.</a:t>
-            </a:r>
-            <a:endParaRPr lang="en-US" sz="1380" dirty="0"/>
-          </a:p>
-          <a:p>
-            <a:r>
-              <a:rPr lang="en-US" sz="1380" dirty="0">
+              <a:t>A public health agency is preparing to use AI in a workflow.</a:t>
+            </a:r>
+            <a:endParaRPr lang="en-US" sz="1220" dirty="0"/>
+          </a:p>
+          <a:p>
+            <a:pPr indent="0" marL="0">
+              <a:buNone/>
+            </a:pPr>
+            <a:r>
+              <a:rPr lang="en-US" sz="1220" dirty="0">
                 <a:solidFill>
                   <a:srgbClr val="17364A"/>
                 </a:solidFill>
@@ -16191,13 +16475,16 @@
                 <a:ea typeface="Aptos" pitchFamily="34" charset="-122"/>
                 <a:cs typeface="Aptos" pitchFamily="34" charset="-120"/>
               </a:rPr>
-              <a:t>The project team initially treats the tool as a helpful efficiency aid, but governance.</a:t>
-            </a:r>
-            <a:endParaRPr lang="en-US" sz="1380" dirty="0"/>
-          </a:p>
-          <a:p>
-            <a:r>
-              <a:rPr lang="en-US" sz="1380" dirty="0">
+              <a:t>The project team initially treats the tool as a helpful efficiency.</a:t>
+            </a:r>
+            <a:endParaRPr lang="en-US" sz="1220" dirty="0"/>
+          </a:p>
+          <a:p>
+            <a:pPr indent="0" marL="0">
+              <a:buNone/>
+            </a:pPr>
+            <a:r>
+              <a:rPr lang="en-US" sz="1220" dirty="0">
                 <a:solidFill>
                   <a:srgbClr val="17364A"/>
                 </a:solidFill>
@@ -16205,9 +16492,9 @@
                 <a:ea typeface="Aptos" pitchFamily="34" charset="-122"/>
                 <a:cs typeface="Aptos" pitchFamily="34" charset="-120"/>
               </a:rPr>
-              <a:t>The agency responds by creating a clear artifact that defines intended use, prohibited.</a:t>
-            </a:r>
-            <a:endParaRPr lang="en-US" sz="1380" dirty="0"/>
+              <a:t>The agency responds by creating a clear artifact that defines.</a:t>
+            </a:r>
+            <a:endParaRPr lang="en-US" sz="1220" dirty="0"/>
           </a:p>
         </p:txBody>
       </p:sp>
@@ -16285,17 +16572,17 @@
         </p:nvSpPr>
         <p:spPr>
           <a:xfrm>
-            <a:off x="7799832" y="5001768"/>
-            <a:ext cx="3145536" cy="502920"/>
-          </a:xfrm>
-          <a:prstGeom prst="rect">
-            <a:avLst/>
-          </a:prstGeom>
-          <a:noFill/>
-          <a:ln/>
-        </p:spPr>
-        <p:txBody>
-          <a:bodyPr wrap="square" lIns="0" tIns="0" rIns="0" bIns="0" rtlCol="0" anchor="t">
+            <a:off x="7799832" y="4974336"/>
+            <a:ext cx="3145536" cy="576072"/>
+          </a:xfrm>
+          <a:prstGeom prst="rect">
+            <a:avLst/>
+          </a:prstGeom>
+          <a:noFill/>
+          <a:ln/>
+        </p:spPr>
+        <p:txBody>
+          <a:bodyPr wrap="square" lIns="254" tIns="254" rIns="254" bIns="254" rtlCol="0" anchor="t">
             <a:normAutofit/>
           </a:bodyPr>
           <a:lstStyle/>
@@ -16304,7 +16591,7 @@
               <a:buNone/>
             </a:pPr>
             <a:r>
-              <a:rPr lang="en-US" sz="1550" dirty="0">
+              <a:rPr lang="en-US" sz="1320" dirty="0">
                 <a:solidFill>
                   <a:srgbClr val="17364A"/>
                 </a:solidFill>
@@ -16312,9 +16599,9 @@
                 <a:ea typeface="Aptos" pitchFamily="34" charset="-122"/>
                 <a:cs typeface="Aptos" pitchFamily="34" charset="-120"/>
               </a:rPr>
-              <a:t>Connect the concept to public health purpose, responsible use, required safeguards, documentation, and the next action a department should take.</a:t>
-            </a:r>
-            <a:endParaRPr lang="en-US" sz="1550" dirty="0"/>
+              <a:t>Connect the concept to public health purpose, responsible use, required safeguards, documentation, and the next action a.</a:t>
+            </a:r>
+            <a:endParaRPr lang="en-US" sz="1320" dirty="0"/>
           </a:p>
         </p:txBody>
       </p:sp>

--- a/downloads/presentations/modules/epi-310.pptx
+++ b/downloads/presentations/modules/epi-310.pptx
@@ -3330,11 +3330,11 @@
         <p:spPr>
           <a:xfrm>
             <a:off x="7635240" y="1325880"/>
-            <a:ext cx="3474720" cy="1325880"/>
+            <a:ext cx="3474720" cy="1207008"/>
           </a:xfrm>
           <a:prstGeom prst="roundRect">
             <a:avLst>
-              <a:gd name="adj" fmla="val 8276"/>
+              <a:gd name="adj" fmla="val 9091"/>
             </a:avLst>
           </a:prstGeom>
           <a:solidFill>
@@ -3396,7 +3396,7 @@
         <p:spPr>
           <a:xfrm>
             <a:off x="7799832" y="1801368"/>
-            <a:ext cx="3145536" cy="758952"/>
+            <a:ext cx="3145536" cy="640080"/>
           </a:xfrm>
           <a:prstGeom prst="rect">
             <a:avLst/>
@@ -3436,12 +3436,12 @@
         </p:nvSpPr>
         <p:spPr>
           <a:xfrm>
-            <a:off x="7635240" y="2788920"/>
-            <a:ext cx="3474720" cy="1536192"/>
+            <a:off x="7635240" y="2670048"/>
+            <a:ext cx="3474720" cy="1377086"/>
           </a:xfrm>
           <a:prstGeom prst="roundRect">
             <a:avLst>
-              <a:gd name="adj" fmla="val 7143"/>
+              <a:gd name="adj" fmla="val 7968"/>
             </a:avLst>
           </a:prstGeom>
           <a:solidFill>
@@ -3463,8 +3463,8 @@
         </p:nvSpPr>
         <p:spPr>
           <a:xfrm>
-            <a:off x="7799832" y="2935224"/>
-            <a:ext cx="3145536" cy="256032"/>
+            <a:off x="7799832" y="2798064"/>
+            <a:ext cx="3145536" cy="237744"/>
           </a:xfrm>
           <a:prstGeom prst="rect">
             <a:avLst/>
@@ -3480,7 +3480,7 @@
               <a:buNone/>
             </a:pPr>
             <a:r>
-              <a:rPr lang="en-US" sz="1300" b="1" dirty="0">
+              <a:rPr lang="en-US" sz="1250" b="1" dirty="0">
                 <a:solidFill>
                   <a:srgbClr val="0068B7"/>
                 </a:solidFill>
@@ -3488,101 +3488,317 @@
                 <a:ea typeface="Aptos" pitchFamily="34" charset="-122"/>
                 <a:cs typeface="Aptos" pitchFamily="34" charset="-120"/>
               </a:rPr>
-              <a:t>Concept checkpoints</a:t>
-            </a:r>
-            <a:endParaRPr lang="en-US" sz="1300" dirty="0"/>
-          </a:p>
-        </p:txBody>
-      </p:sp>
-      <p:sp>
-        <p:nvSpPr>
-          <p:cNvPr id="15" name="Text 13"/>
-          <p:cNvSpPr/>
-          <p:nvPr/>
-        </p:nvSpPr>
-        <p:spPr>
-          <a:xfrm>
-            <a:off x="7818120" y="3300984"/>
-            <a:ext cx="3090672" cy="877824"/>
-          </a:xfrm>
-          <a:prstGeom prst="rect">
-            <a:avLst/>
-          </a:prstGeom>
-          <a:noFill/>
-          <a:ln/>
-        </p:spPr>
-        <p:txBody>
-          <a:bodyPr wrap="square" lIns="508" tIns="508" rIns="508" bIns="508" rtlCol="0" anchor="t">
+              <a:t>Data-to-decision flow</a:t>
+            </a:r>
+            <a:endParaRPr lang="en-US" sz="1250" dirty="0"/>
+          </a:p>
+        </p:txBody>
+      </p:sp>
+      <p:sp>
+        <p:nvSpPr>
+          <p:cNvPr id="15" name="Shape 13"/>
+          <p:cNvSpPr/>
+          <p:nvPr/>
+        </p:nvSpPr>
+        <p:spPr>
+          <a:xfrm>
+            <a:off x="8763000" y="3351276"/>
+            <a:ext cx="164592" cy="0"/>
+          </a:xfrm>
+          <a:prstGeom prst="line">
+            <a:avLst/>
+          </a:prstGeom>
+          <a:noFill/>
+          <a:ln w="15240">
+            <a:solidFill>
+              <a:srgbClr val="8ABBD8"/>
+            </a:solidFill>
+            <a:prstDash val="solid"/>
+          </a:ln>
+        </p:spPr>
+      </p:sp>
+      <p:sp>
+        <p:nvSpPr>
+          <p:cNvPr id="16" name="Shape 14"/>
+          <p:cNvSpPr/>
+          <p:nvPr/>
+        </p:nvSpPr>
+        <p:spPr>
+          <a:xfrm>
+            <a:off x="7872984" y="3200400"/>
+            <a:ext cx="890016" cy="301752"/>
+          </a:xfrm>
+          <a:prstGeom prst="roundRect">
+            <a:avLst>
+              <a:gd name="adj" fmla="val 24242"/>
+            </a:avLst>
+          </a:prstGeom>
+          <a:solidFill>
+            <a:srgbClr val="0068B7"/>
+          </a:solidFill>
+          <a:ln w="12700">
+            <a:solidFill>
+              <a:srgbClr val="0068B7"/>
+            </a:solidFill>
+            <a:prstDash val="solid"/>
+          </a:ln>
+        </p:spPr>
+      </p:sp>
+      <p:sp>
+        <p:nvSpPr>
+          <p:cNvPr id="17" name="Text 15"/>
+          <p:cNvSpPr/>
+          <p:nvPr/>
+        </p:nvSpPr>
+        <p:spPr>
+          <a:xfrm>
+            <a:off x="7909560" y="3273552"/>
+            <a:ext cx="816864" cy="146304"/>
+          </a:xfrm>
+          <a:prstGeom prst="rect">
+            <a:avLst/>
+          </a:prstGeom>
+          <a:noFill/>
+          <a:ln/>
+        </p:spPr>
+        <p:txBody>
+          <a:bodyPr wrap="square" lIns="0" tIns="0" rIns="0" bIns="0" rtlCol="0" anchor="ctr">
             <a:normAutofit/>
           </a:bodyPr>
           <a:lstStyle/>
           <a:p>
-            <a:pPr indent="0" marL="0">
-              <a:buNone/>
-            </a:pPr>
-            <a:r>
-              <a:rPr lang="en-US" sz="1220" dirty="0">
-                <a:solidFill>
-                  <a:srgbClr val="17364A"/>
-                </a:solidFill>
-                <a:latin typeface="Aptos" pitchFamily="34" charset="0"/>
-                <a:ea typeface="Aptos" pitchFamily="34" charset="-122"/>
-                <a:cs typeface="Aptos" pitchFamily="34" charset="-120"/>
-              </a:rPr>
-              <a:t>Staff should identify who is affected, what data are used, what AI.</a:t>
-            </a:r>
-            <a:endParaRPr lang="en-US" sz="1220" dirty="0"/>
-          </a:p>
-          <a:p>
-            <a:pPr indent="0" marL="0">
-              <a:buNone/>
-            </a:pPr>
-            <a:r>
-              <a:rPr lang="en-US" sz="1220" dirty="0">
-                <a:solidFill>
-                  <a:srgbClr val="17364A"/>
-                </a:solidFill>
-                <a:latin typeface="Aptos" pitchFamily="34" charset="0"/>
-                <a:ea typeface="Aptos" pitchFamily="34" charset="-122"/>
-                <a:cs typeface="Aptos" pitchFamily="34" charset="-120"/>
-              </a:rPr>
-              <a:t>The second step is to assign responsibilities.</a:t>
-            </a:r>
-            <a:endParaRPr lang="en-US" sz="1220" dirty="0"/>
-          </a:p>
-          <a:p>
-            <a:pPr indent="0" marL="0">
-              <a:buNone/>
-            </a:pPr>
-            <a:r>
-              <a:rPr lang="en-US" sz="1220" dirty="0">
-                <a:solidFill>
-                  <a:srgbClr val="17364A"/>
-                </a:solidFill>
-                <a:latin typeface="Aptos" pitchFamily="34" charset="0"/>
-                <a:ea typeface="Aptos" pitchFamily="34" charset="-122"/>
-                <a:cs typeface="Aptos" pitchFamily="34" charset="-120"/>
-              </a:rPr>
-              <a:t>AI-supported workflows often cross program, IT, legal, privacy,.</a:t>
-            </a:r>
-            <a:endParaRPr lang="en-US" sz="1220" dirty="0"/>
-          </a:p>
-        </p:txBody>
-      </p:sp>
-      <p:sp>
-        <p:nvSpPr>
-          <p:cNvPr id="16" name="Shape 14"/>
-          <p:cNvSpPr/>
-          <p:nvPr/>
-        </p:nvSpPr>
-        <p:spPr>
-          <a:xfrm>
-            <a:off x="7635240" y="4498848"/>
-            <a:ext cx="3474720" cy="1143000"/>
+            <a:pPr algn="ctr" indent="0" marL="0">
+              <a:buNone/>
+            </a:pPr>
+            <a:r>
+              <a:rPr lang="en-US" sz="880" b="1" dirty="0">
+                <a:solidFill>
+                  <a:srgbClr val="FFFFFF"/>
+                </a:solidFill>
+                <a:latin typeface="Aptos" pitchFamily="34" charset="0"/>
+                <a:ea typeface="Aptos" pitchFamily="34" charset="-122"/>
+                <a:cs typeface="Aptos" pitchFamily="34" charset="-120"/>
+              </a:rPr>
+              <a:t>Data</a:t>
+            </a:r>
+            <a:endParaRPr lang="en-US" sz="880" dirty="0"/>
+          </a:p>
+        </p:txBody>
+      </p:sp>
+      <p:sp>
+        <p:nvSpPr>
+          <p:cNvPr id="18" name="Shape 16"/>
+          <p:cNvSpPr/>
+          <p:nvPr/>
+        </p:nvSpPr>
+        <p:spPr>
+          <a:xfrm>
+            <a:off x="9817608" y="3351276"/>
+            <a:ext cx="164592" cy="0"/>
+          </a:xfrm>
+          <a:prstGeom prst="line">
+            <a:avLst/>
+          </a:prstGeom>
+          <a:noFill/>
+          <a:ln w="15240">
+            <a:solidFill>
+              <a:srgbClr val="8ABBD8"/>
+            </a:solidFill>
+            <a:prstDash val="solid"/>
+          </a:ln>
+        </p:spPr>
+      </p:sp>
+      <p:sp>
+        <p:nvSpPr>
+          <p:cNvPr id="19" name="Shape 17"/>
+          <p:cNvSpPr/>
+          <p:nvPr/>
+        </p:nvSpPr>
+        <p:spPr>
+          <a:xfrm>
+            <a:off x="8927592" y="3200400"/>
+            <a:ext cx="890016" cy="301752"/>
           </a:xfrm>
           <a:prstGeom prst="roundRect">
             <a:avLst>
-              <a:gd name="adj" fmla="val 9600"/>
+              <a:gd name="adj" fmla="val 24242"/>
+            </a:avLst>
+          </a:prstGeom>
+          <a:solidFill>
+            <a:srgbClr val="2F8A28"/>
+          </a:solidFill>
+          <a:ln w="12700">
+            <a:solidFill>
+              <a:srgbClr val="2F8A28"/>
+            </a:solidFill>
+            <a:prstDash val="solid"/>
+          </a:ln>
+        </p:spPr>
+      </p:sp>
+      <p:sp>
+        <p:nvSpPr>
+          <p:cNvPr id="20" name="Text 18"/>
+          <p:cNvSpPr/>
+          <p:nvPr/>
+        </p:nvSpPr>
+        <p:spPr>
+          <a:xfrm>
+            <a:off x="8964168" y="3273552"/>
+            <a:ext cx="816864" cy="146304"/>
+          </a:xfrm>
+          <a:prstGeom prst="rect">
+            <a:avLst/>
+          </a:prstGeom>
+          <a:noFill/>
+          <a:ln/>
+        </p:spPr>
+        <p:txBody>
+          <a:bodyPr wrap="square" lIns="0" tIns="0" rIns="0" bIns="0" rtlCol="0" anchor="ctr">
+            <a:normAutofit/>
+          </a:bodyPr>
+          <a:lstStyle/>
+          <a:p>
+            <a:pPr algn="ctr" indent="0" marL="0">
+              <a:buNone/>
+            </a:pPr>
+            <a:r>
+              <a:rPr lang="en-US" sz="880" b="1" dirty="0">
+                <a:solidFill>
+                  <a:srgbClr val="FFFFFF"/>
+                </a:solidFill>
+                <a:latin typeface="Aptos" pitchFamily="34" charset="0"/>
+                <a:ea typeface="Aptos" pitchFamily="34" charset="-122"/>
+                <a:cs typeface="Aptos" pitchFamily="34" charset="-120"/>
+              </a:rPr>
+              <a:t>Analysis</a:t>
+            </a:r>
+            <a:endParaRPr lang="en-US" sz="880" dirty="0"/>
+          </a:p>
+        </p:txBody>
+      </p:sp>
+      <p:sp>
+        <p:nvSpPr>
+          <p:cNvPr id="21" name="Shape 19"/>
+          <p:cNvSpPr/>
+          <p:nvPr/>
+        </p:nvSpPr>
+        <p:spPr>
+          <a:xfrm>
+            <a:off x="9982200" y="3200400"/>
+            <a:ext cx="890016" cy="301752"/>
+          </a:xfrm>
+          <a:prstGeom prst="roundRect">
+            <a:avLst>
+              <a:gd name="adj" fmla="val 24242"/>
+            </a:avLst>
+          </a:prstGeom>
+          <a:solidFill>
+            <a:srgbClr val="6A4CA3"/>
+          </a:solidFill>
+          <a:ln w="12700">
+            <a:solidFill>
+              <a:srgbClr val="6A4CA3"/>
+            </a:solidFill>
+            <a:prstDash val="solid"/>
+          </a:ln>
+        </p:spPr>
+      </p:sp>
+      <p:sp>
+        <p:nvSpPr>
+          <p:cNvPr id="22" name="Text 20"/>
+          <p:cNvSpPr/>
+          <p:nvPr/>
+        </p:nvSpPr>
+        <p:spPr>
+          <a:xfrm>
+            <a:off x="10018776" y="3273552"/>
+            <a:ext cx="816864" cy="146304"/>
+          </a:xfrm>
+          <a:prstGeom prst="rect">
+            <a:avLst/>
+          </a:prstGeom>
+          <a:noFill/>
+          <a:ln/>
+        </p:spPr>
+        <p:txBody>
+          <a:bodyPr wrap="square" lIns="0" tIns="0" rIns="0" bIns="0" rtlCol="0" anchor="ctr">
+            <a:normAutofit/>
+          </a:bodyPr>
+          <a:lstStyle/>
+          <a:p>
+            <a:pPr algn="ctr" indent="0" marL="0">
+              <a:buNone/>
+            </a:pPr>
+            <a:r>
+              <a:rPr lang="en-US" sz="880" b="1" dirty="0">
+                <a:solidFill>
+                  <a:srgbClr val="FFFFFF"/>
+                </a:solidFill>
+                <a:latin typeface="Aptos" pitchFamily="34" charset="0"/>
+                <a:ea typeface="Aptos" pitchFamily="34" charset="-122"/>
+                <a:cs typeface="Aptos" pitchFamily="34" charset="-120"/>
+              </a:rPr>
+              <a:t>Review</a:t>
+            </a:r>
+            <a:endParaRPr lang="en-US" sz="880" dirty="0"/>
+          </a:p>
+        </p:txBody>
+      </p:sp>
+      <p:sp>
+        <p:nvSpPr>
+          <p:cNvPr id="23" name="Text 21"/>
+          <p:cNvSpPr/>
+          <p:nvPr/>
+        </p:nvSpPr>
+        <p:spPr>
+          <a:xfrm>
+            <a:off x="7854696" y="3694176"/>
+            <a:ext cx="3035808" cy="206654"/>
+          </a:xfrm>
+          <a:prstGeom prst="rect">
+            <a:avLst/>
+          </a:prstGeom>
+          <a:noFill/>
+          <a:ln/>
+        </p:spPr>
+        <p:txBody>
+          <a:bodyPr wrap="square" lIns="254" tIns="254" rIns="254" bIns="254" rtlCol="0" anchor="t">
+            <a:normAutofit/>
+          </a:bodyPr>
+          <a:lstStyle/>
+          <a:p>
+            <a:pPr indent="0" marL="0">
+              <a:buNone/>
+            </a:pPr>
+            <a:r>
+              <a:rPr lang="en-US" sz="1120" dirty="0">
+                <a:solidFill>
+                  <a:srgbClr val="17364A"/>
+                </a:solidFill>
+                <a:latin typeface="Aptos" pitchFamily="34" charset="0"/>
+                <a:ea typeface="Aptos" pitchFamily="34" charset="-122"/>
+                <a:cs typeface="Aptos" pitchFamily="34" charset="-120"/>
+              </a:rPr>
+              <a:t>The important handoff is not from data to AI; it is from analysis to accountable human review.</a:t>
+            </a:r>
+            <a:endParaRPr lang="en-US" sz="1120" dirty="0"/>
+          </a:p>
+        </p:txBody>
+      </p:sp>
+      <p:sp>
+        <p:nvSpPr>
+          <p:cNvPr id="24" name="Shape 22"/>
+          <p:cNvSpPr/>
+          <p:nvPr/>
+        </p:nvSpPr>
+        <p:spPr>
+          <a:xfrm>
+            <a:off x="7635240" y="4184294"/>
+            <a:ext cx="3474720" cy="1466698"/>
+          </a:xfrm>
+          <a:prstGeom prst="roundRect">
+            <a:avLst>
+              <a:gd name="adj" fmla="val 7481"/>
             </a:avLst>
           </a:prstGeom>
           <a:solidFill>
@@ -3598,13 +3814,13 @@
       </p:sp>
       <p:sp>
         <p:nvSpPr>
-          <p:cNvPr id="17" name="Text 15"/>
-          <p:cNvSpPr/>
-          <p:nvPr/>
-        </p:nvSpPr>
-        <p:spPr>
-          <a:xfrm>
-            <a:off x="7799832" y="4645152"/>
+          <p:cNvPr id="25" name="Text 23"/>
+          <p:cNvSpPr/>
+          <p:nvPr/>
+        </p:nvSpPr>
+        <p:spPr>
+          <a:xfrm>
+            <a:off x="7799832" y="4330598"/>
             <a:ext cx="3145536" cy="256032"/>
           </a:xfrm>
           <a:prstGeom prst="rect">
@@ -3637,14 +3853,14 @@
       </p:sp>
       <p:sp>
         <p:nvSpPr>
-          <p:cNvPr id="18" name="Text 16"/>
-          <p:cNvSpPr/>
-          <p:nvPr/>
-        </p:nvSpPr>
-        <p:spPr>
-          <a:xfrm>
-            <a:off x="7799832" y="4974336"/>
-            <a:ext cx="3145536" cy="576072"/>
+          <p:cNvPr id="26" name="Text 24"/>
+          <p:cNvSpPr/>
+          <p:nvPr/>
+        </p:nvSpPr>
+        <p:spPr>
+          <a:xfrm>
+            <a:off x="7799832" y="4659782"/>
+            <a:ext cx="3145536" cy="899770"/>
           </a:xfrm>
           <a:prstGeom prst="rect">
             <a:avLst/>
@@ -3670,7 +3886,7 @@
                 <a:ea typeface="Aptos" pitchFamily="34" charset="-122"/>
                 <a:cs typeface="Aptos" pitchFamily="34" charset="-120"/>
               </a:rPr>
-              <a:t>Connect the concept to public health purpose, responsible use, required safeguards, documentation, and the next action a.</a:t>
+              <a:t>Connect the concept to public health purpose, responsible use, required safeguards, documentation, and the next action a department should take.</a:t>
             </a:r>
             <a:endParaRPr lang="en-US" sz="1320" dirty="0"/>
           </a:p>
@@ -4039,11 +4255,11 @@
         <p:spPr>
           <a:xfrm>
             <a:off x="7635240" y="1325880"/>
-            <a:ext cx="3474720" cy="1325880"/>
+            <a:ext cx="3474720" cy="1207008"/>
           </a:xfrm>
           <a:prstGeom prst="roundRect">
             <a:avLst>
-              <a:gd name="adj" fmla="val 8276"/>
+              <a:gd name="adj" fmla="val 9091"/>
             </a:avLst>
           </a:prstGeom>
           <a:solidFill>
@@ -4105,7 +4321,7 @@
         <p:spPr>
           <a:xfrm>
             <a:off x="7799832" y="1801368"/>
-            <a:ext cx="3145536" cy="758952"/>
+            <a:ext cx="3145536" cy="640080"/>
           </a:xfrm>
           <a:prstGeom prst="rect">
             <a:avLst/>
@@ -4145,7 +4361,7 @@
         </p:nvSpPr>
         <p:spPr>
           <a:xfrm>
-            <a:off x="7635240" y="2788920"/>
+            <a:off x="7635240" y="2670048"/>
             <a:ext cx="3474720" cy="1536192"/>
           </a:xfrm>
           <a:prstGeom prst="roundRect">
@@ -4172,7 +4388,7 @@
         </p:nvSpPr>
         <p:spPr>
           <a:xfrm>
-            <a:off x="7799832" y="2935224"/>
+            <a:off x="7799832" y="2816352"/>
             <a:ext cx="3145536" cy="256032"/>
           </a:xfrm>
           <a:prstGeom prst="rect">
@@ -4211,7 +4427,7 @@
         </p:nvSpPr>
         <p:spPr>
           <a:xfrm>
-            <a:off x="7818120" y="3300984"/>
+            <a:off x="7818120" y="3182112"/>
             <a:ext cx="3090672" cy="877824"/>
           </a:xfrm>
           <a:prstGeom prst="rect">
@@ -4286,12 +4502,12 @@
         </p:nvSpPr>
         <p:spPr>
           <a:xfrm>
-            <a:off x="7635240" y="4498848"/>
-            <a:ext cx="3474720" cy="1143000"/>
+            <a:off x="7635240" y="4343400"/>
+            <a:ext cx="3474720" cy="1255471"/>
           </a:xfrm>
           <a:prstGeom prst="roundRect">
             <a:avLst>
-              <a:gd name="adj" fmla="val 9600"/>
+              <a:gd name="adj" fmla="val 8740"/>
             </a:avLst>
           </a:prstGeom>
           <a:solidFill>
@@ -4313,7 +4529,7 @@
         </p:nvSpPr>
         <p:spPr>
           <a:xfrm>
-            <a:off x="7799832" y="4645152"/>
+            <a:off x="7799832" y="4489704"/>
             <a:ext cx="3145536" cy="256032"/>
           </a:xfrm>
           <a:prstGeom prst="rect">
@@ -4352,8 +4568,8 @@
         </p:nvSpPr>
         <p:spPr>
           <a:xfrm>
-            <a:off x="7799832" y="4974336"/>
-            <a:ext cx="3145536" cy="576072"/>
+            <a:off x="7799832" y="4818888"/>
+            <a:ext cx="3145536" cy="688543"/>
           </a:xfrm>
           <a:prstGeom prst="rect">
             <a:avLst/>
@@ -4379,7 +4595,7 @@
                 <a:ea typeface="Aptos" pitchFamily="34" charset="-122"/>
                 <a:cs typeface="Aptos" pitchFamily="34" charset="-120"/>
               </a:rPr>
-              <a:t>Identify what could go wrong, who could be affected, what safeguards are needed, and what evidence should be reviewed.</a:t>
+              <a:t>Identify what could go wrong, who could be affected, what safeguards are needed, and what evidence should be reviewed before use.</a:t>
             </a:r>
             <a:endParaRPr lang="en-US" sz="1320" dirty="0"/>
           </a:p>
@@ -4731,11 +4947,11 @@
         <p:spPr>
           <a:xfrm>
             <a:off x="7635240" y="1325880"/>
-            <a:ext cx="3474720" cy="1325880"/>
+            <a:ext cx="3474720" cy="1255471"/>
           </a:xfrm>
           <a:prstGeom prst="roundRect">
             <a:avLst>
-              <a:gd name="adj" fmla="val 8276"/>
+              <a:gd name="adj" fmla="val 8740"/>
             </a:avLst>
           </a:prstGeom>
           <a:solidFill>
@@ -4797,7 +5013,7 @@
         <p:spPr>
           <a:xfrm>
             <a:off x="7799832" y="1801368"/>
-            <a:ext cx="3145536" cy="758952"/>
+            <a:ext cx="3145536" cy="688543"/>
           </a:xfrm>
           <a:prstGeom prst="rect">
             <a:avLst/>
@@ -4837,12 +5053,12 @@
         </p:nvSpPr>
         <p:spPr>
           <a:xfrm>
-            <a:off x="7635240" y="2788920"/>
-            <a:ext cx="3474720" cy="1536192"/>
+            <a:off x="7635240" y="2718511"/>
+            <a:ext cx="3474720" cy="1328623"/>
           </a:xfrm>
           <a:prstGeom prst="roundRect">
             <a:avLst>
-              <a:gd name="adj" fmla="val 7143"/>
+              <a:gd name="adj" fmla="val 8259"/>
             </a:avLst>
           </a:prstGeom>
           <a:solidFill>
@@ -4864,7 +5080,7 @@
         </p:nvSpPr>
         <p:spPr>
           <a:xfrm>
-            <a:off x="7799832" y="2935224"/>
+            <a:off x="7799832" y="2864815"/>
             <a:ext cx="3145536" cy="256032"/>
           </a:xfrm>
           <a:prstGeom prst="rect">
@@ -4903,8 +5119,8 @@
         </p:nvSpPr>
         <p:spPr>
           <a:xfrm>
-            <a:off x="7818120" y="3300984"/>
-            <a:ext cx="3090672" cy="877824"/>
+            <a:off x="7818120" y="3230575"/>
+            <a:ext cx="3090672" cy="670255"/>
           </a:xfrm>
           <a:prstGeom prst="rect">
             <a:avLst/>
@@ -4961,12 +5177,12 @@
         </p:nvSpPr>
         <p:spPr>
           <a:xfrm>
-            <a:off x="7635240" y="4498848"/>
-            <a:ext cx="3474720" cy="1143000"/>
+            <a:off x="7635240" y="4184294"/>
+            <a:ext cx="3474720" cy="1466698"/>
           </a:xfrm>
           <a:prstGeom prst="roundRect">
             <a:avLst>
-              <a:gd name="adj" fmla="val 9600"/>
+              <a:gd name="adj" fmla="val 7481"/>
             </a:avLst>
           </a:prstGeom>
           <a:solidFill>
@@ -4988,7 +5204,7 @@
         </p:nvSpPr>
         <p:spPr>
           <a:xfrm>
-            <a:off x="7799832" y="4645152"/>
+            <a:off x="7799832" y="4330598"/>
             <a:ext cx="3145536" cy="256032"/>
           </a:xfrm>
           <a:prstGeom prst="rect">
@@ -5027,8 +5243,8 @@
         </p:nvSpPr>
         <p:spPr>
           <a:xfrm>
-            <a:off x="7799832" y="4974336"/>
-            <a:ext cx="3145536" cy="576072"/>
+            <a:off x="7799832" y="4659782"/>
+            <a:ext cx="3145536" cy="899770"/>
           </a:xfrm>
           <a:prstGeom prst="rect">
             <a:avLst/>
@@ -5054,7 +5270,7 @@
                 <a:ea typeface="Aptos" pitchFamily="34" charset="-122"/>
                 <a:cs typeface="Aptos" pitchFamily="34" charset="-120"/>
               </a:rPr>
-              <a:t>Use the concept to clarify workflow changes, dependencies, staffing, procurement requirements, training needs, and.</a:t>
+              <a:t>Use the concept to clarify workflow changes, dependencies, staffing, procurement requirements, training needs, and implementation checkpoints.</a:t>
             </a:r>
             <a:endParaRPr lang="en-US" sz="1320" dirty="0"/>
           </a:p>
@@ -5423,11 +5639,11 @@
         <p:spPr>
           <a:xfrm>
             <a:off x="7635240" y="1325880"/>
-            <a:ext cx="3474720" cy="1325880"/>
+            <a:ext cx="3474720" cy="1207008"/>
           </a:xfrm>
           <a:prstGeom prst="roundRect">
             <a:avLst>
-              <a:gd name="adj" fmla="val 8276"/>
+              <a:gd name="adj" fmla="val 9091"/>
             </a:avLst>
           </a:prstGeom>
           <a:solidFill>
@@ -5489,7 +5705,7 @@
         <p:spPr>
           <a:xfrm>
             <a:off x="7799832" y="1801368"/>
-            <a:ext cx="3145536" cy="758952"/>
+            <a:ext cx="3145536" cy="640080"/>
           </a:xfrm>
           <a:prstGeom prst="rect">
             <a:avLst/>
@@ -5529,12 +5745,12 @@
         </p:nvSpPr>
         <p:spPr>
           <a:xfrm>
-            <a:off x="7635240" y="2788920"/>
-            <a:ext cx="3474720" cy="1536192"/>
+            <a:off x="7635240" y="2670048"/>
+            <a:ext cx="3474720" cy="1377086"/>
           </a:xfrm>
           <a:prstGeom prst="roundRect">
             <a:avLst>
-              <a:gd name="adj" fmla="val 7143"/>
+              <a:gd name="adj" fmla="val 7968"/>
             </a:avLst>
           </a:prstGeom>
           <a:solidFill>
@@ -5556,7 +5772,7 @@
         </p:nvSpPr>
         <p:spPr>
           <a:xfrm>
-            <a:off x="7799832" y="2935224"/>
+            <a:off x="7799832" y="2816352"/>
             <a:ext cx="3145536" cy="256032"/>
           </a:xfrm>
           <a:prstGeom prst="rect">
@@ -5595,8 +5811,8 @@
         </p:nvSpPr>
         <p:spPr>
           <a:xfrm>
-            <a:off x="7818120" y="3300984"/>
-            <a:ext cx="3090672" cy="877824"/>
+            <a:off x="7818120" y="3182112"/>
+            <a:ext cx="3090672" cy="718718"/>
           </a:xfrm>
           <a:prstGeom prst="rect">
             <a:avLst/>
@@ -5670,12 +5886,12 @@
         </p:nvSpPr>
         <p:spPr>
           <a:xfrm>
-            <a:off x="7635240" y="4498848"/>
-            <a:ext cx="3474720" cy="1143000"/>
+            <a:off x="7635240" y="4184294"/>
+            <a:ext cx="3474720" cy="1466698"/>
           </a:xfrm>
           <a:prstGeom prst="roundRect">
             <a:avLst>
-              <a:gd name="adj" fmla="val 9600"/>
+              <a:gd name="adj" fmla="val 7481"/>
             </a:avLst>
           </a:prstGeom>
           <a:solidFill>
@@ -5697,7 +5913,7 @@
         </p:nvSpPr>
         <p:spPr>
           <a:xfrm>
-            <a:off x="7799832" y="4645152"/>
+            <a:off x="7799832" y="4330598"/>
             <a:ext cx="3145536" cy="256032"/>
           </a:xfrm>
           <a:prstGeom prst="rect">
@@ -5736,8 +5952,8 @@
         </p:nvSpPr>
         <p:spPr>
           <a:xfrm>
-            <a:off x="7799832" y="4974336"/>
-            <a:ext cx="3145536" cy="576072"/>
+            <a:off x="7799832" y="4659782"/>
+            <a:ext cx="3145536" cy="899770"/>
           </a:xfrm>
           <a:prstGeom prst="rect">
             <a:avLst/>
@@ -5763,7 +5979,7 @@
                 <a:ea typeface="Aptos" pitchFamily="34" charset="-122"/>
                 <a:cs typeface="Aptos" pitchFamily="34" charset="-120"/>
               </a:rPr>
-              <a:t>Connect the concept to public health purpose, responsible use, required safeguards, documentation, and the next action a.</a:t>
+              <a:t>Connect the concept to public health purpose, responsible use, required safeguards, documentation, and the next action a department should take.</a:t>
             </a:r>
             <a:endParaRPr lang="en-US" sz="1320" dirty="0"/>
           </a:p>
@@ -6115,11 +6331,11 @@
         <p:spPr>
           <a:xfrm>
             <a:off x="7635240" y="1325880"/>
-            <a:ext cx="3474720" cy="1325880"/>
+            <a:ext cx="3474720" cy="1207008"/>
           </a:xfrm>
           <a:prstGeom prst="roundRect">
             <a:avLst>
-              <a:gd name="adj" fmla="val 8276"/>
+              <a:gd name="adj" fmla="val 9091"/>
             </a:avLst>
           </a:prstGeom>
           <a:solidFill>
@@ -6181,7 +6397,7 @@
         <p:spPr>
           <a:xfrm>
             <a:off x="7799832" y="1801368"/>
-            <a:ext cx="3145536" cy="758952"/>
+            <a:ext cx="3145536" cy="640080"/>
           </a:xfrm>
           <a:prstGeom prst="rect">
             <a:avLst/>
@@ -6221,12 +6437,12 @@
         </p:nvSpPr>
         <p:spPr>
           <a:xfrm>
-            <a:off x="7635240" y="2788920"/>
-            <a:ext cx="3474720" cy="1536192"/>
+            <a:off x="7635240" y="2670048"/>
+            <a:ext cx="3474720" cy="1377086"/>
           </a:xfrm>
           <a:prstGeom prst="roundRect">
             <a:avLst>
-              <a:gd name="adj" fmla="val 7143"/>
+              <a:gd name="adj" fmla="val 7968"/>
             </a:avLst>
           </a:prstGeom>
           <a:solidFill>
@@ -6248,7 +6464,7 @@
         </p:nvSpPr>
         <p:spPr>
           <a:xfrm>
-            <a:off x="7799832" y="2935224"/>
+            <a:off x="7799832" y="2816352"/>
             <a:ext cx="3145536" cy="256032"/>
           </a:xfrm>
           <a:prstGeom prst="rect">
@@ -6287,8 +6503,8 @@
         </p:nvSpPr>
         <p:spPr>
           <a:xfrm>
-            <a:off x="7818120" y="3300984"/>
-            <a:ext cx="3090672" cy="877824"/>
+            <a:off x="7818120" y="3182112"/>
+            <a:ext cx="3090672" cy="718718"/>
           </a:xfrm>
           <a:prstGeom prst="rect">
             <a:avLst/>
@@ -6345,12 +6561,12 @@
         </p:nvSpPr>
         <p:spPr>
           <a:xfrm>
-            <a:off x="7635240" y="4498848"/>
-            <a:ext cx="3474720" cy="1143000"/>
+            <a:off x="7635240" y="4184294"/>
+            <a:ext cx="3474720" cy="1466698"/>
           </a:xfrm>
           <a:prstGeom prst="roundRect">
             <a:avLst>
-              <a:gd name="adj" fmla="val 9600"/>
+              <a:gd name="adj" fmla="val 7481"/>
             </a:avLst>
           </a:prstGeom>
           <a:solidFill>
@@ -6372,7 +6588,7 @@
         </p:nvSpPr>
         <p:spPr>
           <a:xfrm>
-            <a:off x="7799832" y="4645152"/>
+            <a:off x="7799832" y="4330598"/>
             <a:ext cx="3145536" cy="256032"/>
           </a:xfrm>
           <a:prstGeom prst="rect">
@@ -6411,8 +6627,8 @@
         </p:nvSpPr>
         <p:spPr>
           <a:xfrm>
-            <a:off x="7799832" y="4974336"/>
-            <a:ext cx="3145536" cy="576072"/>
+            <a:off x="7799832" y="4659782"/>
+            <a:ext cx="3145536" cy="899770"/>
           </a:xfrm>
           <a:prstGeom prst="rect">
             <a:avLst/>
@@ -6438,7 +6654,7 @@
                 <a:ea typeface="Aptos" pitchFamily="34" charset="-122"/>
                 <a:cs typeface="Aptos" pitchFamily="34" charset="-120"/>
               </a:rPr>
-              <a:t>Connect the concept to public health purpose, responsible use, required safeguards, documentation, and the next action a.</a:t>
+              <a:t>Connect the concept to public health purpose, responsible use, required safeguards, documentation, and the next action a department should take.</a:t>
             </a:r>
             <a:endParaRPr lang="en-US" sz="1320" dirty="0"/>
           </a:p>
@@ -6790,11 +7006,11 @@
         <p:spPr>
           <a:xfrm>
             <a:off x="7635240" y="1325880"/>
-            <a:ext cx="3474720" cy="1325880"/>
+            <a:ext cx="3474720" cy="1255471"/>
           </a:xfrm>
           <a:prstGeom prst="roundRect">
             <a:avLst>
-              <a:gd name="adj" fmla="val 8276"/>
+              <a:gd name="adj" fmla="val 8740"/>
             </a:avLst>
           </a:prstGeom>
           <a:solidFill>
@@ -6856,7 +7072,7 @@
         <p:spPr>
           <a:xfrm>
             <a:off x="7799832" y="1801368"/>
-            <a:ext cx="3145536" cy="758952"/>
+            <a:ext cx="3145536" cy="688543"/>
           </a:xfrm>
           <a:prstGeom prst="rect">
             <a:avLst/>
@@ -6896,12 +7112,12 @@
         </p:nvSpPr>
         <p:spPr>
           <a:xfrm>
-            <a:off x="7635240" y="2788920"/>
-            <a:ext cx="3474720" cy="1536192"/>
+            <a:off x="7635240" y="2718511"/>
+            <a:ext cx="3474720" cy="1328623"/>
           </a:xfrm>
           <a:prstGeom prst="roundRect">
             <a:avLst>
-              <a:gd name="adj" fmla="val 7143"/>
+              <a:gd name="adj" fmla="val 8259"/>
             </a:avLst>
           </a:prstGeom>
           <a:solidFill>
@@ -6923,7 +7139,7 @@
         </p:nvSpPr>
         <p:spPr>
           <a:xfrm>
-            <a:off x="7799832" y="2935224"/>
+            <a:off x="7799832" y="2864815"/>
             <a:ext cx="3145536" cy="256032"/>
           </a:xfrm>
           <a:prstGeom prst="rect">
@@ -6962,8 +7178,8 @@
         </p:nvSpPr>
         <p:spPr>
           <a:xfrm>
-            <a:off x="7818120" y="3300984"/>
-            <a:ext cx="3090672" cy="877824"/>
+            <a:off x="7818120" y="3230575"/>
+            <a:ext cx="3090672" cy="670255"/>
           </a:xfrm>
           <a:prstGeom prst="rect">
             <a:avLst/>
@@ -7020,12 +7236,12 @@
         </p:nvSpPr>
         <p:spPr>
           <a:xfrm>
-            <a:off x="7635240" y="4498848"/>
-            <a:ext cx="3474720" cy="1143000"/>
+            <a:off x="7635240" y="4184294"/>
+            <a:ext cx="3474720" cy="1466698"/>
           </a:xfrm>
           <a:prstGeom prst="roundRect">
             <a:avLst>
-              <a:gd name="adj" fmla="val 9600"/>
+              <a:gd name="adj" fmla="val 7481"/>
             </a:avLst>
           </a:prstGeom>
           <a:solidFill>
@@ -7047,7 +7263,7 @@
         </p:nvSpPr>
         <p:spPr>
           <a:xfrm>
-            <a:off x="7799832" y="4645152"/>
+            <a:off x="7799832" y="4330598"/>
             <a:ext cx="3145536" cy="256032"/>
           </a:xfrm>
           <a:prstGeom prst="rect">
@@ -7086,8 +7302,8 @@
         </p:nvSpPr>
         <p:spPr>
           <a:xfrm>
-            <a:off x="7799832" y="4974336"/>
-            <a:ext cx="3145536" cy="576072"/>
+            <a:off x="7799832" y="4659782"/>
+            <a:ext cx="3145536" cy="899770"/>
           </a:xfrm>
           <a:prstGeom prst="rect">
             <a:avLst/>
@@ -7113,7 +7329,7 @@
                 <a:ea typeface="Aptos" pitchFamily="34" charset="-122"/>
                 <a:cs typeface="Aptos" pitchFamily="34" charset="-120"/>
               </a:rPr>
-              <a:t>Use the assignment to test whether you can explain the concept, apply it to a realistic public health situation, and.</a:t>
+              <a:t>Use the assignment to test whether you can explain the concept, apply it to a realistic public health situation, and identify what would need review before the work moves forward.</a:t>
             </a:r>
             <a:endParaRPr lang="en-US" sz="1320" dirty="0"/>
           </a:p>
@@ -7482,11 +7698,11 @@
         <p:spPr>
           <a:xfrm>
             <a:off x="7635240" y="1325880"/>
-            <a:ext cx="3474720" cy="1325880"/>
+            <a:ext cx="3474720" cy="1207008"/>
           </a:xfrm>
           <a:prstGeom prst="roundRect">
             <a:avLst>
-              <a:gd name="adj" fmla="val 8276"/>
+              <a:gd name="adj" fmla="val 9091"/>
             </a:avLst>
           </a:prstGeom>
           <a:solidFill>
@@ -7548,7 +7764,7 @@
         <p:spPr>
           <a:xfrm>
             <a:off x="7799832" y="1801368"/>
-            <a:ext cx="3145536" cy="758952"/>
+            <a:ext cx="3145536" cy="640080"/>
           </a:xfrm>
           <a:prstGeom prst="rect">
             <a:avLst/>
@@ -7588,12 +7804,12 @@
         </p:nvSpPr>
         <p:spPr>
           <a:xfrm>
-            <a:off x="7635240" y="2788920"/>
-            <a:ext cx="3474720" cy="1536192"/>
+            <a:off x="7635240" y="2670048"/>
+            <a:ext cx="3474720" cy="1377086"/>
           </a:xfrm>
           <a:prstGeom prst="roundRect">
             <a:avLst>
-              <a:gd name="adj" fmla="val 7143"/>
+              <a:gd name="adj" fmla="val 7968"/>
             </a:avLst>
           </a:prstGeom>
           <a:solidFill>
@@ -7615,7 +7831,7 @@
         </p:nvSpPr>
         <p:spPr>
           <a:xfrm>
-            <a:off x="7799832" y="2935224"/>
+            <a:off x="7799832" y="2816352"/>
             <a:ext cx="3145536" cy="256032"/>
           </a:xfrm>
           <a:prstGeom prst="rect">
@@ -7654,8 +7870,8 @@
         </p:nvSpPr>
         <p:spPr>
           <a:xfrm>
-            <a:off x="7818120" y="3300984"/>
-            <a:ext cx="3090672" cy="877824"/>
+            <a:off x="7818120" y="3182112"/>
+            <a:ext cx="3090672" cy="718718"/>
           </a:xfrm>
           <a:prstGeom prst="rect">
             <a:avLst/>
@@ -7729,12 +7945,12 @@
         </p:nvSpPr>
         <p:spPr>
           <a:xfrm>
-            <a:off x="7635240" y="4498848"/>
-            <a:ext cx="3474720" cy="1143000"/>
+            <a:off x="7635240" y="4184294"/>
+            <a:ext cx="3474720" cy="1466698"/>
           </a:xfrm>
           <a:prstGeom prst="roundRect">
             <a:avLst>
-              <a:gd name="adj" fmla="val 9600"/>
+              <a:gd name="adj" fmla="val 7481"/>
             </a:avLst>
           </a:prstGeom>
           <a:solidFill>
@@ -7756,7 +7972,7 @@
         </p:nvSpPr>
         <p:spPr>
           <a:xfrm>
-            <a:off x="7799832" y="4645152"/>
+            <a:off x="7799832" y="4330598"/>
             <a:ext cx="3145536" cy="256032"/>
           </a:xfrm>
           <a:prstGeom prst="rect">
@@ -7795,8 +8011,8 @@
         </p:nvSpPr>
         <p:spPr>
           <a:xfrm>
-            <a:off x="7799832" y="4974336"/>
-            <a:ext cx="3145536" cy="576072"/>
+            <a:off x="7799832" y="4659782"/>
+            <a:ext cx="3145536" cy="899770"/>
           </a:xfrm>
           <a:prstGeom prst="rect">
             <a:avLst/>
@@ -7822,7 +8038,7 @@
                 <a:ea typeface="Aptos" pitchFamily="34" charset="-122"/>
                 <a:cs typeface="Aptos" pitchFamily="34" charset="-120"/>
               </a:rPr>
-              <a:t>Connect the concept to public health purpose, responsible use, required safeguards, documentation, and the next action a.</a:t>
+              <a:t>Connect the concept to public health purpose, responsible use, required safeguards, documentation, and the next action a department should take.</a:t>
             </a:r>
             <a:endParaRPr lang="en-US" sz="1320" dirty="0"/>
           </a:p>
@@ -8174,11 +8390,11 @@
         <p:spPr>
           <a:xfrm>
             <a:off x="7635240" y="1325880"/>
-            <a:ext cx="3474720" cy="1325880"/>
+            <a:ext cx="3474720" cy="1207008"/>
           </a:xfrm>
           <a:prstGeom prst="roundRect">
             <a:avLst>
-              <a:gd name="adj" fmla="val 8276"/>
+              <a:gd name="adj" fmla="val 9091"/>
             </a:avLst>
           </a:prstGeom>
           <a:solidFill>
@@ -8240,7 +8456,7 @@
         <p:spPr>
           <a:xfrm>
             <a:off x="7799832" y="1801368"/>
-            <a:ext cx="3145536" cy="758952"/>
+            <a:ext cx="3145536" cy="640080"/>
           </a:xfrm>
           <a:prstGeom prst="rect">
             <a:avLst/>
@@ -8280,12 +8496,12 @@
         </p:nvSpPr>
         <p:spPr>
           <a:xfrm>
-            <a:off x="7635240" y="2788920"/>
-            <a:ext cx="3474720" cy="1536192"/>
+            <a:off x="7635240" y="2670048"/>
+            <a:ext cx="3474720" cy="1377086"/>
           </a:xfrm>
           <a:prstGeom prst="roundRect">
             <a:avLst>
-              <a:gd name="adj" fmla="val 7143"/>
+              <a:gd name="adj" fmla="val 7968"/>
             </a:avLst>
           </a:prstGeom>
           <a:solidFill>
@@ -8307,7 +8523,7 @@
         </p:nvSpPr>
         <p:spPr>
           <a:xfrm>
-            <a:off x="7799832" y="2935224"/>
+            <a:off x="7799832" y="2816352"/>
             <a:ext cx="3145536" cy="256032"/>
           </a:xfrm>
           <a:prstGeom prst="rect">
@@ -8346,8 +8562,8 @@
         </p:nvSpPr>
         <p:spPr>
           <a:xfrm>
-            <a:off x="7818120" y="3300984"/>
-            <a:ext cx="3090672" cy="877824"/>
+            <a:off x="7818120" y="3182112"/>
+            <a:ext cx="3090672" cy="718718"/>
           </a:xfrm>
           <a:prstGeom prst="rect">
             <a:avLst/>
@@ -8404,12 +8620,12 @@
         </p:nvSpPr>
         <p:spPr>
           <a:xfrm>
-            <a:off x="7635240" y="4498848"/>
-            <a:ext cx="3474720" cy="1143000"/>
+            <a:off x="7635240" y="4184294"/>
+            <a:ext cx="3474720" cy="1466698"/>
           </a:xfrm>
           <a:prstGeom prst="roundRect">
             <a:avLst>
-              <a:gd name="adj" fmla="val 9600"/>
+              <a:gd name="adj" fmla="val 7481"/>
             </a:avLst>
           </a:prstGeom>
           <a:solidFill>
@@ -8431,7 +8647,7 @@
         </p:nvSpPr>
         <p:spPr>
           <a:xfrm>
-            <a:off x="7799832" y="4645152"/>
+            <a:off x="7799832" y="4330598"/>
             <a:ext cx="3145536" cy="256032"/>
           </a:xfrm>
           <a:prstGeom prst="rect">
@@ -8470,8 +8686,8 @@
         </p:nvSpPr>
         <p:spPr>
           <a:xfrm>
-            <a:off x="7799832" y="4974336"/>
-            <a:ext cx="3145536" cy="576072"/>
+            <a:off x="7799832" y="4659782"/>
+            <a:ext cx="3145536" cy="899770"/>
           </a:xfrm>
           <a:prstGeom prst="rect">
             <a:avLst/>
@@ -8497,7 +8713,7 @@
                 <a:ea typeface="Aptos" pitchFamily="34" charset="-122"/>
                 <a:cs typeface="Aptos" pitchFamily="34" charset="-120"/>
               </a:rPr>
-              <a:t>Connect the concept to public health purpose, responsible use, required safeguards, documentation, and the next action a.</a:t>
+              <a:t>Connect the concept to public health purpose, responsible use, required safeguards, documentation, and the next action a department should take.</a:t>
             </a:r>
             <a:endParaRPr lang="en-US" sz="1320" dirty="0"/>
           </a:p>
@@ -8866,11 +9082,11 @@
         <p:spPr>
           <a:xfrm>
             <a:off x="7635240" y="1325880"/>
-            <a:ext cx="3474720" cy="1325880"/>
+            <a:ext cx="3474720" cy="1207008"/>
           </a:xfrm>
           <a:prstGeom prst="roundRect">
             <a:avLst>
-              <a:gd name="adj" fmla="val 8276"/>
+              <a:gd name="adj" fmla="val 9091"/>
             </a:avLst>
           </a:prstGeom>
           <a:solidFill>
@@ -8932,7 +9148,7 @@
         <p:spPr>
           <a:xfrm>
             <a:off x="7799832" y="1801368"/>
-            <a:ext cx="3145536" cy="758952"/>
+            <a:ext cx="3145536" cy="640080"/>
           </a:xfrm>
           <a:prstGeom prst="rect">
             <a:avLst/>
@@ -8972,12 +9188,12 @@
         </p:nvSpPr>
         <p:spPr>
           <a:xfrm>
-            <a:off x="7635240" y="2788920"/>
-            <a:ext cx="3474720" cy="1536192"/>
+            <a:off x="7635240" y="2670048"/>
+            <a:ext cx="3474720" cy="1377086"/>
           </a:xfrm>
           <a:prstGeom prst="roundRect">
             <a:avLst>
-              <a:gd name="adj" fmla="val 7143"/>
+              <a:gd name="adj" fmla="val 7968"/>
             </a:avLst>
           </a:prstGeom>
           <a:solidFill>
@@ -8999,7 +9215,7 @@
         </p:nvSpPr>
         <p:spPr>
           <a:xfrm>
-            <a:off x="7799832" y="2935224"/>
+            <a:off x="7799832" y="2816352"/>
             <a:ext cx="3145536" cy="256032"/>
           </a:xfrm>
           <a:prstGeom prst="rect">
@@ -9038,8 +9254,8 @@
         </p:nvSpPr>
         <p:spPr>
           <a:xfrm>
-            <a:off x="7818120" y="3300984"/>
-            <a:ext cx="3090672" cy="877824"/>
+            <a:off x="7818120" y="3182112"/>
+            <a:ext cx="3090672" cy="718718"/>
           </a:xfrm>
           <a:prstGeom prst="rect">
             <a:avLst/>
@@ -9096,12 +9312,12 @@
         </p:nvSpPr>
         <p:spPr>
           <a:xfrm>
-            <a:off x="7635240" y="4498848"/>
-            <a:ext cx="3474720" cy="1143000"/>
+            <a:off x="7635240" y="4184294"/>
+            <a:ext cx="3474720" cy="1466698"/>
           </a:xfrm>
           <a:prstGeom prst="roundRect">
             <a:avLst>
-              <a:gd name="adj" fmla="val 9600"/>
+              <a:gd name="adj" fmla="val 7481"/>
             </a:avLst>
           </a:prstGeom>
           <a:solidFill>
@@ -9123,7 +9339,7 @@
         </p:nvSpPr>
         <p:spPr>
           <a:xfrm>
-            <a:off x="7799832" y="4645152"/>
+            <a:off x="7799832" y="4330598"/>
             <a:ext cx="3145536" cy="256032"/>
           </a:xfrm>
           <a:prstGeom prst="rect">
@@ -9162,8 +9378,8 @@
         </p:nvSpPr>
         <p:spPr>
           <a:xfrm>
-            <a:off x="7799832" y="4974336"/>
-            <a:ext cx="3145536" cy="576072"/>
+            <a:off x="7799832" y="4659782"/>
+            <a:ext cx="3145536" cy="899770"/>
           </a:xfrm>
           <a:prstGeom prst="rect">
             <a:avLst/>
@@ -9189,7 +9405,7 @@
                 <a:ea typeface="Aptos" pitchFamily="34" charset="-122"/>
                 <a:cs typeface="Aptos" pitchFamily="34" charset="-120"/>
               </a:rPr>
-              <a:t>Use the assignment to test whether you can explain the concept, apply it to a realistic public health situation, and.</a:t>
+              <a:t>Use the assignment to test whether you can explain the concept, apply it to a realistic public health situation, and identify what would need review before the work moves forward.</a:t>
             </a:r>
             <a:endParaRPr lang="en-US" sz="1320" dirty="0"/>
           </a:p>
@@ -9558,11 +9774,11 @@
         <p:spPr>
           <a:xfrm>
             <a:off x="7635240" y="1325880"/>
-            <a:ext cx="3474720" cy="1325880"/>
+            <a:ext cx="3474720" cy="1255471"/>
           </a:xfrm>
           <a:prstGeom prst="roundRect">
             <a:avLst>
-              <a:gd name="adj" fmla="val 8276"/>
+              <a:gd name="adj" fmla="val 8740"/>
             </a:avLst>
           </a:prstGeom>
           <a:solidFill>
@@ -9624,7 +9840,7 @@
         <p:spPr>
           <a:xfrm>
             <a:off x="7799832" y="1801368"/>
-            <a:ext cx="3145536" cy="758952"/>
+            <a:ext cx="3145536" cy="688543"/>
           </a:xfrm>
           <a:prstGeom prst="rect">
             <a:avLst/>
@@ -9664,12 +9880,12 @@
         </p:nvSpPr>
         <p:spPr>
           <a:xfrm>
-            <a:off x="7635240" y="2788920"/>
-            <a:ext cx="3474720" cy="1536192"/>
+            <a:off x="7635240" y="2718511"/>
+            <a:ext cx="3474720" cy="1328623"/>
           </a:xfrm>
           <a:prstGeom prst="roundRect">
             <a:avLst>
-              <a:gd name="adj" fmla="val 7143"/>
+              <a:gd name="adj" fmla="val 8259"/>
             </a:avLst>
           </a:prstGeom>
           <a:solidFill>
@@ -9691,7 +9907,7 @@
         </p:nvSpPr>
         <p:spPr>
           <a:xfrm>
-            <a:off x="7799832" y="2935224"/>
+            <a:off x="7799832" y="2864815"/>
             <a:ext cx="3145536" cy="256032"/>
           </a:xfrm>
           <a:prstGeom prst="rect">
@@ -9730,8 +9946,8 @@
         </p:nvSpPr>
         <p:spPr>
           <a:xfrm>
-            <a:off x="7818120" y="3300984"/>
-            <a:ext cx="3090672" cy="877824"/>
+            <a:off x="7818120" y="3230575"/>
+            <a:ext cx="3090672" cy="670255"/>
           </a:xfrm>
           <a:prstGeom prst="rect">
             <a:avLst/>
@@ -9805,12 +10021,12 @@
         </p:nvSpPr>
         <p:spPr>
           <a:xfrm>
-            <a:off x="7635240" y="4498848"/>
-            <a:ext cx="3474720" cy="1143000"/>
+            <a:off x="7635240" y="4184294"/>
+            <a:ext cx="3474720" cy="1466698"/>
           </a:xfrm>
           <a:prstGeom prst="roundRect">
             <a:avLst>
-              <a:gd name="adj" fmla="val 9600"/>
+              <a:gd name="adj" fmla="val 7481"/>
             </a:avLst>
           </a:prstGeom>
           <a:solidFill>
@@ -9832,7 +10048,7 @@
         </p:nvSpPr>
         <p:spPr>
           <a:xfrm>
-            <a:off x="7799832" y="4645152"/>
+            <a:off x="7799832" y="4330598"/>
             <a:ext cx="3145536" cy="256032"/>
           </a:xfrm>
           <a:prstGeom prst="rect">
@@ -9871,8 +10087,8 @@
         </p:nvSpPr>
         <p:spPr>
           <a:xfrm>
-            <a:off x="7799832" y="4974336"/>
-            <a:ext cx="3145536" cy="576072"/>
+            <a:off x="7799832" y="4659782"/>
+            <a:ext cx="3145536" cy="899770"/>
           </a:xfrm>
           <a:prstGeom prst="rect">
             <a:avLst/>
@@ -9898,7 +10114,7 @@
                 <a:ea typeface="Aptos" pitchFamily="34" charset="-122"/>
                 <a:cs typeface="Aptos" pitchFamily="34" charset="-120"/>
               </a:rPr>
-              <a:t>Use the assignment to test whether you can explain the concept, apply it to a realistic public health situation, and.</a:t>
+              <a:t>Use the assignment to test whether you can explain the concept, apply it to a realistic public health situation, and identify what would need review before the work moves forward.</a:t>
             </a:r>
             <a:endParaRPr lang="en-US" sz="1320" dirty="0"/>
           </a:p>
@@ -10359,7 +10575,7 @@
                 <a:ea typeface="Aptos" pitchFamily="34" charset="-122"/>
                 <a:cs typeface="Aptos" pitchFamily="34" charset="-120"/>
               </a:rPr>
-              <a:t>Level: intermediate/practitioner Primary track: Epidemiology Role-Based Track Appears in tracks: epidemiology,.</a:t>
+              <a:t>Level: intermediate/practitioner Primary track: Epidemiology Role-Based Track Appears in tracks: epidemiology, analytics-modeling, operations-data-quality, governance-security</a:t>
             </a:r>
             <a:endParaRPr lang="en-US" sz="1320" dirty="0"/>
           </a:p>
@@ -10869,11 +11085,11 @@
         <p:spPr>
           <a:xfrm>
             <a:off x="7635240" y="1325880"/>
-            <a:ext cx="3474720" cy="1325880"/>
+            <a:ext cx="3474720" cy="1207008"/>
           </a:xfrm>
           <a:prstGeom prst="roundRect">
             <a:avLst>
-              <a:gd name="adj" fmla="val 8276"/>
+              <a:gd name="adj" fmla="val 9091"/>
             </a:avLst>
           </a:prstGeom>
           <a:solidFill>
@@ -10935,7 +11151,7 @@
         <p:spPr>
           <a:xfrm>
             <a:off x="7799832" y="1801368"/>
-            <a:ext cx="3145536" cy="758952"/>
+            <a:ext cx="3145536" cy="640080"/>
           </a:xfrm>
           <a:prstGeom prst="rect">
             <a:avLst/>
@@ -10975,12 +11191,12 @@
         </p:nvSpPr>
         <p:spPr>
           <a:xfrm>
-            <a:off x="7635240" y="2788920"/>
-            <a:ext cx="3474720" cy="1536192"/>
+            <a:off x="7635240" y="2670048"/>
+            <a:ext cx="3474720" cy="1377086"/>
           </a:xfrm>
           <a:prstGeom prst="roundRect">
             <a:avLst>
-              <a:gd name="adj" fmla="val 7143"/>
+              <a:gd name="adj" fmla="val 7968"/>
             </a:avLst>
           </a:prstGeom>
           <a:solidFill>
@@ -11002,7 +11218,7 @@
         </p:nvSpPr>
         <p:spPr>
           <a:xfrm>
-            <a:off x="7799832" y="2935224"/>
+            <a:off x="7799832" y="2816352"/>
             <a:ext cx="3145536" cy="256032"/>
           </a:xfrm>
           <a:prstGeom prst="rect">
@@ -11041,8 +11257,8 @@
         </p:nvSpPr>
         <p:spPr>
           <a:xfrm>
-            <a:off x="7818120" y="3300984"/>
-            <a:ext cx="3090672" cy="877824"/>
+            <a:off x="7818120" y="3182112"/>
+            <a:ext cx="3090672" cy="718718"/>
           </a:xfrm>
           <a:prstGeom prst="rect">
             <a:avLst/>
@@ -11099,12 +11315,12 @@
         </p:nvSpPr>
         <p:spPr>
           <a:xfrm>
-            <a:off x="7635240" y="4498848"/>
-            <a:ext cx="3474720" cy="1143000"/>
+            <a:off x="7635240" y="4184294"/>
+            <a:ext cx="3474720" cy="1466698"/>
           </a:xfrm>
           <a:prstGeom prst="roundRect">
             <a:avLst>
-              <a:gd name="adj" fmla="val 9600"/>
+              <a:gd name="adj" fmla="val 7481"/>
             </a:avLst>
           </a:prstGeom>
           <a:solidFill>
@@ -11126,7 +11342,7 @@
         </p:nvSpPr>
         <p:spPr>
           <a:xfrm>
-            <a:off x="7799832" y="4645152"/>
+            <a:off x="7799832" y="4330598"/>
             <a:ext cx="3145536" cy="256032"/>
           </a:xfrm>
           <a:prstGeom prst="rect">
@@ -11165,8 +11381,8 @@
         </p:nvSpPr>
         <p:spPr>
           <a:xfrm>
-            <a:off x="7799832" y="4974336"/>
-            <a:ext cx="3145536" cy="576072"/>
+            <a:off x="7799832" y="4659782"/>
+            <a:ext cx="3145536" cy="899770"/>
           </a:xfrm>
           <a:prstGeom prst="rect">
             <a:avLst/>
@@ -11192,7 +11408,7 @@
                 <a:ea typeface="Aptos" pitchFamily="34" charset="-122"/>
                 <a:cs typeface="Aptos" pitchFamily="34" charset="-120"/>
               </a:rPr>
-              <a:t>Connect the concept to public health purpose, responsible use, required safeguards, documentation, and the next action a.</a:t>
+              <a:t>Connect the concept to public health purpose, responsible use, required safeguards, documentation, and the next action a department should take.</a:t>
             </a:r>
             <a:endParaRPr lang="en-US" sz="1320" dirty="0"/>
           </a:p>
@@ -11527,11 +11743,11 @@
         <p:spPr>
           <a:xfrm>
             <a:off x="7635240" y="1325880"/>
-            <a:ext cx="3474720" cy="1325880"/>
+            <a:ext cx="3474720" cy="1255471"/>
           </a:xfrm>
           <a:prstGeom prst="roundRect">
             <a:avLst>
-              <a:gd name="adj" fmla="val 8276"/>
+              <a:gd name="adj" fmla="val 8740"/>
             </a:avLst>
           </a:prstGeom>
           <a:solidFill>
@@ -11593,7 +11809,7 @@
         <p:spPr>
           <a:xfrm>
             <a:off x="7799832" y="1801368"/>
-            <a:ext cx="3145536" cy="758952"/>
+            <a:ext cx="3145536" cy="688543"/>
           </a:xfrm>
           <a:prstGeom prst="rect">
             <a:avLst/>
@@ -11633,12 +11849,12 @@
         </p:nvSpPr>
         <p:spPr>
           <a:xfrm>
-            <a:off x="7635240" y="2788920"/>
-            <a:ext cx="3474720" cy="1536192"/>
+            <a:off x="7635240" y="2718511"/>
+            <a:ext cx="3474720" cy="1328623"/>
           </a:xfrm>
           <a:prstGeom prst="roundRect">
             <a:avLst>
-              <a:gd name="adj" fmla="val 7143"/>
+              <a:gd name="adj" fmla="val 8259"/>
             </a:avLst>
           </a:prstGeom>
           <a:solidFill>
@@ -11660,7 +11876,7 @@
         </p:nvSpPr>
         <p:spPr>
           <a:xfrm>
-            <a:off x="7799832" y="2935224"/>
+            <a:off x="7799832" y="2864815"/>
             <a:ext cx="3145536" cy="256032"/>
           </a:xfrm>
           <a:prstGeom prst="rect">
@@ -11699,8 +11915,8 @@
         </p:nvSpPr>
         <p:spPr>
           <a:xfrm>
-            <a:off x="7818120" y="3300984"/>
-            <a:ext cx="3090672" cy="877824"/>
+            <a:off x="7818120" y="3230575"/>
+            <a:ext cx="3090672" cy="670255"/>
           </a:xfrm>
           <a:prstGeom prst="rect">
             <a:avLst/>
@@ -11740,12 +11956,12 @@
         </p:nvSpPr>
         <p:spPr>
           <a:xfrm>
-            <a:off x="7635240" y="4498848"/>
-            <a:ext cx="3474720" cy="1143000"/>
+            <a:off x="7635240" y="4184294"/>
+            <a:ext cx="3474720" cy="1466698"/>
           </a:xfrm>
           <a:prstGeom prst="roundRect">
             <a:avLst>
-              <a:gd name="adj" fmla="val 9600"/>
+              <a:gd name="adj" fmla="val 7481"/>
             </a:avLst>
           </a:prstGeom>
           <a:solidFill>
@@ -11767,7 +11983,7 @@
         </p:nvSpPr>
         <p:spPr>
           <a:xfrm>
-            <a:off x="7799832" y="4645152"/>
+            <a:off x="7799832" y="4330598"/>
             <a:ext cx="3145536" cy="256032"/>
           </a:xfrm>
           <a:prstGeom prst="rect">
@@ -11806,8 +12022,8 @@
         </p:nvSpPr>
         <p:spPr>
           <a:xfrm>
-            <a:off x="7799832" y="4974336"/>
-            <a:ext cx="3145536" cy="576072"/>
+            <a:off x="7799832" y="4659782"/>
+            <a:ext cx="3145536" cy="899770"/>
           </a:xfrm>
           <a:prstGeom prst="rect">
             <a:avLst/>
@@ -11833,7 +12049,7 @@
                 <a:ea typeface="Aptos" pitchFamily="34" charset="-122"/>
                 <a:cs typeface="Aptos" pitchFamily="34" charset="-120"/>
               </a:rPr>
-              <a:t>Connect the concept to public health purpose, responsible use, required safeguards, documentation, and the next action a.</a:t>
+              <a:t>Connect the concept to public health purpose, responsible use, required safeguards, documentation, and the next action a department should take.</a:t>
             </a:r>
             <a:endParaRPr lang="en-US" sz="1320" dirty="0"/>
           </a:p>
@@ -12311,7 +12527,7 @@
                 <a:ea typeface="Aptos" pitchFamily="34" charset="-122"/>
                 <a:cs typeface="Aptos" pitchFamily="34" charset="-120"/>
               </a:rPr>
-              <a:t>Use the related plays to identify decisions, participants, timing, approvals, and documentation needed for responsible.</a:t>
+              <a:t>Use the related plays to identify decisions, participants, timing, approvals, and documentation needed for responsible implementation.</a:t>
             </a:r>
             <a:endParaRPr lang="en-US" sz="1320" dirty="0"/>
           </a:p>
@@ -12930,7 +13146,7 @@
                 <a:ea typeface="Aptos" pitchFamily="34" charset="-122"/>
                 <a:cs typeface="Aptos" pitchFamily="34" charset="-120"/>
               </a:rPr>
-              <a:t>Use linked tools when your department needs a structured worksheet, template, checklist, review process, or.</a:t>
+              <a:t>Use linked tools when your department needs a structured worksheet, template, checklist, review process, or documentation artifact.</a:t>
             </a:r>
             <a:endParaRPr lang="en-US" sz="1320" dirty="0"/>
           </a:p>
@@ -13440,11 +13656,11 @@
         <p:spPr>
           <a:xfrm>
             <a:off x="7635240" y="1325880"/>
-            <a:ext cx="3474720" cy="1325880"/>
+            <a:ext cx="3474720" cy="1255471"/>
           </a:xfrm>
           <a:prstGeom prst="roundRect">
             <a:avLst>
-              <a:gd name="adj" fmla="val 8276"/>
+              <a:gd name="adj" fmla="val 8740"/>
             </a:avLst>
           </a:prstGeom>
           <a:solidFill>
@@ -13506,7 +13722,7 @@
         <p:spPr>
           <a:xfrm>
             <a:off x="7799832" y="1801368"/>
-            <a:ext cx="3145536" cy="758952"/>
+            <a:ext cx="3145536" cy="688543"/>
           </a:xfrm>
           <a:prstGeom prst="rect">
             <a:avLst/>
@@ -13546,12 +13762,12 @@
         </p:nvSpPr>
         <p:spPr>
           <a:xfrm>
-            <a:off x="7635240" y="2788920"/>
-            <a:ext cx="3474720" cy="1536192"/>
+            <a:off x="7635240" y="2718511"/>
+            <a:ext cx="3474720" cy="1328623"/>
           </a:xfrm>
           <a:prstGeom prst="roundRect">
             <a:avLst>
-              <a:gd name="adj" fmla="val 7143"/>
+              <a:gd name="adj" fmla="val 8259"/>
             </a:avLst>
           </a:prstGeom>
           <a:solidFill>
@@ -13573,7 +13789,7 @@
         </p:nvSpPr>
         <p:spPr>
           <a:xfrm>
-            <a:off x="7799832" y="2935224"/>
+            <a:off x="7799832" y="2864815"/>
             <a:ext cx="3145536" cy="256032"/>
           </a:xfrm>
           <a:prstGeom prst="rect">
@@ -13612,8 +13828,8 @@
         </p:nvSpPr>
         <p:spPr>
           <a:xfrm>
-            <a:off x="7818120" y="3300984"/>
-            <a:ext cx="3090672" cy="877824"/>
+            <a:off x="7818120" y="3230575"/>
+            <a:ext cx="3090672" cy="670255"/>
           </a:xfrm>
           <a:prstGeom prst="rect">
             <a:avLst/>
@@ -13670,12 +13886,12 @@
         </p:nvSpPr>
         <p:spPr>
           <a:xfrm>
-            <a:off x="7635240" y="4498848"/>
-            <a:ext cx="3474720" cy="1143000"/>
+            <a:off x="7635240" y="4184294"/>
+            <a:ext cx="3474720" cy="1466698"/>
           </a:xfrm>
           <a:prstGeom prst="roundRect">
             <a:avLst>
-              <a:gd name="adj" fmla="val 9600"/>
+              <a:gd name="adj" fmla="val 7481"/>
             </a:avLst>
           </a:prstGeom>
           <a:solidFill>
@@ -13697,7 +13913,7 @@
         </p:nvSpPr>
         <p:spPr>
           <a:xfrm>
-            <a:off x="7799832" y="4645152"/>
+            <a:off x="7799832" y="4330598"/>
             <a:ext cx="3145536" cy="256032"/>
           </a:xfrm>
           <a:prstGeom prst="rect">
@@ -13736,8 +13952,8 @@
         </p:nvSpPr>
         <p:spPr>
           <a:xfrm>
-            <a:off x="7799832" y="4974336"/>
-            <a:ext cx="3145536" cy="576072"/>
+            <a:off x="7799832" y="4659782"/>
+            <a:ext cx="3145536" cy="899770"/>
           </a:xfrm>
           <a:prstGeom prst="rect">
             <a:avLst/>
@@ -13763,7 +13979,7 @@
                 <a:ea typeface="Aptos" pitchFamily="34" charset="-122"/>
                 <a:cs typeface="Aptos" pitchFamily="34" charset="-120"/>
               </a:rPr>
-              <a:t>Use the assignment to test whether you can explain the concept, apply it to a realistic public health situation, and.</a:t>
+              <a:t>Use the assignment to test whether you can explain the concept, apply it to a realistic public health situation, and identify what would need review before the work moves forward.</a:t>
             </a:r>
             <a:endParaRPr lang="en-US" sz="1320" dirty="0"/>
           </a:p>
@@ -14132,11 +14348,11 @@
         <p:spPr>
           <a:xfrm>
             <a:off x="7635240" y="1325880"/>
-            <a:ext cx="3474720" cy="1325880"/>
+            <a:ext cx="3474720" cy="1255471"/>
           </a:xfrm>
           <a:prstGeom prst="roundRect">
             <a:avLst>
-              <a:gd name="adj" fmla="val 8276"/>
+              <a:gd name="adj" fmla="val 8740"/>
             </a:avLst>
           </a:prstGeom>
           <a:solidFill>
@@ -14198,7 +14414,7 @@
         <p:spPr>
           <a:xfrm>
             <a:off x="7799832" y="1801368"/>
-            <a:ext cx="3145536" cy="758952"/>
+            <a:ext cx="3145536" cy="688543"/>
           </a:xfrm>
           <a:prstGeom prst="rect">
             <a:avLst/>
@@ -14238,12 +14454,12 @@
         </p:nvSpPr>
         <p:spPr>
           <a:xfrm>
-            <a:off x="7635240" y="2788920"/>
-            <a:ext cx="3474720" cy="1536192"/>
+            <a:off x="7635240" y="2718511"/>
+            <a:ext cx="3474720" cy="1328623"/>
           </a:xfrm>
           <a:prstGeom prst="roundRect">
             <a:avLst>
-              <a:gd name="adj" fmla="val 7143"/>
+              <a:gd name="adj" fmla="val 8259"/>
             </a:avLst>
           </a:prstGeom>
           <a:solidFill>
@@ -14265,8 +14481,8 @@
         </p:nvSpPr>
         <p:spPr>
           <a:xfrm>
-            <a:off x="7799832" y="2935224"/>
-            <a:ext cx="3145536" cy="256032"/>
+            <a:off x="7799832" y="2846527"/>
+            <a:ext cx="3145536" cy="237744"/>
           </a:xfrm>
           <a:prstGeom prst="rect">
             <a:avLst/>
@@ -14282,7 +14498,7 @@
               <a:buNone/>
             </a:pPr>
             <a:r>
-              <a:rPr lang="en-US" sz="1300" b="1" dirty="0">
+              <a:rPr lang="en-US" sz="1250" b="1" dirty="0">
                 <a:solidFill>
                   <a:srgbClr val="0068B7"/>
                 </a:solidFill>
@@ -14290,101 +14506,317 @@
                 <a:ea typeface="Aptos" pitchFamily="34" charset="-122"/>
                 <a:cs typeface="Aptos" pitchFamily="34" charset="-120"/>
               </a:rPr>
-              <a:t>Concept checkpoints</a:t>
-            </a:r>
-            <a:endParaRPr lang="en-US" sz="1300" dirty="0"/>
-          </a:p>
-        </p:txBody>
-      </p:sp>
-      <p:sp>
-        <p:nvSpPr>
-          <p:cNvPr id="15" name="Text 13"/>
-          <p:cNvSpPr/>
-          <p:nvPr/>
-        </p:nvSpPr>
-        <p:spPr>
-          <a:xfrm>
-            <a:off x="7818120" y="3300984"/>
-            <a:ext cx="3090672" cy="877824"/>
-          </a:xfrm>
-          <a:prstGeom prst="rect">
-            <a:avLst/>
-          </a:prstGeom>
-          <a:noFill/>
-          <a:ln/>
-        </p:spPr>
-        <p:txBody>
-          <a:bodyPr wrap="square" lIns="508" tIns="508" rIns="508" bIns="508" rtlCol="0" anchor="t">
+              <a:t>Data-to-decision flow</a:t>
+            </a:r>
+            <a:endParaRPr lang="en-US" sz="1250" dirty="0"/>
+          </a:p>
+        </p:txBody>
+      </p:sp>
+      <p:sp>
+        <p:nvSpPr>
+          <p:cNvPr id="15" name="Shape 13"/>
+          <p:cNvSpPr/>
+          <p:nvPr/>
+        </p:nvSpPr>
+        <p:spPr>
+          <a:xfrm>
+            <a:off x="8763000" y="3399739"/>
+            <a:ext cx="164592" cy="0"/>
+          </a:xfrm>
+          <a:prstGeom prst="line">
+            <a:avLst/>
+          </a:prstGeom>
+          <a:noFill/>
+          <a:ln w="15240">
+            <a:solidFill>
+              <a:srgbClr val="8ABBD8"/>
+            </a:solidFill>
+            <a:prstDash val="solid"/>
+          </a:ln>
+        </p:spPr>
+      </p:sp>
+      <p:sp>
+        <p:nvSpPr>
+          <p:cNvPr id="16" name="Shape 14"/>
+          <p:cNvSpPr/>
+          <p:nvPr/>
+        </p:nvSpPr>
+        <p:spPr>
+          <a:xfrm>
+            <a:off x="7872984" y="3248863"/>
+            <a:ext cx="890016" cy="301752"/>
+          </a:xfrm>
+          <a:prstGeom prst="roundRect">
+            <a:avLst>
+              <a:gd name="adj" fmla="val 24242"/>
+            </a:avLst>
+          </a:prstGeom>
+          <a:solidFill>
+            <a:srgbClr val="0068B7"/>
+          </a:solidFill>
+          <a:ln w="12700">
+            <a:solidFill>
+              <a:srgbClr val="0068B7"/>
+            </a:solidFill>
+            <a:prstDash val="solid"/>
+          </a:ln>
+        </p:spPr>
+      </p:sp>
+      <p:sp>
+        <p:nvSpPr>
+          <p:cNvPr id="17" name="Text 15"/>
+          <p:cNvSpPr/>
+          <p:nvPr/>
+        </p:nvSpPr>
+        <p:spPr>
+          <a:xfrm>
+            <a:off x="7909560" y="3322015"/>
+            <a:ext cx="816864" cy="146304"/>
+          </a:xfrm>
+          <a:prstGeom prst="rect">
+            <a:avLst/>
+          </a:prstGeom>
+          <a:noFill/>
+          <a:ln/>
+        </p:spPr>
+        <p:txBody>
+          <a:bodyPr wrap="square" lIns="0" tIns="0" rIns="0" bIns="0" rtlCol="0" anchor="ctr">
             <a:normAutofit/>
           </a:bodyPr>
           <a:lstStyle/>
           <a:p>
-            <a:pPr indent="0" marL="0">
-              <a:buNone/>
-            </a:pPr>
-            <a:r>
-              <a:rPr lang="en-US" sz="1220" dirty="0">
-                <a:solidFill>
-                  <a:srgbClr val="17364A"/>
-                </a:solidFill>
-                <a:latin typeface="Aptos" pitchFamily="34" charset="0"/>
-                <a:ea typeface="Aptos" pitchFamily="34" charset="-122"/>
-                <a:cs typeface="Aptos" pitchFamily="34" charset="-120"/>
-              </a:rPr>
-              <a:t>It is designed for public health staff who must translate.</a:t>
-            </a:r>
-            <a:endParaRPr lang="en-US" sz="1220" dirty="0"/>
-          </a:p>
-          <a:p>
-            <a:pPr indent="0" marL="0">
-              <a:buNone/>
-            </a:pPr>
-            <a:r>
-              <a:rPr lang="en-US" sz="1220" dirty="0">
-                <a:solidFill>
-                  <a:srgbClr val="17364A"/>
-                </a:solidFill>
-                <a:latin typeface="Aptos" pitchFamily="34" charset="0"/>
-                <a:ea typeface="Aptos" pitchFamily="34" charset="-122"/>
-                <a:cs typeface="Aptos" pitchFamily="34" charset="-120"/>
-              </a:rPr>
-              <a:t>The module helps learners move beyond general awareness by.</a:t>
-            </a:r>
-            <a:endParaRPr lang="en-US" sz="1220" dirty="0"/>
-          </a:p>
-          <a:p>
-            <a:pPr indent="0" marL="0">
-              <a:buNone/>
-            </a:pPr>
-            <a:r>
-              <a:rPr lang="en-US" sz="1220" dirty="0">
-                <a:solidFill>
-                  <a:srgbClr val="17364A"/>
-                </a:solidFill>
-                <a:latin typeface="Aptos" pitchFamily="34" charset="0"/>
-                <a:ea typeface="Aptos" pitchFamily="34" charset="-122"/>
-                <a:cs typeface="Aptos" pitchFamily="34" charset="-120"/>
-              </a:rPr>
-              <a:t>It emphasizes paragraph-based reasoning, defined responsibilities,.</a:t>
-            </a:r>
-            <a:endParaRPr lang="en-US" sz="1220" dirty="0"/>
-          </a:p>
-        </p:txBody>
-      </p:sp>
-      <p:sp>
-        <p:nvSpPr>
-          <p:cNvPr id="16" name="Shape 14"/>
-          <p:cNvSpPr/>
-          <p:nvPr/>
-        </p:nvSpPr>
-        <p:spPr>
-          <a:xfrm>
-            <a:off x="7635240" y="4498848"/>
-            <a:ext cx="3474720" cy="1143000"/>
+            <a:pPr algn="ctr" indent="0" marL="0">
+              <a:buNone/>
+            </a:pPr>
+            <a:r>
+              <a:rPr lang="en-US" sz="880" b="1" dirty="0">
+                <a:solidFill>
+                  <a:srgbClr val="FFFFFF"/>
+                </a:solidFill>
+                <a:latin typeface="Aptos" pitchFamily="34" charset="0"/>
+                <a:ea typeface="Aptos" pitchFamily="34" charset="-122"/>
+                <a:cs typeface="Aptos" pitchFamily="34" charset="-120"/>
+              </a:rPr>
+              <a:t>Data</a:t>
+            </a:r>
+            <a:endParaRPr lang="en-US" sz="880" dirty="0"/>
+          </a:p>
+        </p:txBody>
+      </p:sp>
+      <p:sp>
+        <p:nvSpPr>
+          <p:cNvPr id="18" name="Shape 16"/>
+          <p:cNvSpPr/>
+          <p:nvPr/>
+        </p:nvSpPr>
+        <p:spPr>
+          <a:xfrm>
+            <a:off x="9817608" y="3399739"/>
+            <a:ext cx="164592" cy="0"/>
+          </a:xfrm>
+          <a:prstGeom prst="line">
+            <a:avLst/>
+          </a:prstGeom>
+          <a:noFill/>
+          <a:ln w="15240">
+            <a:solidFill>
+              <a:srgbClr val="8ABBD8"/>
+            </a:solidFill>
+            <a:prstDash val="solid"/>
+          </a:ln>
+        </p:spPr>
+      </p:sp>
+      <p:sp>
+        <p:nvSpPr>
+          <p:cNvPr id="19" name="Shape 17"/>
+          <p:cNvSpPr/>
+          <p:nvPr/>
+        </p:nvSpPr>
+        <p:spPr>
+          <a:xfrm>
+            <a:off x="8927592" y="3248863"/>
+            <a:ext cx="890016" cy="301752"/>
           </a:xfrm>
           <a:prstGeom prst="roundRect">
             <a:avLst>
-              <a:gd name="adj" fmla="val 9600"/>
+              <a:gd name="adj" fmla="val 24242"/>
+            </a:avLst>
+          </a:prstGeom>
+          <a:solidFill>
+            <a:srgbClr val="2F8A28"/>
+          </a:solidFill>
+          <a:ln w="12700">
+            <a:solidFill>
+              <a:srgbClr val="2F8A28"/>
+            </a:solidFill>
+            <a:prstDash val="solid"/>
+          </a:ln>
+        </p:spPr>
+      </p:sp>
+      <p:sp>
+        <p:nvSpPr>
+          <p:cNvPr id="20" name="Text 18"/>
+          <p:cNvSpPr/>
+          <p:nvPr/>
+        </p:nvSpPr>
+        <p:spPr>
+          <a:xfrm>
+            <a:off x="8964168" y="3322015"/>
+            <a:ext cx="816864" cy="146304"/>
+          </a:xfrm>
+          <a:prstGeom prst="rect">
+            <a:avLst/>
+          </a:prstGeom>
+          <a:noFill/>
+          <a:ln/>
+        </p:spPr>
+        <p:txBody>
+          <a:bodyPr wrap="square" lIns="0" tIns="0" rIns="0" bIns="0" rtlCol="0" anchor="ctr">
+            <a:normAutofit/>
+          </a:bodyPr>
+          <a:lstStyle/>
+          <a:p>
+            <a:pPr algn="ctr" indent="0" marL="0">
+              <a:buNone/>
+            </a:pPr>
+            <a:r>
+              <a:rPr lang="en-US" sz="880" b="1" dirty="0">
+                <a:solidFill>
+                  <a:srgbClr val="FFFFFF"/>
+                </a:solidFill>
+                <a:latin typeface="Aptos" pitchFamily="34" charset="0"/>
+                <a:ea typeface="Aptos" pitchFamily="34" charset="-122"/>
+                <a:cs typeface="Aptos" pitchFamily="34" charset="-120"/>
+              </a:rPr>
+              <a:t>Analysis</a:t>
+            </a:r>
+            <a:endParaRPr lang="en-US" sz="880" dirty="0"/>
+          </a:p>
+        </p:txBody>
+      </p:sp>
+      <p:sp>
+        <p:nvSpPr>
+          <p:cNvPr id="21" name="Shape 19"/>
+          <p:cNvSpPr/>
+          <p:nvPr/>
+        </p:nvSpPr>
+        <p:spPr>
+          <a:xfrm>
+            <a:off x="9982200" y="3248863"/>
+            <a:ext cx="890016" cy="301752"/>
+          </a:xfrm>
+          <a:prstGeom prst="roundRect">
+            <a:avLst>
+              <a:gd name="adj" fmla="val 24242"/>
+            </a:avLst>
+          </a:prstGeom>
+          <a:solidFill>
+            <a:srgbClr val="6A4CA3"/>
+          </a:solidFill>
+          <a:ln w="12700">
+            <a:solidFill>
+              <a:srgbClr val="6A4CA3"/>
+            </a:solidFill>
+            <a:prstDash val="solid"/>
+          </a:ln>
+        </p:spPr>
+      </p:sp>
+      <p:sp>
+        <p:nvSpPr>
+          <p:cNvPr id="22" name="Text 20"/>
+          <p:cNvSpPr/>
+          <p:nvPr/>
+        </p:nvSpPr>
+        <p:spPr>
+          <a:xfrm>
+            <a:off x="10018776" y="3322015"/>
+            <a:ext cx="816864" cy="146304"/>
+          </a:xfrm>
+          <a:prstGeom prst="rect">
+            <a:avLst/>
+          </a:prstGeom>
+          <a:noFill/>
+          <a:ln/>
+        </p:spPr>
+        <p:txBody>
+          <a:bodyPr wrap="square" lIns="0" tIns="0" rIns="0" bIns="0" rtlCol="0" anchor="ctr">
+            <a:normAutofit/>
+          </a:bodyPr>
+          <a:lstStyle/>
+          <a:p>
+            <a:pPr algn="ctr" indent="0" marL="0">
+              <a:buNone/>
+            </a:pPr>
+            <a:r>
+              <a:rPr lang="en-US" sz="880" b="1" dirty="0">
+                <a:solidFill>
+                  <a:srgbClr val="FFFFFF"/>
+                </a:solidFill>
+                <a:latin typeface="Aptos" pitchFamily="34" charset="0"/>
+                <a:ea typeface="Aptos" pitchFamily="34" charset="-122"/>
+                <a:cs typeface="Aptos" pitchFamily="34" charset="-120"/>
+              </a:rPr>
+              <a:t>Review</a:t>
+            </a:r>
+            <a:endParaRPr lang="en-US" sz="880" dirty="0"/>
+          </a:p>
+        </p:txBody>
+      </p:sp>
+      <p:sp>
+        <p:nvSpPr>
+          <p:cNvPr id="23" name="Text 21"/>
+          <p:cNvSpPr/>
+          <p:nvPr/>
+        </p:nvSpPr>
+        <p:spPr>
+          <a:xfrm>
+            <a:off x="7854696" y="3742639"/>
+            <a:ext cx="3035808" cy="158191"/>
+          </a:xfrm>
+          <a:prstGeom prst="rect">
+            <a:avLst/>
+          </a:prstGeom>
+          <a:noFill/>
+          <a:ln/>
+        </p:spPr>
+        <p:txBody>
+          <a:bodyPr wrap="square" lIns="254" tIns="254" rIns="254" bIns="254" rtlCol="0" anchor="t">
+            <a:normAutofit/>
+          </a:bodyPr>
+          <a:lstStyle/>
+          <a:p>
+            <a:pPr indent="0" marL="0">
+              <a:buNone/>
+            </a:pPr>
+            <a:r>
+              <a:rPr lang="en-US" sz="1120" dirty="0">
+                <a:solidFill>
+                  <a:srgbClr val="17364A"/>
+                </a:solidFill>
+                <a:latin typeface="Aptos" pitchFamily="34" charset="0"/>
+                <a:ea typeface="Aptos" pitchFamily="34" charset="-122"/>
+                <a:cs typeface="Aptos" pitchFamily="34" charset="-120"/>
+              </a:rPr>
+              <a:t>The important handoff is not from data to AI; it is from analysis to accountable human review.</a:t>
+            </a:r>
+            <a:endParaRPr lang="en-US" sz="1120" dirty="0"/>
+          </a:p>
+        </p:txBody>
+      </p:sp>
+      <p:sp>
+        <p:nvSpPr>
+          <p:cNvPr id="24" name="Shape 22"/>
+          <p:cNvSpPr/>
+          <p:nvPr/>
+        </p:nvSpPr>
+        <p:spPr>
+          <a:xfrm>
+            <a:off x="7635240" y="4184294"/>
+            <a:ext cx="3474720" cy="1466698"/>
+          </a:xfrm>
+          <a:prstGeom prst="roundRect">
+            <a:avLst>
+              <a:gd name="adj" fmla="val 7481"/>
             </a:avLst>
           </a:prstGeom>
           <a:solidFill>
@@ -14400,13 +14832,13 @@
       </p:sp>
       <p:sp>
         <p:nvSpPr>
-          <p:cNvPr id="17" name="Text 15"/>
-          <p:cNvSpPr/>
-          <p:nvPr/>
-        </p:nvSpPr>
-        <p:spPr>
-          <a:xfrm>
-            <a:off x="7799832" y="4645152"/>
+          <p:cNvPr id="25" name="Text 23"/>
+          <p:cNvSpPr/>
+          <p:nvPr/>
+        </p:nvSpPr>
+        <p:spPr>
+          <a:xfrm>
+            <a:off x="7799832" y="4330598"/>
             <a:ext cx="3145536" cy="256032"/>
           </a:xfrm>
           <a:prstGeom prst="rect">
@@ -14439,14 +14871,14 @@
       </p:sp>
       <p:sp>
         <p:nvSpPr>
-          <p:cNvPr id="18" name="Text 16"/>
-          <p:cNvSpPr/>
-          <p:nvPr/>
-        </p:nvSpPr>
-        <p:spPr>
-          <a:xfrm>
-            <a:off x="7799832" y="4974336"/>
-            <a:ext cx="3145536" cy="576072"/>
+          <p:cNvPr id="26" name="Text 24"/>
+          <p:cNvSpPr/>
+          <p:nvPr/>
+        </p:nvSpPr>
+        <p:spPr>
+          <a:xfrm>
+            <a:off x="7799832" y="4659782"/>
+            <a:ext cx="3145536" cy="899770"/>
           </a:xfrm>
           <a:prstGeom prst="rect">
             <a:avLst/>
@@ -14472,7 +14904,7 @@
                 <a:ea typeface="Aptos" pitchFamily="34" charset="-122"/>
                 <a:cs typeface="Aptos" pitchFamily="34" charset="-120"/>
               </a:rPr>
-              <a:t>Connect the concept to public health purpose, responsible use, required safeguards, documentation, and the next action a.</a:t>
+              <a:t>Connect the concept to public health purpose, responsible use, required safeguards, documentation, and the next action a department should take.</a:t>
             </a:r>
             <a:endParaRPr lang="en-US" sz="1320" dirty="0"/>
           </a:p>
@@ -14841,11 +15273,11 @@
         <p:spPr>
           <a:xfrm>
             <a:off x="7635240" y="1325880"/>
-            <a:ext cx="3474720" cy="1325880"/>
+            <a:ext cx="3474720" cy="1207008"/>
           </a:xfrm>
           <a:prstGeom prst="roundRect">
             <a:avLst>
-              <a:gd name="adj" fmla="val 8276"/>
+              <a:gd name="adj" fmla="val 9091"/>
             </a:avLst>
           </a:prstGeom>
           <a:solidFill>
@@ -14907,7 +15339,7 @@
         <p:spPr>
           <a:xfrm>
             <a:off x="7799832" y="1801368"/>
-            <a:ext cx="3145536" cy="758952"/>
+            <a:ext cx="3145536" cy="640080"/>
           </a:xfrm>
           <a:prstGeom prst="rect">
             <a:avLst/>
@@ -14933,7 +15365,7 @@
                 <a:ea typeface="Aptos" pitchFamily="34" charset="-122"/>
                 <a:cs typeface="Aptos" pitchFamily="34" charset="-120"/>
               </a:rPr>
-              <a:t>Decision right: The authority to approve, deny, modify, pause, or escalate an AI use case or.</a:t>
+              <a:t>Decision right: The authority to approve, deny, modify, pause, or escalate an AI use.</a:t>
             </a:r>
             <a:endParaRPr lang="en-US" sz="1320" dirty="0"/>
           </a:p>
@@ -14947,12 +15379,12 @@
         </p:nvSpPr>
         <p:spPr>
           <a:xfrm>
-            <a:off x="7635240" y="2788920"/>
-            <a:ext cx="3474720" cy="1536192"/>
+            <a:off x="7635240" y="2670048"/>
+            <a:ext cx="3474720" cy="1377086"/>
           </a:xfrm>
           <a:prstGeom prst="roundRect">
             <a:avLst>
-              <a:gd name="adj" fmla="val 7143"/>
+              <a:gd name="adj" fmla="val 7968"/>
             </a:avLst>
           </a:prstGeom>
           <a:solidFill>
@@ -14974,7 +15406,7 @@
         </p:nvSpPr>
         <p:spPr>
           <a:xfrm>
-            <a:off x="7799832" y="2935224"/>
+            <a:off x="7799832" y="2816352"/>
             <a:ext cx="3145536" cy="256032"/>
           </a:xfrm>
           <a:prstGeom prst="rect">
@@ -15013,8 +15445,8 @@
         </p:nvSpPr>
         <p:spPr>
           <a:xfrm>
-            <a:off x="7818120" y="3300984"/>
-            <a:ext cx="3090672" cy="877824"/>
+            <a:off x="7818120" y="3182112"/>
+            <a:ext cx="3090672" cy="718718"/>
           </a:xfrm>
           <a:prstGeom prst="rect">
             <a:avLst/>
@@ -15088,12 +15520,12 @@
         </p:nvSpPr>
         <p:spPr>
           <a:xfrm>
-            <a:off x="7635240" y="4498848"/>
-            <a:ext cx="3474720" cy="1143000"/>
+            <a:off x="7635240" y="4184294"/>
+            <a:ext cx="3474720" cy="1466698"/>
           </a:xfrm>
           <a:prstGeom prst="roundRect">
             <a:avLst>
-              <a:gd name="adj" fmla="val 9600"/>
+              <a:gd name="adj" fmla="val 7481"/>
             </a:avLst>
           </a:prstGeom>
           <a:solidFill>
@@ -15115,7 +15547,7 @@
         </p:nvSpPr>
         <p:spPr>
           <a:xfrm>
-            <a:off x="7799832" y="4645152"/>
+            <a:off x="7799832" y="4330598"/>
             <a:ext cx="3145536" cy="256032"/>
           </a:xfrm>
           <a:prstGeom prst="rect">
@@ -15154,8 +15586,8 @@
         </p:nvSpPr>
         <p:spPr>
           <a:xfrm>
-            <a:off x="7799832" y="4974336"/>
-            <a:ext cx="3145536" cy="576072"/>
+            <a:off x="7799832" y="4659782"/>
+            <a:ext cx="3145536" cy="899770"/>
           </a:xfrm>
           <a:prstGeom prst="rect">
             <a:avLst/>
@@ -15181,7 +15613,7 @@
                 <a:ea typeface="Aptos" pitchFamily="34" charset="-122"/>
                 <a:cs typeface="Aptos" pitchFamily="34" charset="-120"/>
               </a:rPr>
-              <a:t>Connect the concept to public health purpose, responsible use, required safeguards, documentation, and the next action a.</a:t>
+              <a:t>Connect the concept to public health purpose, responsible use, required safeguards, documentation, and the next action a department should take.</a:t>
             </a:r>
             <a:endParaRPr lang="en-US" sz="1320" dirty="0"/>
           </a:p>
@@ -15550,11 +15982,11 @@
         <p:spPr>
           <a:xfrm>
             <a:off x="7635240" y="1325880"/>
-            <a:ext cx="3474720" cy="1325880"/>
+            <a:ext cx="3474720" cy="1255471"/>
           </a:xfrm>
           <a:prstGeom prst="roundRect">
             <a:avLst>
-              <a:gd name="adj" fmla="val 8276"/>
+              <a:gd name="adj" fmla="val 8740"/>
             </a:avLst>
           </a:prstGeom>
           <a:solidFill>
@@ -15616,7 +16048,7 @@
         <p:spPr>
           <a:xfrm>
             <a:off x="7799832" y="1801368"/>
-            <a:ext cx="3145536" cy="758952"/>
+            <a:ext cx="3145536" cy="688543"/>
           </a:xfrm>
           <a:prstGeom prst="rect">
             <a:avLst/>
@@ -15656,12 +16088,12 @@
         </p:nvSpPr>
         <p:spPr>
           <a:xfrm>
-            <a:off x="7635240" y="2788920"/>
-            <a:ext cx="3474720" cy="1536192"/>
+            <a:off x="7635240" y="2718511"/>
+            <a:ext cx="3474720" cy="1328623"/>
           </a:xfrm>
           <a:prstGeom prst="roundRect">
             <a:avLst>
-              <a:gd name="adj" fmla="val 7143"/>
+              <a:gd name="adj" fmla="val 8259"/>
             </a:avLst>
           </a:prstGeom>
           <a:solidFill>
@@ -15683,8 +16115,8 @@
         </p:nvSpPr>
         <p:spPr>
           <a:xfrm>
-            <a:off x="7799832" y="2935224"/>
-            <a:ext cx="3145536" cy="256032"/>
+            <a:off x="7799832" y="2846527"/>
+            <a:ext cx="3145536" cy="237744"/>
           </a:xfrm>
           <a:prstGeom prst="rect">
             <a:avLst/>
@@ -15700,7 +16132,7 @@
               <a:buNone/>
             </a:pPr>
             <a:r>
-              <a:rPr lang="en-US" sz="1300" b="1" dirty="0">
+              <a:rPr lang="en-US" sz="1250" b="1" dirty="0">
                 <a:solidFill>
                   <a:srgbClr val="0068B7"/>
                 </a:solidFill>
@@ -15708,101 +16140,317 @@
                 <a:ea typeface="Aptos" pitchFamily="34" charset="-122"/>
                 <a:cs typeface="Aptos" pitchFamily="34" charset="-120"/>
               </a:rPr>
-              <a:t>Concept checkpoints</a:t>
-            </a:r>
-            <a:endParaRPr lang="en-US" sz="1300" dirty="0"/>
-          </a:p>
-        </p:txBody>
-      </p:sp>
-      <p:sp>
-        <p:nvSpPr>
-          <p:cNvPr id="15" name="Text 13"/>
-          <p:cNvSpPr/>
-          <p:nvPr/>
-        </p:nvSpPr>
-        <p:spPr>
-          <a:xfrm>
-            <a:off x="7818120" y="3300984"/>
-            <a:ext cx="3090672" cy="877824"/>
-          </a:xfrm>
-          <a:prstGeom prst="rect">
-            <a:avLst/>
-          </a:prstGeom>
-          <a:noFill/>
-          <a:ln/>
-        </p:spPr>
-        <p:txBody>
-          <a:bodyPr wrap="square" lIns="508" tIns="508" rIns="508" bIns="508" rtlCol="0" anchor="t">
+              <a:t>Data-to-decision flow</a:t>
+            </a:r>
+            <a:endParaRPr lang="en-US" sz="1250" dirty="0"/>
+          </a:p>
+        </p:txBody>
+      </p:sp>
+      <p:sp>
+        <p:nvSpPr>
+          <p:cNvPr id="15" name="Shape 13"/>
+          <p:cNvSpPr/>
+          <p:nvPr/>
+        </p:nvSpPr>
+        <p:spPr>
+          <a:xfrm>
+            <a:off x="8763000" y="3399739"/>
+            <a:ext cx="164592" cy="0"/>
+          </a:xfrm>
+          <a:prstGeom prst="line">
+            <a:avLst/>
+          </a:prstGeom>
+          <a:noFill/>
+          <a:ln w="15240">
+            <a:solidFill>
+              <a:srgbClr val="8ABBD8"/>
+            </a:solidFill>
+            <a:prstDash val="solid"/>
+          </a:ln>
+        </p:spPr>
+      </p:sp>
+      <p:sp>
+        <p:nvSpPr>
+          <p:cNvPr id="16" name="Shape 14"/>
+          <p:cNvSpPr/>
+          <p:nvPr/>
+        </p:nvSpPr>
+        <p:spPr>
+          <a:xfrm>
+            <a:off x="7872984" y="3248863"/>
+            <a:ext cx="890016" cy="301752"/>
+          </a:xfrm>
+          <a:prstGeom prst="roundRect">
+            <a:avLst>
+              <a:gd name="adj" fmla="val 24242"/>
+            </a:avLst>
+          </a:prstGeom>
+          <a:solidFill>
+            <a:srgbClr val="0068B7"/>
+          </a:solidFill>
+          <a:ln w="12700">
+            <a:solidFill>
+              <a:srgbClr val="0068B7"/>
+            </a:solidFill>
+            <a:prstDash val="solid"/>
+          </a:ln>
+        </p:spPr>
+      </p:sp>
+      <p:sp>
+        <p:nvSpPr>
+          <p:cNvPr id="17" name="Text 15"/>
+          <p:cNvSpPr/>
+          <p:nvPr/>
+        </p:nvSpPr>
+        <p:spPr>
+          <a:xfrm>
+            <a:off x="7909560" y="3322015"/>
+            <a:ext cx="816864" cy="146304"/>
+          </a:xfrm>
+          <a:prstGeom prst="rect">
+            <a:avLst/>
+          </a:prstGeom>
+          <a:noFill/>
+          <a:ln/>
+        </p:spPr>
+        <p:txBody>
+          <a:bodyPr wrap="square" lIns="0" tIns="0" rIns="0" bIns="0" rtlCol="0" anchor="ctr">
             <a:normAutofit/>
           </a:bodyPr>
           <a:lstStyle/>
           <a:p>
-            <a:pPr indent="0" marL="0">
-              <a:buNone/>
-            </a:pPr>
-            <a:r>
-              <a:rPr lang="en-US" sz="1220" dirty="0">
-                <a:solidFill>
-                  <a:srgbClr val="17364A"/>
-                </a:solidFill>
-                <a:latin typeface="Aptos" pitchFamily="34" charset="0"/>
-                <a:ea typeface="Aptos" pitchFamily="34" charset="-122"/>
-                <a:cs typeface="Aptos" pitchFamily="34" charset="-120"/>
-              </a:rPr>
-              <a:t>AI for Surveillance Signal Review and Epidemiologic Judgment.</a:t>
-            </a:r>
-            <a:endParaRPr lang="en-US" sz="1220" dirty="0"/>
-          </a:p>
-          <a:p>
-            <a:pPr indent="0" marL="0">
-              <a:buNone/>
-            </a:pPr>
-            <a:r>
-              <a:rPr lang="en-US" sz="1220" dirty="0">
-                <a:solidFill>
-                  <a:srgbClr val="17364A"/>
-                </a:solidFill>
-                <a:latin typeface="Aptos" pitchFamily="34" charset="0"/>
-                <a:ea typeface="Aptos" pitchFamily="34" charset="-122"/>
-                <a:cs typeface="Aptos" pitchFamily="34" charset="-120"/>
-              </a:rPr>
-              <a:t>Without a structured approach, staff may rely on informal.</a:t>
-            </a:r>
-            <a:endParaRPr lang="en-US" sz="1220" dirty="0"/>
-          </a:p>
-          <a:p>
-            <a:pPr indent="0" marL="0">
-              <a:buNone/>
-            </a:pPr>
-            <a:r>
-              <a:rPr lang="en-US" sz="1220" dirty="0">
-                <a:solidFill>
-                  <a:srgbClr val="17364A"/>
-                </a:solidFill>
-                <a:latin typeface="Aptos" pitchFamily="34" charset="0"/>
-                <a:ea typeface="Aptos" pitchFamily="34" charset="-122"/>
-                <a:cs typeface="Aptos" pitchFamily="34" charset="-120"/>
-              </a:rPr>
-              <a:t>Public health agencies operate under legal authorities, public.</a:t>
-            </a:r>
-            <a:endParaRPr lang="en-US" sz="1220" dirty="0"/>
-          </a:p>
-        </p:txBody>
-      </p:sp>
-      <p:sp>
-        <p:nvSpPr>
-          <p:cNvPr id="16" name="Shape 14"/>
-          <p:cNvSpPr/>
-          <p:nvPr/>
-        </p:nvSpPr>
-        <p:spPr>
-          <a:xfrm>
-            <a:off x="7635240" y="4498848"/>
-            <a:ext cx="3474720" cy="1143000"/>
+            <a:pPr algn="ctr" indent="0" marL="0">
+              <a:buNone/>
+            </a:pPr>
+            <a:r>
+              <a:rPr lang="en-US" sz="880" b="1" dirty="0">
+                <a:solidFill>
+                  <a:srgbClr val="FFFFFF"/>
+                </a:solidFill>
+                <a:latin typeface="Aptos" pitchFamily="34" charset="0"/>
+                <a:ea typeface="Aptos" pitchFamily="34" charset="-122"/>
+                <a:cs typeface="Aptos" pitchFamily="34" charset="-120"/>
+              </a:rPr>
+              <a:t>Data</a:t>
+            </a:r>
+            <a:endParaRPr lang="en-US" sz="880" dirty="0"/>
+          </a:p>
+        </p:txBody>
+      </p:sp>
+      <p:sp>
+        <p:nvSpPr>
+          <p:cNvPr id="18" name="Shape 16"/>
+          <p:cNvSpPr/>
+          <p:nvPr/>
+        </p:nvSpPr>
+        <p:spPr>
+          <a:xfrm>
+            <a:off x="9817608" y="3399739"/>
+            <a:ext cx="164592" cy="0"/>
+          </a:xfrm>
+          <a:prstGeom prst="line">
+            <a:avLst/>
+          </a:prstGeom>
+          <a:noFill/>
+          <a:ln w="15240">
+            <a:solidFill>
+              <a:srgbClr val="8ABBD8"/>
+            </a:solidFill>
+            <a:prstDash val="solid"/>
+          </a:ln>
+        </p:spPr>
+      </p:sp>
+      <p:sp>
+        <p:nvSpPr>
+          <p:cNvPr id="19" name="Shape 17"/>
+          <p:cNvSpPr/>
+          <p:nvPr/>
+        </p:nvSpPr>
+        <p:spPr>
+          <a:xfrm>
+            <a:off x="8927592" y="3248863"/>
+            <a:ext cx="890016" cy="301752"/>
           </a:xfrm>
           <a:prstGeom prst="roundRect">
             <a:avLst>
-              <a:gd name="adj" fmla="val 9600"/>
+              <a:gd name="adj" fmla="val 24242"/>
+            </a:avLst>
+          </a:prstGeom>
+          <a:solidFill>
+            <a:srgbClr val="2F8A28"/>
+          </a:solidFill>
+          <a:ln w="12700">
+            <a:solidFill>
+              <a:srgbClr val="2F8A28"/>
+            </a:solidFill>
+            <a:prstDash val="solid"/>
+          </a:ln>
+        </p:spPr>
+      </p:sp>
+      <p:sp>
+        <p:nvSpPr>
+          <p:cNvPr id="20" name="Text 18"/>
+          <p:cNvSpPr/>
+          <p:nvPr/>
+        </p:nvSpPr>
+        <p:spPr>
+          <a:xfrm>
+            <a:off x="8964168" y="3322015"/>
+            <a:ext cx="816864" cy="146304"/>
+          </a:xfrm>
+          <a:prstGeom prst="rect">
+            <a:avLst/>
+          </a:prstGeom>
+          <a:noFill/>
+          <a:ln/>
+        </p:spPr>
+        <p:txBody>
+          <a:bodyPr wrap="square" lIns="0" tIns="0" rIns="0" bIns="0" rtlCol="0" anchor="ctr">
+            <a:normAutofit/>
+          </a:bodyPr>
+          <a:lstStyle/>
+          <a:p>
+            <a:pPr algn="ctr" indent="0" marL="0">
+              <a:buNone/>
+            </a:pPr>
+            <a:r>
+              <a:rPr lang="en-US" sz="880" b="1" dirty="0">
+                <a:solidFill>
+                  <a:srgbClr val="FFFFFF"/>
+                </a:solidFill>
+                <a:latin typeface="Aptos" pitchFamily="34" charset="0"/>
+                <a:ea typeface="Aptos" pitchFamily="34" charset="-122"/>
+                <a:cs typeface="Aptos" pitchFamily="34" charset="-120"/>
+              </a:rPr>
+              <a:t>Analysis</a:t>
+            </a:r>
+            <a:endParaRPr lang="en-US" sz="880" dirty="0"/>
+          </a:p>
+        </p:txBody>
+      </p:sp>
+      <p:sp>
+        <p:nvSpPr>
+          <p:cNvPr id="21" name="Shape 19"/>
+          <p:cNvSpPr/>
+          <p:nvPr/>
+        </p:nvSpPr>
+        <p:spPr>
+          <a:xfrm>
+            <a:off x="9982200" y="3248863"/>
+            <a:ext cx="890016" cy="301752"/>
+          </a:xfrm>
+          <a:prstGeom prst="roundRect">
+            <a:avLst>
+              <a:gd name="adj" fmla="val 24242"/>
+            </a:avLst>
+          </a:prstGeom>
+          <a:solidFill>
+            <a:srgbClr val="6A4CA3"/>
+          </a:solidFill>
+          <a:ln w="12700">
+            <a:solidFill>
+              <a:srgbClr val="6A4CA3"/>
+            </a:solidFill>
+            <a:prstDash val="solid"/>
+          </a:ln>
+        </p:spPr>
+      </p:sp>
+      <p:sp>
+        <p:nvSpPr>
+          <p:cNvPr id="22" name="Text 20"/>
+          <p:cNvSpPr/>
+          <p:nvPr/>
+        </p:nvSpPr>
+        <p:spPr>
+          <a:xfrm>
+            <a:off x="10018776" y="3322015"/>
+            <a:ext cx="816864" cy="146304"/>
+          </a:xfrm>
+          <a:prstGeom prst="rect">
+            <a:avLst/>
+          </a:prstGeom>
+          <a:noFill/>
+          <a:ln/>
+        </p:spPr>
+        <p:txBody>
+          <a:bodyPr wrap="square" lIns="0" tIns="0" rIns="0" bIns="0" rtlCol="0" anchor="ctr">
+            <a:normAutofit/>
+          </a:bodyPr>
+          <a:lstStyle/>
+          <a:p>
+            <a:pPr algn="ctr" indent="0" marL="0">
+              <a:buNone/>
+            </a:pPr>
+            <a:r>
+              <a:rPr lang="en-US" sz="880" b="1" dirty="0">
+                <a:solidFill>
+                  <a:srgbClr val="FFFFFF"/>
+                </a:solidFill>
+                <a:latin typeface="Aptos" pitchFamily="34" charset="0"/>
+                <a:ea typeface="Aptos" pitchFamily="34" charset="-122"/>
+                <a:cs typeface="Aptos" pitchFamily="34" charset="-120"/>
+              </a:rPr>
+              <a:t>Review</a:t>
+            </a:r>
+            <a:endParaRPr lang="en-US" sz="880" dirty="0"/>
+          </a:p>
+        </p:txBody>
+      </p:sp>
+      <p:sp>
+        <p:nvSpPr>
+          <p:cNvPr id="23" name="Text 21"/>
+          <p:cNvSpPr/>
+          <p:nvPr/>
+        </p:nvSpPr>
+        <p:spPr>
+          <a:xfrm>
+            <a:off x="7854696" y="3742639"/>
+            <a:ext cx="3035808" cy="158191"/>
+          </a:xfrm>
+          <a:prstGeom prst="rect">
+            <a:avLst/>
+          </a:prstGeom>
+          <a:noFill/>
+          <a:ln/>
+        </p:spPr>
+        <p:txBody>
+          <a:bodyPr wrap="square" lIns="254" tIns="254" rIns="254" bIns="254" rtlCol="0" anchor="t">
+            <a:normAutofit/>
+          </a:bodyPr>
+          <a:lstStyle/>
+          <a:p>
+            <a:pPr indent="0" marL="0">
+              <a:buNone/>
+            </a:pPr>
+            <a:r>
+              <a:rPr lang="en-US" sz="1120" dirty="0">
+                <a:solidFill>
+                  <a:srgbClr val="17364A"/>
+                </a:solidFill>
+                <a:latin typeface="Aptos" pitchFamily="34" charset="0"/>
+                <a:ea typeface="Aptos" pitchFamily="34" charset="-122"/>
+                <a:cs typeface="Aptos" pitchFamily="34" charset="-120"/>
+              </a:rPr>
+              <a:t>The important handoff is not from data to AI; it is from analysis to accountable human review.</a:t>
+            </a:r>
+            <a:endParaRPr lang="en-US" sz="1120" dirty="0"/>
+          </a:p>
+        </p:txBody>
+      </p:sp>
+      <p:sp>
+        <p:nvSpPr>
+          <p:cNvPr id="24" name="Shape 22"/>
+          <p:cNvSpPr/>
+          <p:nvPr/>
+        </p:nvSpPr>
+        <p:spPr>
+          <a:xfrm>
+            <a:off x="7635240" y="4184294"/>
+            <a:ext cx="3474720" cy="1466698"/>
+          </a:xfrm>
+          <a:prstGeom prst="roundRect">
+            <a:avLst>
+              <a:gd name="adj" fmla="val 7481"/>
             </a:avLst>
           </a:prstGeom>
           <a:solidFill>
@@ -15818,13 +16466,13 @@
       </p:sp>
       <p:sp>
         <p:nvSpPr>
-          <p:cNvPr id="17" name="Text 15"/>
-          <p:cNvSpPr/>
-          <p:nvPr/>
-        </p:nvSpPr>
-        <p:spPr>
-          <a:xfrm>
-            <a:off x="7799832" y="4645152"/>
+          <p:cNvPr id="25" name="Text 23"/>
+          <p:cNvSpPr/>
+          <p:nvPr/>
+        </p:nvSpPr>
+        <p:spPr>
+          <a:xfrm>
+            <a:off x="7799832" y="4330598"/>
             <a:ext cx="3145536" cy="256032"/>
           </a:xfrm>
           <a:prstGeom prst="rect">
@@ -15857,14 +16505,14 @@
       </p:sp>
       <p:sp>
         <p:nvSpPr>
-          <p:cNvPr id="18" name="Text 16"/>
-          <p:cNvSpPr/>
-          <p:nvPr/>
-        </p:nvSpPr>
-        <p:spPr>
-          <a:xfrm>
-            <a:off x="7799832" y="4974336"/>
-            <a:ext cx="3145536" cy="576072"/>
+          <p:cNvPr id="26" name="Text 24"/>
+          <p:cNvSpPr/>
+          <p:nvPr/>
+        </p:nvSpPr>
+        <p:spPr>
+          <a:xfrm>
+            <a:off x="7799832" y="4659782"/>
+            <a:ext cx="3145536" cy="899770"/>
           </a:xfrm>
           <a:prstGeom prst="rect">
             <a:avLst/>
@@ -15890,7 +16538,7 @@
                 <a:ea typeface="Aptos" pitchFamily="34" charset="-122"/>
                 <a:cs typeface="Aptos" pitchFamily="34" charset="-120"/>
               </a:rPr>
-              <a:t>Connect the concept to public health purpose, responsible use, required safeguards, documentation, and the next action a.</a:t>
+              <a:t>Connect the concept to public health purpose, responsible use, required safeguards, documentation, and the next action a department should take.</a:t>
             </a:r>
             <a:endParaRPr lang="en-US" sz="1320" dirty="0"/>
           </a:p>
@@ -16259,11 +16907,11 @@
         <p:spPr>
           <a:xfrm>
             <a:off x="7635240" y="1325880"/>
-            <a:ext cx="3474720" cy="1325880"/>
+            <a:ext cx="3474720" cy="1255471"/>
           </a:xfrm>
           <a:prstGeom prst="roundRect">
             <a:avLst>
-              <a:gd name="adj" fmla="val 8276"/>
+              <a:gd name="adj" fmla="val 8740"/>
             </a:avLst>
           </a:prstGeom>
           <a:solidFill>
@@ -16325,7 +16973,7 @@
         <p:spPr>
           <a:xfrm>
             <a:off x="7799832" y="1801368"/>
-            <a:ext cx="3145536" cy="758952"/>
+            <a:ext cx="3145536" cy="688543"/>
           </a:xfrm>
           <a:prstGeom prst="rect">
             <a:avLst/>
@@ -16365,12 +17013,12 @@
         </p:nvSpPr>
         <p:spPr>
           <a:xfrm>
-            <a:off x="7635240" y="2788920"/>
-            <a:ext cx="3474720" cy="1536192"/>
+            <a:off x="7635240" y="2718511"/>
+            <a:ext cx="3474720" cy="1328623"/>
           </a:xfrm>
           <a:prstGeom prst="roundRect">
             <a:avLst>
-              <a:gd name="adj" fmla="val 7143"/>
+              <a:gd name="adj" fmla="val 8259"/>
             </a:avLst>
           </a:prstGeom>
           <a:solidFill>
@@ -16392,7 +17040,7 @@
         </p:nvSpPr>
         <p:spPr>
           <a:xfrm>
-            <a:off x="7799832" y="2935224"/>
+            <a:off x="7799832" y="2864815"/>
             <a:ext cx="3145536" cy="256032"/>
           </a:xfrm>
           <a:prstGeom prst="rect">
@@ -16431,8 +17079,8 @@
         </p:nvSpPr>
         <p:spPr>
           <a:xfrm>
-            <a:off x="7818120" y="3300984"/>
-            <a:ext cx="3090672" cy="877824"/>
+            <a:off x="7818120" y="3230575"/>
+            <a:ext cx="3090672" cy="670255"/>
           </a:xfrm>
           <a:prstGeom prst="rect">
             <a:avLst/>
@@ -16506,12 +17154,12 @@
         </p:nvSpPr>
         <p:spPr>
           <a:xfrm>
-            <a:off x="7635240" y="4498848"/>
-            <a:ext cx="3474720" cy="1143000"/>
+            <a:off x="7635240" y="4184294"/>
+            <a:ext cx="3474720" cy="1466698"/>
           </a:xfrm>
           <a:prstGeom prst="roundRect">
             <a:avLst>
-              <a:gd name="adj" fmla="val 9600"/>
+              <a:gd name="adj" fmla="val 7481"/>
             </a:avLst>
           </a:prstGeom>
           <a:solidFill>
@@ -16533,7 +17181,7 @@
         </p:nvSpPr>
         <p:spPr>
           <a:xfrm>
-            <a:off x="7799832" y="4645152"/>
+            <a:off x="7799832" y="4330598"/>
             <a:ext cx="3145536" cy="256032"/>
           </a:xfrm>
           <a:prstGeom prst="rect">
@@ -16572,8 +17220,8 @@
         </p:nvSpPr>
         <p:spPr>
           <a:xfrm>
-            <a:off x="7799832" y="4974336"/>
-            <a:ext cx="3145536" cy="576072"/>
+            <a:off x="7799832" y="4659782"/>
+            <a:ext cx="3145536" cy="899770"/>
           </a:xfrm>
           <a:prstGeom prst="rect">
             <a:avLst/>
@@ -16599,7 +17247,7 @@
                 <a:ea typeface="Aptos" pitchFamily="34" charset="-122"/>
                 <a:cs typeface="Aptos" pitchFamily="34" charset="-120"/>
               </a:rPr>
-              <a:t>Connect the concept to public health purpose, responsible use, required safeguards, documentation, and the next action a.</a:t>
+              <a:t>Connect the concept to public health purpose, responsible use, required safeguards, documentation, and the next action a department should take.</a:t>
             </a:r>
             <a:endParaRPr lang="en-US" sz="1320" dirty="0"/>
           </a:p>

--- a/downloads/presentations/modules/epi-310.pptx
+++ b/downloads/presentations/modules/epi-310.pptx
@@ -3254,8 +3254,8 @@
         </p:nvSpPr>
         <p:spPr>
           <a:xfrm>
-            <a:off x="868680" y="1508760"/>
-            <a:ext cx="6309360" cy="4160520"/>
+            <a:off x="822960" y="1463040"/>
+            <a:ext cx="6565392" cy="4343400"/>
           </a:xfrm>
           <a:prstGeom prst="rect">
             <a:avLst/>
@@ -3273,7 +3273,7 @@
               <a:buNone/>
             </a:pPr>
             <a:r>
-              <a:rPr lang="en-US" sz="2100" dirty="0">
+              <a:rPr lang="en-US" sz="1920" dirty="0">
                 <a:solidFill>
                   <a:srgbClr val="003A63"/>
                 </a:solidFill>
@@ -3283,14 +3283,14 @@
               </a:rPr>
               <a:t>• The first step in this topic is to define the decision or workflow clearly.</a:t>
             </a:r>
-            <a:endParaRPr lang="en-US" sz="2100" dirty="0"/>
-          </a:p>
-          <a:p>
-            <a:pPr indent="0" marL="0">
-              <a:buNone/>
-            </a:pPr>
-            <a:r>
-              <a:rPr lang="en-US" sz="2100" dirty="0">
+            <a:endParaRPr lang="en-US" sz="1920" dirty="0"/>
+          </a:p>
+          <a:p>
+            <a:pPr indent="0" marL="0">
+              <a:buNone/>
+            </a:pPr>
+            <a:r>
+              <a:rPr lang="en-US" sz="1920" dirty="0">
                 <a:solidFill>
                   <a:srgbClr val="003A63"/>
                 </a:solidFill>
@@ -3298,16 +3298,16 @@
                 <a:ea typeface="Aptos" pitchFamily="34" charset="-122"/>
                 <a:cs typeface="Aptos" pitchFamily="34" charset="-120"/>
               </a:rPr>
-              <a:t>• Staff should identify who is affected, what data are used, what AI output is produced, who.</a:t>
-            </a:r>
-            <a:endParaRPr lang="en-US" sz="2100" dirty="0"/>
-          </a:p>
-          <a:p>
-            <a:pPr indent="0" marL="0">
-              <a:buNone/>
-            </a:pPr>
-            <a:r>
-              <a:rPr lang="en-US" sz="2100" dirty="0">
+              <a:t>• Staff should identify who is affected, what data are used, what AI output is.</a:t>
+            </a:r>
+            <a:endParaRPr lang="en-US" sz="1920" dirty="0"/>
+          </a:p>
+          <a:p>
+            <a:pPr indent="0" marL="0">
+              <a:buNone/>
+            </a:pPr>
+            <a:r>
+              <a:rPr lang="en-US" sz="1920" dirty="0">
                 <a:solidFill>
                   <a:srgbClr val="003A63"/>
                 </a:solidFill>
@@ -3315,9 +3315,9 @@
                 <a:ea typeface="Aptos" pitchFamily="34" charset="-122"/>
                 <a:cs typeface="Aptos" pitchFamily="34" charset="-120"/>
               </a:rPr>
-              <a:t>• This prevents the module from becoming abstract and anchors the work in public health practice.</a:t>
-            </a:r>
-            <a:endParaRPr lang="en-US" sz="2100" dirty="0"/>
+              <a:t>• This prevents the module from becoming abstract and anchors the work in.</a:t>
+            </a:r>
+            <a:endParaRPr lang="en-US" sz="1920" dirty="0"/>
           </a:p>
         </p:txBody>
       </p:sp>
@@ -3329,12 +3329,12 @@
         </p:nvSpPr>
         <p:spPr>
           <a:xfrm>
-            <a:off x="7635240" y="1325880"/>
-            <a:ext cx="3474720" cy="1207008"/>
+            <a:off x="7543800" y="1325880"/>
+            <a:ext cx="3611880" cy="1261872"/>
           </a:xfrm>
           <a:prstGeom prst="roundRect">
             <a:avLst>
-              <a:gd name="adj" fmla="val 9091"/>
+              <a:gd name="adj" fmla="val 8696"/>
             </a:avLst>
           </a:prstGeom>
           <a:solidFill>
@@ -3356,8 +3356,8 @@
         </p:nvSpPr>
         <p:spPr>
           <a:xfrm>
-            <a:off x="7799832" y="1472184"/>
-            <a:ext cx="3145536" cy="256032"/>
+            <a:off x="7708392" y="1453896"/>
+            <a:ext cx="3282696" cy="228600"/>
           </a:xfrm>
           <a:prstGeom prst="rect">
             <a:avLst/>
@@ -3373,7 +3373,7 @@
               <a:buNone/>
             </a:pPr>
             <a:r>
-              <a:rPr lang="en-US" sz="1300" b="1" dirty="0">
+              <a:rPr lang="en-US" sz="1220" b="1" dirty="0">
                 <a:solidFill>
                   <a:srgbClr val="0068B7"/>
                 </a:solidFill>
@@ -3383,7 +3383,7 @@
               </a:rPr>
               <a:t>Core concept</a:t>
             </a:r>
-            <a:endParaRPr lang="en-US" sz="1300" dirty="0"/>
+            <a:endParaRPr lang="en-US" sz="1220" dirty="0"/>
           </a:p>
         </p:txBody>
       </p:sp>
@@ -3395,8 +3395,8 @@
         </p:nvSpPr>
         <p:spPr>
           <a:xfrm>
-            <a:off x="7799832" y="1801368"/>
-            <a:ext cx="3145536" cy="640080"/>
+            <a:off x="7708392" y="1764792"/>
+            <a:ext cx="3282696" cy="749808"/>
           </a:xfrm>
           <a:prstGeom prst="rect">
             <a:avLst/>
@@ -3414,7 +3414,7 @@
               <a:buNone/>
             </a:pPr>
             <a:r>
-              <a:rPr lang="en-US" sz="1320" dirty="0">
+              <a:rPr lang="en-US" sz="1220" dirty="0">
                 <a:solidFill>
                   <a:srgbClr val="17364A"/>
                 </a:solidFill>
@@ -3424,7 +3424,7 @@
               </a:rPr>
               <a:t>The first step in this topic is to define the decision or workflow clearly.</a:t>
             </a:r>
-            <a:endParaRPr lang="en-US" sz="1320" dirty="0"/>
+            <a:endParaRPr lang="en-US" sz="1220" dirty="0"/>
           </a:p>
         </p:txBody>
       </p:sp>
@@ -3436,12 +3436,12 @@
         </p:nvSpPr>
         <p:spPr>
           <a:xfrm>
-            <a:off x="7635240" y="2670048"/>
-            <a:ext cx="3474720" cy="1377086"/>
+            <a:off x="7543800" y="2724912"/>
+            <a:ext cx="3611880" cy="1527048"/>
           </a:xfrm>
           <a:prstGeom prst="roundRect">
             <a:avLst>
-              <a:gd name="adj" fmla="val 7968"/>
+              <a:gd name="adj" fmla="val 7186"/>
             </a:avLst>
           </a:prstGeom>
           <a:solidFill>
@@ -3463,24 +3463,26 @@
         </p:nvSpPr>
         <p:spPr>
           <a:xfrm>
-            <a:off x="7799832" y="2798064"/>
-            <a:ext cx="3145536" cy="237744"/>
-          </a:xfrm>
-          <a:prstGeom prst="rect">
-            <a:avLst/>
-          </a:prstGeom>
-          <a:noFill/>
-          <a:ln/>
-        </p:spPr>
-        <p:txBody>
-          <a:bodyPr wrap="square" lIns="0" tIns="0" rIns="0" bIns="0" rtlCol="0" anchor="ctr"/>
-          <a:lstStyle/>
-          <a:p>
-            <a:pPr indent="0" marL="0">
-              <a:buNone/>
-            </a:pPr>
-            <a:r>
-              <a:rPr lang="en-US" sz="1250" b="1" dirty="0">
+            <a:off x="7708392" y="2852928"/>
+            <a:ext cx="3282696" cy="219456"/>
+          </a:xfrm>
+          <a:prstGeom prst="rect">
+            <a:avLst/>
+          </a:prstGeom>
+          <a:noFill/>
+          <a:ln/>
+        </p:spPr>
+        <p:txBody>
+          <a:bodyPr wrap="square" lIns="0" tIns="0" rIns="0" bIns="0" rtlCol="0" anchor="ctr">
+            <a:normAutofit/>
+          </a:bodyPr>
+          <a:lstStyle/>
+          <a:p>
+            <a:pPr indent="0" marL="0">
+              <a:buNone/>
+            </a:pPr>
+            <a:r>
+              <a:rPr lang="en-US" sz="1160" b="1" dirty="0">
                 <a:solidFill>
                   <a:srgbClr val="0068B7"/>
                 </a:solidFill>
@@ -3490,7 +3492,7 @@
               </a:rPr>
               <a:t>Data-to-decision flow</a:t>
             </a:r>
-            <a:endParaRPr lang="en-US" sz="1250" dirty="0"/>
+            <a:endParaRPr lang="en-US" sz="1160" dirty="0"/>
           </a:p>
         </p:txBody>
       </p:sp>
@@ -3502,7 +3504,7 @@
         </p:nvSpPr>
         <p:spPr>
           <a:xfrm>
-            <a:off x="8763000" y="3351276"/>
+            <a:off x="8717280" y="3406140"/>
             <a:ext cx="164592" cy="0"/>
           </a:xfrm>
           <a:prstGeom prst="line">
@@ -3525,8 +3527,8 @@
         </p:nvSpPr>
         <p:spPr>
           <a:xfrm>
-            <a:off x="7872984" y="3200400"/>
-            <a:ext cx="890016" cy="301752"/>
+            <a:off x="7781544" y="3255264"/>
+            <a:ext cx="935736" cy="301752"/>
           </a:xfrm>
           <a:prstGeom prst="roundRect">
             <a:avLst>
@@ -3552,8 +3554,8 @@
         </p:nvSpPr>
         <p:spPr>
           <a:xfrm>
-            <a:off x="7909560" y="3273552"/>
-            <a:ext cx="816864" cy="146304"/>
+            <a:off x="7818120" y="3328416"/>
+            <a:ext cx="862584" cy="146304"/>
           </a:xfrm>
           <a:prstGeom prst="rect">
             <a:avLst/>
@@ -3593,7 +3595,7 @@
         </p:nvSpPr>
         <p:spPr>
           <a:xfrm>
-            <a:off x="9817608" y="3351276"/>
+            <a:off x="9817608" y="3406140"/>
             <a:ext cx="164592" cy="0"/>
           </a:xfrm>
           <a:prstGeom prst="line">
@@ -3616,8 +3618,8 @@
         </p:nvSpPr>
         <p:spPr>
           <a:xfrm>
-            <a:off x="8927592" y="3200400"/>
-            <a:ext cx="890016" cy="301752"/>
+            <a:off x="8881872" y="3255264"/>
+            <a:ext cx="935736" cy="301752"/>
           </a:xfrm>
           <a:prstGeom prst="roundRect">
             <a:avLst>
@@ -3643,8 +3645,8 @@
         </p:nvSpPr>
         <p:spPr>
           <a:xfrm>
-            <a:off x="8964168" y="3273552"/>
-            <a:ext cx="816864" cy="146304"/>
+            <a:off x="8918448" y="3328416"/>
+            <a:ext cx="862584" cy="146304"/>
           </a:xfrm>
           <a:prstGeom prst="rect">
             <a:avLst/>
@@ -3684,8 +3686,8 @@
         </p:nvSpPr>
         <p:spPr>
           <a:xfrm>
-            <a:off x="9982200" y="3200400"/>
-            <a:ext cx="890016" cy="301752"/>
+            <a:off x="9982200" y="3255264"/>
+            <a:ext cx="935736" cy="301752"/>
           </a:xfrm>
           <a:prstGeom prst="roundRect">
             <a:avLst>
@@ -3711,8 +3713,8 @@
         </p:nvSpPr>
         <p:spPr>
           <a:xfrm>
-            <a:off x="10018776" y="3273552"/>
-            <a:ext cx="816864" cy="146304"/>
+            <a:off x="10018776" y="3328416"/>
+            <a:ext cx="862584" cy="146304"/>
           </a:xfrm>
           <a:prstGeom prst="rect">
             <a:avLst/>
@@ -3752,8 +3754,8 @@
         </p:nvSpPr>
         <p:spPr>
           <a:xfrm>
-            <a:off x="7854696" y="3694176"/>
-            <a:ext cx="3035808" cy="206654"/>
+            <a:off x="7763256" y="3749040"/>
+            <a:ext cx="3172968" cy="356616"/>
           </a:xfrm>
           <a:prstGeom prst="rect">
             <a:avLst/>
@@ -3771,7 +3773,7 @@
               <a:buNone/>
             </a:pPr>
             <a:r>
-              <a:rPr lang="en-US" sz="1120" dirty="0">
+              <a:rPr lang="en-US" sz="1040" dirty="0">
                 <a:solidFill>
                   <a:srgbClr val="17364A"/>
                 </a:solidFill>
@@ -3779,9 +3781,9 @@
                 <a:ea typeface="Aptos" pitchFamily="34" charset="-122"/>
                 <a:cs typeface="Aptos" pitchFamily="34" charset="-120"/>
               </a:rPr>
-              <a:t>The important handoff is not from data to AI; it is from analysis to accountable human review.</a:t>
-            </a:r>
-            <a:endParaRPr lang="en-US" sz="1120" dirty="0"/>
+              <a:t>The important handoff is not from data to AI; it is from analysis to.</a:t>
+            </a:r>
+            <a:endParaRPr lang="en-US" sz="1040" dirty="0"/>
           </a:p>
         </p:txBody>
       </p:sp>
@@ -3793,12 +3795,12 @@
         </p:nvSpPr>
         <p:spPr>
           <a:xfrm>
-            <a:off x="7635240" y="4184294"/>
-            <a:ext cx="3474720" cy="1466698"/>
+            <a:off x="7543800" y="4389120"/>
+            <a:ext cx="3611880" cy="1261872"/>
           </a:xfrm>
           <a:prstGeom prst="roundRect">
             <a:avLst>
-              <a:gd name="adj" fmla="val 7481"/>
+              <a:gd name="adj" fmla="val 8696"/>
             </a:avLst>
           </a:prstGeom>
           <a:solidFill>
@@ -3820,8 +3822,8 @@
         </p:nvSpPr>
         <p:spPr>
           <a:xfrm>
-            <a:off x="7799832" y="4330598"/>
-            <a:ext cx="3145536" cy="256032"/>
+            <a:off x="7708392" y="4517136"/>
+            <a:ext cx="3282696" cy="228600"/>
           </a:xfrm>
           <a:prstGeom prst="rect">
             <a:avLst/>
@@ -3837,7 +3839,7 @@
               <a:buNone/>
             </a:pPr>
             <a:r>
-              <a:rPr lang="en-US" sz="1300" b="1" dirty="0">
+              <a:rPr lang="en-US" sz="1220" b="1" dirty="0">
                 <a:solidFill>
                   <a:srgbClr val="0068B7"/>
                 </a:solidFill>
@@ -3847,7 +3849,7 @@
               </a:rPr>
               <a:t>Apply it</a:t>
             </a:r>
-            <a:endParaRPr lang="en-US" sz="1300" dirty="0"/>
+            <a:endParaRPr lang="en-US" sz="1220" dirty="0"/>
           </a:p>
         </p:txBody>
       </p:sp>
@@ -3859,8 +3861,8 @@
         </p:nvSpPr>
         <p:spPr>
           <a:xfrm>
-            <a:off x="7799832" y="4659782"/>
-            <a:ext cx="3145536" cy="899770"/>
+            <a:off x="7708392" y="4828032"/>
+            <a:ext cx="3282696" cy="749808"/>
           </a:xfrm>
           <a:prstGeom prst="rect">
             <a:avLst/>
@@ -3878,7 +3880,7 @@
               <a:buNone/>
             </a:pPr>
             <a:r>
-              <a:rPr lang="en-US" sz="1320" dirty="0">
+              <a:rPr lang="en-US" sz="1220" dirty="0">
                 <a:solidFill>
                   <a:srgbClr val="17364A"/>
                 </a:solidFill>
@@ -3886,9 +3888,9 @@
                 <a:ea typeface="Aptos" pitchFamily="34" charset="-122"/>
                 <a:cs typeface="Aptos" pitchFamily="34" charset="-120"/>
               </a:rPr>
-              <a:t>Connect the concept to public health purpose, responsible use, required safeguards, documentation, and the next action a department should take.</a:t>
-            </a:r>
-            <a:endParaRPr lang="en-US" sz="1320" dirty="0"/>
+              <a:t>Connect the concept to public health purpose, responsible use, required.</a:t>
+            </a:r>
+            <a:endParaRPr lang="en-US" sz="1220" dirty="0"/>
           </a:p>
         </p:txBody>
       </p:sp>
@@ -4179,8 +4181,8 @@
         </p:nvSpPr>
         <p:spPr>
           <a:xfrm>
-            <a:off x="868680" y="1508760"/>
-            <a:ext cx="6309360" cy="4160520"/>
+            <a:off x="822960" y="1463040"/>
+            <a:ext cx="6565392" cy="4343400"/>
           </a:xfrm>
           <a:prstGeom prst="rect">
             <a:avLst/>
@@ -4198,7 +4200,7 @@
               <a:buNone/>
             </a:pPr>
             <a:r>
-              <a:rPr lang="en-US" sz="2100" dirty="0">
+              <a:rPr lang="en-US" sz="1920" dirty="0">
                 <a:solidFill>
                   <a:srgbClr val="003A63"/>
                 </a:solidFill>
@@ -4208,14 +4210,14 @@
               </a:rPr>
               <a:t>• A common failure mode is treating the topic as a one-time checklist.</a:t>
             </a:r>
-            <a:endParaRPr lang="en-US" sz="2100" dirty="0"/>
-          </a:p>
-          <a:p>
-            <a:pPr indent="0" marL="0">
-              <a:buNone/>
-            </a:pPr>
-            <a:r>
-              <a:rPr lang="en-US" sz="2100" dirty="0">
+            <a:endParaRPr lang="en-US" sz="1920" dirty="0"/>
+          </a:p>
+          <a:p>
+            <a:pPr indent="0" marL="0">
+              <a:buNone/>
+            </a:pPr>
+            <a:r>
+              <a:rPr lang="en-US" sz="1920" dirty="0">
                 <a:solidFill>
                   <a:srgbClr val="003A63"/>
                 </a:solidFill>
@@ -4223,16 +4225,16 @@
                 <a:ea typeface="Aptos" pitchFamily="34" charset="-122"/>
                 <a:cs typeface="Aptos" pitchFamily="34" charset="-120"/>
               </a:rPr>
-              <a:t>• AI risks can change when data sources, models, vendors, policies, users, or public.</a:t>
-            </a:r>
-            <a:endParaRPr lang="en-US" sz="2100" dirty="0"/>
-          </a:p>
-          <a:p>
-            <a:pPr indent="0" marL="0">
-              <a:buNone/>
-            </a:pPr>
-            <a:r>
-              <a:rPr lang="en-US" sz="2100" dirty="0">
+              <a:t>• AI risks can change when data sources, models, vendors, policies, users, or.</a:t>
+            </a:r>
+            <a:endParaRPr lang="en-US" sz="1920" dirty="0"/>
+          </a:p>
+          <a:p>
+            <a:pPr indent="0" marL="0">
+              <a:buNone/>
+            </a:pPr>
+            <a:r>
+              <a:rPr lang="en-US" sz="1920" dirty="0">
                 <a:solidFill>
                   <a:srgbClr val="003A63"/>
                 </a:solidFill>
@@ -4242,7 +4244,7 @@
               </a:rPr>
               <a:t>• A guardrail is to define review intervals and change triggers.</a:t>
             </a:r>
-            <a:endParaRPr lang="en-US" sz="2100" dirty="0"/>
+            <a:endParaRPr lang="en-US" sz="1920" dirty="0"/>
           </a:p>
         </p:txBody>
       </p:sp>
@@ -4254,12 +4256,12 @@
         </p:nvSpPr>
         <p:spPr>
           <a:xfrm>
-            <a:off x="7635240" y="1325880"/>
-            <a:ext cx="3474720" cy="1207008"/>
+            <a:off x="7543800" y="1325880"/>
+            <a:ext cx="3611880" cy="1261872"/>
           </a:xfrm>
           <a:prstGeom prst="roundRect">
             <a:avLst>
-              <a:gd name="adj" fmla="val 9091"/>
+              <a:gd name="adj" fmla="val 8696"/>
             </a:avLst>
           </a:prstGeom>
           <a:solidFill>
@@ -4281,8 +4283,8 @@
         </p:nvSpPr>
         <p:spPr>
           <a:xfrm>
-            <a:off x="7799832" y="1472184"/>
-            <a:ext cx="3145536" cy="256032"/>
+            <a:off x="7708392" y="1453896"/>
+            <a:ext cx="3282696" cy="228600"/>
           </a:xfrm>
           <a:prstGeom prst="rect">
             <a:avLst/>
@@ -4298,7 +4300,7 @@
               <a:buNone/>
             </a:pPr>
             <a:r>
-              <a:rPr lang="en-US" sz="1300" b="1" dirty="0">
+              <a:rPr lang="en-US" sz="1220" b="1" dirty="0">
                 <a:solidFill>
                   <a:srgbClr val="0068B7"/>
                 </a:solidFill>
@@ -4308,7 +4310,7 @@
               </a:rPr>
               <a:t>Risk check</a:t>
             </a:r>
-            <a:endParaRPr lang="en-US" sz="1300" dirty="0"/>
+            <a:endParaRPr lang="en-US" sz="1220" dirty="0"/>
           </a:p>
         </p:txBody>
       </p:sp>
@@ -4320,8 +4322,8 @@
         </p:nvSpPr>
         <p:spPr>
           <a:xfrm>
-            <a:off x="7799832" y="1801368"/>
-            <a:ext cx="3145536" cy="640080"/>
+            <a:off x="7708392" y="1764792"/>
+            <a:ext cx="3282696" cy="749808"/>
           </a:xfrm>
           <a:prstGeom prst="rect">
             <a:avLst/>
@@ -4339,7 +4341,7 @@
               <a:buNone/>
             </a:pPr>
             <a:r>
-              <a:rPr lang="en-US" sz="1320" dirty="0">
+              <a:rPr lang="en-US" sz="1220" dirty="0">
                 <a:solidFill>
                   <a:srgbClr val="17364A"/>
                 </a:solidFill>
@@ -4349,7 +4351,7 @@
               </a:rPr>
               <a:t>A common failure mode is treating the topic as a one-time checklist.</a:t>
             </a:r>
-            <a:endParaRPr lang="en-US" sz="1320" dirty="0"/>
+            <a:endParaRPr lang="en-US" sz="1220" dirty="0"/>
           </a:p>
         </p:txBody>
       </p:sp>
@@ -4361,12 +4363,12 @@
         </p:nvSpPr>
         <p:spPr>
           <a:xfrm>
-            <a:off x="7635240" y="2670048"/>
-            <a:ext cx="3474720" cy="1536192"/>
+            <a:off x="7543800" y="2724912"/>
+            <a:ext cx="3611880" cy="1527048"/>
           </a:xfrm>
           <a:prstGeom prst="roundRect">
             <a:avLst>
-              <a:gd name="adj" fmla="val 7143"/>
+              <a:gd name="adj" fmla="val 7186"/>
             </a:avLst>
           </a:prstGeom>
           <a:solidFill>
@@ -4388,8 +4390,8 @@
         </p:nvSpPr>
         <p:spPr>
           <a:xfrm>
-            <a:off x="7799832" y="2816352"/>
-            <a:ext cx="3145536" cy="256032"/>
+            <a:off x="7708392" y="2852928"/>
+            <a:ext cx="3282696" cy="228600"/>
           </a:xfrm>
           <a:prstGeom prst="rect">
             <a:avLst/>
@@ -4405,7 +4407,7 @@
               <a:buNone/>
             </a:pPr>
             <a:r>
-              <a:rPr lang="en-US" sz="1300" b="1" dirty="0">
+              <a:rPr lang="en-US" sz="1220" b="1" dirty="0">
                 <a:solidFill>
                   <a:srgbClr val="0068B7"/>
                 </a:solidFill>
@@ -4415,7 +4417,7 @@
               </a:rPr>
               <a:t>Concept checkpoints</a:t>
             </a:r>
-            <a:endParaRPr lang="en-US" sz="1300" dirty="0"/>
+            <a:endParaRPr lang="en-US" sz="1220" dirty="0"/>
           </a:p>
         </p:txBody>
       </p:sp>
@@ -4427,8 +4429,8 @@
         </p:nvSpPr>
         <p:spPr>
           <a:xfrm>
-            <a:off x="7818120" y="3182112"/>
-            <a:ext cx="3090672" cy="877824"/>
+            <a:off x="7726680" y="3182112"/>
+            <a:ext cx="3227832" cy="960120"/>
           </a:xfrm>
           <a:prstGeom prst="rect">
             <a:avLst/>
@@ -4446,7 +4448,7 @@
               <a:buNone/>
             </a:pPr>
             <a:r>
-              <a:rPr lang="en-US" sz="1220" dirty="0">
+              <a:rPr lang="en-US" sz="1140" dirty="0">
                 <a:solidFill>
                   <a:srgbClr val="17364A"/>
                 </a:solidFill>
@@ -4456,14 +4458,14 @@
               </a:rPr>
               <a:t>Another failure mode is unclear ownership.</a:t>
             </a:r>
-            <a:endParaRPr lang="en-US" sz="1220" dirty="0"/>
-          </a:p>
-          <a:p>
-            <a:pPr indent="0" marL="0">
-              <a:buNone/>
-            </a:pPr>
-            <a:r>
-              <a:rPr lang="en-US" sz="1220" dirty="0">
+            <a:endParaRPr lang="en-US" sz="1140" dirty="0"/>
+          </a:p>
+          <a:p>
+            <a:pPr indent="0" marL="0">
+              <a:buNone/>
+            </a:pPr>
+            <a:r>
+              <a:rPr lang="en-US" sz="1140" dirty="0">
                 <a:solidFill>
                   <a:srgbClr val="17364A"/>
                 </a:solidFill>
@@ -4471,16 +4473,16 @@
                 <a:ea typeface="Aptos" pitchFamily="34" charset="-122"/>
                 <a:cs typeface="Aptos" pitchFamily="34" charset="-120"/>
               </a:rPr>
-              <a:t>When everyone is responsible in general, no one may be responsible.</a:t>
-            </a:r>
-            <a:endParaRPr lang="en-US" sz="1220" dirty="0"/>
-          </a:p>
-          <a:p>
-            <a:pPr indent="0" marL="0">
-              <a:buNone/>
-            </a:pPr>
-            <a:r>
-              <a:rPr lang="en-US" sz="1220" dirty="0">
+              <a:t>When everyone is responsible in general, no one.</a:t>
+            </a:r>
+            <a:endParaRPr lang="en-US" sz="1140" dirty="0"/>
+          </a:p>
+          <a:p>
+            <a:pPr indent="0" marL="0">
+              <a:buNone/>
+            </a:pPr>
+            <a:r>
+              <a:rPr lang="en-US" sz="1140" dirty="0">
                 <a:solidFill>
                   <a:srgbClr val="17364A"/>
                 </a:solidFill>
@@ -4488,9 +4490,9 @@
                 <a:ea typeface="Aptos" pitchFamily="34" charset="-122"/>
                 <a:cs typeface="Aptos" pitchFamily="34" charset="-120"/>
               </a:rPr>
-              <a:t>A guardrail is to assign an accountability owner and name.</a:t>
-            </a:r>
-            <a:endParaRPr lang="en-US" sz="1220" dirty="0"/>
+              <a:t>A guardrail is to assign an accountability owner.</a:t>
+            </a:r>
+            <a:endParaRPr lang="en-US" sz="1140" dirty="0"/>
           </a:p>
         </p:txBody>
       </p:sp>
@@ -4502,12 +4504,12 @@
         </p:nvSpPr>
         <p:spPr>
           <a:xfrm>
-            <a:off x="7635240" y="4343400"/>
-            <a:ext cx="3474720" cy="1255471"/>
+            <a:off x="7543800" y="4389120"/>
+            <a:ext cx="3611880" cy="1261872"/>
           </a:xfrm>
           <a:prstGeom prst="roundRect">
             <a:avLst>
-              <a:gd name="adj" fmla="val 8740"/>
+              <a:gd name="adj" fmla="val 8696"/>
             </a:avLst>
           </a:prstGeom>
           <a:solidFill>
@@ -4529,8 +4531,8 @@
         </p:nvSpPr>
         <p:spPr>
           <a:xfrm>
-            <a:off x="7799832" y="4489704"/>
-            <a:ext cx="3145536" cy="256032"/>
+            <a:off x="7708392" y="4517136"/>
+            <a:ext cx="3282696" cy="228600"/>
           </a:xfrm>
           <a:prstGeom prst="rect">
             <a:avLst/>
@@ -4546,7 +4548,7 @@
               <a:buNone/>
             </a:pPr>
             <a:r>
-              <a:rPr lang="en-US" sz="1300" b="1" dirty="0">
+              <a:rPr lang="en-US" sz="1220" b="1" dirty="0">
                 <a:solidFill>
                   <a:srgbClr val="0068B7"/>
                 </a:solidFill>
@@ -4556,7 +4558,7 @@
               </a:rPr>
               <a:t>Safeguard to plan</a:t>
             </a:r>
-            <a:endParaRPr lang="en-US" sz="1300" dirty="0"/>
+            <a:endParaRPr lang="en-US" sz="1220" dirty="0"/>
           </a:p>
         </p:txBody>
       </p:sp>
@@ -4568,8 +4570,8 @@
         </p:nvSpPr>
         <p:spPr>
           <a:xfrm>
-            <a:off x="7799832" y="4818888"/>
-            <a:ext cx="3145536" cy="688543"/>
+            <a:off x="7708392" y="4828032"/>
+            <a:ext cx="3282696" cy="749808"/>
           </a:xfrm>
           <a:prstGeom prst="rect">
             <a:avLst/>
@@ -4587,7 +4589,7 @@
               <a:buNone/>
             </a:pPr>
             <a:r>
-              <a:rPr lang="en-US" sz="1320" dirty="0">
+              <a:rPr lang="en-US" sz="1220" dirty="0">
                 <a:solidFill>
                   <a:srgbClr val="17364A"/>
                 </a:solidFill>
@@ -4595,9 +4597,9 @@
                 <a:ea typeface="Aptos" pitchFamily="34" charset="-122"/>
                 <a:cs typeface="Aptos" pitchFamily="34" charset="-120"/>
               </a:rPr>
-              <a:t>Identify what could go wrong, who could be affected, what safeguards are needed, and what evidence should be reviewed before use.</a:t>
-            </a:r>
-            <a:endParaRPr lang="en-US" sz="1320" dirty="0"/>
+              <a:t>Identify what could go wrong, who could be affected, what safeguards are needed,.</a:t>
+            </a:r>
+            <a:endParaRPr lang="en-US" sz="1220" dirty="0"/>
           </a:p>
         </p:txBody>
       </p:sp>
@@ -4888,8 +4890,8 @@
         </p:nvSpPr>
         <p:spPr>
           <a:xfrm>
-            <a:off x="868680" y="1508760"/>
-            <a:ext cx="6309360" cy="4160520"/>
+            <a:off x="822960" y="1463040"/>
+            <a:ext cx="6565392" cy="4343400"/>
           </a:xfrm>
           <a:prstGeom prst="rect">
             <a:avLst/>
@@ -4907,7 +4909,7 @@
               <a:buNone/>
             </a:pPr>
             <a:r>
-              <a:rPr lang="en-US" sz="2100" dirty="0">
+              <a:rPr lang="en-US" sz="1920" dirty="0">
                 <a:solidFill>
                   <a:srgbClr val="003A63"/>
                 </a:solidFill>
@@ -4915,16 +4917,16 @@
                 <a:ea typeface="Aptos" pitchFamily="34" charset="-122"/>
                 <a:cs typeface="Aptos" pitchFamily="34" charset="-120"/>
               </a:rPr>
-              <a:t>• This topic applies across generative AI, predictive analytics, NLP, RAG, automation, and.</a:t>
-            </a:r>
-            <a:endParaRPr lang="en-US" sz="2100" dirty="0"/>
-          </a:p>
-          <a:p>
-            <a:pPr indent="0" marL="0">
-              <a:buNone/>
-            </a:pPr>
-            <a:r>
-              <a:rPr lang="en-US" sz="2100" dirty="0">
+              <a:t>• This topic applies across generative AI, predictive analytics, NLP, RAG,.</a:t>
+            </a:r>
+            <a:endParaRPr lang="en-US" sz="1920" dirty="0"/>
+          </a:p>
+          <a:p>
+            <a:pPr indent="0" marL="0">
+              <a:buNone/>
+            </a:pPr>
+            <a:r>
+              <a:rPr lang="en-US" sz="1920" dirty="0">
                 <a:solidFill>
                   <a:srgbClr val="003A63"/>
                 </a:solidFill>
@@ -4932,9 +4934,9 @@
                 <a:ea typeface="Aptos" pitchFamily="34" charset="-122"/>
                 <a:cs typeface="Aptos" pitchFamily="34" charset="-120"/>
               </a:rPr>
-              <a:t>• The more sensitive the data, the more consequential the output, or the more automated the.</a:t>
-            </a:r>
-            <a:endParaRPr lang="en-US" sz="2100" dirty="0"/>
+              <a:t>• The more sensitive the data, the more consequential the output, or the more.</a:t>
+            </a:r>
+            <a:endParaRPr lang="en-US" sz="1920" dirty="0"/>
           </a:p>
         </p:txBody>
       </p:sp>
@@ -4946,12 +4948,12 @@
         </p:nvSpPr>
         <p:spPr>
           <a:xfrm>
-            <a:off x="7635240" y="1325880"/>
-            <a:ext cx="3474720" cy="1255471"/>
+            <a:off x="7543800" y="1325880"/>
+            <a:ext cx="3611880" cy="1261872"/>
           </a:xfrm>
           <a:prstGeom prst="roundRect">
             <a:avLst>
-              <a:gd name="adj" fmla="val 8740"/>
+              <a:gd name="adj" fmla="val 8696"/>
             </a:avLst>
           </a:prstGeom>
           <a:solidFill>
@@ -4973,8 +4975,8 @@
         </p:nvSpPr>
         <p:spPr>
           <a:xfrm>
-            <a:off x="7799832" y="1472184"/>
-            <a:ext cx="3145536" cy="256032"/>
+            <a:off x="7708392" y="1453896"/>
+            <a:ext cx="3282696" cy="228600"/>
           </a:xfrm>
           <a:prstGeom prst="rect">
             <a:avLst/>
@@ -4990,7 +4992,7 @@
               <a:buNone/>
             </a:pPr>
             <a:r>
-              <a:rPr lang="en-US" sz="1300" b="1" dirty="0">
+              <a:rPr lang="en-US" sz="1220" b="1" dirty="0">
                 <a:solidFill>
                   <a:srgbClr val="0068B7"/>
                 </a:solidFill>
@@ -5000,7 +5002,7 @@
               </a:rPr>
               <a:t>Implementation cue</a:t>
             </a:r>
-            <a:endParaRPr lang="en-US" sz="1300" dirty="0"/>
+            <a:endParaRPr lang="en-US" sz="1220" dirty="0"/>
           </a:p>
         </p:txBody>
       </p:sp>
@@ -5012,8 +5014,8 @@
         </p:nvSpPr>
         <p:spPr>
           <a:xfrm>
-            <a:off x="7799832" y="1801368"/>
-            <a:ext cx="3145536" cy="688543"/>
+            <a:off x="7708392" y="1764792"/>
+            <a:ext cx="3282696" cy="749808"/>
           </a:xfrm>
           <a:prstGeom prst="rect">
             <a:avLst/>
@@ -5031,7 +5033,7 @@
               <a:buNone/>
             </a:pPr>
             <a:r>
-              <a:rPr lang="en-US" sz="1320" dirty="0">
+              <a:rPr lang="en-US" sz="1220" dirty="0">
                 <a:solidFill>
                   <a:srgbClr val="17364A"/>
                 </a:solidFill>
@@ -5039,9 +5041,9 @@
                 <a:ea typeface="Aptos" pitchFamily="34" charset="-122"/>
                 <a:cs typeface="Aptos" pitchFamily="34" charset="-120"/>
               </a:rPr>
-              <a:t>This topic applies across generative AI, predictive analytics, NLP, RAG, automation, and agentic.</a:t>
-            </a:r>
-            <a:endParaRPr lang="en-US" sz="1320" dirty="0"/>
+              <a:t>This topic applies across generative AI, predictive analytics, NLP, RAG,.</a:t>
+            </a:r>
+            <a:endParaRPr lang="en-US" sz="1220" dirty="0"/>
           </a:p>
         </p:txBody>
       </p:sp>
@@ -5053,12 +5055,12 @@
         </p:nvSpPr>
         <p:spPr>
           <a:xfrm>
-            <a:off x="7635240" y="2718511"/>
-            <a:ext cx="3474720" cy="1328623"/>
+            <a:off x="7543800" y="2724912"/>
+            <a:ext cx="3611880" cy="1527048"/>
           </a:xfrm>
           <a:prstGeom prst="roundRect">
             <a:avLst>
-              <a:gd name="adj" fmla="val 8259"/>
+              <a:gd name="adj" fmla="val 7186"/>
             </a:avLst>
           </a:prstGeom>
           <a:solidFill>
@@ -5080,8 +5082,8 @@
         </p:nvSpPr>
         <p:spPr>
           <a:xfrm>
-            <a:off x="7799832" y="2864815"/>
-            <a:ext cx="3145536" cy="256032"/>
+            <a:off x="7708392" y="2852928"/>
+            <a:ext cx="3282696" cy="228600"/>
           </a:xfrm>
           <a:prstGeom prst="rect">
             <a:avLst/>
@@ -5097,7 +5099,7 @@
               <a:buNone/>
             </a:pPr>
             <a:r>
-              <a:rPr lang="en-US" sz="1300" b="1" dirty="0">
+              <a:rPr lang="en-US" sz="1220" b="1" dirty="0">
                 <a:solidFill>
                   <a:srgbClr val="0068B7"/>
                 </a:solidFill>
@@ -5107,7 +5109,7 @@
               </a:rPr>
               <a:t>Concept checkpoints</a:t>
             </a:r>
-            <a:endParaRPr lang="en-US" sz="1300" dirty="0"/>
+            <a:endParaRPr lang="en-US" sz="1220" dirty="0"/>
           </a:p>
         </p:txBody>
       </p:sp>
@@ -5119,8 +5121,8 @@
         </p:nvSpPr>
         <p:spPr>
           <a:xfrm>
-            <a:off x="7818120" y="3230575"/>
-            <a:ext cx="3090672" cy="670255"/>
+            <a:off x="7726680" y="3182112"/>
+            <a:ext cx="3227832" cy="960120"/>
           </a:xfrm>
           <a:prstGeom prst="rect">
             <a:avLst/>
@@ -5138,7 +5140,7 @@
               <a:buNone/>
             </a:pPr>
             <a:r>
-              <a:rPr lang="en-US" sz="1220" dirty="0">
+              <a:rPr lang="en-US" sz="1140" dirty="0">
                 <a:solidFill>
                   <a:srgbClr val="17364A"/>
                 </a:solidFill>
@@ -5146,16 +5148,16 @@
                 <a:ea typeface="Aptos" pitchFamily="34" charset="-122"/>
                 <a:cs typeface="Aptos" pitchFamily="34" charset="-120"/>
               </a:rPr>
-              <a:t>This topic applies across generative AI, predictive analytics,.</a:t>
-            </a:r>
-            <a:endParaRPr lang="en-US" sz="1220" dirty="0"/>
-          </a:p>
-          <a:p>
-            <a:pPr indent="0" marL="0">
-              <a:buNone/>
-            </a:pPr>
-            <a:r>
-              <a:rPr lang="en-US" sz="1220" dirty="0">
+              <a:t>This topic applies across generative AI,.</a:t>
+            </a:r>
+            <a:endParaRPr lang="en-US" sz="1140" dirty="0"/>
+          </a:p>
+          <a:p>
+            <a:pPr indent="0" marL="0">
+              <a:buNone/>
+            </a:pPr>
+            <a:r>
+              <a:rPr lang="en-US" sz="1140" dirty="0">
                 <a:solidFill>
                   <a:srgbClr val="17364A"/>
                 </a:solidFill>
@@ -5163,9 +5165,9 @@
                 <a:ea typeface="Aptos" pitchFamily="34" charset="-122"/>
                 <a:cs typeface="Aptos" pitchFamily="34" charset="-120"/>
               </a:rPr>
-              <a:t>The more sensitive the data, the more consequential the output, or.</a:t>
-            </a:r>
-            <a:endParaRPr lang="en-US" sz="1220" dirty="0"/>
+              <a:t>The more sensitive the data, the more.</a:t>
+            </a:r>
+            <a:endParaRPr lang="en-US" sz="1140" dirty="0"/>
           </a:p>
         </p:txBody>
       </p:sp>
@@ -5177,12 +5179,12 @@
         </p:nvSpPr>
         <p:spPr>
           <a:xfrm>
-            <a:off x="7635240" y="4184294"/>
-            <a:ext cx="3474720" cy="1466698"/>
+            <a:off x="7543800" y="4389120"/>
+            <a:ext cx="3611880" cy="1261872"/>
           </a:xfrm>
           <a:prstGeom prst="roundRect">
             <a:avLst>
-              <a:gd name="adj" fmla="val 7481"/>
+              <a:gd name="adj" fmla="val 8696"/>
             </a:avLst>
           </a:prstGeom>
           <a:solidFill>
@@ -5204,8 +5206,8 @@
         </p:nvSpPr>
         <p:spPr>
           <a:xfrm>
-            <a:off x="7799832" y="4330598"/>
-            <a:ext cx="3145536" cy="256032"/>
+            <a:off x="7708392" y="4517136"/>
+            <a:ext cx="3282696" cy="228600"/>
           </a:xfrm>
           <a:prstGeom prst="rect">
             <a:avLst/>
@@ -5221,7 +5223,7 @@
               <a:buNone/>
             </a:pPr>
             <a:r>
-              <a:rPr lang="en-US" sz="1300" b="1" dirty="0">
+              <a:rPr lang="en-US" sz="1220" b="1" dirty="0">
                 <a:solidFill>
                   <a:srgbClr val="0068B7"/>
                 </a:solidFill>
@@ -5231,7 +5233,7 @@
               </a:rPr>
               <a:t>Next action</a:t>
             </a:r>
-            <a:endParaRPr lang="en-US" sz="1300" dirty="0"/>
+            <a:endParaRPr lang="en-US" sz="1220" dirty="0"/>
           </a:p>
         </p:txBody>
       </p:sp>
@@ -5243,8 +5245,8 @@
         </p:nvSpPr>
         <p:spPr>
           <a:xfrm>
-            <a:off x="7799832" y="4659782"/>
-            <a:ext cx="3145536" cy="899770"/>
+            <a:off x="7708392" y="4828032"/>
+            <a:ext cx="3282696" cy="749808"/>
           </a:xfrm>
           <a:prstGeom prst="rect">
             <a:avLst/>
@@ -5262,7 +5264,7 @@
               <a:buNone/>
             </a:pPr>
             <a:r>
-              <a:rPr lang="en-US" sz="1320" dirty="0">
+              <a:rPr lang="en-US" sz="1220" dirty="0">
                 <a:solidFill>
                   <a:srgbClr val="17364A"/>
                 </a:solidFill>
@@ -5270,9 +5272,9 @@
                 <a:ea typeface="Aptos" pitchFamily="34" charset="-122"/>
                 <a:cs typeface="Aptos" pitchFamily="34" charset="-120"/>
               </a:rPr>
-              <a:t>Use the concept to clarify workflow changes, dependencies, staffing, procurement requirements, training needs, and implementation checkpoints.</a:t>
-            </a:r>
-            <a:endParaRPr lang="en-US" sz="1320" dirty="0"/>
+              <a:t>Use the concept to clarify workflow changes, dependencies, staffing, procurement.</a:t>
+            </a:r>
+            <a:endParaRPr lang="en-US" sz="1220" dirty="0"/>
           </a:p>
         </p:txBody>
       </p:sp>
@@ -5563,8 +5565,8 @@
         </p:nvSpPr>
         <p:spPr>
           <a:xfrm>
-            <a:off x="868680" y="1508760"/>
-            <a:ext cx="6309360" cy="4160520"/>
+            <a:off x="822960" y="1463040"/>
+            <a:ext cx="6565392" cy="4343400"/>
           </a:xfrm>
           <a:prstGeom prst="rect">
             <a:avLst/>
@@ -5582,7 +5584,7 @@
               <a:buNone/>
             </a:pPr>
             <a:r>
-              <a:rPr lang="en-US" sz="2100" dirty="0">
+              <a:rPr lang="en-US" sz="1920" dirty="0">
                 <a:solidFill>
                   <a:srgbClr val="003A63"/>
                 </a:solidFill>
@@ -5592,14 +5594,14 @@
               </a:rPr>
               <a:t>• What public health decision or workflow does this topic affect?</a:t>
             </a:r>
-            <a:endParaRPr lang="en-US" sz="2100" dirty="0"/>
-          </a:p>
-          <a:p>
-            <a:pPr indent="0" marL="0">
-              <a:buNone/>
-            </a:pPr>
-            <a:r>
-              <a:rPr lang="en-US" sz="2100" dirty="0">
+            <a:endParaRPr lang="en-US" sz="1920" dirty="0"/>
+          </a:p>
+          <a:p>
+            <a:pPr indent="0" marL="0">
+              <a:buNone/>
+            </a:pPr>
+            <a:r>
+              <a:rPr lang="en-US" sz="1920" dirty="0">
                 <a:solidFill>
                   <a:srgbClr val="003A63"/>
                 </a:solidFill>
@@ -5609,14 +5611,14 @@
               </a:rPr>
               <a:t>• Who has authority to approve or pause the work?</a:t>
             </a:r>
-            <a:endParaRPr lang="en-US" sz="2100" dirty="0"/>
-          </a:p>
-          <a:p>
-            <a:pPr indent="0" marL="0">
-              <a:buNone/>
-            </a:pPr>
-            <a:r>
-              <a:rPr lang="en-US" sz="2100" dirty="0">
+            <a:endParaRPr lang="en-US" sz="1920" dirty="0"/>
+          </a:p>
+          <a:p>
+            <a:pPr indent="0" marL="0">
+              <a:buNone/>
+            </a:pPr>
+            <a:r>
+              <a:rPr lang="en-US" sz="1920" dirty="0">
                 <a:solidFill>
                   <a:srgbClr val="003A63"/>
                 </a:solidFill>
@@ -5626,7 +5628,7 @@
               </a:rPr>
               <a:t>• What evidence would show that the workflow is responsible and effective?</a:t>
             </a:r>
-            <a:endParaRPr lang="en-US" sz="2100" dirty="0"/>
+            <a:endParaRPr lang="en-US" sz="1920" dirty="0"/>
           </a:p>
         </p:txBody>
       </p:sp>
@@ -5638,12 +5640,12 @@
         </p:nvSpPr>
         <p:spPr>
           <a:xfrm>
-            <a:off x="7635240" y="1325880"/>
-            <a:ext cx="3474720" cy="1207008"/>
+            <a:off x="7543800" y="1325880"/>
+            <a:ext cx="3611880" cy="1261872"/>
           </a:xfrm>
           <a:prstGeom prst="roundRect">
             <a:avLst>
-              <a:gd name="adj" fmla="val 9091"/>
+              <a:gd name="adj" fmla="val 8696"/>
             </a:avLst>
           </a:prstGeom>
           <a:solidFill>
@@ -5665,8 +5667,8 @@
         </p:nvSpPr>
         <p:spPr>
           <a:xfrm>
-            <a:off x="7799832" y="1472184"/>
-            <a:ext cx="3145536" cy="256032"/>
+            <a:off x="7708392" y="1453896"/>
+            <a:ext cx="3282696" cy="228600"/>
           </a:xfrm>
           <a:prstGeom prst="rect">
             <a:avLst/>
@@ -5682,7 +5684,7 @@
               <a:buNone/>
             </a:pPr>
             <a:r>
-              <a:rPr lang="en-US" sz="1300" b="1" dirty="0">
+              <a:rPr lang="en-US" sz="1220" b="1" dirty="0">
                 <a:solidFill>
                   <a:srgbClr val="0068B7"/>
                 </a:solidFill>
@@ -5692,7 +5694,7 @@
               </a:rPr>
               <a:t>Core concept</a:t>
             </a:r>
-            <a:endParaRPr lang="en-US" sz="1300" dirty="0"/>
+            <a:endParaRPr lang="en-US" sz="1220" dirty="0"/>
           </a:p>
         </p:txBody>
       </p:sp>
@@ -5704,8 +5706,8 @@
         </p:nvSpPr>
         <p:spPr>
           <a:xfrm>
-            <a:off x="7799832" y="1801368"/>
-            <a:ext cx="3145536" cy="640080"/>
+            <a:off x="7708392" y="1764792"/>
+            <a:ext cx="3282696" cy="749808"/>
           </a:xfrm>
           <a:prstGeom prst="rect">
             <a:avLst/>
@@ -5723,7 +5725,7 @@
               <a:buNone/>
             </a:pPr>
             <a:r>
-              <a:rPr lang="en-US" sz="1320" dirty="0">
+              <a:rPr lang="en-US" sz="1220" dirty="0">
                 <a:solidFill>
                   <a:srgbClr val="17364A"/>
                 </a:solidFill>
@@ -5733,7 +5735,7 @@
               </a:rPr>
               <a:t>What public health decision or workflow does this topic affect?</a:t>
             </a:r>
-            <a:endParaRPr lang="en-US" sz="1320" dirty="0"/>
+            <a:endParaRPr lang="en-US" sz="1220" dirty="0"/>
           </a:p>
         </p:txBody>
       </p:sp>
@@ -5745,12 +5747,12 @@
         </p:nvSpPr>
         <p:spPr>
           <a:xfrm>
-            <a:off x="7635240" y="2670048"/>
-            <a:ext cx="3474720" cy="1377086"/>
+            <a:off x="7543800" y="2724912"/>
+            <a:ext cx="3611880" cy="1527048"/>
           </a:xfrm>
           <a:prstGeom prst="roundRect">
             <a:avLst>
-              <a:gd name="adj" fmla="val 7968"/>
+              <a:gd name="adj" fmla="val 7186"/>
             </a:avLst>
           </a:prstGeom>
           <a:solidFill>
@@ -5772,8 +5774,8 @@
         </p:nvSpPr>
         <p:spPr>
           <a:xfrm>
-            <a:off x="7799832" y="2816352"/>
-            <a:ext cx="3145536" cy="256032"/>
+            <a:off x="7708392" y="2852928"/>
+            <a:ext cx="3282696" cy="228600"/>
           </a:xfrm>
           <a:prstGeom prst="rect">
             <a:avLst/>
@@ -5789,7 +5791,7 @@
               <a:buNone/>
             </a:pPr>
             <a:r>
-              <a:rPr lang="en-US" sz="1300" b="1" dirty="0">
+              <a:rPr lang="en-US" sz="1220" b="1" dirty="0">
                 <a:solidFill>
                   <a:srgbClr val="0068B7"/>
                 </a:solidFill>
@@ -5799,7 +5801,7 @@
               </a:rPr>
               <a:t>Concept checkpoints</a:t>
             </a:r>
-            <a:endParaRPr lang="en-US" sz="1300" dirty="0"/>
+            <a:endParaRPr lang="en-US" sz="1220" dirty="0"/>
           </a:p>
         </p:txBody>
       </p:sp>
@@ -5811,8 +5813,8 @@
         </p:nvSpPr>
         <p:spPr>
           <a:xfrm>
-            <a:off x="7818120" y="3182112"/>
-            <a:ext cx="3090672" cy="718718"/>
+            <a:off x="7726680" y="3182112"/>
+            <a:ext cx="3227832" cy="960120"/>
           </a:xfrm>
           <a:prstGeom prst="rect">
             <a:avLst/>
@@ -5830,7 +5832,7 @@
               <a:buNone/>
             </a:pPr>
             <a:r>
-              <a:rPr lang="en-US" sz="1220" dirty="0">
+              <a:rPr lang="en-US" sz="1140" dirty="0">
                 <a:solidFill>
                   <a:srgbClr val="17364A"/>
                 </a:solidFill>
@@ -5838,16 +5840,16 @@
                 <a:ea typeface="Aptos" pitchFamily="34" charset="-122"/>
                 <a:cs typeface="Aptos" pitchFamily="34" charset="-120"/>
               </a:rPr>
-              <a:t>What public health decision or workflow does this topic affect?</a:t>
-            </a:r>
-            <a:endParaRPr lang="en-US" sz="1220" dirty="0"/>
-          </a:p>
-          <a:p>
-            <a:pPr indent="0" marL="0">
-              <a:buNone/>
-            </a:pPr>
-            <a:r>
-              <a:rPr lang="en-US" sz="1220" dirty="0">
+              <a:t>What public health decision or workflow does this.</a:t>
+            </a:r>
+            <a:endParaRPr lang="en-US" sz="1140" dirty="0"/>
+          </a:p>
+          <a:p>
+            <a:pPr indent="0" marL="0">
+              <a:buNone/>
+            </a:pPr>
+            <a:r>
+              <a:rPr lang="en-US" sz="1140" dirty="0">
                 <a:solidFill>
                   <a:srgbClr val="17364A"/>
                 </a:solidFill>
@@ -5857,14 +5859,14 @@
               </a:rPr>
               <a:t>Who has authority to approve or pause the work?</a:t>
             </a:r>
-            <a:endParaRPr lang="en-US" sz="1220" dirty="0"/>
-          </a:p>
-          <a:p>
-            <a:pPr indent="0" marL="0">
-              <a:buNone/>
-            </a:pPr>
-            <a:r>
-              <a:rPr lang="en-US" sz="1220" dirty="0">
+            <a:endParaRPr lang="en-US" sz="1140" dirty="0"/>
+          </a:p>
+          <a:p>
+            <a:pPr indent="0" marL="0">
+              <a:buNone/>
+            </a:pPr>
+            <a:r>
+              <a:rPr lang="en-US" sz="1140" dirty="0">
                 <a:solidFill>
                   <a:srgbClr val="17364A"/>
                 </a:solidFill>
@@ -5872,9 +5874,9 @@
                 <a:ea typeface="Aptos" pitchFamily="34" charset="-122"/>
                 <a:cs typeface="Aptos" pitchFamily="34" charset="-120"/>
               </a:rPr>
-              <a:t>What evidence would show that the workflow is responsible and.</a:t>
-            </a:r>
-            <a:endParaRPr lang="en-US" sz="1220" dirty="0"/>
+              <a:t>What evidence would show that the workflow is.</a:t>
+            </a:r>
+            <a:endParaRPr lang="en-US" sz="1140" dirty="0"/>
           </a:p>
         </p:txBody>
       </p:sp>
@@ -5886,12 +5888,12 @@
         </p:nvSpPr>
         <p:spPr>
           <a:xfrm>
-            <a:off x="7635240" y="4184294"/>
-            <a:ext cx="3474720" cy="1466698"/>
+            <a:off x="7543800" y="4389120"/>
+            <a:ext cx="3611880" cy="1261872"/>
           </a:xfrm>
           <a:prstGeom prst="roundRect">
             <a:avLst>
-              <a:gd name="adj" fmla="val 7481"/>
+              <a:gd name="adj" fmla="val 8696"/>
             </a:avLst>
           </a:prstGeom>
           <a:solidFill>
@@ -5913,8 +5915,8 @@
         </p:nvSpPr>
         <p:spPr>
           <a:xfrm>
-            <a:off x="7799832" y="4330598"/>
-            <a:ext cx="3145536" cy="256032"/>
+            <a:off x="7708392" y="4517136"/>
+            <a:ext cx="3282696" cy="228600"/>
           </a:xfrm>
           <a:prstGeom prst="rect">
             <a:avLst/>
@@ -5930,7 +5932,7 @@
               <a:buNone/>
             </a:pPr>
             <a:r>
-              <a:rPr lang="en-US" sz="1300" b="1" dirty="0">
+              <a:rPr lang="en-US" sz="1220" b="1" dirty="0">
                 <a:solidFill>
                   <a:srgbClr val="0068B7"/>
                 </a:solidFill>
@@ -5940,7 +5942,7 @@
               </a:rPr>
               <a:t>Apply it</a:t>
             </a:r>
-            <a:endParaRPr lang="en-US" sz="1300" dirty="0"/>
+            <a:endParaRPr lang="en-US" sz="1220" dirty="0"/>
           </a:p>
         </p:txBody>
       </p:sp>
@@ -5952,8 +5954,8 @@
         </p:nvSpPr>
         <p:spPr>
           <a:xfrm>
-            <a:off x="7799832" y="4659782"/>
-            <a:ext cx="3145536" cy="899770"/>
+            <a:off x="7708392" y="4828032"/>
+            <a:ext cx="3282696" cy="749808"/>
           </a:xfrm>
           <a:prstGeom prst="rect">
             <a:avLst/>
@@ -5971,7 +5973,7 @@
               <a:buNone/>
             </a:pPr>
             <a:r>
-              <a:rPr lang="en-US" sz="1320" dirty="0">
+              <a:rPr lang="en-US" sz="1220" dirty="0">
                 <a:solidFill>
                   <a:srgbClr val="17364A"/>
                 </a:solidFill>
@@ -5979,9 +5981,9 @@
                 <a:ea typeface="Aptos" pitchFamily="34" charset="-122"/>
                 <a:cs typeface="Aptos" pitchFamily="34" charset="-120"/>
               </a:rPr>
-              <a:t>Connect the concept to public health purpose, responsible use, required safeguards, documentation, and the next action a department should take.</a:t>
-            </a:r>
-            <a:endParaRPr lang="en-US" sz="1320" dirty="0"/>
+              <a:t>Connect the concept to public health purpose, responsible use, required.</a:t>
+            </a:r>
+            <a:endParaRPr lang="en-US" sz="1220" dirty="0"/>
           </a:p>
         </p:txBody>
       </p:sp>
@@ -6272,8 +6274,8 @@
         </p:nvSpPr>
         <p:spPr>
           <a:xfrm>
-            <a:off x="868680" y="1508760"/>
-            <a:ext cx="6309360" cy="4160520"/>
+            <a:off x="822960" y="1463040"/>
+            <a:ext cx="6565392" cy="4343400"/>
           </a:xfrm>
           <a:prstGeom prst="rect">
             <a:avLst/>
@@ -6291,7 +6293,7 @@
               <a:buNone/>
             </a:pPr>
             <a:r>
-              <a:rPr lang="en-US" sz="2100" dirty="0">
+              <a:rPr lang="en-US" sz="1920" dirty="0">
                 <a:solidFill>
                   <a:srgbClr val="003A63"/>
                 </a:solidFill>
@@ -6301,14 +6303,14 @@
               </a:rPr>
               <a:t>• What equity, privacy, legal, security, or public trust risks require review?</a:t>
             </a:r>
-            <a:endParaRPr lang="en-US" sz="2100" dirty="0"/>
-          </a:p>
-          <a:p>
-            <a:pPr indent="0" marL="0">
-              <a:buNone/>
-            </a:pPr>
-            <a:r>
-              <a:rPr lang="en-US" sz="2100" dirty="0">
+            <a:endParaRPr lang="en-US" sz="1920" dirty="0"/>
+          </a:p>
+          <a:p>
+            <a:pPr indent="0" marL="0">
+              <a:buNone/>
+            </a:pPr>
+            <a:r>
+              <a:rPr lang="en-US" sz="1920" dirty="0">
                 <a:solidFill>
                   <a:srgbClr val="003A63"/>
                 </a:solidFill>
@@ -6318,7 +6320,7 @@
               </a:rPr>
               <a:t>• How will the agency know when the workflow needs to be revised?</a:t>
             </a:r>
-            <a:endParaRPr lang="en-US" sz="2100" dirty="0"/>
+            <a:endParaRPr lang="en-US" sz="1920" dirty="0"/>
           </a:p>
         </p:txBody>
       </p:sp>
@@ -6330,12 +6332,12 @@
         </p:nvSpPr>
         <p:spPr>
           <a:xfrm>
-            <a:off x="7635240" y="1325880"/>
-            <a:ext cx="3474720" cy="1207008"/>
+            <a:off x="7543800" y="1325880"/>
+            <a:ext cx="3611880" cy="1261872"/>
           </a:xfrm>
           <a:prstGeom prst="roundRect">
             <a:avLst>
-              <a:gd name="adj" fmla="val 9091"/>
+              <a:gd name="adj" fmla="val 8696"/>
             </a:avLst>
           </a:prstGeom>
           <a:solidFill>
@@ -6357,8 +6359,8 @@
         </p:nvSpPr>
         <p:spPr>
           <a:xfrm>
-            <a:off x="7799832" y="1472184"/>
-            <a:ext cx="3145536" cy="256032"/>
+            <a:off x="7708392" y="1453896"/>
+            <a:ext cx="3282696" cy="228600"/>
           </a:xfrm>
           <a:prstGeom prst="rect">
             <a:avLst/>
@@ -6374,7 +6376,7 @@
               <a:buNone/>
             </a:pPr>
             <a:r>
-              <a:rPr lang="en-US" sz="1300" b="1" dirty="0">
+              <a:rPr lang="en-US" sz="1220" b="1" dirty="0">
                 <a:solidFill>
                   <a:srgbClr val="0068B7"/>
                 </a:solidFill>
@@ -6384,7 +6386,7 @@
               </a:rPr>
               <a:t>Core concept</a:t>
             </a:r>
-            <a:endParaRPr lang="en-US" sz="1300" dirty="0"/>
+            <a:endParaRPr lang="en-US" sz="1220" dirty="0"/>
           </a:p>
         </p:txBody>
       </p:sp>
@@ -6396,8 +6398,8 @@
         </p:nvSpPr>
         <p:spPr>
           <a:xfrm>
-            <a:off x="7799832" y="1801368"/>
-            <a:ext cx="3145536" cy="640080"/>
+            <a:off x="7708392" y="1764792"/>
+            <a:ext cx="3282696" cy="749808"/>
           </a:xfrm>
           <a:prstGeom prst="rect">
             <a:avLst/>
@@ -6415,7 +6417,7 @@
               <a:buNone/>
             </a:pPr>
             <a:r>
-              <a:rPr lang="en-US" sz="1320" dirty="0">
+              <a:rPr lang="en-US" sz="1220" dirty="0">
                 <a:solidFill>
                   <a:srgbClr val="17364A"/>
                 </a:solidFill>
@@ -6425,7 +6427,7 @@
               </a:rPr>
               <a:t>What equity, privacy, legal, security, or public trust risks require review?</a:t>
             </a:r>
-            <a:endParaRPr lang="en-US" sz="1320" dirty="0"/>
+            <a:endParaRPr lang="en-US" sz="1220" dirty="0"/>
           </a:p>
         </p:txBody>
       </p:sp>
@@ -6437,12 +6439,12 @@
         </p:nvSpPr>
         <p:spPr>
           <a:xfrm>
-            <a:off x="7635240" y="2670048"/>
-            <a:ext cx="3474720" cy="1377086"/>
+            <a:off x="7543800" y="2724912"/>
+            <a:ext cx="3611880" cy="1527048"/>
           </a:xfrm>
           <a:prstGeom prst="roundRect">
             <a:avLst>
-              <a:gd name="adj" fmla="val 7968"/>
+              <a:gd name="adj" fmla="val 7186"/>
             </a:avLst>
           </a:prstGeom>
           <a:solidFill>
@@ -6464,8 +6466,8 @@
         </p:nvSpPr>
         <p:spPr>
           <a:xfrm>
-            <a:off x="7799832" y="2816352"/>
-            <a:ext cx="3145536" cy="256032"/>
+            <a:off x="7708392" y="2852928"/>
+            <a:ext cx="3282696" cy="228600"/>
           </a:xfrm>
           <a:prstGeom prst="rect">
             <a:avLst/>
@@ -6481,7 +6483,7 @@
               <a:buNone/>
             </a:pPr>
             <a:r>
-              <a:rPr lang="en-US" sz="1300" b="1" dirty="0">
+              <a:rPr lang="en-US" sz="1220" b="1" dirty="0">
                 <a:solidFill>
                   <a:srgbClr val="0068B7"/>
                 </a:solidFill>
@@ -6491,7 +6493,7 @@
               </a:rPr>
               <a:t>Concept checkpoints</a:t>
             </a:r>
-            <a:endParaRPr lang="en-US" sz="1300" dirty="0"/>
+            <a:endParaRPr lang="en-US" sz="1220" dirty="0"/>
           </a:p>
         </p:txBody>
       </p:sp>
@@ -6503,8 +6505,8 @@
         </p:nvSpPr>
         <p:spPr>
           <a:xfrm>
-            <a:off x="7818120" y="3182112"/>
-            <a:ext cx="3090672" cy="718718"/>
+            <a:off x="7726680" y="3182112"/>
+            <a:ext cx="3227832" cy="960120"/>
           </a:xfrm>
           <a:prstGeom prst="rect">
             <a:avLst/>
@@ -6522,7 +6524,7 @@
               <a:buNone/>
             </a:pPr>
             <a:r>
-              <a:rPr lang="en-US" sz="1220" dirty="0">
+              <a:rPr lang="en-US" sz="1140" dirty="0">
                 <a:solidFill>
                   <a:srgbClr val="17364A"/>
                 </a:solidFill>
@@ -6530,16 +6532,16 @@
                 <a:ea typeface="Aptos" pitchFamily="34" charset="-122"/>
                 <a:cs typeface="Aptos" pitchFamily="34" charset="-120"/>
               </a:rPr>
-              <a:t>What equity, privacy, legal, security, or public trust risks.</a:t>
-            </a:r>
-            <a:endParaRPr lang="en-US" sz="1220" dirty="0"/>
-          </a:p>
-          <a:p>
-            <a:pPr indent="0" marL="0">
-              <a:buNone/>
-            </a:pPr>
-            <a:r>
-              <a:rPr lang="en-US" sz="1220" dirty="0">
+              <a:t>What equity, privacy, legal, security, or public.</a:t>
+            </a:r>
+            <a:endParaRPr lang="en-US" sz="1140" dirty="0"/>
+          </a:p>
+          <a:p>
+            <a:pPr indent="0" marL="0">
+              <a:buNone/>
+            </a:pPr>
+            <a:r>
+              <a:rPr lang="en-US" sz="1140" dirty="0">
                 <a:solidFill>
                   <a:srgbClr val="17364A"/>
                 </a:solidFill>
@@ -6547,9 +6549,9 @@
                 <a:ea typeface="Aptos" pitchFamily="34" charset="-122"/>
                 <a:cs typeface="Aptos" pitchFamily="34" charset="-120"/>
               </a:rPr>
-              <a:t>How will the agency know when the workflow needs to be revised?</a:t>
-            </a:r>
-            <a:endParaRPr lang="en-US" sz="1220" dirty="0"/>
+              <a:t>How will the agency know when the workflow needs.</a:t>
+            </a:r>
+            <a:endParaRPr lang="en-US" sz="1140" dirty="0"/>
           </a:p>
         </p:txBody>
       </p:sp>
@@ -6561,12 +6563,12 @@
         </p:nvSpPr>
         <p:spPr>
           <a:xfrm>
-            <a:off x="7635240" y="4184294"/>
-            <a:ext cx="3474720" cy="1466698"/>
+            <a:off x="7543800" y="4389120"/>
+            <a:ext cx="3611880" cy="1261872"/>
           </a:xfrm>
           <a:prstGeom prst="roundRect">
             <a:avLst>
-              <a:gd name="adj" fmla="val 7481"/>
+              <a:gd name="adj" fmla="val 8696"/>
             </a:avLst>
           </a:prstGeom>
           <a:solidFill>
@@ -6588,8 +6590,8 @@
         </p:nvSpPr>
         <p:spPr>
           <a:xfrm>
-            <a:off x="7799832" y="4330598"/>
-            <a:ext cx="3145536" cy="256032"/>
+            <a:off x="7708392" y="4517136"/>
+            <a:ext cx="3282696" cy="228600"/>
           </a:xfrm>
           <a:prstGeom prst="rect">
             <a:avLst/>
@@ -6605,7 +6607,7 @@
               <a:buNone/>
             </a:pPr>
             <a:r>
-              <a:rPr lang="en-US" sz="1300" b="1" dirty="0">
+              <a:rPr lang="en-US" sz="1220" b="1" dirty="0">
                 <a:solidFill>
                   <a:srgbClr val="0068B7"/>
                 </a:solidFill>
@@ -6615,7 +6617,7 @@
               </a:rPr>
               <a:t>Apply it</a:t>
             </a:r>
-            <a:endParaRPr lang="en-US" sz="1300" dirty="0"/>
+            <a:endParaRPr lang="en-US" sz="1220" dirty="0"/>
           </a:p>
         </p:txBody>
       </p:sp>
@@ -6627,8 +6629,8 @@
         </p:nvSpPr>
         <p:spPr>
           <a:xfrm>
-            <a:off x="7799832" y="4659782"/>
-            <a:ext cx="3145536" cy="899770"/>
+            <a:off x="7708392" y="4828032"/>
+            <a:ext cx="3282696" cy="749808"/>
           </a:xfrm>
           <a:prstGeom prst="rect">
             <a:avLst/>
@@ -6646,7 +6648,7 @@
               <a:buNone/>
             </a:pPr>
             <a:r>
-              <a:rPr lang="en-US" sz="1320" dirty="0">
+              <a:rPr lang="en-US" sz="1220" dirty="0">
                 <a:solidFill>
                   <a:srgbClr val="17364A"/>
                 </a:solidFill>
@@ -6654,9 +6656,9 @@
                 <a:ea typeface="Aptos" pitchFamily="34" charset="-122"/>
                 <a:cs typeface="Aptos" pitchFamily="34" charset="-120"/>
               </a:rPr>
-              <a:t>Connect the concept to public health purpose, responsible use, required safeguards, documentation, and the next action a department should take.</a:t>
-            </a:r>
-            <a:endParaRPr lang="en-US" sz="1320" dirty="0"/>
+              <a:t>Connect the concept to public health purpose, responsible use, required.</a:t>
+            </a:r>
+            <a:endParaRPr lang="en-US" sz="1220" dirty="0"/>
           </a:p>
         </p:txBody>
       </p:sp>
@@ -6947,8 +6949,8 @@
         </p:nvSpPr>
         <p:spPr>
           <a:xfrm>
-            <a:off x="868680" y="1508760"/>
-            <a:ext cx="6309360" cy="4160520"/>
+            <a:off x="822960" y="1463040"/>
+            <a:ext cx="6565392" cy="4343400"/>
           </a:xfrm>
           <a:prstGeom prst="rect">
             <a:avLst/>
@@ -6966,7 +6968,7 @@
               <a:buNone/>
             </a:pPr>
             <a:r>
-              <a:rPr lang="en-US" sz="2100" dirty="0">
+              <a:rPr lang="en-US" sz="1920" dirty="0">
                 <a:solidFill>
                   <a:srgbClr val="003A63"/>
                 </a:solidFill>
@@ -6974,16 +6976,16 @@
                 <a:ea typeface="Aptos" pitchFamily="34" charset="-122"/>
                 <a:cs typeface="Aptos" pitchFamily="34" charset="-120"/>
               </a:rPr>
-              <a:t>• Create a practical ai for surveillance signal review and epidemiologic judgment artifact for.</a:t>
-            </a:r>
-            <a:endParaRPr lang="en-US" sz="2100" dirty="0"/>
-          </a:p>
-          <a:p>
-            <a:pPr indent="0" marL="0">
-              <a:buNone/>
-            </a:pPr>
-            <a:r>
-              <a:rPr lang="en-US" sz="2100" dirty="0">
+              <a:t>• Create a practical ai for surveillance signal review and epidemiologic.</a:t>
+            </a:r>
+            <a:endParaRPr lang="en-US" sz="1920" dirty="0"/>
+          </a:p>
+          <a:p>
+            <a:pPr indent="0" marL="0">
+              <a:buNone/>
+            </a:pPr>
+            <a:r>
+              <a:rPr lang="en-US" sz="1920" dirty="0">
                 <a:solidFill>
                   <a:srgbClr val="003A63"/>
                 </a:solidFill>
@@ -6991,9 +6993,9 @@
                 <a:ea typeface="Aptos" pitchFamily="34" charset="-122"/>
                 <a:cs typeface="Aptos" pitchFamily="34" charset="-120"/>
               </a:rPr>
-              <a:t>• The artifact should define the use case, affected roles, review criteria, safeguards,.</a:t>
-            </a:r>
-            <a:endParaRPr lang="en-US" sz="2100" dirty="0"/>
+              <a:t>• The artifact should define the use case, affected roles, review criteria,.</a:t>
+            </a:r>
+            <a:endParaRPr lang="en-US" sz="1920" dirty="0"/>
           </a:p>
         </p:txBody>
       </p:sp>
@@ -7005,12 +7007,12 @@
         </p:nvSpPr>
         <p:spPr>
           <a:xfrm>
-            <a:off x="7635240" y="1325880"/>
-            <a:ext cx="3474720" cy="1255471"/>
+            <a:off x="7543800" y="1325880"/>
+            <a:ext cx="3611880" cy="1261872"/>
           </a:xfrm>
           <a:prstGeom prst="roundRect">
             <a:avLst>
-              <a:gd name="adj" fmla="val 8740"/>
+              <a:gd name="adj" fmla="val 8696"/>
             </a:avLst>
           </a:prstGeom>
           <a:solidFill>
@@ -7032,8 +7034,8 @@
         </p:nvSpPr>
         <p:spPr>
           <a:xfrm>
-            <a:off x="7799832" y="1472184"/>
-            <a:ext cx="3145536" cy="256032"/>
+            <a:off x="7708392" y="1453896"/>
+            <a:ext cx="3282696" cy="228600"/>
           </a:xfrm>
           <a:prstGeom prst="rect">
             <a:avLst/>
@@ -7049,7 +7051,7 @@
               <a:buNone/>
             </a:pPr>
             <a:r>
-              <a:rPr lang="en-US" sz="1300" b="1" dirty="0">
+              <a:rPr lang="en-US" sz="1220" b="1" dirty="0">
                 <a:solidFill>
                   <a:srgbClr val="0068B7"/>
                 </a:solidFill>
@@ -7059,7 +7061,7 @@
               </a:rPr>
               <a:t>Practice focus</a:t>
             </a:r>
-            <a:endParaRPr lang="en-US" sz="1300" dirty="0"/>
+            <a:endParaRPr lang="en-US" sz="1220" dirty="0"/>
           </a:p>
         </p:txBody>
       </p:sp>
@@ -7071,8 +7073,8 @@
         </p:nvSpPr>
         <p:spPr>
           <a:xfrm>
-            <a:off x="7799832" y="1801368"/>
-            <a:ext cx="3145536" cy="688543"/>
+            <a:off x="7708392" y="1764792"/>
+            <a:ext cx="3282696" cy="749808"/>
           </a:xfrm>
           <a:prstGeom prst="rect">
             <a:avLst/>
@@ -7090,7 +7092,7 @@
               <a:buNone/>
             </a:pPr>
             <a:r>
-              <a:rPr lang="en-US" sz="1320" dirty="0">
+              <a:rPr lang="en-US" sz="1220" dirty="0">
                 <a:solidFill>
                   <a:srgbClr val="17364A"/>
                 </a:solidFill>
@@ -7098,9 +7100,9 @@
                 <a:ea typeface="Aptos" pitchFamily="34" charset="-122"/>
                 <a:cs typeface="Aptos" pitchFamily="34" charset="-120"/>
               </a:rPr>
-              <a:t>Create a practical ai for surveillance signal review and epidemiologic judgment artifact for one.</a:t>
-            </a:r>
-            <a:endParaRPr lang="en-US" sz="1320" dirty="0"/>
+              <a:t>Create a practical ai for surveillance signal review and epidemiologic judgment.</a:t>
+            </a:r>
+            <a:endParaRPr lang="en-US" sz="1220" dirty="0"/>
           </a:p>
         </p:txBody>
       </p:sp>
@@ -7112,12 +7114,12 @@
         </p:nvSpPr>
         <p:spPr>
           <a:xfrm>
-            <a:off x="7635240" y="2718511"/>
-            <a:ext cx="3474720" cy="1328623"/>
+            <a:off x="7543800" y="2724912"/>
+            <a:ext cx="3611880" cy="1527048"/>
           </a:xfrm>
           <a:prstGeom prst="roundRect">
             <a:avLst>
-              <a:gd name="adj" fmla="val 8259"/>
+              <a:gd name="adj" fmla="val 7186"/>
             </a:avLst>
           </a:prstGeom>
           <a:solidFill>
@@ -7139,8 +7141,8 @@
         </p:nvSpPr>
         <p:spPr>
           <a:xfrm>
-            <a:off x="7799832" y="2864815"/>
-            <a:ext cx="3145536" cy="256032"/>
+            <a:off x="7708392" y="2852928"/>
+            <a:ext cx="3282696" cy="228600"/>
           </a:xfrm>
           <a:prstGeom prst="rect">
             <a:avLst/>
@@ -7156,7 +7158,7 @@
               <a:buNone/>
             </a:pPr>
             <a:r>
-              <a:rPr lang="en-US" sz="1300" b="1" dirty="0">
+              <a:rPr lang="en-US" sz="1220" b="1" dirty="0">
                 <a:solidFill>
                   <a:srgbClr val="0068B7"/>
                 </a:solidFill>
@@ -7166,7 +7168,7 @@
               </a:rPr>
               <a:t>Concept checkpoints</a:t>
             </a:r>
-            <a:endParaRPr lang="en-US" sz="1300" dirty="0"/>
+            <a:endParaRPr lang="en-US" sz="1220" dirty="0"/>
           </a:p>
         </p:txBody>
       </p:sp>
@@ -7178,8 +7180,8 @@
         </p:nvSpPr>
         <p:spPr>
           <a:xfrm>
-            <a:off x="7818120" y="3230575"/>
-            <a:ext cx="3090672" cy="670255"/>
+            <a:off x="7726680" y="3182112"/>
+            <a:ext cx="3227832" cy="960120"/>
           </a:xfrm>
           <a:prstGeom prst="rect">
             <a:avLst/>
@@ -7197,7 +7199,7 @@
               <a:buNone/>
             </a:pPr>
             <a:r>
-              <a:rPr lang="en-US" sz="1220" dirty="0">
+              <a:rPr lang="en-US" sz="1140" dirty="0">
                 <a:solidFill>
                   <a:srgbClr val="17364A"/>
                 </a:solidFill>
@@ -7205,16 +7207,16 @@
                 <a:ea typeface="Aptos" pitchFamily="34" charset="-122"/>
                 <a:cs typeface="Aptos" pitchFamily="34" charset="-120"/>
               </a:rPr>
-              <a:t>Create a practical ai for surveillance signal review and.</a:t>
-            </a:r>
-            <a:endParaRPr lang="en-US" sz="1220" dirty="0"/>
-          </a:p>
-          <a:p>
-            <a:pPr indent="0" marL="0">
-              <a:buNone/>
-            </a:pPr>
-            <a:r>
-              <a:rPr lang="en-US" sz="1220" dirty="0">
+              <a:t>Create a practical ai for surveillance signal.</a:t>
+            </a:r>
+            <a:endParaRPr lang="en-US" sz="1140" dirty="0"/>
+          </a:p>
+          <a:p>
+            <a:pPr indent="0" marL="0">
+              <a:buNone/>
+            </a:pPr>
+            <a:r>
+              <a:rPr lang="en-US" sz="1140" dirty="0">
                 <a:solidFill>
                   <a:srgbClr val="17364A"/>
                 </a:solidFill>
@@ -7222,9 +7224,9 @@
                 <a:ea typeface="Aptos" pitchFamily="34" charset="-122"/>
                 <a:cs typeface="Aptos" pitchFamily="34" charset="-120"/>
               </a:rPr>
-              <a:t>The artifact should define the use case, affected roles, review.</a:t>
-            </a:r>
-            <a:endParaRPr lang="en-US" sz="1220" dirty="0"/>
+              <a:t>The artifact should define the use case, affected.</a:t>
+            </a:r>
+            <a:endParaRPr lang="en-US" sz="1140" dirty="0"/>
           </a:p>
         </p:txBody>
       </p:sp>
@@ -7236,12 +7238,12 @@
         </p:nvSpPr>
         <p:spPr>
           <a:xfrm>
-            <a:off x="7635240" y="4184294"/>
-            <a:ext cx="3474720" cy="1466698"/>
+            <a:off x="7543800" y="4389120"/>
+            <a:ext cx="3611880" cy="1261872"/>
           </a:xfrm>
           <a:prstGeom prst="roundRect">
             <a:avLst>
-              <a:gd name="adj" fmla="val 7481"/>
+              <a:gd name="adj" fmla="val 8696"/>
             </a:avLst>
           </a:prstGeom>
           <a:solidFill>
@@ -7263,8 +7265,8 @@
         </p:nvSpPr>
         <p:spPr>
           <a:xfrm>
-            <a:off x="7799832" y="4330598"/>
-            <a:ext cx="3145536" cy="256032"/>
+            <a:off x="7708392" y="4517136"/>
+            <a:ext cx="3282696" cy="228600"/>
           </a:xfrm>
           <a:prstGeom prst="rect">
             <a:avLst/>
@@ -7280,7 +7282,7 @@
               <a:buNone/>
             </a:pPr>
             <a:r>
-              <a:rPr lang="en-US" sz="1300" b="1" dirty="0">
+              <a:rPr lang="en-US" sz="1220" b="1" dirty="0">
                 <a:solidFill>
                   <a:srgbClr val="0068B7"/>
                 </a:solidFill>
@@ -7290,7 +7292,7 @@
               </a:rPr>
               <a:t>What to produce</a:t>
             </a:r>
-            <a:endParaRPr lang="en-US" sz="1300" dirty="0"/>
+            <a:endParaRPr lang="en-US" sz="1220" dirty="0"/>
           </a:p>
         </p:txBody>
       </p:sp>
@@ -7302,8 +7304,8 @@
         </p:nvSpPr>
         <p:spPr>
           <a:xfrm>
-            <a:off x="7799832" y="4659782"/>
-            <a:ext cx="3145536" cy="899770"/>
+            <a:off x="7708392" y="4828032"/>
+            <a:ext cx="3282696" cy="749808"/>
           </a:xfrm>
           <a:prstGeom prst="rect">
             <a:avLst/>
@@ -7321,7 +7323,7 @@
               <a:buNone/>
             </a:pPr>
             <a:r>
-              <a:rPr lang="en-US" sz="1320" dirty="0">
+              <a:rPr lang="en-US" sz="1220" dirty="0">
                 <a:solidFill>
                   <a:srgbClr val="17364A"/>
                 </a:solidFill>
@@ -7329,9 +7331,9 @@
                 <a:ea typeface="Aptos" pitchFamily="34" charset="-122"/>
                 <a:cs typeface="Aptos" pitchFamily="34" charset="-120"/>
               </a:rPr>
-              <a:t>Use the assignment to test whether you can explain the concept, apply it to a realistic public health situation, and identify what would need review before the work moves forward.</a:t>
-            </a:r>
-            <a:endParaRPr lang="en-US" sz="1320" dirty="0"/>
+              <a:t>Use the assignment to test whether you can explain the concept, apply it to a.</a:t>
+            </a:r>
+            <a:endParaRPr lang="en-US" sz="1220" dirty="0"/>
           </a:p>
         </p:txBody>
       </p:sp>
@@ -7622,8 +7624,8 @@
         </p:nvSpPr>
         <p:spPr>
           <a:xfrm>
-            <a:off x="868680" y="1508760"/>
-            <a:ext cx="6309360" cy="4160520"/>
+            <a:off x="822960" y="1463040"/>
+            <a:ext cx="6565392" cy="4343400"/>
           </a:xfrm>
           <a:prstGeom prst="rect">
             <a:avLst/>
@@ -7641,7 +7643,7 @@
               <a:buNone/>
             </a:pPr>
             <a:r>
-              <a:rPr lang="en-US" sz="2100" dirty="0">
+              <a:rPr lang="en-US" sz="1920" dirty="0">
                 <a:solidFill>
                   <a:srgbClr val="003A63"/>
                 </a:solidFill>
@@ -7651,14 +7653,14 @@
               </a:rPr>
               <a:t>• AI for Surveillance Signal Review and Epidemiologic Judgment artifact</a:t>
             </a:r>
-            <a:endParaRPr lang="en-US" sz="2100" dirty="0"/>
-          </a:p>
-          <a:p>
-            <a:pPr indent="0" marL="0">
-              <a:buNone/>
-            </a:pPr>
-            <a:r>
-              <a:rPr lang="en-US" sz="2100" dirty="0">
+            <a:endParaRPr lang="en-US" sz="1920" dirty="0"/>
+          </a:p>
+          <a:p>
+            <a:pPr indent="0" marL="0">
+              <a:buNone/>
+            </a:pPr>
+            <a:r>
+              <a:rPr lang="en-US" sz="1920" dirty="0">
                 <a:solidFill>
                   <a:srgbClr val="003A63"/>
                 </a:solidFill>
@@ -7668,14 +7670,14 @@
               </a:rPr>
               <a:t>• Role and responsibility table</a:t>
             </a:r>
-            <a:endParaRPr lang="en-US" sz="2100" dirty="0"/>
-          </a:p>
-          <a:p>
-            <a:pPr indent="0" marL="0">
-              <a:buNone/>
-            </a:pPr>
-            <a:r>
-              <a:rPr lang="en-US" sz="2100" dirty="0">
+            <a:endParaRPr lang="en-US" sz="1920" dirty="0"/>
+          </a:p>
+          <a:p>
+            <a:pPr indent="0" marL="0">
+              <a:buNone/>
+            </a:pPr>
+            <a:r>
+              <a:rPr lang="en-US" sz="1920" dirty="0">
                 <a:solidFill>
                   <a:srgbClr val="003A63"/>
                 </a:solidFill>
@@ -7685,7 +7687,7 @@
               </a:rPr>
               <a:t>• Risk and safeguard summary</a:t>
             </a:r>
-            <a:endParaRPr lang="en-US" sz="2100" dirty="0"/>
+            <a:endParaRPr lang="en-US" sz="1920" dirty="0"/>
           </a:p>
         </p:txBody>
       </p:sp>
@@ -7697,12 +7699,12 @@
         </p:nvSpPr>
         <p:spPr>
           <a:xfrm>
-            <a:off x="7635240" y="1325880"/>
-            <a:ext cx="3474720" cy="1207008"/>
+            <a:off x="7543800" y="1325880"/>
+            <a:ext cx="3611880" cy="1261872"/>
           </a:xfrm>
           <a:prstGeom prst="roundRect">
             <a:avLst>
-              <a:gd name="adj" fmla="val 9091"/>
+              <a:gd name="adj" fmla="val 8696"/>
             </a:avLst>
           </a:prstGeom>
           <a:solidFill>
@@ -7724,8 +7726,8 @@
         </p:nvSpPr>
         <p:spPr>
           <a:xfrm>
-            <a:off x="7799832" y="1472184"/>
-            <a:ext cx="3145536" cy="256032"/>
+            <a:off x="7708392" y="1453896"/>
+            <a:ext cx="3282696" cy="228600"/>
           </a:xfrm>
           <a:prstGeom prst="rect">
             <a:avLst/>
@@ -7741,7 +7743,7 @@
               <a:buNone/>
             </a:pPr>
             <a:r>
-              <a:rPr lang="en-US" sz="1300" b="1" dirty="0">
+              <a:rPr lang="en-US" sz="1220" b="1" dirty="0">
                 <a:solidFill>
                   <a:srgbClr val="0068B7"/>
                 </a:solidFill>
@@ -7751,7 +7753,7 @@
               </a:rPr>
               <a:t>Core concept</a:t>
             </a:r>
-            <a:endParaRPr lang="en-US" sz="1300" dirty="0"/>
+            <a:endParaRPr lang="en-US" sz="1220" dirty="0"/>
           </a:p>
         </p:txBody>
       </p:sp>
@@ -7763,8 +7765,8 @@
         </p:nvSpPr>
         <p:spPr>
           <a:xfrm>
-            <a:off x="7799832" y="1801368"/>
-            <a:ext cx="3145536" cy="640080"/>
+            <a:off x="7708392" y="1764792"/>
+            <a:ext cx="3282696" cy="749808"/>
           </a:xfrm>
           <a:prstGeom prst="rect">
             <a:avLst/>
@@ -7782,7 +7784,7 @@
               <a:buNone/>
             </a:pPr>
             <a:r>
-              <a:rPr lang="en-US" sz="1320" dirty="0">
+              <a:rPr lang="en-US" sz="1220" dirty="0">
                 <a:solidFill>
                   <a:srgbClr val="17364A"/>
                 </a:solidFill>
@@ -7792,7 +7794,7 @@
               </a:rPr>
               <a:t>AI for Surveillance Signal Review and Epidemiologic Judgment artifact</a:t>
             </a:r>
-            <a:endParaRPr lang="en-US" sz="1320" dirty="0"/>
+            <a:endParaRPr lang="en-US" sz="1220" dirty="0"/>
           </a:p>
         </p:txBody>
       </p:sp>
@@ -7804,12 +7806,12 @@
         </p:nvSpPr>
         <p:spPr>
           <a:xfrm>
-            <a:off x="7635240" y="2670048"/>
-            <a:ext cx="3474720" cy="1377086"/>
+            <a:off x="7543800" y="2724912"/>
+            <a:ext cx="3611880" cy="1527048"/>
           </a:xfrm>
           <a:prstGeom prst="roundRect">
             <a:avLst>
-              <a:gd name="adj" fmla="val 7968"/>
+              <a:gd name="adj" fmla="val 7186"/>
             </a:avLst>
           </a:prstGeom>
           <a:solidFill>
@@ -7831,8 +7833,8 @@
         </p:nvSpPr>
         <p:spPr>
           <a:xfrm>
-            <a:off x="7799832" y="2816352"/>
-            <a:ext cx="3145536" cy="256032"/>
+            <a:off x="7708392" y="2852928"/>
+            <a:ext cx="3282696" cy="228600"/>
           </a:xfrm>
           <a:prstGeom prst="rect">
             <a:avLst/>
@@ -7848,7 +7850,7 @@
               <a:buNone/>
             </a:pPr>
             <a:r>
-              <a:rPr lang="en-US" sz="1300" b="1" dirty="0">
+              <a:rPr lang="en-US" sz="1220" b="1" dirty="0">
                 <a:solidFill>
                   <a:srgbClr val="0068B7"/>
                 </a:solidFill>
@@ -7858,7 +7860,7 @@
               </a:rPr>
               <a:t>Concept checkpoints</a:t>
             </a:r>
-            <a:endParaRPr lang="en-US" sz="1300" dirty="0"/>
+            <a:endParaRPr lang="en-US" sz="1220" dirty="0"/>
           </a:p>
         </p:txBody>
       </p:sp>
@@ -7870,8 +7872,8 @@
         </p:nvSpPr>
         <p:spPr>
           <a:xfrm>
-            <a:off x="7818120" y="3182112"/>
-            <a:ext cx="3090672" cy="718718"/>
+            <a:off x="7726680" y="3182112"/>
+            <a:ext cx="3227832" cy="960120"/>
           </a:xfrm>
           <a:prstGeom prst="rect">
             <a:avLst/>
@@ -7889,7 +7891,7 @@
               <a:buNone/>
             </a:pPr>
             <a:r>
-              <a:rPr lang="en-US" sz="1220" dirty="0">
+              <a:rPr lang="en-US" sz="1140" dirty="0">
                 <a:solidFill>
                   <a:srgbClr val="17364A"/>
                 </a:solidFill>
@@ -7897,16 +7899,16 @@
                 <a:ea typeface="Aptos" pitchFamily="34" charset="-122"/>
                 <a:cs typeface="Aptos" pitchFamily="34" charset="-120"/>
               </a:rPr>
-              <a:t>AI for Surveillance Signal Review and Epidemiologic Judgment.</a:t>
-            </a:r>
-            <a:endParaRPr lang="en-US" sz="1220" dirty="0"/>
-          </a:p>
-          <a:p>
-            <a:pPr indent="0" marL="0">
-              <a:buNone/>
-            </a:pPr>
-            <a:r>
-              <a:rPr lang="en-US" sz="1220" dirty="0">
+              <a:t>AI for Surveillance Signal Review and.</a:t>
+            </a:r>
+            <a:endParaRPr lang="en-US" sz="1140" dirty="0"/>
+          </a:p>
+          <a:p>
+            <a:pPr indent="0" marL="0">
+              <a:buNone/>
+            </a:pPr>
+            <a:r>
+              <a:rPr lang="en-US" sz="1140" dirty="0">
                 <a:solidFill>
                   <a:srgbClr val="17364A"/>
                 </a:solidFill>
@@ -7916,14 +7918,14 @@
               </a:rPr>
               <a:t>Role and responsibility table</a:t>
             </a:r>
-            <a:endParaRPr lang="en-US" sz="1220" dirty="0"/>
-          </a:p>
-          <a:p>
-            <a:pPr indent="0" marL="0">
-              <a:buNone/>
-            </a:pPr>
-            <a:r>
-              <a:rPr lang="en-US" sz="1220" dirty="0">
+            <a:endParaRPr lang="en-US" sz="1140" dirty="0"/>
+          </a:p>
+          <a:p>
+            <a:pPr indent="0" marL="0">
+              <a:buNone/>
+            </a:pPr>
+            <a:r>
+              <a:rPr lang="en-US" sz="1140" dirty="0">
                 <a:solidFill>
                   <a:srgbClr val="17364A"/>
                 </a:solidFill>
@@ -7933,7 +7935,7 @@
               </a:rPr>
               <a:t>Risk and safeguard summary</a:t>
             </a:r>
-            <a:endParaRPr lang="en-US" sz="1220" dirty="0"/>
+            <a:endParaRPr lang="en-US" sz="1140" dirty="0"/>
           </a:p>
         </p:txBody>
       </p:sp>
@@ -7945,12 +7947,12 @@
         </p:nvSpPr>
         <p:spPr>
           <a:xfrm>
-            <a:off x="7635240" y="4184294"/>
-            <a:ext cx="3474720" cy="1466698"/>
+            <a:off x="7543800" y="4389120"/>
+            <a:ext cx="3611880" cy="1261872"/>
           </a:xfrm>
           <a:prstGeom prst="roundRect">
             <a:avLst>
-              <a:gd name="adj" fmla="val 7481"/>
+              <a:gd name="adj" fmla="val 8696"/>
             </a:avLst>
           </a:prstGeom>
           <a:solidFill>
@@ -7972,8 +7974,8 @@
         </p:nvSpPr>
         <p:spPr>
           <a:xfrm>
-            <a:off x="7799832" y="4330598"/>
-            <a:ext cx="3145536" cy="256032"/>
+            <a:off x="7708392" y="4517136"/>
+            <a:ext cx="3282696" cy="228600"/>
           </a:xfrm>
           <a:prstGeom prst="rect">
             <a:avLst/>
@@ -7989,7 +7991,7 @@
               <a:buNone/>
             </a:pPr>
             <a:r>
-              <a:rPr lang="en-US" sz="1300" b="1" dirty="0">
+              <a:rPr lang="en-US" sz="1220" b="1" dirty="0">
                 <a:solidFill>
                   <a:srgbClr val="0068B7"/>
                 </a:solidFill>
@@ -7999,7 +8001,7 @@
               </a:rPr>
               <a:t>Apply it</a:t>
             </a:r>
-            <a:endParaRPr lang="en-US" sz="1300" dirty="0"/>
+            <a:endParaRPr lang="en-US" sz="1220" dirty="0"/>
           </a:p>
         </p:txBody>
       </p:sp>
@@ -8011,8 +8013,8 @@
         </p:nvSpPr>
         <p:spPr>
           <a:xfrm>
-            <a:off x="7799832" y="4659782"/>
-            <a:ext cx="3145536" cy="899770"/>
+            <a:off x="7708392" y="4828032"/>
+            <a:ext cx="3282696" cy="749808"/>
           </a:xfrm>
           <a:prstGeom prst="rect">
             <a:avLst/>
@@ -8030,7 +8032,7 @@
               <a:buNone/>
             </a:pPr>
             <a:r>
-              <a:rPr lang="en-US" sz="1320" dirty="0">
+              <a:rPr lang="en-US" sz="1220" dirty="0">
                 <a:solidFill>
                   <a:srgbClr val="17364A"/>
                 </a:solidFill>
@@ -8038,9 +8040,9 @@
                 <a:ea typeface="Aptos" pitchFamily="34" charset="-122"/>
                 <a:cs typeface="Aptos" pitchFamily="34" charset="-120"/>
               </a:rPr>
-              <a:t>Connect the concept to public health purpose, responsible use, required safeguards, documentation, and the next action a department should take.</a:t>
-            </a:r>
-            <a:endParaRPr lang="en-US" sz="1320" dirty="0"/>
+              <a:t>Connect the concept to public health purpose, responsible use, required.</a:t>
+            </a:r>
+            <a:endParaRPr lang="en-US" sz="1220" dirty="0"/>
           </a:p>
         </p:txBody>
       </p:sp>
@@ -8331,8 +8333,8 @@
         </p:nvSpPr>
         <p:spPr>
           <a:xfrm>
-            <a:off x="868680" y="1508760"/>
-            <a:ext cx="6309360" cy="4160520"/>
+            <a:off x="822960" y="1463040"/>
+            <a:ext cx="6565392" cy="4343400"/>
           </a:xfrm>
           <a:prstGeom prst="rect">
             <a:avLst/>
@@ -8350,7 +8352,7 @@
               <a:buNone/>
             </a:pPr>
             <a:r>
-              <a:rPr lang="en-US" sz="2100" dirty="0">
+              <a:rPr lang="en-US" sz="1920" dirty="0">
                 <a:solidFill>
                   <a:srgbClr val="003A63"/>
                 </a:solidFill>
@@ -8360,14 +8362,14 @@
               </a:rPr>
               <a:t>• Escalation and monitoring plan</a:t>
             </a:r>
-            <a:endParaRPr lang="en-US" sz="2100" dirty="0"/>
-          </a:p>
-          <a:p>
-            <a:pPr indent="0" marL="0">
-              <a:buNone/>
-            </a:pPr>
-            <a:r>
-              <a:rPr lang="en-US" sz="2100" dirty="0">
+            <a:endParaRPr lang="en-US" sz="1920" dirty="0"/>
+          </a:p>
+          <a:p>
+            <a:pPr indent="0" marL="0">
+              <a:buNone/>
+            </a:pPr>
+            <a:r>
+              <a:rPr lang="en-US" sz="1920" dirty="0">
                 <a:solidFill>
                   <a:srgbClr val="003A63"/>
                 </a:solidFill>
@@ -8377,7 +8379,7 @@
               </a:rPr>
               <a:t>• Approval or review note</a:t>
             </a:r>
-            <a:endParaRPr lang="en-US" sz="2100" dirty="0"/>
+            <a:endParaRPr lang="en-US" sz="1920" dirty="0"/>
           </a:p>
         </p:txBody>
       </p:sp>
@@ -8389,12 +8391,12 @@
         </p:nvSpPr>
         <p:spPr>
           <a:xfrm>
-            <a:off x="7635240" y="1325880"/>
-            <a:ext cx="3474720" cy="1207008"/>
+            <a:off x="7543800" y="1325880"/>
+            <a:ext cx="3611880" cy="1261872"/>
           </a:xfrm>
           <a:prstGeom prst="roundRect">
             <a:avLst>
-              <a:gd name="adj" fmla="val 9091"/>
+              <a:gd name="adj" fmla="val 8696"/>
             </a:avLst>
           </a:prstGeom>
           <a:solidFill>
@@ -8416,8 +8418,8 @@
         </p:nvSpPr>
         <p:spPr>
           <a:xfrm>
-            <a:off x="7799832" y="1472184"/>
-            <a:ext cx="3145536" cy="256032"/>
+            <a:off x="7708392" y="1453896"/>
+            <a:ext cx="3282696" cy="228600"/>
           </a:xfrm>
           <a:prstGeom prst="rect">
             <a:avLst/>
@@ -8433,7 +8435,7 @@
               <a:buNone/>
             </a:pPr>
             <a:r>
-              <a:rPr lang="en-US" sz="1300" b="1" dirty="0">
+              <a:rPr lang="en-US" sz="1220" b="1" dirty="0">
                 <a:solidFill>
                   <a:srgbClr val="0068B7"/>
                 </a:solidFill>
@@ -8443,7 +8445,7 @@
               </a:rPr>
               <a:t>Core concept</a:t>
             </a:r>
-            <a:endParaRPr lang="en-US" sz="1300" dirty="0"/>
+            <a:endParaRPr lang="en-US" sz="1220" dirty="0"/>
           </a:p>
         </p:txBody>
       </p:sp>
@@ -8455,8 +8457,8 @@
         </p:nvSpPr>
         <p:spPr>
           <a:xfrm>
-            <a:off x="7799832" y="1801368"/>
-            <a:ext cx="3145536" cy="640080"/>
+            <a:off x="7708392" y="1764792"/>
+            <a:ext cx="3282696" cy="749808"/>
           </a:xfrm>
           <a:prstGeom prst="rect">
             <a:avLst/>
@@ -8474,7 +8476,7 @@
               <a:buNone/>
             </a:pPr>
             <a:r>
-              <a:rPr lang="en-US" sz="1320" dirty="0">
+              <a:rPr lang="en-US" sz="1220" dirty="0">
                 <a:solidFill>
                   <a:srgbClr val="17364A"/>
                 </a:solidFill>
@@ -8484,7 +8486,7 @@
               </a:rPr>
               <a:t>Escalation and monitoring plan</a:t>
             </a:r>
-            <a:endParaRPr lang="en-US" sz="1320" dirty="0"/>
+            <a:endParaRPr lang="en-US" sz="1220" dirty="0"/>
           </a:p>
         </p:txBody>
       </p:sp>
@@ -8496,12 +8498,12 @@
         </p:nvSpPr>
         <p:spPr>
           <a:xfrm>
-            <a:off x="7635240" y="2670048"/>
-            <a:ext cx="3474720" cy="1377086"/>
+            <a:off x="7543800" y="2724912"/>
+            <a:ext cx="3611880" cy="1527048"/>
           </a:xfrm>
           <a:prstGeom prst="roundRect">
             <a:avLst>
-              <a:gd name="adj" fmla="val 7968"/>
+              <a:gd name="adj" fmla="val 7186"/>
             </a:avLst>
           </a:prstGeom>
           <a:solidFill>
@@ -8523,8 +8525,8 @@
         </p:nvSpPr>
         <p:spPr>
           <a:xfrm>
-            <a:off x="7799832" y="2816352"/>
-            <a:ext cx="3145536" cy="256032"/>
+            <a:off x="7708392" y="2852928"/>
+            <a:ext cx="3282696" cy="228600"/>
           </a:xfrm>
           <a:prstGeom prst="rect">
             <a:avLst/>
@@ -8540,7 +8542,7 @@
               <a:buNone/>
             </a:pPr>
             <a:r>
-              <a:rPr lang="en-US" sz="1300" b="1" dirty="0">
+              <a:rPr lang="en-US" sz="1220" b="1" dirty="0">
                 <a:solidFill>
                   <a:srgbClr val="0068B7"/>
                 </a:solidFill>
@@ -8550,7 +8552,7 @@
               </a:rPr>
               <a:t>Concept checkpoints</a:t>
             </a:r>
-            <a:endParaRPr lang="en-US" sz="1300" dirty="0"/>
+            <a:endParaRPr lang="en-US" sz="1220" dirty="0"/>
           </a:p>
         </p:txBody>
       </p:sp>
@@ -8562,8 +8564,8 @@
         </p:nvSpPr>
         <p:spPr>
           <a:xfrm>
-            <a:off x="7818120" y="3182112"/>
-            <a:ext cx="3090672" cy="718718"/>
+            <a:off x="7726680" y="3182112"/>
+            <a:ext cx="3227832" cy="960120"/>
           </a:xfrm>
           <a:prstGeom prst="rect">
             <a:avLst/>
@@ -8581,7 +8583,7 @@
               <a:buNone/>
             </a:pPr>
             <a:r>
-              <a:rPr lang="en-US" sz="1220" dirty="0">
+              <a:rPr lang="en-US" sz="1140" dirty="0">
                 <a:solidFill>
                   <a:srgbClr val="17364A"/>
                 </a:solidFill>
@@ -8591,14 +8593,14 @@
               </a:rPr>
               <a:t>Escalation and monitoring plan</a:t>
             </a:r>
-            <a:endParaRPr lang="en-US" sz="1220" dirty="0"/>
-          </a:p>
-          <a:p>
-            <a:pPr indent="0" marL="0">
-              <a:buNone/>
-            </a:pPr>
-            <a:r>
-              <a:rPr lang="en-US" sz="1220" dirty="0">
+            <a:endParaRPr lang="en-US" sz="1140" dirty="0"/>
+          </a:p>
+          <a:p>
+            <a:pPr indent="0" marL="0">
+              <a:buNone/>
+            </a:pPr>
+            <a:r>
+              <a:rPr lang="en-US" sz="1140" dirty="0">
                 <a:solidFill>
                   <a:srgbClr val="17364A"/>
                 </a:solidFill>
@@ -8608,7 +8610,7 @@
               </a:rPr>
               <a:t>Approval or review note</a:t>
             </a:r>
-            <a:endParaRPr lang="en-US" sz="1220" dirty="0"/>
+            <a:endParaRPr lang="en-US" sz="1140" dirty="0"/>
           </a:p>
         </p:txBody>
       </p:sp>
@@ -8620,12 +8622,12 @@
         </p:nvSpPr>
         <p:spPr>
           <a:xfrm>
-            <a:off x="7635240" y="4184294"/>
-            <a:ext cx="3474720" cy="1466698"/>
+            <a:off x="7543800" y="4389120"/>
+            <a:ext cx="3611880" cy="1261872"/>
           </a:xfrm>
           <a:prstGeom prst="roundRect">
             <a:avLst>
-              <a:gd name="adj" fmla="val 7481"/>
+              <a:gd name="adj" fmla="val 8696"/>
             </a:avLst>
           </a:prstGeom>
           <a:solidFill>
@@ -8647,8 +8649,8 @@
         </p:nvSpPr>
         <p:spPr>
           <a:xfrm>
-            <a:off x="7799832" y="4330598"/>
-            <a:ext cx="3145536" cy="256032"/>
+            <a:off x="7708392" y="4517136"/>
+            <a:ext cx="3282696" cy="228600"/>
           </a:xfrm>
           <a:prstGeom prst="rect">
             <a:avLst/>
@@ -8664,7 +8666,7 @@
               <a:buNone/>
             </a:pPr>
             <a:r>
-              <a:rPr lang="en-US" sz="1300" b="1" dirty="0">
+              <a:rPr lang="en-US" sz="1220" b="1" dirty="0">
                 <a:solidFill>
                   <a:srgbClr val="0068B7"/>
                 </a:solidFill>
@@ -8674,7 +8676,7 @@
               </a:rPr>
               <a:t>Apply it</a:t>
             </a:r>
-            <a:endParaRPr lang="en-US" sz="1300" dirty="0"/>
+            <a:endParaRPr lang="en-US" sz="1220" dirty="0"/>
           </a:p>
         </p:txBody>
       </p:sp>
@@ -8686,8 +8688,8 @@
         </p:nvSpPr>
         <p:spPr>
           <a:xfrm>
-            <a:off x="7799832" y="4659782"/>
-            <a:ext cx="3145536" cy="899770"/>
+            <a:off x="7708392" y="4828032"/>
+            <a:ext cx="3282696" cy="749808"/>
           </a:xfrm>
           <a:prstGeom prst="rect">
             <a:avLst/>
@@ -8705,7 +8707,7 @@
               <a:buNone/>
             </a:pPr>
             <a:r>
-              <a:rPr lang="en-US" sz="1320" dirty="0">
+              <a:rPr lang="en-US" sz="1220" dirty="0">
                 <a:solidFill>
                   <a:srgbClr val="17364A"/>
                 </a:solidFill>
@@ -8713,9 +8715,9 @@
                 <a:ea typeface="Aptos" pitchFamily="34" charset="-122"/>
                 <a:cs typeface="Aptos" pitchFamily="34" charset="-120"/>
               </a:rPr>
-              <a:t>Connect the concept to public health purpose, responsible use, required safeguards, documentation, and the next action a department should take.</a:t>
-            </a:r>
-            <a:endParaRPr lang="en-US" sz="1320" dirty="0"/>
+              <a:t>Connect the concept to public health purpose, responsible use, required.</a:t>
+            </a:r>
+            <a:endParaRPr lang="en-US" sz="1220" dirty="0"/>
           </a:p>
         </p:txBody>
       </p:sp>
@@ -9006,8 +9008,8 @@
         </p:nvSpPr>
         <p:spPr>
           <a:xfrm>
-            <a:off x="868680" y="1508760"/>
-            <a:ext cx="6309360" cy="4160520"/>
+            <a:off x="822960" y="1463040"/>
+            <a:ext cx="6565392" cy="4343400"/>
           </a:xfrm>
           <a:prstGeom prst="rect">
             <a:avLst/>
@@ -9025,7 +9027,7 @@
               <a:buNone/>
             </a:pPr>
             <a:r>
-              <a:rPr lang="en-US" sz="2100" dirty="0">
+              <a:rPr lang="en-US" sz="1920" dirty="0">
                 <a:solidFill>
                   <a:srgbClr val="003A63"/>
                 </a:solidFill>
@@ -9035,14 +9037,14 @@
               </a:rPr>
               <a:t>• AI for Surveillance Signal Review and Epidemiologic Judgment artifact</a:t>
             </a:r>
-            <a:endParaRPr lang="en-US" sz="2100" dirty="0"/>
-          </a:p>
-          <a:p>
-            <a:pPr indent="0" marL="0">
-              <a:buNone/>
-            </a:pPr>
-            <a:r>
-              <a:rPr lang="en-US" sz="2100" dirty="0">
+            <a:endParaRPr lang="en-US" sz="1920" dirty="0"/>
+          </a:p>
+          <a:p>
+            <a:pPr indent="0" marL="0">
+              <a:buNone/>
+            </a:pPr>
+            <a:r>
+              <a:rPr lang="en-US" sz="1920" dirty="0">
                 <a:solidFill>
                   <a:srgbClr val="003A63"/>
                 </a:solidFill>
@@ -9052,14 +9054,14 @@
               </a:rPr>
               <a:t>• Role and responsibility table</a:t>
             </a:r>
-            <a:endParaRPr lang="en-US" sz="2100" dirty="0"/>
-          </a:p>
-          <a:p>
-            <a:pPr indent="0" marL="0">
-              <a:buNone/>
-            </a:pPr>
-            <a:r>
-              <a:rPr lang="en-US" sz="2100" dirty="0">
+            <a:endParaRPr lang="en-US" sz="1920" dirty="0"/>
+          </a:p>
+          <a:p>
+            <a:pPr indent="0" marL="0">
+              <a:buNone/>
+            </a:pPr>
+            <a:r>
+              <a:rPr lang="en-US" sz="1920" dirty="0">
                 <a:solidFill>
                   <a:srgbClr val="003A63"/>
                 </a:solidFill>
@@ -9069,7 +9071,7 @@
               </a:rPr>
               <a:t>• Risk and safeguard summary</a:t>
             </a:r>
-            <a:endParaRPr lang="en-US" sz="2100" dirty="0"/>
+            <a:endParaRPr lang="en-US" sz="1920" dirty="0"/>
           </a:p>
         </p:txBody>
       </p:sp>
@@ -9081,12 +9083,12 @@
         </p:nvSpPr>
         <p:spPr>
           <a:xfrm>
-            <a:off x="7635240" y="1325880"/>
-            <a:ext cx="3474720" cy="1207008"/>
+            <a:off x="7543800" y="1325880"/>
+            <a:ext cx="3611880" cy="1261872"/>
           </a:xfrm>
           <a:prstGeom prst="roundRect">
             <a:avLst>
-              <a:gd name="adj" fmla="val 9091"/>
+              <a:gd name="adj" fmla="val 8696"/>
             </a:avLst>
           </a:prstGeom>
           <a:solidFill>
@@ -9108,8 +9110,8 @@
         </p:nvSpPr>
         <p:spPr>
           <a:xfrm>
-            <a:off x="7799832" y="1472184"/>
-            <a:ext cx="3145536" cy="256032"/>
+            <a:off x="7708392" y="1453896"/>
+            <a:ext cx="3282696" cy="228600"/>
           </a:xfrm>
           <a:prstGeom prst="rect">
             <a:avLst/>
@@ -9125,7 +9127,7 @@
               <a:buNone/>
             </a:pPr>
             <a:r>
-              <a:rPr lang="en-US" sz="1300" b="1" dirty="0">
+              <a:rPr lang="en-US" sz="1220" b="1" dirty="0">
                 <a:solidFill>
                   <a:srgbClr val="0068B7"/>
                 </a:solidFill>
@@ -9135,7 +9137,7 @@
               </a:rPr>
               <a:t>Practice focus</a:t>
             </a:r>
-            <a:endParaRPr lang="en-US" sz="1300" dirty="0"/>
+            <a:endParaRPr lang="en-US" sz="1220" dirty="0"/>
           </a:p>
         </p:txBody>
       </p:sp>
@@ -9147,8 +9149,8 @@
         </p:nvSpPr>
         <p:spPr>
           <a:xfrm>
-            <a:off x="7799832" y="1801368"/>
-            <a:ext cx="3145536" cy="640080"/>
+            <a:off x="7708392" y="1764792"/>
+            <a:ext cx="3282696" cy="749808"/>
           </a:xfrm>
           <a:prstGeom prst="rect">
             <a:avLst/>
@@ -9166,7 +9168,7 @@
               <a:buNone/>
             </a:pPr>
             <a:r>
-              <a:rPr lang="en-US" sz="1320" dirty="0">
+              <a:rPr lang="en-US" sz="1220" dirty="0">
                 <a:solidFill>
                   <a:srgbClr val="17364A"/>
                 </a:solidFill>
@@ -9176,7 +9178,7 @@
               </a:rPr>
               <a:t>AI for Surveillance Signal Review and Epidemiologic Judgment artifact</a:t>
             </a:r>
-            <a:endParaRPr lang="en-US" sz="1320" dirty="0"/>
+            <a:endParaRPr lang="en-US" sz="1220" dirty="0"/>
           </a:p>
         </p:txBody>
       </p:sp>
@@ -9188,12 +9190,12 @@
         </p:nvSpPr>
         <p:spPr>
           <a:xfrm>
-            <a:off x="7635240" y="2670048"/>
-            <a:ext cx="3474720" cy="1377086"/>
+            <a:off x="7543800" y="2724912"/>
+            <a:ext cx="3611880" cy="1527048"/>
           </a:xfrm>
           <a:prstGeom prst="roundRect">
             <a:avLst>
-              <a:gd name="adj" fmla="val 7968"/>
+              <a:gd name="adj" fmla="val 7186"/>
             </a:avLst>
           </a:prstGeom>
           <a:solidFill>
@@ -9215,8 +9217,8 @@
         </p:nvSpPr>
         <p:spPr>
           <a:xfrm>
-            <a:off x="7799832" y="2816352"/>
-            <a:ext cx="3145536" cy="256032"/>
+            <a:off x="7708392" y="2852928"/>
+            <a:ext cx="3282696" cy="228600"/>
           </a:xfrm>
           <a:prstGeom prst="rect">
             <a:avLst/>
@@ -9232,7 +9234,7 @@
               <a:buNone/>
             </a:pPr>
             <a:r>
-              <a:rPr lang="en-US" sz="1300" b="1" dirty="0">
+              <a:rPr lang="en-US" sz="1220" b="1" dirty="0">
                 <a:solidFill>
                   <a:srgbClr val="0068B7"/>
                 </a:solidFill>
@@ -9242,7 +9244,7 @@
               </a:rPr>
               <a:t>Concept checkpoints</a:t>
             </a:r>
-            <a:endParaRPr lang="en-US" sz="1300" dirty="0"/>
+            <a:endParaRPr lang="en-US" sz="1220" dirty="0"/>
           </a:p>
         </p:txBody>
       </p:sp>
@@ -9254,8 +9256,8 @@
         </p:nvSpPr>
         <p:spPr>
           <a:xfrm>
-            <a:off x="7818120" y="3182112"/>
-            <a:ext cx="3090672" cy="718718"/>
+            <a:off x="7726680" y="3182112"/>
+            <a:ext cx="3227832" cy="960120"/>
           </a:xfrm>
           <a:prstGeom prst="rect">
             <a:avLst/>
@@ -9273,7 +9275,7 @@
               <a:buNone/>
             </a:pPr>
             <a:r>
-              <a:rPr lang="en-US" sz="1220" dirty="0">
+              <a:rPr lang="en-US" sz="1140" dirty="0">
                 <a:solidFill>
                   <a:srgbClr val="17364A"/>
                 </a:solidFill>
@@ -9283,14 +9285,14 @@
               </a:rPr>
               <a:t>Escalation and monitoring plan</a:t>
             </a:r>
-            <a:endParaRPr lang="en-US" sz="1220" dirty="0"/>
-          </a:p>
-          <a:p>
-            <a:pPr indent="0" marL="0">
-              <a:buNone/>
-            </a:pPr>
-            <a:r>
-              <a:rPr lang="en-US" sz="1220" dirty="0">
+            <a:endParaRPr lang="en-US" sz="1140" dirty="0"/>
+          </a:p>
+          <a:p>
+            <a:pPr indent="0" marL="0">
+              <a:buNone/>
+            </a:pPr>
+            <a:r>
+              <a:rPr lang="en-US" sz="1140" dirty="0">
                 <a:solidFill>
                   <a:srgbClr val="17364A"/>
                 </a:solidFill>
@@ -9300,7 +9302,7 @@
               </a:rPr>
               <a:t>Approval or review note</a:t>
             </a:r>
-            <a:endParaRPr lang="en-US" sz="1220" dirty="0"/>
+            <a:endParaRPr lang="en-US" sz="1140" dirty="0"/>
           </a:p>
         </p:txBody>
       </p:sp>
@@ -9312,12 +9314,12 @@
         </p:nvSpPr>
         <p:spPr>
           <a:xfrm>
-            <a:off x="7635240" y="4184294"/>
-            <a:ext cx="3474720" cy="1466698"/>
+            <a:off x="7543800" y="4389120"/>
+            <a:ext cx="3611880" cy="1261872"/>
           </a:xfrm>
           <a:prstGeom prst="roundRect">
             <a:avLst>
-              <a:gd name="adj" fmla="val 7481"/>
+              <a:gd name="adj" fmla="val 8696"/>
             </a:avLst>
           </a:prstGeom>
           <a:solidFill>
@@ -9339,8 +9341,8 @@
         </p:nvSpPr>
         <p:spPr>
           <a:xfrm>
-            <a:off x="7799832" y="4330598"/>
-            <a:ext cx="3145536" cy="256032"/>
+            <a:off x="7708392" y="4517136"/>
+            <a:ext cx="3282696" cy="228600"/>
           </a:xfrm>
           <a:prstGeom prst="rect">
             <a:avLst/>
@@ -9356,7 +9358,7 @@
               <a:buNone/>
             </a:pPr>
             <a:r>
-              <a:rPr lang="en-US" sz="1300" b="1" dirty="0">
+              <a:rPr lang="en-US" sz="1220" b="1" dirty="0">
                 <a:solidFill>
                   <a:srgbClr val="0068B7"/>
                 </a:solidFill>
@@ -9366,7 +9368,7 @@
               </a:rPr>
               <a:t>What to produce</a:t>
             </a:r>
-            <a:endParaRPr lang="en-US" sz="1300" dirty="0"/>
+            <a:endParaRPr lang="en-US" sz="1220" dirty="0"/>
           </a:p>
         </p:txBody>
       </p:sp>
@@ -9378,8 +9380,8 @@
         </p:nvSpPr>
         <p:spPr>
           <a:xfrm>
-            <a:off x="7799832" y="4659782"/>
-            <a:ext cx="3145536" cy="899770"/>
+            <a:off x="7708392" y="4828032"/>
+            <a:ext cx="3282696" cy="749808"/>
           </a:xfrm>
           <a:prstGeom prst="rect">
             <a:avLst/>
@@ -9397,7 +9399,7 @@
               <a:buNone/>
             </a:pPr>
             <a:r>
-              <a:rPr lang="en-US" sz="1320" dirty="0">
+              <a:rPr lang="en-US" sz="1220" dirty="0">
                 <a:solidFill>
                   <a:srgbClr val="17364A"/>
                 </a:solidFill>
@@ -9405,9 +9407,9 @@
                 <a:ea typeface="Aptos" pitchFamily="34" charset="-122"/>
                 <a:cs typeface="Aptos" pitchFamily="34" charset="-120"/>
               </a:rPr>
-              <a:t>Use the assignment to test whether you can explain the concept, apply it to a realistic public health situation, and identify what would need review before the work moves forward.</a:t>
-            </a:r>
-            <a:endParaRPr lang="en-US" sz="1320" dirty="0"/>
+              <a:t>Use the assignment to test whether you can explain the concept, apply it to a.</a:t>
+            </a:r>
+            <a:endParaRPr lang="en-US" sz="1220" dirty="0"/>
           </a:p>
         </p:txBody>
       </p:sp>
@@ -9698,8 +9700,8 @@
         </p:nvSpPr>
         <p:spPr>
           <a:xfrm>
-            <a:off x="868680" y="1508760"/>
-            <a:ext cx="6309360" cy="4160520"/>
+            <a:off x="822960" y="1463040"/>
+            <a:ext cx="6565392" cy="4343400"/>
           </a:xfrm>
           <a:prstGeom prst="rect">
             <a:avLst/>
@@ -9717,7 +9719,7 @@
               <a:buNone/>
             </a:pPr>
             <a:r>
-              <a:rPr lang="en-US" sz="2100" dirty="0">
+              <a:rPr lang="en-US" sz="1920" dirty="0">
                 <a:solidFill>
                   <a:srgbClr val="003A63"/>
                 </a:solidFill>
@@ -9725,16 +9727,16 @@
                 <a:ea typeface="Aptos" pitchFamily="34" charset="-122"/>
                 <a:cs typeface="Aptos" pitchFamily="34" charset="-120"/>
               </a:rPr>
-              <a:t>• 1. What is the strongest evidence that ai for surveillance signal review and epidemiologic.</a:t>
-            </a:r>
-            <a:endParaRPr lang="en-US" sz="2100" dirty="0"/>
-          </a:p>
-          <a:p>
-            <a:pPr indent="0" marL="0">
-              <a:buNone/>
-            </a:pPr>
-            <a:r>
-              <a:rPr lang="en-US" sz="2100" dirty="0">
+              <a:t>• 1. What is the strongest evidence that ai for surveillance signal review and.</a:t>
+            </a:r>
+            <a:endParaRPr lang="en-US" sz="1920" dirty="0"/>
+          </a:p>
+          <a:p>
+            <a:pPr indent="0" marL="0">
+              <a:buNone/>
+            </a:pPr>
+            <a:r>
+              <a:rPr lang="en-US" sz="1920" dirty="0">
                 <a:solidFill>
                   <a:srgbClr val="003A63"/>
                 </a:solidFill>
@@ -9744,14 +9746,14 @@
               </a:rPr>
               <a:t>• 2. What is the best reason to assign an accountability owner?</a:t>
             </a:r>
-            <a:endParaRPr lang="en-US" sz="2100" dirty="0"/>
-          </a:p>
-          <a:p>
-            <a:pPr indent="0" marL="0">
-              <a:buNone/>
-            </a:pPr>
-            <a:r>
-              <a:rPr lang="en-US" sz="2100" dirty="0">
+            <a:endParaRPr lang="en-US" sz="1920" dirty="0"/>
+          </a:p>
+          <a:p>
+            <a:pPr indent="0" marL="0">
+              <a:buNone/>
+            </a:pPr>
+            <a:r>
+              <a:rPr lang="en-US" sz="1920" dirty="0">
                 <a:solidFill>
                   <a:srgbClr val="003A63"/>
                 </a:solidFill>
@@ -9761,7 +9763,7 @@
               </a:rPr>
               <a:t>• 3. When should an AI-supported workflow be escalated for review?</a:t>
             </a:r>
-            <a:endParaRPr lang="en-US" sz="2100" dirty="0"/>
+            <a:endParaRPr lang="en-US" sz="1920" dirty="0"/>
           </a:p>
         </p:txBody>
       </p:sp>
@@ -9773,12 +9775,12 @@
         </p:nvSpPr>
         <p:spPr>
           <a:xfrm>
-            <a:off x="7635240" y="1325880"/>
-            <a:ext cx="3474720" cy="1255471"/>
+            <a:off x="7543800" y="1325880"/>
+            <a:ext cx="3611880" cy="1261872"/>
           </a:xfrm>
           <a:prstGeom prst="roundRect">
             <a:avLst>
-              <a:gd name="adj" fmla="val 8740"/>
+              <a:gd name="adj" fmla="val 8696"/>
             </a:avLst>
           </a:prstGeom>
           <a:solidFill>
@@ -9800,8 +9802,8 @@
         </p:nvSpPr>
         <p:spPr>
           <a:xfrm>
-            <a:off x="7799832" y="1472184"/>
-            <a:ext cx="3145536" cy="256032"/>
+            <a:off x="7708392" y="1453896"/>
+            <a:ext cx="3282696" cy="228600"/>
           </a:xfrm>
           <a:prstGeom prst="rect">
             <a:avLst/>
@@ -9817,7 +9819,7 @@
               <a:buNone/>
             </a:pPr>
             <a:r>
-              <a:rPr lang="en-US" sz="1300" b="1" dirty="0">
+              <a:rPr lang="en-US" sz="1220" b="1" dirty="0">
                 <a:solidFill>
                   <a:srgbClr val="0068B7"/>
                 </a:solidFill>
@@ -9827,7 +9829,7 @@
               </a:rPr>
               <a:t>Practice focus</a:t>
             </a:r>
-            <a:endParaRPr lang="en-US" sz="1300" dirty="0"/>
+            <a:endParaRPr lang="en-US" sz="1220" dirty="0"/>
           </a:p>
         </p:txBody>
       </p:sp>
@@ -9839,8 +9841,8 @@
         </p:nvSpPr>
         <p:spPr>
           <a:xfrm>
-            <a:off x="7799832" y="1801368"/>
-            <a:ext cx="3145536" cy="688543"/>
+            <a:off x="7708392" y="1764792"/>
+            <a:ext cx="3282696" cy="749808"/>
           </a:xfrm>
           <a:prstGeom prst="rect">
             <a:avLst/>
@@ -9858,7 +9860,7 @@
               <a:buNone/>
             </a:pPr>
             <a:r>
-              <a:rPr lang="en-US" sz="1320" dirty="0">
+              <a:rPr lang="en-US" sz="1220" dirty="0">
                 <a:solidFill>
                   <a:srgbClr val="17364A"/>
                 </a:solidFill>
@@ -9866,9 +9868,9 @@
                 <a:ea typeface="Aptos" pitchFamily="34" charset="-122"/>
                 <a:cs typeface="Aptos" pitchFamily="34" charset="-120"/>
               </a:rPr>
-              <a:t>1. What is the strongest evidence that ai for surveillance signal review and epidemiologic judgment has.</a:t>
-            </a:r>
-            <a:endParaRPr lang="en-US" sz="1320" dirty="0"/>
+              <a:t>1. What is the strongest evidence that ai for surveillance signal review and.</a:t>
+            </a:r>
+            <a:endParaRPr lang="en-US" sz="1220" dirty="0"/>
           </a:p>
         </p:txBody>
       </p:sp>
@@ -9880,12 +9882,12 @@
         </p:nvSpPr>
         <p:spPr>
           <a:xfrm>
-            <a:off x="7635240" y="2718511"/>
-            <a:ext cx="3474720" cy="1328623"/>
+            <a:off x="7543800" y="2724912"/>
+            <a:ext cx="3611880" cy="1527048"/>
           </a:xfrm>
           <a:prstGeom prst="roundRect">
             <a:avLst>
-              <a:gd name="adj" fmla="val 8259"/>
+              <a:gd name="adj" fmla="val 7186"/>
             </a:avLst>
           </a:prstGeom>
           <a:solidFill>
@@ -9907,8 +9909,8 @@
         </p:nvSpPr>
         <p:spPr>
           <a:xfrm>
-            <a:off x="7799832" y="2864815"/>
-            <a:ext cx="3145536" cy="256032"/>
+            <a:off x="7708392" y="2852928"/>
+            <a:ext cx="3282696" cy="228600"/>
           </a:xfrm>
           <a:prstGeom prst="rect">
             <a:avLst/>
@@ -9924,7 +9926,7 @@
               <a:buNone/>
             </a:pPr>
             <a:r>
-              <a:rPr lang="en-US" sz="1300" b="1" dirty="0">
+              <a:rPr lang="en-US" sz="1220" b="1" dirty="0">
                 <a:solidFill>
                   <a:srgbClr val="0068B7"/>
                 </a:solidFill>
@@ -9934,7 +9936,7 @@
               </a:rPr>
               <a:t>Concept checkpoints</a:t>
             </a:r>
-            <a:endParaRPr lang="en-US" sz="1300" dirty="0"/>
+            <a:endParaRPr lang="en-US" sz="1220" dirty="0"/>
           </a:p>
         </p:txBody>
       </p:sp>
@@ -9946,8 +9948,8 @@
         </p:nvSpPr>
         <p:spPr>
           <a:xfrm>
-            <a:off x="7818120" y="3230575"/>
-            <a:ext cx="3090672" cy="670255"/>
+            <a:off x="7726680" y="3182112"/>
+            <a:ext cx="3227832" cy="960120"/>
           </a:xfrm>
           <a:prstGeom prst="rect">
             <a:avLst/>
@@ -9965,7 +9967,7 @@
               <a:buNone/>
             </a:pPr>
             <a:r>
-              <a:rPr lang="en-US" sz="1220" dirty="0">
+              <a:rPr lang="en-US" sz="1140" dirty="0">
                 <a:solidFill>
                   <a:srgbClr val="17364A"/>
                 </a:solidFill>
@@ -9975,14 +9977,14 @@
               </a:rPr>
               <a:t>1.</a:t>
             </a:r>
-            <a:endParaRPr lang="en-US" sz="1220" dirty="0"/>
-          </a:p>
-          <a:p>
-            <a:pPr indent="0" marL="0">
-              <a:buNone/>
-            </a:pPr>
-            <a:r>
-              <a:rPr lang="en-US" sz="1220" dirty="0">
+            <a:endParaRPr lang="en-US" sz="1140" dirty="0"/>
+          </a:p>
+          <a:p>
+            <a:pPr indent="0" marL="0">
+              <a:buNone/>
+            </a:pPr>
+            <a:r>
+              <a:rPr lang="en-US" sz="1140" dirty="0">
                 <a:solidFill>
                   <a:srgbClr val="17364A"/>
                 </a:solidFill>
@@ -9990,16 +9992,16 @@
                 <a:ea typeface="Aptos" pitchFamily="34" charset="-122"/>
                 <a:cs typeface="Aptos" pitchFamily="34" charset="-120"/>
               </a:rPr>
-              <a:t>What is the strongest evidence that ai for surveillance signal.</a:t>
-            </a:r>
-            <a:endParaRPr lang="en-US" sz="1220" dirty="0"/>
-          </a:p>
-          <a:p>
-            <a:pPr indent="0" marL="0">
-              <a:buNone/>
-            </a:pPr>
-            <a:r>
-              <a:rPr lang="en-US" sz="1220" dirty="0">
+              <a:t>What is the strongest evidence that ai for.</a:t>
+            </a:r>
+            <a:endParaRPr lang="en-US" sz="1140" dirty="0"/>
+          </a:p>
+          <a:p>
+            <a:pPr indent="0" marL="0">
+              <a:buNone/>
+            </a:pPr>
+            <a:r>
+              <a:rPr lang="en-US" sz="1140" dirty="0">
                 <a:solidFill>
                   <a:srgbClr val="17364A"/>
                 </a:solidFill>
@@ -10009,7 +10011,7 @@
               </a:rPr>
               <a:t>2.</a:t>
             </a:r>
-            <a:endParaRPr lang="en-US" sz="1220" dirty="0"/>
+            <a:endParaRPr lang="en-US" sz="1140" dirty="0"/>
           </a:p>
         </p:txBody>
       </p:sp>
@@ -10021,12 +10023,12 @@
         </p:nvSpPr>
         <p:spPr>
           <a:xfrm>
-            <a:off x="7635240" y="4184294"/>
-            <a:ext cx="3474720" cy="1466698"/>
+            <a:off x="7543800" y="4389120"/>
+            <a:ext cx="3611880" cy="1261872"/>
           </a:xfrm>
           <a:prstGeom prst="roundRect">
             <a:avLst>
-              <a:gd name="adj" fmla="val 7481"/>
+              <a:gd name="adj" fmla="val 8696"/>
             </a:avLst>
           </a:prstGeom>
           <a:solidFill>
@@ -10048,8 +10050,8 @@
         </p:nvSpPr>
         <p:spPr>
           <a:xfrm>
-            <a:off x="7799832" y="4330598"/>
-            <a:ext cx="3145536" cy="256032"/>
+            <a:off x="7708392" y="4517136"/>
+            <a:ext cx="3282696" cy="228600"/>
           </a:xfrm>
           <a:prstGeom prst="rect">
             <a:avLst/>
@@ -10065,7 +10067,7 @@
               <a:buNone/>
             </a:pPr>
             <a:r>
-              <a:rPr lang="en-US" sz="1300" b="1" dirty="0">
+              <a:rPr lang="en-US" sz="1220" b="1" dirty="0">
                 <a:solidFill>
                   <a:srgbClr val="0068B7"/>
                 </a:solidFill>
@@ -10075,7 +10077,7 @@
               </a:rPr>
               <a:t>What to produce</a:t>
             </a:r>
-            <a:endParaRPr lang="en-US" sz="1300" dirty="0"/>
+            <a:endParaRPr lang="en-US" sz="1220" dirty="0"/>
           </a:p>
         </p:txBody>
       </p:sp>
@@ -10087,8 +10089,8 @@
         </p:nvSpPr>
         <p:spPr>
           <a:xfrm>
-            <a:off x="7799832" y="4659782"/>
-            <a:ext cx="3145536" cy="899770"/>
+            <a:off x="7708392" y="4828032"/>
+            <a:ext cx="3282696" cy="749808"/>
           </a:xfrm>
           <a:prstGeom prst="rect">
             <a:avLst/>
@@ -10106,7 +10108,7 @@
               <a:buNone/>
             </a:pPr>
             <a:r>
-              <a:rPr lang="en-US" sz="1320" dirty="0">
+              <a:rPr lang="en-US" sz="1220" dirty="0">
                 <a:solidFill>
                   <a:srgbClr val="17364A"/>
                 </a:solidFill>
@@ -10114,9 +10116,9 @@
                 <a:ea typeface="Aptos" pitchFamily="34" charset="-122"/>
                 <a:cs typeface="Aptos" pitchFamily="34" charset="-120"/>
               </a:rPr>
-              <a:t>Use the assignment to test whether you can explain the concept, apply it to a realistic public health situation, and identify what would need review before the work moves forward.</a:t>
-            </a:r>
-            <a:endParaRPr lang="en-US" sz="1320" dirty="0"/>
+              <a:t>Use the assignment to test whether you can explain the concept, apply it to a.</a:t>
+            </a:r>
+            <a:endParaRPr lang="en-US" sz="1220" dirty="0"/>
           </a:p>
         </p:txBody>
       </p:sp>
@@ -10434,7 +10436,7 @@
                 <a:ea typeface="Aptos" pitchFamily="34" charset="-122"/>
                 <a:cs typeface="Aptos" pitchFamily="34" charset="-120"/>
               </a:rPr>
-              <a:t>• This module focuses on using AI to support signal detection while preserving epidemiologic.</a:t>
+              <a:t>• This module focuses on using AI to support signal detection while preserving.</a:t>
             </a:r>
             <a:endParaRPr lang="en-US" sz="2100" dirty="0"/>
           </a:p>
@@ -10451,7 +10453,7 @@
                 <a:ea typeface="Aptos" pitchFamily="34" charset="-122"/>
                 <a:cs typeface="Aptos" pitchFamily="34" charset="-120"/>
               </a:rPr>
-              <a:t>• It is designed for public health staff who must translate responsible AI principles into.</a:t>
+              <a:t>• It is designed for public health staff who must translate responsible AI.</a:t>
             </a:r>
             <a:endParaRPr lang="en-US" sz="2100" dirty="0"/>
           </a:p>
@@ -10468,7 +10470,7 @@
                 <a:ea typeface="Aptos" pitchFamily="34" charset="-122"/>
                 <a:cs typeface="Aptos" pitchFamily="34" charset="-120"/>
               </a:rPr>
-              <a:t>• The module helps learners move beyond general awareness by producing a practical artifact that.</a:t>
+              <a:t>• The module helps learners move beyond general awareness by producing a.</a:t>
             </a:r>
             <a:endParaRPr lang="en-US" sz="2100" dirty="0"/>
           </a:p>
@@ -10509,8 +10511,8 @@
         </p:nvSpPr>
         <p:spPr>
           <a:xfrm>
-            <a:off x="8074152" y="1563624"/>
-            <a:ext cx="2825496" cy="256032"/>
+            <a:off x="8074152" y="1545336"/>
+            <a:ext cx="2825496" cy="228600"/>
           </a:xfrm>
           <a:prstGeom prst="rect">
             <a:avLst/>
@@ -10526,7 +10528,7 @@
               <a:buNone/>
             </a:pPr>
             <a:r>
-              <a:rPr lang="en-US" sz="1300" b="1" dirty="0">
+              <a:rPr lang="en-US" sz="1220" b="1" dirty="0">
                 <a:solidFill>
                   <a:srgbClr val="0068B7"/>
                 </a:solidFill>
@@ -10536,7 +10538,7 @@
               </a:rPr>
               <a:t>Module details</a:t>
             </a:r>
-            <a:endParaRPr lang="en-US" sz="1300" dirty="0"/>
+            <a:endParaRPr lang="en-US" sz="1220" dirty="0"/>
           </a:p>
         </p:txBody>
       </p:sp>
@@ -10548,8 +10550,8 @@
         </p:nvSpPr>
         <p:spPr>
           <a:xfrm>
-            <a:off x="8074152" y="1892808"/>
-            <a:ext cx="2825496" cy="1353312"/>
+            <a:off x="8074152" y="1856232"/>
+            <a:ext cx="2825496" cy="1408176"/>
           </a:xfrm>
           <a:prstGeom prst="rect">
             <a:avLst/>
@@ -10567,7 +10569,7 @@
               <a:buNone/>
             </a:pPr>
             <a:r>
-              <a:rPr lang="en-US" sz="1320" dirty="0">
+              <a:rPr lang="en-US" sz="1220" dirty="0">
                 <a:solidFill>
                   <a:srgbClr val="17364A"/>
                 </a:solidFill>
@@ -10575,9 +10577,9 @@
                 <a:ea typeface="Aptos" pitchFamily="34" charset="-122"/>
                 <a:cs typeface="Aptos" pitchFamily="34" charset="-120"/>
               </a:rPr>
-              <a:t>Level: intermediate/practitioner Primary track: Epidemiology Role-Based Track Appears in tracks: epidemiology, analytics-modeling, operations-data-quality, governance-security</a:t>
-            </a:r>
-            <a:endParaRPr lang="en-US" sz="1320" dirty="0"/>
+              <a:t>Level: intermediate/practitioner Primary track: Epidemiology Role-Based Track.</a:t>
+            </a:r>
+            <a:endParaRPr lang="en-US" sz="1220" dirty="0"/>
           </a:p>
         </p:txBody>
       </p:sp>
@@ -10616,8 +10618,8 @@
         </p:nvSpPr>
         <p:spPr>
           <a:xfrm>
-            <a:off x="8074152" y="3822192"/>
-            <a:ext cx="2825496" cy="256032"/>
+            <a:off x="8074152" y="3803904"/>
+            <a:ext cx="2825496" cy="228600"/>
           </a:xfrm>
           <a:prstGeom prst="rect">
             <a:avLst/>
@@ -10633,7 +10635,7 @@
               <a:buNone/>
             </a:pPr>
             <a:r>
-              <a:rPr lang="en-US" sz="1300" b="1" dirty="0">
+              <a:rPr lang="en-US" sz="1220" b="1" dirty="0">
                 <a:solidFill>
                   <a:srgbClr val="0068B7"/>
                 </a:solidFill>
@@ -10643,7 +10645,7 @@
               </a:rPr>
               <a:t>Learning sequence</a:t>
             </a:r>
-            <a:endParaRPr lang="en-US" sz="1300" dirty="0"/>
+            <a:endParaRPr lang="en-US" sz="1220" dirty="0"/>
           </a:p>
         </p:txBody>
       </p:sp>
@@ -10655,8 +10657,8 @@
         </p:nvSpPr>
         <p:spPr>
           <a:xfrm>
-            <a:off x="8092440" y="4187952"/>
-            <a:ext cx="2770632" cy="1033272"/>
+            <a:off x="8092440" y="4133088"/>
+            <a:ext cx="2770632" cy="1124712"/>
           </a:xfrm>
           <a:prstGeom prst="rect">
             <a:avLst/>
@@ -10674,7 +10676,7 @@
               <a:buNone/>
             </a:pPr>
             <a:r>
-              <a:rPr lang="en-US" sz="1220" dirty="0">
+              <a:rPr lang="en-US" sz="1140" dirty="0">
                 <a:solidFill>
                   <a:srgbClr val="17364A"/>
                 </a:solidFill>
@@ -10684,14 +10686,14 @@
               </a:rPr>
               <a:t>Read the module for shared vocabulary and context.</a:t>
             </a:r>
-            <a:endParaRPr lang="en-US" sz="1220" dirty="0"/>
-          </a:p>
-          <a:p>
-            <a:pPr indent="0" marL="0">
-              <a:buNone/>
-            </a:pPr>
-            <a:r>
-              <a:rPr lang="en-US" sz="1220" dirty="0">
+            <a:endParaRPr lang="en-US" sz="1140" dirty="0"/>
+          </a:p>
+          <a:p>
+            <a:pPr indent="0" marL="0">
+              <a:buNone/>
+            </a:pPr>
+            <a:r>
+              <a:rPr lang="en-US" sz="1140" dirty="0">
                 <a:solidFill>
                   <a:srgbClr val="17364A"/>
                 </a:solidFill>
@@ -10699,16 +10701,16 @@
                 <a:ea typeface="Aptos" pitchFamily="34" charset="-122"/>
                 <a:cs typeface="Aptos" pitchFamily="34" charset="-120"/>
               </a:rPr>
-              <a:t>Complete the practical exercise to apply the concept.</a:t>
-            </a:r>
-            <a:endParaRPr lang="en-US" sz="1220" dirty="0"/>
-          </a:p>
-          <a:p>
-            <a:pPr indent="0" marL="0">
-              <a:buNone/>
-            </a:pPr>
-            <a:r>
-              <a:rPr lang="en-US" sz="1220" dirty="0">
+              <a:t>Complete the practical exercise to apply the.</a:t>
+            </a:r>
+            <a:endParaRPr lang="en-US" sz="1140" dirty="0"/>
+          </a:p>
+          <a:p>
+            <a:pPr indent="0" marL="0">
+              <a:buNone/>
+            </a:pPr>
+            <a:r>
+              <a:rPr lang="en-US" sz="1140" dirty="0">
                 <a:solidFill>
                   <a:srgbClr val="17364A"/>
                 </a:solidFill>
@@ -10718,7 +10720,7 @@
               </a:rPr>
               <a:t>Use the notes and references for deeper review.</a:t>
             </a:r>
-            <a:endParaRPr lang="en-US" sz="1220" dirty="0"/>
+            <a:endParaRPr lang="en-US" sz="1140" dirty="0"/>
           </a:p>
         </p:txBody>
       </p:sp>
@@ -11009,8 +11011,8 @@
         </p:nvSpPr>
         <p:spPr>
           <a:xfrm>
-            <a:off x="868680" y="1508760"/>
-            <a:ext cx="6309360" cy="4160520"/>
+            <a:off x="822960" y="1463040"/>
+            <a:ext cx="6565392" cy="4343400"/>
           </a:xfrm>
           <a:prstGeom prst="rect">
             <a:avLst/>
@@ -11028,7 +11030,7 @@
               <a:buNone/>
             </a:pPr>
             <a:r>
-              <a:rPr lang="en-US" sz="2100" dirty="0">
+              <a:rPr lang="en-US" sz="1920" dirty="0">
                 <a:solidFill>
                   <a:srgbClr val="003A63"/>
                 </a:solidFill>
@@ -11038,14 +11040,14 @@
               </a:rPr>
               <a:t>• CDC Public Health Data Strategy and Data Modernization resources:.</a:t>
             </a:r>
-            <a:endParaRPr lang="en-US" sz="2100" dirty="0"/>
-          </a:p>
-          <a:p>
-            <a:pPr indent="0" marL="0">
-              <a:buNone/>
-            </a:pPr>
-            <a:r>
-              <a:rPr lang="en-US" sz="2100" dirty="0">
+            <a:endParaRPr lang="en-US" sz="1920" dirty="0"/>
+          </a:p>
+          <a:p>
+            <a:pPr indent="0" marL="0">
+              <a:buNone/>
+            </a:pPr>
+            <a:r>
+              <a:rPr lang="en-US" sz="1920" dirty="0">
                 <a:solidFill>
                   <a:srgbClr val="003A63"/>
                 </a:solidFill>
@@ -11053,16 +11055,16 @@
                 <a:ea typeface="Aptos" pitchFamily="34" charset="-122"/>
                 <a:cs typeface="Aptos" pitchFamily="34" charset="-120"/>
               </a:rPr>
-              <a:t>• NIST Artificial Intelligence Risk Management Framework and NIST Generative AI Profile:.</a:t>
-            </a:r>
-            <a:endParaRPr lang="en-US" sz="2100" dirty="0"/>
-          </a:p>
-          <a:p>
-            <a:pPr indent="0" marL="0">
-              <a:buNone/>
-            </a:pPr>
-            <a:r>
-              <a:rPr lang="en-US" sz="2100" dirty="0">
+              <a:t>• NIST Artificial Intelligence Risk Management Framework and NIST Generative.</a:t>
+            </a:r>
+            <a:endParaRPr lang="en-US" sz="1920" dirty="0"/>
+          </a:p>
+          <a:p>
+            <a:pPr indent="0" marL="0">
+              <a:buNone/>
+            </a:pPr>
+            <a:r>
+              <a:rPr lang="en-US" sz="1920" dirty="0">
                 <a:solidFill>
                   <a:srgbClr val="003A63"/>
                 </a:solidFill>
@@ -11072,7 +11074,7 @@
               </a:rPr>
               <a:t>• WHO Ethics and Governance of Artificial Intelligence for Health guidance:.</a:t>
             </a:r>
-            <a:endParaRPr lang="en-US" sz="2100" dirty="0"/>
+            <a:endParaRPr lang="en-US" sz="1920" dirty="0"/>
           </a:p>
         </p:txBody>
       </p:sp>
@@ -11084,12 +11086,12 @@
         </p:nvSpPr>
         <p:spPr>
           <a:xfrm>
-            <a:off x="7635240" y="1325880"/>
-            <a:ext cx="3474720" cy="1207008"/>
+            <a:off x="7543800" y="1325880"/>
+            <a:ext cx="3611880" cy="1261872"/>
           </a:xfrm>
           <a:prstGeom prst="roundRect">
             <a:avLst>
-              <a:gd name="adj" fmla="val 9091"/>
+              <a:gd name="adj" fmla="val 8696"/>
             </a:avLst>
           </a:prstGeom>
           <a:solidFill>
@@ -11111,8 +11113,8 @@
         </p:nvSpPr>
         <p:spPr>
           <a:xfrm>
-            <a:off x="7799832" y="1472184"/>
-            <a:ext cx="3145536" cy="256032"/>
+            <a:off x="7708392" y="1453896"/>
+            <a:ext cx="3282696" cy="228600"/>
           </a:xfrm>
           <a:prstGeom prst="rect">
             <a:avLst/>
@@ -11128,7 +11130,7 @@
               <a:buNone/>
             </a:pPr>
             <a:r>
-              <a:rPr lang="en-US" sz="1300" b="1" dirty="0">
+              <a:rPr lang="en-US" sz="1220" b="1" dirty="0">
                 <a:solidFill>
                   <a:srgbClr val="0068B7"/>
                 </a:solidFill>
@@ -11138,7 +11140,7 @@
               </a:rPr>
               <a:t>Core concept</a:t>
             </a:r>
-            <a:endParaRPr lang="en-US" sz="1300" dirty="0"/>
+            <a:endParaRPr lang="en-US" sz="1220" dirty="0"/>
           </a:p>
         </p:txBody>
       </p:sp>
@@ -11150,8 +11152,8 @@
         </p:nvSpPr>
         <p:spPr>
           <a:xfrm>
-            <a:off x="7799832" y="1801368"/>
-            <a:ext cx="3145536" cy="640080"/>
+            <a:off x="7708392" y="1764792"/>
+            <a:ext cx="3282696" cy="749808"/>
           </a:xfrm>
           <a:prstGeom prst="rect">
             <a:avLst/>
@@ -11169,7 +11171,7 @@
               <a:buNone/>
             </a:pPr>
             <a:r>
-              <a:rPr lang="en-US" sz="1320" dirty="0">
+              <a:rPr lang="en-US" sz="1220" dirty="0">
                 <a:solidFill>
                   <a:srgbClr val="17364A"/>
                 </a:solidFill>
@@ -11179,7 +11181,7 @@
               </a:rPr>
               <a:t>CDC Public Health Data Strategy and Data Modernization resources:.</a:t>
             </a:r>
-            <a:endParaRPr lang="en-US" sz="1320" dirty="0"/>
+            <a:endParaRPr lang="en-US" sz="1220" dirty="0"/>
           </a:p>
         </p:txBody>
       </p:sp>
@@ -11191,12 +11193,12 @@
         </p:nvSpPr>
         <p:spPr>
           <a:xfrm>
-            <a:off x="7635240" y="2670048"/>
-            <a:ext cx="3474720" cy="1377086"/>
+            <a:off x="7543800" y="2724912"/>
+            <a:ext cx="3611880" cy="1527048"/>
           </a:xfrm>
           <a:prstGeom prst="roundRect">
             <a:avLst>
-              <a:gd name="adj" fmla="val 7968"/>
+              <a:gd name="adj" fmla="val 7186"/>
             </a:avLst>
           </a:prstGeom>
           <a:solidFill>
@@ -11218,8 +11220,8 @@
         </p:nvSpPr>
         <p:spPr>
           <a:xfrm>
-            <a:off x="7799832" y="2816352"/>
-            <a:ext cx="3145536" cy="256032"/>
+            <a:off x="7708392" y="2852928"/>
+            <a:ext cx="3282696" cy="228600"/>
           </a:xfrm>
           <a:prstGeom prst="rect">
             <a:avLst/>
@@ -11235,7 +11237,7 @@
               <a:buNone/>
             </a:pPr>
             <a:r>
-              <a:rPr lang="en-US" sz="1300" b="1" dirty="0">
+              <a:rPr lang="en-US" sz="1220" b="1" dirty="0">
                 <a:solidFill>
                   <a:srgbClr val="0068B7"/>
                 </a:solidFill>
@@ -11245,7 +11247,7 @@
               </a:rPr>
               <a:t>Concept checkpoints</a:t>
             </a:r>
-            <a:endParaRPr lang="en-US" sz="1300" dirty="0"/>
+            <a:endParaRPr lang="en-US" sz="1220" dirty="0"/>
           </a:p>
         </p:txBody>
       </p:sp>
@@ -11257,8 +11259,8 @@
         </p:nvSpPr>
         <p:spPr>
           <a:xfrm>
-            <a:off x="7818120" y="3182112"/>
-            <a:ext cx="3090672" cy="718718"/>
+            <a:off x="7726680" y="3182112"/>
+            <a:ext cx="3227832" cy="960120"/>
           </a:xfrm>
           <a:prstGeom prst="rect">
             <a:avLst/>
@@ -11276,7 +11278,7 @@
               <a:buNone/>
             </a:pPr>
             <a:r>
-              <a:rPr lang="en-US" sz="1220" dirty="0">
+              <a:rPr lang="en-US" sz="1140" dirty="0">
                 <a:solidFill>
                   <a:srgbClr val="17364A"/>
                 </a:solidFill>
@@ -11286,14 +11288,14 @@
               </a:rPr>
               <a:t>OWASP Top 10 for Large Language Model Applications:.</a:t>
             </a:r>
-            <a:endParaRPr lang="en-US" sz="1220" dirty="0"/>
-          </a:p>
-          <a:p>
-            <a:pPr indent="0" marL="0">
-              <a:buNone/>
-            </a:pPr>
-            <a:r>
-              <a:rPr lang="en-US" sz="1220" dirty="0">
+            <a:endParaRPr lang="en-US" sz="1140" dirty="0"/>
+          </a:p>
+          <a:p>
+            <a:pPr indent="0" marL="0">
+              <a:buNone/>
+            </a:pPr>
+            <a:r>
+              <a:rPr lang="en-US" sz="1140" dirty="0">
                 <a:solidFill>
                   <a:srgbClr val="17364A"/>
                 </a:solidFill>
@@ -11301,9 +11303,9 @@
                 <a:ea typeface="Aptos" pitchFamily="34" charset="-122"/>
                 <a:cs typeface="Aptos" pitchFamily="34" charset="-120"/>
               </a:rPr>
-              <a:t>ONC health IT, interoperability, and information blocking.</a:t>
-            </a:r>
-            <a:endParaRPr lang="en-US" sz="1220" dirty="0"/>
+              <a:t>ONC health IT, interoperability, and information.</a:t>
+            </a:r>
+            <a:endParaRPr lang="en-US" sz="1140" dirty="0"/>
           </a:p>
         </p:txBody>
       </p:sp>
@@ -11315,12 +11317,12 @@
         </p:nvSpPr>
         <p:spPr>
           <a:xfrm>
-            <a:off x="7635240" y="4184294"/>
-            <a:ext cx="3474720" cy="1466698"/>
+            <a:off x="7543800" y="4389120"/>
+            <a:ext cx="3611880" cy="1261872"/>
           </a:xfrm>
           <a:prstGeom prst="roundRect">
             <a:avLst>
-              <a:gd name="adj" fmla="val 7481"/>
+              <a:gd name="adj" fmla="val 8696"/>
             </a:avLst>
           </a:prstGeom>
           <a:solidFill>
@@ -11342,8 +11344,8 @@
         </p:nvSpPr>
         <p:spPr>
           <a:xfrm>
-            <a:off x="7799832" y="4330598"/>
-            <a:ext cx="3145536" cy="256032"/>
+            <a:off x="7708392" y="4517136"/>
+            <a:ext cx="3282696" cy="228600"/>
           </a:xfrm>
           <a:prstGeom prst="rect">
             <a:avLst/>
@@ -11359,7 +11361,7 @@
               <a:buNone/>
             </a:pPr>
             <a:r>
-              <a:rPr lang="en-US" sz="1300" b="1" dirty="0">
+              <a:rPr lang="en-US" sz="1220" b="1" dirty="0">
                 <a:solidFill>
                   <a:srgbClr val="0068B7"/>
                 </a:solidFill>
@@ -11369,7 +11371,7 @@
               </a:rPr>
               <a:t>Apply it</a:t>
             </a:r>
-            <a:endParaRPr lang="en-US" sz="1300" dirty="0"/>
+            <a:endParaRPr lang="en-US" sz="1220" dirty="0"/>
           </a:p>
         </p:txBody>
       </p:sp>
@@ -11381,8 +11383,8 @@
         </p:nvSpPr>
         <p:spPr>
           <a:xfrm>
-            <a:off x="7799832" y="4659782"/>
-            <a:ext cx="3145536" cy="899770"/>
+            <a:off x="7708392" y="4828032"/>
+            <a:ext cx="3282696" cy="749808"/>
           </a:xfrm>
           <a:prstGeom prst="rect">
             <a:avLst/>
@@ -11400,7 +11402,7 @@
               <a:buNone/>
             </a:pPr>
             <a:r>
-              <a:rPr lang="en-US" sz="1320" dirty="0">
+              <a:rPr lang="en-US" sz="1220" dirty="0">
                 <a:solidFill>
                   <a:srgbClr val="17364A"/>
                 </a:solidFill>
@@ -11408,9 +11410,9 @@
                 <a:ea typeface="Aptos" pitchFamily="34" charset="-122"/>
                 <a:cs typeface="Aptos" pitchFamily="34" charset="-120"/>
               </a:rPr>
-              <a:t>Connect the concept to public health purpose, responsible use, required safeguards, documentation, and the next action a department should take.</a:t>
-            </a:r>
-            <a:endParaRPr lang="en-US" sz="1320" dirty="0"/>
+              <a:t>Connect the concept to public health purpose, responsible use, required.</a:t>
+            </a:r>
+            <a:endParaRPr lang="en-US" sz="1220" dirty="0"/>
           </a:p>
         </p:txBody>
       </p:sp>
@@ -11701,8 +11703,8 @@
         </p:nvSpPr>
         <p:spPr>
           <a:xfrm>
-            <a:off x="868680" y="1508760"/>
-            <a:ext cx="6309360" cy="4160520"/>
+            <a:off x="822960" y="1463040"/>
+            <a:ext cx="6565392" cy="4343400"/>
           </a:xfrm>
           <a:prstGeom prst="rect">
             <a:avLst/>
@@ -11720,7 +11722,7 @@
               <a:buNone/>
             </a:pPr>
             <a:r>
-              <a:rPr lang="en-US" sz="2100" dirty="0">
+              <a:rPr lang="en-US" sz="1920" dirty="0">
                 <a:solidFill>
                   <a:srgbClr val="003A63"/>
                 </a:solidFill>
@@ -11728,9 +11730,9 @@
                 <a:ea typeface="Aptos" pitchFamily="34" charset="-122"/>
                 <a:cs typeface="Aptos" pitchFamily="34" charset="-120"/>
               </a:rPr>
-              <a:t>• Agency policies for privacy, public records, cybersecurity, procurement, civil rights,.</a:t>
-            </a:r>
-            <a:endParaRPr lang="en-US" sz="2100" dirty="0"/>
+              <a:t>• Agency policies for privacy, public records, cybersecurity, procurement,.</a:t>
+            </a:r>
+            <a:endParaRPr lang="en-US" sz="1920" dirty="0"/>
           </a:p>
         </p:txBody>
       </p:sp>
@@ -11742,12 +11744,12 @@
         </p:nvSpPr>
         <p:spPr>
           <a:xfrm>
-            <a:off x="7635240" y="1325880"/>
-            <a:ext cx="3474720" cy="1255471"/>
+            <a:off x="7543800" y="1325880"/>
+            <a:ext cx="3611880" cy="1261872"/>
           </a:xfrm>
           <a:prstGeom prst="roundRect">
             <a:avLst>
-              <a:gd name="adj" fmla="val 8740"/>
+              <a:gd name="adj" fmla="val 8696"/>
             </a:avLst>
           </a:prstGeom>
           <a:solidFill>
@@ -11769,8 +11771,8 @@
         </p:nvSpPr>
         <p:spPr>
           <a:xfrm>
-            <a:off x="7799832" y="1472184"/>
-            <a:ext cx="3145536" cy="256032"/>
+            <a:off x="7708392" y="1453896"/>
+            <a:ext cx="3282696" cy="228600"/>
           </a:xfrm>
           <a:prstGeom prst="rect">
             <a:avLst/>
@@ -11786,7 +11788,7 @@
               <a:buNone/>
             </a:pPr>
             <a:r>
-              <a:rPr lang="en-US" sz="1300" b="1" dirty="0">
+              <a:rPr lang="en-US" sz="1220" b="1" dirty="0">
                 <a:solidFill>
                   <a:srgbClr val="0068B7"/>
                 </a:solidFill>
@@ -11796,7 +11798,7 @@
               </a:rPr>
               <a:t>Core concept</a:t>
             </a:r>
-            <a:endParaRPr lang="en-US" sz="1300" dirty="0"/>
+            <a:endParaRPr lang="en-US" sz="1220" dirty="0"/>
           </a:p>
         </p:txBody>
       </p:sp>
@@ -11808,8 +11810,8 @@
         </p:nvSpPr>
         <p:spPr>
           <a:xfrm>
-            <a:off x="7799832" y="1801368"/>
-            <a:ext cx="3145536" cy="688543"/>
+            <a:off x="7708392" y="1764792"/>
+            <a:ext cx="3282696" cy="749808"/>
           </a:xfrm>
           <a:prstGeom prst="rect">
             <a:avLst/>
@@ -11827,7 +11829,7 @@
               <a:buNone/>
             </a:pPr>
             <a:r>
-              <a:rPr lang="en-US" sz="1320" dirty="0">
+              <a:rPr lang="en-US" sz="1220" dirty="0">
                 <a:solidFill>
                   <a:srgbClr val="17364A"/>
                 </a:solidFill>
@@ -11835,9 +11837,9 @@
                 <a:ea typeface="Aptos" pitchFamily="34" charset="-122"/>
                 <a:cs typeface="Aptos" pitchFamily="34" charset="-120"/>
               </a:rPr>
-              <a:t>Agency policies for privacy, public records, cybersecurity, procurement, civil rights, accessibility,.</a:t>
-            </a:r>
-            <a:endParaRPr lang="en-US" sz="1320" dirty="0"/>
+              <a:t>Agency policies for privacy, public records, cybersecurity, procurement, civil.</a:t>
+            </a:r>
+            <a:endParaRPr lang="en-US" sz="1220" dirty="0"/>
           </a:p>
         </p:txBody>
       </p:sp>
@@ -11849,12 +11851,12 @@
         </p:nvSpPr>
         <p:spPr>
           <a:xfrm>
-            <a:off x="7635240" y="2718511"/>
-            <a:ext cx="3474720" cy="1328623"/>
+            <a:off x="7543800" y="2724912"/>
+            <a:ext cx="3611880" cy="1527048"/>
           </a:xfrm>
           <a:prstGeom prst="roundRect">
             <a:avLst>
-              <a:gd name="adj" fmla="val 8259"/>
+              <a:gd name="adj" fmla="val 7186"/>
             </a:avLst>
           </a:prstGeom>
           <a:solidFill>
@@ -11876,8 +11878,8 @@
         </p:nvSpPr>
         <p:spPr>
           <a:xfrm>
-            <a:off x="7799832" y="2864815"/>
-            <a:ext cx="3145536" cy="256032"/>
+            <a:off x="7708392" y="2852928"/>
+            <a:ext cx="3282696" cy="228600"/>
           </a:xfrm>
           <a:prstGeom prst="rect">
             <a:avLst/>
@@ -11893,7 +11895,7 @@
               <a:buNone/>
             </a:pPr>
             <a:r>
-              <a:rPr lang="en-US" sz="1300" b="1" dirty="0">
+              <a:rPr lang="en-US" sz="1220" b="1" dirty="0">
                 <a:solidFill>
                   <a:srgbClr val="0068B7"/>
                 </a:solidFill>
@@ -11903,7 +11905,7 @@
               </a:rPr>
               <a:t>Concept checkpoints</a:t>
             </a:r>
-            <a:endParaRPr lang="en-US" sz="1300" dirty="0"/>
+            <a:endParaRPr lang="en-US" sz="1220" dirty="0"/>
           </a:p>
         </p:txBody>
       </p:sp>
@@ -11915,8 +11917,8 @@
         </p:nvSpPr>
         <p:spPr>
           <a:xfrm>
-            <a:off x="7818120" y="3230575"/>
-            <a:ext cx="3090672" cy="670255"/>
+            <a:off x="7726680" y="3182112"/>
+            <a:ext cx="3227832" cy="960120"/>
           </a:xfrm>
           <a:prstGeom prst="rect">
             <a:avLst/>
@@ -11934,7 +11936,7 @@
               <a:buNone/>
             </a:pPr>
             <a:r>
-              <a:rPr lang="en-US" sz="1220" dirty="0">
+              <a:rPr lang="en-US" sz="1140" dirty="0">
                 <a:solidFill>
                   <a:srgbClr val="17364A"/>
                 </a:solidFill>
@@ -11942,9 +11944,9 @@
                 <a:ea typeface="Aptos" pitchFamily="34" charset="-122"/>
                 <a:cs typeface="Aptos" pitchFamily="34" charset="-120"/>
               </a:rPr>
-              <a:t>Agency policies for privacy, public records, cybersecurity,.</a:t>
-            </a:r>
-            <a:endParaRPr lang="en-US" sz="1220" dirty="0"/>
+              <a:t>Agency policies for privacy, public records,.</a:t>
+            </a:r>
+            <a:endParaRPr lang="en-US" sz="1140" dirty="0"/>
           </a:p>
         </p:txBody>
       </p:sp>
@@ -11956,12 +11958,12 @@
         </p:nvSpPr>
         <p:spPr>
           <a:xfrm>
-            <a:off x="7635240" y="4184294"/>
-            <a:ext cx="3474720" cy="1466698"/>
+            <a:off x="7543800" y="4389120"/>
+            <a:ext cx="3611880" cy="1261872"/>
           </a:xfrm>
           <a:prstGeom prst="roundRect">
             <a:avLst>
-              <a:gd name="adj" fmla="val 7481"/>
+              <a:gd name="adj" fmla="val 8696"/>
             </a:avLst>
           </a:prstGeom>
           <a:solidFill>
@@ -11983,8 +11985,8 @@
         </p:nvSpPr>
         <p:spPr>
           <a:xfrm>
-            <a:off x="7799832" y="4330598"/>
-            <a:ext cx="3145536" cy="256032"/>
+            <a:off x="7708392" y="4517136"/>
+            <a:ext cx="3282696" cy="228600"/>
           </a:xfrm>
           <a:prstGeom prst="rect">
             <a:avLst/>
@@ -12000,7 +12002,7 @@
               <a:buNone/>
             </a:pPr>
             <a:r>
-              <a:rPr lang="en-US" sz="1300" b="1" dirty="0">
+              <a:rPr lang="en-US" sz="1220" b="1" dirty="0">
                 <a:solidFill>
                   <a:srgbClr val="0068B7"/>
                 </a:solidFill>
@@ -12010,7 +12012,7 @@
               </a:rPr>
               <a:t>Apply it</a:t>
             </a:r>
-            <a:endParaRPr lang="en-US" sz="1300" dirty="0"/>
+            <a:endParaRPr lang="en-US" sz="1220" dirty="0"/>
           </a:p>
         </p:txBody>
       </p:sp>
@@ -12022,8 +12024,8 @@
         </p:nvSpPr>
         <p:spPr>
           <a:xfrm>
-            <a:off x="7799832" y="4659782"/>
-            <a:ext cx="3145536" cy="899770"/>
+            <a:off x="7708392" y="4828032"/>
+            <a:ext cx="3282696" cy="749808"/>
           </a:xfrm>
           <a:prstGeom prst="rect">
             <a:avLst/>
@@ -12041,7 +12043,7 @@
               <a:buNone/>
             </a:pPr>
             <a:r>
-              <a:rPr lang="en-US" sz="1320" dirty="0">
+              <a:rPr lang="en-US" sz="1220" dirty="0">
                 <a:solidFill>
                   <a:srgbClr val="17364A"/>
                 </a:solidFill>
@@ -12049,9 +12051,9 @@
                 <a:ea typeface="Aptos" pitchFamily="34" charset="-122"/>
                 <a:cs typeface="Aptos" pitchFamily="34" charset="-120"/>
               </a:rPr>
-              <a:t>Connect the concept to public health purpose, responsible use, required safeguards, documentation, and the next action a department should take.</a:t>
-            </a:r>
-            <a:endParaRPr lang="en-US" sz="1320" dirty="0"/>
+              <a:t>Connect the concept to public health purpose, responsible use, required.</a:t>
+            </a:r>
+            <a:endParaRPr lang="en-US" sz="1220" dirty="0"/>
           </a:p>
         </p:txBody>
       </p:sp>
@@ -12369,7 +12371,7 @@
                 <a:ea typeface="Aptos" pitchFamily="34" charset="-122"/>
                 <a:cs typeface="Aptos" pitchFamily="34" charset="-120"/>
               </a:rPr>
-              <a:t>• Play 11: Build and Deploy AI Solutions - This lesson informs Play 11 by helping learners.</a:t>
+              <a:t>• Play 11: Build and Deploy AI Solutions - This lesson informs Play 11 by.</a:t>
             </a:r>
             <a:endParaRPr lang="en-US" sz="1900" dirty="0"/>
           </a:p>
@@ -12386,7 +12388,7 @@
                 <a:ea typeface="Aptos" pitchFamily="34" charset="-122"/>
                 <a:cs typeface="Aptos" pitchFamily="34" charset="-120"/>
               </a:rPr>
-              <a:t>• Play 2: Readiness Assessment - This lesson informs Play 2 by helping learners connect the.</a:t>
+              <a:t>• Play 2: Readiness Assessment - This lesson informs Play 2 by helping.</a:t>
             </a:r>
             <a:endParaRPr lang="en-US" sz="1900" dirty="0"/>
           </a:p>
@@ -12403,7 +12405,7 @@
                 <a:ea typeface="Aptos" pitchFamily="34" charset="-122"/>
                 <a:cs typeface="Aptos" pitchFamily="34" charset="-120"/>
               </a:rPr>
-              <a:t>• Play 3: Establish AI Governance - This lesson informs Play 3 by helping learners connect the.</a:t>
+              <a:t>• Play 3: Establish AI Governance - This lesson informs Play 3 by helping.</a:t>
             </a:r>
             <a:endParaRPr lang="en-US" sz="1900" dirty="0"/>
           </a:p>
@@ -12420,7 +12422,7 @@
                 <a:ea typeface="Aptos" pitchFamily="34" charset="-122"/>
                 <a:cs typeface="Aptos" pitchFamily="34" charset="-120"/>
               </a:rPr>
-              <a:t>• Play 1: Vision &amp; Guardrails - This lesson informs Play 1 by helping learners connect the.</a:t>
+              <a:t>• Play 1: Vision &amp; Guardrails - This lesson informs Play 1 by helping learners.</a:t>
             </a:r>
             <a:endParaRPr lang="en-US" sz="1900" dirty="0"/>
           </a:p>
@@ -12461,8 +12463,8 @@
         </p:nvSpPr>
         <p:spPr>
           <a:xfrm>
-            <a:off x="8211312" y="1563624"/>
-            <a:ext cx="2734056" cy="256032"/>
+            <a:off x="8211312" y="1545336"/>
+            <a:ext cx="2734056" cy="228600"/>
           </a:xfrm>
           <a:prstGeom prst="rect">
             <a:avLst/>
@@ -12478,7 +12480,7 @@
               <a:buNone/>
             </a:pPr>
             <a:r>
-              <a:rPr lang="en-US" sz="1300" b="1" dirty="0">
+              <a:rPr lang="en-US" sz="1220" b="1" dirty="0">
                 <a:solidFill>
                   <a:srgbClr val="0068B7"/>
                 </a:solidFill>
@@ -12488,7 +12490,7 @@
               </a:rPr>
               <a:t>Apply the lesson</a:t>
             </a:r>
-            <a:endParaRPr lang="en-US" sz="1300" dirty="0"/>
+            <a:endParaRPr lang="en-US" sz="1220" dirty="0"/>
           </a:p>
         </p:txBody>
       </p:sp>
@@ -12500,8 +12502,8 @@
         </p:nvSpPr>
         <p:spPr>
           <a:xfrm>
-            <a:off x="8211312" y="1892808"/>
-            <a:ext cx="2734056" cy="1536192"/>
+            <a:off x="8211312" y="1856232"/>
+            <a:ext cx="2734056" cy="1591056"/>
           </a:xfrm>
           <a:prstGeom prst="rect">
             <a:avLst/>
@@ -12519,7 +12521,7 @@
               <a:buNone/>
             </a:pPr>
             <a:r>
-              <a:rPr lang="en-US" sz="1320" dirty="0">
+              <a:rPr lang="en-US" sz="1220" dirty="0">
                 <a:solidFill>
                   <a:srgbClr val="17364A"/>
                 </a:solidFill>
@@ -12527,9 +12529,9 @@
                 <a:ea typeface="Aptos" pitchFamily="34" charset="-122"/>
                 <a:cs typeface="Aptos" pitchFamily="34" charset="-120"/>
               </a:rPr>
-              <a:t>Use the related plays to identify decisions, participants, timing, approvals, and documentation needed for responsible implementation.</a:t>
-            </a:r>
-            <a:endParaRPr lang="en-US" sz="1320" dirty="0"/>
+              <a:t>Use the related plays to identify decisions, participants, timing, approvals,.</a:t>
+            </a:r>
+            <a:endParaRPr lang="en-US" sz="1220" dirty="0"/>
           </a:p>
         </p:txBody>
       </p:sp>
@@ -12568,8 +12570,8 @@
         </p:nvSpPr>
         <p:spPr>
           <a:xfrm>
-            <a:off x="8211312" y="3941064"/>
-            <a:ext cx="2734056" cy="256032"/>
+            <a:off x="8211312" y="3922776"/>
+            <a:ext cx="2734056" cy="228600"/>
           </a:xfrm>
           <a:prstGeom prst="rect">
             <a:avLst/>
@@ -12585,7 +12587,7 @@
               <a:buNone/>
             </a:pPr>
             <a:r>
-              <a:rPr lang="en-US" sz="1300" b="1" dirty="0">
+              <a:rPr lang="en-US" sz="1220" b="1" dirty="0">
                 <a:solidFill>
                   <a:srgbClr val="0068B7"/>
                 </a:solidFill>
@@ -12595,7 +12597,7 @@
               </a:rPr>
               <a:t>Use the play links to</a:t>
             </a:r>
-            <a:endParaRPr lang="en-US" sz="1300" dirty="0"/>
+            <a:endParaRPr lang="en-US" sz="1220" dirty="0"/>
           </a:p>
         </p:txBody>
       </p:sp>
@@ -12607,8 +12609,8 @@
         </p:nvSpPr>
         <p:spPr>
           <a:xfrm>
-            <a:off x="8229600" y="4306824"/>
-            <a:ext cx="2679192" cy="941832"/>
+            <a:off x="8229600" y="4251960"/>
+            <a:ext cx="2679192" cy="1033272"/>
           </a:xfrm>
           <a:prstGeom prst="rect">
             <a:avLst/>
@@ -12626,7 +12628,7 @@
               <a:buNone/>
             </a:pPr>
             <a:r>
-              <a:rPr lang="en-US" sz="1220" dirty="0">
+              <a:rPr lang="en-US" sz="1140" dirty="0">
                 <a:solidFill>
                   <a:srgbClr val="17364A"/>
                 </a:solidFill>
@@ -12636,14 +12638,14 @@
               </a:rPr>
               <a:t>Locate the decision point in the playbook sequence.</a:t>
             </a:r>
-            <a:endParaRPr lang="en-US" sz="1220" dirty="0"/>
-          </a:p>
-          <a:p>
-            <a:pPr indent="0" marL="0">
-              <a:buNone/>
-            </a:pPr>
-            <a:r>
-              <a:rPr lang="en-US" sz="1220" dirty="0">
+            <a:endParaRPr lang="en-US" sz="1140" dirty="0"/>
+          </a:p>
+          <a:p>
+            <a:pPr indent="0" marL="0">
+              <a:buNone/>
+            </a:pPr>
+            <a:r>
+              <a:rPr lang="en-US" sz="1140" dirty="0">
                 <a:solidFill>
                   <a:srgbClr val="17364A"/>
                 </a:solidFill>
@@ -12653,14 +12655,14 @@
               </a:rPr>
               <a:t>Identify who should participate in the work.</a:t>
             </a:r>
-            <a:endParaRPr lang="en-US" sz="1220" dirty="0"/>
-          </a:p>
-          <a:p>
-            <a:pPr indent="0" marL="0">
-              <a:buNone/>
-            </a:pPr>
-            <a:r>
-              <a:rPr lang="en-US" sz="1220" dirty="0">
+            <a:endParaRPr lang="en-US" sz="1140" dirty="0"/>
+          </a:p>
+          <a:p>
+            <a:pPr indent="0" marL="0">
+              <a:buNone/>
+            </a:pPr>
+            <a:r>
+              <a:rPr lang="en-US" sz="1140" dirty="0">
                 <a:solidFill>
                   <a:srgbClr val="17364A"/>
                 </a:solidFill>
@@ -12668,9 +12670,9 @@
                 <a:ea typeface="Aptos" pitchFamily="34" charset="-122"/>
                 <a:cs typeface="Aptos" pitchFamily="34" charset="-120"/>
               </a:rPr>
-              <a:t>Document the review, approval, or implementation step.</a:t>
-            </a:r>
-            <a:endParaRPr lang="en-US" sz="1220" dirty="0"/>
+              <a:t>Document the review, approval, or implementation.</a:t>
+            </a:r>
+            <a:endParaRPr lang="en-US" sz="1140" dirty="0"/>
           </a:p>
         </p:txBody>
       </p:sp>
@@ -12988,7 +12990,7 @@
                 <a:ea typeface="Aptos" pitchFamily="34" charset="-122"/>
                 <a:cs typeface="Aptos" pitchFamily="34" charset="-120"/>
               </a:rPr>
-              <a:t>• Tool 4: AI Policy Landscape Scan (Worksheet) - Use AI Policy Landscape Scan to translate this.</a:t>
+              <a:t>• Tool 4: AI Policy Landscape Scan (Worksheet) - Use AI Policy Landscape Scan.</a:t>
             </a:r>
             <a:endParaRPr lang="en-US" sz="1850" dirty="0"/>
           </a:p>
@@ -13005,7 +13007,7 @@
                 <a:ea typeface="Aptos" pitchFamily="34" charset="-122"/>
                 <a:cs typeface="Aptos" pitchFamily="34" charset="-120"/>
               </a:rPr>
-              <a:t>• Tool 5: AI Environmental and Resource Impact Review (Checklist) - Use AI Environmental and.</a:t>
+              <a:t>• Tool 5: AI Environmental and Resource Impact Review (Checklist) - Use AI.</a:t>
             </a:r>
             <a:endParaRPr lang="en-US" sz="1850" dirty="0"/>
           </a:p>
@@ -13022,7 +13024,7 @@
                 <a:ea typeface="Aptos" pitchFamily="34" charset="-122"/>
                 <a:cs typeface="Aptos" pitchFamily="34" charset="-120"/>
               </a:rPr>
-              <a:t>• Tool 6: Human-Centered AI Decision Rule Checklist (Checklist) - Use Human-Centered AI Decision.</a:t>
+              <a:t>• Tool 6: Human-Centered AI Decision Rule Checklist (Checklist) - Use.</a:t>
             </a:r>
             <a:endParaRPr lang="en-US" sz="1850" dirty="0"/>
           </a:p>
@@ -13039,7 +13041,7 @@
                 <a:ea typeface="Aptos" pitchFamily="34" charset="-122"/>
                 <a:cs typeface="Aptos" pitchFamily="34" charset="-120"/>
               </a:rPr>
-              <a:t>• Tool 8: AI Project Charter (Planning) - Use AI Project Charter to translate this lesson into a.</a:t>
+              <a:t>• Tool 8: AI Project Charter (Planning) - Use AI Project Charter to translate.</a:t>
             </a:r>
             <a:endParaRPr lang="en-US" sz="1850" dirty="0"/>
           </a:p>
@@ -13080,8 +13082,8 @@
         </p:nvSpPr>
         <p:spPr>
           <a:xfrm>
-            <a:off x="8211312" y="1563624"/>
-            <a:ext cx="2734056" cy="256032"/>
+            <a:off x="8211312" y="1545336"/>
+            <a:ext cx="2734056" cy="228600"/>
           </a:xfrm>
           <a:prstGeom prst="rect">
             <a:avLst/>
@@ -13097,7 +13099,7 @@
               <a:buNone/>
             </a:pPr>
             <a:r>
-              <a:rPr lang="en-US" sz="1300" b="1" dirty="0">
+              <a:rPr lang="en-US" sz="1220" b="1" dirty="0">
                 <a:solidFill>
                   <a:srgbClr val="0068B7"/>
                 </a:solidFill>
@@ -13107,7 +13109,7 @@
               </a:rPr>
               <a:t>Use the tools</a:t>
             </a:r>
-            <a:endParaRPr lang="en-US" sz="1300" dirty="0"/>
+            <a:endParaRPr lang="en-US" sz="1220" dirty="0"/>
           </a:p>
         </p:txBody>
       </p:sp>
@@ -13119,8 +13121,8 @@
         </p:nvSpPr>
         <p:spPr>
           <a:xfrm>
-            <a:off x="8211312" y="1892808"/>
-            <a:ext cx="2734056" cy="1536192"/>
+            <a:off x="8211312" y="1856232"/>
+            <a:ext cx="2734056" cy="1591056"/>
           </a:xfrm>
           <a:prstGeom prst="rect">
             <a:avLst/>
@@ -13138,7 +13140,7 @@
               <a:buNone/>
             </a:pPr>
             <a:r>
-              <a:rPr lang="en-US" sz="1320" dirty="0">
+              <a:rPr lang="en-US" sz="1220" dirty="0">
                 <a:solidFill>
                   <a:srgbClr val="17364A"/>
                 </a:solidFill>
@@ -13146,9 +13148,9 @@
                 <a:ea typeface="Aptos" pitchFamily="34" charset="-122"/>
                 <a:cs typeface="Aptos" pitchFamily="34" charset="-120"/>
               </a:rPr>
-              <a:t>Use linked tools when your department needs a structured worksheet, template, checklist, review process, or documentation artifact.</a:t>
-            </a:r>
-            <a:endParaRPr lang="en-US" sz="1320" dirty="0"/>
+              <a:t>Use linked tools when your department needs a structured worksheet, template,.</a:t>
+            </a:r>
+            <a:endParaRPr lang="en-US" sz="1220" dirty="0"/>
           </a:p>
         </p:txBody>
       </p:sp>
@@ -13187,8 +13189,8 @@
         </p:nvSpPr>
         <p:spPr>
           <a:xfrm>
-            <a:off x="8211312" y="3941064"/>
-            <a:ext cx="2734056" cy="256032"/>
+            <a:off x="8211312" y="3922776"/>
+            <a:ext cx="2734056" cy="228600"/>
           </a:xfrm>
           <a:prstGeom prst="rect">
             <a:avLst/>
@@ -13204,7 +13206,7 @@
               <a:buNone/>
             </a:pPr>
             <a:r>
-              <a:rPr lang="en-US" sz="1300" b="1" dirty="0">
+              <a:rPr lang="en-US" sz="1220" b="1" dirty="0">
                 <a:solidFill>
                   <a:srgbClr val="0068B7"/>
                 </a:solidFill>
@@ -13214,7 +13216,7 @@
               </a:rPr>
               <a:t>Tool selection cues</a:t>
             </a:r>
-            <a:endParaRPr lang="en-US" sz="1300" dirty="0"/>
+            <a:endParaRPr lang="en-US" sz="1220" dirty="0"/>
           </a:p>
         </p:txBody>
       </p:sp>
@@ -13226,8 +13228,8 @@
         </p:nvSpPr>
         <p:spPr>
           <a:xfrm>
-            <a:off x="8229600" y="4306824"/>
-            <a:ext cx="2679192" cy="941832"/>
+            <a:off x="8229600" y="4251960"/>
+            <a:ext cx="2679192" cy="1033272"/>
           </a:xfrm>
           <a:prstGeom prst="rect">
             <a:avLst/>
@@ -13245,7 +13247,7 @@
               <a:buNone/>
             </a:pPr>
             <a:r>
-              <a:rPr lang="en-US" sz="1220" dirty="0">
+              <a:rPr lang="en-US" sz="1140" dirty="0">
                 <a:solidFill>
                   <a:srgbClr val="17364A"/>
                 </a:solidFill>
@@ -13255,14 +13257,14 @@
               </a:rPr>
               <a:t>Use a tool when no comparable local process exists.</a:t>
             </a:r>
-            <a:endParaRPr lang="en-US" sz="1220" dirty="0"/>
-          </a:p>
-          <a:p>
-            <a:pPr indent="0" marL="0">
-              <a:buNone/>
-            </a:pPr>
-            <a:r>
-              <a:rPr lang="en-US" sz="1220" dirty="0">
+            <a:endParaRPr lang="en-US" sz="1140" dirty="0"/>
+          </a:p>
+          <a:p>
+            <a:pPr indent="0" marL="0">
+              <a:buNone/>
+            </a:pPr>
+            <a:r>
+              <a:rPr lang="en-US" sz="1140" dirty="0">
                 <a:solidFill>
                   <a:srgbClr val="17364A"/>
                 </a:solidFill>
@@ -13270,16 +13272,16 @@
                 <a:ea typeface="Aptos" pitchFamily="34" charset="-122"/>
                 <a:cs typeface="Aptos" pitchFamily="34" charset="-120"/>
               </a:rPr>
-              <a:t>Adapt existing department templates when they already fit the.</a:t>
-            </a:r>
-            <a:endParaRPr lang="en-US" sz="1220" dirty="0"/>
-          </a:p>
-          <a:p>
-            <a:pPr indent="0" marL="0">
-              <a:buNone/>
-            </a:pPr>
-            <a:r>
-              <a:rPr lang="en-US" sz="1220" dirty="0">
+              <a:t>Adapt existing department templates when they.</a:t>
+            </a:r>
+            <a:endParaRPr lang="en-US" sz="1140" dirty="0"/>
+          </a:p>
+          <a:p>
+            <a:pPr indent="0" marL="0">
+              <a:buNone/>
+            </a:pPr>
+            <a:r>
+              <a:rPr lang="en-US" sz="1140" dirty="0">
                 <a:solidFill>
                   <a:srgbClr val="17364A"/>
                 </a:solidFill>
@@ -13287,9 +13289,9 @@
                 <a:ea typeface="Aptos" pitchFamily="34" charset="-122"/>
                 <a:cs typeface="Aptos" pitchFamily="34" charset="-120"/>
               </a:rPr>
-              <a:t>Save the completed artifact as evidence of the decision.</a:t>
-            </a:r>
-            <a:endParaRPr lang="en-US" sz="1220" dirty="0"/>
+              <a:t>Save the completed artifact as evidence of the.</a:t>
+            </a:r>
+            <a:endParaRPr lang="en-US" sz="1140" dirty="0"/>
           </a:p>
         </p:txBody>
       </p:sp>
@@ -13580,8 +13582,8 @@
         </p:nvSpPr>
         <p:spPr>
           <a:xfrm>
-            <a:off x="868680" y="1508760"/>
-            <a:ext cx="6309360" cy="4160520"/>
+            <a:off x="822960" y="1463040"/>
+            <a:ext cx="6565392" cy="4343400"/>
           </a:xfrm>
           <a:prstGeom prst="rect">
             <a:avLst/>
@@ -13599,7 +13601,7 @@
               <a:buNone/>
             </a:pPr>
             <a:r>
-              <a:rPr lang="en-US" sz="2100" dirty="0">
+              <a:rPr lang="en-US" sz="1920" dirty="0">
                 <a:solidFill>
                   <a:srgbClr val="003A63"/>
                 </a:solidFill>
@@ -13607,16 +13609,16 @@
                 <a:ea typeface="Aptos" pitchFamily="34" charset="-122"/>
                 <a:cs typeface="Aptos" pitchFamily="34" charset="-120"/>
               </a:rPr>
-              <a:t>• Explain the purpose of ai for surveillance signal review and epidemiologic judgment in public.</a:t>
-            </a:r>
-            <a:endParaRPr lang="en-US" sz="2100" dirty="0"/>
-          </a:p>
-          <a:p>
-            <a:pPr indent="0" marL="0">
-              <a:buNone/>
-            </a:pPr>
-            <a:r>
-              <a:rPr lang="en-US" sz="2100" dirty="0">
+              <a:t>• Explain the purpose of ai for surveillance signal review and epidemiologic.</a:t>
+            </a:r>
+            <a:endParaRPr lang="en-US" sz="1920" dirty="0"/>
+          </a:p>
+          <a:p>
+            <a:pPr indent="0" marL="0">
+              <a:buNone/>
+            </a:pPr>
+            <a:r>
+              <a:rPr lang="en-US" sz="1920" dirty="0">
                 <a:solidFill>
                   <a:srgbClr val="003A63"/>
                 </a:solidFill>
@@ -13626,14 +13628,14 @@
               </a:rPr>
               <a:t>• Identify the roles, decisions, risks, and documentation needed for the topic.</a:t>
             </a:r>
-            <a:endParaRPr lang="en-US" sz="2100" dirty="0"/>
-          </a:p>
-          <a:p>
-            <a:pPr indent="0" marL="0">
-              <a:buNone/>
-            </a:pPr>
-            <a:r>
-              <a:rPr lang="en-US" sz="2100" dirty="0">
+            <a:endParaRPr lang="en-US" sz="1920" dirty="0"/>
+          </a:p>
+          <a:p>
+            <a:pPr indent="0" marL="0">
+              <a:buNone/>
+            </a:pPr>
+            <a:r>
+              <a:rPr lang="en-US" sz="1920" dirty="0">
                 <a:solidFill>
                   <a:srgbClr val="003A63"/>
                 </a:solidFill>
@@ -13643,7 +13645,7 @@
               </a:rPr>
               <a:t>• Apply the topic to a real or realistic public health workflow or decision.</a:t>
             </a:r>
-            <a:endParaRPr lang="en-US" sz="2100" dirty="0"/>
+            <a:endParaRPr lang="en-US" sz="1920" dirty="0"/>
           </a:p>
         </p:txBody>
       </p:sp>
@@ -13655,12 +13657,12 @@
         </p:nvSpPr>
         <p:spPr>
           <a:xfrm>
-            <a:off x="7635240" y="1325880"/>
-            <a:ext cx="3474720" cy="1255471"/>
+            <a:off x="7543800" y="1325880"/>
+            <a:ext cx="3611880" cy="1261872"/>
           </a:xfrm>
           <a:prstGeom prst="roundRect">
             <a:avLst>
-              <a:gd name="adj" fmla="val 8740"/>
+              <a:gd name="adj" fmla="val 8696"/>
             </a:avLst>
           </a:prstGeom>
           <a:solidFill>
@@ -13682,8 +13684,8 @@
         </p:nvSpPr>
         <p:spPr>
           <a:xfrm>
-            <a:off x="7799832" y="1472184"/>
-            <a:ext cx="3145536" cy="256032"/>
+            <a:off x="7708392" y="1453896"/>
+            <a:ext cx="3282696" cy="228600"/>
           </a:xfrm>
           <a:prstGeom prst="rect">
             <a:avLst/>
@@ -13699,7 +13701,7 @@
               <a:buNone/>
             </a:pPr>
             <a:r>
-              <a:rPr lang="en-US" sz="1300" b="1" dirty="0">
+              <a:rPr lang="en-US" sz="1220" b="1" dirty="0">
                 <a:solidFill>
                   <a:srgbClr val="0068B7"/>
                 </a:solidFill>
@@ -13709,7 +13711,7 @@
               </a:rPr>
               <a:t>Practice focus</a:t>
             </a:r>
-            <a:endParaRPr lang="en-US" sz="1300" dirty="0"/>
+            <a:endParaRPr lang="en-US" sz="1220" dirty="0"/>
           </a:p>
         </p:txBody>
       </p:sp>
@@ -13721,8 +13723,8 @@
         </p:nvSpPr>
         <p:spPr>
           <a:xfrm>
-            <a:off x="7799832" y="1801368"/>
-            <a:ext cx="3145536" cy="688543"/>
+            <a:off x="7708392" y="1764792"/>
+            <a:ext cx="3282696" cy="749808"/>
           </a:xfrm>
           <a:prstGeom prst="rect">
             <a:avLst/>
@@ -13740,7 +13742,7 @@
               <a:buNone/>
             </a:pPr>
             <a:r>
-              <a:rPr lang="en-US" sz="1320" dirty="0">
+              <a:rPr lang="en-US" sz="1220" dirty="0">
                 <a:solidFill>
                   <a:srgbClr val="17364A"/>
                 </a:solidFill>
@@ -13748,9 +13750,9 @@
                 <a:ea typeface="Aptos" pitchFamily="34" charset="-122"/>
                 <a:cs typeface="Aptos" pitchFamily="34" charset="-120"/>
               </a:rPr>
-              <a:t>Explain the purpose of ai for surveillance signal review and epidemiologic judgment in public health AI.</a:t>
-            </a:r>
-            <a:endParaRPr lang="en-US" sz="1320" dirty="0"/>
+              <a:t>Explain the purpose of ai for surveillance signal review and epidemiologic.</a:t>
+            </a:r>
+            <a:endParaRPr lang="en-US" sz="1220" dirty="0"/>
           </a:p>
         </p:txBody>
       </p:sp>
@@ -13762,12 +13764,12 @@
         </p:nvSpPr>
         <p:spPr>
           <a:xfrm>
-            <a:off x="7635240" y="2718511"/>
-            <a:ext cx="3474720" cy="1328623"/>
+            <a:off x="7543800" y="2724912"/>
+            <a:ext cx="3611880" cy="1527048"/>
           </a:xfrm>
           <a:prstGeom prst="roundRect">
             <a:avLst>
-              <a:gd name="adj" fmla="val 8259"/>
+              <a:gd name="adj" fmla="val 7186"/>
             </a:avLst>
           </a:prstGeom>
           <a:solidFill>
@@ -13789,8 +13791,8 @@
         </p:nvSpPr>
         <p:spPr>
           <a:xfrm>
-            <a:off x="7799832" y="2864815"/>
-            <a:ext cx="3145536" cy="256032"/>
+            <a:off x="7708392" y="2852928"/>
+            <a:ext cx="3282696" cy="228600"/>
           </a:xfrm>
           <a:prstGeom prst="rect">
             <a:avLst/>
@@ -13806,7 +13808,7 @@
               <a:buNone/>
             </a:pPr>
             <a:r>
-              <a:rPr lang="en-US" sz="1300" b="1" dirty="0">
+              <a:rPr lang="en-US" sz="1220" b="1" dirty="0">
                 <a:solidFill>
                   <a:srgbClr val="0068B7"/>
                 </a:solidFill>
@@ -13816,7 +13818,7 @@
               </a:rPr>
               <a:t>Concept checkpoints</a:t>
             </a:r>
-            <a:endParaRPr lang="en-US" sz="1300" dirty="0"/>
+            <a:endParaRPr lang="en-US" sz="1220" dirty="0"/>
           </a:p>
         </p:txBody>
       </p:sp>
@@ -13828,8 +13830,8 @@
         </p:nvSpPr>
         <p:spPr>
           <a:xfrm>
-            <a:off x="7818120" y="3230575"/>
-            <a:ext cx="3090672" cy="670255"/>
+            <a:off x="7726680" y="3182112"/>
+            <a:ext cx="3227832" cy="960120"/>
           </a:xfrm>
           <a:prstGeom prst="rect">
             <a:avLst/>
@@ -13847,7 +13849,7 @@
               <a:buNone/>
             </a:pPr>
             <a:r>
-              <a:rPr lang="en-US" sz="1220" dirty="0">
+              <a:rPr lang="en-US" sz="1140" dirty="0">
                 <a:solidFill>
                   <a:srgbClr val="17364A"/>
                 </a:solidFill>
@@ -13855,16 +13857,16 @@
                 <a:ea typeface="Aptos" pitchFamily="34" charset="-122"/>
                 <a:cs typeface="Aptos" pitchFamily="34" charset="-120"/>
               </a:rPr>
-              <a:t>Recognize equity, privacy, security, legal, operational, and.</a:t>
-            </a:r>
-            <a:endParaRPr lang="en-US" sz="1220" dirty="0"/>
-          </a:p>
-          <a:p>
-            <a:pPr indent="0" marL="0">
-              <a:buNone/>
-            </a:pPr>
-            <a:r>
-              <a:rPr lang="en-US" sz="1220" dirty="0">
+              <a:t>Recognize equity, privacy, security, legal,.</a:t>
+            </a:r>
+            <a:endParaRPr lang="en-US" sz="1140" dirty="0"/>
+          </a:p>
+          <a:p>
+            <a:pPr indent="0" marL="0">
+              <a:buNone/>
+            </a:pPr>
+            <a:r>
+              <a:rPr lang="en-US" sz="1140" dirty="0">
                 <a:solidFill>
                   <a:srgbClr val="17364A"/>
                 </a:solidFill>
@@ -13872,9 +13874,9 @@
                 <a:ea typeface="Aptos" pitchFamily="34" charset="-122"/>
                 <a:cs typeface="Aptos" pitchFamily="34" charset="-120"/>
               </a:rPr>
-              <a:t>Produce a practical artifact that supports readiness, governance,.</a:t>
-            </a:r>
-            <a:endParaRPr lang="en-US" sz="1220" dirty="0"/>
+              <a:t>Produce a practical artifact that supports.</a:t>
+            </a:r>
+            <a:endParaRPr lang="en-US" sz="1140" dirty="0"/>
           </a:p>
         </p:txBody>
       </p:sp>
@@ -13886,12 +13888,12 @@
         </p:nvSpPr>
         <p:spPr>
           <a:xfrm>
-            <a:off x="7635240" y="4184294"/>
-            <a:ext cx="3474720" cy="1466698"/>
+            <a:off x="7543800" y="4389120"/>
+            <a:ext cx="3611880" cy="1261872"/>
           </a:xfrm>
           <a:prstGeom prst="roundRect">
             <a:avLst>
-              <a:gd name="adj" fmla="val 7481"/>
+              <a:gd name="adj" fmla="val 8696"/>
             </a:avLst>
           </a:prstGeom>
           <a:solidFill>
@@ -13913,8 +13915,8 @@
         </p:nvSpPr>
         <p:spPr>
           <a:xfrm>
-            <a:off x="7799832" y="4330598"/>
-            <a:ext cx="3145536" cy="256032"/>
+            <a:off x="7708392" y="4517136"/>
+            <a:ext cx="3282696" cy="228600"/>
           </a:xfrm>
           <a:prstGeom prst="rect">
             <a:avLst/>
@@ -13930,7 +13932,7 @@
               <a:buNone/>
             </a:pPr>
             <a:r>
-              <a:rPr lang="en-US" sz="1300" b="1" dirty="0">
+              <a:rPr lang="en-US" sz="1220" b="1" dirty="0">
                 <a:solidFill>
                   <a:srgbClr val="0068B7"/>
                 </a:solidFill>
@@ -13940,7 +13942,7 @@
               </a:rPr>
               <a:t>What to produce</a:t>
             </a:r>
-            <a:endParaRPr lang="en-US" sz="1300" dirty="0"/>
+            <a:endParaRPr lang="en-US" sz="1220" dirty="0"/>
           </a:p>
         </p:txBody>
       </p:sp>
@@ -13952,8 +13954,8 @@
         </p:nvSpPr>
         <p:spPr>
           <a:xfrm>
-            <a:off x="7799832" y="4659782"/>
-            <a:ext cx="3145536" cy="899770"/>
+            <a:off x="7708392" y="4828032"/>
+            <a:ext cx="3282696" cy="749808"/>
           </a:xfrm>
           <a:prstGeom prst="rect">
             <a:avLst/>
@@ -13971,7 +13973,7 @@
               <a:buNone/>
             </a:pPr>
             <a:r>
-              <a:rPr lang="en-US" sz="1320" dirty="0">
+              <a:rPr lang="en-US" sz="1220" dirty="0">
                 <a:solidFill>
                   <a:srgbClr val="17364A"/>
                 </a:solidFill>
@@ -13979,9 +13981,9 @@
                 <a:ea typeface="Aptos" pitchFamily="34" charset="-122"/>
                 <a:cs typeface="Aptos" pitchFamily="34" charset="-120"/>
               </a:rPr>
-              <a:t>Use the assignment to test whether you can explain the concept, apply it to a realistic public health situation, and identify what would need review before the work moves forward.</a:t>
-            </a:r>
-            <a:endParaRPr lang="en-US" sz="1320" dirty="0"/>
+              <a:t>Use the assignment to test whether you can explain the concept, apply it to a.</a:t>
+            </a:r>
+            <a:endParaRPr lang="en-US" sz="1220" dirty="0"/>
           </a:p>
         </p:txBody>
       </p:sp>
@@ -14272,8 +14274,8 @@
         </p:nvSpPr>
         <p:spPr>
           <a:xfrm>
-            <a:off x="868680" y="1508760"/>
-            <a:ext cx="6309360" cy="4160520"/>
+            <a:off x="822960" y="1463040"/>
+            <a:ext cx="6565392" cy="4343400"/>
           </a:xfrm>
           <a:prstGeom prst="rect">
             <a:avLst/>
@@ -14291,7 +14293,7 @@
               <a:buNone/>
             </a:pPr>
             <a:r>
-              <a:rPr lang="en-US" sz="2100" dirty="0">
+              <a:rPr lang="en-US" sz="1920" dirty="0">
                 <a:solidFill>
                   <a:srgbClr val="003A63"/>
                 </a:solidFill>
@@ -14299,16 +14301,16 @@
                 <a:ea typeface="Aptos" pitchFamily="34" charset="-122"/>
                 <a:cs typeface="Aptos" pitchFamily="34" charset="-120"/>
               </a:rPr>
-              <a:t>• This module focuses on using AI to support signal detection while preserving epidemiologic.</a:t>
-            </a:r>
-            <a:endParaRPr lang="en-US" sz="2100" dirty="0"/>
-          </a:p>
-          <a:p>
-            <a:pPr indent="0" marL="0">
-              <a:buNone/>
-            </a:pPr>
-            <a:r>
-              <a:rPr lang="en-US" sz="2100" dirty="0">
+              <a:t>• This module focuses on using AI to support signal detection while preserving.</a:t>
+            </a:r>
+            <a:endParaRPr lang="en-US" sz="1920" dirty="0"/>
+          </a:p>
+          <a:p>
+            <a:pPr indent="0" marL="0">
+              <a:buNone/>
+            </a:pPr>
+            <a:r>
+              <a:rPr lang="en-US" sz="1920" dirty="0">
                 <a:solidFill>
                   <a:srgbClr val="003A63"/>
                 </a:solidFill>
@@ -14316,16 +14318,16 @@
                 <a:ea typeface="Aptos" pitchFamily="34" charset="-122"/>
                 <a:cs typeface="Aptos" pitchFamily="34" charset="-120"/>
               </a:rPr>
-              <a:t>• It is designed for public health staff who must translate responsible AI principles into.</a:t>
-            </a:r>
-            <a:endParaRPr lang="en-US" sz="2100" dirty="0"/>
-          </a:p>
-          <a:p>
-            <a:pPr indent="0" marL="0">
-              <a:buNone/>
-            </a:pPr>
-            <a:r>
-              <a:rPr lang="en-US" sz="2100" dirty="0">
+              <a:t>• It is designed for public health staff who must translate responsible AI.</a:t>
+            </a:r>
+            <a:endParaRPr lang="en-US" sz="1920" dirty="0"/>
+          </a:p>
+          <a:p>
+            <a:pPr indent="0" marL="0">
+              <a:buNone/>
+            </a:pPr>
+            <a:r>
+              <a:rPr lang="en-US" sz="1920" dirty="0">
                 <a:solidFill>
                   <a:srgbClr val="003A63"/>
                 </a:solidFill>
@@ -14333,9 +14335,9 @@
                 <a:ea typeface="Aptos" pitchFamily="34" charset="-122"/>
                 <a:cs typeface="Aptos" pitchFamily="34" charset="-120"/>
               </a:rPr>
-              <a:t>• The module helps learners move beyond general awareness by producing a practical artifact that.</a:t>
-            </a:r>
-            <a:endParaRPr lang="en-US" sz="2100" dirty="0"/>
+              <a:t>• The module helps learners move beyond general awareness by producing a.</a:t>
+            </a:r>
+            <a:endParaRPr lang="en-US" sz="1920" dirty="0"/>
           </a:p>
         </p:txBody>
       </p:sp>
@@ -14347,12 +14349,12 @@
         </p:nvSpPr>
         <p:spPr>
           <a:xfrm>
-            <a:off x="7635240" y="1325880"/>
-            <a:ext cx="3474720" cy="1255471"/>
+            <a:off x="7543800" y="1325880"/>
+            <a:ext cx="3611880" cy="1261872"/>
           </a:xfrm>
           <a:prstGeom prst="roundRect">
             <a:avLst>
-              <a:gd name="adj" fmla="val 8740"/>
+              <a:gd name="adj" fmla="val 8696"/>
             </a:avLst>
           </a:prstGeom>
           <a:solidFill>
@@ -14374,8 +14376,8 @@
         </p:nvSpPr>
         <p:spPr>
           <a:xfrm>
-            <a:off x="7799832" y="1472184"/>
-            <a:ext cx="3145536" cy="256032"/>
+            <a:off x="7708392" y="1453896"/>
+            <a:ext cx="3282696" cy="228600"/>
           </a:xfrm>
           <a:prstGeom prst="rect">
             <a:avLst/>
@@ -14391,7 +14393,7 @@
               <a:buNone/>
             </a:pPr>
             <a:r>
-              <a:rPr lang="en-US" sz="1300" b="1" dirty="0">
+              <a:rPr lang="en-US" sz="1220" b="1" dirty="0">
                 <a:solidFill>
                   <a:srgbClr val="0068B7"/>
                 </a:solidFill>
@@ -14401,7 +14403,7 @@
               </a:rPr>
               <a:t>Core concept</a:t>
             </a:r>
-            <a:endParaRPr lang="en-US" sz="1300" dirty="0"/>
+            <a:endParaRPr lang="en-US" sz="1220" dirty="0"/>
           </a:p>
         </p:txBody>
       </p:sp>
@@ -14413,8 +14415,8 @@
         </p:nvSpPr>
         <p:spPr>
           <a:xfrm>
-            <a:off x="7799832" y="1801368"/>
-            <a:ext cx="3145536" cy="688543"/>
+            <a:off x="7708392" y="1764792"/>
+            <a:ext cx="3282696" cy="749808"/>
           </a:xfrm>
           <a:prstGeom prst="rect">
             <a:avLst/>
@@ -14432,7 +14434,7 @@
               <a:buNone/>
             </a:pPr>
             <a:r>
-              <a:rPr lang="en-US" sz="1320" dirty="0">
+              <a:rPr lang="en-US" sz="1220" dirty="0">
                 <a:solidFill>
                   <a:srgbClr val="17364A"/>
                 </a:solidFill>
@@ -14440,9 +14442,9 @@
                 <a:ea typeface="Aptos" pitchFamily="34" charset="-122"/>
                 <a:cs typeface="Aptos" pitchFamily="34" charset="-120"/>
               </a:rPr>
-              <a:t>This module focuses on using AI to support signal detection while preserving epidemiologic judgment.</a:t>
-            </a:r>
-            <a:endParaRPr lang="en-US" sz="1320" dirty="0"/>
+              <a:t>This module focuses on using AI to support signal detection while preserving.</a:t>
+            </a:r>
+            <a:endParaRPr lang="en-US" sz="1220" dirty="0"/>
           </a:p>
         </p:txBody>
       </p:sp>
@@ -14454,12 +14456,12 @@
         </p:nvSpPr>
         <p:spPr>
           <a:xfrm>
-            <a:off x="7635240" y="2718511"/>
-            <a:ext cx="3474720" cy="1328623"/>
+            <a:off x="7543800" y="2724912"/>
+            <a:ext cx="3611880" cy="1527048"/>
           </a:xfrm>
           <a:prstGeom prst="roundRect">
             <a:avLst>
-              <a:gd name="adj" fmla="val 8259"/>
+              <a:gd name="adj" fmla="val 7186"/>
             </a:avLst>
           </a:prstGeom>
           <a:solidFill>
@@ -14481,24 +14483,26 @@
         </p:nvSpPr>
         <p:spPr>
           <a:xfrm>
-            <a:off x="7799832" y="2846527"/>
-            <a:ext cx="3145536" cy="237744"/>
-          </a:xfrm>
-          <a:prstGeom prst="rect">
-            <a:avLst/>
-          </a:prstGeom>
-          <a:noFill/>
-          <a:ln/>
-        </p:spPr>
-        <p:txBody>
-          <a:bodyPr wrap="square" lIns="0" tIns="0" rIns="0" bIns="0" rtlCol="0" anchor="ctr"/>
-          <a:lstStyle/>
-          <a:p>
-            <a:pPr indent="0" marL="0">
-              <a:buNone/>
-            </a:pPr>
-            <a:r>
-              <a:rPr lang="en-US" sz="1250" b="1" dirty="0">
+            <a:off x="7708392" y="2852928"/>
+            <a:ext cx="3282696" cy="219456"/>
+          </a:xfrm>
+          <a:prstGeom prst="rect">
+            <a:avLst/>
+          </a:prstGeom>
+          <a:noFill/>
+          <a:ln/>
+        </p:spPr>
+        <p:txBody>
+          <a:bodyPr wrap="square" lIns="0" tIns="0" rIns="0" bIns="0" rtlCol="0" anchor="ctr">
+            <a:normAutofit/>
+          </a:bodyPr>
+          <a:lstStyle/>
+          <a:p>
+            <a:pPr indent="0" marL="0">
+              <a:buNone/>
+            </a:pPr>
+            <a:r>
+              <a:rPr lang="en-US" sz="1160" b="1" dirty="0">
                 <a:solidFill>
                   <a:srgbClr val="0068B7"/>
                 </a:solidFill>
@@ -14508,7 +14512,7 @@
               </a:rPr>
               <a:t>Data-to-decision flow</a:t>
             </a:r>
-            <a:endParaRPr lang="en-US" sz="1250" dirty="0"/>
+            <a:endParaRPr lang="en-US" sz="1160" dirty="0"/>
           </a:p>
         </p:txBody>
       </p:sp>
@@ -14520,7 +14524,7 @@
         </p:nvSpPr>
         <p:spPr>
           <a:xfrm>
-            <a:off x="8763000" y="3399739"/>
+            <a:off x="8717280" y="3406140"/>
             <a:ext cx="164592" cy="0"/>
           </a:xfrm>
           <a:prstGeom prst="line">
@@ -14543,8 +14547,8 @@
         </p:nvSpPr>
         <p:spPr>
           <a:xfrm>
-            <a:off x="7872984" y="3248863"/>
-            <a:ext cx="890016" cy="301752"/>
+            <a:off x="7781544" y="3255264"/>
+            <a:ext cx="935736" cy="301752"/>
           </a:xfrm>
           <a:prstGeom prst="roundRect">
             <a:avLst>
@@ -14570,8 +14574,8 @@
         </p:nvSpPr>
         <p:spPr>
           <a:xfrm>
-            <a:off x="7909560" y="3322015"/>
-            <a:ext cx="816864" cy="146304"/>
+            <a:off x="7818120" y="3328416"/>
+            <a:ext cx="862584" cy="146304"/>
           </a:xfrm>
           <a:prstGeom prst="rect">
             <a:avLst/>
@@ -14611,7 +14615,7 @@
         </p:nvSpPr>
         <p:spPr>
           <a:xfrm>
-            <a:off x="9817608" y="3399739"/>
+            <a:off x="9817608" y="3406140"/>
             <a:ext cx="164592" cy="0"/>
           </a:xfrm>
           <a:prstGeom prst="line">
@@ -14634,8 +14638,8 @@
         </p:nvSpPr>
         <p:spPr>
           <a:xfrm>
-            <a:off x="8927592" y="3248863"/>
-            <a:ext cx="890016" cy="301752"/>
+            <a:off x="8881872" y="3255264"/>
+            <a:ext cx="935736" cy="301752"/>
           </a:xfrm>
           <a:prstGeom prst="roundRect">
             <a:avLst>
@@ -14661,8 +14665,8 @@
         </p:nvSpPr>
         <p:spPr>
           <a:xfrm>
-            <a:off x="8964168" y="3322015"/>
-            <a:ext cx="816864" cy="146304"/>
+            <a:off x="8918448" y="3328416"/>
+            <a:ext cx="862584" cy="146304"/>
           </a:xfrm>
           <a:prstGeom prst="rect">
             <a:avLst/>
@@ -14702,8 +14706,8 @@
         </p:nvSpPr>
         <p:spPr>
           <a:xfrm>
-            <a:off x="9982200" y="3248863"/>
-            <a:ext cx="890016" cy="301752"/>
+            <a:off x="9982200" y="3255264"/>
+            <a:ext cx="935736" cy="301752"/>
           </a:xfrm>
           <a:prstGeom prst="roundRect">
             <a:avLst>
@@ -14729,8 +14733,8 @@
         </p:nvSpPr>
         <p:spPr>
           <a:xfrm>
-            <a:off x="10018776" y="3322015"/>
-            <a:ext cx="816864" cy="146304"/>
+            <a:off x="10018776" y="3328416"/>
+            <a:ext cx="862584" cy="146304"/>
           </a:xfrm>
           <a:prstGeom prst="rect">
             <a:avLst/>
@@ -14770,8 +14774,8 @@
         </p:nvSpPr>
         <p:spPr>
           <a:xfrm>
-            <a:off x="7854696" y="3742639"/>
-            <a:ext cx="3035808" cy="158191"/>
+            <a:off x="7763256" y="3749040"/>
+            <a:ext cx="3172968" cy="356616"/>
           </a:xfrm>
           <a:prstGeom prst="rect">
             <a:avLst/>
@@ -14789,7 +14793,7 @@
               <a:buNone/>
             </a:pPr>
             <a:r>
-              <a:rPr lang="en-US" sz="1120" dirty="0">
+              <a:rPr lang="en-US" sz="1040" dirty="0">
                 <a:solidFill>
                   <a:srgbClr val="17364A"/>
                 </a:solidFill>
@@ -14797,9 +14801,9 @@
                 <a:ea typeface="Aptos" pitchFamily="34" charset="-122"/>
                 <a:cs typeface="Aptos" pitchFamily="34" charset="-120"/>
               </a:rPr>
-              <a:t>The important handoff is not from data to AI; it is from analysis to accountable human review.</a:t>
-            </a:r>
-            <a:endParaRPr lang="en-US" sz="1120" dirty="0"/>
+              <a:t>The important handoff is not from data to AI; it is from analysis to.</a:t>
+            </a:r>
+            <a:endParaRPr lang="en-US" sz="1040" dirty="0"/>
           </a:p>
         </p:txBody>
       </p:sp>
@@ -14811,12 +14815,12 @@
         </p:nvSpPr>
         <p:spPr>
           <a:xfrm>
-            <a:off x="7635240" y="4184294"/>
-            <a:ext cx="3474720" cy="1466698"/>
+            <a:off x="7543800" y="4389120"/>
+            <a:ext cx="3611880" cy="1261872"/>
           </a:xfrm>
           <a:prstGeom prst="roundRect">
             <a:avLst>
-              <a:gd name="adj" fmla="val 7481"/>
+              <a:gd name="adj" fmla="val 8696"/>
             </a:avLst>
           </a:prstGeom>
           <a:solidFill>
@@ -14838,8 +14842,8 @@
         </p:nvSpPr>
         <p:spPr>
           <a:xfrm>
-            <a:off x="7799832" y="4330598"/>
-            <a:ext cx="3145536" cy="256032"/>
+            <a:off x="7708392" y="4517136"/>
+            <a:ext cx="3282696" cy="228600"/>
           </a:xfrm>
           <a:prstGeom prst="rect">
             <a:avLst/>
@@ -14855,7 +14859,7 @@
               <a:buNone/>
             </a:pPr>
             <a:r>
-              <a:rPr lang="en-US" sz="1300" b="1" dirty="0">
+              <a:rPr lang="en-US" sz="1220" b="1" dirty="0">
                 <a:solidFill>
                   <a:srgbClr val="0068B7"/>
                 </a:solidFill>
@@ -14865,7 +14869,7 @@
               </a:rPr>
               <a:t>Apply it</a:t>
             </a:r>
-            <a:endParaRPr lang="en-US" sz="1300" dirty="0"/>
+            <a:endParaRPr lang="en-US" sz="1220" dirty="0"/>
           </a:p>
         </p:txBody>
       </p:sp>
@@ -14877,8 +14881,8 @@
         </p:nvSpPr>
         <p:spPr>
           <a:xfrm>
-            <a:off x="7799832" y="4659782"/>
-            <a:ext cx="3145536" cy="899770"/>
+            <a:off x="7708392" y="4828032"/>
+            <a:ext cx="3282696" cy="749808"/>
           </a:xfrm>
           <a:prstGeom prst="rect">
             <a:avLst/>
@@ -14896,7 +14900,7 @@
               <a:buNone/>
             </a:pPr>
             <a:r>
-              <a:rPr lang="en-US" sz="1320" dirty="0">
+              <a:rPr lang="en-US" sz="1220" dirty="0">
                 <a:solidFill>
                   <a:srgbClr val="17364A"/>
                 </a:solidFill>
@@ -14904,9 +14908,9 @@
                 <a:ea typeface="Aptos" pitchFamily="34" charset="-122"/>
                 <a:cs typeface="Aptos" pitchFamily="34" charset="-120"/>
               </a:rPr>
-              <a:t>Connect the concept to public health purpose, responsible use, required safeguards, documentation, and the next action a department should take.</a:t>
-            </a:r>
-            <a:endParaRPr lang="en-US" sz="1320" dirty="0"/>
+              <a:t>Connect the concept to public health purpose, responsible use, required.</a:t>
+            </a:r>
+            <a:endParaRPr lang="en-US" sz="1220" dirty="0"/>
           </a:p>
         </p:txBody>
       </p:sp>
@@ -15197,8 +15201,8 @@
         </p:nvSpPr>
         <p:spPr>
           <a:xfrm>
-            <a:off x="868680" y="1508760"/>
-            <a:ext cx="6309360" cy="4160520"/>
+            <a:off x="822960" y="1463040"/>
+            <a:ext cx="6565392" cy="4343400"/>
           </a:xfrm>
           <a:prstGeom prst="rect">
             <a:avLst/>
@@ -15216,7 +15220,7 @@
               <a:buNone/>
             </a:pPr>
             <a:r>
-              <a:rPr lang="en-US" sz="2100" dirty="0">
+              <a:rPr lang="en-US" sz="1920" dirty="0">
                 <a:solidFill>
                   <a:srgbClr val="003A63"/>
                 </a:solidFill>
@@ -15224,16 +15228,16 @@
                 <a:ea typeface="Aptos" pitchFamily="34" charset="-122"/>
                 <a:cs typeface="Aptos" pitchFamily="34" charset="-120"/>
               </a:rPr>
-              <a:t>• Decision right: The authority to approve, deny, modify, pause, or escalate an AI use case or.</a:t>
-            </a:r>
-            <a:endParaRPr lang="en-US" sz="2100" dirty="0"/>
-          </a:p>
-          <a:p>
-            <a:pPr indent="0" marL="0">
-              <a:buNone/>
-            </a:pPr>
-            <a:r>
-              <a:rPr lang="en-US" sz="2100" dirty="0">
+              <a:t>• Decision right: The authority to approve, deny, modify, pause, or escalate.</a:t>
+            </a:r>
+            <a:endParaRPr lang="en-US" sz="1920" dirty="0"/>
+          </a:p>
+          <a:p>
+            <a:pPr indent="0" marL="0">
+              <a:buNone/>
+            </a:pPr>
+            <a:r>
+              <a:rPr lang="en-US" sz="1920" dirty="0">
                 <a:solidFill>
                   <a:srgbClr val="003A63"/>
                 </a:solidFill>
@@ -15241,16 +15245,16 @@
                 <a:ea typeface="Aptos" pitchFamily="34" charset="-122"/>
                 <a:cs typeface="Aptos" pitchFamily="34" charset="-120"/>
               </a:rPr>
-              <a:t>• Evidence artifact: A document, log, checklist, test result, approval record, or review note.</a:t>
-            </a:r>
-            <a:endParaRPr lang="en-US" sz="2100" dirty="0"/>
-          </a:p>
-          <a:p>
-            <a:pPr indent="0" marL="0">
-              <a:buNone/>
-            </a:pPr>
-            <a:r>
-              <a:rPr lang="en-US" sz="2100" dirty="0">
+              <a:t>• Evidence artifact: A document, log, checklist, test result, approval record,.</a:t>
+            </a:r>
+            <a:endParaRPr lang="en-US" sz="1920" dirty="0"/>
+          </a:p>
+          <a:p>
+            <a:pPr indent="0" marL="0">
+              <a:buNone/>
+            </a:pPr>
+            <a:r>
+              <a:rPr lang="en-US" sz="1920" dirty="0">
                 <a:solidFill>
                   <a:srgbClr val="003A63"/>
                 </a:solidFill>
@@ -15258,9 +15262,9 @@
                 <a:ea typeface="Aptos" pitchFamily="34" charset="-122"/>
                 <a:cs typeface="Aptos" pitchFamily="34" charset="-120"/>
               </a:rPr>
-              <a:t>• Escalation pathway: A defined route for raising concerns to the appropriate reviewer or.</a:t>
-            </a:r>
-            <a:endParaRPr lang="en-US" sz="2100" dirty="0"/>
+              <a:t>• Escalation pathway: A defined route for raising concerns to the appropriate.</a:t>
+            </a:r>
+            <a:endParaRPr lang="en-US" sz="1920" dirty="0"/>
           </a:p>
         </p:txBody>
       </p:sp>
@@ -15272,12 +15276,12 @@
         </p:nvSpPr>
         <p:spPr>
           <a:xfrm>
-            <a:off x="7635240" y="1325880"/>
-            <a:ext cx="3474720" cy="1207008"/>
+            <a:off x="7543800" y="1325880"/>
+            <a:ext cx="3611880" cy="1261872"/>
           </a:xfrm>
           <a:prstGeom prst="roundRect">
             <a:avLst>
-              <a:gd name="adj" fmla="val 9091"/>
+              <a:gd name="adj" fmla="val 8696"/>
             </a:avLst>
           </a:prstGeom>
           <a:solidFill>
@@ -15299,8 +15303,8 @@
         </p:nvSpPr>
         <p:spPr>
           <a:xfrm>
-            <a:off x="7799832" y="1472184"/>
-            <a:ext cx="3145536" cy="256032"/>
+            <a:off x="7708392" y="1453896"/>
+            <a:ext cx="3282696" cy="228600"/>
           </a:xfrm>
           <a:prstGeom prst="rect">
             <a:avLst/>
@@ -15316,7 +15320,7 @@
               <a:buNone/>
             </a:pPr>
             <a:r>
-              <a:rPr lang="en-US" sz="1300" b="1" dirty="0">
+              <a:rPr lang="en-US" sz="1220" b="1" dirty="0">
                 <a:solidFill>
                   <a:srgbClr val="0068B7"/>
                 </a:solidFill>
@@ -15326,7 +15330,7 @@
               </a:rPr>
               <a:t>Core concept</a:t>
             </a:r>
-            <a:endParaRPr lang="en-US" sz="1300" dirty="0"/>
+            <a:endParaRPr lang="en-US" sz="1220" dirty="0"/>
           </a:p>
         </p:txBody>
       </p:sp>
@@ -15338,8 +15342,8 @@
         </p:nvSpPr>
         <p:spPr>
           <a:xfrm>
-            <a:off x="7799832" y="1801368"/>
-            <a:ext cx="3145536" cy="640080"/>
+            <a:off x="7708392" y="1764792"/>
+            <a:ext cx="3282696" cy="749808"/>
           </a:xfrm>
           <a:prstGeom prst="rect">
             <a:avLst/>
@@ -15357,7 +15361,7 @@
               <a:buNone/>
             </a:pPr>
             <a:r>
-              <a:rPr lang="en-US" sz="1320" dirty="0">
+              <a:rPr lang="en-US" sz="1220" dirty="0">
                 <a:solidFill>
                   <a:srgbClr val="17364A"/>
                 </a:solidFill>
@@ -15365,9 +15369,9 @@
                 <a:ea typeface="Aptos" pitchFamily="34" charset="-122"/>
                 <a:cs typeface="Aptos" pitchFamily="34" charset="-120"/>
               </a:rPr>
-              <a:t>Decision right: The authority to approve, deny, modify, pause, or escalate an AI use.</a:t>
-            </a:r>
-            <a:endParaRPr lang="en-US" sz="1320" dirty="0"/>
+              <a:t>Decision right: The authority to approve, deny, modify, pause, or escalate an AI.</a:t>
+            </a:r>
+            <a:endParaRPr lang="en-US" sz="1220" dirty="0"/>
           </a:p>
         </p:txBody>
       </p:sp>
@@ -15379,12 +15383,12 @@
         </p:nvSpPr>
         <p:spPr>
           <a:xfrm>
-            <a:off x="7635240" y="2670048"/>
-            <a:ext cx="3474720" cy="1377086"/>
+            <a:off x="7543800" y="2724912"/>
+            <a:ext cx="3611880" cy="1527048"/>
           </a:xfrm>
           <a:prstGeom prst="roundRect">
             <a:avLst>
-              <a:gd name="adj" fmla="val 7968"/>
+              <a:gd name="adj" fmla="val 7186"/>
             </a:avLst>
           </a:prstGeom>
           <a:solidFill>
@@ -15406,8 +15410,8 @@
         </p:nvSpPr>
         <p:spPr>
           <a:xfrm>
-            <a:off x="7799832" y="2816352"/>
-            <a:ext cx="3145536" cy="256032"/>
+            <a:off x="7708392" y="2852928"/>
+            <a:ext cx="3282696" cy="228600"/>
           </a:xfrm>
           <a:prstGeom prst="rect">
             <a:avLst/>
@@ -15423,7 +15427,7 @@
               <a:buNone/>
             </a:pPr>
             <a:r>
-              <a:rPr lang="en-US" sz="1300" b="1" dirty="0">
+              <a:rPr lang="en-US" sz="1220" b="1" dirty="0">
                 <a:solidFill>
                   <a:srgbClr val="0068B7"/>
                 </a:solidFill>
@@ -15433,7 +15437,7 @@
               </a:rPr>
               <a:t>Concept checkpoints</a:t>
             </a:r>
-            <a:endParaRPr lang="en-US" sz="1300" dirty="0"/>
+            <a:endParaRPr lang="en-US" sz="1220" dirty="0"/>
           </a:p>
         </p:txBody>
       </p:sp>
@@ -15445,8 +15449,8 @@
         </p:nvSpPr>
         <p:spPr>
           <a:xfrm>
-            <a:off x="7818120" y="3182112"/>
-            <a:ext cx="3090672" cy="718718"/>
+            <a:off x="7726680" y="3182112"/>
+            <a:ext cx="3227832" cy="960120"/>
           </a:xfrm>
           <a:prstGeom prst="rect">
             <a:avLst/>
@@ -15464,7 +15468,7 @@
               <a:buNone/>
             </a:pPr>
             <a:r>
-              <a:rPr lang="en-US" sz="1220" dirty="0">
+              <a:rPr lang="en-US" sz="1140" dirty="0">
                 <a:solidFill>
                   <a:srgbClr val="17364A"/>
                 </a:solidFill>
@@ -15472,16 +15476,16 @@
                 <a:ea typeface="Aptos" pitchFamily="34" charset="-122"/>
                 <a:cs typeface="Aptos" pitchFamily="34" charset="-120"/>
               </a:rPr>
-              <a:t>Decision right: The authority to approve, deny, modify, pause, or.</a:t>
-            </a:r>
-            <a:endParaRPr lang="en-US" sz="1220" dirty="0"/>
-          </a:p>
-          <a:p>
-            <a:pPr indent="0" marL="0">
-              <a:buNone/>
-            </a:pPr>
-            <a:r>
-              <a:rPr lang="en-US" sz="1220" dirty="0">
+              <a:t>Decision right: The authority to approve, deny,.</a:t>
+            </a:r>
+            <a:endParaRPr lang="en-US" sz="1140" dirty="0"/>
+          </a:p>
+          <a:p>
+            <a:pPr indent="0" marL="0">
+              <a:buNone/>
+            </a:pPr>
+            <a:r>
+              <a:rPr lang="en-US" sz="1140" dirty="0">
                 <a:solidFill>
                   <a:srgbClr val="17364A"/>
                 </a:solidFill>
@@ -15489,16 +15493,16 @@
                 <a:ea typeface="Aptos" pitchFamily="34" charset="-122"/>
                 <a:cs typeface="Aptos" pitchFamily="34" charset="-120"/>
               </a:rPr>
-              <a:t>Evidence artifact: A document, log, checklist, test result,.</a:t>
-            </a:r>
-            <a:endParaRPr lang="en-US" sz="1220" dirty="0"/>
-          </a:p>
-          <a:p>
-            <a:pPr indent="0" marL="0">
-              <a:buNone/>
-            </a:pPr>
-            <a:r>
-              <a:rPr lang="en-US" sz="1220" dirty="0">
+              <a:t>Evidence artifact: A document, log, checklist,.</a:t>
+            </a:r>
+            <a:endParaRPr lang="en-US" sz="1140" dirty="0"/>
+          </a:p>
+          <a:p>
+            <a:pPr indent="0" marL="0">
+              <a:buNone/>
+            </a:pPr>
+            <a:r>
+              <a:rPr lang="en-US" sz="1140" dirty="0">
                 <a:solidFill>
                   <a:srgbClr val="17364A"/>
                 </a:solidFill>
@@ -15506,9 +15510,9 @@
                 <a:ea typeface="Aptos" pitchFamily="34" charset="-122"/>
                 <a:cs typeface="Aptos" pitchFamily="34" charset="-120"/>
               </a:rPr>
-              <a:t>Accountability owner: The person or role responsible for ensuring.</a:t>
-            </a:r>
-            <a:endParaRPr lang="en-US" sz="1220" dirty="0"/>
+              <a:t>Accountability owner: The person or role.</a:t>
+            </a:r>
+            <a:endParaRPr lang="en-US" sz="1140" dirty="0"/>
           </a:p>
         </p:txBody>
       </p:sp>
@@ -15520,12 +15524,12 @@
         </p:nvSpPr>
         <p:spPr>
           <a:xfrm>
-            <a:off x="7635240" y="4184294"/>
-            <a:ext cx="3474720" cy="1466698"/>
+            <a:off x="7543800" y="4389120"/>
+            <a:ext cx="3611880" cy="1261872"/>
           </a:xfrm>
           <a:prstGeom prst="roundRect">
             <a:avLst>
-              <a:gd name="adj" fmla="val 7481"/>
+              <a:gd name="adj" fmla="val 8696"/>
             </a:avLst>
           </a:prstGeom>
           <a:solidFill>
@@ -15547,8 +15551,8 @@
         </p:nvSpPr>
         <p:spPr>
           <a:xfrm>
-            <a:off x="7799832" y="4330598"/>
-            <a:ext cx="3145536" cy="256032"/>
+            <a:off x="7708392" y="4517136"/>
+            <a:ext cx="3282696" cy="228600"/>
           </a:xfrm>
           <a:prstGeom prst="rect">
             <a:avLst/>
@@ -15564,7 +15568,7 @@
               <a:buNone/>
             </a:pPr>
             <a:r>
-              <a:rPr lang="en-US" sz="1300" b="1" dirty="0">
+              <a:rPr lang="en-US" sz="1220" b="1" dirty="0">
                 <a:solidFill>
                   <a:srgbClr val="0068B7"/>
                 </a:solidFill>
@@ -15574,7 +15578,7 @@
               </a:rPr>
               <a:t>Apply it</a:t>
             </a:r>
-            <a:endParaRPr lang="en-US" sz="1300" dirty="0"/>
+            <a:endParaRPr lang="en-US" sz="1220" dirty="0"/>
           </a:p>
         </p:txBody>
       </p:sp>
@@ -15586,8 +15590,8 @@
         </p:nvSpPr>
         <p:spPr>
           <a:xfrm>
-            <a:off x="7799832" y="4659782"/>
-            <a:ext cx="3145536" cy="899770"/>
+            <a:off x="7708392" y="4828032"/>
+            <a:ext cx="3282696" cy="749808"/>
           </a:xfrm>
           <a:prstGeom prst="rect">
             <a:avLst/>
@@ -15605,7 +15609,7 @@
               <a:buNone/>
             </a:pPr>
             <a:r>
-              <a:rPr lang="en-US" sz="1320" dirty="0">
+              <a:rPr lang="en-US" sz="1220" dirty="0">
                 <a:solidFill>
                   <a:srgbClr val="17364A"/>
                 </a:solidFill>
@@ -15613,9 +15617,9 @@
                 <a:ea typeface="Aptos" pitchFamily="34" charset="-122"/>
                 <a:cs typeface="Aptos" pitchFamily="34" charset="-120"/>
               </a:rPr>
-              <a:t>Connect the concept to public health purpose, responsible use, required safeguards, documentation, and the next action a department should take.</a:t>
-            </a:r>
-            <a:endParaRPr lang="en-US" sz="1320" dirty="0"/>
+              <a:t>Connect the concept to public health purpose, responsible use, required.</a:t>
+            </a:r>
+            <a:endParaRPr lang="en-US" sz="1220" dirty="0"/>
           </a:p>
         </p:txBody>
       </p:sp>
@@ -15906,8 +15910,8 @@
         </p:nvSpPr>
         <p:spPr>
           <a:xfrm>
-            <a:off x="868680" y="1508760"/>
-            <a:ext cx="6309360" cy="4160520"/>
+            <a:off x="822960" y="1463040"/>
+            <a:ext cx="6565392" cy="4343400"/>
           </a:xfrm>
           <a:prstGeom prst="rect">
             <a:avLst/>
@@ -15925,7 +15929,7 @@
               <a:buNone/>
             </a:pPr>
             <a:r>
-              <a:rPr lang="en-US" sz="2100" dirty="0">
+              <a:rPr lang="en-US" sz="1920" dirty="0">
                 <a:solidFill>
                   <a:srgbClr val="003A63"/>
                 </a:solidFill>
@@ -15933,16 +15937,16 @@
                 <a:ea typeface="Aptos" pitchFamily="34" charset="-122"/>
                 <a:cs typeface="Aptos" pitchFamily="34" charset="-120"/>
               </a:rPr>
-              <a:t>• AI for Surveillance Signal Review and Epidemiologic Judgment matters because AI adoption.</a:t>
-            </a:r>
-            <a:endParaRPr lang="en-US" sz="2100" dirty="0"/>
-          </a:p>
-          <a:p>
-            <a:pPr indent="0" marL="0">
-              <a:buNone/>
-            </a:pPr>
-            <a:r>
-              <a:rPr lang="en-US" sz="2100" dirty="0">
+              <a:t>• AI for Surveillance Signal Review and Epidemiologic Judgment matters because.</a:t>
+            </a:r>
+            <a:endParaRPr lang="en-US" sz="1920" dirty="0"/>
+          </a:p>
+          <a:p>
+            <a:pPr indent="0" marL="0">
+              <a:buNone/>
+            </a:pPr>
+            <a:r>
+              <a:rPr lang="en-US" sz="1920" dirty="0">
                 <a:solidFill>
                   <a:srgbClr val="003A63"/>
                 </a:solidFill>
@@ -15950,16 +15954,16 @@
                 <a:ea typeface="Aptos" pitchFamily="34" charset="-122"/>
                 <a:cs typeface="Aptos" pitchFamily="34" charset="-120"/>
               </a:rPr>
-              <a:t>• Without a structured approach, staff may rely on informal practices, vendor assurances, or.</a:t>
-            </a:r>
-            <a:endParaRPr lang="en-US" sz="2100" dirty="0"/>
-          </a:p>
-          <a:p>
-            <a:pPr indent="0" marL="0">
-              <a:buNone/>
-            </a:pPr>
-            <a:r>
-              <a:rPr lang="en-US" sz="2100" dirty="0">
+              <a:t>• Without a structured approach, staff may rely on informal practices, vendor.</a:t>
+            </a:r>
+            <a:endParaRPr lang="en-US" sz="1920" dirty="0"/>
+          </a:p>
+          <a:p>
+            <a:pPr indent="0" marL="0">
+              <a:buNone/>
+            </a:pPr>
+            <a:r>
+              <a:rPr lang="en-US" sz="1920" dirty="0">
                 <a:solidFill>
                   <a:srgbClr val="003A63"/>
                 </a:solidFill>
@@ -15967,9 +15971,9 @@
                 <a:ea typeface="Aptos" pitchFamily="34" charset="-122"/>
                 <a:cs typeface="Aptos" pitchFamily="34" charset="-120"/>
               </a:rPr>
-              <a:t>• Public health agencies operate under legal authorities, public accountability, resource.</a:t>
-            </a:r>
-            <a:endParaRPr lang="en-US" sz="2100" dirty="0"/>
+              <a:t>• Public health agencies operate under legal authorities, public.</a:t>
+            </a:r>
+            <a:endParaRPr lang="en-US" sz="1920" dirty="0"/>
           </a:p>
         </p:txBody>
       </p:sp>
@@ -15981,12 +15985,12 @@
         </p:nvSpPr>
         <p:spPr>
           <a:xfrm>
-            <a:off x="7635240" y="1325880"/>
-            <a:ext cx="3474720" cy="1255471"/>
+            <a:off x="7543800" y="1325880"/>
+            <a:ext cx="3611880" cy="1261872"/>
           </a:xfrm>
           <a:prstGeom prst="roundRect">
             <a:avLst>
-              <a:gd name="adj" fmla="val 8740"/>
+              <a:gd name="adj" fmla="val 8696"/>
             </a:avLst>
           </a:prstGeom>
           <a:solidFill>
@@ -16008,8 +16012,8 @@
         </p:nvSpPr>
         <p:spPr>
           <a:xfrm>
-            <a:off x="7799832" y="1472184"/>
-            <a:ext cx="3145536" cy="256032"/>
+            <a:off x="7708392" y="1453896"/>
+            <a:ext cx="3282696" cy="228600"/>
           </a:xfrm>
           <a:prstGeom prst="rect">
             <a:avLst/>
@@ -16025,7 +16029,7 @@
               <a:buNone/>
             </a:pPr>
             <a:r>
-              <a:rPr lang="en-US" sz="1300" b="1" dirty="0">
+              <a:rPr lang="en-US" sz="1220" b="1" dirty="0">
                 <a:solidFill>
                   <a:srgbClr val="0068B7"/>
                 </a:solidFill>
@@ -16035,7 +16039,7 @@
               </a:rPr>
               <a:t>Core concept</a:t>
             </a:r>
-            <a:endParaRPr lang="en-US" sz="1300" dirty="0"/>
+            <a:endParaRPr lang="en-US" sz="1220" dirty="0"/>
           </a:p>
         </p:txBody>
       </p:sp>
@@ -16047,8 +16051,8 @@
         </p:nvSpPr>
         <p:spPr>
           <a:xfrm>
-            <a:off x="7799832" y="1801368"/>
-            <a:ext cx="3145536" cy="688543"/>
+            <a:off x="7708392" y="1764792"/>
+            <a:ext cx="3282696" cy="749808"/>
           </a:xfrm>
           <a:prstGeom prst="rect">
             <a:avLst/>
@@ -16066,7 +16070,7 @@
               <a:buNone/>
             </a:pPr>
             <a:r>
-              <a:rPr lang="en-US" sz="1320" dirty="0">
+              <a:rPr lang="en-US" sz="1220" dirty="0">
                 <a:solidFill>
                   <a:srgbClr val="17364A"/>
                 </a:solidFill>
@@ -16074,9 +16078,9 @@
                 <a:ea typeface="Aptos" pitchFamily="34" charset="-122"/>
                 <a:cs typeface="Aptos" pitchFamily="34" charset="-120"/>
               </a:rPr>
-              <a:t>AI for Surveillance Signal Review and Epidemiologic Judgment matters because AI adoption changes how.</a:t>
-            </a:r>
-            <a:endParaRPr lang="en-US" sz="1320" dirty="0"/>
+              <a:t>AI for Surveillance Signal Review and Epidemiologic Judgment matters because AI.</a:t>
+            </a:r>
+            <a:endParaRPr lang="en-US" sz="1220" dirty="0"/>
           </a:p>
         </p:txBody>
       </p:sp>
@@ -16088,12 +16092,12 @@
         </p:nvSpPr>
         <p:spPr>
           <a:xfrm>
-            <a:off x="7635240" y="2718511"/>
-            <a:ext cx="3474720" cy="1328623"/>
+            <a:off x="7543800" y="2724912"/>
+            <a:ext cx="3611880" cy="1527048"/>
           </a:xfrm>
           <a:prstGeom prst="roundRect">
             <a:avLst>
-              <a:gd name="adj" fmla="val 8259"/>
+              <a:gd name="adj" fmla="val 7186"/>
             </a:avLst>
           </a:prstGeom>
           <a:solidFill>
@@ -16115,24 +16119,26 @@
         </p:nvSpPr>
         <p:spPr>
           <a:xfrm>
-            <a:off x="7799832" y="2846527"/>
-            <a:ext cx="3145536" cy="237744"/>
-          </a:xfrm>
-          <a:prstGeom prst="rect">
-            <a:avLst/>
-          </a:prstGeom>
-          <a:noFill/>
-          <a:ln/>
-        </p:spPr>
-        <p:txBody>
-          <a:bodyPr wrap="square" lIns="0" tIns="0" rIns="0" bIns="0" rtlCol="0" anchor="ctr"/>
-          <a:lstStyle/>
-          <a:p>
-            <a:pPr indent="0" marL="0">
-              <a:buNone/>
-            </a:pPr>
-            <a:r>
-              <a:rPr lang="en-US" sz="1250" b="1" dirty="0">
+            <a:off x="7708392" y="2852928"/>
+            <a:ext cx="3282696" cy="219456"/>
+          </a:xfrm>
+          <a:prstGeom prst="rect">
+            <a:avLst/>
+          </a:prstGeom>
+          <a:noFill/>
+          <a:ln/>
+        </p:spPr>
+        <p:txBody>
+          <a:bodyPr wrap="square" lIns="0" tIns="0" rIns="0" bIns="0" rtlCol="0" anchor="ctr">
+            <a:normAutofit/>
+          </a:bodyPr>
+          <a:lstStyle/>
+          <a:p>
+            <a:pPr indent="0" marL="0">
+              <a:buNone/>
+            </a:pPr>
+            <a:r>
+              <a:rPr lang="en-US" sz="1160" b="1" dirty="0">
                 <a:solidFill>
                   <a:srgbClr val="0068B7"/>
                 </a:solidFill>
@@ -16142,7 +16148,7 @@
               </a:rPr>
               <a:t>Data-to-decision flow</a:t>
             </a:r>
-            <a:endParaRPr lang="en-US" sz="1250" dirty="0"/>
+            <a:endParaRPr lang="en-US" sz="1160" dirty="0"/>
           </a:p>
         </p:txBody>
       </p:sp>
@@ -16154,7 +16160,7 @@
         </p:nvSpPr>
         <p:spPr>
           <a:xfrm>
-            <a:off x="8763000" y="3399739"/>
+            <a:off x="8717280" y="3406140"/>
             <a:ext cx="164592" cy="0"/>
           </a:xfrm>
           <a:prstGeom prst="line">
@@ -16177,8 +16183,8 @@
         </p:nvSpPr>
         <p:spPr>
           <a:xfrm>
-            <a:off x="7872984" y="3248863"/>
-            <a:ext cx="890016" cy="301752"/>
+            <a:off x="7781544" y="3255264"/>
+            <a:ext cx="935736" cy="301752"/>
           </a:xfrm>
           <a:prstGeom prst="roundRect">
             <a:avLst>
@@ -16204,8 +16210,8 @@
         </p:nvSpPr>
         <p:spPr>
           <a:xfrm>
-            <a:off x="7909560" y="3322015"/>
-            <a:ext cx="816864" cy="146304"/>
+            <a:off x="7818120" y="3328416"/>
+            <a:ext cx="862584" cy="146304"/>
           </a:xfrm>
           <a:prstGeom prst="rect">
             <a:avLst/>
@@ -16245,7 +16251,7 @@
         </p:nvSpPr>
         <p:spPr>
           <a:xfrm>
-            <a:off x="9817608" y="3399739"/>
+            <a:off x="9817608" y="3406140"/>
             <a:ext cx="164592" cy="0"/>
           </a:xfrm>
           <a:prstGeom prst="line">
@@ -16268,8 +16274,8 @@
         </p:nvSpPr>
         <p:spPr>
           <a:xfrm>
-            <a:off x="8927592" y="3248863"/>
-            <a:ext cx="890016" cy="301752"/>
+            <a:off x="8881872" y="3255264"/>
+            <a:ext cx="935736" cy="301752"/>
           </a:xfrm>
           <a:prstGeom prst="roundRect">
             <a:avLst>
@@ -16295,8 +16301,8 @@
         </p:nvSpPr>
         <p:spPr>
           <a:xfrm>
-            <a:off x="8964168" y="3322015"/>
-            <a:ext cx="816864" cy="146304"/>
+            <a:off x="8918448" y="3328416"/>
+            <a:ext cx="862584" cy="146304"/>
           </a:xfrm>
           <a:prstGeom prst="rect">
             <a:avLst/>
@@ -16336,8 +16342,8 @@
         </p:nvSpPr>
         <p:spPr>
           <a:xfrm>
-            <a:off x="9982200" y="3248863"/>
-            <a:ext cx="890016" cy="301752"/>
+            <a:off x="9982200" y="3255264"/>
+            <a:ext cx="935736" cy="301752"/>
           </a:xfrm>
           <a:prstGeom prst="roundRect">
             <a:avLst>
@@ -16363,8 +16369,8 @@
         </p:nvSpPr>
         <p:spPr>
           <a:xfrm>
-            <a:off x="10018776" y="3322015"/>
-            <a:ext cx="816864" cy="146304"/>
+            <a:off x="10018776" y="3328416"/>
+            <a:ext cx="862584" cy="146304"/>
           </a:xfrm>
           <a:prstGeom prst="rect">
             <a:avLst/>
@@ -16404,8 +16410,8 @@
         </p:nvSpPr>
         <p:spPr>
           <a:xfrm>
-            <a:off x="7854696" y="3742639"/>
-            <a:ext cx="3035808" cy="158191"/>
+            <a:off x="7763256" y="3749040"/>
+            <a:ext cx="3172968" cy="356616"/>
           </a:xfrm>
           <a:prstGeom prst="rect">
             <a:avLst/>
@@ -16423,7 +16429,7 @@
               <a:buNone/>
             </a:pPr>
             <a:r>
-              <a:rPr lang="en-US" sz="1120" dirty="0">
+              <a:rPr lang="en-US" sz="1040" dirty="0">
                 <a:solidFill>
                   <a:srgbClr val="17364A"/>
                 </a:solidFill>
@@ -16431,9 +16437,9 @@
                 <a:ea typeface="Aptos" pitchFamily="34" charset="-122"/>
                 <a:cs typeface="Aptos" pitchFamily="34" charset="-120"/>
               </a:rPr>
-              <a:t>The important handoff is not from data to AI; it is from analysis to accountable human review.</a:t>
-            </a:r>
-            <a:endParaRPr lang="en-US" sz="1120" dirty="0"/>
+              <a:t>The important handoff is not from data to AI; it is from analysis to.</a:t>
+            </a:r>
+            <a:endParaRPr lang="en-US" sz="1040" dirty="0"/>
           </a:p>
         </p:txBody>
       </p:sp>
@@ -16445,12 +16451,12 @@
         </p:nvSpPr>
         <p:spPr>
           <a:xfrm>
-            <a:off x="7635240" y="4184294"/>
-            <a:ext cx="3474720" cy="1466698"/>
+            <a:off x="7543800" y="4389120"/>
+            <a:ext cx="3611880" cy="1261872"/>
           </a:xfrm>
           <a:prstGeom prst="roundRect">
             <a:avLst>
-              <a:gd name="adj" fmla="val 7481"/>
+              <a:gd name="adj" fmla="val 8696"/>
             </a:avLst>
           </a:prstGeom>
           <a:solidFill>
@@ -16472,8 +16478,8 @@
         </p:nvSpPr>
         <p:spPr>
           <a:xfrm>
-            <a:off x="7799832" y="4330598"/>
-            <a:ext cx="3145536" cy="256032"/>
+            <a:off x="7708392" y="4517136"/>
+            <a:ext cx="3282696" cy="228600"/>
           </a:xfrm>
           <a:prstGeom prst="rect">
             <a:avLst/>
@@ -16489,7 +16495,7 @@
               <a:buNone/>
             </a:pPr>
             <a:r>
-              <a:rPr lang="en-US" sz="1300" b="1" dirty="0">
+              <a:rPr lang="en-US" sz="1220" b="1" dirty="0">
                 <a:solidFill>
                   <a:srgbClr val="0068B7"/>
                 </a:solidFill>
@@ -16499,7 +16505,7 @@
               </a:rPr>
               <a:t>Apply it</a:t>
             </a:r>
-            <a:endParaRPr lang="en-US" sz="1300" dirty="0"/>
+            <a:endParaRPr lang="en-US" sz="1220" dirty="0"/>
           </a:p>
         </p:txBody>
       </p:sp>
@@ -16511,8 +16517,8 @@
         </p:nvSpPr>
         <p:spPr>
           <a:xfrm>
-            <a:off x="7799832" y="4659782"/>
-            <a:ext cx="3145536" cy="899770"/>
+            <a:off x="7708392" y="4828032"/>
+            <a:ext cx="3282696" cy="749808"/>
           </a:xfrm>
           <a:prstGeom prst="rect">
             <a:avLst/>
@@ -16530,7 +16536,7 @@
               <a:buNone/>
             </a:pPr>
             <a:r>
-              <a:rPr lang="en-US" sz="1320" dirty="0">
+              <a:rPr lang="en-US" sz="1220" dirty="0">
                 <a:solidFill>
                   <a:srgbClr val="17364A"/>
                 </a:solidFill>
@@ -16538,9 +16544,9 @@
                 <a:ea typeface="Aptos" pitchFamily="34" charset="-122"/>
                 <a:cs typeface="Aptos" pitchFamily="34" charset="-120"/>
               </a:rPr>
-              <a:t>Connect the concept to public health purpose, responsible use, required safeguards, documentation, and the next action a department should take.</a:t>
-            </a:r>
-            <a:endParaRPr lang="en-US" sz="1320" dirty="0"/>
+              <a:t>Connect the concept to public health purpose, responsible use, required.</a:t>
+            </a:r>
+            <a:endParaRPr lang="en-US" sz="1220" dirty="0"/>
           </a:p>
         </p:txBody>
       </p:sp>
@@ -16831,8 +16837,8 @@
         </p:nvSpPr>
         <p:spPr>
           <a:xfrm>
-            <a:off x="868680" y="1508760"/>
-            <a:ext cx="6309360" cy="4160520"/>
+            <a:off x="822960" y="1463040"/>
+            <a:ext cx="6565392" cy="4343400"/>
           </a:xfrm>
           <a:prstGeom prst="rect">
             <a:avLst/>
@@ -16850,7 +16856,7 @@
               <a:buNone/>
             </a:pPr>
             <a:r>
-              <a:rPr lang="en-US" sz="2100" dirty="0">
+              <a:rPr lang="en-US" sz="1920" dirty="0">
                 <a:solidFill>
                   <a:srgbClr val="003A63"/>
                 </a:solidFill>
@@ -16858,16 +16864,16 @@
                 <a:ea typeface="Aptos" pitchFamily="34" charset="-122"/>
                 <a:cs typeface="Aptos" pitchFamily="34" charset="-120"/>
               </a:rPr>
-              <a:t>• A public health agency is preparing to use AI in a workflow related to using AI to support.</a:t>
-            </a:r>
-            <a:endParaRPr lang="en-US" sz="2100" dirty="0"/>
-          </a:p>
-          <a:p>
-            <a:pPr indent="0" marL="0">
-              <a:buNone/>
-            </a:pPr>
-            <a:r>
-              <a:rPr lang="en-US" sz="2100" dirty="0">
+              <a:t>• A public health agency is preparing to use AI in a workflow related to using.</a:t>
+            </a:r>
+            <a:endParaRPr lang="en-US" sz="1920" dirty="0"/>
+          </a:p>
+          <a:p>
+            <a:pPr indent="0" marL="0">
+              <a:buNone/>
+            </a:pPr>
+            <a:r>
+              <a:rPr lang="en-US" sz="1920" dirty="0">
                 <a:solidFill>
                   <a:srgbClr val="003A63"/>
                 </a:solidFill>
@@ -16875,16 +16881,16 @@
                 <a:ea typeface="Aptos" pitchFamily="34" charset="-122"/>
                 <a:cs typeface="Aptos" pitchFamily="34" charset="-120"/>
               </a:rPr>
-              <a:t>• The project team initially treats the tool as a helpful efficiency aid, but governance.</a:t>
-            </a:r>
-            <a:endParaRPr lang="en-US" sz="2100" dirty="0"/>
-          </a:p>
-          <a:p>
-            <a:pPr indent="0" marL="0">
-              <a:buNone/>
-            </a:pPr>
-            <a:r>
-              <a:rPr lang="en-US" sz="2100" dirty="0">
+              <a:t>• The project team initially treats the tool as a helpful efficiency aid, but.</a:t>
+            </a:r>
+            <a:endParaRPr lang="en-US" sz="1920" dirty="0"/>
+          </a:p>
+          <a:p>
+            <a:pPr indent="0" marL="0">
+              <a:buNone/>
+            </a:pPr>
+            <a:r>
+              <a:rPr lang="en-US" sz="1920" dirty="0">
                 <a:solidFill>
                   <a:srgbClr val="003A63"/>
                 </a:solidFill>
@@ -16892,9 +16898,9 @@
                 <a:ea typeface="Aptos" pitchFamily="34" charset="-122"/>
                 <a:cs typeface="Aptos" pitchFamily="34" charset="-120"/>
               </a:rPr>
-              <a:t>• The agency responds by creating a clear artifact that defines intended use, prohibited use,.</a:t>
-            </a:r>
-            <a:endParaRPr lang="en-US" sz="2100" dirty="0"/>
+              <a:t>• The agency responds by creating a clear artifact that defines intended use,.</a:t>
+            </a:r>
+            <a:endParaRPr lang="en-US" sz="1920" dirty="0"/>
           </a:p>
         </p:txBody>
       </p:sp>
@@ -16906,12 +16912,12 @@
         </p:nvSpPr>
         <p:spPr>
           <a:xfrm>
-            <a:off x="7635240" y="1325880"/>
-            <a:ext cx="3474720" cy="1255471"/>
+            <a:off x="7543800" y="1325880"/>
+            <a:ext cx="3611880" cy="1261872"/>
           </a:xfrm>
           <a:prstGeom prst="roundRect">
             <a:avLst>
-              <a:gd name="adj" fmla="val 8740"/>
+              <a:gd name="adj" fmla="val 8696"/>
             </a:avLst>
           </a:prstGeom>
           <a:solidFill>
@@ -16933,8 +16939,8 @@
         </p:nvSpPr>
         <p:spPr>
           <a:xfrm>
-            <a:off x="7799832" y="1472184"/>
-            <a:ext cx="3145536" cy="256032"/>
+            <a:off x="7708392" y="1453896"/>
+            <a:ext cx="3282696" cy="228600"/>
           </a:xfrm>
           <a:prstGeom prst="rect">
             <a:avLst/>
@@ -16950,7 +16956,7 @@
               <a:buNone/>
             </a:pPr>
             <a:r>
-              <a:rPr lang="en-US" sz="1300" b="1" dirty="0">
+              <a:rPr lang="en-US" sz="1220" b="1" dirty="0">
                 <a:solidFill>
                   <a:srgbClr val="0068B7"/>
                 </a:solidFill>
@@ -16960,7 +16966,7 @@
               </a:rPr>
               <a:t>Core concept</a:t>
             </a:r>
-            <a:endParaRPr lang="en-US" sz="1300" dirty="0"/>
+            <a:endParaRPr lang="en-US" sz="1220" dirty="0"/>
           </a:p>
         </p:txBody>
       </p:sp>
@@ -16972,8 +16978,8 @@
         </p:nvSpPr>
         <p:spPr>
           <a:xfrm>
-            <a:off x="7799832" y="1801368"/>
-            <a:ext cx="3145536" cy="688543"/>
+            <a:off x="7708392" y="1764792"/>
+            <a:ext cx="3282696" cy="749808"/>
           </a:xfrm>
           <a:prstGeom prst="rect">
             <a:avLst/>
@@ -16991,7 +16997,7 @@
               <a:buNone/>
             </a:pPr>
             <a:r>
-              <a:rPr lang="en-US" sz="1320" dirty="0">
+              <a:rPr lang="en-US" sz="1220" dirty="0">
                 <a:solidFill>
                   <a:srgbClr val="17364A"/>
                 </a:solidFill>
@@ -16999,9 +17005,9 @@
                 <a:ea typeface="Aptos" pitchFamily="34" charset="-122"/>
                 <a:cs typeface="Aptos" pitchFamily="34" charset="-120"/>
               </a:rPr>
-              <a:t>A public health agency is preparing to use AI in a workflow related to using AI to support signal.</a:t>
-            </a:r>
-            <a:endParaRPr lang="en-US" sz="1320" dirty="0"/>
+              <a:t>A public health agency is preparing to use AI in a workflow related to using AI.</a:t>
+            </a:r>
+            <a:endParaRPr lang="en-US" sz="1220" dirty="0"/>
           </a:p>
         </p:txBody>
       </p:sp>
@@ -17013,12 +17019,12 @@
         </p:nvSpPr>
         <p:spPr>
           <a:xfrm>
-            <a:off x="7635240" y="2718511"/>
-            <a:ext cx="3474720" cy="1328623"/>
+            <a:off x="7543800" y="2724912"/>
+            <a:ext cx="3611880" cy="1527048"/>
           </a:xfrm>
           <a:prstGeom prst="roundRect">
             <a:avLst>
-              <a:gd name="adj" fmla="val 8259"/>
+              <a:gd name="adj" fmla="val 7186"/>
             </a:avLst>
           </a:prstGeom>
           <a:solidFill>
@@ -17040,8 +17046,8 @@
         </p:nvSpPr>
         <p:spPr>
           <a:xfrm>
-            <a:off x="7799832" y="2864815"/>
-            <a:ext cx="3145536" cy="256032"/>
+            <a:off x="7708392" y="2852928"/>
+            <a:ext cx="3282696" cy="228600"/>
           </a:xfrm>
           <a:prstGeom prst="rect">
             <a:avLst/>
@@ -17057,7 +17063,7 @@
               <a:buNone/>
             </a:pPr>
             <a:r>
-              <a:rPr lang="en-US" sz="1300" b="1" dirty="0">
+              <a:rPr lang="en-US" sz="1220" b="1" dirty="0">
                 <a:solidFill>
                   <a:srgbClr val="0068B7"/>
                 </a:solidFill>
@@ -17067,7 +17073,7 @@
               </a:rPr>
               <a:t>Concept checkpoints</a:t>
             </a:r>
-            <a:endParaRPr lang="en-US" sz="1300" dirty="0"/>
+            <a:endParaRPr lang="en-US" sz="1220" dirty="0"/>
           </a:p>
         </p:txBody>
       </p:sp>
@@ -17079,8 +17085,8 @@
         </p:nvSpPr>
         <p:spPr>
           <a:xfrm>
-            <a:off x="7818120" y="3230575"/>
-            <a:ext cx="3090672" cy="670255"/>
+            <a:off x="7726680" y="3182112"/>
+            <a:ext cx="3227832" cy="960120"/>
           </a:xfrm>
           <a:prstGeom prst="rect">
             <a:avLst/>
@@ -17098,7 +17104,7 @@
               <a:buNone/>
             </a:pPr>
             <a:r>
-              <a:rPr lang="en-US" sz="1220" dirty="0">
+              <a:rPr lang="en-US" sz="1140" dirty="0">
                 <a:solidFill>
                   <a:srgbClr val="17364A"/>
                 </a:solidFill>
@@ -17106,16 +17112,16 @@
                 <a:ea typeface="Aptos" pitchFamily="34" charset="-122"/>
                 <a:cs typeface="Aptos" pitchFamily="34" charset="-120"/>
               </a:rPr>
-              <a:t>A public health agency is preparing to use AI in a workflow.</a:t>
-            </a:r>
-            <a:endParaRPr lang="en-US" sz="1220" dirty="0"/>
-          </a:p>
-          <a:p>
-            <a:pPr indent="0" marL="0">
-              <a:buNone/>
-            </a:pPr>
-            <a:r>
-              <a:rPr lang="en-US" sz="1220" dirty="0">
+              <a:t>A public health agency is preparing to use AI in a.</a:t>
+            </a:r>
+            <a:endParaRPr lang="en-US" sz="1140" dirty="0"/>
+          </a:p>
+          <a:p>
+            <a:pPr indent="0" marL="0">
+              <a:buNone/>
+            </a:pPr>
+            <a:r>
+              <a:rPr lang="en-US" sz="1140" dirty="0">
                 <a:solidFill>
                   <a:srgbClr val="17364A"/>
                 </a:solidFill>
@@ -17123,16 +17129,16 @@
                 <a:ea typeface="Aptos" pitchFamily="34" charset="-122"/>
                 <a:cs typeface="Aptos" pitchFamily="34" charset="-120"/>
               </a:rPr>
-              <a:t>The project team initially treats the tool as a helpful efficiency.</a:t>
-            </a:r>
-            <a:endParaRPr lang="en-US" sz="1220" dirty="0"/>
-          </a:p>
-          <a:p>
-            <a:pPr indent="0" marL="0">
-              <a:buNone/>
-            </a:pPr>
-            <a:r>
-              <a:rPr lang="en-US" sz="1220" dirty="0">
+              <a:t>The project team initially treats the tool as a.</a:t>
+            </a:r>
+            <a:endParaRPr lang="en-US" sz="1140" dirty="0"/>
+          </a:p>
+          <a:p>
+            <a:pPr indent="0" marL="0">
+              <a:buNone/>
+            </a:pPr>
+            <a:r>
+              <a:rPr lang="en-US" sz="1140" dirty="0">
                 <a:solidFill>
                   <a:srgbClr val="17364A"/>
                 </a:solidFill>
@@ -17140,9 +17146,9 @@
                 <a:ea typeface="Aptos" pitchFamily="34" charset="-122"/>
                 <a:cs typeface="Aptos" pitchFamily="34" charset="-120"/>
               </a:rPr>
-              <a:t>The agency responds by creating a clear artifact that defines.</a:t>
-            </a:r>
-            <a:endParaRPr lang="en-US" sz="1220" dirty="0"/>
+              <a:t>The agency responds by creating a clear artifact.</a:t>
+            </a:r>
+            <a:endParaRPr lang="en-US" sz="1140" dirty="0"/>
           </a:p>
         </p:txBody>
       </p:sp>
@@ -17154,12 +17160,12 @@
         </p:nvSpPr>
         <p:spPr>
           <a:xfrm>
-            <a:off x="7635240" y="4184294"/>
-            <a:ext cx="3474720" cy="1466698"/>
+            <a:off x="7543800" y="4389120"/>
+            <a:ext cx="3611880" cy="1261872"/>
           </a:xfrm>
           <a:prstGeom prst="roundRect">
             <a:avLst>
-              <a:gd name="adj" fmla="val 7481"/>
+              <a:gd name="adj" fmla="val 8696"/>
             </a:avLst>
           </a:prstGeom>
           <a:solidFill>
@@ -17181,8 +17187,8 @@
         </p:nvSpPr>
         <p:spPr>
           <a:xfrm>
-            <a:off x="7799832" y="4330598"/>
-            <a:ext cx="3145536" cy="256032"/>
+            <a:off x="7708392" y="4517136"/>
+            <a:ext cx="3282696" cy="228600"/>
           </a:xfrm>
           <a:prstGeom prst="rect">
             <a:avLst/>
@@ -17198,7 +17204,7 @@
               <a:buNone/>
             </a:pPr>
             <a:r>
-              <a:rPr lang="en-US" sz="1300" b="1" dirty="0">
+              <a:rPr lang="en-US" sz="1220" b="1" dirty="0">
                 <a:solidFill>
                   <a:srgbClr val="0068B7"/>
                 </a:solidFill>
@@ -17208,7 +17214,7 @@
               </a:rPr>
               <a:t>Apply it</a:t>
             </a:r>
-            <a:endParaRPr lang="en-US" sz="1300" dirty="0"/>
+            <a:endParaRPr lang="en-US" sz="1220" dirty="0"/>
           </a:p>
         </p:txBody>
       </p:sp>
@@ -17220,8 +17226,8 @@
         </p:nvSpPr>
         <p:spPr>
           <a:xfrm>
-            <a:off x="7799832" y="4659782"/>
-            <a:ext cx="3145536" cy="899770"/>
+            <a:off x="7708392" y="4828032"/>
+            <a:ext cx="3282696" cy="749808"/>
           </a:xfrm>
           <a:prstGeom prst="rect">
             <a:avLst/>
@@ -17239,7 +17245,7 @@
               <a:buNone/>
             </a:pPr>
             <a:r>
-              <a:rPr lang="en-US" sz="1320" dirty="0">
+              <a:rPr lang="en-US" sz="1220" dirty="0">
                 <a:solidFill>
                   <a:srgbClr val="17364A"/>
                 </a:solidFill>
@@ -17247,9 +17253,9 @@
                 <a:ea typeface="Aptos" pitchFamily="34" charset="-122"/>
                 <a:cs typeface="Aptos" pitchFamily="34" charset="-120"/>
               </a:rPr>
-              <a:t>Connect the concept to public health purpose, responsible use, required safeguards, documentation, and the next action a department should take.</a:t>
-            </a:r>
-            <a:endParaRPr lang="en-US" sz="1320" dirty="0"/>
+              <a:t>Connect the concept to public health purpose, responsible use, required.</a:t>
+            </a:r>
+            <a:endParaRPr lang="en-US" sz="1220" dirty="0"/>
           </a:p>
         </p:txBody>
       </p:sp>

--- a/downloads/presentations/modules/epi-310.pptx
+++ b/downloads/presentations/modules/epi-310.pptx
@@ -9727,7 +9727,7 @@
                 <a:ea typeface="Aptos" pitchFamily="34" charset="-122"/>
                 <a:cs typeface="Aptos" pitchFamily="34" charset="-120"/>
               </a:rPr>
-              <a:t>• 1. What is the strongest evidence that ai for surveillance signal review and.</a:t>
+              <a:t>1. What is the strongest evidence that ai for surveillance signal review and.</a:t>
             </a:r>
             <a:endParaRPr lang="en-US" sz="1920" dirty="0"/>
           </a:p>
@@ -9744,7 +9744,7 @@
                 <a:ea typeface="Aptos" pitchFamily="34" charset="-122"/>
                 <a:cs typeface="Aptos" pitchFamily="34" charset="-120"/>
               </a:rPr>
-              <a:t>• 2. What is the best reason to assign an accountability owner?</a:t>
+              <a:t>2. What is the best reason to assign an accountability owner?</a:t>
             </a:r>
             <a:endParaRPr lang="en-US" sz="1920" dirty="0"/>
           </a:p>
@@ -9761,7 +9761,7 @@
                 <a:ea typeface="Aptos" pitchFamily="34" charset="-122"/>
                 <a:cs typeface="Aptos" pitchFamily="34" charset="-120"/>
               </a:rPr>
-              <a:t>• 3. When should an AI-supported workflow be escalated for review?</a:t>
+              <a:t>3. When should an AI-supported workflow be escalated for review?</a:t>
             </a:r>
             <a:endParaRPr lang="en-US" sz="1920" dirty="0"/>
           </a:p>
@@ -9868,7 +9868,7 @@
                 <a:ea typeface="Aptos" pitchFamily="34" charset="-122"/>
                 <a:cs typeface="Aptos" pitchFamily="34" charset="-120"/>
               </a:rPr>
-              <a:t>1. What is the strongest evidence that ai for surveillance signal review and.</a:t>
+              <a:t>What is the strongest evidence that ai for surveillance signal review and.</a:t>
             </a:r>
             <a:endParaRPr lang="en-US" sz="1220" dirty="0"/>
           </a:p>
@@ -9975,41 +9975,7 @@
                 <a:ea typeface="Aptos" pitchFamily="34" charset="-122"/>
                 <a:cs typeface="Aptos" pitchFamily="34" charset="-120"/>
               </a:rPr>
-              <a:t>1.</a:t>
-            </a:r>
-            <a:endParaRPr lang="en-US" sz="1140" dirty="0"/>
-          </a:p>
-          <a:p>
-            <a:pPr indent="0" marL="0">
-              <a:buNone/>
-            </a:pPr>
-            <a:r>
-              <a:rPr lang="en-US" sz="1140" dirty="0">
-                <a:solidFill>
-                  <a:srgbClr val="17364A"/>
-                </a:solidFill>
-                <a:latin typeface="Aptos" pitchFamily="34" charset="0"/>
-                <a:ea typeface="Aptos" pitchFamily="34" charset="-122"/>
-                <a:cs typeface="Aptos" pitchFamily="34" charset="-120"/>
-              </a:rPr>
               <a:t>What is the strongest evidence that ai for.</a:t>
-            </a:r>
-            <a:endParaRPr lang="en-US" sz="1140" dirty="0"/>
-          </a:p>
-          <a:p>
-            <a:pPr indent="0" marL="0">
-              <a:buNone/>
-            </a:pPr>
-            <a:r>
-              <a:rPr lang="en-US" sz="1140" dirty="0">
-                <a:solidFill>
-                  <a:srgbClr val="17364A"/>
-                </a:solidFill>
-                <a:latin typeface="Aptos" pitchFamily="34" charset="0"/>
-                <a:ea typeface="Aptos" pitchFamily="34" charset="-122"/>
-                <a:cs typeface="Aptos" pitchFamily="34" charset="-120"/>
-              </a:rPr>
-              <a:t>2.</a:t>
             </a:r>
             <a:endParaRPr lang="en-US" sz="1140" dirty="0"/>
           </a:p>
